--- a/progress/ClassPresentation.pptx
+++ b/progress/ClassPresentation.pptx
@@ -113,7 +113,3174 @@
       </a:defRPr>
     </a:lvl9pPr>
   </p:defaultTextStyle>
+  <p:extLst>
+    <p:ext uri="{EFAFB233-063F-42B5-8137-9DF3F51BA10A}">
+      <p15:sldGuideLst xmlns:p15="http://schemas.microsoft.com/office/powerpoint/2012/main"/>
+    </p:ext>
+  </p:extLst>
 </p:presentation>
+</file>
+
+<file path=ppt/diagrams/colors1.xml><?xml version="1.0" encoding="utf-8"?>
+<dgm:colorsDef xmlns:dgm="http://schemas.openxmlformats.org/drawingml/2006/diagram" xmlns:a="http://schemas.openxmlformats.org/drawingml/2006/main" uniqueId="urn:microsoft.com/office/officeart/2005/8/colors/colorful1">
+  <dgm:title val=""/>
+  <dgm:desc val=""/>
+  <dgm:catLst>
+    <dgm:cat type="colorful" pri="10100"/>
+  </dgm:catLst>
+  <dgm:styleLbl name="node0">
+    <dgm:fillClrLst meth="repeat">
+      <a:schemeClr val="accent1"/>
+    </dgm:fillClrLst>
+    <dgm:linClrLst meth="repeat">
+      <a:schemeClr val="lt1"/>
+    </dgm:linClrLst>
+    <dgm:effectClrLst/>
+    <dgm:txLinClrLst/>
+    <dgm:txFillClrLst/>
+    <dgm:txEffectClrLst/>
+  </dgm:styleLbl>
+  <dgm:styleLbl name="node1">
+    <dgm:fillClrLst meth="repeat">
+      <a:schemeClr val="accent2"/>
+      <a:schemeClr val="accent3"/>
+      <a:schemeClr val="accent4"/>
+      <a:schemeClr val="accent5"/>
+      <a:schemeClr val="accent6"/>
+    </dgm:fillClrLst>
+    <dgm:linClrLst meth="repeat">
+      <a:schemeClr val="lt1"/>
+    </dgm:linClrLst>
+    <dgm:effectClrLst/>
+    <dgm:txLinClrLst/>
+    <dgm:txFillClrLst/>
+    <dgm:txEffectClrLst/>
+  </dgm:styleLbl>
+  <dgm:styleLbl name="alignNode1">
+    <dgm:fillClrLst meth="repeat">
+      <a:schemeClr val="accent2"/>
+      <a:schemeClr val="accent3"/>
+      <a:schemeClr val="accent4"/>
+      <a:schemeClr val="accent5"/>
+      <a:schemeClr val="accent6"/>
+    </dgm:fillClrLst>
+    <dgm:linClrLst meth="repeat">
+      <a:schemeClr val="accent2"/>
+      <a:schemeClr val="accent3"/>
+      <a:schemeClr val="accent4"/>
+      <a:schemeClr val="accent5"/>
+      <a:schemeClr val="accent6"/>
+    </dgm:linClrLst>
+    <dgm:effectClrLst/>
+    <dgm:txLinClrLst/>
+    <dgm:txFillClrLst/>
+    <dgm:txEffectClrLst/>
+  </dgm:styleLbl>
+  <dgm:styleLbl name="lnNode1">
+    <dgm:fillClrLst meth="repeat">
+      <a:schemeClr val="accent2"/>
+      <a:schemeClr val="accent3"/>
+      <a:schemeClr val="accent4"/>
+      <a:schemeClr val="accent5"/>
+      <a:schemeClr val="accent6"/>
+    </dgm:fillClrLst>
+    <dgm:linClrLst meth="repeat">
+      <a:schemeClr val="lt1"/>
+    </dgm:linClrLst>
+    <dgm:effectClrLst/>
+    <dgm:txLinClrLst/>
+    <dgm:txFillClrLst/>
+    <dgm:txEffectClrLst/>
+  </dgm:styleLbl>
+  <dgm:styleLbl name="vennNode1">
+    <dgm:fillClrLst meth="repeat">
+      <a:schemeClr val="accent2">
+        <a:alpha val="50000"/>
+      </a:schemeClr>
+      <a:schemeClr val="accent3">
+        <a:alpha val="50000"/>
+      </a:schemeClr>
+      <a:schemeClr val="accent4">
+        <a:alpha val="50000"/>
+      </a:schemeClr>
+      <a:schemeClr val="accent5">
+        <a:alpha val="50000"/>
+      </a:schemeClr>
+      <a:schemeClr val="accent6">
+        <a:alpha val="50000"/>
+      </a:schemeClr>
+    </dgm:fillClrLst>
+    <dgm:linClrLst meth="repeat">
+      <a:schemeClr val="lt1"/>
+    </dgm:linClrLst>
+    <dgm:effectClrLst/>
+    <dgm:txLinClrLst/>
+    <dgm:txFillClrLst/>
+    <dgm:txEffectClrLst/>
+  </dgm:styleLbl>
+  <dgm:styleLbl name="node2">
+    <dgm:fillClrLst>
+      <a:schemeClr val="accent2"/>
+    </dgm:fillClrLst>
+    <dgm:linClrLst meth="repeat">
+      <a:schemeClr val="lt1"/>
+    </dgm:linClrLst>
+    <dgm:effectClrLst/>
+    <dgm:txLinClrLst/>
+    <dgm:txFillClrLst/>
+    <dgm:txEffectClrLst/>
+  </dgm:styleLbl>
+  <dgm:styleLbl name="node3">
+    <dgm:fillClrLst>
+      <a:schemeClr val="accent3"/>
+    </dgm:fillClrLst>
+    <dgm:linClrLst meth="repeat">
+      <a:schemeClr val="lt1"/>
+    </dgm:linClrLst>
+    <dgm:effectClrLst/>
+    <dgm:txLinClrLst/>
+    <dgm:txFillClrLst/>
+    <dgm:txEffectClrLst/>
+  </dgm:styleLbl>
+  <dgm:styleLbl name="node4">
+    <dgm:fillClrLst>
+      <a:schemeClr val="accent4"/>
+    </dgm:fillClrLst>
+    <dgm:linClrLst meth="repeat">
+      <a:schemeClr val="lt1"/>
+    </dgm:linClrLst>
+    <dgm:effectClrLst/>
+    <dgm:txLinClrLst/>
+    <dgm:txFillClrLst/>
+    <dgm:txEffectClrLst/>
+  </dgm:styleLbl>
+  <dgm:styleLbl name="fgImgPlace1">
+    <dgm:fillClrLst meth="repeat">
+      <a:schemeClr val="accent2">
+        <a:tint val="50000"/>
+      </a:schemeClr>
+      <a:schemeClr val="accent3">
+        <a:tint val="50000"/>
+      </a:schemeClr>
+      <a:schemeClr val="accent4">
+        <a:tint val="50000"/>
+      </a:schemeClr>
+      <a:schemeClr val="accent5">
+        <a:tint val="50000"/>
+      </a:schemeClr>
+      <a:schemeClr val="accent6">
+        <a:tint val="50000"/>
+      </a:schemeClr>
+    </dgm:fillClrLst>
+    <dgm:linClrLst meth="repeat">
+      <a:schemeClr val="lt1"/>
+    </dgm:linClrLst>
+    <dgm:effectClrLst/>
+    <dgm:txLinClrLst/>
+    <dgm:txFillClrLst meth="repeat">
+      <a:schemeClr val="lt1"/>
+    </dgm:txFillClrLst>
+    <dgm:txEffectClrLst/>
+  </dgm:styleLbl>
+  <dgm:styleLbl name="alignImgPlace1">
+    <dgm:fillClrLst>
+      <a:schemeClr val="accent1">
+        <a:tint val="50000"/>
+      </a:schemeClr>
+      <a:schemeClr val="accent2">
+        <a:tint val="20000"/>
+      </a:schemeClr>
+    </dgm:fillClrLst>
+    <dgm:linClrLst meth="repeat">
+      <a:schemeClr val="lt1"/>
+    </dgm:linClrLst>
+    <dgm:effectClrLst/>
+    <dgm:txLinClrLst/>
+    <dgm:txFillClrLst meth="repeat">
+      <a:schemeClr val="lt1"/>
+    </dgm:txFillClrLst>
+    <dgm:txEffectClrLst/>
+  </dgm:styleLbl>
+  <dgm:styleLbl name="bgImgPlace1">
+    <dgm:fillClrLst>
+      <a:schemeClr val="accent1">
+        <a:tint val="50000"/>
+      </a:schemeClr>
+      <a:schemeClr val="accent2">
+        <a:tint val="20000"/>
+      </a:schemeClr>
+    </dgm:fillClrLst>
+    <dgm:linClrLst meth="repeat">
+      <a:schemeClr val="lt1"/>
+    </dgm:linClrLst>
+    <dgm:effectClrLst/>
+    <dgm:txLinClrLst/>
+    <dgm:txFillClrLst meth="repeat">
+      <a:schemeClr val="lt1"/>
+    </dgm:txFillClrLst>
+    <dgm:txEffectClrLst/>
+  </dgm:styleLbl>
+  <dgm:styleLbl name="sibTrans2D1">
+    <dgm:fillClrLst meth="repeat">
+      <a:schemeClr val="accent2"/>
+      <a:schemeClr val="accent3"/>
+      <a:schemeClr val="accent4"/>
+      <a:schemeClr val="accent5"/>
+      <a:schemeClr val="accent6"/>
+    </dgm:fillClrLst>
+    <dgm:linClrLst meth="cycle">
+      <a:schemeClr val="lt1"/>
+    </dgm:linClrLst>
+    <dgm:effectClrLst/>
+    <dgm:txLinClrLst/>
+    <dgm:txFillClrLst/>
+    <dgm:txEffectClrLst/>
+  </dgm:styleLbl>
+  <dgm:styleLbl name="fgSibTrans2D1">
+    <dgm:fillClrLst meth="repeat">
+      <a:schemeClr val="accent2"/>
+      <a:schemeClr val="accent3"/>
+      <a:schemeClr val="accent4"/>
+      <a:schemeClr val="accent5"/>
+      <a:schemeClr val="accent6"/>
+    </dgm:fillClrLst>
+    <dgm:linClrLst meth="cycle">
+      <a:schemeClr val="lt1"/>
+    </dgm:linClrLst>
+    <dgm:effectClrLst/>
+    <dgm:txLinClrLst/>
+    <dgm:txFillClrLst meth="repeat">
+      <a:schemeClr val="lt1"/>
+    </dgm:txFillClrLst>
+    <dgm:txEffectClrLst/>
+  </dgm:styleLbl>
+  <dgm:styleLbl name="bgSibTrans2D1">
+    <dgm:fillClrLst meth="repeat">
+      <a:schemeClr val="accent2"/>
+      <a:schemeClr val="accent3"/>
+      <a:schemeClr val="accent4"/>
+      <a:schemeClr val="accent5"/>
+      <a:schemeClr val="accent6"/>
+    </dgm:fillClrLst>
+    <dgm:linClrLst meth="cycle">
+      <a:schemeClr val="lt1"/>
+    </dgm:linClrLst>
+    <dgm:effectClrLst/>
+    <dgm:txLinClrLst/>
+    <dgm:txFillClrLst meth="repeat">
+      <a:schemeClr val="lt1"/>
+    </dgm:txFillClrLst>
+    <dgm:txEffectClrLst/>
+  </dgm:styleLbl>
+  <dgm:styleLbl name="sibTrans1D1">
+    <dgm:fillClrLst meth="repeat">
+      <a:schemeClr val="accent2"/>
+      <a:schemeClr val="accent3"/>
+      <a:schemeClr val="accent4"/>
+      <a:schemeClr val="accent5"/>
+      <a:schemeClr val="accent6"/>
+    </dgm:fillClrLst>
+    <dgm:linClrLst meth="repeat">
+      <a:schemeClr val="accent2"/>
+      <a:schemeClr val="accent3"/>
+      <a:schemeClr val="accent4"/>
+      <a:schemeClr val="accent5"/>
+      <a:schemeClr val="accent6"/>
+    </dgm:linClrLst>
+    <dgm:effectClrLst/>
+    <dgm:txLinClrLst/>
+    <dgm:txFillClrLst meth="repeat">
+      <a:schemeClr val="tx1"/>
+    </dgm:txFillClrLst>
+    <dgm:txEffectClrLst/>
+  </dgm:styleLbl>
+  <dgm:styleLbl name="callout">
+    <dgm:fillClrLst meth="repeat">
+      <a:schemeClr val="accent2"/>
+    </dgm:fillClrLst>
+    <dgm:linClrLst meth="repeat">
+      <a:schemeClr val="accent2">
+        <a:tint val="50000"/>
+      </a:schemeClr>
+    </dgm:linClrLst>
+    <dgm:effectClrLst/>
+    <dgm:txLinClrLst/>
+    <dgm:txFillClrLst meth="repeat">
+      <a:schemeClr val="tx1"/>
+    </dgm:txFillClrLst>
+    <dgm:txEffectClrLst/>
+  </dgm:styleLbl>
+  <dgm:styleLbl name="asst0">
+    <dgm:fillClrLst meth="repeat">
+      <a:schemeClr val="accent1"/>
+    </dgm:fillClrLst>
+    <dgm:linClrLst meth="repeat">
+      <a:schemeClr val="lt1"/>
+    </dgm:linClrLst>
+    <dgm:effectClrLst/>
+    <dgm:txLinClrLst/>
+    <dgm:txFillClrLst/>
+    <dgm:txEffectClrLst/>
+  </dgm:styleLbl>
+  <dgm:styleLbl name="asst1">
+    <dgm:fillClrLst meth="repeat">
+      <a:schemeClr val="accent2"/>
+    </dgm:fillClrLst>
+    <dgm:linClrLst meth="repeat">
+      <a:schemeClr val="lt1"/>
+    </dgm:linClrLst>
+    <dgm:effectClrLst/>
+    <dgm:txLinClrLst/>
+    <dgm:txFillClrLst/>
+    <dgm:txEffectClrLst/>
+  </dgm:styleLbl>
+  <dgm:styleLbl name="asst2">
+    <dgm:fillClrLst>
+      <a:schemeClr val="accent3"/>
+    </dgm:fillClrLst>
+    <dgm:linClrLst meth="repeat">
+      <a:schemeClr val="lt1"/>
+    </dgm:linClrLst>
+    <dgm:effectClrLst/>
+    <dgm:txLinClrLst/>
+    <dgm:txFillClrLst/>
+    <dgm:txEffectClrLst/>
+  </dgm:styleLbl>
+  <dgm:styleLbl name="asst3">
+    <dgm:fillClrLst>
+      <a:schemeClr val="accent4"/>
+    </dgm:fillClrLst>
+    <dgm:linClrLst meth="repeat">
+      <a:schemeClr val="lt1"/>
+    </dgm:linClrLst>
+    <dgm:effectClrLst/>
+    <dgm:txLinClrLst/>
+    <dgm:txFillClrLst/>
+    <dgm:txEffectClrLst/>
+  </dgm:styleLbl>
+  <dgm:styleLbl name="asst4">
+    <dgm:fillClrLst>
+      <a:schemeClr val="accent5"/>
+    </dgm:fillClrLst>
+    <dgm:linClrLst meth="repeat">
+      <a:schemeClr val="lt1"/>
+    </dgm:linClrLst>
+    <dgm:effectClrLst/>
+    <dgm:txLinClrLst/>
+    <dgm:txFillClrLst/>
+    <dgm:txEffectClrLst/>
+  </dgm:styleLbl>
+  <dgm:styleLbl name="parChTrans2D1">
+    <dgm:fillClrLst meth="repeat">
+      <a:schemeClr val="accent2"/>
+    </dgm:fillClrLst>
+    <dgm:linClrLst meth="repeat">
+      <a:schemeClr val="lt1"/>
+    </dgm:linClrLst>
+    <dgm:effectClrLst/>
+    <dgm:txLinClrLst/>
+    <dgm:txFillClrLst meth="repeat">
+      <a:schemeClr val="lt1"/>
+    </dgm:txFillClrLst>
+    <dgm:txEffectClrLst/>
+  </dgm:styleLbl>
+  <dgm:styleLbl name="parChTrans2D2">
+    <dgm:fillClrLst meth="repeat">
+      <a:schemeClr val="accent3"/>
+    </dgm:fillClrLst>
+    <dgm:linClrLst meth="repeat">
+      <a:schemeClr val="lt1"/>
+    </dgm:linClrLst>
+    <dgm:effectClrLst/>
+    <dgm:txLinClrLst/>
+    <dgm:txFillClrLst/>
+    <dgm:txEffectClrLst/>
+  </dgm:styleLbl>
+  <dgm:styleLbl name="parChTrans2D3">
+    <dgm:fillClrLst meth="repeat">
+      <a:schemeClr val="accent4"/>
+    </dgm:fillClrLst>
+    <dgm:linClrLst meth="repeat">
+      <a:schemeClr val="lt1"/>
+    </dgm:linClrLst>
+    <dgm:effectClrLst/>
+    <dgm:txLinClrLst/>
+    <dgm:txFillClrLst/>
+    <dgm:txEffectClrLst/>
+  </dgm:styleLbl>
+  <dgm:styleLbl name="parChTrans2D4">
+    <dgm:fillClrLst meth="repeat">
+      <a:schemeClr val="accent5"/>
+    </dgm:fillClrLst>
+    <dgm:linClrLst meth="repeat">
+      <a:schemeClr val="lt1"/>
+    </dgm:linClrLst>
+    <dgm:effectClrLst/>
+    <dgm:txLinClrLst/>
+    <dgm:txFillClrLst meth="repeat">
+      <a:schemeClr val="lt1"/>
+    </dgm:txFillClrLst>
+    <dgm:txEffectClrLst/>
+  </dgm:styleLbl>
+  <dgm:styleLbl name="parChTrans1D1">
+    <dgm:fillClrLst meth="repeat">
+      <a:schemeClr val="accent2"/>
+    </dgm:fillClrLst>
+    <dgm:linClrLst meth="repeat">
+      <a:schemeClr val="accent1"/>
+    </dgm:linClrLst>
+    <dgm:effectClrLst/>
+    <dgm:txLinClrLst/>
+    <dgm:txFillClrLst meth="repeat">
+      <a:schemeClr val="tx1"/>
+    </dgm:txFillClrLst>
+    <dgm:txEffectClrLst/>
+  </dgm:styleLbl>
+  <dgm:styleLbl name="parChTrans1D2">
+    <dgm:fillClrLst meth="repeat">
+      <a:schemeClr val="accent3">
+        <a:tint val="90000"/>
+      </a:schemeClr>
+    </dgm:fillClrLst>
+    <dgm:linClrLst meth="repeat">
+      <a:schemeClr val="accent2"/>
+    </dgm:linClrLst>
+    <dgm:effectClrLst/>
+    <dgm:txLinClrLst/>
+    <dgm:txFillClrLst meth="repeat">
+      <a:schemeClr val="tx1"/>
+    </dgm:txFillClrLst>
+    <dgm:txEffectClrLst/>
+  </dgm:styleLbl>
+  <dgm:styleLbl name="parChTrans1D3">
+    <dgm:fillClrLst meth="repeat">
+      <a:schemeClr val="accent4">
+        <a:tint val="70000"/>
+      </a:schemeClr>
+    </dgm:fillClrLst>
+    <dgm:linClrLst meth="repeat">
+      <a:schemeClr val="accent3"/>
+    </dgm:linClrLst>
+    <dgm:effectClrLst/>
+    <dgm:txLinClrLst/>
+    <dgm:txFillClrLst meth="repeat">
+      <a:schemeClr val="tx1"/>
+    </dgm:txFillClrLst>
+    <dgm:txEffectClrLst/>
+  </dgm:styleLbl>
+  <dgm:styleLbl name="parChTrans1D4">
+    <dgm:fillClrLst meth="repeat">
+      <a:schemeClr val="accent5">
+        <a:tint val="50000"/>
+      </a:schemeClr>
+    </dgm:fillClrLst>
+    <dgm:linClrLst meth="repeat">
+      <a:schemeClr val="accent4"/>
+    </dgm:linClrLst>
+    <dgm:effectClrLst/>
+    <dgm:txLinClrLst/>
+    <dgm:txFillClrLst meth="repeat">
+      <a:schemeClr val="tx1"/>
+    </dgm:txFillClrLst>
+    <dgm:txEffectClrLst/>
+  </dgm:styleLbl>
+  <dgm:styleLbl name="fgAcc1">
+    <dgm:fillClrLst meth="repeat">
+      <a:schemeClr val="lt1">
+        <a:alpha val="90000"/>
+      </a:schemeClr>
+    </dgm:fillClrLst>
+    <dgm:linClrLst meth="repeat">
+      <a:schemeClr val="accent2"/>
+      <a:schemeClr val="accent3"/>
+      <a:schemeClr val="accent4"/>
+      <a:schemeClr val="accent5"/>
+      <a:schemeClr val="accent6"/>
+    </dgm:linClrLst>
+    <dgm:effectClrLst/>
+    <dgm:txLinClrLst/>
+    <dgm:txFillClrLst meth="repeat">
+      <a:schemeClr val="dk1"/>
+    </dgm:txFillClrLst>
+    <dgm:txEffectClrLst/>
+  </dgm:styleLbl>
+  <dgm:styleLbl name="conFgAcc1">
+    <dgm:fillClrLst meth="repeat">
+      <a:schemeClr val="lt1">
+        <a:alpha val="90000"/>
+      </a:schemeClr>
+    </dgm:fillClrLst>
+    <dgm:linClrLst meth="repeat">
+      <a:schemeClr val="accent2"/>
+      <a:schemeClr val="accent3"/>
+      <a:schemeClr val="accent4"/>
+      <a:schemeClr val="accent5"/>
+      <a:schemeClr val="accent6"/>
+    </dgm:linClrLst>
+    <dgm:effectClrLst/>
+    <dgm:txLinClrLst/>
+    <dgm:txFillClrLst meth="repeat">
+      <a:schemeClr val="dk1"/>
+    </dgm:txFillClrLst>
+    <dgm:txEffectClrLst/>
+  </dgm:styleLbl>
+  <dgm:styleLbl name="alignAcc1">
+    <dgm:fillClrLst meth="repeat">
+      <a:schemeClr val="lt1">
+        <a:alpha val="90000"/>
+      </a:schemeClr>
+    </dgm:fillClrLst>
+    <dgm:linClrLst meth="repeat">
+      <a:schemeClr val="accent2"/>
+      <a:schemeClr val="accent3"/>
+      <a:schemeClr val="accent4"/>
+      <a:schemeClr val="accent5"/>
+      <a:schemeClr val="accent6"/>
+    </dgm:linClrLst>
+    <dgm:effectClrLst/>
+    <dgm:txLinClrLst/>
+    <dgm:txFillClrLst meth="repeat">
+      <a:schemeClr val="dk1"/>
+    </dgm:txFillClrLst>
+    <dgm:txEffectClrLst/>
+  </dgm:styleLbl>
+  <dgm:styleLbl name="trAlignAcc1">
+    <dgm:fillClrLst meth="repeat">
+      <a:schemeClr val="lt1">
+        <a:alpha val="40000"/>
+      </a:schemeClr>
+    </dgm:fillClrLst>
+    <dgm:linClrLst meth="repeat">
+      <a:schemeClr val="accent1"/>
+    </dgm:linClrLst>
+    <dgm:effectClrLst/>
+    <dgm:txLinClrLst/>
+    <dgm:txFillClrLst meth="repeat">
+      <a:schemeClr val="dk1"/>
+    </dgm:txFillClrLst>
+    <dgm:txEffectClrLst/>
+  </dgm:styleLbl>
+  <dgm:styleLbl name="bgAcc1">
+    <dgm:fillClrLst meth="repeat">
+      <a:schemeClr val="lt1">
+        <a:alpha val="90000"/>
+      </a:schemeClr>
+    </dgm:fillClrLst>
+    <dgm:linClrLst meth="repeat">
+      <a:schemeClr val="accent2"/>
+      <a:schemeClr val="accent3"/>
+      <a:schemeClr val="accent4"/>
+      <a:schemeClr val="accent5"/>
+      <a:schemeClr val="accent6"/>
+    </dgm:linClrLst>
+    <dgm:effectClrLst/>
+    <dgm:txLinClrLst/>
+    <dgm:txFillClrLst meth="repeat">
+      <a:schemeClr val="dk1"/>
+    </dgm:txFillClrLst>
+    <dgm:txEffectClrLst/>
+  </dgm:styleLbl>
+  <dgm:styleLbl name="solidFgAcc1">
+    <dgm:fillClrLst meth="repeat">
+      <a:schemeClr val="lt1"/>
+    </dgm:fillClrLst>
+    <dgm:linClrLst meth="repeat">
+      <a:schemeClr val="accent2"/>
+      <a:schemeClr val="accent3"/>
+      <a:schemeClr val="accent4"/>
+      <a:schemeClr val="accent5"/>
+      <a:schemeClr val="accent6"/>
+    </dgm:linClrLst>
+    <dgm:effectClrLst/>
+    <dgm:txLinClrLst/>
+    <dgm:txFillClrLst meth="repeat">
+      <a:schemeClr val="dk1"/>
+    </dgm:txFillClrLst>
+    <dgm:txEffectClrLst/>
+  </dgm:styleLbl>
+  <dgm:styleLbl name="solidAlignAcc1">
+    <dgm:fillClrLst meth="repeat">
+      <a:schemeClr val="lt1"/>
+    </dgm:fillClrLst>
+    <dgm:linClrLst meth="repeat">
+      <a:schemeClr val="accent2"/>
+      <a:schemeClr val="accent3"/>
+      <a:schemeClr val="accent4"/>
+      <a:schemeClr val="accent5"/>
+      <a:schemeClr val="accent6"/>
+    </dgm:linClrLst>
+    <dgm:effectClrLst/>
+    <dgm:txLinClrLst/>
+    <dgm:txFillClrLst meth="repeat">
+      <a:schemeClr val="dk1"/>
+    </dgm:txFillClrLst>
+    <dgm:txEffectClrLst/>
+  </dgm:styleLbl>
+  <dgm:styleLbl name="solidBgAcc1">
+    <dgm:fillClrLst meth="repeat">
+      <a:schemeClr val="lt1"/>
+    </dgm:fillClrLst>
+    <dgm:linClrLst meth="repeat">
+      <a:schemeClr val="accent2"/>
+      <a:schemeClr val="accent3"/>
+      <a:schemeClr val="accent4"/>
+      <a:schemeClr val="accent5"/>
+      <a:schemeClr val="accent6"/>
+    </dgm:linClrLst>
+    <dgm:effectClrLst/>
+    <dgm:txLinClrLst/>
+    <dgm:txFillClrLst meth="repeat">
+      <a:schemeClr val="dk1"/>
+    </dgm:txFillClrLst>
+    <dgm:txEffectClrLst/>
+  </dgm:styleLbl>
+  <dgm:styleLbl name="fgAccFollowNode1">
+    <dgm:fillClrLst meth="repeat">
+      <a:schemeClr val="accent2">
+        <a:tint val="40000"/>
+        <a:alpha val="90000"/>
+      </a:schemeClr>
+      <a:schemeClr val="accent3">
+        <a:tint val="40000"/>
+        <a:alpha val="90000"/>
+      </a:schemeClr>
+      <a:schemeClr val="accent4">
+        <a:tint val="40000"/>
+        <a:alpha val="90000"/>
+      </a:schemeClr>
+      <a:schemeClr val="accent5">
+        <a:tint val="40000"/>
+        <a:alpha val="90000"/>
+      </a:schemeClr>
+      <a:schemeClr val="accent6">
+        <a:tint val="40000"/>
+        <a:alpha val="90000"/>
+      </a:schemeClr>
+    </dgm:fillClrLst>
+    <dgm:linClrLst meth="repeat">
+      <a:schemeClr val="accent2">
+        <a:tint val="40000"/>
+        <a:alpha val="90000"/>
+      </a:schemeClr>
+      <a:schemeClr val="accent3">
+        <a:tint val="40000"/>
+        <a:alpha val="90000"/>
+      </a:schemeClr>
+      <a:schemeClr val="accent4">
+        <a:tint val="40000"/>
+        <a:alpha val="90000"/>
+      </a:schemeClr>
+      <a:schemeClr val="accent5">
+        <a:tint val="40000"/>
+        <a:alpha val="90000"/>
+      </a:schemeClr>
+      <a:schemeClr val="accent6">
+        <a:tint val="40000"/>
+        <a:alpha val="90000"/>
+      </a:schemeClr>
+    </dgm:linClrLst>
+    <dgm:effectClrLst/>
+    <dgm:txLinClrLst/>
+    <dgm:txFillClrLst meth="repeat">
+      <a:schemeClr val="dk1"/>
+    </dgm:txFillClrLst>
+    <dgm:txEffectClrLst/>
+  </dgm:styleLbl>
+  <dgm:styleLbl name="alignAccFollowNode1">
+    <dgm:fillClrLst meth="repeat">
+      <a:schemeClr val="accent2">
+        <a:tint val="40000"/>
+        <a:alpha val="90000"/>
+      </a:schemeClr>
+      <a:schemeClr val="accent3">
+        <a:tint val="40000"/>
+        <a:alpha val="90000"/>
+      </a:schemeClr>
+      <a:schemeClr val="accent4">
+        <a:tint val="40000"/>
+        <a:alpha val="90000"/>
+      </a:schemeClr>
+      <a:schemeClr val="accent5">
+        <a:tint val="40000"/>
+        <a:alpha val="90000"/>
+      </a:schemeClr>
+      <a:schemeClr val="accent6">
+        <a:tint val="40000"/>
+        <a:alpha val="90000"/>
+      </a:schemeClr>
+    </dgm:fillClrLst>
+    <dgm:linClrLst meth="repeat">
+      <a:schemeClr val="accent2">
+        <a:tint val="40000"/>
+        <a:alpha val="90000"/>
+      </a:schemeClr>
+      <a:schemeClr val="accent3">
+        <a:tint val="40000"/>
+        <a:alpha val="90000"/>
+      </a:schemeClr>
+      <a:schemeClr val="accent4">
+        <a:tint val="40000"/>
+        <a:alpha val="90000"/>
+      </a:schemeClr>
+      <a:schemeClr val="accent5">
+        <a:tint val="40000"/>
+        <a:alpha val="90000"/>
+      </a:schemeClr>
+      <a:schemeClr val="accent6">
+        <a:tint val="40000"/>
+        <a:alpha val="90000"/>
+      </a:schemeClr>
+    </dgm:linClrLst>
+    <dgm:effectClrLst/>
+    <dgm:txLinClrLst/>
+    <dgm:txFillClrLst meth="repeat">
+      <a:schemeClr val="dk1"/>
+    </dgm:txFillClrLst>
+    <dgm:txEffectClrLst/>
+  </dgm:styleLbl>
+  <dgm:styleLbl name="bgAccFollowNode1">
+    <dgm:fillClrLst meth="repeat">
+      <a:schemeClr val="accent2">
+        <a:tint val="40000"/>
+        <a:alpha val="90000"/>
+      </a:schemeClr>
+      <a:schemeClr val="accent3">
+        <a:tint val="40000"/>
+        <a:alpha val="90000"/>
+      </a:schemeClr>
+      <a:schemeClr val="accent4">
+        <a:tint val="40000"/>
+        <a:alpha val="90000"/>
+      </a:schemeClr>
+      <a:schemeClr val="accent5">
+        <a:tint val="40000"/>
+        <a:alpha val="90000"/>
+      </a:schemeClr>
+      <a:schemeClr val="accent6">
+        <a:tint val="40000"/>
+        <a:alpha val="90000"/>
+      </a:schemeClr>
+    </dgm:fillClrLst>
+    <dgm:linClrLst meth="repeat">
+      <a:schemeClr val="accent2">
+        <a:tint val="40000"/>
+        <a:alpha val="90000"/>
+      </a:schemeClr>
+      <a:schemeClr val="accent3">
+        <a:tint val="40000"/>
+        <a:alpha val="90000"/>
+      </a:schemeClr>
+      <a:schemeClr val="accent4">
+        <a:tint val="40000"/>
+        <a:alpha val="90000"/>
+      </a:schemeClr>
+      <a:schemeClr val="accent5">
+        <a:tint val="40000"/>
+        <a:alpha val="90000"/>
+      </a:schemeClr>
+      <a:schemeClr val="accent6">
+        <a:tint val="40000"/>
+        <a:alpha val="90000"/>
+      </a:schemeClr>
+    </dgm:linClrLst>
+    <dgm:effectClrLst/>
+    <dgm:txLinClrLst/>
+    <dgm:txFillClrLst meth="repeat">
+      <a:schemeClr val="dk1"/>
+    </dgm:txFillClrLst>
+    <dgm:txEffectClrLst/>
+  </dgm:styleLbl>
+  <dgm:styleLbl name="fgAcc0">
+    <dgm:fillClrLst meth="repeat">
+      <a:schemeClr val="lt1">
+        <a:alpha val="90000"/>
+      </a:schemeClr>
+    </dgm:fillClrLst>
+    <dgm:linClrLst>
+      <a:schemeClr val="accent1"/>
+    </dgm:linClrLst>
+    <dgm:effectClrLst/>
+    <dgm:txLinClrLst/>
+    <dgm:txFillClrLst meth="repeat">
+      <a:schemeClr val="dk1"/>
+    </dgm:txFillClrLst>
+    <dgm:txEffectClrLst/>
+  </dgm:styleLbl>
+  <dgm:styleLbl name="fgAcc2">
+    <dgm:fillClrLst meth="repeat">
+      <a:schemeClr val="lt1">
+        <a:alpha val="90000"/>
+      </a:schemeClr>
+    </dgm:fillClrLst>
+    <dgm:linClrLst>
+      <a:schemeClr val="accent2"/>
+    </dgm:linClrLst>
+    <dgm:effectClrLst/>
+    <dgm:txLinClrLst/>
+    <dgm:txFillClrLst meth="repeat">
+      <a:schemeClr val="dk1"/>
+    </dgm:txFillClrLst>
+    <dgm:txEffectClrLst/>
+  </dgm:styleLbl>
+  <dgm:styleLbl name="fgAcc3">
+    <dgm:fillClrLst meth="repeat">
+      <a:schemeClr val="lt1">
+        <a:alpha val="90000"/>
+      </a:schemeClr>
+    </dgm:fillClrLst>
+    <dgm:linClrLst>
+      <a:schemeClr val="accent3"/>
+    </dgm:linClrLst>
+    <dgm:effectClrLst/>
+    <dgm:txLinClrLst/>
+    <dgm:txFillClrLst meth="repeat">
+      <a:schemeClr val="dk1"/>
+    </dgm:txFillClrLst>
+    <dgm:txEffectClrLst/>
+  </dgm:styleLbl>
+  <dgm:styleLbl name="fgAcc4">
+    <dgm:fillClrLst meth="repeat">
+      <a:schemeClr val="lt1">
+        <a:alpha val="90000"/>
+      </a:schemeClr>
+    </dgm:fillClrLst>
+    <dgm:linClrLst>
+      <a:schemeClr val="accent4"/>
+    </dgm:linClrLst>
+    <dgm:effectClrLst/>
+    <dgm:txLinClrLst/>
+    <dgm:txFillClrLst meth="repeat">
+      <a:schemeClr val="dk1"/>
+    </dgm:txFillClrLst>
+    <dgm:txEffectClrLst/>
+  </dgm:styleLbl>
+  <dgm:styleLbl name="bgShp">
+    <dgm:fillClrLst meth="repeat">
+      <a:schemeClr val="accent2">
+        <a:tint val="40000"/>
+      </a:schemeClr>
+    </dgm:fillClrLst>
+    <dgm:linClrLst meth="repeat">
+      <a:schemeClr val="dk1"/>
+    </dgm:linClrLst>
+    <dgm:effectClrLst/>
+    <dgm:txLinClrLst/>
+    <dgm:txFillClrLst meth="repeat">
+      <a:schemeClr val="dk1"/>
+    </dgm:txFillClrLst>
+    <dgm:txEffectClrLst/>
+  </dgm:styleLbl>
+  <dgm:styleLbl name="dkBgShp">
+    <dgm:fillClrLst meth="repeat">
+      <a:schemeClr val="accent2">
+        <a:shade val="90000"/>
+      </a:schemeClr>
+    </dgm:fillClrLst>
+    <dgm:linClrLst meth="repeat">
+      <a:schemeClr val="dk1"/>
+    </dgm:linClrLst>
+    <dgm:effectClrLst/>
+    <dgm:txLinClrLst/>
+    <dgm:txFillClrLst meth="repeat">
+      <a:schemeClr val="lt1"/>
+    </dgm:txFillClrLst>
+    <dgm:txEffectClrLst/>
+  </dgm:styleLbl>
+  <dgm:styleLbl name="trBgShp">
+    <dgm:fillClrLst meth="repeat">
+      <a:schemeClr val="accent1">
+        <a:tint val="50000"/>
+        <a:alpha val="40000"/>
+      </a:schemeClr>
+    </dgm:fillClrLst>
+    <dgm:linClrLst meth="repeat">
+      <a:schemeClr val="accent2"/>
+    </dgm:linClrLst>
+    <dgm:effectClrLst/>
+    <dgm:txLinClrLst/>
+    <dgm:txFillClrLst meth="repeat">
+      <a:schemeClr val="lt1"/>
+    </dgm:txFillClrLst>
+    <dgm:txEffectClrLst/>
+  </dgm:styleLbl>
+  <dgm:styleLbl name="fgShp">
+    <dgm:fillClrLst meth="repeat">
+      <a:schemeClr val="accent2">
+        <a:tint val="40000"/>
+      </a:schemeClr>
+    </dgm:fillClrLst>
+    <dgm:linClrLst meth="repeat">
+      <a:schemeClr val="lt1"/>
+    </dgm:linClrLst>
+    <dgm:effectClrLst/>
+    <dgm:txLinClrLst/>
+    <dgm:txFillClrLst meth="repeat">
+      <a:schemeClr val="dk1"/>
+    </dgm:txFillClrLst>
+    <dgm:txEffectClrLst/>
+  </dgm:styleLbl>
+  <dgm:styleLbl name="revTx">
+    <dgm:fillClrLst meth="repeat">
+      <a:schemeClr val="lt1">
+        <a:alpha val="0"/>
+      </a:schemeClr>
+    </dgm:fillClrLst>
+    <dgm:linClrLst meth="repeat">
+      <a:schemeClr val="dk1">
+        <a:alpha val="0"/>
+      </a:schemeClr>
+    </dgm:linClrLst>
+    <dgm:effectClrLst/>
+    <dgm:txLinClrLst/>
+    <dgm:txFillClrLst meth="repeat">
+      <a:schemeClr val="tx1"/>
+    </dgm:txFillClrLst>
+    <dgm:txEffectClrLst/>
+  </dgm:styleLbl>
+</dgm:colorsDef>
+</file>
+
+<file path=ppt/diagrams/data1.xml><?xml version="1.0" encoding="utf-8"?>
+<dgm:dataModel xmlns:dgm="http://schemas.openxmlformats.org/drawingml/2006/diagram" xmlns:a="http://schemas.openxmlformats.org/drawingml/2006/main">
+  <dgm:ptLst>
+    <dgm:pt modelId="{9A956502-3703-4132-AC03-69BF4A493969}" type="doc">
+      <dgm:prSet loTypeId="urn:microsoft.com/office/officeart/2005/8/layout/hierarchy1" loCatId="hierarchy" qsTypeId="urn:microsoft.com/office/officeart/2005/8/quickstyle/simple1" qsCatId="simple" csTypeId="urn:microsoft.com/office/officeart/2005/8/colors/colorful1" csCatId="colorful"/>
+      <dgm:spPr/>
+      <dgm:t>
+        <a:bodyPr/>
+        <a:lstStyle/>
+        <a:p>
+          <a:endParaRPr lang="en-US"/>
+        </a:p>
+      </dgm:t>
+    </dgm:pt>
+    <dgm:pt modelId="{C9009838-8A56-4C48-8D68-4AD8D79DF724}">
+      <dgm:prSet/>
+      <dgm:spPr/>
+      <dgm:t>
+        <a:bodyPr/>
+        <a:lstStyle/>
+        <a:p>
+          <a:r>
+            <a:rPr lang="en-US"/>
+            <a:t>We proved our hypothesis that unsupervised metrics could improve our supervised upset predictions over a baseline model (guess 50-50 model). </a:t>
+          </a:r>
+        </a:p>
+      </dgm:t>
+    </dgm:pt>
+    <dgm:pt modelId="{B68A8A97-53A1-4D21-88EA-5BC5598D398E}" type="parTrans" cxnId="{B6FBF076-F4C4-44C2-A0DA-7AA76CB1202F}">
+      <dgm:prSet/>
+      <dgm:spPr/>
+      <dgm:t>
+        <a:bodyPr/>
+        <a:lstStyle/>
+        <a:p>
+          <a:endParaRPr lang="en-US"/>
+        </a:p>
+      </dgm:t>
+    </dgm:pt>
+    <dgm:pt modelId="{78D8B892-685E-4781-A8B9-712ED1144157}" type="sibTrans" cxnId="{B6FBF076-F4C4-44C2-A0DA-7AA76CB1202F}">
+      <dgm:prSet/>
+      <dgm:spPr/>
+      <dgm:t>
+        <a:bodyPr/>
+        <a:lstStyle/>
+        <a:p>
+          <a:endParaRPr lang="en-US"/>
+        </a:p>
+      </dgm:t>
+    </dgm:pt>
+    <dgm:pt modelId="{109213F9-8B9A-457D-9FFB-808957D78B5F}">
+      <dgm:prSet/>
+      <dgm:spPr/>
+      <dgm:t>
+        <a:bodyPr/>
+        <a:lstStyle/>
+        <a:p>
+          <a:r>
+            <a:rPr lang="en-US"/>
+            <a:t>Statistically, Cinderella runs are uncommon and thus difficult to work with due to imbalanced data. </a:t>
+          </a:r>
+        </a:p>
+      </dgm:t>
+    </dgm:pt>
+    <dgm:pt modelId="{3C61ED98-DEB5-4291-AD23-642F840DF32A}" type="parTrans" cxnId="{BE8156B5-980D-479E-92C2-DE10FCAFB347}">
+      <dgm:prSet/>
+      <dgm:spPr/>
+      <dgm:t>
+        <a:bodyPr/>
+        <a:lstStyle/>
+        <a:p>
+          <a:endParaRPr lang="en-US"/>
+        </a:p>
+      </dgm:t>
+    </dgm:pt>
+    <dgm:pt modelId="{ABC96685-BD00-4EDD-A4D0-E3DCBEF54363}" type="sibTrans" cxnId="{BE8156B5-980D-479E-92C2-DE10FCAFB347}">
+      <dgm:prSet/>
+      <dgm:spPr/>
+      <dgm:t>
+        <a:bodyPr/>
+        <a:lstStyle/>
+        <a:p>
+          <a:endParaRPr lang="en-US"/>
+        </a:p>
+      </dgm:t>
+    </dgm:pt>
+    <dgm:pt modelId="{2FB49948-87B9-44DB-AAEB-DA06F8F47BC2}">
+      <dgm:prSet/>
+      <dgm:spPr/>
+      <dgm:t>
+        <a:bodyPr/>
+        <a:lstStyle/>
+        <a:p>
+          <a:r>
+            <a:rPr lang="en-US"/>
+            <a:t>However, by looking at efficiency profiles, ball security, and team consistency, we can find teams that are better teams than their seed might suggest.</a:t>
+          </a:r>
+        </a:p>
+      </dgm:t>
+    </dgm:pt>
+    <dgm:pt modelId="{7D0F421E-0498-4A7B-9813-7B60A318EF65}" type="parTrans" cxnId="{71BF8781-1204-4E3D-B2B0-BCD19C74A20C}">
+      <dgm:prSet/>
+      <dgm:spPr/>
+      <dgm:t>
+        <a:bodyPr/>
+        <a:lstStyle/>
+        <a:p>
+          <a:endParaRPr lang="en-US"/>
+        </a:p>
+      </dgm:t>
+    </dgm:pt>
+    <dgm:pt modelId="{D5AC4E4F-E97A-48C8-A764-79F9C9717A54}" type="sibTrans" cxnId="{71BF8781-1204-4E3D-B2B0-BCD19C74A20C}">
+      <dgm:prSet/>
+      <dgm:spPr/>
+      <dgm:t>
+        <a:bodyPr/>
+        <a:lstStyle/>
+        <a:p>
+          <a:endParaRPr lang="en-US"/>
+        </a:p>
+      </dgm:t>
+    </dgm:pt>
+    <dgm:pt modelId="{ABB376B8-BEB4-4AC4-B6A8-44101DF5D20F}" type="pres">
+      <dgm:prSet presAssocID="{9A956502-3703-4132-AC03-69BF4A493969}" presName="hierChild1" presStyleCnt="0">
+        <dgm:presLayoutVars>
+          <dgm:chPref val="1"/>
+          <dgm:dir/>
+          <dgm:animOne val="branch"/>
+          <dgm:animLvl val="lvl"/>
+          <dgm:resizeHandles/>
+        </dgm:presLayoutVars>
+      </dgm:prSet>
+      <dgm:spPr/>
+    </dgm:pt>
+    <dgm:pt modelId="{6ECC08F2-C111-4885-9897-0D24AA2E0CE3}" type="pres">
+      <dgm:prSet presAssocID="{C9009838-8A56-4C48-8D68-4AD8D79DF724}" presName="hierRoot1" presStyleCnt="0"/>
+      <dgm:spPr/>
+    </dgm:pt>
+    <dgm:pt modelId="{AB6DC64C-51C1-4D8B-8DA6-3EA56830112D}" type="pres">
+      <dgm:prSet presAssocID="{C9009838-8A56-4C48-8D68-4AD8D79DF724}" presName="composite" presStyleCnt="0"/>
+      <dgm:spPr/>
+    </dgm:pt>
+    <dgm:pt modelId="{EC11D090-7354-4F4F-8F49-C5CD23AC06F8}" type="pres">
+      <dgm:prSet presAssocID="{C9009838-8A56-4C48-8D68-4AD8D79DF724}" presName="background" presStyleLbl="node0" presStyleIdx="0" presStyleCnt="3"/>
+      <dgm:spPr/>
+    </dgm:pt>
+    <dgm:pt modelId="{83D75567-D77F-4DB4-87F6-FB83F4389902}" type="pres">
+      <dgm:prSet presAssocID="{C9009838-8A56-4C48-8D68-4AD8D79DF724}" presName="text" presStyleLbl="fgAcc0" presStyleIdx="0" presStyleCnt="3">
+        <dgm:presLayoutVars>
+          <dgm:chPref val="3"/>
+        </dgm:presLayoutVars>
+      </dgm:prSet>
+      <dgm:spPr/>
+    </dgm:pt>
+    <dgm:pt modelId="{DB7C6BDC-9F00-462B-BC7C-3BDB3A80CA68}" type="pres">
+      <dgm:prSet presAssocID="{C9009838-8A56-4C48-8D68-4AD8D79DF724}" presName="hierChild2" presStyleCnt="0"/>
+      <dgm:spPr/>
+    </dgm:pt>
+    <dgm:pt modelId="{47B729FD-76A8-4F5C-A8FF-BCADDD98D2D7}" type="pres">
+      <dgm:prSet presAssocID="{109213F9-8B9A-457D-9FFB-808957D78B5F}" presName="hierRoot1" presStyleCnt="0"/>
+      <dgm:spPr/>
+    </dgm:pt>
+    <dgm:pt modelId="{40C9D482-E318-426B-BB60-6ECB5AE2DBFA}" type="pres">
+      <dgm:prSet presAssocID="{109213F9-8B9A-457D-9FFB-808957D78B5F}" presName="composite" presStyleCnt="0"/>
+      <dgm:spPr/>
+    </dgm:pt>
+    <dgm:pt modelId="{F76CC354-EC1C-4237-9AF7-E24C401081B9}" type="pres">
+      <dgm:prSet presAssocID="{109213F9-8B9A-457D-9FFB-808957D78B5F}" presName="background" presStyleLbl="node0" presStyleIdx="1" presStyleCnt="3"/>
+      <dgm:spPr/>
+    </dgm:pt>
+    <dgm:pt modelId="{7B0DCC16-14D9-453E-9DA2-75672FE1E2EF}" type="pres">
+      <dgm:prSet presAssocID="{109213F9-8B9A-457D-9FFB-808957D78B5F}" presName="text" presStyleLbl="fgAcc0" presStyleIdx="1" presStyleCnt="3">
+        <dgm:presLayoutVars>
+          <dgm:chPref val="3"/>
+        </dgm:presLayoutVars>
+      </dgm:prSet>
+      <dgm:spPr/>
+    </dgm:pt>
+    <dgm:pt modelId="{D2912189-F0C6-484B-B55F-AA8B6C73CAA4}" type="pres">
+      <dgm:prSet presAssocID="{109213F9-8B9A-457D-9FFB-808957D78B5F}" presName="hierChild2" presStyleCnt="0"/>
+      <dgm:spPr/>
+    </dgm:pt>
+    <dgm:pt modelId="{7C88710D-B3A2-4CC0-B117-D9EC087CF0C2}" type="pres">
+      <dgm:prSet presAssocID="{2FB49948-87B9-44DB-AAEB-DA06F8F47BC2}" presName="hierRoot1" presStyleCnt="0"/>
+      <dgm:spPr/>
+    </dgm:pt>
+    <dgm:pt modelId="{EEBCC283-BA11-45C6-A04A-0F018BDD6297}" type="pres">
+      <dgm:prSet presAssocID="{2FB49948-87B9-44DB-AAEB-DA06F8F47BC2}" presName="composite" presStyleCnt="0"/>
+      <dgm:spPr/>
+    </dgm:pt>
+    <dgm:pt modelId="{14FAEA80-420A-4DF9-8C71-47C47D8F56E9}" type="pres">
+      <dgm:prSet presAssocID="{2FB49948-87B9-44DB-AAEB-DA06F8F47BC2}" presName="background" presStyleLbl="node0" presStyleIdx="2" presStyleCnt="3"/>
+      <dgm:spPr/>
+    </dgm:pt>
+    <dgm:pt modelId="{581A08C7-F3DA-450D-A4A2-96E835EA8E24}" type="pres">
+      <dgm:prSet presAssocID="{2FB49948-87B9-44DB-AAEB-DA06F8F47BC2}" presName="text" presStyleLbl="fgAcc0" presStyleIdx="2" presStyleCnt="3">
+        <dgm:presLayoutVars>
+          <dgm:chPref val="3"/>
+        </dgm:presLayoutVars>
+      </dgm:prSet>
+      <dgm:spPr/>
+    </dgm:pt>
+    <dgm:pt modelId="{4B2266E5-EA19-4DC6-B8EA-B02FF3D06E67}" type="pres">
+      <dgm:prSet presAssocID="{2FB49948-87B9-44DB-AAEB-DA06F8F47BC2}" presName="hierChild2" presStyleCnt="0"/>
+      <dgm:spPr/>
+    </dgm:pt>
+  </dgm:ptLst>
+  <dgm:cxnLst>
+    <dgm:cxn modelId="{742B2D0D-FA11-49BD-AFB7-D4848993CF24}" type="presOf" srcId="{109213F9-8B9A-457D-9FFB-808957D78B5F}" destId="{7B0DCC16-14D9-453E-9DA2-75672FE1E2EF}" srcOrd="0" destOrd="0" presId="urn:microsoft.com/office/officeart/2005/8/layout/hierarchy1"/>
+    <dgm:cxn modelId="{BD2D6E62-2716-4F5E-9774-BAC8421648B9}" type="presOf" srcId="{C9009838-8A56-4C48-8D68-4AD8D79DF724}" destId="{83D75567-D77F-4DB4-87F6-FB83F4389902}" srcOrd="0" destOrd="0" presId="urn:microsoft.com/office/officeart/2005/8/layout/hierarchy1"/>
+    <dgm:cxn modelId="{B6FBF076-F4C4-44C2-A0DA-7AA76CB1202F}" srcId="{9A956502-3703-4132-AC03-69BF4A493969}" destId="{C9009838-8A56-4C48-8D68-4AD8D79DF724}" srcOrd="0" destOrd="0" parTransId="{B68A8A97-53A1-4D21-88EA-5BC5598D398E}" sibTransId="{78D8B892-685E-4781-A8B9-712ED1144157}"/>
+    <dgm:cxn modelId="{71BF8781-1204-4E3D-B2B0-BCD19C74A20C}" srcId="{9A956502-3703-4132-AC03-69BF4A493969}" destId="{2FB49948-87B9-44DB-AAEB-DA06F8F47BC2}" srcOrd="2" destOrd="0" parTransId="{7D0F421E-0498-4A7B-9813-7B60A318EF65}" sibTransId="{D5AC4E4F-E97A-48C8-A764-79F9C9717A54}"/>
+    <dgm:cxn modelId="{F470EE93-5581-4209-ABD0-5511B51915D5}" type="presOf" srcId="{9A956502-3703-4132-AC03-69BF4A493969}" destId="{ABB376B8-BEB4-4AC4-B6A8-44101DF5D20F}" srcOrd="0" destOrd="0" presId="urn:microsoft.com/office/officeart/2005/8/layout/hierarchy1"/>
+    <dgm:cxn modelId="{BE8156B5-980D-479E-92C2-DE10FCAFB347}" srcId="{9A956502-3703-4132-AC03-69BF4A493969}" destId="{109213F9-8B9A-457D-9FFB-808957D78B5F}" srcOrd="1" destOrd="0" parTransId="{3C61ED98-DEB5-4291-AD23-642F840DF32A}" sibTransId="{ABC96685-BD00-4EDD-A4D0-E3DCBEF54363}"/>
+    <dgm:cxn modelId="{8B31FEDB-C666-4549-A8DD-7DFBAF5CEA45}" type="presOf" srcId="{2FB49948-87B9-44DB-AAEB-DA06F8F47BC2}" destId="{581A08C7-F3DA-450D-A4A2-96E835EA8E24}" srcOrd="0" destOrd="0" presId="urn:microsoft.com/office/officeart/2005/8/layout/hierarchy1"/>
+    <dgm:cxn modelId="{36A7A178-1634-4195-9342-C717722CEFD2}" type="presParOf" srcId="{ABB376B8-BEB4-4AC4-B6A8-44101DF5D20F}" destId="{6ECC08F2-C111-4885-9897-0D24AA2E0CE3}" srcOrd="0" destOrd="0" presId="urn:microsoft.com/office/officeart/2005/8/layout/hierarchy1"/>
+    <dgm:cxn modelId="{7B59CBEA-DC39-4C2B-A5C0-1285E9888A7A}" type="presParOf" srcId="{6ECC08F2-C111-4885-9897-0D24AA2E0CE3}" destId="{AB6DC64C-51C1-4D8B-8DA6-3EA56830112D}" srcOrd="0" destOrd="0" presId="urn:microsoft.com/office/officeart/2005/8/layout/hierarchy1"/>
+    <dgm:cxn modelId="{3DC503BA-DAC4-4844-823D-4FCE5426BCA8}" type="presParOf" srcId="{AB6DC64C-51C1-4D8B-8DA6-3EA56830112D}" destId="{EC11D090-7354-4F4F-8F49-C5CD23AC06F8}" srcOrd="0" destOrd="0" presId="urn:microsoft.com/office/officeart/2005/8/layout/hierarchy1"/>
+    <dgm:cxn modelId="{F12AD088-4EA4-463C-A33B-D2879228B245}" type="presParOf" srcId="{AB6DC64C-51C1-4D8B-8DA6-3EA56830112D}" destId="{83D75567-D77F-4DB4-87F6-FB83F4389902}" srcOrd="1" destOrd="0" presId="urn:microsoft.com/office/officeart/2005/8/layout/hierarchy1"/>
+    <dgm:cxn modelId="{3A27ABA7-7C72-4679-83BB-C818DC40BF43}" type="presParOf" srcId="{6ECC08F2-C111-4885-9897-0D24AA2E0CE3}" destId="{DB7C6BDC-9F00-462B-BC7C-3BDB3A80CA68}" srcOrd="1" destOrd="0" presId="urn:microsoft.com/office/officeart/2005/8/layout/hierarchy1"/>
+    <dgm:cxn modelId="{CDA2AB2C-63CA-40B9-A5DA-C64B64803105}" type="presParOf" srcId="{ABB376B8-BEB4-4AC4-B6A8-44101DF5D20F}" destId="{47B729FD-76A8-4F5C-A8FF-BCADDD98D2D7}" srcOrd="1" destOrd="0" presId="urn:microsoft.com/office/officeart/2005/8/layout/hierarchy1"/>
+    <dgm:cxn modelId="{ED01DA84-5D7D-41B3-9C08-F667D513A6B9}" type="presParOf" srcId="{47B729FD-76A8-4F5C-A8FF-BCADDD98D2D7}" destId="{40C9D482-E318-426B-BB60-6ECB5AE2DBFA}" srcOrd="0" destOrd="0" presId="urn:microsoft.com/office/officeart/2005/8/layout/hierarchy1"/>
+    <dgm:cxn modelId="{8DCD5344-5556-4E78-947D-B5087470442C}" type="presParOf" srcId="{40C9D482-E318-426B-BB60-6ECB5AE2DBFA}" destId="{F76CC354-EC1C-4237-9AF7-E24C401081B9}" srcOrd="0" destOrd="0" presId="urn:microsoft.com/office/officeart/2005/8/layout/hierarchy1"/>
+    <dgm:cxn modelId="{02D7FC1C-4EB6-4F5C-8717-16C0BD3ACDA0}" type="presParOf" srcId="{40C9D482-E318-426B-BB60-6ECB5AE2DBFA}" destId="{7B0DCC16-14D9-453E-9DA2-75672FE1E2EF}" srcOrd="1" destOrd="0" presId="urn:microsoft.com/office/officeart/2005/8/layout/hierarchy1"/>
+    <dgm:cxn modelId="{5DB0650D-38E7-4885-B547-74B7468F8E3D}" type="presParOf" srcId="{47B729FD-76A8-4F5C-A8FF-BCADDD98D2D7}" destId="{D2912189-F0C6-484B-B55F-AA8B6C73CAA4}" srcOrd="1" destOrd="0" presId="urn:microsoft.com/office/officeart/2005/8/layout/hierarchy1"/>
+    <dgm:cxn modelId="{BFEF920B-3EB6-483C-B8C6-A0A114D5698C}" type="presParOf" srcId="{ABB376B8-BEB4-4AC4-B6A8-44101DF5D20F}" destId="{7C88710D-B3A2-4CC0-B117-D9EC087CF0C2}" srcOrd="2" destOrd="0" presId="urn:microsoft.com/office/officeart/2005/8/layout/hierarchy1"/>
+    <dgm:cxn modelId="{1EC57B49-41DA-44C7-A7E4-9B484D6F45E4}" type="presParOf" srcId="{7C88710D-B3A2-4CC0-B117-D9EC087CF0C2}" destId="{EEBCC283-BA11-45C6-A04A-0F018BDD6297}" srcOrd="0" destOrd="0" presId="urn:microsoft.com/office/officeart/2005/8/layout/hierarchy1"/>
+    <dgm:cxn modelId="{03A3532D-E5C9-4CA4-9E57-CABE156D9701}" type="presParOf" srcId="{EEBCC283-BA11-45C6-A04A-0F018BDD6297}" destId="{14FAEA80-420A-4DF9-8C71-47C47D8F56E9}" srcOrd="0" destOrd="0" presId="urn:microsoft.com/office/officeart/2005/8/layout/hierarchy1"/>
+    <dgm:cxn modelId="{28675178-FA03-48AF-9B11-8BADD381BAAD}" type="presParOf" srcId="{EEBCC283-BA11-45C6-A04A-0F018BDD6297}" destId="{581A08C7-F3DA-450D-A4A2-96E835EA8E24}" srcOrd="1" destOrd="0" presId="urn:microsoft.com/office/officeart/2005/8/layout/hierarchy1"/>
+    <dgm:cxn modelId="{88A4F24B-FDC1-443B-9774-60149C5F8C12}" type="presParOf" srcId="{7C88710D-B3A2-4CC0-B117-D9EC087CF0C2}" destId="{4B2266E5-EA19-4DC6-B8EA-B02FF3D06E67}" srcOrd="1" destOrd="0" presId="urn:microsoft.com/office/officeart/2005/8/layout/hierarchy1"/>
+  </dgm:cxnLst>
+  <dgm:bg/>
+  <dgm:whole/>
+  <dgm:extLst>
+    <a:ext uri="http://schemas.microsoft.com/office/drawing/2008/diagram">
+      <dsp:dataModelExt xmlns:dsp="http://schemas.microsoft.com/office/drawing/2008/diagram" relId="rId6" minVer="http://schemas.openxmlformats.org/drawingml/2006/diagram"/>
+    </a:ext>
+  </dgm:extLst>
+</dgm:dataModel>
+</file>
+
+<file path=ppt/diagrams/drawing1.xml><?xml version="1.0" encoding="utf-8"?>
+<dsp:drawing xmlns:dgm="http://schemas.openxmlformats.org/drawingml/2006/diagram" xmlns:dsp="http://schemas.microsoft.com/office/drawing/2008/diagram" xmlns:a="http://schemas.openxmlformats.org/drawingml/2006/main">
+  <dsp:spTree>
+    <dsp:nvGrpSpPr>
+      <dsp:cNvPr id="0" name=""/>
+      <dsp:cNvGrpSpPr/>
+    </dsp:nvGrpSpPr>
+    <dsp:grpSpPr/>
+    <dsp:sp modelId="{EC11D090-7354-4F4F-8F49-C5CD23AC06F8}">
+      <dsp:nvSpPr>
+        <dsp:cNvPr id="0" name=""/>
+        <dsp:cNvSpPr/>
+      </dsp:nvSpPr>
+      <dsp:spPr>
+        <a:xfrm>
+          <a:off x="0" y="706671"/>
+          <a:ext cx="3073451" cy="1951641"/>
+        </a:xfrm>
+        <a:prstGeom prst="roundRect">
+          <a:avLst>
+            <a:gd name="adj" fmla="val 10000"/>
+          </a:avLst>
+        </a:prstGeom>
+        <a:solidFill>
+          <a:schemeClr val="accent1">
+            <a:hueOff val="0"/>
+            <a:satOff val="0"/>
+            <a:lumOff val="0"/>
+            <a:alphaOff val="0"/>
+          </a:schemeClr>
+        </a:solidFill>
+        <a:ln w="19050" cap="flat" cmpd="sng" algn="ctr">
+          <a:solidFill>
+            <a:schemeClr val="lt1">
+              <a:hueOff val="0"/>
+              <a:satOff val="0"/>
+              <a:lumOff val="0"/>
+              <a:alphaOff val="0"/>
+            </a:schemeClr>
+          </a:solidFill>
+          <a:prstDash val="solid"/>
+          <a:miter lim="800000"/>
+        </a:ln>
+        <a:effectLst/>
+      </dsp:spPr>
+      <dsp:style>
+        <a:lnRef idx="2">
+          <a:scrgbClr r="0" g="0" b="0"/>
+        </a:lnRef>
+        <a:fillRef idx="1">
+          <a:scrgbClr r="0" g="0" b="0"/>
+        </a:fillRef>
+        <a:effectRef idx="0">
+          <a:scrgbClr r="0" g="0" b="0"/>
+        </a:effectRef>
+        <a:fontRef idx="minor">
+          <a:schemeClr val="lt1"/>
+        </a:fontRef>
+      </dsp:style>
+    </dsp:sp>
+    <dsp:sp modelId="{83D75567-D77F-4DB4-87F6-FB83F4389902}">
+      <dsp:nvSpPr>
+        <dsp:cNvPr id="0" name=""/>
+        <dsp:cNvSpPr/>
+      </dsp:nvSpPr>
+      <dsp:spPr>
+        <a:xfrm>
+          <a:off x="341494" y="1031091"/>
+          <a:ext cx="3073451" cy="1951641"/>
+        </a:xfrm>
+        <a:prstGeom prst="roundRect">
+          <a:avLst>
+            <a:gd name="adj" fmla="val 10000"/>
+          </a:avLst>
+        </a:prstGeom>
+        <a:solidFill>
+          <a:schemeClr val="lt1">
+            <a:alpha val="90000"/>
+            <a:hueOff val="0"/>
+            <a:satOff val="0"/>
+            <a:lumOff val="0"/>
+            <a:alphaOff val="0"/>
+          </a:schemeClr>
+        </a:solidFill>
+        <a:ln w="19050" cap="flat" cmpd="sng" algn="ctr">
+          <a:solidFill>
+            <a:schemeClr val="accent1">
+              <a:hueOff val="0"/>
+              <a:satOff val="0"/>
+              <a:lumOff val="0"/>
+              <a:alphaOff val="0"/>
+            </a:schemeClr>
+          </a:solidFill>
+          <a:prstDash val="solid"/>
+          <a:miter lim="800000"/>
+        </a:ln>
+        <a:effectLst/>
+      </dsp:spPr>
+      <dsp:style>
+        <a:lnRef idx="2">
+          <a:scrgbClr r="0" g="0" b="0"/>
+        </a:lnRef>
+        <a:fillRef idx="1">
+          <a:scrgbClr r="0" g="0" b="0"/>
+        </a:fillRef>
+        <a:effectRef idx="0">
+          <a:scrgbClr r="0" g="0" b="0"/>
+        </a:effectRef>
+        <a:fontRef idx="minor"/>
+      </dsp:style>
+      <dsp:txBody>
+        <a:bodyPr spcFirstLastPara="0" vert="horz" wrap="square" lIns="64770" tIns="64770" rIns="64770" bIns="64770" numCol="1" spcCol="1270" anchor="ctr" anchorCtr="0">
+          <a:noAutofit/>
+        </a:bodyPr>
+        <a:lstStyle/>
+        <a:p>
+          <a:pPr marL="0" lvl="0" indent="0" algn="ctr" defTabSz="755650">
+            <a:lnSpc>
+              <a:spcPct val="90000"/>
+            </a:lnSpc>
+            <a:spcBef>
+              <a:spcPct val="0"/>
+            </a:spcBef>
+            <a:spcAft>
+              <a:spcPct val="35000"/>
+            </a:spcAft>
+            <a:buNone/>
+          </a:pPr>
+          <a:r>
+            <a:rPr lang="en-US" sz="1700" kern="1200"/>
+            <a:t>We proved our hypothesis that unsupervised metrics could improve our supervised upset predictions over a baseline model (guess 50-50 model). </a:t>
+          </a:r>
+        </a:p>
+      </dsp:txBody>
+      <dsp:txXfrm>
+        <a:off x="398656" y="1088253"/>
+        <a:ext cx="2959127" cy="1837317"/>
+      </dsp:txXfrm>
+    </dsp:sp>
+    <dsp:sp modelId="{F76CC354-EC1C-4237-9AF7-E24C401081B9}">
+      <dsp:nvSpPr>
+        <dsp:cNvPr id="0" name=""/>
+        <dsp:cNvSpPr/>
+      </dsp:nvSpPr>
+      <dsp:spPr>
+        <a:xfrm>
+          <a:off x="3756441" y="706671"/>
+          <a:ext cx="3073451" cy="1951641"/>
+        </a:xfrm>
+        <a:prstGeom prst="roundRect">
+          <a:avLst>
+            <a:gd name="adj" fmla="val 10000"/>
+          </a:avLst>
+        </a:prstGeom>
+        <a:solidFill>
+          <a:schemeClr val="accent1">
+            <a:hueOff val="0"/>
+            <a:satOff val="0"/>
+            <a:lumOff val="0"/>
+            <a:alphaOff val="0"/>
+          </a:schemeClr>
+        </a:solidFill>
+        <a:ln w="19050" cap="flat" cmpd="sng" algn="ctr">
+          <a:solidFill>
+            <a:schemeClr val="lt1">
+              <a:hueOff val="0"/>
+              <a:satOff val="0"/>
+              <a:lumOff val="0"/>
+              <a:alphaOff val="0"/>
+            </a:schemeClr>
+          </a:solidFill>
+          <a:prstDash val="solid"/>
+          <a:miter lim="800000"/>
+        </a:ln>
+        <a:effectLst/>
+      </dsp:spPr>
+      <dsp:style>
+        <a:lnRef idx="2">
+          <a:scrgbClr r="0" g="0" b="0"/>
+        </a:lnRef>
+        <a:fillRef idx="1">
+          <a:scrgbClr r="0" g="0" b="0"/>
+        </a:fillRef>
+        <a:effectRef idx="0">
+          <a:scrgbClr r="0" g="0" b="0"/>
+        </a:effectRef>
+        <a:fontRef idx="minor">
+          <a:schemeClr val="lt1"/>
+        </a:fontRef>
+      </dsp:style>
+    </dsp:sp>
+    <dsp:sp modelId="{7B0DCC16-14D9-453E-9DA2-75672FE1E2EF}">
+      <dsp:nvSpPr>
+        <dsp:cNvPr id="0" name=""/>
+        <dsp:cNvSpPr/>
+      </dsp:nvSpPr>
+      <dsp:spPr>
+        <a:xfrm>
+          <a:off x="4097935" y="1031091"/>
+          <a:ext cx="3073451" cy="1951641"/>
+        </a:xfrm>
+        <a:prstGeom prst="roundRect">
+          <a:avLst>
+            <a:gd name="adj" fmla="val 10000"/>
+          </a:avLst>
+        </a:prstGeom>
+        <a:solidFill>
+          <a:schemeClr val="lt1">
+            <a:alpha val="90000"/>
+            <a:hueOff val="0"/>
+            <a:satOff val="0"/>
+            <a:lumOff val="0"/>
+            <a:alphaOff val="0"/>
+          </a:schemeClr>
+        </a:solidFill>
+        <a:ln w="19050" cap="flat" cmpd="sng" algn="ctr">
+          <a:solidFill>
+            <a:schemeClr val="accent1">
+              <a:hueOff val="0"/>
+              <a:satOff val="0"/>
+              <a:lumOff val="0"/>
+              <a:alphaOff val="0"/>
+            </a:schemeClr>
+          </a:solidFill>
+          <a:prstDash val="solid"/>
+          <a:miter lim="800000"/>
+        </a:ln>
+        <a:effectLst/>
+      </dsp:spPr>
+      <dsp:style>
+        <a:lnRef idx="2">
+          <a:scrgbClr r="0" g="0" b="0"/>
+        </a:lnRef>
+        <a:fillRef idx="1">
+          <a:scrgbClr r="0" g="0" b="0"/>
+        </a:fillRef>
+        <a:effectRef idx="0">
+          <a:scrgbClr r="0" g="0" b="0"/>
+        </a:effectRef>
+        <a:fontRef idx="minor"/>
+      </dsp:style>
+      <dsp:txBody>
+        <a:bodyPr spcFirstLastPara="0" vert="horz" wrap="square" lIns="64770" tIns="64770" rIns="64770" bIns="64770" numCol="1" spcCol="1270" anchor="ctr" anchorCtr="0">
+          <a:noAutofit/>
+        </a:bodyPr>
+        <a:lstStyle/>
+        <a:p>
+          <a:pPr marL="0" lvl="0" indent="0" algn="ctr" defTabSz="755650">
+            <a:lnSpc>
+              <a:spcPct val="90000"/>
+            </a:lnSpc>
+            <a:spcBef>
+              <a:spcPct val="0"/>
+            </a:spcBef>
+            <a:spcAft>
+              <a:spcPct val="35000"/>
+            </a:spcAft>
+            <a:buNone/>
+          </a:pPr>
+          <a:r>
+            <a:rPr lang="en-US" sz="1700" kern="1200"/>
+            <a:t>Statistically, Cinderella runs are uncommon and thus difficult to work with due to imbalanced data. </a:t>
+          </a:r>
+        </a:p>
+      </dsp:txBody>
+      <dsp:txXfrm>
+        <a:off x="4155097" y="1088253"/>
+        <a:ext cx="2959127" cy="1837317"/>
+      </dsp:txXfrm>
+    </dsp:sp>
+    <dsp:sp modelId="{14FAEA80-420A-4DF9-8C71-47C47D8F56E9}">
+      <dsp:nvSpPr>
+        <dsp:cNvPr id="0" name=""/>
+        <dsp:cNvSpPr/>
+      </dsp:nvSpPr>
+      <dsp:spPr>
+        <a:xfrm>
+          <a:off x="7512882" y="706671"/>
+          <a:ext cx="3073451" cy="1951641"/>
+        </a:xfrm>
+        <a:prstGeom prst="roundRect">
+          <a:avLst>
+            <a:gd name="adj" fmla="val 10000"/>
+          </a:avLst>
+        </a:prstGeom>
+        <a:solidFill>
+          <a:schemeClr val="accent1">
+            <a:hueOff val="0"/>
+            <a:satOff val="0"/>
+            <a:lumOff val="0"/>
+            <a:alphaOff val="0"/>
+          </a:schemeClr>
+        </a:solidFill>
+        <a:ln w="19050" cap="flat" cmpd="sng" algn="ctr">
+          <a:solidFill>
+            <a:schemeClr val="lt1">
+              <a:hueOff val="0"/>
+              <a:satOff val="0"/>
+              <a:lumOff val="0"/>
+              <a:alphaOff val="0"/>
+            </a:schemeClr>
+          </a:solidFill>
+          <a:prstDash val="solid"/>
+          <a:miter lim="800000"/>
+        </a:ln>
+        <a:effectLst/>
+      </dsp:spPr>
+      <dsp:style>
+        <a:lnRef idx="2">
+          <a:scrgbClr r="0" g="0" b="0"/>
+        </a:lnRef>
+        <a:fillRef idx="1">
+          <a:scrgbClr r="0" g="0" b="0"/>
+        </a:fillRef>
+        <a:effectRef idx="0">
+          <a:scrgbClr r="0" g="0" b="0"/>
+        </a:effectRef>
+        <a:fontRef idx="minor">
+          <a:schemeClr val="lt1"/>
+        </a:fontRef>
+      </dsp:style>
+    </dsp:sp>
+    <dsp:sp modelId="{581A08C7-F3DA-450D-A4A2-96E835EA8E24}">
+      <dsp:nvSpPr>
+        <dsp:cNvPr id="0" name=""/>
+        <dsp:cNvSpPr/>
+      </dsp:nvSpPr>
+      <dsp:spPr>
+        <a:xfrm>
+          <a:off x="7854377" y="1031091"/>
+          <a:ext cx="3073451" cy="1951641"/>
+        </a:xfrm>
+        <a:prstGeom prst="roundRect">
+          <a:avLst>
+            <a:gd name="adj" fmla="val 10000"/>
+          </a:avLst>
+        </a:prstGeom>
+        <a:solidFill>
+          <a:schemeClr val="lt1">
+            <a:alpha val="90000"/>
+            <a:hueOff val="0"/>
+            <a:satOff val="0"/>
+            <a:lumOff val="0"/>
+            <a:alphaOff val="0"/>
+          </a:schemeClr>
+        </a:solidFill>
+        <a:ln w="19050" cap="flat" cmpd="sng" algn="ctr">
+          <a:solidFill>
+            <a:schemeClr val="accent1">
+              <a:hueOff val="0"/>
+              <a:satOff val="0"/>
+              <a:lumOff val="0"/>
+              <a:alphaOff val="0"/>
+            </a:schemeClr>
+          </a:solidFill>
+          <a:prstDash val="solid"/>
+          <a:miter lim="800000"/>
+        </a:ln>
+        <a:effectLst/>
+      </dsp:spPr>
+      <dsp:style>
+        <a:lnRef idx="2">
+          <a:scrgbClr r="0" g="0" b="0"/>
+        </a:lnRef>
+        <a:fillRef idx="1">
+          <a:scrgbClr r="0" g="0" b="0"/>
+        </a:fillRef>
+        <a:effectRef idx="0">
+          <a:scrgbClr r="0" g="0" b="0"/>
+        </a:effectRef>
+        <a:fontRef idx="minor"/>
+      </dsp:style>
+      <dsp:txBody>
+        <a:bodyPr spcFirstLastPara="0" vert="horz" wrap="square" lIns="64770" tIns="64770" rIns="64770" bIns="64770" numCol="1" spcCol="1270" anchor="ctr" anchorCtr="0">
+          <a:noAutofit/>
+        </a:bodyPr>
+        <a:lstStyle/>
+        <a:p>
+          <a:pPr marL="0" lvl="0" indent="0" algn="ctr" defTabSz="755650">
+            <a:lnSpc>
+              <a:spcPct val="90000"/>
+            </a:lnSpc>
+            <a:spcBef>
+              <a:spcPct val="0"/>
+            </a:spcBef>
+            <a:spcAft>
+              <a:spcPct val="35000"/>
+            </a:spcAft>
+            <a:buNone/>
+          </a:pPr>
+          <a:r>
+            <a:rPr lang="en-US" sz="1700" kern="1200"/>
+            <a:t>However, by looking at efficiency profiles, ball security, and team consistency, we can find teams that are better teams than their seed might suggest.</a:t>
+          </a:r>
+        </a:p>
+      </dsp:txBody>
+      <dsp:txXfrm>
+        <a:off x="7911539" y="1088253"/>
+        <a:ext cx="2959127" cy="1837317"/>
+      </dsp:txXfrm>
+    </dsp:sp>
+  </dsp:spTree>
+</dsp:drawing>
+</file>
+
+<file path=ppt/diagrams/layout1.xml><?xml version="1.0" encoding="utf-8"?>
+<dgm:layoutDef xmlns:dgm="http://schemas.openxmlformats.org/drawingml/2006/diagram" xmlns:a="http://schemas.openxmlformats.org/drawingml/2006/main" uniqueId="urn:microsoft.com/office/officeart/2005/8/layout/hierarchy1">
+  <dgm:title val=""/>
+  <dgm:desc val=""/>
+  <dgm:catLst>
+    <dgm:cat type="hierarchy" pri="2000"/>
+  </dgm:catLst>
+  <dgm:sampData>
+    <dgm:dataModel>
+      <dgm:ptLst>
+        <dgm:pt modelId="0" type="doc"/>
+        <dgm:pt modelId="1">
+          <dgm:prSet phldr="1"/>
+        </dgm:pt>
+        <dgm:pt modelId="2">
+          <dgm:prSet phldr="1"/>
+        </dgm:pt>
+        <dgm:pt modelId="21">
+          <dgm:prSet phldr="1"/>
+        </dgm:pt>
+        <dgm:pt modelId="22">
+          <dgm:prSet phldr="1"/>
+        </dgm:pt>
+        <dgm:pt modelId="3">
+          <dgm:prSet phldr="1"/>
+        </dgm:pt>
+        <dgm:pt modelId="31">
+          <dgm:prSet phldr="1"/>
+        </dgm:pt>
+      </dgm:ptLst>
+      <dgm:cxnLst>
+        <dgm:cxn modelId="4" srcId="0" destId="1" srcOrd="0" destOrd="0"/>
+        <dgm:cxn modelId="5" srcId="1" destId="2" srcOrd="0" destOrd="0"/>
+        <dgm:cxn modelId="6" srcId="1" destId="3" srcOrd="1" destOrd="0"/>
+        <dgm:cxn modelId="23" srcId="2" destId="21" srcOrd="0" destOrd="0"/>
+        <dgm:cxn modelId="24" srcId="2" destId="22" srcOrd="1" destOrd="0"/>
+        <dgm:cxn modelId="33" srcId="3" destId="31" srcOrd="0" destOrd="0"/>
+      </dgm:cxnLst>
+      <dgm:bg/>
+      <dgm:whole/>
+    </dgm:dataModel>
+  </dgm:sampData>
+  <dgm:styleData>
+    <dgm:dataModel>
+      <dgm:ptLst>
+        <dgm:pt modelId="0" type="doc"/>
+        <dgm:pt modelId="1"/>
+        <dgm:pt modelId="11"/>
+        <dgm:pt modelId="12"/>
+      </dgm:ptLst>
+      <dgm:cxnLst>
+        <dgm:cxn modelId="2" srcId="0" destId="1" srcOrd="0" destOrd="0"/>
+        <dgm:cxn modelId="13" srcId="1" destId="11" srcOrd="0" destOrd="0"/>
+        <dgm:cxn modelId="14" srcId="1" destId="12" srcOrd="1" destOrd="0"/>
+      </dgm:cxnLst>
+      <dgm:bg/>
+      <dgm:whole/>
+    </dgm:dataModel>
+  </dgm:styleData>
+  <dgm:clrData>
+    <dgm:dataModel>
+      <dgm:ptLst>
+        <dgm:pt modelId="0" type="doc"/>
+        <dgm:pt modelId="1"/>
+        <dgm:pt modelId="2"/>
+        <dgm:pt modelId="21"/>
+        <dgm:pt modelId="211"/>
+        <dgm:pt modelId="3"/>
+        <dgm:pt modelId="31"/>
+        <dgm:pt modelId="311"/>
+      </dgm:ptLst>
+      <dgm:cxnLst>
+        <dgm:cxn modelId="4" srcId="0" destId="1" srcOrd="0" destOrd="0"/>
+        <dgm:cxn modelId="5" srcId="1" destId="2" srcOrd="0" destOrd="0"/>
+        <dgm:cxn modelId="6" srcId="1" destId="3" srcOrd="1" destOrd="0"/>
+        <dgm:cxn modelId="23" srcId="2" destId="21" srcOrd="0" destOrd="0"/>
+        <dgm:cxn modelId="24" srcId="21" destId="211" srcOrd="0" destOrd="0"/>
+        <dgm:cxn modelId="33" srcId="3" destId="31" srcOrd="0" destOrd="0"/>
+        <dgm:cxn modelId="34" srcId="31" destId="311" srcOrd="0" destOrd="0"/>
+      </dgm:cxnLst>
+      <dgm:bg/>
+      <dgm:whole/>
+    </dgm:dataModel>
+  </dgm:clrData>
+  <dgm:layoutNode name="hierChild1">
+    <dgm:varLst>
+      <dgm:chPref val="1"/>
+      <dgm:dir/>
+      <dgm:animOne val="branch"/>
+      <dgm:animLvl val="lvl"/>
+      <dgm:resizeHandles/>
+    </dgm:varLst>
+    <dgm:choose name="Name0">
+      <dgm:if name="Name1" func="var" arg="dir" op="equ" val="norm">
+        <dgm:alg type="hierChild">
+          <dgm:param type="linDir" val="fromL"/>
+        </dgm:alg>
+      </dgm:if>
+      <dgm:else name="Name2">
+        <dgm:alg type="hierChild">
+          <dgm:param type="linDir" val="fromR"/>
+        </dgm:alg>
+      </dgm:else>
+    </dgm:choose>
+    <dgm:shape xmlns:r="http://schemas.openxmlformats.org/officeDocument/2006/relationships" r:blip="">
+      <dgm:adjLst/>
+    </dgm:shape>
+    <dgm:presOf/>
+    <dgm:constrLst>
+      <dgm:constr type="primFontSz" for="des" ptType="node" op="equ" val="65"/>
+      <dgm:constr type="w" for="des" forName="composite" refType="w"/>
+      <dgm:constr type="h" for="des" forName="composite" refType="w" refFor="des" refForName="composite" fact="0.667"/>
+      <dgm:constr type="w" for="des" forName="composite2" refType="w" refFor="des" refForName="composite"/>
+      <dgm:constr type="h" for="des" forName="composite2" refType="h" refFor="des" refForName="composite"/>
+      <dgm:constr type="w" for="des" forName="composite3" refType="w" refFor="des" refForName="composite"/>
+      <dgm:constr type="h" for="des" forName="composite3" refType="h" refFor="des" refForName="composite"/>
+      <dgm:constr type="w" for="des" forName="composite4" refType="w" refFor="des" refForName="composite"/>
+      <dgm:constr type="h" for="des" forName="composite4" refType="h" refFor="des" refForName="composite"/>
+      <dgm:constr type="w" for="des" forName="composite5" refType="w" refFor="des" refForName="composite"/>
+      <dgm:constr type="h" for="des" forName="composite5" refType="h" refFor="des" refForName="composite"/>
+      <dgm:constr type="sibSp" refType="w" refFor="des" refForName="composite" fact="0.1"/>
+      <dgm:constr type="sibSp" for="des" forName="hierChild2" refType="sibSp"/>
+      <dgm:constr type="sibSp" for="des" forName="hierChild3" refType="sibSp"/>
+      <dgm:constr type="sibSp" for="des" forName="hierChild4" refType="sibSp"/>
+      <dgm:constr type="sibSp" for="des" forName="hierChild5" refType="sibSp"/>
+      <dgm:constr type="sibSp" for="des" forName="hierChild6" refType="sibSp"/>
+      <dgm:constr type="sp" for="des" forName="hierRoot1" refType="h" refFor="des" refForName="composite" fact="0.25"/>
+      <dgm:constr type="sp" for="des" forName="hierRoot2" refType="sp" refFor="des" refForName="hierRoot1"/>
+      <dgm:constr type="sp" for="des" forName="hierRoot3" refType="sp" refFor="des" refForName="hierRoot1"/>
+      <dgm:constr type="sp" for="des" forName="hierRoot4" refType="sp" refFor="des" refForName="hierRoot1"/>
+      <dgm:constr type="sp" for="des" forName="hierRoot5" refType="sp" refFor="des" refForName="hierRoot1"/>
+    </dgm:constrLst>
+    <dgm:ruleLst/>
+    <dgm:forEach name="Name3" axis="ch">
+      <dgm:forEach name="Name4" axis="self" ptType="node">
+        <dgm:layoutNode name="hierRoot1">
+          <dgm:alg type="hierRoot"/>
+          <dgm:shape xmlns:r="http://schemas.openxmlformats.org/officeDocument/2006/relationships" r:blip="">
+            <dgm:adjLst/>
+          </dgm:shape>
+          <dgm:presOf/>
+          <dgm:constrLst>
+            <dgm:constr type="bendDist" for="des" ptType="parTrans" refType="sp" fact="0.5"/>
+          </dgm:constrLst>
+          <dgm:ruleLst/>
+          <dgm:layoutNode name="composite">
+            <dgm:alg type="composite"/>
+            <dgm:shape xmlns:r="http://schemas.openxmlformats.org/officeDocument/2006/relationships" r:blip="">
+              <dgm:adjLst/>
+            </dgm:shape>
+            <dgm:presOf/>
+            <dgm:constrLst>
+              <dgm:constr type="w" for="ch" forName="background" refType="w" fact="0.9"/>
+              <dgm:constr type="h" for="ch" forName="background" refType="w" refFor="ch" refForName="background" fact="0.635"/>
+              <dgm:constr type="t" for="ch" forName="background"/>
+              <dgm:constr type="l" for="ch" forName="background"/>
+              <dgm:constr type="w" for="ch" forName="text" refType="w" fact="0.9"/>
+              <dgm:constr type="h" for="ch" forName="text" refType="w" refFor="ch" refForName="text" fact="0.635"/>
+              <dgm:constr type="t" for="ch" forName="text" refType="w" fact="0.095"/>
+              <dgm:constr type="l" for="ch" forName="text" refType="w" fact="0.1"/>
+            </dgm:constrLst>
+            <dgm:ruleLst/>
+            <dgm:layoutNode name="background" styleLbl="node0" moveWith="text">
+              <dgm:alg type="sp"/>
+              <dgm:shape xmlns:r="http://schemas.openxmlformats.org/officeDocument/2006/relationships" type="roundRect" r:blip="">
+                <dgm:adjLst>
+                  <dgm:adj idx="1" val="0.1"/>
+                </dgm:adjLst>
+              </dgm:shape>
+              <dgm:presOf/>
+              <dgm:constrLst/>
+              <dgm:ruleLst/>
+            </dgm:layoutNode>
+            <dgm:layoutNode name="text" styleLbl="fgAcc0">
+              <dgm:varLst>
+                <dgm:chPref val="3"/>
+              </dgm:varLst>
+              <dgm:alg type="tx"/>
+              <dgm:shape xmlns:r="http://schemas.openxmlformats.org/officeDocument/2006/relationships" type="roundRect" r:blip="">
+                <dgm:adjLst>
+                  <dgm:adj idx="1" val="0.1"/>
+                </dgm:adjLst>
+              </dgm:shape>
+              <dgm:presOf axis="self"/>
+              <dgm:constrLst>
+                <dgm:constr type="tMarg" refType="primFontSz" fact="0.3"/>
+                <dgm:constr type="bMarg" refType="primFontSz" fact="0.3"/>
+                <dgm:constr type="lMarg" refType="primFontSz" fact="0.3"/>
+                <dgm:constr type="rMarg" refType="primFontSz" fact="0.3"/>
+              </dgm:constrLst>
+              <dgm:ruleLst>
+                <dgm:rule type="primFontSz" val="5" fact="NaN" max="NaN"/>
+              </dgm:ruleLst>
+            </dgm:layoutNode>
+          </dgm:layoutNode>
+          <dgm:layoutNode name="hierChild2">
+            <dgm:choose name="Name5">
+              <dgm:if name="Name6" func="var" arg="dir" op="equ" val="norm">
+                <dgm:alg type="hierChild">
+                  <dgm:param type="linDir" val="fromL"/>
+                </dgm:alg>
+              </dgm:if>
+              <dgm:else name="Name7">
+                <dgm:alg type="hierChild">
+                  <dgm:param type="linDir" val="fromR"/>
+                </dgm:alg>
+              </dgm:else>
+            </dgm:choose>
+            <dgm:shape xmlns:r="http://schemas.openxmlformats.org/officeDocument/2006/relationships" r:blip="">
+              <dgm:adjLst/>
+            </dgm:shape>
+            <dgm:presOf/>
+            <dgm:constrLst/>
+            <dgm:ruleLst/>
+            <dgm:forEach name="Name8" axis="ch">
+              <dgm:forEach name="Name9" axis="self" ptType="parTrans" cnt="1">
+                <dgm:layoutNode name="Name10">
+                  <dgm:alg type="conn">
+                    <dgm:param type="dim" val="1D"/>
+                    <dgm:param type="endSty" val="noArr"/>
+                    <dgm:param type="connRout" val="bend"/>
+                    <dgm:param type="bendPt" val="end"/>
+                    <dgm:param type="begPts" val="bCtr"/>
+                    <dgm:param type="endPts" val="tCtr"/>
+                    <dgm:param type="srcNode" val="background"/>
+                    <dgm:param type="dstNode" val="background2"/>
+                  </dgm:alg>
+                  <dgm:shape xmlns:r="http://schemas.openxmlformats.org/officeDocument/2006/relationships" type="conn" r:blip="" zOrderOff="-999">
+                    <dgm:adjLst/>
+                  </dgm:shape>
+                  <dgm:presOf axis="self"/>
+                  <dgm:constrLst>
+                    <dgm:constr type="begPad"/>
+                    <dgm:constr type="endPad"/>
+                  </dgm:constrLst>
+                  <dgm:ruleLst/>
+                </dgm:layoutNode>
+              </dgm:forEach>
+              <dgm:forEach name="Name11" axis="self" ptType="node">
+                <dgm:layoutNode name="hierRoot2">
+                  <dgm:alg type="hierRoot"/>
+                  <dgm:shape xmlns:r="http://schemas.openxmlformats.org/officeDocument/2006/relationships" r:blip="">
+                    <dgm:adjLst/>
+                  </dgm:shape>
+                  <dgm:presOf/>
+                  <dgm:constrLst>
+                    <dgm:constr type="bendDist" for="des" ptType="parTrans" refType="sp" fact="0.5"/>
+                  </dgm:constrLst>
+                  <dgm:ruleLst/>
+                  <dgm:layoutNode name="composite2">
+                    <dgm:alg type="composite"/>
+                    <dgm:shape xmlns:r="http://schemas.openxmlformats.org/officeDocument/2006/relationships" r:blip="">
+                      <dgm:adjLst/>
+                    </dgm:shape>
+                    <dgm:presOf/>
+                    <dgm:constrLst>
+                      <dgm:constr type="w" for="ch" forName="background2" refType="w" fact="0.9"/>
+                      <dgm:constr type="h" for="ch" forName="background2" refType="w" refFor="ch" refForName="background2" fact="0.635"/>
+                      <dgm:constr type="t" for="ch" forName="background2"/>
+                      <dgm:constr type="l" for="ch" forName="background2"/>
+                      <dgm:constr type="w" for="ch" forName="text2" refType="w" fact="0.9"/>
+                      <dgm:constr type="h" for="ch" forName="text2" refType="w" refFor="ch" refForName="text2" fact="0.635"/>
+                      <dgm:constr type="t" for="ch" forName="text2" refType="w" fact="0.095"/>
+                      <dgm:constr type="l" for="ch" forName="text2" refType="w" fact="0.1"/>
+                    </dgm:constrLst>
+                    <dgm:ruleLst/>
+                    <dgm:layoutNode name="background2" moveWith="text2">
+                      <dgm:alg type="sp"/>
+                      <dgm:shape xmlns:r="http://schemas.openxmlformats.org/officeDocument/2006/relationships" type="roundRect" r:blip="">
+                        <dgm:adjLst>
+                          <dgm:adj idx="1" val="0.1"/>
+                        </dgm:adjLst>
+                      </dgm:shape>
+                      <dgm:presOf/>
+                      <dgm:constrLst/>
+                      <dgm:ruleLst/>
+                    </dgm:layoutNode>
+                    <dgm:layoutNode name="text2" styleLbl="fgAcc2">
+                      <dgm:varLst>
+                        <dgm:chPref val="3"/>
+                      </dgm:varLst>
+                      <dgm:alg type="tx"/>
+                      <dgm:shape xmlns:r="http://schemas.openxmlformats.org/officeDocument/2006/relationships" type="roundRect" r:blip="">
+                        <dgm:adjLst>
+                          <dgm:adj idx="1" val="0.1"/>
+                        </dgm:adjLst>
+                      </dgm:shape>
+                      <dgm:presOf axis="self"/>
+                      <dgm:constrLst>
+                        <dgm:constr type="tMarg" refType="primFontSz" fact="0.3"/>
+                        <dgm:constr type="bMarg" refType="primFontSz" fact="0.3"/>
+                        <dgm:constr type="lMarg" refType="primFontSz" fact="0.3"/>
+                        <dgm:constr type="rMarg" refType="primFontSz" fact="0.3"/>
+                      </dgm:constrLst>
+                      <dgm:ruleLst>
+                        <dgm:rule type="primFontSz" val="5" fact="NaN" max="NaN"/>
+                      </dgm:ruleLst>
+                    </dgm:layoutNode>
+                  </dgm:layoutNode>
+                  <dgm:layoutNode name="hierChild3">
+                    <dgm:choose name="Name12">
+                      <dgm:if name="Name13" func="var" arg="dir" op="equ" val="norm">
+                        <dgm:alg type="hierChild">
+                          <dgm:param type="linDir" val="fromL"/>
+                        </dgm:alg>
+                      </dgm:if>
+                      <dgm:else name="Name14">
+                        <dgm:alg type="hierChild">
+                          <dgm:param type="linDir" val="fromR"/>
+                        </dgm:alg>
+                      </dgm:else>
+                    </dgm:choose>
+                    <dgm:shape xmlns:r="http://schemas.openxmlformats.org/officeDocument/2006/relationships" r:blip="">
+                      <dgm:adjLst/>
+                    </dgm:shape>
+                    <dgm:presOf/>
+                    <dgm:constrLst/>
+                    <dgm:ruleLst/>
+                    <dgm:forEach name="Name15" axis="ch">
+                      <dgm:forEach name="Name16" axis="self" ptType="parTrans" cnt="1">
+                        <dgm:layoutNode name="Name17">
+                          <dgm:alg type="conn">
+                            <dgm:param type="dim" val="1D"/>
+                            <dgm:param type="endSty" val="noArr"/>
+                            <dgm:param type="connRout" val="bend"/>
+                            <dgm:param type="bendPt" val="end"/>
+                            <dgm:param type="begPts" val="bCtr"/>
+                            <dgm:param type="endPts" val="tCtr"/>
+                            <dgm:param type="srcNode" val="background2"/>
+                            <dgm:param type="dstNode" val="background3"/>
+                          </dgm:alg>
+                          <dgm:shape xmlns:r="http://schemas.openxmlformats.org/officeDocument/2006/relationships" type="conn" r:blip="" zOrderOff="-999">
+                            <dgm:adjLst/>
+                          </dgm:shape>
+                          <dgm:presOf axis="self"/>
+                          <dgm:constrLst>
+                            <dgm:constr type="begPad"/>
+                            <dgm:constr type="endPad"/>
+                          </dgm:constrLst>
+                          <dgm:ruleLst/>
+                        </dgm:layoutNode>
+                      </dgm:forEach>
+                      <dgm:forEach name="Name18" axis="self" ptType="node">
+                        <dgm:layoutNode name="hierRoot3">
+                          <dgm:alg type="hierRoot"/>
+                          <dgm:shape xmlns:r="http://schemas.openxmlformats.org/officeDocument/2006/relationships" r:blip="">
+                            <dgm:adjLst/>
+                          </dgm:shape>
+                          <dgm:presOf/>
+                          <dgm:constrLst>
+                            <dgm:constr type="bendDist" for="des" ptType="parTrans" refType="sp" fact="0.5"/>
+                          </dgm:constrLst>
+                          <dgm:ruleLst/>
+                          <dgm:layoutNode name="composite3">
+                            <dgm:alg type="composite"/>
+                            <dgm:shape xmlns:r="http://schemas.openxmlformats.org/officeDocument/2006/relationships" r:blip="">
+                              <dgm:adjLst/>
+                            </dgm:shape>
+                            <dgm:presOf/>
+                            <dgm:constrLst>
+                              <dgm:constr type="w" for="ch" forName="background3" refType="w" fact="0.9"/>
+                              <dgm:constr type="h" for="ch" forName="background3" refType="w" refFor="ch" refForName="background3" fact="0.635"/>
+                              <dgm:constr type="t" for="ch" forName="background3"/>
+                              <dgm:constr type="l" for="ch" forName="background3"/>
+                              <dgm:constr type="w" for="ch" forName="text3" refType="w" fact="0.9"/>
+                              <dgm:constr type="h" for="ch" forName="text3" refType="w" refFor="ch" refForName="text3" fact="0.635"/>
+                              <dgm:constr type="t" for="ch" forName="text3" refType="w" fact="0.095"/>
+                              <dgm:constr type="l" for="ch" forName="text3" refType="w" fact="0.1"/>
+                            </dgm:constrLst>
+                            <dgm:ruleLst/>
+                            <dgm:layoutNode name="background3" moveWith="text3">
+                              <dgm:alg type="sp"/>
+                              <dgm:shape xmlns:r="http://schemas.openxmlformats.org/officeDocument/2006/relationships" type="roundRect" r:blip="">
+                                <dgm:adjLst>
+                                  <dgm:adj idx="1" val="0.1"/>
+                                </dgm:adjLst>
+                              </dgm:shape>
+                              <dgm:presOf/>
+                              <dgm:constrLst/>
+                              <dgm:ruleLst/>
+                            </dgm:layoutNode>
+                            <dgm:layoutNode name="text3" styleLbl="fgAcc3">
+                              <dgm:varLst>
+                                <dgm:chPref val="3"/>
+                              </dgm:varLst>
+                              <dgm:alg type="tx"/>
+                              <dgm:shape xmlns:r="http://schemas.openxmlformats.org/officeDocument/2006/relationships" type="roundRect" r:blip="">
+                                <dgm:adjLst>
+                                  <dgm:adj idx="1" val="0.1"/>
+                                </dgm:adjLst>
+                              </dgm:shape>
+                              <dgm:presOf axis="self"/>
+                              <dgm:constrLst>
+                                <dgm:constr type="tMarg" refType="primFontSz" fact="0.3"/>
+                                <dgm:constr type="bMarg" refType="primFontSz" fact="0.3"/>
+                                <dgm:constr type="lMarg" refType="primFontSz" fact="0.3"/>
+                                <dgm:constr type="rMarg" refType="primFontSz" fact="0.3"/>
+                              </dgm:constrLst>
+                              <dgm:ruleLst>
+                                <dgm:rule type="primFontSz" val="5" fact="NaN" max="NaN"/>
+                              </dgm:ruleLst>
+                            </dgm:layoutNode>
+                          </dgm:layoutNode>
+                          <dgm:layoutNode name="hierChild4">
+                            <dgm:choose name="Name19">
+                              <dgm:if name="Name20" func="var" arg="dir" op="equ" val="norm">
+                                <dgm:alg type="hierChild">
+                                  <dgm:param type="linDir" val="fromL"/>
+                                </dgm:alg>
+                              </dgm:if>
+                              <dgm:else name="Name21">
+                                <dgm:alg type="hierChild">
+                                  <dgm:param type="linDir" val="fromR"/>
+                                </dgm:alg>
+                              </dgm:else>
+                            </dgm:choose>
+                            <dgm:shape xmlns:r="http://schemas.openxmlformats.org/officeDocument/2006/relationships" r:blip="">
+                              <dgm:adjLst/>
+                            </dgm:shape>
+                            <dgm:presOf/>
+                            <dgm:constrLst/>
+                            <dgm:ruleLst/>
+                            <dgm:forEach name="repeat" axis="ch">
+                              <dgm:forEach name="Name22" axis="self" ptType="parTrans" cnt="1">
+                                <dgm:layoutNode name="Name23">
+                                  <dgm:choose name="Name24">
+                                    <dgm:if name="Name25" axis="self" func="depth" op="lte" val="4">
+                                      <dgm:alg type="conn">
+                                        <dgm:param type="dim" val="1D"/>
+                                        <dgm:param type="endSty" val="noArr"/>
+                                        <dgm:param type="connRout" val="bend"/>
+                                        <dgm:param type="bendPt" val="end"/>
+                                        <dgm:param type="begPts" val="bCtr"/>
+                                        <dgm:param type="endPts" val="tCtr"/>
+                                        <dgm:param type="srcNode" val="background3"/>
+                                        <dgm:param type="dstNode" val="background4"/>
+                                      </dgm:alg>
+                                    </dgm:if>
+                                    <dgm:else name="Name26">
+                                      <dgm:alg type="conn">
+                                        <dgm:param type="dim" val="1D"/>
+                                        <dgm:param type="endSty" val="noArr"/>
+                                        <dgm:param type="connRout" val="bend"/>
+                                        <dgm:param type="bendPt" val="end"/>
+                                        <dgm:param type="begPts" val="bCtr"/>
+                                        <dgm:param type="endPts" val="tCtr"/>
+                                        <dgm:param type="srcNode" val="background4"/>
+                                        <dgm:param type="dstNode" val="background4"/>
+                                      </dgm:alg>
+                                    </dgm:else>
+                                  </dgm:choose>
+                                  <dgm:shape xmlns:r="http://schemas.openxmlformats.org/officeDocument/2006/relationships" type="conn" r:blip="" zOrderOff="-999">
+                                    <dgm:adjLst/>
+                                  </dgm:shape>
+                                  <dgm:presOf axis="self"/>
+                                  <dgm:constrLst>
+                                    <dgm:constr type="begPad"/>
+                                    <dgm:constr type="endPad"/>
+                                  </dgm:constrLst>
+                                  <dgm:ruleLst/>
+                                </dgm:layoutNode>
+                              </dgm:forEach>
+                              <dgm:forEach name="Name27" axis="self" ptType="node">
+                                <dgm:layoutNode name="hierRoot4">
+                                  <dgm:alg type="hierRoot"/>
+                                  <dgm:shape xmlns:r="http://schemas.openxmlformats.org/officeDocument/2006/relationships" r:blip="">
+                                    <dgm:adjLst/>
+                                  </dgm:shape>
+                                  <dgm:presOf/>
+                                  <dgm:constrLst>
+                                    <dgm:constr type="bendDist" for="des" ptType="parTrans" refType="sp" fact="0.5"/>
+                                  </dgm:constrLst>
+                                  <dgm:ruleLst/>
+                                  <dgm:layoutNode name="composite4">
+                                    <dgm:alg type="composite"/>
+                                    <dgm:shape xmlns:r="http://schemas.openxmlformats.org/officeDocument/2006/relationships" r:blip="">
+                                      <dgm:adjLst/>
+                                    </dgm:shape>
+                                    <dgm:presOf/>
+                                    <dgm:constrLst>
+                                      <dgm:constr type="w" for="ch" forName="background4" refType="w" fact="0.9"/>
+                                      <dgm:constr type="h" for="ch" forName="background4" refType="w" refFor="ch" refForName="background4" fact="0.635"/>
+                                      <dgm:constr type="t" for="ch" forName="background4"/>
+                                      <dgm:constr type="l" for="ch" forName="background4"/>
+                                      <dgm:constr type="w" for="ch" forName="text4" refType="w" fact="0.9"/>
+                                      <dgm:constr type="h" for="ch" forName="text4" refType="w" refFor="ch" refForName="text4" fact="0.635"/>
+                                      <dgm:constr type="t" for="ch" forName="text4" refType="w" fact="0.095"/>
+                                      <dgm:constr type="l" for="ch" forName="text4" refType="w" fact="0.1"/>
+                                    </dgm:constrLst>
+                                    <dgm:ruleLst/>
+                                    <dgm:layoutNode name="background4" moveWith="text4">
+                                      <dgm:alg type="sp"/>
+                                      <dgm:shape xmlns:r="http://schemas.openxmlformats.org/officeDocument/2006/relationships" type="roundRect" r:blip="">
+                                        <dgm:adjLst>
+                                          <dgm:adj idx="1" val="0.1"/>
+                                        </dgm:adjLst>
+                                      </dgm:shape>
+                                      <dgm:presOf/>
+                                      <dgm:constrLst/>
+                                      <dgm:ruleLst/>
+                                    </dgm:layoutNode>
+                                    <dgm:layoutNode name="text4" styleLbl="fgAcc4">
+                                      <dgm:varLst>
+                                        <dgm:chPref val="3"/>
+                                      </dgm:varLst>
+                                      <dgm:alg type="tx"/>
+                                      <dgm:shape xmlns:r="http://schemas.openxmlformats.org/officeDocument/2006/relationships" type="roundRect" r:blip="">
+                                        <dgm:adjLst>
+                                          <dgm:adj idx="1" val="0.1"/>
+                                        </dgm:adjLst>
+                                      </dgm:shape>
+                                      <dgm:presOf axis="self"/>
+                                      <dgm:constrLst>
+                                        <dgm:constr type="tMarg" refType="primFontSz" fact="0.3"/>
+                                        <dgm:constr type="bMarg" refType="primFontSz" fact="0.3"/>
+                                        <dgm:constr type="lMarg" refType="primFontSz" fact="0.3"/>
+                                        <dgm:constr type="rMarg" refType="primFontSz" fact="0.3"/>
+                                      </dgm:constrLst>
+                                      <dgm:ruleLst>
+                                        <dgm:rule type="primFontSz" val="5" fact="NaN" max="NaN"/>
+                                      </dgm:ruleLst>
+                                    </dgm:layoutNode>
+                                  </dgm:layoutNode>
+                                  <dgm:layoutNode name="hierChild5">
+                                    <dgm:choose name="Name28">
+                                      <dgm:if name="Name29" func="var" arg="dir" op="equ" val="norm">
+                                        <dgm:alg type="hierChild">
+                                          <dgm:param type="linDir" val="fromL"/>
+                                        </dgm:alg>
+                                      </dgm:if>
+                                      <dgm:else name="Name30">
+                                        <dgm:alg type="hierChild">
+                                          <dgm:param type="linDir" val="fromR"/>
+                                        </dgm:alg>
+                                      </dgm:else>
+                                    </dgm:choose>
+                                    <dgm:shape xmlns:r="http://schemas.openxmlformats.org/officeDocument/2006/relationships" r:blip="">
+                                      <dgm:adjLst/>
+                                    </dgm:shape>
+                                    <dgm:presOf/>
+                                    <dgm:constrLst/>
+                                    <dgm:ruleLst/>
+                                    <dgm:forEach name="Name31" ref="repeat"/>
+                                  </dgm:layoutNode>
+                                </dgm:layoutNode>
+                              </dgm:forEach>
+                            </dgm:forEach>
+                          </dgm:layoutNode>
+                        </dgm:layoutNode>
+                      </dgm:forEach>
+                    </dgm:forEach>
+                  </dgm:layoutNode>
+                </dgm:layoutNode>
+              </dgm:forEach>
+            </dgm:forEach>
+          </dgm:layoutNode>
+        </dgm:layoutNode>
+      </dgm:forEach>
+    </dgm:forEach>
+  </dgm:layoutNode>
+</dgm:layoutDef>
+</file>
+
+<file path=ppt/diagrams/quickStyle1.xml><?xml version="1.0" encoding="utf-8"?>
+<dgm:styleDef xmlns:dgm="http://schemas.openxmlformats.org/drawingml/2006/diagram" xmlns:a="http://schemas.openxmlformats.org/drawingml/2006/main" uniqueId="urn:microsoft.com/office/officeart/2005/8/quickstyle/simple1">
+  <dgm:title val=""/>
+  <dgm:desc val=""/>
+  <dgm:catLst>
+    <dgm:cat type="simple" pri="10100"/>
+  </dgm:catLst>
+  <dgm:scene3d>
+    <a:camera prst="orthographicFront"/>
+    <a:lightRig rig="threePt" dir="t"/>
+  </dgm:scene3d>
+  <dgm:styleLbl name="node0">
+    <dgm:scene3d>
+      <a:camera prst="orthographicFront"/>
+      <a:lightRig rig="threePt" dir="t"/>
+    </dgm:scene3d>
+    <dgm:sp3d/>
+    <dgm:txPr/>
+    <dgm:style>
+      <a:lnRef idx="2">
+        <a:scrgbClr r="0" g="0" b="0"/>
+      </a:lnRef>
+      <a:fillRef idx="1">
+        <a:scrgbClr r="0" g="0" b="0"/>
+      </a:fillRef>
+      <a:effectRef idx="0">
+        <a:scrgbClr r="0" g="0" b="0"/>
+      </a:effectRef>
+      <a:fontRef idx="minor">
+        <a:schemeClr val="lt1"/>
+      </a:fontRef>
+    </dgm:style>
+  </dgm:styleLbl>
+  <dgm:styleLbl name="lnNode1">
+    <dgm:scene3d>
+      <a:camera prst="orthographicFront"/>
+      <a:lightRig rig="threePt" dir="t"/>
+    </dgm:scene3d>
+    <dgm:sp3d/>
+    <dgm:txPr/>
+    <dgm:style>
+      <a:lnRef idx="2">
+        <a:scrgbClr r="0" g="0" b="0"/>
+      </a:lnRef>
+      <a:fillRef idx="1">
+        <a:scrgbClr r="0" g="0" b="0"/>
+      </a:fillRef>
+      <a:effectRef idx="0">
+        <a:scrgbClr r="0" g="0" b="0"/>
+      </a:effectRef>
+      <a:fontRef idx="minor">
+        <a:schemeClr val="lt1"/>
+      </a:fontRef>
+    </dgm:style>
+  </dgm:styleLbl>
+  <dgm:styleLbl name="vennNode1">
+    <dgm:scene3d>
+      <a:camera prst="orthographicFront"/>
+      <a:lightRig rig="threePt" dir="t"/>
+    </dgm:scene3d>
+    <dgm:sp3d/>
+    <dgm:txPr/>
+    <dgm:style>
+      <a:lnRef idx="2">
+        <a:scrgbClr r="0" g="0" b="0"/>
+      </a:lnRef>
+      <a:fillRef idx="1">
+        <a:scrgbClr r="0" g="0" b="0"/>
+      </a:fillRef>
+      <a:effectRef idx="0">
+        <a:scrgbClr r="0" g="0" b="0"/>
+      </a:effectRef>
+      <a:fontRef idx="minor">
+        <a:schemeClr val="tx1"/>
+      </a:fontRef>
+    </dgm:style>
+  </dgm:styleLbl>
+  <dgm:styleLbl name="alignNode1">
+    <dgm:scene3d>
+      <a:camera prst="orthographicFront"/>
+      <a:lightRig rig="threePt" dir="t"/>
+    </dgm:scene3d>
+    <dgm:sp3d/>
+    <dgm:txPr/>
+    <dgm:style>
+      <a:lnRef idx="2">
+        <a:scrgbClr r="0" g="0" b="0"/>
+      </a:lnRef>
+      <a:fillRef idx="1">
+        <a:scrgbClr r="0" g="0" b="0"/>
+      </a:fillRef>
+      <a:effectRef idx="0">
+        <a:scrgbClr r="0" g="0" b="0"/>
+      </a:effectRef>
+      <a:fontRef idx="minor">
+        <a:schemeClr val="lt1"/>
+      </a:fontRef>
+    </dgm:style>
+  </dgm:styleLbl>
+  <dgm:styleLbl name="node1">
+    <dgm:scene3d>
+      <a:camera prst="orthographicFront"/>
+      <a:lightRig rig="threePt" dir="t"/>
+    </dgm:scene3d>
+    <dgm:sp3d/>
+    <dgm:txPr/>
+    <dgm:style>
+      <a:lnRef idx="2">
+        <a:scrgbClr r="0" g="0" b="0"/>
+      </a:lnRef>
+      <a:fillRef idx="1">
+        <a:scrgbClr r="0" g="0" b="0"/>
+      </a:fillRef>
+      <a:effectRef idx="0">
+        <a:scrgbClr r="0" g="0" b="0"/>
+      </a:effectRef>
+      <a:fontRef idx="minor">
+        <a:schemeClr val="lt1"/>
+      </a:fontRef>
+    </dgm:style>
+  </dgm:styleLbl>
+  <dgm:styleLbl name="node2">
+    <dgm:scene3d>
+      <a:camera prst="orthographicFront"/>
+      <a:lightRig rig="threePt" dir="t"/>
+    </dgm:scene3d>
+    <dgm:sp3d/>
+    <dgm:txPr/>
+    <dgm:style>
+      <a:lnRef idx="2">
+        <a:scrgbClr r="0" g="0" b="0"/>
+      </a:lnRef>
+      <a:fillRef idx="1">
+        <a:scrgbClr r="0" g="0" b="0"/>
+      </a:fillRef>
+      <a:effectRef idx="0">
+        <a:scrgbClr r="0" g="0" b="0"/>
+      </a:effectRef>
+      <a:fontRef idx="minor">
+        <a:schemeClr val="lt1"/>
+      </a:fontRef>
+    </dgm:style>
+  </dgm:styleLbl>
+  <dgm:styleLbl name="node3">
+    <dgm:scene3d>
+      <a:camera prst="orthographicFront"/>
+      <a:lightRig rig="threePt" dir="t"/>
+    </dgm:scene3d>
+    <dgm:sp3d/>
+    <dgm:txPr/>
+    <dgm:style>
+      <a:lnRef idx="2">
+        <a:scrgbClr r="0" g="0" b="0"/>
+      </a:lnRef>
+      <a:fillRef idx="1">
+        <a:scrgbClr r="0" g="0" b="0"/>
+      </a:fillRef>
+      <a:effectRef idx="0">
+        <a:scrgbClr r="0" g="0" b="0"/>
+      </a:effectRef>
+      <a:fontRef idx="minor">
+        <a:schemeClr val="lt1"/>
+      </a:fontRef>
+    </dgm:style>
+  </dgm:styleLbl>
+  <dgm:styleLbl name="node4">
+    <dgm:scene3d>
+      <a:camera prst="orthographicFront"/>
+      <a:lightRig rig="threePt" dir="t"/>
+    </dgm:scene3d>
+    <dgm:sp3d/>
+    <dgm:txPr/>
+    <dgm:style>
+      <a:lnRef idx="2">
+        <a:scrgbClr r="0" g="0" b="0"/>
+      </a:lnRef>
+      <a:fillRef idx="1">
+        <a:scrgbClr r="0" g="0" b="0"/>
+      </a:fillRef>
+      <a:effectRef idx="0">
+        <a:scrgbClr r="0" g="0" b="0"/>
+      </a:effectRef>
+      <a:fontRef idx="minor">
+        <a:schemeClr val="lt1"/>
+      </a:fontRef>
+    </dgm:style>
+  </dgm:styleLbl>
+  <dgm:styleLbl name="fgImgPlace1">
+    <dgm:scene3d>
+      <a:camera prst="orthographicFront"/>
+      <a:lightRig rig="threePt" dir="t"/>
+    </dgm:scene3d>
+    <dgm:sp3d/>
+    <dgm:txPr/>
+    <dgm:style>
+      <a:lnRef idx="2">
+        <a:scrgbClr r="0" g="0" b="0"/>
+      </a:lnRef>
+      <a:fillRef idx="1">
+        <a:scrgbClr r="0" g="0" b="0"/>
+      </a:fillRef>
+      <a:effectRef idx="0">
+        <a:scrgbClr r="0" g="0" b="0"/>
+      </a:effectRef>
+      <a:fontRef idx="minor"/>
+    </dgm:style>
+  </dgm:styleLbl>
+  <dgm:styleLbl name="alignImgPlace1">
+    <dgm:scene3d>
+      <a:camera prst="orthographicFront"/>
+      <a:lightRig rig="threePt" dir="t"/>
+    </dgm:scene3d>
+    <dgm:sp3d/>
+    <dgm:txPr/>
+    <dgm:style>
+      <a:lnRef idx="2">
+        <a:scrgbClr r="0" g="0" b="0"/>
+      </a:lnRef>
+      <a:fillRef idx="1">
+        <a:scrgbClr r="0" g="0" b="0"/>
+      </a:fillRef>
+      <a:effectRef idx="0">
+        <a:scrgbClr r="0" g="0" b="0"/>
+      </a:effectRef>
+      <a:fontRef idx="minor"/>
+    </dgm:style>
+  </dgm:styleLbl>
+  <dgm:styleLbl name="bgImgPlace1">
+    <dgm:scene3d>
+      <a:camera prst="orthographicFront"/>
+      <a:lightRig rig="threePt" dir="t"/>
+    </dgm:scene3d>
+    <dgm:sp3d/>
+    <dgm:txPr/>
+    <dgm:style>
+      <a:lnRef idx="2">
+        <a:scrgbClr r="0" g="0" b="0"/>
+      </a:lnRef>
+      <a:fillRef idx="1">
+        <a:scrgbClr r="0" g="0" b="0"/>
+      </a:fillRef>
+      <a:effectRef idx="0">
+        <a:scrgbClr r="0" g="0" b="0"/>
+      </a:effectRef>
+      <a:fontRef idx="minor"/>
+    </dgm:style>
+  </dgm:styleLbl>
+  <dgm:styleLbl name="sibTrans2D1">
+    <dgm:scene3d>
+      <a:camera prst="orthographicFront"/>
+      <a:lightRig rig="threePt" dir="t"/>
+    </dgm:scene3d>
+    <dgm:sp3d/>
+    <dgm:txPr/>
+    <dgm:style>
+      <a:lnRef idx="0">
+        <a:scrgbClr r="0" g="0" b="0"/>
+      </a:lnRef>
+      <a:fillRef idx="1">
+        <a:scrgbClr r="0" g="0" b="0"/>
+      </a:fillRef>
+      <a:effectRef idx="0">
+        <a:scrgbClr r="0" g="0" b="0"/>
+      </a:effectRef>
+      <a:fontRef idx="minor">
+        <a:schemeClr val="lt1"/>
+      </a:fontRef>
+    </dgm:style>
+  </dgm:styleLbl>
+  <dgm:styleLbl name="fgSibTrans2D1">
+    <dgm:scene3d>
+      <a:camera prst="orthographicFront"/>
+      <a:lightRig rig="threePt" dir="t"/>
+    </dgm:scene3d>
+    <dgm:sp3d/>
+    <dgm:txPr/>
+    <dgm:style>
+      <a:lnRef idx="0">
+        <a:scrgbClr r="0" g="0" b="0"/>
+      </a:lnRef>
+      <a:fillRef idx="1">
+        <a:scrgbClr r="0" g="0" b="0"/>
+      </a:fillRef>
+      <a:effectRef idx="0">
+        <a:scrgbClr r="0" g="0" b="0"/>
+      </a:effectRef>
+      <a:fontRef idx="minor">
+        <a:schemeClr val="lt1"/>
+      </a:fontRef>
+    </dgm:style>
+  </dgm:styleLbl>
+  <dgm:styleLbl name="bgSibTrans2D1">
+    <dgm:scene3d>
+      <a:camera prst="orthographicFront"/>
+      <a:lightRig rig="threePt" dir="t"/>
+    </dgm:scene3d>
+    <dgm:sp3d/>
+    <dgm:txPr/>
+    <dgm:style>
+      <a:lnRef idx="0">
+        <a:scrgbClr r="0" g="0" b="0"/>
+      </a:lnRef>
+      <a:fillRef idx="1">
+        <a:scrgbClr r="0" g="0" b="0"/>
+      </a:fillRef>
+      <a:effectRef idx="0">
+        <a:scrgbClr r="0" g="0" b="0"/>
+      </a:effectRef>
+      <a:fontRef idx="minor">
+        <a:schemeClr val="lt1"/>
+      </a:fontRef>
+    </dgm:style>
+  </dgm:styleLbl>
+  <dgm:styleLbl name="sibTrans1D1">
+    <dgm:scene3d>
+      <a:camera prst="orthographicFront"/>
+      <a:lightRig rig="threePt" dir="t"/>
+    </dgm:scene3d>
+    <dgm:sp3d/>
+    <dgm:txPr/>
+    <dgm:style>
+      <a:lnRef idx="1">
+        <a:scrgbClr r="0" g="0" b="0"/>
+      </a:lnRef>
+      <a:fillRef idx="0">
+        <a:scrgbClr r="0" g="0" b="0"/>
+      </a:fillRef>
+      <a:effectRef idx="0">
+        <a:scrgbClr r="0" g="0" b="0"/>
+      </a:effectRef>
+      <a:fontRef idx="minor"/>
+    </dgm:style>
+  </dgm:styleLbl>
+  <dgm:styleLbl name="callout">
+    <dgm:scene3d>
+      <a:camera prst="orthographicFront"/>
+      <a:lightRig rig="threePt" dir="t"/>
+    </dgm:scene3d>
+    <dgm:sp3d/>
+    <dgm:txPr/>
+    <dgm:style>
+      <a:lnRef idx="2">
+        <a:scrgbClr r="0" g="0" b="0"/>
+      </a:lnRef>
+      <a:fillRef idx="1">
+        <a:scrgbClr r="0" g="0" b="0"/>
+      </a:fillRef>
+      <a:effectRef idx="0">
+        <a:scrgbClr r="0" g="0" b="0"/>
+      </a:effectRef>
+      <a:fontRef idx="minor"/>
+    </dgm:style>
+  </dgm:styleLbl>
+  <dgm:styleLbl name="asst0">
+    <dgm:scene3d>
+      <a:camera prst="orthographicFront"/>
+      <a:lightRig rig="threePt" dir="t"/>
+    </dgm:scene3d>
+    <dgm:sp3d/>
+    <dgm:txPr/>
+    <dgm:style>
+      <a:lnRef idx="2">
+        <a:scrgbClr r="0" g="0" b="0"/>
+      </a:lnRef>
+      <a:fillRef idx="1">
+        <a:scrgbClr r="0" g="0" b="0"/>
+      </a:fillRef>
+      <a:effectRef idx="0">
+        <a:scrgbClr r="0" g="0" b="0"/>
+      </a:effectRef>
+      <a:fontRef idx="minor">
+        <a:schemeClr val="lt1"/>
+      </a:fontRef>
+    </dgm:style>
+  </dgm:styleLbl>
+  <dgm:styleLbl name="asst1">
+    <dgm:scene3d>
+      <a:camera prst="orthographicFront"/>
+      <a:lightRig rig="threePt" dir="t"/>
+    </dgm:scene3d>
+    <dgm:sp3d/>
+    <dgm:txPr/>
+    <dgm:style>
+      <a:lnRef idx="2">
+        <a:scrgbClr r="0" g="0" b="0"/>
+      </a:lnRef>
+      <a:fillRef idx="1">
+        <a:scrgbClr r="0" g="0" b="0"/>
+      </a:fillRef>
+      <a:effectRef idx="0">
+        <a:scrgbClr r="0" g="0" b="0"/>
+      </a:effectRef>
+      <a:fontRef idx="minor">
+        <a:schemeClr val="lt1"/>
+      </a:fontRef>
+    </dgm:style>
+  </dgm:styleLbl>
+  <dgm:styleLbl name="asst2">
+    <dgm:scene3d>
+      <a:camera prst="orthographicFront"/>
+      <a:lightRig rig="threePt" dir="t"/>
+    </dgm:scene3d>
+    <dgm:sp3d/>
+    <dgm:txPr/>
+    <dgm:style>
+      <a:lnRef idx="2">
+        <a:scrgbClr r="0" g="0" b="0"/>
+      </a:lnRef>
+      <a:fillRef idx="1">
+        <a:scrgbClr r="0" g="0" b="0"/>
+      </a:fillRef>
+      <a:effectRef idx="0">
+        <a:scrgbClr r="0" g="0" b="0"/>
+      </a:effectRef>
+      <a:fontRef idx="minor">
+        <a:schemeClr val="lt1"/>
+      </a:fontRef>
+    </dgm:style>
+  </dgm:styleLbl>
+  <dgm:styleLbl name="asst3">
+    <dgm:scene3d>
+      <a:camera prst="orthographicFront"/>
+      <a:lightRig rig="threePt" dir="t"/>
+    </dgm:scene3d>
+    <dgm:sp3d/>
+    <dgm:txPr/>
+    <dgm:style>
+      <a:lnRef idx="2">
+        <a:scrgbClr r="0" g="0" b="0"/>
+      </a:lnRef>
+      <a:fillRef idx="1">
+        <a:scrgbClr r="0" g="0" b="0"/>
+      </a:fillRef>
+      <a:effectRef idx="0">
+        <a:scrgbClr r="0" g="0" b="0"/>
+      </a:effectRef>
+      <a:fontRef idx="minor">
+        <a:schemeClr val="lt1"/>
+      </a:fontRef>
+    </dgm:style>
+  </dgm:styleLbl>
+  <dgm:styleLbl name="asst4">
+    <dgm:scene3d>
+      <a:camera prst="orthographicFront"/>
+      <a:lightRig rig="threePt" dir="t"/>
+    </dgm:scene3d>
+    <dgm:sp3d/>
+    <dgm:txPr/>
+    <dgm:style>
+      <a:lnRef idx="2">
+        <a:scrgbClr r="0" g="0" b="0"/>
+      </a:lnRef>
+      <a:fillRef idx="1">
+        <a:scrgbClr r="0" g="0" b="0"/>
+      </a:fillRef>
+      <a:effectRef idx="0">
+        <a:scrgbClr r="0" g="0" b="0"/>
+      </a:effectRef>
+      <a:fontRef idx="minor">
+        <a:schemeClr val="lt1"/>
+      </a:fontRef>
+    </dgm:style>
+  </dgm:styleLbl>
+  <dgm:styleLbl name="parChTrans2D1">
+    <dgm:scene3d>
+      <a:camera prst="orthographicFront"/>
+      <a:lightRig rig="threePt" dir="t"/>
+    </dgm:scene3d>
+    <dgm:sp3d/>
+    <dgm:txPr/>
+    <dgm:style>
+      <a:lnRef idx="2">
+        <a:scrgbClr r="0" g="0" b="0"/>
+      </a:lnRef>
+      <a:fillRef idx="1">
+        <a:scrgbClr r="0" g="0" b="0"/>
+      </a:fillRef>
+      <a:effectRef idx="0">
+        <a:scrgbClr r="0" g="0" b="0"/>
+      </a:effectRef>
+      <a:fontRef idx="minor">
+        <a:schemeClr val="lt1"/>
+      </a:fontRef>
+    </dgm:style>
+  </dgm:styleLbl>
+  <dgm:styleLbl name="parChTrans2D2">
+    <dgm:scene3d>
+      <a:camera prst="orthographicFront"/>
+      <a:lightRig rig="threePt" dir="t"/>
+    </dgm:scene3d>
+    <dgm:sp3d/>
+    <dgm:txPr/>
+    <dgm:style>
+      <a:lnRef idx="2">
+        <a:scrgbClr r="0" g="0" b="0"/>
+      </a:lnRef>
+      <a:fillRef idx="1">
+        <a:scrgbClr r="0" g="0" b="0"/>
+      </a:fillRef>
+      <a:effectRef idx="0">
+        <a:scrgbClr r="0" g="0" b="0"/>
+      </a:effectRef>
+      <a:fontRef idx="minor">
+        <a:schemeClr val="lt1"/>
+      </a:fontRef>
+    </dgm:style>
+  </dgm:styleLbl>
+  <dgm:styleLbl name="parChTrans2D3">
+    <dgm:scene3d>
+      <a:camera prst="orthographicFront"/>
+      <a:lightRig rig="threePt" dir="t"/>
+    </dgm:scene3d>
+    <dgm:sp3d/>
+    <dgm:txPr/>
+    <dgm:style>
+      <a:lnRef idx="2">
+        <a:scrgbClr r="0" g="0" b="0"/>
+      </a:lnRef>
+      <a:fillRef idx="1">
+        <a:scrgbClr r="0" g="0" b="0"/>
+      </a:fillRef>
+      <a:effectRef idx="0">
+        <a:scrgbClr r="0" g="0" b="0"/>
+      </a:effectRef>
+      <a:fontRef idx="minor">
+        <a:schemeClr val="lt1"/>
+      </a:fontRef>
+    </dgm:style>
+  </dgm:styleLbl>
+  <dgm:styleLbl name="parChTrans2D4">
+    <dgm:scene3d>
+      <a:camera prst="orthographicFront"/>
+      <a:lightRig rig="threePt" dir="t"/>
+    </dgm:scene3d>
+    <dgm:sp3d/>
+    <dgm:txPr/>
+    <dgm:style>
+      <a:lnRef idx="2">
+        <a:scrgbClr r="0" g="0" b="0"/>
+      </a:lnRef>
+      <a:fillRef idx="1">
+        <a:scrgbClr r="0" g="0" b="0"/>
+      </a:fillRef>
+      <a:effectRef idx="0">
+        <a:scrgbClr r="0" g="0" b="0"/>
+      </a:effectRef>
+      <a:fontRef idx="minor">
+        <a:schemeClr val="lt1"/>
+      </a:fontRef>
+    </dgm:style>
+  </dgm:styleLbl>
+  <dgm:styleLbl name="parChTrans1D1">
+    <dgm:scene3d>
+      <a:camera prst="orthographicFront"/>
+      <a:lightRig rig="threePt" dir="t"/>
+    </dgm:scene3d>
+    <dgm:sp3d/>
+    <dgm:txPr/>
+    <dgm:style>
+      <a:lnRef idx="2">
+        <a:scrgbClr r="0" g="0" b="0"/>
+      </a:lnRef>
+      <a:fillRef idx="0">
+        <a:scrgbClr r="0" g="0" b="0"/>
+      </a:fillRef>
+      <a:effectRef idx="0">
+        <a:scrgbClr r="0" g="0" b="0"/>
+      </a:effectRef>
+      <a:fontRef idx="minor"/>
+    </dgm:style>
+  </dgm:styleLbl>
+  <dgm:styleLbl name="parChTrans1D2">
+    <dgm:scene3d>
+      <a:camera prst="orthographicFront"/>
+      <a:lightRig rig="threePt" dir="t"/>
+    </dgm:scene3d>
+    <dgm:sp3d/>
+    <dgm:txPr/>
+    <dgm:style>
+      <a:lnRef idx="2">
+        <a:scrgbClr r="0" g="0" b="0"/>
+      </a:lnRef>
+      <a:fillRef idx="0">
+        <a:scrgbClr r="0" g="0" b="0"/>
+      </a:fillRef>
+      <a:effectRef idx="0">
+        <a:scrgbClr r="0" g="0" b="0"/>
+      </a:effectRef>
+      <a:fontRef idx="minor"/>
+    </dgm:style>
+  </dgm:styleLbl>
+  <dgm:styleLbl name="parChTrans1D3">
+    <dgm:scene3d>
+      <a:camera prst="orthographicFront"/>
+      <a:lightRig rig="threePt" dir="t"/>
+    </dgm:scene3d>
+    <dgm:sp3d/>
+    <dgm:txPr/>
+    <dgm:style>
+      <a:lnRef idx="2">
+        <a:scrgbClr r="0" g="0" b="0"/>
+      </a:lnRef>
+      <a:fillRef idx="0">
+        <a:scrgbClr r="0" g="0" b="0"/>
+      </a:fillRef>
+      <a:effectRef idx="0">
+        <a:scrgbClr r="0" g="0" b="0"/>
+      </a:effectRef>
+      <a:fontRef idx="minor"/>
+    </dgm:style>
+  </dgm:styleLbl>
+  <dgm:styleLbl name="parChTrans1D4">
+    <dgm:scene3d>
+      <a:camera prst="orthographicFront"/>
+      <a:lightRig rig="threePt" dir="t"/>
+    </dgm:scene3d>
+    <dgm:sp3d/>
+    <dgm:txPr/>
+    <dgm:style>
+      <a:lnRef idx="2">
+        <a:scrgbClr r="0" g="0" b="0"/>
+      </a:lnRef>
+      <a:fillRef idx="0">
+        <a:scrgbClr r="0" g="0" b="0"/>
+      </a:fillRef>
+      <a:effectRef idx="0">
+        <a:scrgbClr r="0" g="0" b="0"/>
+      </a:effectRef>
+      <a:fontRef idx="minor"/>
+    </dgm:style>
+  </dgm:styleLbl>
+  <dgm:styleLbl name="fgAcc1">
+    <dgm:scene3d>
+      <a:camera prst="orthographicFront"/>
+      <a:lightRig rig="threePt" dir="t"/>
+    </dgm:scene3d>
+    <dgm:sp3d/>
+    <dgm:txPr/>
+    <dgm:style>
+      <a:lnRef idx="2">
+        <a:scrgbClr r="0" g="0" b="0"/>
+      </a:lnRef>
+      <a:fillRef idx="1">
+        <a:scrgbClr r="0" g="0" b="0"/>
+      </a:fillRef>
+      <a:effectRef idx="0">
+        <a:scrgbClr r="0" g="0" b="0"/>
+      </a:effectRef>
+      <a:fontRef idx="minor"/>
+    </dgm:style>
+  </dgm:styleLbl>
+  <dgm:styleLbl name="conFgAcc1">
+    <dgm:scene3d>
+      <a:camera prst="orthographicFront"/>
+      <a:lightRig rig="threePt" dir="t"/>
+    </dgm:scene3d>
+    <dgm:sp3d/>
+    <dgm:txPr/>
+    <dgm:style>
+      <a:lnRef idx="2">
+        <a:scrgbClr r="0" g="0" b="0"/>
+      </a:lnRef>
+      <a:fillRef idx="1">
+        <a:scrgbClr r="0" g="0" b="0"/>
+      </a:fillRef>
+      <a:effectRef idx="0">
+        <a:scrgbClr r="0" g="0" b="0"/>
+      </a:effectRef>
+      <a:fontRef idx="minor"/>
+    </dgm:style>
+  </dgm:styleLbl>
+  <dgm:styleLbl name="alignAcc1">
+    <dgm:scene3d>
+      <a:camera prst="orthographicFront"/>
+      <a:lightRig rig="threePt" dir="t"/>
+    </dgm:scene3d>
+    <dgm:sp3d/>
+    <dgm:txPr/>
+    <dgm:style>
+      <a:lnRef idx="2">
+        <a:scrgbClr r="0" g="0" b="0"/>
+      </a:lnRef>
+      <a:fillRef idx="1">
+        <a:scrgbClr r="0" g="0" b="0"/>
+      </a:fillRef>
+      <a:effectRef idx="0">
+        <a:scrgbClr r="0" g="0" b="0"/>
+      </a:effectRef>
+      <a:fontRef idx="minor"/>
+    </dgm:style>
+  </dgm:styleLbl>
+  <dgm:styleLbl name="trAlignAcc1">
+    <dgm:scene3d>
+      <a:camera prst="orthographicFront"/>
+      <a:lightRig rig="threePt" dir="t"/>
+    </dgm:scene3d>
+    <dgm:sp3d/>
+    <dgm:txPr/>
+    <dgm:style>
+      <a:lnRef idx="1">
+        <a:scrgbClr r="0" g="0" b="0"/>
+      </a:lnRef>
+      <a:fillRef idx="1">
+        <a:scrgbClr r="0" g="0" b="0"/>
+      </a:fillRef>
+      <a:effectRef idx="0">
+        <a:scrgbClr r="0" g="0" b="0"/>
+      </a:effectRef>
+      <a:fontRef idx="minor"/>
+    </dgm:style>
+  </dgm:styleLbl>
+  <dgm:styleLbl name="bgAcc1">
+    <dgm:scene3d>
+      <a:camera prst="orthographicFront"/>
+      <a:lightRig rig="threePt" dir="t"/>
+    </dgm:scene3d>
+    <dgm:sp3d/>
+    <dgm:txPr/>
+    <dgm:style>
+      <a:lnRef idx="2">
+        <a:scrgbClr r="0" g="0" b="0"/>
+      </a:lnRef>
+      <a:fillRef idx="1">
+        <a:scrgbClr r="0" g="0" b="0"/>
+      </a:fillRef>
+      <a:effectRef idx="0">
+        <a:scrgbClr r="0" g="0" b="0"/>
+      </a:effectRef>
+      <a:fontRef idx="minor"/>
+    </dgm:style>
+  </dgm:styleLbl>
+  <dgm:styleLbl name="solidFgAcc1">
+    <dgm:scene3d>
+      <a:camera prst="orthographicFront"/>
+      <a:lightRig rig="threePt" dir="t"/>
+    </dgm:scene3d>
+    <dgm:sp3d/>
+    <dgm:txPr/>
+    <dgm:style>
+      <a:lnRef idx="2">
+        <a:scrgbClr r="0" g="0" b="0"/>
+      </a:lnRef>
+      <a:fillRef idx="1">
+        <a:scrgbClr r="0" g="0" b="0"/>
+      </a:fillRef>
+      <a:effectRef idx="0">
+        <a:scrgbClr r="0" g="0" b="0"/>
+      </a:effectRef>
+      <a:fontRef idx="minor"/>
+    </dgm:style>
+  </dgm:styleLbl>
+  <dgm:styleLbl name="solidAlignAcc1">
+    <dgm:scene3d>
+      <a:camera prst="orthographicFront"/>
+      <a:lightRig rig="threePt" dir="t"/>
+    </dgm:scene3d>
+    <dgm:sp3d/>
+    <dgm:txPr/>
+    <dgm:style>
+      <a:lnRef idx="2">
+        <a:scrgbClr r="0" g="0" b="0"/>
+      </a:lnRef>
+      <a:fillRef idx="1">
+        <a:scrgbClr r="0" g="0" b="0"/>
+      </a:fillRef>
+      <a:effectRef idx="0">
+        <a:scrgbClr r="0" g="0" b="0"/>
+      </a:effectRef>
+      <a:fontRef idx="minor"/>
+    </dgm:style>
+  </dgm:styleLbl>
+  <dgm:styleLbl name="solidBgAcc1">
+    <dgm:scene3d>
+      <a:camera prst="orthographicFront"/>
+      <a:lightRig rig="threePt" dir="t"/>
+    </dgm:scene3d>
+    <dgm:sp3d/>
+    <dgm:txPr/>
+    <dgm:style>
+      <a:lnRef idx="2">
+        <a:scrgbClr r="0" g="0" b="0"/>
+      </a:lnRef>
+      <a:fillRef idx="1">
+        <a:scrgbClr r="0" g="0" b="0"/>
+      </a:fillRef>
+      <a:effectRef idx="0">
+        <a:scrgbClr r="0" g="0" b="0"/>
+      </a:effectRef>
+      <a:fontRef idx="minor"/>
+    </dgm:style>
+  </dgm:styleLbl>
+  <dgm:styleLbl name="fgAccFollowNode1">
+    <dgm:scene3d>
+      <a:camera prst="orthographicFront"/>
+      <a:lightRig rig="threePt" dir="t"/>
+    </dgm:scene3d>
+    <dgm:sp3d/>
+    <dgm:txPr/>
+    <dgm:style>
+      <a:lnRef idx="2">
+        <a:scrgbClr r="0" g="0" b="0"/>
+      </a:lnRef>
+      <a:fillRef idx="1">
+        <a:scrgbClr r="0" g="0" b="0"/>
+      </a:fillRef>
+      <a:effectRef idx="0">
+        <a:scrgbClr r="0" g="0" b="0"/>
+      </a:effectRef>
+      <a:fontRef idx="minor"/>
+    </dgm:style>
+  </dgm:styleLbl>
+  <dgm:styleLbl name="alignAccFollowNode1">
+    <dgm:scene3d>
+      <a:camera prst="orthographicFront"/>
+      <a:lightRig rig="threePt" dir="t"/>
+    </dgm:scene3d>
+    <dgm:sp3d/>
+    <dgm:txPr/>
+    <dgm:style>
+      <a:lnRef idx="2">
+        <a:scrgbClr r="0" g="0" b="0"/>
+      </a:lnRef>
+      <a:fillRef idx="1">
+        <a:scrgbClr r="0" g="0" b="0"/>
+      </a:fillRef>
+      <a:effectRef idx="0">
+        <a:scrgbClr r="0" g="0" b="0"/>
+      </a:effectRef>
+      <a:fontRef idx="minor"/>
+    </dgm:style>
+  </dgm:styleLbl>
+  <dgm:styleLbl name="bgAccFollowNode1">
+    <dgm:scene3d>
+      <a:camera prst="orthographicFront"/>
+      <a:lightRig rig="threePt" dir="t"/>
+    </dgm:scene3d>
+    <dgm:sp3d/>
+    <dgm:txPr/>
+    <dgm:style>
+      <a:lnRef idx="2">
+        <a:scrgbClr r="0" g="0" b="0"/>
+      </a:lnRef>
+      <a:fillRef idx="1">
+        <a:scrgbClr r="0" g="0" b="0"/>
+      </a:fillRef>
+      <a:effectRef idx="0">
+        <a:scrgbClr r="0" g="0" b="0"/>
+      </a:effectRef>
+      <a:fontRef idx="minor"/>
+    </dgm:style>
+  </dgm:styleLbl>
+  <dgm:styleLbl name="fgAcc0">
+    <dgm:scene3d>
+      <a:camera prst="orthographicFront"/>
+      <a:lightRig rig="threePt" dir="t"/>
+    </dgm:scene3d>
+    <dgm:sp3d/>
+    <dgm:txPr/>
+    <dgm:style>
+      <a:lnRef idx="2">
+        <a:scrgbClr r="0" g="0" b="0"/>
+      </a:lnRef>
+      <a:fillRef idx="1">
+        <a:scrgbClr r="0" g="0" b="0"/>
+      </a:fillRef>
+      <a:effectRef idx="0">
+        <a:scrgbClr r="0" g="0" b="0"/>
+      </a:effectRef>
+      <a:fontRef idx="minor"/>
+    </dgm:style>
+  </dgm:styleLbl>
+  <dgm:styleLbl name="fgAcc2">
+    <dgm:scene3d>
+      <a:camera prst="orthographicFront"/>
+      <a:lightRig rig="threePt" dir="t"/>
+    </dgm:scene3d>
+    <dgm:sp3d/>
+    <dgm:txPr/>
+    <dgm:style>
+      <a:lnRef idx="2">
+        <a:scrgbClr r="0" g="0" b="0"/>
+      </a:lnRef>
+      <a:fillRef idx="1">
+        <a:scrgbClr r="0" g="0" b="0"/>
+      </a:fillRef>
+      <a:effectRef idx="0">
+        <a:scrgbClr r="0" g="0" b="0"/>
+      </a:effectRef>
+      <a:fontRef idx="minor"/>
+    </dgm:style>
+  </dgm:styleLbl>
+  <dgm:styleLbl name="fgAcc3">
+    <dgm:scene3d>
+      <a:camera prst="orthographicFront"/>
+      <a:lightRig rig="threePt" dir="t"/>
+    </dgm:scene3d>
+    <dgm:sp3d/>
+    <dgm:txPr/>
+    <dgm:style>
+      <a:lnRef idx="2">
+        <a:scrgbClr r="0" g="0" b="0"/>
+      </a:lnRef>
+      <a:fillRef idx="1">
+        <a:scrgbClr r="0" g="0" b="0"/>
+      </a:fillRef>
+      <a:effectRef idx="0">
+        <a:scrgbClr r="0" g="0" b="0"/>
+      </a:effectRef>
+      <a:fontRef idx="minor"/>
+    </dgm:style>
+  </dgm:styleLbl>
+  <dgm:styleLbl name="fgAcc4">
+    <dgm:scene3d>
+      <a:camera prst="orthographicFront"/>
+      <a:lightRig rig="threePt" dir="t"/>
+    </dgm:scene3d>
+    <dgm:sp3d/>
+    <dgm:txPr/>
+    <dgm:style>
+      <a:lnRef idx="2">
+        <a:scrgbClr r="0" g="0" b="0"/>
+      </a:lnRef>
+      <a:fillRef idx="1">
+        <a:scrgbClr r="0" g="0" b="0"/>
+      </a:fillRef>
+      <a:effectRef idx="0">
+        <a:scrgbClr r="0" g="0" b="0"/>
+      </a:effectRef>
+      <a:fontRef idx="minor"/>
+    </dgm:style>
+  </dgm:styleLbl>
+  <dgm:styleLbl name="bgShp">
+    <dgm:scene3d>
+      <a:camera prst="orthographicFront"/>
+      <a:lightRig rig="threePt" dir="t"/>
+    </dgm:scene3d>
+    <dgm:sp3d/>
+    <dgm:txPr/>
+    <dgm:style>
+      <a:lnRef idx="0">
+        <a:scrgbClr r="0" g="0" b="0"/>
+      </a:lnRef>
+      <a:fillRef idx="1">
+        <a:scrgbClr r="0" g="0" b="0"/>
+      </a:fillRef>
+      <a:effectRef idx="0">
+        <a:scrgbClr r="0" g="0" b="0"/>
+      </a:effectRef>
+      <a:fontRef idx="minor"/>
+    </dgm:style>
+  </dgm:styleLbl>
+  <dgm:styleLbl name="dkBgShp">
+    <dgm:scene3d>
+      <a:camera prst="orthographicFront"/>
+      <a:lightRig rig="threePt" dir="t"/>
+    </dgm:scene3d>
+    <dgm:sp3d/>
+    <dgm:txPr/>
+    <dgm:style>
+      <a:lnRef idx="0">
+        <a:scrgbClr r="0" g="0" b="0"/>
+      </a:lnRef>
+      <a:fillRef idx="1">
+        <a:scrgbClr r="0" g="0" b="0"/>
+      </a:fillRef>
+      <a:effectRef idx="0">
+        <a:scrgbClr r="0" g="0" b="0"/>
+      </a:effectRef>
+      <a:fontRef idx="minor"/>
+    </dgm:style>
+  </dgm:styleLbl>
+  <dgm:styleLbl name="trBgShp">
+    <dgm:scene3d>
+      <a:camera prst="orthographicFront"/>
+      <a:lightRig rig="threePt" dir="t"/>
+    </dgm:scene3d>
+    <dgm:sp3d/>
+    <dgm:txPr/>
+    <dgm:style>
+      <a:lnRef idx="0">
+        <a:scrgbClr r="0" g="0" b="0"/>
+      </a:lnRef>
+      <a:fillRef idx="1">
+        <a:scrgbClr r="0" g="0" b="0"/>
+      </a:fillRef>
+      <a:effectRef idx="0">
+        <a:scrgbClr r="0" g="0" b="0"/>
+      </a:effectRef>
+      <a:fontRef idx="minor"/>
+    </dgm:style>
+  </dgm:styleLbl>
+  <dgm:styleLbl name="fgShp">
+    <dgm:scene3d>
+      <a:camera prst="orthographicFront"/>
+      <a:lightRig rig="threePt" dir="t"/>
+    </dgm:scene3d>
+    <dgm:sp3d/>
+    <dgm:txPr/>
+    <dgm:style>
+      <a:lnRef idx="2">
+        <a:scrgbClr r="0" g="0" b="0"/>
+      </a:lnRef>
+      <a:fillRef idx="1">
+        <a:scrgbClr r="0" g="0" b="0"/>
+      </a:fillRef>
+      <a:effectRef idx="0">
+        <a:scrgbClr r="0" g="0" b="0"/>
+      </a:effectRef>
+      <a:fontRef idx="minor"/>
+    </dgm:style>
+  </dgm:styleLbl>
+  <dgm:styleLbl name="revTx">
+    <dgm:scene3d>
+      <a:camera prst="orthographicFront"/>
+      <a:lightRig rig="threePt" dir="t"/>
+    </dgm:scene3d>
+    <dgm:sp3d/>
+    <dgm:txPr/>
+    <dgm:style>
+      <a:lnRef idx="0">
+        <a:scrgbClr r="0" g="0" b="0"/>
+      </a:lnRef>
+      <a:fillRef idx="0">
+        <a:scrgbClr r="0" g="0" b="0"/>
+      </a:fillRef>
+      <a:effectRef idx="0">
+        <a:scrgbClr r="0" g="0" b="0"/>
+      </a:effectRef>
+      <a:fontRef idx="minor"/>
+    </dgm:style>
+  </dgm:styleLbl>
+</dgm:styleDef>
 </file>
 
 <file path=ppt/slideLayouts/slideLayout1.xml><?xml version="1.0" encoding="utf-8"?>
@@ -3316,6 +6483,14 @@
 <file path=ppt/slides/slide1.xml><?xml version="1.0" encoding="utf-8"?>
 <p:sld xmlns:a="http://schemas.openxmlformats.org/drawingml/2006/main" xmlns:r="http://schemas.openxmlformats.org/officeDocument/2006/relationships" xmlns:p="http://schemas.openxmlformats.org/presentationml/2006/main">
   <p:cSld>
+    <p:bg>
+      <p:bgPr>
+        <a:solidFill>
+          <a:schemeClr val="bg1"/>
+        </a:solidFill>
+        <a:effectLst/>
+      </p:bgPr>
+    </p:bg>
     <p:spTree>
       <p:nvGrpSpPr>
         <p:cNvPr id="1" name=""/>
@@ -3330,6 +6505,187 @@
           <a:chExt cx="0" cy="0"/>
         </a:xfrm>
       </p:grpSpPr>
+      <p:sp useBgFill="1">
+        <p:nvSpPr>
+          <p:cNvPr id="11" name="Rectangle 10">
+            <a:extLst>
+              <a:ext uri="{FF2B5EF4-FFF2-40B4-BE49-F238E27FC236}">
+                <a16:creationId xmlns:a16="http://schemas.microsoft.com/office/drawing/2014/main" id="{0671A8AE-40A1-4631-A6B8-581AFF065482}"/>
+              </a:ext>
+              <a:ext uri="{C183D7F6-B498-43B3-948B-1728B52AA6E4}">
+                <adec:decorative xmlns:adec="http://schemas.microsoft.com/office/drawing/2017/decorative" val="1"/>
+              </a:ext>
+            </a:extLst>
+          </p:cNvPr>
+          <p:cNvSpPr>
+            <a:spLocks noGrp="1" noRot="1" noChangeAspect="1" noMove="1" noResize="1" noEditPoints="1" noAdjustHandles="1" noChangeArrowheads="1" noChangeShapeType="1" noTextEdit="1"/>
+          </p:cNvSpPr>
+          <p:nvPr>
+            <p:extLst>
+              <p:ext uri="{386F3935-93C4-4BCD-93E2-E3B085C9AB24}">
+                <p16:designElem xmlns:p16="http://schemas.microsoft.com/office/powerpoint/2015/main" val="1"/>
+              </p:ext>
+            </p:extLst>
+          </p:nvPr>
+        </p:nvSpPr>
+        <p:spPr>
+          <a:xfrm>
+            <a:off x="0" y="0"/>
+            <a:ext cx="12192000" cy="6858000"/>
+          </a:xfrm>
+          <a:prstGeom prst="rect">
+            <a:avLst/>
+          </a:prstGeom>
+          <a:ln>
+            <a:noFill/>
+          </a:ln>
+        </p:spPr>
+        <p:style>
+          <a:lnRef idx="2">
+            <a:schemeClr val="accent1">
+              <a:shade val="50000"/>
+            </a:schemeClr>
+          </a:lnRef>
+          <a:fillRef idx="1">
+            <a:schemeClr val="accent1"/>
+          </a:fillRef>
+          <a:effectRef idx="0">
+            <a:schemeClr val="accent1"/>
+          </a:effectRef>
+          <a:fontRef idx="minor">
+            <a:schemeClr val="lt1"/>
+          </a:fontRef>
+        </p:style>
+        <p:txBody>
+          <a:bodyPr rtlCol="0" anchor="ctr"/>
+          <a:lstStyle/>
+          <a:p>
+            <a:pPr algn="ctr"/>
+            <a:endParaRPr lang="en-US"/>
+          </a:p>
+        </p:txBody>
+      </p:sp>
+      <p:pic>
+        <p:nvPicPr>
+          <p:cNvPr id="5" name="Picture 4">
+            <a:extLst>
+              <a:ext uri="{FF2B5EF4-FFF2-40B4-BE49-F238E27FC236}">
+                <a16:creationId xmlns:a16="http://schemas.microsoft.com/office/drawing/2014/main" id="{954458A8-0FB9-FB01-D730-B8CB987116D1}"/>
+              </a:ext>
+            </a:extLst>
+          </p:cNvPr>
+          <p:cNvPicPr>
+            <a:picLocks noChangeAspect="1"/>
+          </p:cNvPicPr>
+          <p:nvPr/>
+        </p:nvPicPr>
+        <p:blipFill>
+          <a:blip r:embed="rId2">
+            <a:extLst>
+              <a:ext uri="{28A0092B-C50C-407E-A947-70E740481C1C}">
+                <a14:useLocalDpi xmlns:a14="http://schemas.microsoft.com/office/drawing/2010/main" val="0"/>
+              </a:ext>
+              <a:ext uri="{837473B0-CC2E-450A-ABE3-18F120FF3D39}">
+                <a1611:picAttrSrcUrl xmlns:a1611="http://schemas.microsoft.com/office/drawing/2016/11/main" r:id="rId3"/>
+              </a:ext>
+            </a:extLst>
+          </a:blip>
+          <a:srcRect l="19095" r="32241" b="-1"/>
+          <a:stretch>
+            <a:fillRect/>
+          </a:stretch>
+        </p:blipFill>
+        <p:spPr>
+          <a:xfrm>
+            <a:off x="3523488" y="10"/>
+            <a:ext cx="8668512" cy="6857990"/>
+          </a:xfrm>
+          <a:prstGeom prst="rect">
+            <a:avLst/>
+          </a:prstGeom>
+        </p:spPr>
+      </p:pic>
+      <p:sp>
+        <p:nvSpPr>
+          <p:cNvPr id="16" name="Rectangle 15">
+            <a:extLst>
+              <a:ext uri="{FF2B5EF4-FFF2-40B4-BE49-F238E27FC236}">
+                <a16:creationId xmlns:a16="http://schemas.microsoft.com/office/drawing/2014/main" id="{AB58EF07-17C2-48CF-ABB0-EEF1F17CB8F0}"/>
+              </a:ext>
+              <a:ext uri="{C183D7F6-B498-43B3-948B-1728B52AA6E4}">
+                <adec:decorative xmlns:adec="http://schemas.microsoft.com/office/drawing/2017/decorative" val="1"/>
+              </a:ext>
+            </a:extLst>
+          </p:cNvPr>
+          <p:cNvSpPr>
+            <a:spLocks noGrp="1" noRot="1" noChangeAspect="1" noMove="1" noResize="1" noEditPoints="1" noAdjustHandles="1" noChangeArrowheads="1" noChangeShapeType="1" noTextEdit="1"/>
+          </p:cNvSpPr>
+          <p:nvPr>
+            <p:extLst>
+              <p:ext uri="{386F3935-93C4-4BCD-93E2-E3B085C9AB24}">
+                <p16:designElem xmlns:p16="http://schemas.microsoft.com/office/powerpoint/2015/main" val="1"/>
+              </p:ext>
+            </p:extLst>
+          </p:nvPr>
+        </p:nvSpPr>
+        <p:spPr>
+          <a:xfrm>
+            <a:off x="3" y="0"/>
+            <a:ext cx="9339206" cy="6858000"/>
+          </a:xfrm>
+          <a:prstGeom prst="rect">
+            <a:avLst/>
+          </a:prstGeom>
+          <a:gradFill>
+            <a:gsLst>
+              <a:gs pos="58000">
+                <a:schemeClr val="tx1"/>
+              </a:gs>
+              <a:gs pos="33000">
+                <a:schemeClr val="tx1">
+                  <a:alpha val="64000"/>
+                </a:schemeClr>
+              </a:gs>
+              <a:gs pos="0">
+                <a:schemeClr val="tx1">
+                  <a:alpha val="0"/>
+                </a:schemeClr>
+              </a:gs>
+              <a:gs pos="100000">
+                <a:schemeClr val="tx1"/>
+              </a:gs>
+            </a:gsLst>
+            <a:lin ang="10800000" scaled="0"/>
+          </a:gradFill>
+          <a:ln>
+            <a:noFill/>
+          </a:ln>
+        </p:spPr>
+        <p:style>
+          <a:lnRef idx="2">
+            <a:schemeClr val="accent1">
+              <a:shade val="50000"/>
+            </a:schemeClr>
+          </a:lnRef>
+          <a:fillRef idx="1">
+            <a:schemeClr val="accent1"/>
+          </a:fillRef>
+          <a:effectRef idx="0">
+            <a:schemeClr val="accent1"/>
+          </a:effectRef>
+          <a:fontRef idx="minor">
+            <a:schemeClr val="lt1"/>
+          </a:fontRef>
+        </p:style>
+        <p:txBody>
+          <a:bodyPr rtlCol="0" anchor="ctr"/>
+          <a:lstStyle/>
+          <a:p>
+            <a:pPr algn="ctr"/>
+            <a:endParaRPr lang="en-US" dirty="0"/>
+          </a:p>
+        </p:txBody>
+      </p:sp>
       <p:sp>
         <p:nvSpPr>
           <p:cNvPr id="2" name="Title 1">
@@ -3346,13 +6702,25 @@
             <p:ph type="ctrTitle"/>
           </p:nvPr>
         </p:nvSpPr>
-        <p:spPr/>
+        <p:spPr>
+          <a:xfrm>
+            <a:off x="477981" y="1122363"/>
+            <a:ext cx="4023360" cy="3204134"/>
+          </a:xfrm>
+        </p:spPr>
         <p:txBody>
-          <a:bodyPr/>
+          <a:bodyPr anchor="b">
+            <a:normAutofit/>
+          </a:bodyPr>
           <a:lstStyle/>
           <a:p>
+            <a:pPr algn="l"/>
             <a:r>
-              <a:rPr lang="en-US" dirty="0"/>
+              <a:rPr lang="en-US" sz="4800">
+                <a:solidFill>
+                  <a:schemeClr val="bg1"/>
+                </a:solidFill>
+              </a:rPr>
               <a:t>The Cinderella Problem</a:t>
             </a:r>
           </a:p>
@@ -3374,15 +6742,269 @@
             <p:ph type="subTitle" idx="1"/>
           </p:nvPr>
         </p:nvSpPr>
-        <p:spPr/>
+        <p:spPr>
+          <a:xfrm>
+            <a:off x="477980" y="4872922"/>
+            <a:ext cx="4023359" cy="1208141"/>
+          </a:xfrm>
+        </p:spPr>
         <p:txBody>
-          <a:bodyPr/>
+          <a:bodyPr>
+            <a:normAutofit/>
+          </a:bodyPr>
           <a:lstStyle/>
           <a:p>
+            <a:pPr algn="l"/>
             <a:r>
-              <a:rPr lang="en-US" dirty="0"/>
+              <a:rPr lang="en-US" sz="2000">
+                <a:solidFill>
+                  <a:schemeClr val="bg1"/>
+                </a:solidFill>
+              </a:rPr>
               <a:t>By: Anton, James, Aaron</a:t>
             </a:r>
+          </a:p>
+        </p:txBody>
+      </p:sp>
+      <p:sp>
+        <p:nvSpPr>
+          <p:cNvPr id="15" name="Rectangle 14">
+            <a:extLst>
+              <a:ext uri="{FF2B5EF4-FFF2-40B4-BE49-F238E27FC236}">
+                <a16:creationId xmlns:a16="http://schemas.microsoft.com/office/drawing/2014/main" id="{AF2F604E-43BE-4DC3-B983-E071523364F8}"/>
+              </a:ext>
+              <a:ext uri="{C183D7F6-B498-43B3-948B-1728B52AA6E4}">
+                <adec:decorative xmlns:adec="http://schemas.microsoft.com/office/drawing/2017/decorative" val="1"/>
+              </a:ext>
+            </a:extLst>
+          </p:cNvPr>
+          <p:cNvSpPr>
+            <a:spLocks noGrp="1" noRot="1" noChangeAspect="1" noMove="1" noResize="1" noEditPoints="1" noAdjustHandles="1" noChangeArrowheads="1" noChangeShapeType="1" noTextEdit="1"/>
+          </p:cNvSpPr>
+          <p:nvPr>
+            <p:extLst>
+              <p:ext uri="{386F3935-93C4-4BCD-93E2-E3B085C9AB24}">
+                <p16:designElem xmlns:p16="http://schemas.microsoft.com/office/powerpoint/2015/main" val="1"/>
+              </p:ext>
+            </p:extLst>
+          </p:nvPr>
+        </p:nvSpPr>
+        <p:spPr>
+          <a:xfrm rot="5400000">
+            <a:off x="759921" y="346791"/>
+            <a:ext cx="146304" cy="704088"/>
+          </a:xfrm>
+          <a:prstGeom prst="rect">
+            <a:avLst/>
+          </a:prstGeom>
+          <a:solidFill>
+            <a:schemeClr val="accent2"/>
+          </a:solidFill>
+          <a:ln>
+            <a:noFill/>
+          </a:ln>
+        </p:spPr>
+        <p:style>
+          <a:lnRef idx="2">
+            <a:schemeClr val="accent1">
+              <a:shade val="50000"/>
+            </a:schemeClr>
+          </a:lnRef>
+          <a:fillRef idx="1">
+            <a:schemeClr val="accent1"/>
+          </a:fillRef>
+          <a:effectRef idx="0">
+            <a:schemeClr val="accent1"/>
+          </a:effectRef>
+          <a:fontRef idx="minor">
+            <a:schemeClr val="lt1"/>
+          </a:fontRef>
+        </p:style>
+        <p:txBody>
+          <a:bodyPr rtlCol="0" anchor="ctr"/>
+          <a:lstStyle/>
+          <a:p>
+            <a:pPr algn="ctr"/>
+            <a:endParaRPr lang="en-US">
+              <a:solidFill>
+                <a:prstClr val="white"/>
+              </a:solidFill>
+              <a:latin typeface="Calibri" panose="020F0502020204030204"/>
+            </a:endParaRPr>
+          </a:p>
+        </p:txBody>
+      </p:sp>
+      <p:sp>
+        <p:nvSpPr>
+          <p:cNvPr id="17" name="Rectangle 16">
+            <a:extLst>
+              <a:ext uri="{FF2B5EF4-FFF2-40B4-BE49-F238E27FC236}">
+                <a16:creationId xmlns:a16="http://schemas.microsoft.com/office/drawing/2014/main" id="{08C9B587-E65E-4B52-B37C-ABEBB6E87928}"/>
+              </a:ext>
+              <a:ext uri="{C183D7F6-B498-43B3-948B-1728B52AA6E4}">
+                <adec:decorative xmlns:adec="http://schemas.microsoft.com/office/drawing/2017/decorative" val="1"/>
+              </a:ext>
+            </a:extLst>
+          </p:cNvPr>
+          <p:cNvSpPr>
+            <a:spLocks noGrp="1" noRot="1" noChangeAspect="1" noMove="1" noResize="1" noEditPoints="1" noAdjustHandles="1" noChangeArrowheads="1" noChangeShapeType="1" noTextEdit="1"/>
+          </p:cNvSpPr>
+          <p:nvPr>
+            <p:extLst>
+              <p:ext uri="{386F3935-93C4-4BCD-93E2-E3B085C9AB24}">
+                <p16:designElem xmlns:p16="http://schemas.microsoft.com/office/powerpoint/2015/main" val="1"/>
+              </p:ext>
+            </p:extLst>
+          </p:nvPr>
+        </p:nvSpPr>
+        <p:spPr>
+          <a:xfrm>
+            <a:off x="481029" y="4546920"/>
+            <a:ext cx="3977640" cy="18288"/>
+          </a:xfrm>
+          <a:prstGeom prst="rect">
+            <a:avLst/>
+          </a:prstGeom>
+          <a:solidFill>
+            <a:schemeClr val="tx1"/>
+          </a:solidFill>
+          <a:ln w="3175">
+            <a:noFill/>
+          </a:ln>
+          <a:effectLst/>
+        </p:spPr>
+        <p:style>
+          <a:lnRef idx="2">
+            <a:schemeClr val="accent1">
+              <a:shade val="50000"/>
+            </a:schemeClr>
+          </a:lnRef>
+          <a:fillRef idx="1">
+            <a:schemeClr val="accent1"/>
+          </a:fillRef>
+          <a:effectRef idx="0">
+            <a:schemeClr val="accent1"/>
+          </a:effectRef>
+          <a:fontRef idx="minor">
+            <a:schemeClr val="lt1"/>
+          </a:fontRef>
+        </p:style>
+        <p:txBody>
+          <a:bodyPr rtlCol="0" anchor="ctr"/>
+          <a:lstStyle/>
+          <a:p>
+            <a:pPr marL="0" marR="0" lvl="0" indent="0" algn="ctr" defTabSz="914400" rtl="0" eaLnBrk="1" fontAlgn="auto" latinLnBrk="0" hangingPunct="1">
+              <a:lnSpc>
+                <a:spcPct val="100000"/>
+              </a:lnSpc>
+              <a:spcBef>
+                <a:spcPts val="0"/>
+              </a:spcBef>
+              <a:spcAft>
+                <a:spcPts val="0"/>
+              </a:spcAft>
+              <a:buClrTx/>
+              <a:buSzTx/>
+              <a:buFontTx/>
+              <a:buNone/>
+              <a:tabLst/>
+              <a:defRPr/>
+            </a:pPr>
+            <a:endParaRPr kumimoji="0" lang="en-US" sz="1800" b="0" i="0" u="none" strike="noStrike" kern="1200" cap="none" spc="0" normalizeH="0" baseline="0" noProof="0">
+              <a:ln>
+                <a:noFill/>
+              </a:ln>
+              <a:solidFill>
+                <a:prstClr val="white"/>
+              </a:solidFill>
+              <a:effectLst/>
+              <a:uLnTx/>
+              <a:uFillTx/>
+              <a:latin typeface="Calibri" panose="020F0502020204030204"/>
+              <a:ea typeface="+mn-ea"/>
+              <a:cs typeface="+mn-cs"/>
+            </a:endParaRPr>
+          </a:p>
+        </p:txBody>
+      </p:sp>
+      <p:sp>
+        <p:nvSpPr>
+          <p:cNvPr id="6" name="TextBox 5">
+            <a:extLst>
+              <a:ext uri="{FF2B5EF4-FFF2-40B4-BE49-F238E27FC236}">
+                <a16:creationId xmlns:a16="http://schemas.microsoft.com/office/drawing/2014/main" id="{7FE3BFC9-DF23-E701-1B71-CBC86AA91897}"/>
+              </a:ext>
+            </a:extLst>
+          </p:cNvPr>
+          <p:cNvSpPr txBox="1"/>
+          <p:nvPr/>
+        </p:nvSpPr>
+        <p:spPr>
+          <a:xfrm>
+            <a:off x="9739085" y="6657945"/>
+            <a:ext cx="2452915" cy="200055"/>
+          </a:xfrm>
+          <a:prstGeom prst="rect">
+            <a:avLst/>
+          </a:prstGeom>
+          <a:solidFill>
+            <a:srgbClr val="000000"/>
+          </a:solidFill>
+        </p:spPr>
+        <p:txBody>
+          <a:bodyPr wrap="none" rtlCol="0">
+            <a:spAutoFit/>
+          </a:bodyPr>
+          <a:lstStyle/>
+          <a:p>
+            <a:pPr algn="r">
+              <a:spcAft>
+                <a:spcPts val="600"/>
+              </a:spcAft>
+            </a:pPr>
+            <a:r>
+              <a:rPr lang="en-US" sz="700">
+                <a:solidFill>
+                  <a:srgbClr val="FFFFFF"/>
+                </a:solidFill>
+                <a:hlinkClick r:id="rId3" tooltip="https://www.usgamblingsites.com/news/march-madness-betting-begins-in-the-united-states/">
+                  <a:extLst>
+                    <a:ext uri="{A12FA001-AC4F-418D-AE19-62706E023703}">
+                      <ahyp:hlinkClr xmlns:ahyp="http://schemas.microsoft.com/office/drawing/2018/hyperlinkcolor" val="tx"/>
+                    </a:ext>
+                  </a:extLst>
+                </a:hlinkClick>
+              </a:rPr>
+              <a:t>This Photo</a:t>
+            </a:r>
+            <a:r>
+              <a:rPr lang="en-US" sz="700">
+                <a:solidFill>
+                  <a:srgbClr val="FFFFFF"/>
+                </a:solidFill>
+              </a:rPr>
+              <a:t> by Unknown Author is licensed under </a:t>
+            </a:r>
+            <a:r>
+              <a:rPr lang="en-US" sz="700">
+                <a:solidFill>
+                  <a:srgbClr val="FFFFFF"/>
+                </a:solidFill>
+                <a:hlinkClick r:id="rId4" tooltip="https://creativecommons.org/licenses/by-nd/3.0/">
+                  <a:extLst>
+                    <a:ext uri="{A12FA001-AC4F-418D-AE19-62706E023703}">
+                      <ahyp:hlinkClr xmlns:ahyp="http://schemas.microsoft.com/office/drawing/2018/hyperlinkcolor" val="tx"/>
+                    </a:ext>
+                  </a:extLst>
+                </a:hlinkClick>
+              </a:rPr>
+              <a:t>CC BY-ND</a:t>
+            </a:r>
+            <a:endParaRPr lang="en-US" sz="700">
+              <a:solidFill>
+                <a:srgbClr val="FFFFFF"/>
+              </a:solidFill>
+            </a:endParaRPr>
           </a:p>
         </p:txBody>
       </p:sp>
@@ -3402,6 +7024,14 @@
 <file path=ppt/slides/slide10.xml><?xml version="1.0" encoding="utf-8"?>
 <p:sld xmlns:a="http://schemas.openxmlformats.org/drawingml/2006/main" xmlns:r="http://schemas.openxmlformats.org/officeDocument/2006/relationships" xmlns:p="http://schemas.openxmlformats.org/presentationml/2006/main">
   <p:cSld>
+    <p:bg>
+      <p:bgPr>
+        <a:solidFill>
+          <a:schemeClr val="bg1"/>
+        </a:solidFill>
+        <a:effectLst/>
+      </p:bgPr>
+    </p:bg>
     <p:spTree>
       <p:nvGrpSpPr>
         <p:cNvPr id="1" name=""/>
@@ -3416,6 +7046,309 @@
           <a:chExt cx="0" cy="0"/>
         </a:xfrm>
       </p:grpSpPr>
+      <p:sp useBgFill="1">
+        <p:nvSpPr>
+          <p:cNvPr id="17" name="Rectangle 16">
+            <a:extLst>
+              <a:ext uri="{FF2B5EF4-FFF2-40B4-BE49-F238E27FC236}">
+                <a16:creationId xmlns:a16="http://schemas.microsoft.com/office/drawing/2014/main" id="{BACC6370-2D7E-4714-9D71-7542949D7D5D}"/>
+              </a:ext>
+              <a:ext uri="{C183D7F6-B498-43B3-948B-1728B52AA6E4}">
+                <adec:decorative xmlns:adec="http://schemas.microsoft.com/office/drawing/2017/decorative" val="1"/>
+              </a:ext>
+            </a:extLst>
+          </p:cNvPr>
+          <p:cNvSpPr>
+            <a:spLocks noGrp="1" noRot="1" noChangeAspect="1" noMove="1" noResize="1" noEditPoints="1" noAdjustHandles="1" noChangeArrowheads="1" noChangeShapeType="1" noTextEdit="1"/>
+          </p:cNvSpPr>
+          <p:nvPr>
+            <p:extLst>
+              <p:ext uri="{386F3935-93C4-4BCD-93E2-E3B085C9AB24}">
+                <p16:designElem xmlns:p16="http://schemas.microsoft.com/office/powerpoint/2015/main" val="1"/>
+              </p:ext>
+            </p:extLst>
+          </p:nvPr>
+        </p:nvSpPr>
+        <p:spPr>
+          <a:xfrm>
+            <a:off x="0" y="0"/>
+            <a:ext cx="12192000" cy="6858000"/>
+          </a:xfrm>
+          <a:prstGeom prst="rect">
+            <a:avLst/>
+          </a:prstGeom>
+          <a:ln w="12700" cap="flat" cmpd="sng" algn="ctr">
+            <a:noFill/>
+            <a:prstDash val="solid"/>
+            <a:miter lim="800000"/>
+          </a:ln>
+          <a:effectLst/>
+          <a:extLst>
+            <a:ext uri="{91240B29-F687-4F45-9708-019B960494DF}">
+              <a14:hiddenLine xmlns:a14="http://schemas.microsoft.com/office/drawing/2010/main" w="12700" cap="flat" cmpd="sng" algn="ctr">
+                <a:solidFill>
+                  <a:schemeClr val="accent1">
+                    <a:shade val="50000"/>
+                  </a:schemeClr>
+                </a:solidFill>
+                <a:prstDash val="solid"/>
+                <a:miter lim="800000"/>
+              </a14:hiddenLine>
+            </a:ext>
+          </a:extLst>
+        </p:spPr>
+        <p:style>
+          <a:lnRef idx="2">
+            <a:schemeClr val="accent1">
+              <a:shade val="50000"/>
+            </a:schemeClr>
+          </a:lnRef>
+          <a:fillRef idx="1">
+            <a:schemeClr val="accent1"/>
+          </a:fillRef>
+          <a:effectRef idx="0">
+            <a:schemeClr val="accent1"/>
+          </a:effectRef>
+          <a:fontRef idx="minor">
+            <a:schemeClr val="lt1"/>
+          </a:fontRef>
+        </p:style>
+        <p:txBody>
+          <a:bodyPr rtlCol="0" anchor="ctr"/>
+          <a:lstStyle/>
+          <a:p>
+            <a:pPr algn="ctr"/>
+            <a:endParaRPr lang="en-US"/>
+          </a:p>
+        </p:txBody>
+      </p:sp>
+      <p:sp>
+        <p:nvSpPr>
+          <p:cNvPr id="18" name="Rectangle 17">
+            <a:extLst>
+              <a:ext uri="{FF2B5EF4-FFF2-40B4-BE49-F238E27FC236}">
+                <a16:creationId xmlns:a16="http://schemas.microsoft.com/office/drawing/2014/main" id="{F68B3F68-107C-434F-AA38-110D5EA91B85}"/>
+              </a:ext>
+              <a:ext uri="{C183D7F6-B498-43B3-948B-1728B52AA6E4}">
+                <adec:decorative xmlns:adec="http://schemas.microsoft.com/office/drawing/2017/decorative" val="1"/>
+              </a:ext>
+            </a:extLst>
+          </p:cNvPr>
+          <p:cNvSpPr>
+            <a:spLocks noGrp="1" noRot="1" noChangeAspect="1" noMove="1" noResize="1" noEditPoints="1" noAdjustHandles="1" noChangeArrowheads="1" noChangeShapeType="1" noTextEdit="1"/>
+          </p:cNvSpPr>
+          <p:nvPr>
+            <p:extLst>
+              <p:ext uri="{386F3935-93C4-4BCD-93E2-E3B085C9AB24}">
+                <p16:designElem xmlns:p16="http://schemas.microsoft.com/office/powerpoint/2015/main" val="1"/>
+              </p:ext>
+            </p:extLst>
+          </p:nvPr>
+        </p:nvSpPr>
+        <p:spPr>
+          <a:xfrm flipH="1">
+            <a:off x="2" y="0"/>
+            <a:ext cx="12191998" cy="2170031"/>
+          </a:xfrm>
+          <a:prstGeom prst="rect">
+            <a:avLst/>
+          </a:prstGeom>
+          <a:gradFill>
+            <a:gsLst>
+              <a:gs pos="0">
+                <a:srgbClr val="000000">
+                  <a:alpha val="96000"/>
+                </a:srgbClr>
+              </a:gs>
+              <a:gs pos="100000">
+                <a:schemeClr val="accent1">
+                  <a:lumMod val="75000"/>
+                </a:schemeClr>
+              </a:gs>
+            </a:gsLst>
+            <a:lin ang="19800000" scaled="0"/>
+          </a:gradFill>
+          <a:ln>
+            <a:noFill/>
+          </a:ln>
+        </p:spPr>
+        <p:style>
+          <a:lnRef idx="2">
+            <a:schemeClr val="accent1">
+              <a:shade val="50000"/>
+            </a:schemeClr>
+          </a:lnRef>
+          <a:fillRef idx="1">
+            <a:schemeClr val="accent1"/>
+          </a:fillRef>
+          <a:effectRef idx="0">
+            <a:schemeClr val="accent1"/>
+          </a:effectRef>
+          <a:fontRef idx="minor">
+            <a:schemeClr val="lt1"/>
+          </a:fontRef>
+        </p:style>
+        <p:txBody>
+          <a:bodyPr rtlCol="0" anchor="ctr"/>
+          <a:lstStyle/>
+          <a:p>
+            <a:pPr algn="ctr"/>
+            <a:endParaRPr lang="en-US"/>
+          </a:p>
+        </p:txBody>
+      </p:sp>
+      <p:sp>
+        <p:nvSpPr>
+          <p:cNvPr id="19" name="Rectangle 18">
+            <a:extLst>
+              <a:ext uri="{FF2B5EF4-FFF2-40B4-BE49-F238E27FC236}">
+                <a16:creationId xmlns:a16="http://schemas.microsoft.com/office/drawing/2014/main" id="{AAD0DBB9-1A4B-4391-81D4-CB19F9AB918A}"/>
+              </a:ext>
+              <a:ext uri="{C183D7F6-B498-43B3-948B-1728B52AA6E4}">
+                <adec:decorative xmlns:adec="http://schemas.microsoft.com/office/drawing/2017/decorative" val="1"/>
+              </a:ext>
+            </a:extLst>
+          </p:cNvPr>
+          <p:cNvSpPr>
+            <a:spLocks noGrp="1" noRot="1" noChangeAspect="1" noMove="1" noResize="1" noEditPoints="1" noAdjustHandles="1" noChangeArrowheads="1" noChangeShapeType="1" noTextEdit="1"/>
+          </p:cNvSpPr>
+          <p:nvPr>
+            <p:extLst>
+              <p:ext uri="{386F3935-93C4-4BCD-93E2-E3B085C9AB24}">
+                <p16:designElem xmlns:p16="http://schemas.microsoft.com/office/powerpoint/2015/main" val="1"/>
+              </p:ext>
+            </p:extLst>
+          </p:nvPr>
+        </p:nvSpPr>
+        <p:spPr>
+          <a:xfrm flipH="1">
+            <a:off x="8082819" y="0"/>
+            <a:ext cx="4097211" cy="2170661"/>
+          </a:xfrm>
+          <a:prstGeom prst="rect">
+            <a:avLst/>
+          </a:prstGeom>
+          <a:gradFill>
+            <a:gsLst>
+              <a:gs pos="19000">
+                <a:schemeClr val="accent1">
+                  <a:lumMod val="50000"/>
+                  <a:alpha val="68000"/>
+                </a:schemeClr>
+              </a:gs>
+              <a:gs pos="100000">
+                <a:schemeClr val="accent1">
+                  <a:alpha val="48000"/>
+                </a:schemeClr>
+              </a:gs>
+            </a:gsLst>
+            <a:lin ang="19200000" scaled="0"/>
+          </a:gradFill>
+          <a:ln>
+            <a:noFill/>
+          </a:ln>
+        </p:spPr>
+        <p:style>
+          <a:lnRef idx="2">
+            <a:schemeClr val="accent1">
+              <a:shade val="50000"/>
+            </a:schemeClr>
+          </a:lnRef>
+          <a:fillRef idx="1">
+            <a:schemeClr val="accent1"/>
+          </a:fillRef>
+          <a:effectRef idx="0">
+            <a:schemeClr val="accent1"/>
+          </a:effectRef>
+          <a:fontRef idx="minor">
+            <a:schemeClr val="lt1"/>
+          </a:fontRef>
+        </p:style>
+        <p:txBody>
+          <a:bodyPr rtlCol="0" anchor="ctr"/>
+          <a:lstStyle/>
+          <a:p>
+            <a:pPr algn="ctr"/>
+            <a:endParaRPr lang="en-US"/>
+          </a:p>
+        </p:txBody>
+      </p:sp>
+      <p:sp>
+        <p:nvSpPr>
+          <p:cNvPr id="20" name="Rectangle 19">
+            <a:extLst>
+              <a:ext uri="{FF2B5EF4-FFF2-40B4-BE49-F238E27FC236}">
+                <a16:creationId xmlns:a16="http://schemas.microsoft.com/office/drawing/2014/main" id="{063BBA22-50EA-4C4D-BE05-F1CE4E63AA56}"/>
+              </a:ext>
+              <a:ext uri="{C183D7F6-B498-43B3-948B-1728B52AA6E4}">
+                <adec:decorative xmlns:adec="http://schemas.microsoft.com/office/drawing/2017/decorative" val="1"/>
+              </a:ext>
+            </a:extLst>
+          </p:cNvPr>
+          <p:cNvSpPr>
+            <a:spLocks noGrp="1" noRot="1" noChangeAspect="1" noMove="1" noResize="1" noEditPoints="1" noAdjustHandles="1" noChangeArrowheads="1" noChangeShapeType="1" noTextEdit="1"/>
+          </p:cNvSpPr>
+          <p:nvPr>
+            <p:extLst>
+              <p:ext uri="{386F3935-93C4-4BCD-93E2-E3B085C9AB24}">
+                <p16:designElem xmlns:p16="http://schemas.microsoft.com/office/powerpoint/2015/main" val="1"/>
+              </p:ext>
+            </p:extLst>
+          </p:nvPr>
+        </p:nvSpPr>
+        <p:spPr>
+          <a:xfrm rot="16200000" flipH="1">
+            <a:off x="5010646" y="-5010043"/>
+            <a:ext cx="2170709" cy="12192000"/>
+          </a:xfrm>
+          <a:prstGeom prst="rect">
+            <a:avLst/>
+          </a:prstGeom>
+          <a:gradFill>
+            <a:gsLst>
+              <a:gs pos="23000">
+                <a:schemeClr val="accent1">
+                  <a:lumMod val="75000"/>
+                  <a:alpha val="16000"/>
+                </a:schemeClr>
+              </a:gs>
+              <a:gs pos="99000">
+                <a:srgbClr val="000000">
+                  <a:alpha val="45000"/>
+                </a:srgbClr>
+              </a:gs>
+            </a:gsLst>
+            <a:lin ang="21000000" scaled="0"/>
+          </a:gradFill>
+          <a:ln>
+            <a:noFill/>
+          </a:ln>
+        </p:spPr>
+        <p:style>
+          <a:lnRef idx="2">
+            <a:schemeClr val="accent1">
+              <a:shade val="50000"/>
+            </a:schemeClr>
+          </a:lnRef>
+          <a:fillRef idx="1">
+            <a:schemeClr val="accent1"/>
+          </a:fillRef>
+          <a:effectRef idx="0">
+            <a:schemeClr val="accent1"/>
+          </a:effectRef>
+          <a:fontRef idx="minor">
+            <a:schemeClr val="lt1"/>
+          </a:fontRef>
+        </p:style>
+        <p:txBody>
+          <a:bodyPr rtlCol="0" anchor="ctr"/>
+          <a:lstStyle/>
+          <a:p>
+            <a:pPr algn="ctr"/>
+            <a:endParaRPr lang="en-US" dirty="0"/>
+          </a:p>
+        </p:txBody>
+      </p:sp>
       <p:sp>
         <p:nvSpPr>
           <p:cNvPr id="2" name="Title 1">
@@ -3432,66 +7365,60 @@
             <p:ph type="title"/>
           </p:nvPr>
         </p:nvSpPr>
-        <p:spPr/>
+        <p:spPr>
+          <a:xfrm>
+            <a:off x="1383564" y="348865"/>
+            <a:ext cx="9718111" cy="1576446"/>
+          </a:xfrm>
+        </p:spPr>
         <p:txBody>
-          <a:bodyPr/>
+          <a:bodyPr anchor="ctr">
+            <a:normAutofit/>
+          </a:bodyPr>
           <a:lstStyle/>
           <a:p>
             <a:r>
-              <a:rPr lang="en-US" dirty="0"/>
+              <a:rPr lang="en-US" sz="4000">
+                <a:solidFill>
+                  <a:srgbClr val="FFFFFF"/>
+                </a:solidFill>
+              </a:rPr>
               <a:t>Conclusion and Takeaways</a:t>
             </a:r>
           </a:p>
         </p:txBody>
       </p:sp>
-      <p:sp>
-        <p:nvSpPr>
-          <p:cNvPr id="3" name="Content Placeholder 2">
+      <p:graphicFrame>
+        <p:nvGraphicFramePr>
+          <p:cNvPr id="21" name="Content Placeholder 2">
             <a:extLst>
               <a:ext uri="{FF2B5EF4-FFF2-40B4-BE49-F238E27FC236}">
-                <a16:creationId xmlns:a16="http://schemas.microsoft.com/office/drawing/2014/main" id="{E22495A3-C735-031D-336B-8508BC0024D1}"/>
+                <a16:creationId xmlns:a16="http://schemas.microsoft.com/office/drawing/2014/main" id="{1148BF5E-FFD9-8F4D-3995-CFF3BEC6608A}"/>
               </a:ext>
             </a:extLst>
           </p:cNvPr>
-          <p:cNvSpPr>
-            <a:spLocks noGrp="1"/>
-          </p:cNvSpPr>
+          <p:cNvGraphicFramePr>
+            <a:graphicFrameLocks noGrp="1"/>
+          </p:cNvGraphicFramePr>
           <p:nvPr>
             <p:ph idx="1"/>
+            <p:extLst>
+              <p:ext uri="{D42A27DB-BD31-4B8C-83A1-F6EECF244321}">
+                <p14:modId xmlns:p14="http://schemas.microsoft.com/office/powerpoint/2010/main" val="2376214265"/>
+              </p:ext>
+            </p:extLst>
           </p:nvPr>
-        </p:nvSpPr>
-        <p:spPr/>
-        <p:txBody>
-          <a:bodyPr>
-            <a:normAutofit lnSpcReduction="10000"/>
-          </a:bodyPr>
-          <a:lstStyle/>
-          <a:p>
-            <a:r>
-              <a:rPr lang="en-US" dirty="0"/>
-              <a:t>We proved our hypothesis that unsupervised metrics could improve our supervised upset predictions over a baseline model (guess 50-50 model). </a:t>
-            </a:r>
-          </a:p>
-          <a:p>
-            <a:endParaRPr lang="en-US" dirty="0"/>
-          </a:p>
-          <a:p>
-            <a:r>
-              <a:rPr lang="en-US" dirty="0"/>
-              <a:t>Statistically, Cinderella runs are uncommon and thus difficult to work with due to imbalanced data. </a:t>
-            </a:r>
-          </a:p>
-          <a:p>
-            <a:endParaRPr lang="en-US" dirty="0"/>
-          </a:p>
-          <a:p>
-            <a:r>
-              <a:rPr lang="en-US" dirty="0"/>
-              <a:t>However, by looking at efficiency profiles, ball security, and team consistency, we can find teams that are better teams than their seed might suggest.</a:t>
-            </a:r>
-          </a:p>
-        </p:txBody>
-      </p:sp>
+        </p:nvGraphicFramePr>
+        <p:xfrm>
+          <a:off x="644056" y="2615979"/>
+          <a:ext cx="10927829" cy="3689405"/>
+        </p:xfrm>
+        <a:graphic>
+          <a:graphicData uri="http://schemas.openxmlformats.org/drawingml/2006/diagram">
+            <dgm:relIds xmlns:dgm="http://schemas.openxmlformats.org/drawingml/2006/diagram" xmlns:r="http://schemas.openxmlformats.org/officeDocument/2006/relationships" r:dm="rId2" r:lo="rId3" r:qs="rId4" r:cs="rId5"/>
+          </a:graphicData>
+        </a:graphic>
+      </p:graphicFrame>
     </p:spTree>
     <p:extLst>
       <p:ext uri="{BB962C8B-B14F-4D97-AF65-F5344CB8AC3E}">
@@ -3508,6 +7435,14 @@
 <file path=ppt/slides/slide2.xml><?xml version="1.0" encoding="utf-8"?>
 <p:sld xmlns:a="http://schemas.openxmlformats.org/drawingml/2006/main" xmlns:r="http://schemas.openxmlformats.org/officeDocument/2006/relationships" xmlns:p="http://schemas.openxmlformats.org/presentationml/2006/main">
   <p:cSld>
+    <p:bg>
+      <p:bgPr>
+        <a:solidFill>
+          <a:schemeClr val="bg1"/>
+        </a:solidFill>
+        <a:effectLst/>
+      </p:bgPr>
+    </p:bg>
     <p:spTree>
       <p:nvGrpSpPr>
         <p:cNvPr id="1" name=""/>
@@ -3522,6 +7457,192 @@
           <a:chExt cx="0" cy="0"/>
         </a:xfrm>
       </p:grpSpPr>
+      <p:sp useBgFill="1">
+        <p:nvSpPr>
+          <p:cNvPr id="47" name="Rectangle 46">
+            <a:extLst>
+              <a:ext uri="{FF2B5EF4-FFF2-40B4-BE49-F238E27FC236}">
+                <a16:creationId xmlns:a16="http://schemas.microsoft.com/office/drawing/2014/main" id="{04812C46-200A-4DEB-A05E-3ED6C68C2387}"/>
+              </a:ext>
+              <a:ext uri="{C183D7F6-B498-43B3-948B-1728B52AA6E4}">
+                <adec:decorative xmlns:adec="http://schemas.microsoft.com/office/drawing/2017/decorative" val="1"/>
+              </a:ext>
+            </a:extLst>
+          </p:cNvPr>
+          <p:cNvSpPr>
+            <a:spLocks noGrp="1" noRot="1" noChangeAspect="1" noMove="1" noResize="1" noEditPoints="1" noAdjustHandles="1" noChangeArrowheads="1" noChangeShapeType="1" noTextEdit="1"/>
+          </p:cNvSpPr>
+          <p:nvPr>
+            <p:extLst>
+              <p:ext uri="{386F3935-93C4-4BCD-93E2-E3B085C9AB24}">
+                <p16:designElem xmlns:p16="http://schemas.microsoft.com/office/powerpoint/2015/main" val="1"/>
+              </p:ext>
+            </p:extLst>
+          </p:nvPr>
+        </p:nvSpPr>
+        <p:spPr>
+          <a:xfrm>
+            <a:off x="3049" y="0"/>
+            <a:ext cx="12188952" cy="6858000"/>
+          </a:xfrm>
+          <a:prstGeom prst="rect">
+            <a:avLst/>
+          </a:prstGeom>
+          <a:ln>
+            <a:noFill/>
+          </a:ln>
+        </p:spPr>
+        <p:style>
+          <a:lnRef idx="2">
+            <a:schemeClr val="accent1">
+              <a:shade val="50000"/>
+            </a:schemeClr>
+          </a:lnRef>
+          <a:fillRef idx="1">
+            <a:schemeClr val="accent1"/>
+          </a:fillRef>
+          <a:effectRef idx="0">
+            <a:schemeClr val="accent1"/>
+          </a:effectRef>
+          <a:fontRef idx="minor">
+            <a:schemeClr val="lt1"/>
+          </a:fontRef>
+        </p:style>
+        <p:txBody>
+          <a:bodyPr rtlCol="0" anchor="ctr"/>
+          <a:lstStyle/>
+          <a:p>
+            <a:pPr algn="ctr"/>
+            <a:endParaRPr lang="en-US"/>
+          </a:p>
+        </p:txBody>
+      </p:sp>
+      <p:pic>
+        <p:nvPicPr>
+          <p:cNvPr id="5" name="Picture 4">
+            <a:extLst>
+              <a:ext uri="{FF2B5EF4-FFF2-40B4-BE49-F238E27FC236}">
+                <a16:creationId xmlns:a16="http://schemas.microsoft.com/office/drawing/2014/main" id="{14C1BD38-C00F-0BFB-A0E6-91E551E64D97}"/>
+              </a:ext>
+            </a:extLst>
+          </p:cNvPr>
+          <p:cNvPicPr>
+            <a:picLocks noChangeAspect="1"/>
+          </p:cNvPicPr>
+          <p:nvPr/>
+        </p:nvPicPr>
+        <p:blipFill>
+          <a:blip r:embed="rId2">
+            <a:extLst>
+              <a:ext uri="{28A0092B-C50C-407E-A947-70E740481C1C}">
+                <a14:useLocalDpi xmlns:a14="http://schemas.microsoft.com/office/drawing/2010/main" val="0"/>
+              </a:ext>
+              <a:ext uri="{837473B0-CC2E-450A-ABE3-18F120FF3D39}">
+                <a1611:picAttrSrcUrl xmlns:a1611="http://schemas.microsoft.com/office/drawing/2016/11/main" r:id="rId3"/>
+              </a:ext>
+            </a:extLst>
+          </a:blip>
+          <a:srcRect l="6236"/>
+          <a:stretch>
+            <a:fillRect/>
+          </a:stretch>
+        </p:blipFill>
+        <p:spPr>
+          <a:xfrm>
+            <a:off x="2522356" y="10"/>
+            <a:ext cx="9669642" cy="6857990"/>
+          </a:xfrm>
+          <a:prstGeom prst="rect">
+            <a:avLst/>
+          </a:prstGeom>
+        </p:spPr>
+      </p:pic>
+      <p:sp>
+        <p:nvSpPr>
+          <p:cNvPr id="49" name="Rectangle 48">
+            <a:extLst>
+              <a:ext uri="{FF2B5EF4-FFF2-40B4-BE49-F238E27FC236}">
+                <a16:creationId xmlns:a16="http://schemas.microsoft.com/office/drawing/2014/main" id="{D1EA859B-E555-4109-94F3-6700E046E008}"/>
+              </a:ext>
+              <a:ext uri="{C183D7F6-B498-43B3-948B-1728B52AA6E4}">
+                <adec:decorative xmlns:adec="http://schemas.microsoft.com/office/drawing/2017/decorative" val="1"/>
+              </a:ext>
+            </a:extLst>
+          </p:cNvPr>
+          <p:cNvSpPr>
+            <a:spLocks noGrp="1" noRot="1" noChangeAspect="1" noMove="1" noResize="1" noEditPoints="1" noAdjustHandles="1" noChangeArrowheads="1" noChangeShapeType="1" noTextEdit="1"/>
+          </p:cNvSpPr>
+          <p:nvPr>
+            <p:extLst>
+              <p:ext uri="{386F3935-93C4-4BCD-93E2-E3B085C9AB24}">
+                <p16:designElem xmlns:p16="http://schemas.microsoft.com/office/powerpoint/2015/main" val="1"/>
+              </p:ext>
+            </p:extLst>
+          </p:nvPr>
+        </p:nvSpPr>
+        <p:spPr>
+          <a:xfrm>
+            <a:off x="-1" y="0"/>
+            <a:ext cx="7390263" cy="6858000"/>
+          </a:xfrm>
+          <a:prstGeom prst="rect">
+            <a:avLst/>
+          </a:prstGeom>
+          <a:gradFill>
+            <a:gsLst>
+              <a:gs pos="48000">
+                <a:schemeClr val="bg1"/>
+              </a:gs>
+              <a:gs pos="35000">
+                <a:schemeClr val="bg1">
+                  <a:alpha val="77000"/>
+                </a:schemeClr>
+              </a:gs>
+              <a:gs pos="19000">
+                <a:schemeClr val="bg1">
+                  <a:alpha val="38000"/>
+                </a:schemeClr>
+              </a:gs>
+              <a:gs pos="0">
+                <a:schemeClr val="bg1">
+                  <a:alpha val="0"/>
+                </a:schemeClr>
+              </a:gs>
+              <a:gs pos="100000">
+                <a:schemeClr val="bg1"/>
+              </a:gs>
+            </a:gsLst>
+            <a:lin ang="10800000" scaled="0"/>
+          </a:gradFill>
+          <a:ln>
+            <a:noFill/>
+          </a:ln>
+        </p:spPr>
+        <p:style>
+          <a:lnRef idx="2">
+            <a:schemeClr val="accent1">
+              <a:shade val="50000"/>
+            </a:schemeClr>
+          </a:lnRef>
+          <a:fillRef idx="1">
+            <a:schemeClr val="accent1"/>
+          </a:fillRef>
+          <a:effectRef idx="0">
+            <a:schemeClr val="accent1"/>
+          </a:effectRef>
+          <a:fontRef idx="minor">
+            <a:schemeClr val="lt1"/>
+          </a:fontRef>
+        </p:style>
+        <p:txBody>
+          <a:bodyPr rtlCol="0" anchor="ctr"/>
+          <a:lstStyle/>
+          <a:p>
+            <a:pPr algn="ctr"/>
+            <a:endParaRPr lang="en-US" dirty="0"/>
+          </a:p>
+        </p:txBody>
+      </p:sp>
       <p:sp>
         <p:nvSpPr>
           <p:cNvPr id="2" name="Title 1">
@@ -3538,13 +7659,20 @@
             <p:ph type="title"/>
           </p:nvPr>
         </p:nvSpPr>
-        <p:spPr/>
+        <p:spPr>
+          <a:xfrm>
+            <a:off x="838200" y="365125"/>
+            <a:ext cx="3822189" cy="1899912"/>
+          </a:xfrm>
+        </p:spPr>
         <p:txBody>
-          <a:bodyPr/>
+          <a:bodyPr>
+            <a:normAutofit/>
+          </a:bodyPr>
           <a:lstStyle/>
           <a:p>
             <a:r>
-              <a:rPr lang="en-US" dirty="0"/>
+              <a:rPr lang="en-US" sz="4000"/>
               <a:t>Motivation and Hypothesis</a:t>
             </a:r>
           </a:p>
@@ -3566,34 +7694,41 @@
             <p:ph idx="1"/>
           </p:nvPr>
         </p:nvSpPr>
-        <p:spPr/>
+        <p:spPr>
+          <a:xfrm>
+            <a:off x="838200" y="2434201"/>
+            <a:ext cx="3822189" cy="3742762"/>
+          </a:xfrm>
+        </p:spPr>
         <p:txBody>
-          <a:bodyPr/>
+          <a:bodyPr>
+            <a:normAutofit/>
+          </a:bodyPr>
           <a:lstStyle/>
           <a:p>
             <a:r>
-              <a:rPr lang="en-US" dirty="0"/>
+              <a:rPr lang="en-US" sz="1400"/>
               <a:t>Motivation:</a:t>
             </a:r>
           </a:p>
           <a:p>
             <a:pPr lvl="1"/>
             <a:r>
-              <a:rPr lang="en-US" dirty="0"/>
+              <a:rPr lang="en-US" sz="1400"/>
               <a:t>The Goal: Predict March Madness “Cinderella” Upsets</a:t>
             </a:r>
           </a:p>
           <a:p>
             <a:pPr lvl="1"/>
             <a:r>
-              <a:rPr lang="en-US" dirty="0"/>
+              <a:rPr lang="en-US" sz="1400"/>
               <a:t>The Problem: Traditional models typically over-rely on official seeding</a:t>
             </a:r>
           </a:p>
           <a:p>
             <a:pPr lvl="1"/>
             <a:r>
-              <a:rPr lang="en-US" dirty="0"/>
+              <a:rPr lang="en-US" sz="1400"/>
               <a:t>The Solution: Focus on a team’s statistical DNA using regular season advanced metrics.</a:t>
             </a:r>
           </a:p>
@@ -3601,14 +7736,14 @@
             <a:pPr marL="457200" lvl="1" indent="0">
               <a:buNone/>
             </a:pPr>
-            <a:endParaRPr lang="en-US" dirty="0"/>
+            <a:endParaRPr lang="en-US" sz="1400"/>
           </a:p>
           <a:p>
             <a:pPr marL="457200" lvl="1" indent="0">
               <a:buNone/>
             </a:pPr>
             <a:r>
-              <a:rPr lang="en-US" dirty="0"/>
+              <a:rPr lang="en-US" sz="1400"/>
               <a:t>Hypothesis</a:t>
             </a:r>
           </a:p>
@@ -3617,7 +7752,7 @@
               <a:buNone/>
             </a:pPr>
             <a:r>
-              <a:rPr lang="en-US" dirty="0"/>
+              <a:rPr lang="en-US" sz="1400"/>
               <a:t>- Integrating unsupervised anomaly scores into supervised classification models will significantly improve the predictive accuracy of NCAA tournament upsets.</a:t>
             </a:r>
           </a:p>
@@ -3639,6 +7774,14 @@
 <file path=ppt/slides/slide3.xml><?xml version="1.0" encoding="utf-8"?>
 <p:sld xmlns:a="http://schemas.openxmlformats.org/drawingml/2006/main" xmlns:r="http://schemas.openxmlformats.org/officeDocument/2006/relationships" xmlns:p="http://schemas.openxmlformats.org/presentationml/2006/main">
   <p:cSld>
+    <p:bg>
+      <p:bgPr>
+        <a:solidFill>
+          <a:schemeClr val="bg1"/>
+        </a:solidFill>
+        <a:effectLst/>
+      </p:bgPr>
+    </p:bg>
     <p:spTree>
       <p:nvGrpSpPr>
         <p:cNvPr id="1" name=""/>
@@ -3653,6 +7796,142 @@
           <a:chExt cx="0" cy="0"/>
         </a:xfrm>
       </p:grpSpPr>
+      <p:sp useBgFill="1">
+        <p:nvSpPr>
+          <p:cNvPr id="8" name="Rectangle 7">
+            <a:extLst>
+              <a:ext uri="{FF2B5EF4-FFF2-40B4-BE49-F238E27FC236}">
+                <a16:creationId xmlns:a16="http://schemas.microsoft.com/office/drawing/2014/main" id="{A2679492-7988-4050-9056-542444452411}"/>
+              </a:ext>
+              <a:ext uri="{C183D7F6-B498-43B3-948B-1728B52AA6E4}">
+                <adec:decorative xmlns:adec="http://schemas.microsoft.com/office/drawing/2017/decorative" val="1"/>
+              </a:ext>
+            </a:extLst>
+          </p:cNvPr>
+          <p:cNvSpPr>
+            <a:spLocks noGrp="1" noRot="1" noChangeAspect="1" noMove="1" noResize="1" noEditPoints="1" noAdjustHandles="1" noChangeArrowheads="1" noChangeShapeType="1" noTextEdit="1"/>
+          </p:cNvSpPr>
+          <p:nvPr>
+            <p:extLst>
+              <p:ext uri="{386F3935-93C4-4BCD-93E2-E3B085C9AB24}">
+                <p16:designElem xmlns:p16="http://schemas.microsoft.com/office/powerpoint/2015/main" val="1"/>
+              </p:ext>
+            </p:extLst>
+          </p:nvPr>
+        </p:nvSpPr>
+        <p:spPr>
+          <a:xfrm>
+            <a:off x="0" y="0"/>
+            <a:ext cx="12192000" cy="6858000"/>
+          </a:xfrm>
+          <a:prstGeom prst="rect">
+            <a:avLst/>
+          </a:prstGeom>
+          <a:ln>
+            <a:noFill/>
+          </a:ln>
+        </p:spPr>
+        <p:style>
+          <a:lnRef idx="2">
+            <a:schemeClr val="accent1">
+              <a:shade val="50000"/>
+            </a:schemeClr>
+          </a:lnRef>
+          <a:fillRef idx="1">
+            <a:schemeClr val="accent1"/>
+          </a:fillRef>
+          <a:effectRef idx="0">
+            <a:schemeClr val="accent1"/>
+          </a:effectRef>
+          <a:fontRef idx="minor">
+            <a:schemeClr val="lt1"/>
+          </a:fontRef>
+        </p:style>
+        <p:txBody>
+          <a:bodyPr rtlCol="0" anchor="ctr"/>
+          <a:lstStyle/>
+          <a:p>
+            <a:pPr algn="ctr"/>
+            <a:endParaRPr lang="en-US"/>
+          </a:p>
+        </p:txBody>
+      </p:sp>
+      <p:sp>
+        <p:nvSpPr>
+          <p:cNvPr id="10" name="Rectangle 9">
+            <a:extLst>
+              <a:ext uri="{FF2B5EF4-FFF2-40B4-BE49-F238E27FC236}">
+                <a16:creationId xmlns:a16="http://schemas.microsoft.com/office/drawing/2014/main" id="{B091B163-7D61-4891-ABCF-5C13D9C418D0}"/>
+              </a:ext>
+              <a:ext uri="{C183D7F6-B498-43B3-948B-1728B52AA6E4}">
+                <adec:decorative xmlns:adec="http://schemas.microsoft.com/office/drawing/2017/decorative" val="1"/>
+              </a:ext>
+            </a:extLst>
+          </p:cNvPr>
+          <p:cNvSpPr>
+            <a:spLocks noGrp="1" noRot="1" noChangeAspect="1" noMove="1" noResize="1" noEditPoints="1" noAdjustHandles="1" noChangeArrowheads="1" noChangeShapeType="1" noTextEdit="1"/>
+          </p:cNvSpPr>
+          <p:nvPr>
+            <p:extLst>
+              <p:ext uri="{386F3935-93C4-4BCD-93E2-E3B085C9AB24}">
+                <p16:designElem xmlns:p16="http://schemas.microsoft.com/office/powerpoint/2015/main" val="1"/>
+              </p:ext>
+            </p:extLst>
+          </p:nvPr>
+        </p:nvSpPr>
+        <p:spPr>
+          <a:xfrm>
+            <a:off x="0" y="0"/>
+            <a:ext cx="5779911" cy="6858000"/>
+          </a:xfrm>
+          <a:prstGeom prst="rect">
+            <a:avLst/>
+          </a:prstGeom>
+          <a:gradFill flip="none" rotWithShape="1">
+            <a:gsLst>
+              <a:gs pos="0">
+                <a:schemeClr val="accent1"/>
+              </a:gs>
+              <a:gs pos="100000">
+                <a:schemeClr val="accent2"/>
+              </a:gs>
+            </a:gsLst>
+            <a:lin ang="2700000" scaled="1"/>
+            <a:tileRect/>
+          </a:gradFill>
+          <a:ln>
+            <a:noFill/>
+          </a:ln>
+        </p:spPr>
+        <p:style>
+          <a:lnRef idx="2">
+            <a:schemeClr val="accent1">
+              <a:shade val="50000"/>
+            </a:schemeClr>
+          </a:lnRef>
+          <a:fillRef idx="1">
+            <a:schemeClr val="accent1"/>
+          </a:fillRef>
+          <a:effectRef idx="0">
+            <a:schemeClr val="accent1"/>
+          </a:effectRef>
+          <a:fontRef idx="minor">
+            <a:schemeClr val="lt1"/>
+          </a:fontRef>
+        </p:style>
+        <p:txBody>
+          <a:bodyPr rtlCol="0" anchor="ctr"/>
+          <a:lstStyle/>
+          <a:p>
+            <a:pPr algn="ctr"/>
+            <a:endParaRPr lang="en-US">
+              <a:solidFill>
+                <a:schemeClr val="tx1"/>
+              </a:solidFill>
+            </a:endParaRPr>
+          </a:p>
+        </p:txBody>
+      </p:sp>
       <p:sp>
         <p:nvSpPr>
           <p:cNvPr id="2" name="Title 1">
@@ -3669,18 +7948,525 @@
             <p:ph type="title"/>
           </p:nvPr>
         </p:nvSpPr>
-        <p:spPr/>
+        <p:spPr>
+          <a:xfrm>
+            <a:off x="1188069" y="381935"/>
+            <a:ext cx="4008583" cy="5974414"/>
+          </a:xfrm>
+        </p:spPr>
         <p:txBody>
-          <a:bodyPr/>
+          <a:bodyPr anchor="ctr">
+            <a:normAutofit/>
+          </a:bodyPr>
           <a:lstStyle/>
           <a:p>
             <a:r>
-              <a:rPr lang="en-US" dirty="0"/>
+              <a:rPr lang="en-US" sz="8000">
+                <a:solidFill>
+                  <a:srgbClr val="FFFFFF"/>
+                </a:solidFill>
+              </a:rPr>
               <a:t>The Data</a:t>
             </a:r>
           </a:p>
         </p:txBody>
       </p:sp>
+      <p:grpSp>
+        <p:nvGrpSpPr>
+          <p:cNvPr id="12" name="Group 11">
+            <a:extLst>
+              <a:ext uri="{FF2B5EF4-FFF2-40B4-BE49-F238E27FC236}">
+                <a16:creationId xmlns:a16="http://schemas.microsoft.com/office/drawing/2014/main" id="{0474DF76-993E-44DE-AFB0-C416182ACECF}"/>
+              </a:ext>
+              <a:ext uri="{C183D7F6-B498-43B3-948B-1728B52AA6E4}">
+                <adec:decorative xmlns:adec="http://schemas.microsoft.com/office/drawing/2017/decorative" val="1"/>
+              </a:ext>
+            </a:extLst>
+          </p:cNvPr>
+          <p:cNvGrpSpPr>
+            <a:grpSpLocks noGrp="1" noUngrp="1" noRot="1" noChangeAspect="1" noMove="1" noResize="1"/>
+          </p:cNvGrpSpPr>
+          <p:nvPr>
+            <p:extLst>
+              <p:ext uri="{386F3935-93C4-4BCD-93E2-E3B085C9AB24}">
+                <p16:designElem xmlns:p16="http://schemas.microsoft.com/office/powerpoint/2015/main" val="1"/>
+              </p:ext>
+            </p:extLst>
+          </p:nvPr>
+        </p:nvGrpSpPr>
+        <p:grpSpPr>
+          <a:xfrm>
+            <a:off x="613892" y="554152"/>
+            <a:ext cx="574177" cy="1075866"/>
+            <a:chOff x="613892" y="554152"/>
+            <a:chExt cx="574177" cy="1075866"/>
+          </a:xfrm>
+          <a:solidFill>
+            <a:srgbClr val="FFFFFF"/>
+          </a:solidFill>
+        </p:grpSpPr>
+        <p:sp>
+          <p:nvSpPr>
+            <p:cNvPr id="13" name="Graphic 11">
+              <a:extLst>
+                <a:ext uri="{FF2B5EF4-FFF2-40B4-BE49-F238E27FC236}">
+                  <a16:creationId xmlns:a16="http://schemas.microsoft.com/office/drawing/2014/main" id="{6CB927A4-E432-4310-9CD5-E89FF5063179}"/>
+                </a:ext>
+                <a:ext uri="{C183D7F6-B498-43B3-948B-1728B52AA6E4}">
+                  <adec:decorative xmlns:adec="http://schemas.microsoft.com/office/drawing/2017/decorative" val="1"/>
+                </a:ext>
+              </a:extLst>
+            </p:cNvPr>
+            <p:cNvSpPr/>
+            <p:nvPr>
+              <p:extLst>
+                <p:ext uri="{386F3935-93C4-4BCD-93E2-E3B085C9AB24}">
+                  <p16:designElem xmlns:p16="http://schemas.microsoft.com/office/powerpoint/2015/main" val="1"/>
+                </p:ext>
+              </p:extLst>
+            </p:nvPr>
+          </p:nvSpPr>
+          <p:spPr>
+            <a:xfrm>
+              <a:off x="633061" y="554152"/>
+              <a:ext cx="171515" cy="171515"/>
+            </a:xfrm>
+            <a:custGeom>
+              <a:avLst/>
+              <a:gdLst>
+                <a:gd name="connsiteX0" fmla="*/ 159874 w 171515"/>
+                <a:gd name="connsiteY0" fmla="*/ 74116 h 171515"/>
+                <a:gd name="connsiteX1" fmla="*/ 97399 w 171515"/>
+                <a:gd name="connsiteY1" fmla="*/ 74116 h 171515"/>
+                <a:gd name="connsiteX2" fmla="*/ 97399 w 171515"/>
+                <a:gd name="connsiteY2" fmla="*/ 11641 h 171515"/>
+                <a:gd name="connsiteX3" fmla="*/ 85758 w 171515"/>
+                <a:gd name="connsiteY3" fmla="*/ 0 h 171515"/>
+                <a:gd name="connsiteX4" fmla="*/ 74116 w 171515"/>
+                <a:gd name="connsiteY4" fmla="*/ 11641 h 171515"/>
+                <a:gd name="connsiteX5" fmla="*/ 74116 w 171515"/>
+                <a:gd name="connsiteY5" fmla="*/ 74116 h 171515"/>
+                <a:gd name="connsiteX6" fmla="*/ 11641 w 171515"/>
+                <a:gd name="connsiteY6" fmla="*/ 74116 h 171515"/>
+                <a:gd name="connsiteX7" fmla="*/ 0 w 171515"/>
+                <a:gd name="connsiteY7" fmla="*/ 85758 h 171515"/>
+                <a:gd name="connsiteX8" fmla="*/ 11641 w 171515"/>
+                <a:gd name="connsiteY8" fmla="*/ 97399 h 171515"/>
+                <a:gd name="connsiteX9" fmla="*/ 74116 w 171515"/>
+                <a:gd name="connsiteY9" fmla="*/ 97399 h 171515"/>
+                <a:gd name="connsiteX10" fmla="*/ 74116 w 171515"/>
+                <a:gd name="connsiteY10" fmla="*/ 159874 h 171515"/>
+                <a:gd name="connsiteX11" fmla="*/ 85758 w 171515"/>
+                <a:gd name="connsiteY11" fmla="*/ 171515 h 171515"/>
+                <a:gd name="connsiteX12" fmla="*/ 97399 w 171515"/>
+                <a:gd name="connsiteY12" fmla="*/ 159874 h 171515"/>
+                <a:gd name="connsiteX13" fmla="*/ 97399 w 171515"/>
+                <a:gd name="connsiteY13" fmla="*/ 97399 h 171515"/>
+                <a:gd name="connsiteX14" fmla="*/ 159874 w 171515"/>
+                <a:gd name="connsiteY14" fmla="*/ 97399 h 171515"/>
+                <a:gd name="connsiteX15" fmla="*/ 171515 w 171515"/>
+                <a:gd name="connsiteY15" fmla="*/ 85758 h 171515"/>
+                <a:gd name="connsiteX16" fmla="*/ 159874 w 171515"/>
+                <a:gd name="connsiteY16" fmla="*/ 74116 h 171515"/>
+              </a:gdLst>
+              <a:ahLst/>
+              <a:cxnLst>
+                <a:cxn ang="0">
+                  <a:pos x="connsiteX0" y="connsiteY0"/>
+                </a:cxn>
+                <a:cxn ang="0">
+                  <a:pos x="connsiteX1" y="connsiteY1"/>
+                </a:cxn>
+                <a:cxn ang="0">
+                  <a:pos x="connsiteX2" y="connsiteY2"/>
+                </a:cxn>
+                <a:cxn ang="0">
+                  <a:pos x="connsiteX3" y="connsiteY3"/>
+                </a:cxn>
+                <a:cxn ang="0">
+                  <a:pos x="connsiteX4" y="connsiteY4"/>
+                </a:cxn>
+                <a:cxn ang="0">
+                  <a:pos x="connsiteX5" y="connsiteY5"/>
+                </a:cxn>
+                <a:cxn ang="0">
+                  <a:pos x="connsiteX6" y="connsiteY6"/>
+                </a:cxn>
+                <a:cxn ang="0">
+                  <a:pos x="connsiteX7" y="connsiteY7"/>
+                </a:cxn>
+                <a:cxn ang="0">
+                  <a:pos x="connsiteX8" y="connsiteY8"/>
+                </a:cxn>
+                <a:cxn ang="0">
+                  <a:pos x="connsiteX9" y="connsiteY9"/>
+                </a:cxn>
+                <a:cxn ang="0">
+                  <a:pos x="connsiteX10" y="connsiteY10"/>
+                </a:cxn>
+                <a:cxn ang="0">
+                  <a:pos x="connsiteX11" y="connsiteY11"/>
+                </a:cxn>
+                <a:cxn ang="0">
+                  <a:pos x="connsiteX12" y="connsiteY12"/>
+                </a:cxn>
+                <a:cxn ang="0">
+                  <a:pos x="connsiteX13" y="connsiteY13"/>
+                </a:cxn>
+                <a:cxn ang="0">
+                  <a:pos x="connsiteX14" y="connsiteY14"/>
+                </a:cxn>
+                <a:cxn ang="0">
+                  <a:pos x="connsiteX15" y="connsiteY15"/>
+                </a:cxn>
+                <a:cxn ang="0">
+                  <a:pos x="connsiteX16" y="connsiteY16"/>
+                </a:cxn>
+              </a:cxnLst>
+              <a:rect l="l" t="t" r="r" b="b"/>
+              <a:pathLst>
+                <a:path w="171515" h="171515">
+                  <a:moveTo>
+                    <a:pt x="159874" y="74116"/>
+                  </a:moveTo>
+                  <a:lnTo>
+                    <a:pt x="97399" y="74116"/>
+                  </a:lnTo>
+                  <a:lnTo>
+                    <a:pt x="97399" y="11641"/>
+                  </a:lnTo>
+                  <a:cubicBezTo>
+                    <a:pt x="97399" y="5212"/>
+                    <a:pt x="92187" y="0"/>
+                    <a:pt x="85758" y="0"/>
+                  </a:cubicBezTo>
+                  <a:cubicBezTo>
+                    <a:pt x="79328" y="0"/>
+                    <a:pt x="74116" y="5212"/>
+                    <a:pt x="74116" y="11641"/>
+                  </a:cubicBezTo>
+                  <a:lnTo>
+                    <a:pt x="74116" y="74116"/>
+                  </a:lnTo>
+                  <a:lnTo>
+                    <a:pt x="11641" y="74116"/>
+                  </a:lnTo>
+                  <a:cubicBezTo>
+                    <a:pt x="5212" y="74116"/>
+                    <a:pt x="0" y="79328"/>
+                    <a:pt x="0" y="85758"/>
+                  </a:cubicBezTo>
+                  <a:cubicBezTo>
+                    <a:pt x="0" y="92187"/>
+                    <a:pt x="5212" y="97399"/>
+                    <a:pt x="11641" y="97399"/>
+                  </a:cubicBezTo>
+                  <a:lnTo>
+                    <a:pt x="74116" y="97399"/>
+                  </a:lnTo>
+                  <a:lnTo>
+                    <a:pt x="74116" y="159874"/>
+                  </a:lnTo>
+                  <a:cubicBezTo>
+                    <a:pt x="74116" y="166303"/>
+                    <a:pt x="79328" y="171515"/>
+                    <a:pt x="85758" y="171515"/>
+                  </a:cubicBezTo>
+                  <a:cubicBezTo>
+                    <a:pt x="92187" y="171515"/>
+                    <a:pt x="97399" y="166303"/>
+                    <a:pt x="97399" y="159874"/>
+                  </a:cubicBezTo>
+                  <a:lnTo>
+                    <a:pt x="97399" y="97399"/>
+                  </a:lnTo>
+                  <a:lnTo>
+                    <a:pt x="159874" y="97399"/>
+                  </a:lnTo>
+                  <a:cubicBezTo>
+                    <a:pt x="166303" y="97399"/>
+                    <a:pt x="171515" y="92187"/>
+                    <a:pt x="171515" y="85758"/>
+                  </a:cubicBezTo>
+                  <a:cubicBezTo>
+                    <a:pt x="171515" y="79328"/>
+                    <a:pt x="166303" y="74116"/>
+                    <a:pt x="159874" y="74116"/>
+                  </a:cubicBezTo>
+                  <a:close/>
+                </a:path>
+              </a:pathLst>
+            </a:custGeom>
+            <a:grpFill/>
+            <a:ln w="776" cap="flat">
+              <a:noFill/>
+              <a:prstDash val="solid"/>
+              <a:miter/>
+            </a:ln>
+          </p:spPr>
+          <p:txBody>
+            <a:bodyPr rtlCol="0" anchor="ctr"/>
+            <a:lstStyle/>
+            <a:p>
+              <a:endParaRPr lang="en-US"/>
+            </a:p>
+          </p:txBody>
+        </p:sp>
+        <p:sp>
+          <p:nvSpPr>
+            <p:cNvPr id="14" name="Graphic 10">
+              <a:extLst>
+                <a:ext uri="{FF2B5EF4-FFF2-40B4-BE49-F238E27FC236}">
+                  <a16:creationId xmlns:a16="http://schemas.microsoft.com/office/drawing/2014/main" id="{E3020543-B24B-4EC4-8FFC-8DD88EEA91A8}"/>
+                </a:ext>
+                <a:ext uri="{C183D7F6-B498-43B3-948B-1728B52AA6E4}">
+                  <adec:decorative xmlns:adec="http://schemas.microsoft.com/office/drawing/2017/decorative" val="1"/>
+                </a:ext>
+              </a:extLst>
+            </p:cNvPr>
+            <p:cNvSpPr/>
+            <p:nvPr>
+              <p:extLst>
+                <p:ext uri="{386F3935-93C4-4BCD-93E2-E3B085C9AB24}">
+                  <p16:designElem xmlns:p16="http://schemas.microsoft.com/office/powerpoint/2015/main" val="1"/>
+                </p:ext>
+              </p:extLst>
+            </p:nvPr>
+          </p:nvSpPr>
+          <p:spPr>
+            <a:xfrm>
+              <a:off x="1075643" y="837005"/>
+              <a:ext cx="112426" cy="112426"/>
+            </a:xfrm>
+            <a:custGeom>
+              <a:avLst/>
+              <a:gdLst>
+                <a:gd name="connsiteX0" fmla="*/ 112426 w 112426"/>
+                <a:gd name="connsiteY0" fmla="*/ 56213 h 112426"/>
+                <a:gd name="connsiteX1" fmla="*/ 56213 w 112426"/>
+                <a:gd name="connsiteY1" fmla="*/ 112426 h 112426"/>
+                <a:gd name="connsiteX2" fmla="*/ 0 w 112426"/>
+                <a:gd name="connsiteY2" fmla="*/ 56213 h 112426"/>
+                <a:gd name="connsiteX3" fmla="*/ 56213 w 112426"/>
+                <a:gd name="connsiteY3" fmla="*/ 0 h 112426"/>
+                <a:gd name="connsiteX4" fmla="*/ 112426 w 112426"/>
+                <a:gd name="connsiteY4" fmla="*/ 56213 h 112426"/>
+              </a:gdLst>
+              <a:ahLst/>
+              <a:cxnLst>
+                <a:cxn ang="0">
+                  <a:pos x="connsiteX0" y="connsiteY0"/>
+                </a:cxn>
+                <a:cxn ang="0">
+                  <a:pos x="connsiteX1" y="connsiteY1"/>
+                </a:cxn>
+                <a:cxn ang="0">
+                  <a:pos x="connsiteX2" y="connsiteY2"/>
+                </a:cxn>
+                <a:cxn ang="0">
+                  <a:pos x="connsiteX3" y="connsiteY3"/>
+                </a:cxn>
+                <a:cxn ang="0">
+                  <a:pos x="connsiteX4" y="connsiteY4"/>
+                </a:cxn>
+              </a:cxnLst>
+              <a:rect l="l" t="t" r="r" b="b"/>
+              <a:pathLst>
+                <a:path w="112426" h="112426">
+                  <a:moveTo>
+                    <a:pt x="112426" y="56213"/>
+                  </a:moveTo>
+                  <a:cubicBezTo>
+                    <a:pt x="112426" y="87259"/>
+                    <a:pt x="87259" y="112426"/>
+                    <a:pt x="56213" y="112426"/>
+                  </a:cubicBezTo>
+                  <a:cubicBezTo>
+                    <a:pt x="25167" y="112426"/>
+                    <a:pt x="0" y="87259"/>
+                    <a:pt x="0" y="56213"/>
+                  </a:cubicBezTo>
+                  <a:cubicBezTo>
+                    <a:pt x="0" y="25167"/>
+                    <a:pt x="25167" y="0"/>
+                    <a:pt x="56213" y="0"/>
+                  </a:cubicBezTo>
+                  <a:cubicBezTo>
+                    <a:pt x="87259" y="0"/>
+                    <a:pt x="112426" y="25167"/>
+                    <a:pt x="112426" y="56213"/>
+                  </a:cubicBezTo>
+                  <a:close/>
+                </a:path>
+              </a:pathLst>
+            </a:custGeom>
+            <a:grpFill/>
+            <a:ln w="516" cap="flat">
+              <a:noFill/>
+              <a:prstDash val="solid"/>
+              <a:miter/>
+            </a:ln>
+          </p:spPr>
+          <p:txBody>
+            <a:bodyPr rtlCol="0" anchor="ctr"/>
+            <a:lstStyle/>
+            <a:p>
+              <a:endParaRPr lang="en-US"/>
+            </a:p>
+          </p:txBody>
+        </p:sp>
+        <p:sp>
+          <p:nvSpPr>
+            <p:cNvPr id="15" name="Graphic 12">
+              <a:extLst>
+                <a:ext uri="{FF2B5EF4-FFF2-40B4-BE49-F238E27FC236}">
+                  <a16:creationId xmlns:a16="http://schemas.microsoft.com/office/drawing/2014/main" id="{1453BF6C-B012-48B7-B4E8-6D7AC7C27D02}"/>
+                </a:ext>
+                <a:ext uri="{C183D7F6-B498-43B3-948B-1728B52AA6E4}">
+                  <adec:decorative xmlns:adec="http://schemas.microsoft.com/office/drawing/2017/decorative" val="1"/>
+                </a:ext>
+              </a:extLst>
+            </p:cNvPr>
+            <p:cNvSpPr/>
+            <p:nvPr>
+              <p:extLst>
+                <p:ext uri="{386F3935-93C4-4BCD-93E2-E3B085C9AB24}">
+                  <p16:designElem xmlns:p16="http://schemas.microsoft.com/office/powerpoint/2015/main" val="1"/>
+                </p:ext>
+              </p:extLst>
+            </p:nvPr>
+          </p:nvSpPr>
+          <p:spPr>
+            <a:xfrm>
+              <a:off x="613892" y="1472473"/>
+              <a:ext cx="157545" cy="157545"/>
+            </a:xfrm>
+            <a:custGeom>
+              <a:avLst/>
+              <a:gdLst>
+                <a:gd name="connsiteX0" fmla="*/ 78773 w 157545"/>
+                <a:gd name="connsiteY0" fmla="*/ 23283 h 157545"/>
+                <a:gd name="connsiteX1" fmla="*/ 134262 w 157545"/>
+                <a:gd name="connsiteY1" fmla="*/ 78773 h 157545"/>
+                <a:gd name="connsiteX2" fmla="*/ 78773 w 157545"/>
+                <a:gd name="connsiteY2" fmla="*/ 134262 h 157545"/>
+                <a:gd name="connsiteX3" fmla="*/ 23283 w 157545"/>
+                <a:gd name="connsiteY3" fmla="*/ 78773 h 157545"/>
+                <a:gd name="connsiteX4" fmla="*/ 78773 w 157545"/>
+                <a:gd name="connsiteY4" fmla="*/ 23283 h 157545"/>
+                <a:gd name="connsiteX5" fmla="*/ 78773 w 157545"/>
+                <a:gd name="connsiteY5" fmla="*/ 0 h 157545"/>
+                <a:gd name="connsiteX6" fmla="*/ 0 w 157545"/>
+                <a:gd name="connsiteY6" fmla="*/ 78773 h 157545"/>
+                <a:gd name="connsiteX7" fmla="*/ 78773 w 157545"/>
+                <a:gd name="connsiteY7" fmla="*/ 157545 h 157545"/>
+                <a:gd name="connsiteX8" fmla="*/ 157545 w 157545"/>
+                <a:gd name="connsiteY8" fmla="*/ 78773 h 157545"/>
+                <a:gd name="connsiteX9" fmla="*/ 78773 w 157545"/>
+                <a:gd name="connsiteY9" fmla="*/ 0 h 157545"/>
+              </a:gdLst>
+              <a:ahLst/>
+              <a:cxnLst>
+                <a:cxn ang="0">
+                  <a:pos x="connsiteX0" y="connsiteY0"/>
+                </a:cxn>
+                <a:cxn ang="0">
+                  <a:pos x="connsiteX1" y="connsiteY1"/>
+                </a:cxn>
+                <a:cxn ang="0">
+                  <a:pos x="connsiteX2" y="connsiteY2"/>
+                </a:cxn>
+                <a:cxn ang="0">
+                  <a:pos x="connsiteX3" y="connsiteY3"/>
+                </a:cxn>
+                <a:cxn ang="0">
+                  <a:pos x="connsiteX4" y="connsiteY4"/>
+                </a:cxn>
+                <a:cxn ang="0">
+                  <a:pos x="connsiteX5" y="connsiteY5"/>
+                </a:cxn>
+                <a:cxn ang="0">
+                  <a:pos x="connsiteX6" y="connsiteY6"/>
+                </a:cxn>
+                <a:cxn ang="0">
+                  <a:pos x="connsiteX7" y="connsiteY7"/>
+                </a:cxn>
+                <a:cxn ang="0">
+                  <a:pos x="connsiteX8" y="connsiteY8"/>
+                </a:cxn>
+                <a:cxn ang="0">
+                  <a:pos x="connsiteX9" y="connsiteY9"/>
+                </a:cxn>
+              </a:cxnLst>
+              <a:rect l="l" t="t" r="r" b="b"/>
+              <a:pathLst>
+                <a:path w="157545" h="157545">
+                  <a:moveTo>
+                    <a:pt x="78773" y="23283"/>
+                  </a:moveTo>
+                  <a:cubicBezTo>
+                    <a:pt x="109419" y="23283"/>
+                    <a:pt x="134262" y="48126"/>
+                    <a:pt x="134262" y="78773"/>
+                  </a:cubicBezTo>
+                  <a:cubicBezTo>
+                    <a:pt x="134262" y="109419"/>
+                    <a:pt x="109419" y="134262"/>
+                    <a:pt x="78773" y="134262"/>
+                  </a:cubicBezTo>
+                  <a:cubicBezTo>
+                    <a:pt x="48126" y="134262"/>
+                    <a:pt x="23283" y="109419"/>
+                    <a:pt x="23283" y="78773"/>
+                  </a:cubicBezTo>
+                  <a:cubicBezTo>
+                    <a:pt x="23312" y="48139"/>
+                    <a:pt x="48139" y="23312"/>
+                    <a:pt x="78773" y="23283"/>
+                  </a:cubicBezTo>
+                  <a:moveTo>
+                    <a:pt x="78773" y="0"/>
+                  </a:moveTo>
+                  <a:cubicBezTo>
+                    <a:pt x="35268" y="0"/>
+                    <a:pt x="0" y="35268"/>
+                    <a:pt x="0" y="78773"/>
+                  </a:cubicBezTo>
+                  <a:cubicBezTo>
+                    <a:pt x="0" y="122277"/>
+                    <a:pt x="35268" y="157545"/>
+                    <a:pt x="78773" y="157545"/>
+                  </a:cubicBezTo>
+                  <a:cubicBezTo>
+                    <a:pt x="122277" y="157545"/>
+                    <a:pt x="157545" y="122277"/>
+                    <a:pt x="157545" y="78773"/>
+                  </a:cubicBezTo>
+                  <a:cubicBezTo>
+                    <a:pt x="157545" y="35268"/>
+                    <a:pt x="122277" y="0"/>
+                    <a:pt x="78773" y="0"/>
+                  </a:cubicBezTo>
+                  <a:close/>
+                </a:path>
+              </a:pathLst>
+            </a:custGeom>
+            <a:grpFill/>
+            <a:ln w="751" cap="flat">
+              <a:noFill/>
+              <a:prstDash val="solid"/>
+              <a:miter/>
+            </a:ln>
+          </p:spPr>
+          <p:txBody>
+            <a:bodyPr rtlCol="0" anchor="ctr"/>
+            <a:lstStyle/>
+            <a:p>
+              <a:endParaRPr lang="en-US"/>
+            </a:p>
+          </p:txBody>
+        </p:sp>
+      </p:grpSp>
       <p:sp>
         <p:nvSpPr>
           <p:cNvPr id="3" name="Content Placeholder 2">
@@ -3697,49 +8483,79 @@
             <p:ph idx="1"/>
           </p:nvPr>
         </p:nvSpPr>
-        <p:spPr/>
+        <p:spPr>
+          <a:xfrm>
+            <a:off x="6297233" y="518400"/>
+            <a:ext cx="4771607" cy="5837949"/>
+          </a:xfrm>
+        </p:spPr>
         <p:txBody>
-          <a:bodyPr>
-            <a:normAutofit lnSpcReduction="10000"/>
+          <a:bodyPr anchor="ctr">
+            <a:normAutofit/>
           </a:bodyPr>
           <a:lstStyle/>
           <a:p>
             <a:r>
-              <a:rPr lang="en-US" dirty="0"/>
+              <a:rPr lang="en-US" sz="2000">
+                <a:solidFill>
+                  <a:schemeClr val="tx1">
+                    <a:alpha val="80000"/>
+                  </a:schemeClr>
+                </a:solidFill>
+              </a:rPr>
               <a:t>Dataset Origin &amp; Scope</a:t>
             </a:r>
           </a:p>
           <a:p>
             <a:pPr lvl="1"/>
             <a:r>
-              <a:rPr lang="en-US" dirty="0"/>
+              <a:rPr lang="en-US" sz="2000">
+                <a:solidFill>
+                  <a:schemeClr val="tx1">
+                    <a:alpha val="80000"/>
+                  </a:schemeClr>
+                </a:solidFill>
+              </a:rPr>
               <a:t>Source: Kaggle 2026 March Madness Competition</a:t>
             </a:r>
           </a:p>
           <a:p>
             <a:pPr lvl="1"/>
             <a:r>
-              <a:rPr lang="en-US" dirty="0"/>
+              <a:rPr lang="en-US" sz="2000">
+                <a:solidFill>
+                  <a:schemeClr val="tx1">
+                    <a:alpha val="80000"/>
+                  </a:schemeClr>
+                </a:solidFill>
+              </a:rPr>
               <a:t>Timeline: 1984-1985</a:t>
             </a:r>
           </a:p>
           <a:p>
             <a:pPr lvl="1"/>
-            <a:endParaRPr lang="en-US" dirty="0"/>
+            <a:endParaRPr lang="en-US" sz="2000">
+              <a:solidFill>
+                <a:schemeClr val="tx1">
+                  <a:alpha val="80000"/>
+                </a:schemeClr>
+              </a:solidFill>
+            </a:endParaRPr>
           </a:p>
           <a:p>
             <a:pPr marL="457200" lvl="1" indent="0">
               <a:buNone/>
             </a:pPr>
             <a:r>
-              <a:rPr lang="en-US" dirty="0"/>
-              <a:t>Target Variable: </a:t>
+              <a:rPr lang="en-US" sz="2000">
+                <a:solidFill>
+                  <a:schemeClr val="tx1">
+                    <a:alpha val="80000"/>
+                  </a:schemeClr>
+                </a:solidFill>
+              </a:rPr>
+              <a:t>Target Variable: CinderellaFlag</a:t>
             </a:r>
-            <a:r>
-              <a:rPr lang="en-US" dirty="0" err="1"/>
-              <a:t>CinderellaFlag</a:t>
-            </a:r>
-            <a:endParaRPr lang="en-US" dirty="0"/>
           </a:p>
           <a:p>
             <a:pPr lvl="1">
@@ -3747,7 +8563,13 @@
               <a:buChar char="-"/>
             </a:pPr>
             <a:r>
-              <a:rPr lang="en-US" dirty="0"/>
+              <a:rPr lang="en-US" sz="2000">
+                <a:solidFill>
+                  <a:schemeClr val="tx1">
+                    <a:alpha val="80000"/>
+                  </a:schemeClr>
+                </a:solidFill>
+              </a:rPr>
               <a:t>Teams with seed &gt;= 10 and tournament wins &gt;= 2.</a:t>
             </a:r>
           </a:p>
@@ -3756,7 +8578,13 @@
               <a:buFontTx/>
               <a:buChar char="-"/>
             </a:pPr>
-            <a:endParaRPr lang="en-US" dirty="0"/>
+            <a:endParaRPr lang="en-US" sz="2000">
+              <a:solidFill>
+                <a:schemeClr val="tx1">
+                  <a:alpha val="80000"/>
+                </a:schemeClr>
+              </a:solidFill>
+            </a:endParaRPr>
           </a:p>
           <a:p>
             <a:pPr lvl="1">
@@ -3764,7 +8592,13 @@
               <a:buChar char="-"/>
             </a:pPr>
             <a:r>
-              <a:rPr lang="en-US" dirty="0"/>
+              <a:rPr lang="en-US" sz="2000">
+                <a:solidFill>
+                  <a:schemeClr val="tx1">
+                    <a:alpha val="80000"/>
+                  </a:schemeClr>
+                </a:solidFill>
+              </a:rPr>
               <a:t>Key Features:</a:t>
             </a:r>
           </a:p>
@@ -3774,22 +8608,15 @@
               <a:buChar char="-"/>
             </a:pPr>
             <a:r>
-              <a:rPr lang="en-US" dirty="0"/>
-              <a:t>- Ranking Metrics: </a:t>
+              <a:rPr lang="en-US" sz="2000">
+                <a:solidFill>
+                  <a:schemeClr val="tx1">
+                    <a:alpha val="80000"/>
+                  </a:schemeClr>
+                </a:solidFill>
+              </a:rPr>
+              <a:t>- Ranking Metrics: SeedNum, MasseyRankMean</a:t>
             </a:r>
-            <a:r>
-              <a:rPr lang="en-US" dirty="0" err="1"/>
-              <a:t>SeedNum</a:t>
-            </a:r>
-            <a:r>
-              <a:rPr lang="en-US" dirty="0"/>
-              <a:t>, </a:t>
-            </a:r>
-            <a:r>
-              <a:rPr lang="en-US" dirty="0" err="1"/>
-              <a:t>MasseyRankMean</a:t>
-            </a:r>
-            <a:endParaRPr lang="en-US" dirty="0"/>
           </a:p>
           <a:p>
             <a:pPr lvl="1">
@@ -3797,14 +8624,15 @@
               <a:buChar char="-"/>
             </a:pPr>
             <a:r>
-              <a:rPr lang="en-US" dirty="0"/>
-              <a:t>Performance: </a:t>
+              <a:rPr lang="en-US" sz="2000">
+                <a:solidFill>
+                  <a:schemeClr val="tx1">
+                    <a:alpha val="80000"/>
+                  </a:schemeClr>
+                </a:solidFill>
+              </a:rPr>
+              <a:t>Performance: WinPct</a:t>
             </a:r>
-            <a:r>
-              <a:rPr lang="en-US" dirty="0" err="1"/>
-              <a:t>WinPct</a:t>
-            </a:r>
-            <a:endParaRPr lang="en-US" dirty="0"/>
           </a:p>
           <a:p>
             <a:pPr lvl="1">
@@ -3812,33 +8640,80 @@
               <a:buChar char="-"/>
             </a:pPr>
             <a:r>
-              <a:rPr lang="en-US" dirty="0"/>
-              <a:t>Efficiency: </a:t>
+              <a:rPr lang="en-US" sz="2000">
+                <a:solidFill>
+                  <a:schemeClr val="tx1">
+                    <a:alpha val="80000"/>
+                  </a:schemeClr>
+                </a:solidFill>
+              </a:rPr>
+              <a:t>Efficiency: AvgScoreDiff, AvgPointsFor, AvgPointsAgainst</a:t>
             </a:r>
-            <a:r>
-              <a:rPr lang="en-US" dirty="0" err="1"/>
-              <a:t>AvgScoreDiff</a:t>
-            </a:r>
-            <a:r>
-              <a:rPr lang="en-US" dirty="0"/>
-              <a:t>, </a:t>
-            </a:r>
-            <a:r>
-              <a:rPr lang="en-US" dirty="0" err="1"/>
-              <a:t>AvgPointsFor</a:t>
-            </a:r>
-            <a:r>
-              <a:rPr lang="en-US" dirty="0"/>
-              <a:t>, </a:t>
-            </a:r>
-            <a:r>
-              <a:rPr lang="en-US" dirty="0" err="1"/>
-              <a:t>AvgPointsAgainst</a:t>
-            </a:r>
-            <a:endParaRPr lang="en-US" dirty="0"/>
           </a:p>
         </p:txBody>
       </p:sp>
+      <p:cxnSp>
+        <p:nvCxnSpPr>
+          <p:cNvPr id="17" name="Straight Connector 16">
+            <a:extLst>
+              <a:ext uri="{FF2B5EF4-FFF2-40B4-BE49-F238E27FC236}">
+                <a16:creationId xmlns:a16="http://schemas.microsoft.com/office/drawing/2014/main" id="{C49DA8F6-BCC1-4447-B54C-57856834B94B}"/>
+              </a:ext>
+              <a:ext uri="{C183D7F6-B498-43B3-948B-1728B52AA6E4}">
+                <adec:decorative xmlns:adec="http://schemas.microsoft.com/office/drawing/2017/decorative" val="1"/>
+              </a:ext>
+            </a:extLst>
+          </p:cNvPr>
+          <p:cNvCxnSpPr>
+            <a:cxnSpLocks noGrp="1" noRot="1" noChangeAspect="1" noMove="1" noResize="1" noEditPoints="1" noAdjustHandles="1" noChangeArrowheads="1" noChangeShapeType="1"/>
+          </p:cNvCxnSpPr>
+          <p:nvPr>
+            <p:extLst>
+              <p:ext uri="{386F3935-93C4-4BCD-93E2-E3B085C9AB24}">
+                <p16:designElem xmlns:p16="http://schemas.microsoft.com/office/powerpoint/2015/main" val="1"/>
+              </p:ext>
+            </p:extLst>
+          </p:nvPr>
+        </p:nvCxnSpPr>
+        <p:spPr>
+          <a:xfrm>
+            <a:off x="11586162" y="3610394"/>
+            <a:ext cx="0" cy="3238728"/>
+          </a:xfrm>
+          <a:prstGeom prst="line">
+            <a:avLst/>
+          </a:prstGeom>
+          <a:ln w="25400" cap="sq">
+            <a:gradFill flip="none" rotWithShape="1">
+              <a:gsLst>
+                <a:gs pos="0">
+                  <a:schemeClr val="accent1"/>
+                </a:gs>
+                <a:gs pos="100000">
+                  <a:schemeClr val="accent2"/>
+                </a:gs>
+              </a:gsLst>
+              <a:lin ang="5400000" scaled="0"/>
+              <a:tileRect/>
+            </a:gradFill>
+            <a:bevel/>
+          </a:ln>
+        </p:spPr>
+        <p:style>
+          <a:lnRef idx="1">
+            <a:schemeClr val="accent1"/>
+          </a:lnRef>
+          <a:fillRef idx="0">
+            <a:schemeClr val="accent1"/>
+          </a:fillRef>
+          <a:effectRef idx="0">
+            <a:schemeClr val="accent1"/>
+          </a:effectRef>
+          <a:fontRef idx="minor">
+            <a:schemeClr val="tx1"/>
+          </a:fontRef>
+        </p:style>
+      </p:cxnSp>
     </p:spTree>
     <p:extLst>
       <p:ext uri="{BB962C8B-B14F-4D97-AF65-F5344CB8AC3E}">
@@ -3855,6 +8730,14 @@
 <file path=ppt/slides/slide4.xml><?xml version="1.0" encoding="utf-8"?>
 <p:sld xmlns:a="http://schemas.openxmlformats.org/drawingml/2006/main" xmlns:r="http://schemas.openxmlformats.org/officeDocument/2006/relationships" xmlns:p="http://schemas.openxmlformats.org/presentationml/2006/main">
   <p:cSld>
+    <p:bg>
+      <p:bgPr>
+        <a:solidFill>
+          <a:schemeClr val="bg1"/>
+        </a:solidFill>
+        <a:effectLst/>
+      </p:bgPr>
+    </p:bg>
     <p:spTree>
       <p:nvGrpSpPr>
         <p:cNvPr id="1" name=""/>
@@ -3869,6 +8752,200 @@
           <a:chExt cx="0" cy="0"/>
         </a:xfrm>
       </p:grpSpPr>
+      <p:sp useBgFill="1">
+        <p:nvSpPr>
+          <p:cNvPr id="8" name="Rectangle 7">
+            <a:extLst>
+              <a:ext uri="{FF2B5EF4-FFF2-40B4-BE49-F238E27FC236}">
+                <a16:creationId xmlns:a16="http://schemas.microsoft.com/office/drawing/2014/main" id="{907EF6B7-1338-4443-8C46-6A318D952DFD}"/>
+              </a:ext>
+              <a:ext uri="{C183D7F6-B498-43B3-948B-1728B52AA6E4}">
+                <adec:decorative xmlns:adec="http://schemas.microsoft.com/office/drawing/2017/decorative" val="1"/>
+              </a:ext>
+            </a:extLst>
+          </p:cNvPr>
+          <p:cNvSpPr>
+            <a:spLocks noGrp="1" noRot="1" noChangeAspect="1" noMove="1" noResize="1" noEditPoints="1" noAdjustHandles="1" noChangeArrowheads="1" noChangeShapeType="1" noTextEdit="1"/>
+          </p:cNvSpPr>
+          <p:nvPr>
+            <p:extLst>
+              <p:ext uri="{386F3935-93C4-4BCD-93E2-E3B085C9AB24}">
+                <p16:designElem xmlns:p16="http://schemas.microsoft.com/office/powerpoint/2015/main" val="1"/>
+              </p:ext>
+            </p:extLst>
+          </p:nvPr>
+        </p:nvSpPr>
+        <p:spPr>
+          <a:xfrm>
+            <a:off x="3048" y="0"/>
+            <a:ext cx="12188952" cy="6858000"/>
+          </a:xfrm>
+          <a:prstGeom prst="rect">
+            <a:avLst/>
+          </a:prstGeom>
+          <a:ln>
+            <a:noFill/>
+          </a:ln>
+        </p:spPr>
+        <p:style>
+          <a:lnRef idx="2">
+            <a:schemeClr val="accent1">
+              <a:shade val="50000"/>
+            </a:schemeClr>
+          </a:lnRef>
+          <a:fillRef idx="1">
+            <a:schemeClr val="accent1"/>
+          </a:fillRef>
+          <a:effectRef idx="0">
+            <a:schemeClr val="accent1"/>
+          </a:effectRef>
+          <a:fontRef idx="minor">
+            <a:schemeClr val="lt1"/>
+          </a:fontRef>
+        </p:style>
+        <p:txBody>
+          <a:bodyPr rtlCol="0" anchor="ctr"/>
+          <a:lstStyle/>
+          <a:p>
+            <a:pPr algn="ctr"/>
+            <a:endParaRPr lang="en-US"/>
+          </a:p>
+        </p:txBody>
+      </p:sp>
+      <p:sp>
+        <p:nvSpPr>
+          <p:cNvPr id="10" name="Freeform: Shape 9">
+            <a:extLst>
+              <a:ext uri="{FF2B5EF4-FFF2-40B4-BE49-F238E27FC236}">
+                <a16:creationId xmlns:a16="http://schemas.microsoft.com/office/drawing/2014/main" id="{DAAE4CDD-124C-4DCF-9584-B6033B545DD5}"/>
+              </a:ext>
+              <a:ext uri="{C183D7F6-B498-43B3-948B-1728B52AA6E4}">
+                <adec:decorative xmlns:adec="http://schemas.microsoft.com/office/drawing/2017/decorative" val="1"/>
+              </a:ext>
+            </a:extLst>
+          </p:cNvPr>
+          <p:cNvSpPr>
+            <a:spLocks noGrp="1" noRot="1" noChangeAspect="1" noMove="1" noResize="1" noEditPoints="1" noAdjustHandles="1" noChangeArrowheads="1" noChangeShapeType="1" noTextEdit="1"/>
+          </p:cNvSpPr>
+          <p:nvPr>
+            <p:extLst>
+              <p:ext uri="{386F3935-93C4-4BCD-93E2-E3B085C9AB24}">
+                <p16:designElem xmlns:p16="http://schemas.microsoft.com/office/powerpoint/2015/main" val="1"/>
+              </p:ext>
+            </p:extLst>
+          </p:nvPr>
+        </p:nvSpPr>
+        <p:spPr>
+          <a:xfrm>
+            <a:off x="1" y="0"/>
+            <a:ext cx="4167271" cy="6858000"/>
+          </a:xfrm>
+          <a:custGeom>
+            <a:avLst/>
+            <a:gdLst>
+              <a:gd name="connsiteX0" fmla="*/ 0 w 4167271"/>
+              <a:gd name="connsiteY0" fmla="*/ 0 h 6858000"/>
+              <a:gd name="connsiteX1" fmla="*/ 2259550 w 4167271"/>
+              <a:gd name="connsiteY1" fmla="*/ 0 h 6858000"/>
+              <a:gd name="connsiteX2" fmla="*/ 2387803 w 4167271"/>
+              <a:gd name="connsiteY2" fmla="*/ 82222 h 6858000"/>
+              <a:gd name="connsiteX3" fmla="*/ 4167271 w 4167271"/>
+              <a:gd name="connsiteY3" fmla="*/ 3429000 h 6858000"/>
+              <a:gd name="connsiteX4" fmla="*/ 2387803 w 4167271"/>
+              <a:gd name="connsiteY4" fmla="*/ 6775779 h 6858000"/>
+              <a:gd name="connsiteX5" fmla="*/ 2259550 w 4167271"/>
+              <a:gd name="connsiteY5" fmla="*/ 6858000 h 6858000"/>
+              <a:gd name="connsiteX6" fmla="*/ 0 w 4167271"/>
+              <a:gd name="connsiteY6" fmla="*/ 6858000 h 6858000"/>
+            </a:gdLst>
+            <a:ahLst/>
+            <a:cxnLst>
+              <a:cxn ang="0">
+                <a:pos x="connsiteX0" y="connsiteY0"/>
+              </a:cxn>
+              <a:cxn ang="0">
+                <a:pos x="connsiteX1" y="connsiteY1"/>
+              </a:cxn>
+              <a:cxn ang="0">
+                <a:pos x="connsiteX2" y="connsiteY2"/>
+              </a:cxn>
+              <a:cxn ang="0">
+                <a:pos x="connsiteX3" y="connsiteY3"/>
+              </a:cxn>
+              <a:cxn ang="0">
+                <a:pos x="connsiteX4" y="connsiteY4"/>
+              </a:cxn>
+              <a:cxn ang="0">
+                <a:pos x="connsiteX5" y="connsiteY5"/>
+              </a:cxn>
+              <a:cxn ang="0">
+                <a:pos x="connsiteX6" y="connsiteY6"/>
+              </a:cxn>
+            </a:cxnLst>
+            <a:rect l="l" t="t" r="r" b="b"/>
+            <a:pathLst>
+              <a:path w="4167271" h="6858000">
+                <a:moveTo>
+                  <a:pt x="0" y="0"/>
+                </a:moveTo>
+                <a:lnTo>
+                  <a:pt x="2259550" y="0"/>
+                </a:lnTo>
+                <a:lnTo>
+                  <a:pt x="2387803" y="82222"/>
+                </a:lnTo>
+                <a:cubicBezTo>
+                  <a:pt x="3461407" y="807534"/>
+                  <a:pt x="4167271" y="2035835"/>
+                  <a:pt x="4167271" y="3429000"/>
+                </a:cubicBezTo>
+                <a:cubicBezTo>
+                  <a:pt x="4167271" y="4822165"/>
+                  <a:pt x="3461407" y="6050467"/>
+                  <a:pt x="2387803" y="6775779"/>
+                </a:cubicBezTo>
+                <a:lnTo>
+                  <a:pt x="2259550" y="6858000"/>
+                </a:lnTo>
+                <a:lnTo>
+                  <a:pt x="0" y="6858000"/>
+                </a:lnTo>
+                <a:close/>
+              </a:path>
+            </a:pathLst>
+          </a:custGeom>
+          <a:solidFill>
+            <a:schemeClr val="accent2"/>
+          </a:solidFill>
+          <a:ln>
+            <a:noFill/>
+          </a:ln>
+        </p:spPr>
+        <p:style>
+          <a:lnRef idx="2">
+            <a:schemeClr val="accent1">
+              <a:shade val="50000"/>
+            </a:schemeClr>
+          </a:lnRef>
+          <a:fillRef idx="1">
+            <a:schemeClr val="accent1"/>
+          </a:fillRef>
+          <a:effectRef idx="0">
+            <a:schemeClr val="accent1"/>
+          </a:effectRef>
+          <a:fontRef idx="minor">
+            <a:schemeClr val="lt1"/>
+          </a:fontRef>
+        </p:style>
+        <p:txBody>
+          <a:bodyPr rtlCol="0" anchor="ctr"/>
+          <a:lstStyle/>
+          <a:p>
+            <a:pPr algn="ctr"/>
+            <a:endParaRPr lang="en-US"/>
+          </a:p>
+        </p:txBody>
+      </p:sp>
       <p:sp>
         <p:nvSpPr>
           <p:cNvPr id="2" name="Title 1">
@@ -3885,15 +8962,87 @@
             <p:ph type="title"/>
           </p:nvPr>
         </p:nvSpPr>
-        <p:spPr/>
+        <p:spPr>
+          <a:xfrm>
+            <a:off x="686834" y="1153572"/>
+            <a:ext cx="3200400" cy="4461163"/>
+          </a:xfrm>
+        </p:spPr>
         <p:txBody>
-          <a:bodyPr/>
+          <a:bodyPr>
+            <a:normAutofit/>
+          </a:bodyPr>
           <a:lstStyle/>
           <a:p>
             <a:r>
-              <a:rPr lang="en-US" dirty="0"/>
+              <a:rPr lang="en-US">
+                <a:solidFill>
+                  <a:srgbClr val="FFFFFF"/>
+                </a:solidFill>
+              </a:rPr>
               <a:t>Methodology</a:t>
             </a:r>
+          </a:p>
+        </p:txBody>
+      </p:sp>
+      <p:sp>
+        <p:nvSpPr>
+          <p:cNvPr id="12" name="Arc 11">
+            <a:extLst>
+              <a:ext uri="{FF2B5EF4-FFF2-40B4-BE49-F238E27FC236}">
+                <a16:creationId xmlns:a16="http://schemas.microsoft.com/office/drawing/2014/main" id="{081E4A58-353D-44AE-B2FC-2A74E2E400F7}"/>
+              </a:ext>
+              <a:ext uri="{C183D7F6-B498-43B3-948B-1728B52AA6E4}">
+                <adec:decorative xmlns:adec="http://schemas.microsoft.com/office/drawing/2017/decorative" val="1"/>
+              </a:ext>
+            </a:extLst>
+          </p:cNvPr>
+          <p:cNvSpPr>
+            <a:spLocks noGrp="1" noRot="1" noChangeAspect="1" noMove="1" noResize="1" noEditPoints="1" noAdjustHandles="1" noChangeArrowheads="1" noChangeShapeType="1" noTextEdit="1"/>
+          </p:cNvSpPr>
+          <p:nvPr>
+            <p:extLst>
+              <p:ext uri="{386F3935-93C4-4BCD-93E2-E3B085C9AB24}">
+                <p16:designElem xmlns:p16="http://schemas.microsoft.com/office/powerpoint/2015/main" val="1"/>
+              </p:ext>
+            </p:extLst>
+          </p:nvPr>
+        </p:nvSpPr>
+        <p:spPr>
+          <a:xfrm flipV="1">
+            <a:off x="7550402" y="2455479"/>
+            <a:ext cx="4083433" cy="4083433"/>
+          </a:xfrm>
+          <a:prstGeom prst="arc">
+            <a:avLst/>
+          </a:prstGeom>
+          <a:ln w="127000" cap="rnd">
+            <a:solidFill>
+              <a:schemeClr val="accent4"/>
+            </a:solidFill>
+            <a:prstDash val="dash"/>
+          </a:ln>
+        </p:spPr>
+        <p:style>
+          <a:lnRef idx="1">
+            <a:schemeClr val="accent1"/>
+          </a:lnRef>
+          <a:fillRef idx="0">
+            <a:schemeClr val="accent1"/>
+          </a:fillRef>
+          <a:effectRef idx="0">
+            <a:schemeClr val="accent1"/>
+          </a:effectRef>
+          <a:fontRef idx="minor">
+            <a:schemeClr val="tx1"/>
+          </a:fontRef>
+        </p:style>
+        <p:txBody>
+          <a:bodyPr rtlCol="0" anchor="ctr"/>
+          <a:lstStyle/>
+          <a:p>
+            <a:pPr algn="ctr"/>
+            <a:endParaRPr lang="en-US" dirty="0"/>
           </a:p>
         </p:txBody>
       </p:sp>
@@ -3913,9 +9062,16 @@
             <p:ph idx="1"/>
           </p:nvPr>
         </p:nvSpPr>
-        <p:spPr/>
+        <p:spPr>
+          <a:xfrm>
+            <a:off x="4447308" y="591344"/>
+            <a:ext cx="6906491" cy="5585619"/>
+          </a:xfrm>
+        </p:spPr>
         <p:txBody>
-          <a:bodyPr/>
+          <a:bodyPr anchor="ctr">
+            <a:normAutofit/>
+          </a:bodyPr>
           <a:lstStyle/>
           <a:p>
             <a:r>
@@ -3974,6 +9130,14 @@
 <file path=ppt/slides/slide5.xml><?xml version="1.0" encoding="utf-8"?>
 <p:sld xmlns:a="http://schemas.openxmlformats.org/drawingml/2006/main" xmlns:r="http://schemas.openxmlformats.org/officeDocument/2006/relationships" xmlns:p="http://schemas.openxmlformats.org/presentationml/2006/main">
   <p:cSld>
+    <p:bg>
+      <p:bgPr>
+        <a:solidFill>
+          <a:schemeClr val="bg1"/>
+        </a:solidFill>
+        <a:effectLst/>
+      </p:bgPr>
+    </p:bg>
     <p:spTree>
       <p:nvGrpSpPr>
         <p:cNvPr id="1" name=""/>
@@ -3988,6 +9152,66 @@
           <a:chExt cx="0" cy="0"/>
         </a:xfrm>
       </p:grpSpPr>
+      <p:sp useBgFill="1">
+        <p:nvSpPr>
+          <p:cNvPr id="10" name="Rectangle 9">
+            <a:extLst>
+              <a:ext uri="{FF2B5EF4-FFF2-40B4-BE49-F238E27FC236}">
+                <a16:creationId xmlns:a16="http://schemas.microsoft.com/office/drawing/2014/main" id="{743AA782-23D1-4521-8CAD-47662984AA08}"/>
+              </a:ext>
+              <a:ext uri="{C183D7F6-B498-43B3-948B-1728B52AA6E4}">
+                <adec:decorative xmlns:adec="http://schemas.microsoft.com/office/drawing/2017/decorative" val="1"/>
+              </a:ext>
+            </a:extLst>
+          </p:cNvPr>
+          <p:cNvSpPr>
+            <a:spLocks noGrp="1" noRot="1" noChangeAspect="1" noMove="1" noResize="1" noEditPoints="1" noAdjustHandles="1" noChangeArrowheads="1" noChangeShapeType="1" noTextEdit="1"/>
+          </p:cNvSpPr>
+          <p:nvPr>
+            <p:extLst>
+              <p:ext uri="{386F3935-93C4-4BCD-93E2-E3B085C9AB24}">
+                <p16:designElem xmlns:p16="http://schemas.microsoft.com/office/powerpoint/2015/main" val="1"/>
+              </p:ext>
+            </p:extLst>
+          </p:nvPr>
+        </p:nvSpPr>
+        <p:spPr>
+          <a:xfrm>
+            <a:off x="0" y="0"/>
+            <a:ext cx="12192000" cy="6858000"/>
+          </a:xfrm>
+          <a:prstGeom prst="rect">
+            <a:avLst/>
+          </a:prstGeom>
+          <a:ln>
+            <a:noFill/>
+          </a:ln>
+        </p:spPr>
+        <p:style>
+          <a:lnRef idx="2">
+            <a:schemeClr val="accent1">
+              <a:shade val="50000"/>
+            </a:schemeClr>
+          </a:lnRef>
+          <a:fillRef idx="1">
+            <a:schemeClr val="accent1"/>
+          </a:fillRef>
+          <a:effectRef idx="0">
+            <a:schemeClr val="accent1"/>
+          </a:effectRef>
+          <a:fontRef idx="minor">
+            <a:schemeClr val="lt1"/>
+          </a:fontRef>
+        </p:style>
+        <p:txBody>
+          <a:bodyPr rtlCol="0" anchor="ctr"/>
+          <a:lstStyle/>
+          <a:p>
+            <a:pPr algn="ctr"/>
+            <a:endParaRPr lang="en-US"/>
+          </a:p>
+        </p:txBody>
+      </p:sp>
       <p:sp>
         <p:nvSpPr>
           <p:cNvPr id="2" name="Title 1">
@@ -4004,15 +9228,295 @@
             <p:ph type="title"/>
           </p:nvPr>
         </p:nvSpPr>
-        <p:spPr/>
+        <p:spPr>
+          <a:xfrm>
+            <a:off x="630936" y="640080"/>
+            <a:ext cx="4818888" cy="1481328"/>
+          </a:xfrm>
+        </p:spPr>
         <p:txBody>
-          <a:bodyPr/>
+          <a:bodyPr anchor="b">
+            <a:normAutofit/>
+          </a:bodyPr>
           <a:lstStyle/>
           <a:p>
             <a:r>
-              <a:rPr lang="en-US" dirty="0"/>
+              <a:rPr lang="en-US" sz="5000"/>
               <a:t>Feature Importance</a:t>
             </a:r>
+          </a:p>
+        </p:txBody>
+      </p:sp>
+      <p:sp>
+        <p:nvSpPr>
+          <p:cNvPr id="12" name="sketch line">
+            <a:extLst>
+              <a:ext uri="{FF2B5EF4-FFF2-40B4-BE49-F238E27FC236}">
+                <a16:creationId xmlns:a16="http://schemas.microsoft.com/office/drawing/2014/main" id="{71877DBC-BB60-40F0-AC93-2ACDBAAE60CE}"/>
+              </a:ext>
+              <a:ext uri="{C183D7F6-B498-43B3-948B-1728B52AA6E4}">
+                <adec:decorative xmlns:adec="http://schemas.microsoft.com/office/drawing/2017/decorative" val="1"/>
+              </a:ext>
+            </a:extLst>
+          </p:cNvPr>
+          <p:cNvSpPr>
+            <a:spLocks noGrp="1" noRot="1" noChangeAspect="1" noMove="1" noResize="1" noEditPoints="1" noAdjustHandles="1" noChangeArrowheads="1" noChangeShapeType="1" noTextEdit="1"/>
+          </p:cNvSpPr>
+          <p:nvPr>
+            <p:extLst>
+              <p:ext uri="{386F3935-93C4-4BCD-93E2-E3B085C9AB24}">
+                <p16:designElem xmlns:p16="http://schemas.microsoft.com/office/powerpoint/2015/main" val="1"/>
+              </p:ext>
+            </p:extLst>
+          </p:nvPr>
+        </p:nvSpPr>
+        <p:spPr>
+          <a:xfrm>
+            <a:off x="643278" y="2372868"/>
+            <a:ext cx="3255095" cy="18288"/>
+          </a:xfrm>
+          <a:custGeom>
+            <a:avLst/>
+            <a:gdLst>
+              <a:gd name="csX0" fmla="*/ 0 w 3255095"/>
+              <a:gd name="csY0" fmla="*/ 0 h 18288"/>
+              <a:gd name="csX1" fmla="*/ 618468 w 3255095"/>
+              <a:gd name="csY1" fmla="*/ 0 h 18288"/>
+              <a:gd name="csX2" fmla="*/ 1269487 w 3255095"/>
+              <a:gd name="csY2" fmla="*/ 0 h 18288"/>
+              <a:gd name="csX3" fmla="*/ 1953057 w 3255095"/>
+              <a:gd name="csY3" fmla="*/ 0 h 18288"/>
+              <a:gd name="csX4" fmla="*/ 2636627 w 3255095"/>
+              <a:gd name="csY4" fmla="*/ 0 h 18288"/>
+              <a:gd name="csX5" fmla="*/ 3255095 w 3255095"/>
+              <a:gd name="csY5" fmla="*/ 0 h 18288"/>
+              <a:gd name="csX6" fmla="*/ 3255095 w 3255095"/>
+              <a:gd name="csY6" fmla="*/ 18288 h 18288"/>
+              <a:gd name="csX7" fmla="*/ 2538974 w 3255095"/>
+              <a:gd name="csY7" fmla="*/ 18288 h 18288"/>
+              <a:gd name="csX8" fmla="*/ 1822853 w 3255095"/>
+              <a:gd name="csY8" fmla="*/ 18288 h 18288"/>
+              <a:gd name="csX9" fmla="*/ 1171834 w 3255095"/>
+              <a:gd name="csY9" fmla="*/ 18288 h 18288"/>
+              <a:gd name="csX10" fmla="*/ 0 w 3255095"/>
+              <a:gd name="csY10" fmla="*/ 18288 h 18288"/>
+              <a:gd name="csX11" fmla="*/ 0 w 3255095"/>
+              <a:gd name="csY11" fmla="*/ 0 h 18288"/>
+            </a:gdLst>
+            <a:ahLst/>
+            <a:cxnLst>
+              <a:cxn ang="0">
+                <a:pos x="csX0" y="csY0"/>
+              </a:cxn>
+              <a:cxn ang="0">
+                <a:pos x="csX1" y="csY1"/>
+              </a:cxn>
+              <a:cxn ang="0">
+                <a:pos x="csX2" y="csY2"/>
+              </a:cxn>
+              <a:cxn ang="0">
+                <a:pos x="csX3" y="csY3"/>
+              </a:cxn>
+              <a:cxn ang="0">
+                <a:pos x="csX4" y="csY4"/>
+              </a:cxn>
+              <a:cxn ang="0">
+                <a:pos x="csX5" y="csY5"/>
+              </a:cxn>
+              <a:cxn ang="0">
+                <a:pos x="csX6" y="csY6"/>
+              </a:cxn>
+              <a:cxn ang="0">
+                <a:pos x="csX7" y="csY7"/>
+              </a:cxn>
+              <a:cxn ang="0">
+                <a:pos x="csX8" y="csY8"/>
+              </a:cxn>
+              <a:cxn ang="0">
+                <a:pos x="csX9" y="csY9"/>
+              </a:cxn>
+              <a:cxn ang="0">
+                <a:pos x="csX10" y="csY10"/>
+              </a:cxn>
+              <a:cxn ang="0">
+                <a:pos x="csX11" y="csY11"/>
+              </a:cxn>
+            </a:cxnLst>
+            <a:rect l="l" t="t" r="r" b="b"/>
+            <a:pathLst>
+              <a:path w="3255095" h="18288" fill="none" extrusionOk="0">
+                <a:moveTo>
+                  <a:pt x="0" y="0"/>
+                </a:moveTo>
+                <a:cubicBezTo>
+                  <a:pt x="240201" y="-22123"/>
+                  <a:pt x="462021" y="-19623"/>
+                  <a:pt x="618468" y="0"/>
+                </a:cubicBezTo>
+                <a:cubicBezTo>
+                  <a:pt x="774915" y="19623"/>
+                  <a:pt x="974734" y="2035"/>
+                  <a:pt x="1269487" y="0"/>
+                </a:cubicBezTo>
+                <a:cubicBezTo>
+                  <a:pt x="1564240" y="-2035"/>
+                  <a:pt x="1733579" y="10639"/>
+                  <a:pt x="1953057" y="0"/>
+                </a:cubicBezTo>
+                <a:cubicBezTo>
+                  <a:pt x="2172535" y="-10639"/>
+                  <a:pt x="2453962" y="14018"/>
+                  <a:pt x="2636627" y="0"/>
+                </a:cubicBezTo>
+                <a:cubicBezTo>
+                  <a:pt x="2819292" y="-14018"/>
+                  <a:pt x="3121375" y="5399"/>
+                  <a:pt x="3255095" y="0"/>
+                </a:cubicBezTo>
+                <a:cubicBezTo>
+                  <a:pt x="3254386" y="8157"/>
+                  <a:pt x="3254682" y="12125"/>
+                  <a:pt x="3255095" y="18288"/>
+                </a:cubicBezTo>
+                <a:cubicBezTo>
+                  <a:pt x="3088545" y="23203"/>
+                  <a:pt x="2687475" y="7419"/>
+                  <a:pt x="2538974" y="18288"/>
+                </a:cubicBezTo>
+                <a:cubicBezTo>
+                  <a:pt x="2390473" y="29157"/>
+                  <a:pt x="2137381" y="-8959"/>
+                  <a:pt x="1822853" y="18288"/>
+                </a:cubicBezTo>
+                <a:cubicBezTo>
+                  <a:pt x="1508325" y="45535"/>
+                  <a:pt x="1466437" y="20385"/>
+                  <a:pt x="1171834" y="18288"/>
+                </a:cubicBezTo>
+                <a:cubicBezTo>
+                  <a:pt x="877231" y="16191"/>
+                  <a:pt x="561097" y="37643"/>
+                  <a:pt x="0" y="18288"/>
+                </a:cubicBezTo>
+                <a:cubicBezTo>
+                  <a:pt x="-46" y="12483"/>
+                  <a:pt x="-203" y="6491"/>
+                  <a:pt x="0" y="0"/>
+                </a:cubicBezTo>
+                <a:close/>
+              </a:path>
+              <a:path w="3255095" h="18288" stroke="0" extrusionOk="0">
+                <a:moveTo>
+                  <a:pt x="0" y="0"/>
+                </a:moveTo>
+                <a:cubicBezTo>
+                  <a:pt x="291965" y="19429"/>
+                  <a:pt x="363155" y="8568"/>
+                  <a:pt x="618468" y="0"/>
+                </a:cubicBezTo>
+                <a:cubicBezTo>
+                  <a:pt x="873781" y="-8568"/>
+                  <a:pt x="904459" y="-19505"/>
+                  <a:pt x="1171834" y="0"/>
+                </a:cubicBezTo>
+                <a:cubicBezTo>
+                  <a:pt x="1439209" y="19505"/>
+                  <a:pt x="1744369" y="9790"/>
+                  <a:pt x="1887955" y="0"/>
+                </a:cubicBezTo>
+                <a:cubicBezTo>
+                  <a:pt x="2031541" y="-9790"/>
+                  <a:pt x="2346378" y="21240"/>
+                  <a:pt x="2506423" y="0"/>
+                </a:cubicBezTo>
+                <a:cubicBezTo>
+                  <a:pt x="2666468" y="-21240"/>
+                  <a:pt x="2990257" y="30414"/>
+                  <a:pt x="3255095" y="0"/>
+                </a:cubicBezTo>
+                <a:cubicBezTo>
+                  <a:pt x="3254831" y="4493"/>
+                  <a:pt x="3255479" y="9472"/>
+                  <a:pt x="3255095" y="18288"/>
+                </a:cubicBezTo>
+                <a:cubicBezTo>
+                  <a:pt x="3120743" y="16690"/>
+                  <a:pt x="2759628" y="42462"/>
+                  <a:pt x="2604076" y="18288"/>
+                </a:cubicBezTo>
+                <a:cubicBezTo>
+                  <a:pt x="2448524" y="-5886"/>
+                  <a:pt x="2184336" y="19599"/>
+                  <a:pt x="1887955" y="18288"/>
+                </a:cubicBezTo>
+                <a:cubicBezTo>
+                  <a:pt x="1591574" y="16977"/>
+                  <a:pt x="1548845" y="6870"/>
+                  <a:pt x="1334589" y="18288"/>
+                </a:cubicBezTo>
+                <a:cubicBezTo>
+                  <a:pt x="1120333" y="29706"/>
+                  <a:pt x="996014" y="9662"/>
+                  <a:pt x="683570" y="18288"/>
+                </a:cubicBezTo>
+                <a:cubicBezTo>
+                  <a:pt x="371126" y="26914"/>
+                  <a:pt x="198687" y="16167"/>
+                  <a:pt x="0" y="18288"/>
+                </a:cubicBezTo>
+                <a:cubicBezTo>
+                  <a:pt x="843" y="9577"/>
+                  <a:pt x="371" y="6900"/>
+                  <a:pt x="0" y="0"/>
+                </a:cubicBezTo>
+                <a:close/>
+              </a:path>
+            </a:pathLst>
+          </a:custGeom>
+          <a:solidFill>
+            <a:schemeClr val="accent2"/>
+          </a:solidFill>
+          <a:ln w="38100" cap="rnd">
+            <a:solidFill>
+              <a:schemeClr val="accent2"/>
+            </a:solidFill>
+            <a:round/>
+            <a:extLst>
+              <a:ext uri="{C807C97D-BFC1-408E-A445-0C87EB9F89A2}">
+                <ask:lineSketchStyleProps xmlns:ask="http://schemas.microsoft.com/office/drawing/2018/sketchyshapes" sd="1219033472">
+                  <a:prstGeom prst="rect">
+                    <a:avLst/>
+                  </a:prstGeom>
+                  <ask:type>
+                    <ask:lineSketchFreehand/>
+                  </ask:type>
+                </ask:lineSketchStyleProps>
+              </a:ext>
+            </a:extLst>
+          </a:ln>
+        </p:spPr>
+        <p:style>
+          <a:lnRef idx="2">
+            <a:schemeClr val="accent1">
+              <a:shade val="50000"/>
+            </a:schemeClr>
+          </a:lnRef>
+          <a:fillRef idx="1">
+            <a:schemeClr val="accent1"/>
+          </a:fillRef>
+          <a:effectRef idx="0">
+            <a:schemeClr val="accent1"/>
+          </a:effectRef>
+          <a:fontRef idx="minor">
+            <a:schemeClr val="lt1"/>
+          </a:fontRef>
+        </p:style>
+        <p:txBody>
+          <a:bodyPr rtlCol="0" anchor="ctr"/>
+          <a:lstStyle/>
+          <a:p>
+            <a:pPr algn="ctr"/>
+            <a:endParaRPr lang="en-US"/>
           </a:p>
         </p:txBody>
       </p:sp>
@@ -4032,29 +9536,36 @@
             <p:ph idx="1"/>
           </p:nvPr>
         </p:nvSpPr>
-        <p:spPr/>
+        <p:spPr>
+          <a:xfrm>
+            <a:off x="630936" y="2660904"/>
+            <a:ext cx="4818888" cy="3547872"/>
+          </a:xfrm>
+        </p:spPr>
         <p:txBody>
-          <a:bodyPr/>
+          <a:bodyPr anchor="t">
+            <a:normAutofit/>
+          </a:bodyPr>
           <a:lstStyle/>
           <a:p>
             <a:pPr marL="0" indent="0">
               <a:buNone/>
             </a:pPr>
             <a:r>
-              <a:rPr lang="en-US" dirty="0" err="1"/>
+              <a:rPr lang="en-US" sz="2200" dirty="0" err="1"/>
               <a:t>SeedNum</a:t>
             </a:r>
             <a:r>
-              <a:rPr lang="en-US" dirty="0"/>
+              <a:rPr lang="en-US" sz="2200" dirty="0"/>
               <a:t> was highly predictive but the model predictions were also driven by </a:t>
             </a:r>
             <a:r>
-              <a:rPr lang="en-US" dirty="0" err="1"/>
+              <a:rPr lang="en-US" sz="2200" dirty="0" err="1"/>
               <a:t>Rank_vs_TourneyAvg</a:t>
             </a:r>
             <a:r>
-              <a:rPr lang="en-US" dirty="0"/>
-              <a:t>, and Massey Ratings.</a:t>
+              <a:rPr lang="en-US" sz="2200" dirty="0"/>
+              <a:t>, and Massey Ratings. While other variables were slightly less impactful.</a:t>
             </a:r>
           </a:p>
         </p:txBody>
@@ -4087,8 +9598,8 @@
         </p:blipFill>
         <p:spPr>
           <a:xfrm>
-            <a:off x="2943317" y="3209132"/>
-            <a:ext cx="4099167" cy="2967831"/>
+            <a:off x="6099048" y="1450123"/>
+            <a:ext cx="5458968" cy="3957754"/>
           </a:xfrm>
           <a:prstGeom prst="rect">
             <a:avLst/>
@@ -4111,6 +9622,14 @@
 <file path=ppt/slides/slide6.xml><?xml version="1.0" encoding="utf-8"?>
 <p:sld xmlns:a="http://schemas.openxmlformats.org/drawingml/2006/main" xmlns:r="http://schemas.openxmlformats.org/officeDocument/2006/relationships" xmlns:p="http://schemas.openxmlformats.org/presentationml/2006/main">
   <p:cSld>
+    <p:bg>
+      <p:bgPr>
+        <a:solidFill>
+          <a:schemeClr val="bg1"/>
+        </a:solidFill>
+        <a:effectLst/>
+      </p:bgPr>
+    </p:bg>
     <p:spTree>
       <p:nvGrpSpPr>
         <p:cNvPr id="1" name=""/>
@@ -4125,6 +9644,66 @@
           <a:chExt cx="0" cy="0"/>
         </a:xfrm>
       </p:grpSpPr>
+      <p:sp useBgFill="1">
+        <p:nvSpPr>
+          <p:cNvPr id="8" name="Rectangle 7">
+            <a:extLst>
+              <a:ext uri="{FF2B5EF4-FFF2-40B4-BE49-F238E27FC236}">
+                <a16:creationId xmlns:a16="http://schemas.microsoft.com/office/drawing/2014/main" id="{100EDD19-6802-4EC3-95CE-CFFAB042CFD6}"/>
+              </a:ext>
+              <a:ext uri="{C183D7F6-B498-43B3-948B-1728B52AA6E4}">
+                <adec:decorative xmlns:adec="http://schemas.microsoft.com/office/drawing/2017/decorative" val="1"/>
+              </a:ext>
+            </a:extLst>
+          </p:cNvPr>
+          <p:cNvSpPr>
+            <a:spLocks noGrp="1" noRot="1" noChangeAspect="1" noMove="1" noResize="1" noEditPoints="1" noAdjustHandles="1" noChangeArrowheads="1" noChangeShapeType="1" noTextEdit="1"/>
+          </p:cNvSpPr>
+          <p:nvPr>
+            <p:extLst>
+              <p:ext uri="{386F3935-93C4-4BCD-93E2-E3B085C9AB24}">
+                <p16:designElem xmlns:p16="http://schemas.microsoft.com/office/powerpoint/2015/main" val="1"/>
+              </p:ext>
+            </p:extLst>
+          </p:nvPr>
+        </p:nvSpPr>
+        <p:spPr>
+          <a:xfrm>
+            <a:off x="0" y="0"/>
+            <a:ext cx="12188952" cy="6858000"/>
+          </a:xfrm>
+          <a:prstGeom prst="rect">
+            <a:avLst/>
+          </a:prstGeom>
+          <a:ln>
+            <a:noFill/>
+          </a:ln>
+        </p:spPr>
+        <p:style>
+          <a:lnRef idx="2">
+            <a:schemeClr val="accent1">
+              <a:shade val="50000"/>
+            </a:schemeClr>
+          </a:lnRef>
+          <a:fillRef idx="1">
+            <a:schemeClr val="accent1"/>
+          </a:fillRef>
+          <a:effectRef idx="0">
+            <a:schemeClr val="accent1"/>
+          </a:effectRef>
+          <a:fontRef idx="minor">
+            <a:schemeClr val="lt1"/>
+          </a:fontRef>
+        </p:style>
+        <p:txBody>
+          <a:bodyPr rtlCol="0" anchor="ctr"/>
+          <a:lstStyle/>
+          <a:p>
+            <a:pPr algn="ctr"/>
+            <a:endParaRPr lang="en-US"/>
+          </a:p>
+        </p:txBody>
+      </p:sp>
       <p:sp>
         <p:nvSpPr>
           <p:cNvPr id="2" name="Title 1">
@@ -4141,15 +9720,660 @@
             <p:ph type="title"/>
           </p:nvPr>
         </p:nvSpPr>
-        <p:spPr/>
+        <p:spPr>
+          <a:xfrm>
+            <a:off x="838200" y="365125"/>
+            <a:ext cx="10515600" cy="1325563"/>
+          </a:xfrm>
+        </p:spPr>
         <p:txBody>
-          <a:bodyPr/>
+          <a:bodyPr>
+            <a:normAutofit/>
+          </a:bodyPr>
           <a:lstStyle/>
           <a:p>
             <a:r>
-              <a:rPr lang="en-US" dirty="0"/>
+              <a:rPr lang="en-US" sz="5400"/>
               <a:t>Supervised Classification</a:t>
             </a:r>
+          </a:p>
+        </p:txBody>
+      </p:sp>
+      <p:sp>
+        <p:nvSpPr>
+          <p:cNvPr id="5" name="sketch line">
+            <a:extLst>
+              <a:ext uri="{FF2B5EF4-FFF2-40B4-BE49-F238E27FC236}">
+                <a16:creationId xmlns:a16="http://schemas.microsoft.com/office/drawing/2014/main" id="{DB17E863-922E-4C26-BD64-E8FD41D28661}"/>
+              </a:ext>
+              <a:ext uri="{C183D7F6-B498-43B3-948B-1728B52AA6E4}">
+                <adec:decorative xmlns:adec="http://schemas.microsoft.com/office/drawing/2017/decorative" val="1"/>
+              </a:ext>
+            </a:extLst>
+          </p:cNvPr>
+          <p:cNvSpPr>
+            <a:spLocks noGrp="1" noRot="1" noChangeAspect="1" noMove="1" noResize="1" noEditPoints="1" noAdjustHandles="1" noChangeArrowheads="1" noChangeShapeType="1" noTextEdit="1"/>
+          </p:cNvSpPr>
+          <p:nvPr>
+            <p:extLst>
+              <p:ext uri="{386F3935-93C4-4BCD-93E2-E3B085C9AB24}">
+                <p16:designElem xmlns:p16="http://schemas.microsoft.com/office/powerpoint/2015/main" val="1"/>
+              </p:ext>
+            </p:extLst>
+          </p:nvPr>
+        </p:nvSpPr>
+        <p:spPr>
+          <a:xfrm>
+            <a:off x="669036" y="1677373"/>
+            <a:ext cx="10853928" cy="18288"/>
+          </a:xfrm>
+          <a:custGeom>
+            <a:avLst/>
+            <a:gdLst>
+              <a:gd name="csX0" fmla="*/ 0 w 10853928"/>
+              <a:gd name="csY0" fmla="*/ 0 h 18288"/>
+              <a:gd name="csX1" fmla="*/ 461292 w 10853928"/>
+              <a:gd name="csY1" fmla="*/ 0 h 18288"/>
+              <a:gd name="csX2" fmla="*/ 1139662 w 10853928"/>
+              <a:gd name="csY2" fmla="*/ 0 h 18288"/>
+              <a:gd name="csX3" fmla="*/ 1926572 w 10853928"/>
+              <a:gd name="csY3" fmla="*/ 0 h 18288"/>
+              <a:gd name="csX4" fmla="*/ 2279325 w 10853928"/>
+              <a:gd name="csY4" fmla="*/ 0 h 18288"/>
+              <a:gd name="csX5" fmla="*/ 2632078 w 10853928"/>
+              <a:gd name="csY5" fmla="*/ 0 h 18288"/>
+              <a:gd name="csX6" fmla="*/ 3527527 w 10853928"/>
+              <a:gd name="csY6" fmla="*/ 0 h 18288"/>
+              <a:gd name="csX7" fmla="*/ 4205897 w 10853928"/>
+              <a:gd name="csY7" fmla="*/ 0 h 18288"/>
+              <a:gd name="csX8" fmla="*/ 4558650 w 10853928"/>
+              <a:gd name="csY8" fmla="*/ 0 h 18288"/>
+              <a:gd name="csX9" fmla="*/ 5237020 w 10853928"/>
+              <a:gd name="csY9" fmla="*/ 0 h 18288"/>
+              <a:gd name="csX10" fmla="*/ 6132469 w 10853928"/>
+              <a:gd name="csY10" fmla="*/ 0 h 18288"/>
+              <a:gd name="csX11" fmla="*/ 6702301 w 10853928"/>
+              <a:gd name="csY11" fmla="*/ 0 h 18288"/>
+              <a:gd name="csX12" fmla="*/ 7272132 w 10853928"/>
+              <a:gd name="csY12" fmla="*/ 0 h 18288"/>
+              <a:gd name="csX13" fmla="*/ 7950502 w 10853928"/>
+              <a:gd name="csY13" fmla="*/ 0 h 18288"/>
+              <a:gd name="csX14" fmla="*/ 8737412 w 10853928"/>
+              <a:gd name="csY14" fmla="*/ 0 h 18288"/>
+              <a:gd name="csX15" fmla="*/ 9524322 w 10853928"/>
+              <a:gd name="csY15" fmla="*/ 0 h 18288"/>
+              <a:gd name="csX16" fmla="*/ 10853928 w 10853928"/>
+              <a:gd name="csY16" fmla="*/ 0 h 18288"/>
+              <a:gd name="csX17" fmla="*/ 10853928 w 10853928"/>
+              <a:gd name="csY17" fmla="*/ 18288 h 18288"/>
+              <a:gd name="csX18" fmla="*/ 10392636 w 10853928"/>
+              <a:gd name="csY18" fmla="*/ 18288 h 18288"/>
+              <a:gd name="csX19" fmla="*/ 9497187 w 10853928"/>
+              <a:gd name="csY19" fmla="*/ 18288 h 18288"/>
+              <a:gd name="csX20" fmla="*/ 8818817 w 10853928"/>
+              <a:gd name="csY20" fmla="*/ 18288 h 18288"/>
+              <a:gd name="csX21" fmla="*/ 8466064 w 10853928"/>
+              <a:gd name="csY21" fmla="*/ 18288 h 18288"/>
+              <a:gd name="csX22" fmla="*/ 7787693 w 10853928"/>
+              <a:gd name="csY22" fmla="*/ 18288 h 18288"/>
+              <a:gd name="csX23" fmla="*/ 7217862 w 10853928"/>
+              <a:gd name="csY23" fmla="*/ 18288 h 18288"/>
+              <a:gd name="csX24" fmla="*/ 6648031 w 10853928"/>
+              <a:gd name="csY24" fmla="*/ 18288 h 18288"/>
+              <a:gd name="csX25" fmla="*/ 6078200 w 10853928"/>
+              <a:gd name="csY25" fmla="*/ 18288 h 18288"/>
+              <a:gd name="csX26" fmla="*/ 5508368 w 10853928"/>
+              <a:gd name="csY26" fmla="*/ 18288 h 18288"/>
+              <a:gd name="csX27" fmla="*/ 4721459 w 10853928"/>
+              <a:gd name="csY27" fmla="*/ 18288 h 18288"/>
+              <a:gd name="csX28" fmla="*/ 4043088 w 10853928"/>
+              <a:gd name="csY28" fmla="*/ 18288 h 18288"/>
+              <a:gd name="csX29" fmla="*/ 3690336 w 10853928"/>
+              <a:gd name="csY29" fmla="*/ 18288 h 18288"/>
+              <a:gd name="csX30" fmla="*/ 3120504 w 10853928"/>
+              <a:gd name="csY30" fmla="*/ 18288 h 18288"/>
+              <a:gd name="csX31" fmla="*/ 2333595 w 10853928"/>
+              <a:gd name="csY31" fmla="*/ 18288 h 18288"/>
+              <a:gd name="csX32" fmla="*/ 1872303 w 10853928"/>
+              <a:gd name="csY32" fmla="*/ 18288 h 18288"/>
+              <a:gd name="csX33" fmla="*/ 976854 w 10853928"/>
+              <a:gd name="csY33" fmla="*/ 18288 h 18288"/>
+              <a:gd name="csX34" fmla="*/ 0 w 10853928"/>
+              <a:gd name="csY34" fmla="*/ 18288 h 18288"/>
+              <a:gd name="csX35" fmla="*/ 0 w 10853928"/>
+              <a:gd name="csY35" fmla="*/ 0 h 18288"/>
+            </a:gdLst>
+            <a:ahLst/>
+            <a:cxnLst>
+              <a:cxn ang="0">
+                <a:pos x="csX0" y="csY0"/>
+              </a:cxn>
+              <a:cxn ang="0">
+                <a:pos x="csX1" y="csY1"/>
+              </a:cxn>
+              <a:cxn ang="0">
+                <a:pos x="csX2" y="csY2"/>
+              </a:cxn>
+              <a:cxn ang="0">
+                <a:pos x="csX3" y="csY3"/>
+              </a:cxn>
+              <a:cxn ang="0">
+                <a:pos x="csX4" y="csY4"/>
+              </a:cxn>
+              <a:cxn ang="0">
+                <a:pos x="csX5" y="csY5"/>
+              </a:cxn>
+              <a:cxn ang="0">
+                <a:pos x="csX6" y="csY6"/>
+              </a:cxn>
+              <a:cxn ang="0">
+                <a:pos x="csX7" y="csY7"/>
+              </a:cxn>
+              <a:cxn ang="0">
+                <a:pos x="csX8" y="csY8"/>
+              </a:cxn>
+              <a:cxn ang="0">
+                <a:pos x="csX9" y="csY9"/>
+              </a:cxn>
+              <a:cxn ang="0">
+                <a:pos x="csX10" y="csY10"/>
+              </a:cxn>
+              <a:cxn ang="0">
+                <a:pos x="csX11" y="csY11"/>
+              </a:cxn>
+              <a:cxn ang="0">
+                <a:pos x="csX12" y="csY12"/>
+              </a:cxn>
+              <a:cxn ang="0">
+                <a:pos x="csX13" y="csY13"/>
+              </a:cxn>
+              <a:cxn ang="0">
+                <a:pos x="csX14" y="csY14"/>
+              </a:cxn>
+              <a:cxn ang="0">
+                <a:pos x="csX15" y="csY15"/>
+              </a:cxn>
+              <a:cxn ang="0">
+                <a:pos x="csX16" y="csY16"/>
+              </a:cxn>
+              <a:cxn ang="0">
+                <a:pos x="csX17" y="csY17"/>
+              </a:cxn>
+              <a:cxn ang="0">
+                <a:pos x="csX18" y="csY18"/>
+              </a:cxn>
+              <a:cxn ang="0">
+                <a:pos x="csX19" y="csY19"/>
+              </a:cxn>
+              <a:cxn ang="0">
+                <a:pos x="csX20" y="csY20"/>
+              </a:cxn>
+              <a:cxn ang="0">
+                <a:pos x="csX21" y="csY21"/>
+              </a:cxn>
+              <a:cxn ang="0">
+                <a:pos x="csX22" y="csY22"/>
+              </a:cxn>
+              <a:cxn ang="0">
+                <a:pos x="csX23" y="csY23"/>
+              </a:cxn>
+              <a:cxn ang="0">
+                <a:pos x="csX24" y="csY24"/>
+              </a:cxn>
+              <a:cxn ang="0">
+                <a:pos x="csX25" y="csY25"/>
+              </a:cxn>
+              <a:cxn ang="0">
+                <a:pos x="csX26" y="csY26"/>
+              </a:cxn>
+              <a:cxn ang="0">
+                <a:pos x="csX27" y="csY27"/>
+              </a:cxn>
+              <a:cxn ang="0">
+                <a:pos x="csX28" y="csY28"/>
+              </a:cxn>
+              <a:cxn ang="0">
+                <a:pos x="csX29" y="csY29"/>
+              </a:cxn>
+              <a:cxn ang="0">
+                <a:pos x="csX30" y="csY30"/>
+              </a:cxn>
+              <a:cxn ang="0">
+                <a:pos x="csX31" y="csY31"/>
+              </a:cxn>
+              <a:cxn ang="0">
+                <a:pos x="csX32" y="csY32"/>
+              </a:cxn>
+              <a:cxn ang="0">
+                <a:pos x="csX33" y="csY33"/>
+              </a:cxn>
+              <a:cxn ang="0">
+                <a:pos x="csX34" y="csY34"/>
+              </a:cxn>
+              <a:cxn ang="0">
+                <a:pos x="csX35" y="csY35"/>
+              </a:cxn>
+            </a:cxnLst>
+            <a:rect l="l" t="t" r="r" b="b"/>
+            <a:pathLst>
+              <a:path w="10853928" h="18288" fill="none" extrusionOk="0">
+                <a:moveTo>
+                  <a:pt x="0" y="0"/>
+                </a:moveTo>
+                <a:cubicBezTo>
+                  <a:pt x="146993" y="-19076"/>
+                  <a:pt x="347684" y="-4790"/>
+                  <a:pt x="461292" y="0"/>
+                </a:cubicBezTo>
+                <a:cubicBezTo>
+                  <a:pt x="574900" y="4790"/>
+                  <a:pt x="808367" y="19821"/>
+                  <a:pt x="1139662" y="0"/>
+                </a:cubicBezTo>
+                <a:cubicBezTo>
+                  <a:pt x="1470957" y="-19821"/>
+                  <a:pt x="1627405" y="5721"/>
+                  <a:pt x="1926572" y="0"/>
+                </a:cubicBezTo>
+                <a:cubicBezTo>
+                  <a:pt x="2225739" y="-5721"/>
+                  <a:pt x="2137730" y="-3235"/>
+                  <a:pt x="2279325" y="0"/>
+                </a:cubicBezTo>
+                <a:cubicBezTo>
+                  <a:pt x="2420920" y="3235"/>
+                  <a:pt x="2456518" y="9685"/>
+                  <a:pt x="2632078" y="0"/>
+                </a:cubicBezTo>
+                <a:cubicBezTo>
+                  <a:pt x="2807638" y="-9685"/>
+                  <a:pt x="3211516" y="-43007"/>
+                  <a:pt x="3527527" y="0"/>
+                </a:cubicBezTo>
+                <a:cubicBezTo>
+                  <a:pt x="3843538" y="43007"/>
+                  <a:pt x="4058833" y="22042"/>
+                  <a:pt x="4205897" y="0"/>
+                </a:cubicBezTo>
+                <a:cubicBezTo>
+                  <a:pt x="4352961" y="-22042"/>
+                  <a:pt x="4474805" y="-11846"/>
+                  <a:pt x="4558650" y="0"/>
+                </a:cubicBezTo>
+                <a:cubicBezTo>
+                  <a:pt x="4642495" y="11846"/>
+                  <a:pt x="5041928" y="-6069"/>
+                  <a:pt x="5237020" y="0"/>
+                </a:cubicBezTo>
+                <a:cubicBezTo>
+                  <a:pt x="5432112" y="6069"/>
+                  <a:pt x="5943266" y="-17479"/>
+                  <a:pt x="6132469" y="0"/>
+                </a:cubicBezTo>
+                <a:cubicBezTo>
+                  <a:pt x="6321672" y="17479"/>
+                  <a:pt x="6483872" y="26234"/>
+                  <a:pt x="6702301" y="0"/>
+                </a:cubicBezTo>
+                <a:cubicBezTo>
+                  <a:pt x="6920730" y="-26234"/>
+                  <a:pt x="6991194" y="-15156"/>
+                  <a:pt x="7272132" y="0"/>
+                </a:cubicBezTo>
+                <a:cubicBezTo>
+                  <a:pt x="7553070" y="15156"/>
+                  <a:pt x="7684444" y="-32961"/>
+                  <a:pt x="7950502" y="0"/>
+                </a:cubicBezTo>
+                <a:cubicBezTo>
+                  <a:pt x="8216560" y="32961"/>
+                  <a:pt x="8493290" y="-10491"/>
+                  <a:pt x="8737412" y="0"/>
+                </a:cubicBezTo>
+                <a:cubicBezTo>
+                  <a:pt x="8981534" y="10491"/>
+                  <a:pt x="9191586" y="-13899"/>
+                  <a:pt x="9524322" y="0"/>
+                </a:cubicBezTo>
+                <a:cubicBezTo>
+                  <a:pt x="9857058" y="13899"/>
+                  <a:pt x="10297509" y="7485"/>
+                  <a:pt x="10853928" y="0"/>
+                </a:cubicBezTo>
+                <a:cubicBezTo>
+                  <a:pt x="10854574" y="4451"/>
+                  <a:pt x="10854418" y="9226"/>
+                  <a:pt x="10853928" y="18288"/>
+                </a:cubicBezTo>
+                <a:cubicBezTo>
+                  <a:pt x="10691638" y="28522"/>
+                  <a:pt x="10574319" y="29578"/>
+                  <a:pt x="10392636" y="18288"/>
+                </a:cubicBezTo>
+                <a:cubicBezTo>
+                  <a:pt x="10210953" y="6998"/>
+                  <a:pt x="9836277" y="-16742"/>
+                  <a:pt x="9497187" y="18288"/>
+                </a:cubicBezTo>
+                <a:cubicBezTo>
+                  <a:pt x="9158097" y="53318"/>
+                  <a:pt x="9119479" y="30714"/>
+                  <a:pt x="8818817" y="18288"/>
+                </a:cubicBezTo>
+                <a:cubicBezTo>
+                  <a:pt x="8518155" y="5863"/>
+                  <a:pt x="8640037" y="6483"/>
+                  <a:pt x="8466064" y="18288"/>
+                </a:cubicBezTo>
+                <a:cubicBezTo>
+                  <a:pt x="8292091" y="30093"/>
+                  <a:pt x="7997656" y="18914"/>
+                  <a:pt x="7787693" y="18288"/>
+                </a:cubicBezTo>
+                <a:cubicBezTo>
+                  <a:pt x="7577730" y="17662"/>
+                  <a:pt x="7412468" y="21416"/>
+                  <a:pt x="7217862" y="18288"/>
+                </a:cubicBezTo>
+                <a:cubicBezTo>
+                  <a:pt x="7023256" y="15160"/>
+                  <a:pt x="6898018" y="14824"/>
+                  <a:pt x="6648031" y="18288"/>
+                </a:cubicBezTo>
+                <a:cubicBezTo>
+                  <a:pt x="6398044" y="21752"/>
+                  <a:pt x="6254402" y="38625"/>
+                  <a:pt x="6078200" y="18288"/>
+                </a:cubicBezTo>
+                <a:cubicBezTo>
+                  <a:pt x="5901998" y="-2049"/>
+                  <a:pt x="5622886" y="3213"/>
+                  <a:pt x="5508368" y="18288"/>
+                </a:cubicBezTo>
+                <a:cubicBezTo>
+                  <a:pt x="5393850" y="33363"/>
+                  <a:pt x="5036260" y="26830"/>
+                  <a:pt x="4721459" y="18288"/>
+                </a:cubicBezTo>
+                <a:cubicBezTo>
+                  <a:pt x="4406658" y="9746"/>
+                  <a:pt x="4239221" y="41551"/>
+                  <a:pt x="4043088" y="18288"/>
+                </a:cubicBezTo>
+                <a:cubicBezTo>
+                  <a:pt x="3846955" y="-4975"/>
+                  <a:pt x="3818802" y="34658"/>
+                  <a:pt x="3690336" y="18288"/>
+                </a:cubicBezTo>
+                <a:cubicBezTo>
+                  <a:pt x="3561870" y="1918"/>
+                  <a:pt x="3265491" y="42194"/>
+                  <a:pt x="3120504" y="18288"/>
+                </a:cubicBezTo>
+                <a:cubicBezTo>
+                  <a:pt x="2975517" y="-5618"/>
+                  <a:pt x="2720254" y="36673"/>
+                  <a:pt x="2333595" y="18288"/>
+                </a:cubicBezTo>
+                <a:cubicBezTo>
+                  <a:pt x="1946936" y="-97"/>
+                  <a:pt x="2097241" y="5776"/>
+                  <a:pt x="1872303" y="18288"/>
+                </a:cubicBezTo>
+                <a:cubicBezTo>
+                  <a:pt x="1647365" y="30800"/>
+                  <a:pt x="1282708" y="45380"/>
+                  <a:pt x="976854" y="18288"/>
+                </a:cubicBezTo>
+                <a:cubicBezTo>
+                  <a:pt x="671000" y="-8804"/>
+                  <a:pt x="408401" y="-12775"/>
+                  <a:pt x="0" y="18288"/>
+                </a:cubicBezTo>
+                <a:cubicBezTo>
+                  <a:pt x="-213" y="9468"/>
+                  <a:pt x="187" y="4459"/>
+                  <a:pt x="0" y="0"/>
+                </a:cubicBezTo>
+                <a:close/>
+              </a:path>
+              <a:path w="10853928" h="18288" stroke="0" extrusionOk="0">
+                <a:moveTo>
+                  <a:pt x="0" y="0"/>
+                </a:moveTo>
+                <a:cubicBezTo>
+                  <a:pt x="267322" y="15284"/>
+                  <a:pt x="415388" y="-21048"/>
+                  <a:pt x="569831" y="0"/>
+                </a:cubicBezTo>
+                <a:cubicBezTo>
+                  <a:pt x="724274" y="21048"/>
+                  <a:pt x="769333" y="-2353"/>
+                  <a:pt x="922584" y="0"/>
+                </a:cubicBezTo>
+                <a:cubicBezTo>
+                  <a:pt x="1075835" y="2353"/>
+                  <a:pt x="1399490" y="-145"/>
+                  <a:pt x="1818033" y="0"/>
+                </a:cubicBezTo>
+                <a:cubicBezTo>
+                  <a:pt x="2236576" y="145"/>
+                  <a:pt x="2145330" y="5482"/>
+                  <a:pt x="2387864" y="0"/>
+                </a:cubicBezTo>
+                <a:cubicBezTo>
+                  <a:pt x="2630398" y="-5482"/>
+                  <a:pt x="2793207" y="18487"/>
+                  <a:pt x="2957695" y="0"/>
+                </a:cubicBezTo>
+                <a:cubicBezTo>
+                  <a:pt x="3122183" y="-18487"/>
+                  <a:pt x="3579141" y="19003"/>
+                  <a:pt x="3853144" y="0"/>
+                </a:cubicBezTo>
+                <a:cubicBezTo>
+                  <a:pt x="4127147" y="-19003"/>
+                  <a:pt x="4209857" y="12211"/>
+                  <a:pt x="4314436" y="0"/>
+                </a:cubicBezTo>
+                <a:cubicBezTo>
+                  <a:pt x="4419015" y="-12211"/>
+                  <a:pt x="4762459" y="-17220"/>
+                  <a:pt x="5209885" y="0"/>
+                </a:cubicBezTo>
+                <a:cubicBezTo>
+                  <a:pt x="5657311" y="17220"/>
+                  <a:pt x="5692663" y="-3290"/>
+                  <a:pt x="6105335" y="0"/>
+                </a:cubicBezTo>
+                <a:cubicBezTo>
+                  <a:pt x="6518007" y="3290"/>
+                  <a:pt x="6455516" y="-5124"/>
+                  <a:pt x="6783705" y="0"/>
+                </a:cubicBezTo>
+                <a:cubicBezTo>
+                  <a:pt x="7111894" y="5124"/>
+                  <a:pt x="7441941" y="-17829"/>
+                  <a:pt x="7679154" y="0"/>
+                </a:cubicBezTo>
+                <a:cubicBezTo>
+                  <a:pt x="7916367" y="17829"/>
+                  <a:pt x="8102967" y="-24363"/>
+                  <a:pt x="8248985" y="0"/>
+                </a:cubicBezTo>
+                <a:cubicBezTo>
+                  <a:pt x="8395003" y="24363"/>
+                  <a:pt x="8552393" y="25505"/>
+                  <a:pt x="8818817" y="0"/>
+                </a:cubicBezTo>
+                <a:cubicBezTo>
+                  <a:pt x="9085241" y="-25505"/>
+                  <a:pt x="9411308" y="38000"/>
+                  <a:pt x="9605726" y="0"/>
+                </a:cubicBezTo>
+                <a:cubicBezTo>
+                  <a:pt x="9800144" y="-38000"/>
+                  <a:pt x="10006468" y="-25741"/>
+                  <a:pt x="10175558" y="0"/>
+                </a:cubicBezTo>
+                <a:cubicBezTo>
+                  <a:pt x="10344648" y="25741"/>
+                  <a:pt x="10696282" y="695"/>
+                  <a:pt x="10853928" y="0"/>
+                </a:cubicBezTo>
+                <a:cubicBezTo>
+                  <a:pt x="10853521" y="8690"/>
+                  <a:pt x="10853774" y="14141"/>
+                  <a:pt x="10853928" y="18288"/>
+                </a:cubicBezTo>
+                <a:cubicBezTo>
+                  <a:pt x="10608124" y="24255"/>
+                  <a:pt x="10343415" y="22307"/>
+                  <a:pt x="10067018" y="18288"/>
+                </a:cubicBezTo>
+                <a:cubicBezTo>
+                  <a:pt x="9790621" y="14270"/>
+                  <a:pt x="9843266" y="3564"/>
+                  <a:pt x="9714266" y="18288"/>
+                </a:cubicBezTo>
+                <a:cubicBezTo>
+                  <a:pt x="9585266" y="33012"/>
+                  <a:pt x="9379484" y="1875"/>
+                  <a:pt x="9252974" y="18288"/>
+                </a:cubicBezTo>
+                <a:cubicBezTo>
+                  <a:pt x="9126464" y="34701"/>
+                  <a:pt x="8580678" y="-4904"/>
+                  <a:pt x="8357525" y="18288"/>
+                </a:cubicBezTo>
+                <a:cubicBezTo>
+                  <a:pt x="8134372" y="41480"/>
+                  <a:pt x="7903199" y="26458"/>
+                  <a:pt x="7679154" y="18288"/>
+                </a:cubicBezTo>
+                <a:cubicBezTo>
+                  <a:pt x="7455109" y="10118"/>
+                  <a:pt x="7435944" y="27109"/>
+                  <a:pt x="7217862" y="18288"/>
+                </a:cubicBezTo>
+                <a:cubicBezTo>
+                  <a:pt x="6999780" y="9467"/>
+                  <a:pt x="6680409" y="18985"/>
+                  <a:pt x="6539492" y="18288"/>
+                </a:cubicBezTo>
+                <a:cubicBezTo>
+                  <a:pt x="6398575" y="17592"/>
+                  <a:pt x="6312077" y="33018"/>
+                  <a:pt x="6186739" y="18288"/>
+                </a:cubicBezTo>
+                <a:cubicBezTo>
+                  <a:pt x="6061401" y="3558"/>
+                  <a:pt x="5947033" y="12075"/>
+                  <a:pt x="5833986" y="18288"/>
+                </a:cubicBezTo>
+                <a:cubicBezTo>
+                  <a:pt x="5720939" y="24501"/>
+                  <a:pt x="5482226" y="8586"/>
+                  <a:pt x="5155616" y="18288"/>
+                </a:cubicBezTo>
+                <a:cubicBezTo>
+                  <a:pt x="4829006" y="27991"/>
+                  <a:pt x="4841274" y="29316"/>
+                  <a:pt x="4694324" y="18288"/>
+                </a:cubicBezTo>
+                <a:cubicBezTo>
+                  <a:pt x="4547374" y="7260"/>
+                  <a:pt x="4077675" y="7013"/>
+                  <a:pt x="3907414" y="18288"/>
+                </a:cubicBezTo>
+                <a:cubicBezTo>
+                  <a:pt x="3737153" y="29564"/>
+                  <a:pt x="3538393" y="21630"/>
+                  <a:pt x="3446122" y="18288"/>
+                </a:cubicBezTo>
+                <a:cubicBezTo>
+                  <a:pt x="3353851" y="14946"/>
+                  <a:pt x="2990320" y="-8091"/>
+                  <a:pt x="2659212" y="18288"/>
+                </a:cubicBezTo>
+                <a:cubicBezTo>
+                  <a:pt x="2328104" y="44667"/>
+                  <a:pt x="2427653" y="9607"/>
+                  <a:pt x="2306460" y="18288"/>
+                </a:cubicBezTo>
+                <a:cubicBezTo>
+                  <a:pt x="2185267" y="26969"/>
+                  <a:pt x="1719763" y="3717"/>
+                  <a:pt x="1519550" y="18288"/>
+                </a:cubicBezTo>
+                <a:cubicBezTo>
+                  <a:pt x="1319337" y="32860"/>
+                  <a:pt x="1167371" y="17040"/>
+                  <a:pt x="1058258" y="18288"/>
+                </a:cubicBezTo>
+                <a:cubicBezTo>
+                  <a:pt x="949145" y="19536"/>
+                  <a:pt x="780234" y="31447"/>
+                  <a:pt x="705505" y="18288"/>
+                </a:cubicBezTo>
+                <a:cubicBezTo>
+                  <a:pt x="630776" y="5129"/>
+                  <a:pt x="215796" y="30056"/>
+                  <a:pt x="0" y="18288"/>
+                </a:cubicBezTo>
+                <a:cubicBezTo>
+                  <a:pt x="-53" y="11301"/>
+                  <a:pt x="-649" y="7756"/>
+                  <a:pt x="0" y="0"/>
+                </a:cubicBezTo>
+                <a:close/>
+              </a:path>
+            </a:pathLst>
+          </a:custGeom>
+          <a:solidFill>
+            <a:schemeClr val="accent2"/>
+          </a:solidFill>
+          <a:ln w="41275" cap="rnd">
+            <a:solidFill>
+              <a:schemeClr val="accent2"/>
+            </a:solidFill>
+            <a:round/>
+            <a:extLst>
+              <a:ext uri="{C807C97D-BFC1-408E-A445-0C87EB9F89A2}">
+                <ask:lineSketchStyleProps xmlns:ask="http://schemas.microsoft.com/office/drawing/2018/sketchyshapes" sd="1219033472">
+                  <a:prstGeom prst="rect">
+                    <a:avLst/>
+                  </a:prstGeom>
+                  <ask:type>
+                    <ask:lineSketchFreehand/>
+                  </ask:type>
+                </ask:lineSketchStyleProps>
+              </a:ext>
+            </a:extLst>
+          </a:ln>
+        </p:spPr>
+        <p:style>
+          <a:lnRef idx="2">
+            <a:schemeClr val="accent1">
+              <a:shade val="50000"/>
+            </a:schemeClr>
+          </a:lnRef>
+          <a:fillRef idx="1">
+            <a:schemeClr val="accent1"/>
+          </a:fillRef>
+          <a:effectRef idx="0">
+            <a:schemeClr val="accent1"/>
+          </a:effectRef>
+          <a:fontRef idx="minor">
+            <a:schemeClr val="lt1"/>
+          </a:fontRef>
+        </p:style>
+        <p:txBody>
+          <a:bodyPr rtlCol="0" anchor="ctr"/>
+          <a:lstStyle/>
+          <a:p>
+            <a:pPr algn="ctr"/>
+            <a:endParaRPr lang="en-US"/>
           </a:p>
         </p:txBody>
       </p:sp>
@@ -4169,46 +10393,53 @@
             <p:ph idx="1"/>
           </p:nvPr>
         </p:nvSpPr>
-        <p:spPr/>
+        <p:spPr>
+          <a:xfrm>
+            <a:off x="838200" y="1929384"/>
+            <a:ext cx="10515600" cy="4251960"/>
+          </a:xfrm>
+        </p:spPr>
         <p:txBody>
-          <a:bodyPr/>
+          <a:bodyPr>
+            <a:normAutofit/>
+          </a:bodyPr>
           <a:lstStyle/>
           <a:p>
             <a:r>
-              <a:rPr lang="en-US" dirty="0"/>
+              <a:rPr lang="en-US" sz="2200"/>
               <a:t>The Data</a:t>
             </a:r>
           </a:p>
           <a:p>
             <a:r>
-              <a:rPr lang="en-US" dirty="0"/>
+              <a:rPr lang="en-US" sz="2200"/>
               <a:t>Filtering for Cinderella candidates left us with an imbalanced dataset, since Cinderella seeds are unlikely.</a:t>
             </a:r>
           </a:p>
           <a:p>
-            <a:endParaRPr lang="en-US" dirty="0"/>
+            <a:endParaRPr lang="en-US" sz="2200"/>
           </a:p>
           <a:p>
             <a:r>
-              <a:rPr lang="en-US" dirty="0"/>
+              <a:rPr lang="en-US" sz="2200"/>
               <a:t>Model Selection and Tuning: </a:t>
             </a:r>
           </a:p>
           <a:p>
             <a:r>
-              <a:rPr lang="en-US" dirty="0"/>
+              <a:rPr lang="en-US" sz="2200"/>
               <a:t>Evaluation Metric: Rather than Accuracy we used PC-AUC and F1-Score to account for this.</a:t>
             </a:r>
           </a:p>
           <a:p>
             <a:r>
-              <a:rPr lang="en-US" dirty="0"/>
+              <a:rPr lang="en-US" sz="2200"/>
               <a:t>Baseline Random Forest struggled with recall (0.306).</a:t>
             </a:r>
           </a:p>
           <a:p>
             <a:r>
-              <a:rPr lang="en-US" dirty="0"/>
+              <a:rPr lang="en-US" sz="2200"/>
               <a:t>XGBoost largely improved recall (0.6861)</a:t>
             </a:r>
           </a:p>
@@ -4230,6 +10461,14 @@
 <file path=ppt/slides/slide7.xml><?xml version="1.0" encoding="utf-8"?>
 <p:sld xmlns:a="http://schemas.openxmlformats.org/drawingml/2006/main" xmlns:r="http://schemas.openxmlformats.org/officeDocument/2006/relationships" xmlns:p="http://schemas.openxmlformats.org/presentationml/2006/main">
   <p:cSld>
+    <p:bg>
+      <p:bgPr>
+        <a:solidFill>
+          <a:schemeClr val="bg1"/>
+        </a:solidFill>
+        <a:effectLst/>
+      </p:bgPr>
+    </p:bg>
     <p:spTree>
       <p:nvGrpSpPr>
         <p:cNvPr id="1" name=""/>
@@ -4244,6 +10483,66 @@
           <a:chExt cx="0" cy="0"/>
         </a:xfrm>
       </p:grpSpPr>
+      <p:sp useBgFill="1">
+        <p:nvSpPr>
+          <p:cNvPr id="16" name="Rectangle 15">
+            <a:extLst>
+              <a:ext uri="{FF2B5EF4-FFF2-40B4-BE49-F238E27FC236}">
+                <a16:creationId xmlns:a16="http://schemas.microsoft.com/office/drawing/2014/main" id="{5AC1364A-3E3D-4F0D-8776-78AF3A270DD6}"/>
+              </a:ext>
+              <a:ext uri="{C183D7F6-B498-43B3-948B-1728B52AA6E4}">
+                <adec:decorative xmlns:adec="http://schemas.microsoft.com/office/drawing/2017/decorative" val="1"/>
+              </a:ext>
+            </a:extLst>
+          </p:cNvPr>
+          <p:cNvSpPr>
+            <a:spLocks noGrp="1" noRot="1" noChangeAspect="1" noMove="1" noResize="1" noEditPoints="1" noAdjustHandles="1" noChangeArrowheads="1" noChangeShapeType="1" noTextEdit="1"/>
+          </p:cNvSpPr>
+          <p:nvPr>
+            <p:extLst>
+              <p:ext uri="{386F3935-93C4-4BCD-93E2-E3B085C9AB24}">
+                <p16:designElem xmlns:p16="http://schemas.microsoft.com/office/powerpoint/2015/main" val="1"/>
+              </p:ext>
+            </p:extLst>
+          </p:nvPr>
+        </p:nvSpPr>
+        <p:spPr>
+          <a:xfrm>
+            <a:off x="0" y="0"/>
+            <a:ext cx="12188952" cy="6858000"/>
+          </a:xfrm>
+          <a:prstGeom prst="rect">
+            <a:avLst/>
+          </a:prstGeom>
+          <a:ln>
+            <a:noFill/>
+          </a:ln>
+        </p:spPr>
+        <p:style>
+          <a:lnRef idx="2">
+            <a:schemeClr val="accent1">
+              <a:shade val="50000"/>
+            </a:schemeClr>
+          </a:lnRef>
+          <a:fillRef idx="1">
+            <a:schemeClr val="accent1"/>
+          </a:fillRef>
+          <a:effectRef idx="0">
+            <a:schemeClr val="accent1"/>
+          </a:effectRef>
+          <a:fontRef idx="minor">
+            <a:schemeClr val="lt1"/>
+          </a:fontRef>
+        </p:style>
+        <p:txBody>
+          <a:bodyPr rtlCol="0" anchor="ctr"/>
+          <a:lstStyle/>
+          <a:p>
+            <a:pPr algn="ctr"/>
+            <a:endParaRPr lang="en-US"/>
+          </a:p>
+        </p:txBody>
+      </p:sp>
       <p:sp>
         <p:nvSpPr>
           <p:cNvPr id="2" name="Title 1">
@@ -4260,18 +10559,440 @@
             <p:ph type="title"/>
           </p:nvPr>
         </p:nvSpPr>
-        <p:spPr/>
+        <p:spPr>
+          <a:xfrm>
+            <a:off x="4797501" y="329184"/>
+            <a:ext cx="6755626" cy="1783080"/>
+          </a:xfrm>
+        </p:spPr>
         <p:txBody>
-          <a:bodyPr/>
+          <a:bodyPr anchor="b">
+            <a:normAutofit/>
+          </a:bodyPr>
           <a:lstStyle/>
           <a:p>
             <a:r>
-              <a:rPr lang="en-US" dirty="0"/>
+              <a:rPr lang="en-US" sz="5400"/>
               <a:t>Unsupervised Anomaly Detection </a:t>
             </a:r>
           </a:p>
         </p:txBody>
       </p:sp>
+      <p:pic>
+        <p:nvPicPr>
+          <p:cNvPr id="5" name="Picture 4">
+            <a:extLst>
+              <a:ext uri="{FF2B5EF4-FFF2-40B4-BE49-F238E27FC236}">
+                <a16:creationId xmlns:a16="http://schemas.microsoft.com/office/drawing/2014/main" id="{EDCA9E1D-D4EC-F3E5-1F5E-5B0D5B8ADE01}"/>
+              </a:ext>
+            </a:extLst>
+          </p:cNvPr>
+          <p:cNvPicPr>
+            <a:picLocks noChangeAspect="1"/>
+          </p:cNvPicPr>
+          <p:nvPr/>
+        </p:nvPicPr>
+        <p:blipFill>
+          <a:blip r:embed="rId2">
+            <a:extLst>
+              <a:ext uri="{28A0092B-C50C-407E-A947-70E740481C1C}">
+                <a14:useLocalDpi xmlns:a14="http://schemas.microsoft.com/office/drawing/2010/main" val="0"/>
+              </a:ext>
+            </a:extLst>
+          </a:blip>
+          <a:stretch>
+            <a:fillRect/>
+          </a:stretch>
+        </p:blipFill>
+        <p:spPr>
+          <a:xfrm>
+            <a:off x="320040" y="789645"/>
+            <a:ext cx="4014216" cy="2328245"/>
+          </a:xfrm>
+          <a:prstGeom prst="rect">
+            <a:avLst/>
+          </a:prstGeom>
+        </p:spPr>
+      </p:pic>
+      <p:sp>
+        <p:nvSpPr>
+          <p:cNvPr id="17" name="sketchy line">
+            <a:extLst>
+              <a:ext uri="{FF2B5EF4-FFF2-40B4-BE49-F238E27FC236}">
+                <a16:creationId xmlns:a16="http://schemas.microsoft.com/office/drawing/2014/main" id="{3FCFB1DE-0B7E-48CC-BA90-B2AB0889F9D6}"/>
+              </a:ext>
+              <a:ext uri="{C183D7F6-B498-43B3-948B-1728B52AA6E4}">
+                <adec:decorative xmlns:adec="http://schemas.microsoft.com/office/drawing/2017/decorative" val="1"/>
+              </a:ext>
+            </a:extLst>
+          </p:cNvPr>
+          <p:cNvSpPr>
+            <a:spLocks noGrp="1" noRot="1" noChangeAspect="1" noMove="1" noResize="1" noEditPoints="1" noAdjustHandles="1" noChangeArrowheads="1" noChangeShapeType="1" noTextEdit="1"/>
+          </p:cNvSpPr>
+          <p:nvPr>
+            <p:extLst>
+              <p:ext uri="{386F3935-93C4-4BCD-93E2-E3B085C9AB24}">
+                <p16:designElem xmlns:p16="http://schemas.microsoft.com/office/powerpoint/2015/main" val="1"/>
+              </p:ext>
+            </p:extLst>
+          </p:nvPr>
+        </p:nvSpPr>
+        <p:spPr>
+          <a:xfrm>
+            <a:off x="4797494" y="2395728"/>
+            <a:ext cx="4243589" cy="18288"/>
+          </a:xfrm>
+          <a:custGeom>
+            <a:avLst/>
+            <a:gdLst>
+              <a:gd name="csX0" fmla="*/ 0 w 4243589"/>
+              <a:gd name="csY0" fmla="*/ 0 h 18288"/>
+              <a:gd name="csX1" fmla="*/ 478919 w 4243589"/>
+              <a:gd name="csY1" fmla="*/ 0 h 18288"/>
+              <a:gd name="csX2" fmla="*/ 957839 w 4243589"/>
+              <a:gd name="csY2" fmla="*/ 0 h 18288"/>
+              <a:gd name="csX3" fmla="*/ 1521630 w 4243589"/>
+              <a:gd name="csY3" fmla="*/ 0 h 18288"/>
+              <a:gd name="csX4" fmla="*/ 2212729 w 4243589"/>
+              <a:gd name="csY4" fmla="*/ 0 h 18288"/>
+              <a:gd name="csX5" fmla="*/ 2734084 w 4243589"/>
+              <a:gd name="csY5" fmla="*/ 0 h 18288"/>
+              <a:gd name="csX6" fmla="*/ 3255439 w 4243589"/>
+              <a:gd name="csY6" fmla="*/ 0 h 18288"/>
+              <a:gd name="csX7" fmla="*/ 4243589 w 4243589"/>
+              <a:gd name="csY7" fmla="*/ 0 h 18288"/>
+              <a:gd name="csX8" fmla="*/ 4243589 w 4243589"/>
+              <a:gd name="csY8" fmla="*/ 18288 h 18288"/>
+              <a:gd name="csX9" fmla="*/ 3594926 w 4243589"/>
+              <a:gd name="csY9" fmla="*/ 18288 h 18288"/>
+              <a:gd name="csX10" fmla="*/ 3073571 w 4243589"/>
+              <a:gd name="csY10" fmla="*/ 18288 h 18288"/>
+              <a:gd name="csX11" fmla="*/ 2552216 w 4243589"/>
+              <a:gd name="csY11" fmla="*/ 18288 h 18288"/>
+              <a:gd name="csX12" fmla="*/ 1903553 w 4243589"/>
+              <a:gd name="csY12" fmla="*/ 18288 h 18288"/>
+              <a:gd name="csX13" fmla="*/ 1212454 w 4243589"/>
+              <a:gd name="csY13" fmla="*/ 18288 h 18288"/>
+              <a:gd name="csX14" fmla="*/ 733535 w 4243589"/>
+              <a:gd name="csY14" fmla="*/ 18288 h 18288"/>
+              <a:gd name="csX15" fmla="*/ 0 w 4243589"/>
+              <a:gd name="csY15" fmla="*/ 18288 h 18288"/>
+              <a:gd name="csX16" fmla="*/ 0 w 4243589"/>
+              <a:gd name="csY16" fmla="*/ 0 h 18288"/>
+            </a:gdLst>
+            <a:ahLst/>
+            <a:cxnLst>
+              <a:cxn ang="0">
+                <a:pos x="csX0" y="csY0"/>
+              </a:cxn>
+              <a:cxn ang="0">
+                <a:pos x="csX1" y="csY1"/>
+              </a:cxn>
+              <a:cxn ang="0">
+                <a:pos x="csX2" y="csY2"/>
+              </a:cxn>
+              <a:cxn ang="0">
+                <a:pos x="csX3" y="csY3"/>
+              </a:cxn>
+              <a:cxn ang="0">
+                <a:pos x="csX4" y="csY4"/>
+              </a:cxn>
+              <a:cxn ang="0">
+                <a:pos x="csX5" y="csY5"/>
+              </a:cxn>
+              <a:cxn ang="0">
+                <a:pos x="csX6" y="csY6"/>
+              </a:cxn>
+              <a:cxn ang="0">
+                <a:pos x="csX7" y="csY7"/>
+              </a:cxn>
+              <a:cxn ang="0">
+                <a:pos x="csX8" y="csY8"/>
+              </a:cxn>
+              <a:cxn ang="0">
+                <a:pos x="csX9" y="csY9"/>
+              </a:cxn>
+              <a:cxn ang="0">
+                <a:pos x="csX10" y="csY10"/>
+              </a:cxn>
+              <a:cxn ang="0">
+                <a:pos x="csX11" y="csY11"/>
+              </a:cxn>
+              <a:cxn ang="0">
+                <a:pos x="csX12" y="csY12"/>
+              </a:cxn>
+              <a:cxn ang="0">
+                <a:pos x="csX13" y="csY13"/>
+              </a:cxn>
+              <a:cxn ang="0">
+                <a:pos x="csX14" y="csY14"/>
+              </a:cxn>
+              <a:cxn ang="0">
+                <a:pos x="csX15" y="csY15"/>
+              </a:cxn>
+              <a:cxn ang="0">
+                <a:pos x="csX16" y="csY16"/>
+              </a:cxn>
+            </a:cxnLst>
+            <a:rect l="l" t="t" r="r" b="b"/>
+            <a:pathLst>
+              <a:path w="4243589" h="18288" fill="none" extrusionOk="0">
+                <a:moveTo>
+                  <a:pt x="0" y="0"/>
+                </a:moveTo>
+                <a:cubicBezTo>
+                  <a:pt x="213395" y="-21006"/>
+                  <a:pt x="307421" y="-18116"/>
+                  <a:pt x="478919" y="0"/>
+                </a:cubicBezTo>
+                <a:cubicBezTo>
+                  <a:pt x="650417" y="18116"/>
+                  <a:pt x="831092" y="-21237"/>
+                  <a:pt x="957839" y="0"/>
+                </a:cubicBezTo>
+                <a:cubicBezTo>
+                  <a:pt x="1084586" y="21237"/>
+                  <a:pt x="1301682" y="25124"/>
+                  <a:pt x="1521630" y="0"/>
+                </a:cubicBezTo>
+                <a:cubicBezTo>
+                  <a:pt x="1741578" y="-25124"/>
+                  <a:pt x="1970269" y="-29139"/>
+                  <a:pt x="2212729" y="0"/>
+                </a:cubicBezTo>
+                <a:cubicBezTo>
+                  <a:pt x="2455189" y="29139"/>
+                  <a:pt x="2558847" y="-4796"/>
+                  <a:pt x="2734084" y="0"/>
+                </a:cubicBezTo>
+                <a:cubicBezTo>
+                  <a:pt x="2909321" y="4796"/>
+                  <a:pt x="3097217" y="-13409"/>
+                  <a:pt x="3255439" y="0"/>
+                </a:cubicBezTo>
+                <a:cubicBezTo>
+                  <a:pt x="3413662" y="13409"/>
+                  <a:pt x="3979999" y="-10121"/>
+                  <a:pt x="4243589" y="0"/>
+                </a:cubicBezTo>
+                <a:cubicBezTo>
+                  <a:pt x="4244484" y="8974"/>
+                  <a:pt x="4243043" y="9359"/>
+                  <a:pt x="4243589" y="18288"/>
+                </a:cubicBezTo>
+                <a:cubicBezTo>
+                  <a:pt x="4058777" y="31246"/>
+                  <a:pt x="3910348" y="3158"/>
+                  <a:pt x="3594926" y="18288"/>
+                </a:cubicBezTo>
+                <a:cubicBezTo>
+                  <a:pt x="3279504" y="33418"/>
+                  <a:pt x="3319955" y="-3977"/>
+                  <a:pt x="3073571" y="18288"/>
+                </a:cubicBezTo>
+                <a:cubicBezTo>
+                  <a:pt x="2827187" y="40553"/>
+                  <a:pt x="2767387" y="1863"/>
+                  <a:pt x="2552216" y="18288"/>
+                </a:cubicBezTo>
+                <a:cubicBezTo>
+                  <a:pt x="2337046" y="34713"/>
+                  <a:pt x="2181871" y="19527"/>
+                  <a:pt x="1903553" y="18288"/>
+                </a:cubicBezTo>
+                <a:cubicBezTo>
+                  <a:pt x="1625235" y="17049"/>
+                  <a:pt x="1557672" y="24174"/>
+                  <a:pt x="1212454" y="18288"/>
+                </a:cubicBezTo>
+                <a:cubicBezTo>
+                  <a:pt x="867236" y="12402"/>
+                  <a:pt x="874382" y="15627"/>
+                  <a:pt x="733535" y="18288"/>
+                </a:cubicBezTo>
+                <a:cubicBezTo>
+                  <a:pt x="592688" y="20949"/>
+                  <a:pt x="183477" y="14753"/>
+                  <a:pt x="0" y="18288"/>
+                </a:cubicBezTo>
+                <a:cubicBezTo>
+                  <a:pt x="-229" y="14222"/>
+                  <a:pt x="509" y="5816"/>
+                  <a:pt x="0" y="0"/>
+                </a:cubicBezTo>
+                <a:close/>
+              </a:path>
+              <a:path w="4243589" h="18288" stroke="0" extrusionOk="0">
+                <a:moveTo>
+                  <a:pt x="0" y="0"/>
+                </a:moveTo>
+                <a:cubicBezTo>
+                  <a:pt x="143690" y="16630"/>
+                  <a:pt x="266667" y="14847"/>
+                  <a:pt x="521355" y="0"/>
+                </a:cubicBezTo>
+                <a:cubicBezTo>
+                  <a:pt x="776043" y="-14847"/>
+                  <a:pt x="814491" y="-17363"/>
+                  <a:pt x="1000275" y="0"/>
+                </a:cubicBezTo>
+                <a:cubicBezTo>
+                  <a:pt x="1186059" y="17363"/>
+                  <a:pt x="1352504" y="-23507"/>
+                  <a:pt x="1521630" y="0"/>
+                </a:cubicBezTo>
+                <a:cubicBezTo>
+                  <a:pt x="1690756" y="23507"/>
+                  <a:pt x="1889525" y="5871"/>
+                  <a:pt x="2127857" y="0"/>
+                </a:cubicBezTo>
+                <a:cubicBezTo>
+                  <a:pt x="2366189" y="-5871"/>
+                  <a:pt x="2620628" y="-27997"/>
+                  <a:pt x="2776520" y="0"/>
+                </a:cubicBezTo>
+                <a:cubicBezTo>
+                  <a:pt x="2932412" y="27997"/>
+                  <a:pt x="3131683" y="-25073"/>
+                  <a:pt x="3467618" y="0"/>
+                </a:cubicBezTo>
+                <a:cubicBezTo>
+                  <a:pt x="3803553" y="25073"/>
+                  <a:pt x="4017371" y="3071"/>
+                  <a:pt x="4243589" y="0"/>
+                </a:cubicBezTo>
+                <a:cubicBezTo>
+                  <a:pt x="4243134" y="6162"/>
+                  <a:pt x="4243492" y="11775"/>
+                  <a:pt x="4243589" y="18288"/>
+                </a:cubicBezTo>
+                <a:cubicBezTo>
+                  <a:pt x="4017834" y="-5779"/>
+                  <a:pt x="3834586" y="13376"/>
+                  <a:pt x="3594926" y="18288"/>
+                </a:cubicBezTo>
+                <a:cubicBezTo>
+                  <a:pt x="3355266" y="23200"/>
+                  <a:pt x="3204179" y="2869"/>
+                  <a:pt x="2903827" y="18288"/>
+                </a:cubicBezTo>
+                <a:cubicBezTo>
+                  <a:pt x="2603475" y="33707"/>
+                  <a:pt x="2526187" y="46187"/>
+                  <a:pt x="2212729" y="18288"/>
+                </a:cubicBezTo>
+                <a:cubicBezTo>
+                  <a:pt x="1899271" y="-9611"/>
+                  <a:pt x="1966289" y="29692"/>
+                  <a:pt x="1733809" y="18288"/>
+                </a:cubicBezTo>
+                <a:cubicBezTo>
+                  <a:pt x="1501329" y="6884"/>
+                  <a:pt x="1343612" y="12492"/>
+                  <a:pt x="1085146" y="18288"/>
+                </a:cubicBezTo>
+                <a:cubicBezTo>
+                  <a:pt x="826680" y="24084"/>
+                  <a:pt x="778184" y="35607"/>
+                  <a:pt x="521355" y="18288"/>
+                </a:cubicBezTo>
+                <a:cubicBezTo>
+                  <a:pt x="264526" y="969"/>
+                  <a:pt x="120277" y="4268"/>
+                  <a:pt x="0" y="18288"/>
+                </a:cubicBezTo>
+                <a:cubicBezTo>
+                  <a:pt x="766" y="10800"/>
+                  <a:pt x="-457" y="8180"/>
+                  <a:pt x="0" y="0"/>
+                </a:cubicBezTo>
+                <a:close/>
+              </a:path>
+            </a:pathLst>
+          </a:custGeom>
+          <a:solidFill>
+            <a:schemeClr val="accent2"/>
+          </a:solidFill>
+          <a:ln w="41275" cap="rnd">
+            <a:solidFill>
+              <a:schemeClr val="accent2"/>
+            </a:solidFill>
+            <a:round/>
+            <a:extLst>
+              <a:ext uri="{C807C97D-BFC1-408E-A445-0C87EB9F89A2}">
+                <ask:lineSketchStyleProps xmlns:ask="http://schemas.microsoft.com/office/drawing/2018/sketchyshapes" sd="2727557108">
+                  <a:prstGeom prst="rect">
+                    <a:avLst/>
+                  </a:prstGeom>
+                  <ask:type>
+                    <ask:lineSketchFreehand/>
+                  </ask:type>
+                </ask:lineSketchStyleProps>
+              </a:ext>
+            </a:extLst>
+          </a:ln>
+        </p:spPr>
+        <p:style>
+          <a:lnRef idx="2">
+            <a:schemeClr val="accent1">
+              <a:shade val="50000"/>
+            </a:schemeClr>
+          </a:lnRef>
+          <a:fillRef idx="1">
+            <a:schemeClr val="accent1"/>
+          </a:fillRef>
+          <a:effectRef idx="0">
+            <a:schemeClr val="accent1"/>
+          </a:effectRef>
+          <a:fontRef idx="minor">
+            <a:schemeClr val="lt1"/>
+          </a:fontRef>
+        </p:style>
+        <p:txBody>
+          <a:bodyPr rtlCol="0" anchor="ctr"/>
+          <a:lstStyle/>
+          <a:p>
+            <a:pPr algn="ctr"/>
+            <a:endParaRPr lang="en-US"/>
+          </a:p>
+        </p:txBody>
+      </p:sp>
+      <p:pic>
+        <p:nvPicPr>
+          <p:cNvPr id="7" name="Picture 6">
+            <a:extLst>
+              <a:ext uri="{FF2B5EF4-FFF2-40B4-BE49-F238E27FC236}">
+                <a16:creationId xmlns:a16="http://schemas.microsoft.com/office/drawing/2014/main" id="{8872E0E6-1585-7902-E2A7-A0E9BD09C847}"/>
+              </a:ext>
+            </a:extLst>
+          </p:cNvPr>
+          <p:cNvPicPr>
+            <a:picLocks noChangeAspect="1"/>
+          </p:cNvPicPr>
+          <p:nvPr/>
+        </p:nvPicPr>
+        <p:blipFill>
+          <a:blip r:embed="rId3">
+            <a:extLst>
+              <a:ext uri="{28A0092B-C50C-407E-A947-70E740481C1C}">
+                <a14:useLocalDpi xmlns:a14="http://schemas.microsoft.com/office/drawing/2010/main" val="0"/>
+              </a:ext>
+            </a:extLst>
+          </a:blip>
+          <a:stretch>
+            <a:fillRect/>
+          </a:stretch>
+        </p:blipFill>
+        <p:spPr>
+          <a:xfrm>
+            <a:off x="392498" y="4149598"/>
+            <a:ext cx="3851012" cy="2098802"/>
+          </a:xfrm>
+          <a:prstGeom prst="rect">
+            <a:avLst/>
+          </a:prstGeom>
+        </p:spPr>
+      </p:pic>
       <p:sp>
         <p:nvSpPr>
           <p:cNvPr id="3" name="Content Placeholder 2">
@@ -4288,110 +11009,43 @@
             <p:ph idx="1"/>
           </p:nvPr>
         </p:nvSpPr>
-        <p:spPr/>
+        <p:spPr>
+          <a:xfrm>
+            <a:off x="4797494" y="2706624"/>
+            <a:ext cx="6755626" cy="3483864"/>
+          </a:xfrm>
+        </p:spPr>
         <p:txBody>
           <a:bodyPr>
-            <a:normAutofit fontScale="92500" lnSpcReduction="20000"/>
+            <a:normAutofit/>
           </a:bodyPr>
           <a:lstStyle/>
           <a:p>
             <a:r>
-              <a:rPr lang="en-US" dirty="0"/>
+              <a:rPr lang="en-US" sz="1700"/>
               <a:t>Hypothesis: Cinderellas would be identified as distinct outliers among other low seeded teams.</a:t>
             </a:r>
           </a:p>
           <a:p>
-            <a:endParaRPr lang="en-US" dirty="0"/>
+            <a:endParaRPr lang="en-US" sz="1700"/>
           </a:p>
           <a:p>
             <a:r>
-              <a:rPr lang="en-US" dirty="0"/>
+              <a:rPr lang="en-US" sz="1700"/>
               <a:t>Reality: Isolation Forest showed that Cinderellas were mostly statistically normal to other lower ranked seeds and lacked significant variance.</a:t>
             </a:r>
           </a:p>
           <a:p>
-            <a:endParaRPr lang="en-US" dirty="0"/>
+            <a:endParaRPr lang="en-US" sz="1700"/>
           </a:p>
           <a:p>
             <a:r>
-              <a:rPr lang="en-US" dirty="0"/>
+              <a:rPr lang="en-US" sz="1700"/>
               <a:t>However, the Gaussian Mixed Model (GMM) was able to group teams into 4 distinct archetypes. It successfully grouped 82% of historical Cinderella teams into a high performing archetype (Cluster 2) where many higher ranked teams are. This suggests that they distinct enough to be identified as different from the average lower seed.</a:t>
             </a:r>
           </a:p>
         </p:txBody>
       </p:sp>
-      <p:pic>
-        <p:nvPicPr>
-          <p:cNvPr id="5" name="Picture 4">
-            <a:extLst>
-              <a:ext uri="{FF2B5EF4-FFF2-40B4-BE49-F238E27FC236}">
-                <a16:creationId xmlns:a16="http://schemas.microsoft.com/office/drawing/2014/main" id="{EDCA9E1D-D4EC-F3E5-1F5E-5B0D5B8ADE01}"/>
-              </a:ext>
-            </a:extLst>
-          </p:cNvPr>
-          <p:cNvPicPr>
-            <a:picLocks noChangeAspect="1"/>
-          </p:cNvPicPr>
-          <p:nvPr/>
-        </p:nvPicPr>
-        <p:blipFill>
-          <a:blip r:embed="rId2">
-            <a:extLst>
-              <a:ext uri="{28A0092B-C50C-407E-A947-70E740481C1C}">
-                <a14:useLocalDpi xmlns:a14="http://schemas.microsoft.com/office/drawing/2010/main" val="0"/>
-              </a:ext>
-            </a:extLst>
-          </a:blip>
-          <a:stretch>
-            <a:fillRect/>
-          </a:stretch>
-        </p:blipFill>
-        <p:spPr>
-          <a:xfrm>
-            <a:off x="2170158" y="4399477"/>
-            <a:ext cx="3607319" cy="2093398"/>
-          </a:xfrm>
-          <a:prstGeom prst="rect">
-            <a:avLst/>
-          </a:prstGeom>
-        </p:spPr>
-      </p:pic>
-      <p:pic>
-        <p:nvPicPr>
-          <p:cNvPr id="7" name="Picture 6">
-            <a:extLst>
-              <a:ext uri="{FF2B5EF4-FFF2-40B4-BE49-F238E27FC236}">
-                <a16:creationId xmlns:a16="http://schemas.microsoft.com/office/drawing/2014/main" id="{8872E0E6-1585-7902-E2A7-A0E9BD09C847}"/>
-              </a:ext>
-            </a:extLst>
-          </p:cNvPr>
-          <p:cNvPicPr>
-            <a:picLocks noChangeAspect="1"/>
-          </p:cNvPicPr>
-          <p:nvPr/>
-        </p:nvPicPr>
-        <p:blipFill>
-          <a:blip r:embed="rId3">
-            <a:extLst>
-              <a:ext uri="{28A0092B-C50C-407E-A947-70E740481C1C}">
-                <a14:useLocalDpi xmlns:a14="http://schemas.microsoft.com/office/drawing/2010/main" val="0"/>
-              </a:ext>
-            </a:extLst>
-          </a:blip>
-          <a:stretch>
-            <a:fillRect/>
-          </a:stretch>
-        </p:blipFill>
-        <p:spPr>
-          <a:xfrm>
-            <a:off x="7286235" y="4781048"/>
-            <a:ext cx="2558807" cy="1395915"/>
-          </a:xfrm>
-          <a:prstGeom prst="rect">
-            <a:avLst/>
-          </a:prstGeom>
-        </p:spPr>
-      </p:pic>
     </p:spTree>
     <p:extLst>
       <p:ext uri="{BB962C8B-B14F-4D97-AF65-F5344CB8AC3E}">
@@ -4503,6 +11157,14 @@
 <file path=ppt/slides/slide9.xml><?xml version="1.0" encoding="utf-8"?>
 <p:sld xmlns:a="http://schemas.openxmlformats.org/drawingml/2006/main" xmlns:r="http://schemas.openxmlformats.org/officeDocument/2006/relationships" xmlns:p="http://schemas.openxmlformats.org/presentationml/2006/main">
   <p:cSld>
+    <p:bg>
+      <p:bgPr>
+        <a:solidFill>
+          <a:schemeClr val="bg1"/>
+        </a:solidFill>
+        <a:effectLst/>
+      </p:bgPr>
+    </p:bg>
     <p:spTree>
       <p:nvGrpSpPr>
         <p:cNvPr id="1" name=""/>
@@ -4517,6 +11179,526 @@
           <a:chExt cx="0" cy="0"/>
         </a:xfrm>
       </p:grpSpPr>
+      <p:sp useBgFill="1">
+        <p:nvSpPr>
+          <p:cNvPr id="21" name="Rectangle 20">
+            <a:extLst>
+              <a:ext uri="{FF2B5EF4-FFF2-40B4-BE49-F238E27FC236}">
+                <a16:creationId xmlns:a16="http://schemas.microsoft.com/office/drawing/2014/main" id="{6F5A5072-7B47-4D32-B52A-4EBBF590B8A5}"/>
+              </a:ext>
+              <a:ext uri="{C183D7F6-B498-43B3-948B-1728B52AA6E4}">
+                <adec:decorative xmlns:adec="http://schemas.microsoft.com/office/drawing/2017/decorative" val="1"/>
+              </a:ext>
+            </a:extLst>
+          </p:cNvPr>
+          <p:cNvSpPr>
+            <a:spLocks noGrp="1" noRot="1" noChangeAspect="1" noMove="1" noResize="1" noEditPoints="1" noAdjustHandles="1" noChangeArrowheads="1" noChangeShapeType="1" noTextEdit="1"/>
+          </p:cNvSpPr>
+          <p:nvPr>
+            <p:extLst>
+              <p:ext uri="{386F3935-93C4-4BCD-93E2-E3B085C9AB24}">
+                <p16:designElem xmlns:p16="http://schemas.microsoft.com/office/powerpoint/2015/main" val="1"/>
+              </p:ext>
+            </p:extLst>
+          </p:nvPr>
+        </p:nvSpPr>
+        <p:spPr>
+          <a:xfrm>
+            <a:off x="0" y="0"/>
+            <a:ext cx="12192000" cy="6858000"/>
+          </a:xfrm>
+          <a:prstGeom prst="rect">
+            <a:avLst/>
+          </a:prstGeom>
+          <a:ln w="12700" cap="flat" cmpd="sng" algn="ctr">
+            <a:noFill/>
+            <a:prstDash val="solid"/>
+            <a:miter lim="800000"/>
+          </a:ln>
+          <a:effectLst/>
+          <a:extLst>
+            <a:ext uri="{91240B29-F687-4F45-9708-019B960494DF}">
+              <a14:hiddenLine xmlns:a14="http://schemas.microsoft.com/office/drawing/2010/main" w="12700" cap="flat" cmpd="sng" algn="ctr">
+                <a:solidFill>
+                  <a:schemeClr val="accent1">
+                    <a:shade val="50000"/>
+                  </a:schemeClr>
+                </a:solidFill>
+                <a:prstDash val="solid"/>
+                <a:miter lim="800000"/>
+              </a14:hiddenLine>
+            </a:ext>
+          </a:extLst>
+        </p:spPr>
+        <p:style>
+          <a:lnRef idx="2">
+            <a:schemeClr val="accent1">
+              <a:shade val="50000"/>
+            </a:schemeClr>
+          </a:lnRef>
+          <a:fillRef idx="1">
+            <a:schemeClr val="accent1"/>
+          </a:fillRef>
+          <a:effectRef idx="0">
+            <a:schemeClr val="accent1"/>
+          </a:effectRef>
+          <a:fontRef idx="minor">
+            <a:schemeClr val="lt1"/>
+          </a:fontRef>
+        </p:style>
+        <p:txBody>
+          <a:bodyPr rtlCol="0" anchor="ctr"/>
+          <a:lstStyle/>
+          <a:p>
+            <a:pPr algn="ctr"/>
+            <a:endParaRPr lang="en-US"/>
+          </a:p>
+        </p:txBody>
+      </p:sp>
+      <p:sp>
+        <p:nvSpPr>
+          <p:cNvPr id="23" name="Rectangle 22">
+            <a:extLst>
+              <a:ext uri="{FF2B5EF4-FFF2-40B4-BE49-F238E27FC236}">
+                <a16:creationId xmlns:a16="http://schemas.microsoft.com/office/drawing/2014/main" id="{9715DAF0-AE1B-46C9-8A6B-DB2AA05AB91D}"/>
+              </a:ext>
+              <a:ext uri="{C183D7F6-B498-43B3-948B-1728B52AA6E4}">
+                <adec:decorative xmlns:adec="http://schemas.microsoft.com/office/drawing/2017/decorative" val="1"/>
+              </a:ext>
+            </a:extLst>
+          </p:cNvPr>
+          <p:cNvSpPr>
+            <a:spLocks noGrp="1" noRot="1" noChangeAspect="1" noMove="1" noResize="1" noEditPoints="1" noAdjustHandles="1" noChangeArrowheads="1" noChangeShapeType="1" noTextEdit="1"/>
+          </p:cNvSpPr>
+          <p:nvPr>
+            <p:extLst>
+              <p:ext uri="{386F3935-93C4-4BCD-93E2-E3B085C9AB24}">
+                <p16:designElem xmlns:p16="http://schemas.microsoft.com/office/powerpoint/2015/main" val="1"/>
+              </p:ext>
+            </p:extLst>
+          </p:nvPr>
+        </p:nvSpPr>
+        <p:spPr>
+          <a:xfrm rot="10800000">
+            <a:off x="-2" y="-22693"/>
+            <a:ext cx="12191999" cy="4374129"/>
+          </a:xfrm>
+          <a:prstGeom prst="rect">
+            <a:avLst/>
+          </a:prstGeom>
+          <a:gradFill>
+            <a:gsLst>
+              <a:gs pos="0">
+                <a:schemeClr val="accent1">
+                  <a:lumMod val="75000"/>
+                </a:schemeClr>
+              </a:gs>
+              <a:gs pos="100000">
+                <a:srgbClr val="000000"/>
+              </a:gs>
+            </a:gsLst>
+            <a:lin ang="15000000" scaled="0"/>
+          </a:gradFill>
+          <a:ln>
+            <a:noFill/>
+          </a:ln>
+        </p:spPr>
+        <p:style>
+          <a:lnRef idx="2">
+            <a:schemeClr val="accent1">
+              <a:shade val="50000"/>
+            </a:schemeClr>
+          </a:lnRef>
+          <a:fillRef idx="1">
+            <a:schemeClr val="accent1"/>
+          </a:fillRef>
+          <a:effectRef idx="0">
+            <a:schemeClr val="accent1"/>
+          </a:effectRef>
+          <a:fontRef idx="minor">
+            <a:schemeClr val="lt1"/>
+          </a:fontRef>
+        </p:style>
+        <p:txBody>
+          <a:bodyPr rtlCol="0" anchor="ctr"/>
+          <a:lstStyle/>
+          <a:p>
+            <a:pPr algn="ctr"/>
+            <a:endParaRPr lang="en-US"/>
+          </a:p>
+        </p:txBody>
+      </p:sp>
+      <p:sp>
+        <p:nvSpPr>
+          <p:cNvPr id="25" name="Rectangle 24">
+            <a:extLst>
+              <a:ext uri="{FF2B5EF4-FFF2-40B4-BE49-F238E27FC236}">
+                <a16:creationId xmlns:a16="http://schemas.microsoft.com/office/drawing/2014/main" id="{6016219D-510E-4184-9090-6D5578A87BD1}"/>
+              </a:ext>
+              <a:ext uri="{C183D7F6-B498-43B3-948B-1728B52AA6E4}">
+                <adec:decorative xmlns:adec="http://schemas.microsoft.com/office/drawing/2017/decorative" val="1"/>
+              </a:ext>
+            </a:extLst>
+          </p:cNvPr>
+          <p:cNvSpPr>
+            <a:spLocks noGrp="1" noRot="1" noChangeAspect="1" noMove="1" noResize="1" noEditPoints="1" noAdjustHandles="1" noChangeArrowheads="1" noChangeShapeType="1" noTextEdit="1"/>
+          </p:cNvSpPr>
+          <p:nvPr>
+            <p:extLst>
+              <p:ext uri="{386F3935-93C4-4BCD-93E2-E3B085C9AB24}">
+                <p16:designElem xmlns:p16="http://schemas.microsoft.com/office/powerpoint/2015/main" val="1"/>
+              </p:ext>
+            </p:extLst>
+          </p:nvPr>
+        </p:nvSpPr>
+        <p:spPr>
+          <a:xfrm rot="5400000">
+            <a:off x="3908719" y="-3931841"/>
+            <a:ext cx="4374557" cy="12192000"/>
+          </a:xfrm>
+          <a:prstGeom prst="rect">
+            <a:avLst/>
+          </a:prstGeom>
+          <a:gradFill>
+            <a:gsLst>
+              <a:gs pos="40000">
+                <a:schemeClr val="accent1">
+                  <a:alpha val="0"/>
+                </a:schemeClr>
+              </a:gs>
+              <a:gs pos="100000">
+                <a:schemeClr val="accent1">
+                  <a:lumMod val="75000"/>
+                  <a:alpha val="52000"/>
+                </a:schemeClr>
+              </a:gs>
+            </a:gsLst>
+            <a:lin ang="2400000" scaled="0"/>
+          </a:gradFill>
+          <a:ln>
+            <a:noFill/>
+          </a:ln>
+        </p:spPr>
+        <p:style>
+          <a:lnRef idx="2">
+            <a:schemeClr val="accent1">
+              <a:shade val="50000"/>
+            </a:schemeClr>
+          </a:lnRef>
+          <a:fillRef idx="1">
+            <a:schemeClr val="accent1"/>
+          </a:fillRef>
+          <a:effectRef idx="0">
+            <a:schemeClr val="accent1"/>
+          </a:effectRef>
+          <a:fontRef idx="minor">
+            <a:schemeClr val="lt1"/>
+          </a:fontRef>
+        </p:style>
+        <p:txBody>
+          <a:bodyPr rtlCol="0" anchor="ctr"/>
+          <a:lstStyle/>
+          <a:p>
+            <a:pPr algn="ctr"/>
+            <a:endParaRPr lang="en-US"/>
+          </a:p>
+        </p:txBody>
+      </p:sp>
+      <p:sp>
+        <p:nvSpPr>
+          <p:cNvPr id="27" name="Rectangle 26">
+            <a:extLst>
+              <a:ext uri="{FF2B5EF4-FFF2-40B4-BE49-F238E27FC236}">
+                <a16:creationId xmlns:a16="http://schemas.microsoft.com/office/drawing/2014/main" id="{AFF4A713-7B75-4B21-90D7-5AB19547C728}"/>
+              </a:ext>
+              <a:ext uri="{C183D7F6-B498-43B3-948B-1728B52AA6E4}">
+                <adec:decorative xmlns:adec="http://schemas.microsoft.com/office/drawing/2017/decorative" val="1"/>
+              </a:ext>
+            </a:extLst>
+          </p:cNvPr>
+          <p:cNvSpPr>
+            <a:spLocks noGrp="1" noRot="1" noChangeAspect="1" noMove="1" noResize="1" noEditPoints="1" noAdjustHandles="1" noChangeArrowheads="1" noChangeShapeType="1" noTextEdit="1"/>
+          </p:cNvSpPr>
+          <p:nvPr>
+            <p:extLst>
+              <p:ext uri="{386F3935-93C4-4BCD-93E2-E3B085C9AB24}">
+                <p16:designElem xmlns:p16="http://schemas.microsoft.com/office/powerpoint/2015/main" val="1"/>
+              </p:ext>
+            </p:extLst>
+          </p:nvPr>
+        </p:nvSpPr>
+        <p:spPr>
+          <a:xfrm rot="5400000">
+            <a:off x="4136696" y="-3703868"/>
+            <a:ext cx="4374128" cy="11736479"/>
+          </a:xfrm>
+          <a:prstGeom prst="rect">
+            <a:avLst/>
+          </a:prstGeom>
+          <a:gradFill>
+            <a:gsLst>
+              <a:gs pos="17000">
+                <a:schemeClr val="accent1">
+                  <a:alpha val="0"/>
+                </a:schemeClr>
+              </a:gs>
+              <a:gs pos="100000">
+                <a:srgbClr val="000000">
+                  <a:alpha val="37000"/>
+                </a:srgbClr>
+              </a:gs>
+            </a:gsLst>
+            <a:lin ang="7800000" scaled="0"/>
+          </a:gradFill>
+          <a:ln>
+            <a:noFill/>
+          </a:ln>
+        </p:spPr>
+        <p:style>
+          <a:lnRef idx="2">
+            <a:schemeClr val="accent1">
+              <a:shade val="50000"/>
+            </a:schemeClr>
+          </a:lnRef>
+          <a:fillRef idx="1">
+            <a:schemeClr val="accent1"/>
+          </a:fillRef>
+          <a:effectRef idx="0">
+            <a:schemeClr val="accent1"/>
+          </a:effectRef>
+          <a:fontRef idx="minor">
+            <a:schemeClr val="lt1"/>
+          </a:fontRef>
+        </p:style>
+        <p:txBody>
+          <a:bodyPr rtlCol="0" anchor="ctr"/>
+          <a:lstStyle/>
+          <a:p>
+            <a:pPr algn="ctr"/>
+            <a:endParaRPr lang="en-US"/>
+          </a:p>
+        </p:txBody>
+      </p:sp>
+      <p:sp>
+        <p:nvSpPr>
+          <p:cNvPr id="29" name="Rectangle 28">
+            <a:extLst>
+              <a:ext uri="{FF2B5EF4-FFF2-40B4-BE49-F238E27FC236}">
+                <a16:creationId xmlns:a16="http://schemas.microsoft.com/office/drawing/2014/main" id="{DC631C0B-6DA6-4E57-8231-CE32B3434A7E}"/>
+              </a:ext>
+              <a:ext uri="{C183D7F6-B498-43B3-948B-1728B52AA6E4}">
+                <adec:decorative xmlns:adec="http://schemas.microsoft.com/office/drawing/2017/decorative" val="1"/>
+              </a:ext>
+            </a:extLst>
+          </p:cNvPr>
+          <p:cNvSpPr>
+            <a:spLocks noGrp="1" noRot="1" noChangeAspect="1" noMove="1" noResize="1" noEditPoints="1" noAdjustHandles="1" noChangeArrowheads="1" noChangeShapeType="1" noTextEdit="1"/>
+          </p:cNvSpPr>
+          <p:nvPr>
+            <p:extLst>
+              <p:ext uri="{386F3935-93C4-4BCD-93E2-E3B085C9AB24}">
+                <p16:designElem xmlns:p16="http://schemas.microsoft.com/office/powerpoint/2015/main" val="1"/>
+              </p:ext>
+            </p:extLst>
+          </p:nvPr>
+        </p:nvSpPr>
+        <p:spPr>
+          <a:xfrm>
+            <a:off x="-5" y="-22690"/>
+            <a:ext cx="8542485" cy="4374126"/>
+          </a:xfrm>
+          <a:prstGeom prst="rect">
+            <a:avLst/>
+          </a:prstGeom>
+          <a:gradFill>
+            <a:gsLst>
+              <a:gs pos="0">
+                <a:schemeClr val="accent1">
+                  <a:lumMod val="50000"/>
+                  <a:alpha val="0"/>
+                </a:schemeClr>
+              </a:gs>
+              <a:gs pos="100000">
+                <a:srgbClr val="000000">
+                  <a:alpha val="25000"/>
+                </a:srgbClr>
+              </a:gs>
+            </a:gsLst>
+            <a:lin ang="18600000" scaled="0"/>
+          </a:gradFill>
+          <a:ln>
+            <a:noFill/>
+          </a:ln>
+        </p:spPr>
+        <p:style>
+          <a:lnRef idx="2">
+            <a:schemeClr val="accent1">
+              <a:shade val="50000"/>
+            </a:schemeClr>
+          </a:lnRef>
+          <a:fillRef idx="1">
+            <a:schemeClr val="accent1"/>
+          </a:fillRef>
+          <a:effectRef idx="0">
+            <a:schemeClr val="accent1"/>
+          </a:effectRef>
+          <a:fontRef idx="minor">
+            <a:schemeClr val="lt1"/>
+          </a:fontRef>
+        </p:style>
+        <p:txBody>
+          <a:bodyPr rtlCol="0" anchor="ctr"/>
+          <a:lstStyle/>
+          <a:p>
+            <a:pPr algn="ctr"/>
+            <a:endParaRPr lang="en-US"/>
+          </a:p>
+        </p:txBody>
+      </p:sp>
+      <p:sp>
+        <p:nvSpPr>
+          <p:cNvPr id="31" name="Freeform: Shape 30">
+            <a:extLst>
+              <a:ext uri="{FF2B5EF4-FFF2-40B4-BE49-F238E27FC236}">
+                <a16:creationId xmlns:a16="http://schemas.microsoft.com/office/drawing/2014/main" id="{C29501E6-A978-4A61-9689-9085AF97A53A}"/>
+              </a:ext>
+              <a:ext uri="{C183D7F6-B498-43B3-948B-1728B52AA6E4}">
+                <adec:decorative xmlns:adec="http://schemas.microsoft.com/office/drawing/2017/decorative" val="1"/>
+              </a:ext>
+            </a:extLst>
+          </p:cNvPr>
+          <p:cNvSpPr>
+            <a:spLocks noGrp="1" noRot="1" noChangeAspect="1" noMove="1" noResize="1" noEditPoints="1" noAdjustHandles="1" noChangeArrowheads="1" noChangeShapeType="1" noTextEdit="1"/>
+          </p:cNvSpPr>
+          <p:nvPr>
+            <p:extLst>
+              <p:ext uri="{386F3935-93C4-4BCD-93E2-E3B085C9AB24}">
+                <p16:designElem xmlns:p16="http://schemas.microsoft.com/office/powerpoint/2015/main" val="1"/>
+              </p:ext>
+            </p:extLst>
+          </p:nvPr>
+        </p:nvSpPr>
+        <p:spPr>
+          <a:xfrm rot="12508972">
+            <a:off x="5945431" y="-1032053"/>
+            <a:ext cx="4990147" cy="4439131"/>
+          </a:xfrm>
+          <a:custGeom>
+            <a:avLst/>
+            <a:gdLst>
+              <a:gd name="connsiteX0" fmla="*/ 4990147 w 4990147"/>
+              <a:gd name="connsiteY0" fmla="*/ 2229378 h 4439131"/>
+              <a:gd name="connsiteX1" fmla="*/ 917384 w 4990147"/>
+              <a:gd name="connsiteY1" fmla="*/ 4439131 h 4439131"/>
+              <a:gd name="connsiteX2" fmla="*/ 910814 w 4990147"/>
+              <a:gd name="connsiteY2" fmla="*/ 4434219 h 4439131"/>
+              <a:gd name="connsiteX3" fmla="*/ 0 w 4990147"/>
+              <a:gd name="connsiteY3" fmla="*/ 2502877 h 4439131"/>
+              <a:gd name="connsiteX4" fmla="*/ 2502877 w 4990147"/>
+              <a:gd name="connsiteY4" fmla="*/ 0 h 4439131"/>
+              <a:gd name="connsiteX5" fmla="*/ 4954904 w 4990147"/>
+              <a:gd name="connsiteY5" fmla="*/ 1998460 h 4439131"/>
+            </a:gdLst>
+            <a:ahLst/>
+            <a:cxnLst>
+              <a:cxn ang="0">
+                <a:pos x="connsiteX0" y="connsiteY0"/>
+              </a:cxn>
+              <a:cxn ang="0">
+                <a:pos x="connsiteX1" y="connsiteY1"/>
+              </a:cxn>
+              <a:cxn ang="0">
+                <a:pos x="connsiteX2" y="connsiteY2"/>
+              </a:cxn>
+              <a:cxn ang="0">
+                <a:pos x="connsiteX3" y="connsiteY3"/>
+              </a:cxn>
+              <a:cxn ang="0">
+                <a:pos x="connsiteX4" y="connsiteY4"/>
+              </a:cxn>
+              <a:cxn ang="0">
+                <a:pos x="connsiteX5" y="connsiteY5"/>
+              </a:cxn>
+            </a:cxnLst>
+            <a:rect l="l" t="t" r="r" b="b"/>
+            <a:pathLst>
+              <a:path w="4990147" h="4439131">
+                <a:moveTo>
+                  <a:pt x="4990147" y="2229378"/>
+                </a:moveTo>
+                <a:lnTo>
+                  <a:pt x="917384" y="4439131"/>
+                </a:lnTo>
+                <a:lnTo>
+                  <a:pt x="910814" y="4434219"/>
+                </a:lnTo>
+                <a:cubicBezTo>
+                  <a:pt x="354557" y="3975154"/>
+                  <a:pt x="0" y="3280421"/>
+                  <a:pt x="0" y="2502877"/>
+                </a:cubicBezTo>
+                <a:cubicBezTo>
+                  <a:pt x="0" y="1120576"/>
+                  <a:pt x="1120576" y="0"/>
+                  <a:pt x="2502877" y="0"/>
+                </a:cubicBezTo>
+                <a:cubicBezTo>
+                  <a:pt x="3712390" y="0"/>
+                  <a:pt x="4721520" y="857941"/>
+                  <a:pt x="4954904" y="1998460"/>
+                </a:cubicBezTo>
+                <a:close/>
+              </a:path>
+            </a:pathLst>
+          </a:custGeom>
+          <a:gradFill>
+            <a:gsLst>
+              <a:gs pos="0">
+                <a:schemeClr val="accent1">
+                  <a:alpha val="22000"/>
+                </a:schemeClr>
+              </a:gs>
+              <a:gs pos="87000">
+                <a:schemeClr val="accent1">
+                  <a:lumMod val="60000"/>
+                  <a:lumOff val="40000"/>
+                  <a:alpha val="2000"/>
+                </a:schemeClr>
+              </a:gs>
+            </a:gsLst>
+            <a:lin ang="8400000" scaled="0"/>
+          </a:gradFill>
+          <a:ln>
+            <a:noFill/>
+          </a:ln>
+        </p:spPr>
+        <p:style>
+          <a:lnRef idx="2">
+            <a:schemeClr val="accent1">
+              <a:shade val="50000"/>
+            </a:schemeClr>
+          </a:lnRef>
+          <a:fillRef idx="1">
+            <a:schemeClr val="accent1"/>
+          </a:fillRef>
+          <a:effectRef idx="0">
+            <a:schemeClr val="accent1"/>
+          </a:effectRef>
+          <a:fontRef idx="minor">
+            <a:schemeClr val="lt1"/>
+          </a:fontRef>
+        </p:style>
+        <p:txBody>
+          <a:bodyPr wrap="square" rtlCol="0" anchor="ctr">
+            <a:noAutofit/>
+          </a:bodyPr>
+          <a:lstStyle/>
+          <a:p>
+            <a:pPr algn="ctr"/>
+            <a:endParaRPr lang="en-US" dirty="0"/>
+          </a:p>
+        </p:txBody>
+      </p:sp>
       <p:sp>
         <p:nvSpPr>
           <p:cNvPr id="2" name="Title 1">
@@ -4533,13 +11715,27 @@
             <p:ph type="title"/>
           </p:nvPr>
         </p:nvSpPr>
-        <p:spPr/>
+        <p:spPr>
+          <a:xfrm>
+            <a:off x="1314824" y="735106"/>
+            <a:ext cx="10053763" cy="2928470"/>
+          </a:xfrm>
+        </p:spPr>
         <p:txBody>
-          <a:bodyPr/>
+          <a:bodyPr vert="horz" lIns="91440" tIns="45720" rIns="91440" bIns="45720" rtlCol="0" anchor="b">
+            <a:normAutofit/>
+          </a:bodyPr>
           <a:lstStyle/>
           <a:p>
             <a:r>
-              <a:rPr lang="en-US" dirty="0"/>
+              <a:rPr lang="en-US" sz="4800" kern="1200">
+                <a:solidFill>
+                  <a:srgbClr val="FFFFFF"/>
+                </a:solidFill>
+                <a:latin typeface="+mj-lt"/>
+                <a:ea typeface="+mj-ea"/>
+                <a:cs typeface="+mj-cs"/>
+              </a:rPr>
               <a:t>Demonstration</a:t>
             </a:r>
           </a:p>
@@ -4561,20 +11757,40 @@
             <p:ph idx="1"/>
           </p:nvPr>
         </p:nvSpPr>
-        <p:spPr/>
+        <p:spPr>
+          <a:xfrm>
+            <a:off x="1350682" y="4870824"/>
+            <a:ext cx="10005951" cy="1458258"/>
+          </a:xfrm>
+        </p:spPr>
         <p:txBody>
-          <a:bodyPr/>
+          <a:bodyPr vert="horz" lIns="91440" tIns="45720" rIns="91440" bIns="45720" rtlCol="0" anchor="ctr">
+            <a:normAutofit/>
+          </a:bodyPr>
           <a:lstStyle/>
           <a:p>
+            <a:pPr marL="0" indent="0">
+              <a:buNone/>
+            </a:pPr>
             <a:r>
-              <a:rPr lang="en-US" dirty="0"/>
-              <a:t>Link to </a:t>
+              <a:rPr lang="en-US" sz="2400" kern="1200">
+                <a:solidFill>
+                  <a:schemeClr val="tx1"/>
+                </a:solidFill>
+                <a:latin typeface="+mn-lt"/>
+                <a:ea typeface="+mn-ea"/>
+                <a:cs typeface="+mn-cs"/>
+              </a:rPr>
+              <a:t>*Link to streamlit*</a:t>
             </a:r>
-            <a:r>
-              <a:rPr lang="en-US" dirty="0" err="1"/>
-              <a:t>streamlit</a:t>
-            </a:r>
-            <a:endParaRPr lang="en-US" dirty="0"/>
+            <a:endParaRPr lang="en-US" sz="2400" kern="1200" dirty="0">
+              <a:solidFill>
+                <a:schemeClr val="tx1"/>
+              </a:solidFill>
+              <a:latin typeface="+mn-lt"/>
+              <a:ea typeface="+mn-ea"/>
+              <a:cs typeface="+mn-cs"/>
+            </a:endParaRPr>
           </a:p>
         </p:txBody>
       </p:sp>
@@ -4588,6 +11804,98 @@
   <p:clrMapOvr>
     <a:masterClrMapping/>
   </p:clrMapOvr>
+  <p:timing>
+    <p:tnLst>
+      <p:par>
+        <p:cTn id="1" dur="indefinite" restart="never" nodeType="tmRoot">
+          <p:childTnLst>
+            <p:seq concurrent="1" nextAc="seek">
+              <p:cTn id="2" dur="indefinite" nodeType="mainSeq">
+                <p:childTnLst>
+                  <p:par>
+                    <p:cTn id="3" fill="hold">
+                      <p:stCondLst>
+                        <p:cond delay="indefinite"/>
+                        <p:cond evt="onBegin" delay="0">
+                          <p:tn val="2"/>
+                        </p:cond>
+                      </p:stCondLst>
+                      <p:childTnLst>
+                        <p:par>
+                          <p:cTn id="4" fill="hold">
+                            <p:stCondLst>
+                              <p:cond delay="0"/>
+                            </p:stCondLst>
+                            <p:childTnLst>
+                              <p:par>
+                                <p:cTn id="5" presetID="10" presetClass="entr" presetSubtype="0" fill="hold" grpId="0" nodeType="withEffect">
+                                  <p:stCondLst>
+                                    <p:cond delay="500"/>
+                                  </p:stCondLst>
+                                  <p:iterate>
+                                    <p:tmPct val="10000"/>
+                                  </p:iterate>
+                                  <p:childTnLst>
+                                    <p:set>
+                                      <p:cBhvr>
+                                        <p:cTn id="6" dur="1" fill="hold">
+                                          <p:stCondLst>
+                                            <p:cond delay="0"/>
+                                          </p:stCondLst>
+                                        </p:cTn>
+                                        <p:tgtEl>
+                                          <p:spTgt spid="2"/>
+                                        </p:tgtEl>
+                                        <p:attrNameLst>
+                                          <p:attrName>style.visibility</p:attrName>
+                                        </p:attrNameLst>
+                                      </p:cBhvr>
+                                      <p:to>
+                                        <p:strVal val="visible"/>
+                                      </p:to>
+                                    </p:set>
+                                    <p:animEffect transition="in" filter="fade">
+                                      <p:cBhvr>
+                                        <p:cTn id="7" dur="700"/>
+                                        <p:tgtEl>
+                                          <p:spTgt spid="2"/>
+                                        </p:tgtEl>
+                                      </p:cBhvr>
+                                    </p:animEffect>
+                                  </p:childTnLst>
+                                </p:cTn>
+                              </p:par>
+                            </p:childTnLst>
+                          </p:cTn>
+                        </p:par>
+                      </p:childTnLst>
+                    </p:cTn>
+                  </p:par>
+                </p:childTnLst>
+              </p:cTn>
+              <p:prevCondLst>
+                <p:cond evt="onPrev" delay="0">
+                  <p:tgtEl>
+                    <p:sldTgt/>
+                  </p:tgtEl>
+                </p:cond>
+              </p:prevCondLst>
+              <p:nextCondLst>
+                <p:cond evt="onNext" delay="0">
+                  <p:tgtEl>
+                    <p:sldTgt/>
+                  </p:tgtEl>
+                </p:cond>
+              </p:nextCondLst>
+            </p:seq>
+          </p:childTnLst>
+        </p:cTn>
+      </p:par>
+    </p:tnLst>
+    <p:bldLst>
+      <p:bldP spid="2" grpId="0"/>
+    </p:bldLst>
+  </p:timing>
 </p:sld>
 </file>
 

--- a/progress/ClassPresentation.pptx
+++ b/progress/ClassPresentation.pptx
@@ -11769,28 +11769,17 @@
           </a:bodyPr>
           <a:lstStyle/>
           <a:p>
-            <a:pPr marL="0" indent="0">
-              <a:buNone/>
-            </a:pPr>
             <a:r>
-              <a:rPr lang="en-US" sz="2400" kern="1200">
-                <a:solidFill>
-                  <a:schemeClr val="tx1"/>
-                </a:solidFill>
-                <a:latin typeface="+mn-lt"/>
-                <a:ea typeface="+mn-ea"/>
-                <a:cs typeface="+mn-cs"/>
+              <a:rPr lang="en-US" u="sng">
+                <a:hlinkClick r:id="rId2"/>
               </a:rPr>
-              <a:t>*Link to streamlit*</a:t>
+              <a:t>https://stat486final.streamlit.app/</a:t>
             </a:r>
-            <a:endParaRPr lang="en-US" sz="2400" kern="1200" dirty="0">
-              <a:solidFill>
-                <a:schemeClr val="tx1"/>
-              </a:solidFill>
-              <a:latin typeface="+mn-lt"/>
-              <a:ea typeface="+mn-ea"/>
-              <a:cs typeface="+mn-cs"/>
-            </a:endParaRPr>
+            <a:r>
+              <a:rPr lang="en-US" u="sng"/>
+              <a:t> </a:t>
+            </a:r>
+            <a:endParaRPr lang="en-US"/>
           </a:p>
         </p:txBody>
       </p:sp>

--- a/progress/ClassPresentation.pptx
+++ b/progress/ClassPresentation.pptx
@@ -11770,16 +11770,16 @@
           <a:lstStyle/>
           <a:p>
             <a:r>
-              <a:rPr lang="en-US" u="sng">
+              <a:rPr lang="en-US" u="sng" dirty="0">
                 <a:hlinkClick r:id="rId2"/>
               </a:rPr>
               <a:t>https://stat486final.streamlit.app/</a:t>
             </a:r>
             <a:r>
-              <a:rPr lang="en-US" u="sng"/>
+              <a:rPr lang="en-US" u="sng" dirty="0"/>
               <a:t> </a:t>
             </a:r>
-            <a:endParaRPr lang="en-US"/>
+            <a:endParaRPr lang="en-US" dirty="0"/>
           </a:p>
         </p:txBody>
       </p:sp>

--- a/progress/ClassPresentation.pptx
+++ b/progress/ClassPresentation.pptx
@@ -9,12 +9,14 @@
     <p:sldId id="257" r:id="rId3"/>
     <p:sldId id="258" r:id="rId4"/>
     <p:sldId id="259" r:id="rId5"/>
-    <p:sldId id="263" r:id="rId6"/>
-    <p:sldId id="260" r:id="rId7"/>
-    <p:sldId id="261" r:id="rId8"/>
-    <p:sldId id="262" r:id="rId9"/>
-    <p:sldId id="264" r:id="rId10"/>
-    <p:sldId id="265" r:id="rId11"/>
+    <p:sldId id="266" r:id="rId6"/>
+    <p:sldId id="268" r:id="rId7"/>
+    <p:sldId id="267" r:id="rId8"/>
+    <p:sldId id="263" r:id="rId9"/>
+    <p:sldId id="261" r:id="rId10"/>
+    <p:sldId id="262" r:id="rId11"/>
+    <p:sldId id="264" r:id="rId12"/>
+    <p:sldId id="265" r:id="rId13"/>
   </p:sldIdLst>
   <p:sldSz cx="12192000" cy="6858000"/>
   <p:notesSz cx="6858000" cy="9144000"/>
@@ -122,6 +124,788 @@
 </file>
 
 <file path=ppt/diagrams/colors1.xml><?xml version="1.0" encoding="utf-8"?>
+<dgm:colorsDef xmlns:dgm="http://schemas.openxmlformats.org/drawingml/2006/diagram" xmlns:a="http://schemas.openxmlformats.org/drawingml/2006/main" uniqueId="urn:microsoft.com/office/officeart/2005/8/colors/colorful2">
+  <dgm:title val=""/>
+  <dgm:desc val=""/>
+  <dgm:catLst>
+    <dgm:cat type="colorful" pri="10200"/>
+  </dgm:catLst>
+  <dgm:styleLbl name="node0">
+    <dgm:fillClrLst meth="repeat">
+      <a:schemeClr val="accent1"/>
+    </dgm:fillClrLst>
+    <dgm:linClrLst meth="repeat">
+      <a:schemeClr val="lt1"/>
+    </dgm:linClrLst>
+    <dgm:effectClrLst/>
+    <dgm:txLinClrLst/>
+    <dgm:txFillClrLst/>
+    <dgm:txEffectClrLst/>
+  </dgm:styleLbl>
+  <dgm:styleLbl name="node1">
+    <dgm:fillClrLst>
+      <a:schemeClr val="accent2"/>
+      <a:schemeClr val="accent3"/>
+    </dgm:fillClrLst>
+    <dgm:linClrLst meth="repeat">
+      <a:schemeClr val="lt1"/>
+    </dgm:linClrLst>
+    <dgm:effectClrLst/>
+    <dgm:txLinClrLst/>
+    <dgm:txFillClrLst/>
+    <dgm:txEffectClrLst/>
+  </dgm:styleLbl>
+  <dgm:styleLbl name="alignNode1">
+    <dgm:fillClrLst>
+      <a:schemeClr val="accent2"/>
+      <a:schemeClr val="accent3"/>
+    </dgm:fillClrLst>
+    <dgm:linClrLst>
+      <a:schemeClr val="accent2"/>
+      <a:schemeClr val="accent3"/>
+    </dgm:linClrLst>
+    <dgm:effectClrLst/>
+    <dgm:txLinClrLst/>
+    <dgm:txFillClrLst/>
+    <dgm:txEffectClrLst/>
+  </dgm:styleLbl>
+  <dgm:styleLbl name="lnNode1">
+    <dgm:fillClrLst>
+      <a:schemeClr val="accent2"/>
+      <a:schemeClr val="accent3"/>
+    </dgm:fillClrLst>
+    <dgm:linClrLst meth="repeat">
+      <a:schemeClr val="lt1"/>
+    </dgm:linClrLst>
+    <dgm:effectClrLst/>
+    <dgm:txLinClrLst/>
+    <dgm:txFillClrLst/>
+    <dgm:txEffectClrLst/>
+  </dgm:styleLbl>
+  <dgm:styleLbl name="vennNode1">
+    <dgm:fillClrLst>
+      <a:schemeClr val="accent2">
+        <a:alpha val="50000"/>
+      </a:schemeClr>
+      <a:schemeClr val="accent3">
+        <a:alpha val="50000"/>
+      </a:schemeClr>
+    </dgm:fillClrLst>
+    <dgm:linClrLst meth="repeat">
+      <a:schemeClr val="lt1"/>
+    </dgm:linClrLst>
+    <dgm:effectClrLst/>
+    <dgm:txLinClrLst/>
+    <dgm:txFillClrLst/>
+    <dgm:txEffectClrLst/>
+  </dgm:styleLbl>
+  <dgm:styleLbl name="node2">
+    <dgm:fillClrLst>
+      <a:schemeClr val="accent3"/>
+    </dgm:fillClrLst>
+    <dgm:linClrLst meth="repeat">
+      <a:schemeClr val="lt1"/>
+    </dgm:linClrLst>
+    <dgm:effectClrLst/>
+    <dgm:txLinClrLst/>
+    <dgm:txFillClrLst/>
+    <dgm:txEffectClrLst/>
+  </dgm:styleLbl>
+  <dgm:styleLbl name="node3">
+    <dgm:fillClrLst>
+      <a:schemeClr val="accent4"/>
+    </dgm:fillClrLst>
+    <dgm:linClrLst meth="repeat">
+      <a:schemeClr val="lt1"/>
+    </dgm:linClrLst>
+    <dgm:effectClrLst/>
+    <dgm:txLinClrLst/>
+    <dgm:txFillClrLst/>
+    <dgm:txEffectClrLst/>
+  </dgm:styleLbl>
+  <dgm:styleLbl name="node4">
+    <dgm:fillClrLst>
+      <a:schemeClr val="accent5"/>
+    </dgm:fillClrLst>
+    <dgm:linClrLst meth="repeat">
+      <a:schemeClr val="lt1"/>
+    </dgm:linClrLst>
+    <dgm:effectClrLst/>
+    <dgm:txLinClrLst/>
+    <dgm:txFillClrLst/>
+    <dgm:txEffectClrLst/>
+  </dgm:styleLbl>
+  <dgm:styleLbl name="fgImgPlace1">
+    <dgm:fillClrLst>
+      <a:schemeClr val="accent2">
+        <a:tint val="50000"/>
+      </a:schemeClr>
+      <a:schemeClr val="accent3">
+        <a:tint val="50000"/>
+      </a:schemeClr>
+    </dgm:fillClrLst>
+    <dgm:linClrLst meth="repeat">
+      <a:schemeClr val="lt1"/>
+    </dgm:linClrLst>
+    <dgm:effectClrLst/>
+    <dgm:txLinClrLst/>
+    <dgm:txFillClrLst meth="repeat">
+      <a:schemeClr val="lt1"/>
+    </dgm:txFillClrLst>
+    <dgm:txEffectClrLst/>
+  </dgm:styleLbl>
+  <dgm:styleLbl name="alignImgPlace1">
+    <dgm:fillClrLst>
+      <a:schemeClr val="accent2">
+        <a:tint val="50000"/>
+      </a:schemeClr>
+      <a:schemeClr val="accent3">
+        <a:tint val="20000"/>
+      </a:schemeClr>
+    </dgm:fillClrLst>
+    <dgm:linClrLst meth="repeat">
+      <a:schemeClr val="lt1"/>
+    </dgm:linClrLst>
+    <dgm:effectClrLst/>
+    <dgm:txLinClrLst/>
+    <dgm:txFillClrLst meth="repeat">
+      <a:schemeClr val="lt1"/>
+    </dgm:txFillClrLst>
+    <dgm:txEffectClrLst/>
+  </dgm:styleLbl>
+  <dgm:styleLbl name="bgImgPlace1">
+    <dgm:fillClrLst>
+      <a:schemeClr val="accent2">
+        <a:tint val="50000"/>
+      </a:schemeClr>
+      <a:schemeClr val="accent3">
+        <a:tint val="20000"/>
+      </a:schemeClr>
+    </dgm:fillClrLst>
+    <dgm:linClrLst meth="repeat">
+      <a:schemeClr val="lt1"/>
+    </dgm:linClrLst>
+    <dgm:effectClrLst/>
+    <dgm:txLinClrLst/>
+    <dgm:txFillClrLst meth="repeat">
+      <a:schemeClr val="lt1"/>
+    </dgm:txFillClrLst>
+    <dgm:txEffectClrLst/>
+  </dgm:styleLbl>
+  <dgm:styleLbl name="sibTrans2D1">
+    <dgm:fillClrLst>
+      <a:schemeClr val="accent2"/>
+      <a:schemeClr val="accent3"/>
+    </dgm:fillClrLst>
+    <dgm:linClrLst meth="repeat">
+      <a:schemeClr val="lt1"/>
+    </dgm:linClrLst>
+    <dgm:effectClrLst/>
+    <dgm:txLinClrLst/>
+    <dgm:txFillClrLst/>
+    <dgm:txEffectClrLst/>
+  </dgm:styleLbl>
+  <dgm:styleLbl name="fgSibTrans2D1">
+    <dgm:fillClrLst>
+      <a:schemeClr val="accent2"/>
+      <a:schemeClr val="accent3"/>
+    </dgm:fillClrLst>
+    <dgm:linClrLst meth="repeat">
+      <a:schemeClr val="lt1"/>
+    </dgm:linClrLst>
+    <dgm:effectClrLst/>
+    <dgm:txLinClrLst/>
+    <dgm:txFillClrLst meth="repeat">
+      <a:schemeClr val="lt1"/>
+    </dgm:txFillClrLst>
+    <dgm:txEffectClrLst/>
+  </dgm:styleLbl>
+  <dgm:styleLbl name="bgSibTrans2D1">
+    <dgm:fillClrLst>
+      <a:schemeClr val="accent2"/>
+      <a:schemeClr val="accent3"/>
+    </dgm:fillClrLst>
+    <dgm:linClrLst meth="repeat">
+      <a:schemeClr val="lt1"/>
+    </dgm:linClrLst>
+    <dgm:effectClrLst/>
+    <dgm:txLinClrLst/>
+    <dgm:txFillClrLst meth="repeat">
+      <a:schemeClr val="lt1"/>
+    </dgm:txFillClrLst>
+    <dgm:txEffectClrLst/>
+  </dgm:styleLbl>
+  <dgm:styleLbl name="sibTrans1D1">
+    <dgm:fillClrLst/>
+    <dgm:linClrLst>
+      <a:schemeClr val="accent2"/>
+      <a:schemeClr val="accent3"/>
+    </dgm:linClrLst>
+    <dgm:effectClrLst/>
+    <dgm:txLinClrLst/>
+    <dgm:txFillClrLst meth="repeat">
+      <a:schemeClr val="tx1"/>
+    </dgm:txFillClrLst>
+    <dgm:txEffectClrLst/>
+  </dgm:styleLbl>
+  <dgm:styleLbl name="callout">
+    <dgm:fillClrLst meth="repeat">
+      <a:schemeClr val="accent2"/>
+    </dgm:fillClrLst>
+    <dgm:linClrLst meth="repeat">
+      <a:schemeClr val="accent2">
+        <a:tint val="50000"/>
+      </a:schemeClr>
+    </dgm:linClrLst>
+    <dgm:effectClrLst/>
+    <dgm:txLinClrLst/>
+    <dgm:txFillClrLst meth="repeat">
+      <a:schemeClr val="tx1"/>
+    </dgm:txFillClrLst>
+    <dgm:txEffectClrLst/>
+  </dgm:styleLbl>
+  <dgm:styleLbl name="asst0">
+    <dgm:fillClrLst meth="repeat">
+      <a:schemeClr val="accent2"/>
+    </dgm:fillClrLst>
+    <dgm:linClrLst meth="repeat">
+      <a:schemeClr val="lt1">
+        <a:shade val="80000"/>
+      </a:schemeClr>
+    </dgm:linClrLst>
+    <dgm:effectClrLst/>
+    <dgm:txLinClrLst/>
+    <dgm:txFillClrLst/>
+    <dgm:txEffectClrLst/>
+  </dgm:styleLbl>
+  <dgm:styleLbl name="asst1">
+    <dgm:fillClrLst meth="repeat">
+      <a:schemeClr val="accent3"/>
+    </dgm:fillClrLst>
+    <dgm:linClrLst meth="repeat">
+      <a:schemeClr val="lt1">
+        <a:shade val="80000"/>
+      </a:schemeClr>
+    </dgm:linClrLst>
+    <dgm:effectClrLst/>
+    <dgm:txLinClrLst/>
+    <dgm:txFillClrLst/>
+    <dgm:txEffectClrLst/>
+  </dgm:styleLbl>
+  <dgm:styleLbl name="asst2">
+    <dgm:fillClrLst>
+      <a:schemeClr val="accent4"/>
+    </dgm:fillClrLst>
+    <dgm:linClrLst meth="repeat">
+      <a:schemeClr val="lt1"/>
+    </dgm:linClrLst>
+    <dgm:effectClrLst/>
+    <dgm:txLinClrLst/>
+    <dgm:txFillClrLst/>
+    <dgm:txEffectClrLst/>
+  </dgm:styleLbl>
+  <dgm:styleLbl name="asst3">
+    <dgm:fillClrLst>
+      <a:schemeClr val="accent5"/>
+    </dgm:fillClrLst>
+    <dgm:linClrLst meth="repeat">
+      <a:schemeClr val="lt1"/>
+    </dgm:linClrLst>
+    <dgm:effectClrLst/>
+    <dgm:txLinClrLst/>
+    <dgm:txFillClrLst/>
+    <dgm:txEffectClrLst/>
+  </dgm:styleLbl>
+  <dgm:styleLbl name="asst4">
+    <dgm:fillClrLst>
+      <a:schemeClr val="accent6"/>
+    </dgm:fillClrLst>
+    <dgm:linClrLst meth="repeat">
+      <a:schemeClr val="lt1"/>
+    </dgm:linClrLst>
+    <dgm:effectClrLst/>
+    <dgm:txLinClrLst/>
+    <dgm:txFillClrLst/>
+    <dgm:txEffectClrLst/>
+  </dgm:styleLbl>
+  <dgm:styleLbl name="parChTrans2D1">
+    <dgm:fillClrLst meth="repeat">
+      <a:schemeClr val="accent2"/>
+    </dgm:fillClrLst>
+    <dgm:linClrLst meth="repeat">
+      <a:schemeClr val="lt1"/>
+    </dgm:linClrLst>
+    <dgm:effectClrLst/>
+    <dgm:txLinClrLst/>
+    <dgm:txFillClrLst meth="repeat">
+      <a:schemeClr val="lt1"/>
+    </dgm:txFillClrLst>
+    <dgm:txEffectClrLst/>
+  </dgm:styleLbl>
+  <dgm:styleLbl name="parChTrans2D2">
+    <dgm:fillClrLst meth="repeat">
+      <a:schemeClr val="accent3"/>
+    </dgm:fillClrLst>
+    <dgm:linClrLst meth="repeat">
+      <a:schemeClr val="lt1"/>
+    </dgm:linClrLst>
+    <dgm:effectClrLst/>
+    <dgm:txLinClrLst/>
+    <dgm:txFillClrLst/>
+    <dgm:txEffectClrLst/>
+  </dgm:styleLbl>
+  <dgm:styleLbl name="parChTrans2D3">
+    <dgm:fillClrLst meth="repeat">
+      <a:schemeClr val="accent4"/>
+    </dgm:fillClrLst>
+    <dgm:linClrLst meth="repeat">
+      <a:schemeClr val="lt1"/>
+    </dgm:linClrLst>
+    <dgm:effectClrLst/>
+    <dgm:txLinClrLst/>
+    <dgm:txFillClrLst/>
+    <dgm:txEffectClrLst/>
+  </dgm:styleLbl>
+  <dgm:styleLbl name="parChTrans2D4">
+    <dgm:fillClrLst meth="repeat">
+      <a:schemeClr val="accent5"/>
+    </dgm:fillClrLst>
+    <dgm:linClrLst meth="repeat">
+      <a:schemeClr val="lt1"/>
+    </dgm:linClrLst>
+    <dgm:effectClrLst/>
+    <dgm:txLinClrLst/>
+    <dgm:txFillClrLst meth="repeat">
+      <a:schemeClr val="lt1"/>
+    </dgm:txFillClrLst>
+    <dgm:txEffectClrLst/>
+  </dgm:styleLbl>
+  <dgm:styleLbl name="parChTrans1D1">
+    <dgm:fillClrLst meth="repeat">
+      <a:schemeClr val="accent2"/>
+    </dgm:fillClrLst>
+    <dgm:linClrLst meth="repeat">
+      <a:schemeClr val="accent2"/>
+    </dgm:linClrLst>
+    <dgm:effectClrLst/>
+    <dgm:txLinClrLst/>
+    <dgm:txFillClrLst meth="repeat">
+      <a:schemeClr val="tx1"/>
+    </dgm:txFillClrLst>
+    <dgm:txEffectClrLst/>
+  </dgm:styleLbl>
+  <dgm:styleLbl name="parChTrans1D2">
+    <dgm:fillClrLst meth="repeat">
+      <a:schemeClr val="accent2">
+        <a:tint val="90000"/>
+      </a:schemeClr>
+    </dgm:fillClrLst>
+    <dgm:linClrLst meth="repeat">
+      <a:schemeClr val="accent3"/>
+    </dgm:linClrLst>
+    <dgm:effectClrLst/>
+    <dgm:txLinClrLst/>
+    <dgm:txFillClrLst meth="repeat">
+      <a:schemeClr val="tx1"/>
+    </dgm:txFillClrLst>
+    <dgm:txEffectClrLst/>
+  </dgm:styleLbl>
+  <dgm:styleLbl name="parChTrans1D3">
+    <dgm:fillClrLst meth="repeat">
+      <a:schemeClr val="accent2">
+        <a:tint val="70000"/>
+      </a:schemeClr>
+    </dgm:fillClrLst>
+    <dgm:linClrLst meth="repeat">
+      <a:schemeClr val="accent4"/>
+    </dgm:linClrLst>
+    <dgm:effectClrLst/>
+    <dgm:txLinClrLst/>
+    <dgm:txFillClrLst meth="repeat">
+      <a:schemeClr val="tx1"/>
+    </dgm:txFillClrLst>
+    <dgm:txEffectClrLst/>
+  </dgm:styleLbl>
+  <dgm:styleLbl name="parChTrans1D4">
+    <dgm:fillClrLst meth="repeat">
+      <a:schemeClr val="accent2">
+        <a:tint val="50000"/>
+      </a:schemeClr>
+    </dgm:fillClrLst>
+    <dgm:linClrLst meth="repeat">
+      <a:schemeClr val="accent5"/>
+    </dgm:linClrLst>
+    <dgm:effectClrLst/>
+    <dgm:txLinClrLst/>
+    <dgm:txFillClrLst meth="repeat">
+      <a:schemeClr val="tx1"/>
+    </dgm:txFillClrLst>
+    <dgm:txEffectClrLst/>
+  </dgm:styleLbl>
+  <dgm:styleLbl name="fgAcc1">
+    <dgm:fillClrLst meth="repeat">
+      <a:schemeClr val="lt1">
+        <a:alpha val="90000"/>
+      </a:schemeClr>
+    </dgm:fillClrLst>
+    <dgm:linClrLst>
+      <a:schemeClr val="accent2"/>
+      <a:schemeClr val="accent3"/>
+    </dgm:linClrLst>
+    <dgm:effectClrLst/>
+    <dgm:txLinClrLst/>
+    <dgm:txFillClrLst meth="repeat">
+      <a:schemeClr val="dk1"/>
+    </dgm:txFillClrLst>
+    <dgm:txEffectClrLst/>
+  </dgm:styleLbl>
+  <dgm:styleLbl name="conFgAcc1">
+    <dgm:fillClrLst meth="repeat">
+      <a:schemeClr val="lt1">
+        <a:alpha val="90000"/>
+      </a:schemeClr>
+    </dgm:fillClrLst>
+    <dgm:linClrLst>
+      <a:schemeClr val="accent2"/>
+      <a:schemeClr val="accent3"/>
+    </dgm:linClrLst>
+    <dgm:effectClrLst/>
+    <dgm:txLinClrLst/>
+    <dgm:txFillClrLst meth="repeat">
+      <a:schemeClr val="dk1"/>
+    </dgm:txFillClrLst>
+    <dgm:txEffectClrLst/>
+  </dgm:styleLbl>
+  <dgm:styleLbl name="alignAcc1">
+    <dgm:fillClrLst meth="repeat">
+      <a:schemeClr val="lt1">
+        <a:alpha val="90000"/>
+      </a:schemeClr>
+    </dgm:fillClrLst>
+    <dgm:linClrLst>
+      <a:schemeClr val="accent2"/>
+      <a:schemeClr val="accent3"/>
+    </dgm:linClrLst>
+    <dgm:effectClrLst/>
+    <dgm:txLinClrLst/>
+    <dgm:txFillClrLst meth="repeat">
+      <a:schemeClr val="dk1"/>
+    </dgm:txFillClrLst>
+    <dgm:txEffectClrLst/>
+  </dgm:styleLbl>
+  <dgm:styleLbl name="trAlignAcc1">
+    <dgm:fillClrLst meth="repeat">
+      <a:schemeClr val="lt1">
+        <a:alpha val="40000"/>
+      </a:schemeClr>
+    </dgm:fillClrLst>
+    <dgm:linClrLst meth="repeat">
+      <a:schemeClr val="accent2"/>
+    </dgm:linClrLst>
+    <dgm:effectClrLst/>
+    <dgm:txLinClrLst/>
+    <dgm:txFillClrLst meth="repeat">
+      <a:schemeClr val="dk1"/>
+    </dgm:txFillClrLst>
+    <dgm:txEffectClrLst/>
+  </dgm:styleLbl>
+  <dgm:styleLbl name="bgAcc1">
+    <dgm:fillClrLst meth="repeat">
+      <a:schemeClr val="lt1">
+        <a:alpha val="90000"/>
+      </a:schemeClr>
+    </dgm:fillClrLst>
+    <dgm:linClrLst>
+      <a:schemeClr val="accent2"/>
+      <a:schemeClr val="accent3"/>
+    </dgm:linClrLst>
+    <dgm:effectClrLst/>
+    <dgm:txLinClrLst/>
+    <dgm:txFillClrLst meth="repeat">
+      <a:schemeClr val="dk1"/>
+    </dgm:txFillClrLst>
+    <dgm:txEffectClrLst/>
+  </dgm:styleLbl>
+  <dgm:styleLbl name="solidFgAcc1">
+    <dgm:fillClrLst meth="repeat">
+      <a:schemeClr val="lt1"/>
+    </dgm:fillClrLst>
+    <dgm:linClrLst>
+      <a:schemeClr val="accent2"/>
+      <a:schemeClr val="accent3"/>
+    </dgm:linClrLst>
+    <dgm:effectClrLst/>
+    <dgm:txLinClrLst/>
+    <dgm:txFillClrLst meth="repeat">
+      <a:schemeClr val="dk1"/>
+    </dgm:txFillClrLst>
+    <dgm:txEffectClrLst/>
+  </dgm:styleLbl>
+  <dgm:styleLbl name="solidAlignAcc1">
+    <dgm:fillClrLst meth="repeat">
+      <a:schemeClr val="lt1"/>
+    </dgm:fillClrLst>
+    <dgm:linClrLst>
+      <a:schemeClr val="accent2"/>
+      <a:schemeClr val="accent3"/>
+    </dgm:linClrLst>
+    <dgm:effectClrLst/>
+    <dgm:txLinClrLst/>
+    <dgm:txFillClrLst meth="repeat">
+      <a:schemeClr val="dk1"/>
+    </dgm:txFillClrLst>
+    <dgm:txEffectClrLst/>
+  </dgm:styleLbl>
+  <dgm:styleLbl name="solidBgAcc1">
+    <dgm:fillClrLst meth="repeat">
+      <a:schemeClr val="lt1"/>
+    </dgm:fillClrLst>
+    <dgm:linClrLst>
+      <a:schemeClr val="accent2"/>
+      <a:schemeClr val="accent3"/>
+    </dgm:linClrLst>
+    <dgm:effectClrLst/>
+    <dgm:txLinClrLst/>
+    <dgm:txFillClrLst meth="repeat">
+      <a:schemeClr val="dk1"/>
+    </dgm:txFillClrLst>
+    <dgm:txEffectClrLst/>
+  </dgm:styleLbl>
+  <dgm:styleLbl name="fgAccFollowNode1">
+    <dgm:fillClrLst>
+      <a:schemeClr val="accent2">
+        <a:tint val="40000"/>
+        <a:alpha val="90000"/>
+      </a:schemeClr>
+      <a:schemeClr val="accent3">
+        <a:tint val="40000"/>
+        <a:alpha val="90000"/>
+      </a:schemeClr>
+    </dgm:fillClrLst>
+    <dgm:linClrLst>
+      <a:schemeClr val="accent2">
+        <a:tint val="40000"/>
+        <a:alpha val="90000"/>
+      </a:schemeClr>
+      <a:schemeClr val="accent3">
+        <a:tint val="40000"/>
+        <a:alpha val="90000"/>
+      </a:schemeClr>
+    </dgm:linClrLst>
+    <dgm:effectClrLst/>
+    <dgm:txLinClrLst/>
+    <dgm:txFillClrLst meth="repeat">
+      <a:schemeClr val="dk1"/>
+    </dgm:txFillClrLst>
+    <dgm:txEffectClrLst/>
+  </dgm:styleLbl>
+  <dgm:styleLbl name="alignAccFollowNode1">
+    <dgm:fillClrLst>
+      <a:schemeClr val="accent2">
+        <a:tint val="40000"/>
+        <a:alpha val="90000"/>
+      </a:schemeClr>
+      <a:schemeClr val="accent3">
+        <a:tint val="40000"/>
+        <a:alpha val="90000"/>
+      </a:schemeClr>
+    </dgm:fillClrLst>
+    <dgm:linClrLst>
+      <a:schemeClr val="accent2">
+        <a:tint val="40000"/>
+        <a:alpha val="90000"/>
+      </a:schemeClr>
+      <a:schemeClr val="accent3">
+        <a:tint val="40000"/>
+        <a:alpha val="90000"/>
+      </a:schemeClr>
+    </dgm:linClrLst>
+    <dgm:effectClrLst/>
+    <dgm:txLinClrLst/>
+    <dgm:txFillClrLst meth="repeat">
+      <a:schemeClr val="dk1"/>
+    </dgm:txFillClrLst>
+    <dgm:txEffectClrLst/>
+  </dgm:styleLbl>
+  <dgm:styleLbl name="bgAccFollowNode1">
+    <dgm:fillClrLst>
+      <a:schemeClr val="accent2">
+        <a:tint val="40000"/>
+        <a:alpha val="90000"/>
+      </a:schemeClr>
+      <a:schemeClr val="accent3">
+        <a:tint val="40000"/>
+        <a:alpha val="90000"/>
+      </a:schemeClr>
+    </dgm:fillClrLst>
+    <dgm:linClrLst>
+      <a:schemeClr val="accent2">
+        <a:tint val="40000"/>
+        <a:alpha val="90000"/>
+      </a:schemeClr>
+      <a:schemeClr val="accent3">
+        <a:tint val="40000"/>
+        <a:alpha val="90000"/>
+      </a:schemeClr>
+    </dgm:linClrLst>
+    <dgm:effectClrLst/>
+    <dgm:txLinClrLst/>
+    <dgm:txFillClrLst meth="repeat">
+      <a:schemeClr val="dk1"/>
+    </dgm:txFillClrLst>
+    <dgm:txEffectClrLst/>
+  </dgm:styleLbl>
+  <dgm:styleLbl name="fgAcc0">
+    <dgm:fillClrLst meth="repeat">
+      <a:schemeClr val="lt1">
+        <a:alpha val="90000"/>
+      </a:schemeClr>
+    </dgm:fillClrLst>
+    <dgm:linClrLst>
+      <a:schemeClr val="accent1"/>
+    </dgm:linClrLst>
+    <dgm:effectClrLst/>
+    <dgm:txLinClrLst/>
+    <dgm:txFillClrLst meth="repeat">
+      <a:schemeClr val="dk1"/>
+    </dgm:txFillClrLst>
+    <dgm:txEffectClrLst/>
+  </dgm:styleLbl>
+  <dgm:styleLbl name="fgAcc2">
+    <dgm:fillClrLst meth="repeat">
+      <a:schemeClr val="lt1">
+        <a:alpha val="90000"/>
+      </a:schemeClr>
+    </dgm:fillClrLst>
+    <dgm:linClrLst>
+      <a:schemeClr val="accent3"/>
+    </dgm:linClrLst>
+    <dgm:effectClrLst/>
+    <dgm:txLinClrLst/>
+    <dgm:txFillClrLst meth="repeat">
+      <a:schemeClr val="dk1"/>
+    </dgm:txFillClrLst>
+    <dgm:txEffectClrLst/>
+  </dgm:styleLbl>
+  <dgm:styleLbl name="fgAcc3">
+    <dgm:fillClrLst meth="repeat">
+      <a:schemeClr val="lt1">
+        <a:alpha val="90000"/>
+      </a:schemeClr>
+    </dgm:fillClrLst>
+    <dgm:linClrLst>
+      <a:schemeClr val="accent4"/>
+    </dgm:linClrLst>
+    <dgm:effectClrLst/>
+    <dgm:txLinClrLst/>
+    <dgm:txFillClrLst meth="repeat">
+      <a:schemeClr val="dk1"/>
+    </dgm:txFillClrLst>
+    <dgm:txEffectClrLst/>
+  </dgm:styleLbl>
+  <dgm:styleLbl name="fgAcc4">
+    <dgm:fillClrLst meth="repeat">
+      <a:schemeClr val="lt1">
+        <a:alpha val="90000"/>
+      </a:schemeClr>
+    </dgm:fillClrLst>
+    <dgm:linClrLst>
+      <a:schemeClr val="accent5"/>
+    </dgm:linClrLst>
+    <dgm:effectClrLst/>
+    <dgm:txLinClrLst/>
+    <dgm:txFillClrLst meth="repeat">
+      <a:schemeClr val="dk1"/>
+    </dgm:txFillClrLst>
+    <dgm:txEffectClrLst/>
+  </dgm:styleLbl>
+  <dgm:styleLbl name="bgShp">
+    <dgm:fillClrLst meth="repeat">
+      <a:schemeClr val="accent2">
+        <a:tint val="40000"/>
+      </a:schemeClr>
+    </dgm:fillClrLst>
+    <dgm:linClrLst meth="repeat">
+      <a:schemeClr val="dk1"/>
+    </dgm:linClrLst>
+    <dgm:effectClrLst/>
+    <dgm:txLinClrLst/>
+    <dgm:txFillClrLst meth="repeat">
+      <a:schemeClr val="dk1"/>
+    </dgm:txFillClrLst>
+    <dgm:txEffectClrLst/>
+  </dgm:styleLbl>
+  <dgm:styleLbl name="dkBgShp">
+    <dgm:fillClrLst meth="repeat">
+      <a:schemeClr val="accent2">
+        <a:shade val="90000"/>
+      </a:schemeClr>
+    </dgm:fillClrLst>
+    <dgm:linClrLst meth="repeat">
+      <a:schemeClr val="dk1"/>
+    </dgm:linClrLst>
+    <dgm:effectClrLst/>
+    <dgm:txLinClrLst/>
+    <dgm:txFillClrLst meth="repeat">
+      <a:schemeClr val="lt1"/>
+    </dgm:txFillClrLst>
+    <dgm:txEffectClrLst/>
+  </dgm:styleLbl>
+  <dgm:styleLbl name="trBgShp">
+    <dgm:fillClrLst meth="repeat">
+      <a:schemeClr val="accent2">
+        <a:tint val="50000"/>
+        <a:alpha val="40000"/>
+      </a:schemeClr>
+    </dgm:fillClrLst>
+    <dgm:linClrLst meth="repeat">
+      <a:schemeClr val="accent2"/>
+    </dgm:linClrLst>
+    <dgm:effectClrLst/>
+    <dgm:txLinClrLst/>
+    <dgm:txFillClrLst meth="repeat">
+      <a:schemeClr val="lt1"/>
+    </dgm:txFillClrLst>
+    <dgm:txEffectClrLst/>
+  </dgm:styleLbl>
+  <dgm:styleLbl name="fgShp">
+    <dgm:fillClrLst meth="repeat">
+      <a:schemeClr val="accent2">
+        <a:tint val="40000"/>
+      </a:schemeClr>
+    </dgm:fillClrLst>
+    <dgm:linClrLst meth="repeat">
+      <a:schemeClr val="lt1"/>
+    </dgm:linClrLst>
+    <dgm:effectClrLst/>
+    <dgm:txLinClrLst/>
+    <dgm:txFillClrLst meth="repeat">
+      <a:schemeClr val="dk1"/>
+    </dgm:txFillClrLst>
+    <dgm:txEffectClrLst/>
+  </dgm:styleLbl>
+  <dgm:styleLbl name="revTx">
+    <dgm:fillClrLst meth="repeat">
+      <a:schemeClr val="lt1">
+        <a:alpha val="0"/>
+      </a:schemeClr>
+    </dgm:fillClrLst>
+    <dgm:linClrLst meth="repeat">
+      <a:schemeClr val="dk1">
+        <a:alpha val="0"/>
+      </a:schemeClr>
+    </dgm:linClrLst>
+    <dgm:effectClrLst/>
+    <dgm:txLinClrLst/>
+    <dgm:txFillClrLst meth="repeat">
+      <a:schemeClr val="tx1"/>
+    </dgm:txFillClrLst>
+    <dgm:txEffectClrLst/>
+  </dgm:styleLbl>
+</dgm:colorsDef>
+</file>
+
+<file path=ppt/diagrams/colors2.xml><?xml version="1.0" encoding="utf-8"?>
 <dgm:colorsDef xmlns:dgm="http://schemas.openxmlformats.org/drawingml/2006/diagram" xmlns:a="http://schemas.openxmlformats.org/drawingml/2006/main" uniqueId="urn:microsoft.com/office/officeart/2005/8/colors/colorful1">
   <dgm:title val=""/>
   <dgm:desc val=""/>
@@ -1041,6 +1825,266 @@
 </file>
 
 <file path=ppt/diagrams/data1.xml><?xml version="1.0" encoding="utf-8"?>
+<dgm:dataModel xmlns:dgm="http://schemas.openxmlformats.org/drawingml/2006/diagram" xmlns:a="http://schemas.openxmlformats.org/drawingml/2006/main">
+  <dgm:ptLst>
+    <dgm:pt modelId="{1AC90C0C-0A34-44C4-A888-A760DDCDE8EF}" type="doc">
+      <dgm:prSet loTypeId="urn:microsoft.com/office/officeart/2005/8/layout/vList2" loCatId="list" qsTypeId="urn:microsoft.com/office/officeart/2005/8/quickstyle/simple4" qsCatId="simple" csTypeId="urn:microsoft.com/office/officeart/2005/8/colors/colorful2" csCatId="colorful"/>
+      <dgm:spPr/>
+      <dgm:t>
+        <a:bodyPr/>
+        <a:lstStyle/>
+        <a:p>
+          <a:endParaRPr lang="en-US"/>
+        </a:p>
+      </dgm:t>
+    </dgm:pt>
+    <dgm:pt modelId="{A244C327-62DD-4127-BBB3-F162E69FA163}">
+      <dgm:prSet/>
+      <dgm:spPr/>
+      <dgm:t>
+        <a:bodyPr/>
+        <a:lstStyle/>
+        <a:p>
+          <a:r>
+            <a:rPr lang="en-US" b="1"/>
+            <a:t>The Pool: </a:t>
+          </a:r>
+          <a:r>
+            <a:rPr lang="en-US"/>
+            <a:t>Strictly “Cinderella Candidates (seed 10 through 16).</a:t>
+          </a:r>
+        </a:p>
+      </dgm:t>
+    </dgm:pt>
+    <dgm:pt modelId="{130D473A-988B-4668-AA62-3B1DF509DE00}" type="parTrans" cxnId="{DA93137B-D703-4D6B-B366-F2DB85CE94BF}">
+      <dgm:prSet/>
+      <dgm:spPr/>
+      <dgm:t>
+        <a:bodyPr/>
+        <a:lstStyle/>
+        <a:p>
+          <a:endParaRPr lang="en-US"/>
+        </a:p>
+      </dgm:t>
+    </dgm:pt>
+    <dgm:pt modelId="{D899C8B4-DFB8-448C-A917-14B16AA4B37D}" type="sibTrans" cxnId="{DA93137B-D703-4D6B-B366-F2DB85CE94BF}">
+      <dgm:prSet/>
+      <dgm:spPr/>
+      <dgm:t>
+        <a:bodyPr/>
+        <a:lstStyle/>
+        <a:p>
+          <a:endParaRPr lang="en-US"/>
+        </a:p>
+      </dgm:t>
+    </dgm:pt>
+    <dgm:pt modelId="{36B64279-2124-4BE1-9540-2B1B8DEFFF36}">
+      <dgm:prSet/>
+      <dgm:spPr/>
+      <dgm:t>
+        <a:bodyPr/>
+        <a:lstStyle/>
+        <a:p>
+          <a:r>
+            <a:rPr lang="en-US" b="1"/>
+            <a:t>The Target: </a:t>
+          </a:r>
+          <a:r>
+            <a:rPr lang="en-US"/>
+            <a:t>Reaching the Sweet 16</a:t>
+          </a:r>
+        </a:p>
+      </dgm:t>
+    </dgm:pt>
+    <dgm:pt modelId="{409D49FC-D2D9-4735-9C2E-1A94D59DE6A5}" type="parTrans" cxnId="{C1070B3E-F155-43F0-A6A4-B4A8E12B160A}">
+      <dgm:prSet/>
+      <dgm:spPr/>
+      <dgm:t>
+        <a:bodyPr/>
+        <a:lstStyle/>
+        <a:p>
+          <a:endParaRPr lang="en-US"/>
+        </a:p>
+      </dgm:t>
+    </dgm:pt>
+    <dgm:pt modelId="{51402C73-91BB-46DD-BCA4-A80C08969667}" type="sibTrans" cxnId="{C1070B3E-F155-43F0-A6A4-B4A8E12B160A}">
+      <dgm:prSet/>
+      <dgm:spPr/>
+      <dgm:t>
+        <a:bodyPr/>
+        <a:lstStyle/>
+        <a:p>
+          <a:endParaRPr lang="en-US"/>
+        </a:p>
+      </dgm:t>
+    </dgm:pt>
+    <dgm:pt modelId="{32EED0CE-423D-4A40-995F-C6776E473085}">
+      <dgm:prSet/>
+      <dgm:spPr/>
+      <dgm:t>
+        <a:bodyPr/>
+        <a:lstStyle/>
+        <a:p>
+          <a:r>
+            <a:rPr lang="en-US" b="1"/>
+            <a:t>The Challenge: </a:t>
+          </a:r>
+          <a:r>
+            <a:rPr lang="en-US"/>
+            <a:t>Extreme Class Imbalance (Only ~45 true Cinderellas out of 680 candidates = ~6.6%</a:t>
+          </a:r>
+        </a:p>
+      </dgm:t>
+    </dgm:pt>
+    <dgm:pt modelId="{7D0ED1F0-3569-4178-BC82-D0062D434707}" type="parTrans" cxnId="{E23B3E16-D7B0-41AA-AE83-8E3E9AB16313}">
+      <dgm:prSet/>
+      <dgm:spPr/>
+      <dgm:t>
+        <a:bodyPr/>
+        <a:lstStyle/>
+        <a:p>
+          <a:endParaRPr lang="en-US"/>
+        </a:p>
+      </dgm:t>
+    </dgm:pt>
+    <dgm:pt modelId="{13FDB224-27CD-468A-95E5-10296E96456C}" type="sibTrans" cxnId="{E23B3E16-D7B0-41AA-AE83-8E3E9AB16313}">
+      <dgm:prSet/>
+      <dgm:spPr/>
+      <dgm:t>
+        <a:bodyPr/>
+        <a:lstStyle/>
+        <a:p>
+          <a:endParaRPr lang="en-US"/>
+        </a:p>
+      </dgm:t>
+    </dgm:pt>
+    <dgm:pt modelId="{7ED885B8-573F-4374-A607-E9CCD052A7AF}">
+      <dgm:prSet/>
+      <dgm:spPr/>
+      <dgm:t>
+        <a:bodyPr/>
+        <a:lstStyle/>
+        <a:p>
+          <a:r>
+            <a:rPr lang="en-US" b="1"/>
+            <a:t>The Metrics: </a:t>
+          </a:r>
+          <a:r>
+            <a:rPr lang="en-US"/>
+            <a:t>Precision-Recall AUC (PR-AUC) and F1 Score</a:t>
+          </a:r>
+        </a:p>
+      </dgm:t>
+    </dgm:pt>
+    <dgm:pt modelId="{527345AD-07DB-4796-A02D-A9ABF5D6A591}" type="parTrans" cxnId="{F5004BEE-5C6A-4279-8F11-BE59E984B574}">
+      <dgm:prSet/>
+      <dgm:spPr/>
+      <dgm:t>
+        <a:bodyPr/>
+        <a:lstStyle/>
+        <a:p>
+          <a:endParaRPr lang="en-US"/>
+        </a:p>
+      </dgm:t>
+    </dgm:pt>
+    <dgm:pt modelId="{A346F3DD-89F0-4DCA-A6AF-BC1E37634A50}" type="sibTrans" cxnId="{F5004BEE-5C6A-4279-8F11-BE59E984B574}">
+      <dgm:prSet/>
+      <dgm:spPr/>
+      <dgm:t>
+        <a:bodyPr/>
+        <a:lstStyle/>
+        <a:p>
+          <a:endParaRPr lang="en-US"/>
+        </a:p>
+      </dgm:t>
+    </dgm:pt>
+    <dgm:pt modelId="{960DAD15-C566-4173-AC62-B4C0799E57C7}" type="pres">
+      <dgm:prSet presAssocID="{1AC90C0C-0A34-44C4-A888-A760DDCDE8EF}" presName="linear" presStyleCnt="0">
+        <dgm:presLayoutVars>
+          <dgm:animLvl val="lvl"/>
+          <dgm:resizeHandles val="exact"/>
+        </dgm:presLayoutVars>
+      </dgm:prSet>
+      <dgm:spPr/>
+    </dgm:pt>
+    <dgm:pt modelId="{BA0BDB99-6C13-48A7-95E9-7B8CB19DFC6B}" type="pres">
+      <dgm:prSet presAssocID="{A244C327-62DD-4127-BBB3-F162E69FA163}" presName="parentText" presStyleLbl="node1" presStyleIdx="0" presStyleCnt="4">
+        <dgm:presLayoutVars>
+          <dgm:chMax val="0"/>
+          <dgm:bulletEnabled val="1"/>
+        </dgm:presLayoutVars>
+      </dgm:prSet>
+      <dgm:spPr/>
+    </dgm:pt>
+    <dgm:pt modelId="{A37D3A07-AD55-4280-90DD-0750DE08C720}" type="pres">
+      <dgm:prSet presAssocID="{D899C8B4-DFB8-448C-A917-14B16AA4B37D}" presName="spacer" presStyleCnt="0"/>
+      <dgm:spPr/>
+    </dgm:pt>
+    <dgm:pt modelId="{92A9DC77-3381-48EE-AE93-2E1D48CAA540}" type="pres">
+      <dgm:prSet presAssocID="{36B64279-2124-4BE1-9540-2B1B8DEFFF36}" presName="parentText" presStyleLbl="node1" presStyleIdx="1" presStyleCnt="4">
+        <dgm:presLayoutVars>
+          <dgm:chMax val="0"/>
+          <dgm:bulletEnabled val="1"/>
+        </dgm:presLayoutVars>
+      </dgm:prSet>
+      <dgm:spPr/>
+    </dgm:pt>
+    <dgm:pt modelId="{2668678B-4E83-4BA1-AC6E-0665681C8C0D}" type="pres">
+      <dgm:prSet presAssocID="{51402C73-91BB-46DD-BCA4-A80C08969667}" presName="spacer" presStyleCnt="0"/>
+      <dgm:spPr/>
+    </dgm:pt>
+    <dgm:pt modelId="{559BC1A5-774E-4A3B-8B7A-679673BB04D4}" type="pres">
+      <dgm:prSet presAssocID="{32EED0CE-423D-4A40-995F-C6776E473085}" presName="parentText" presStyleLbl="node1" presStyleIdx="2" presStyleCnt="4">
+        <dgm:presLayoutVars>
+          <dgm:chMax val="0"/>
+          <dgm:bulletEnabled val="1"/>
+        </dgm:presLayoutVars>
+      </dgm:prSet>
+      <dgm:spPr/>
+    </dgm:pt>
+    <dgm:pt modelId="{70F39DD4-57CC-4B0D-8D08-3978A7BB3CAE}" type="pres">
+      <dgm:prSet presAssocID="{13FDB224-27CD-468A-95E5-10296E96456C}" presName="spacer" presStyleCnt="0"/>
+      <dgm:spPr/>
+    </dgm:pt>
+    <dgm:pt modelId="{C4C4BC72-2AE6-416D-8ADF-0220106CB8A8}" type="pres">
+      <dgm:prSet presAssocID="{7ED885B8-573F-4374-A607-E9CCD052A7AF}" presName="parentText" presStyleLbl="node1" presStyleIdx="3" presStyleCnt="4">
+        <dgm:presLayoutVars>
+          <dgm:chMax val="0"/>
+          <dgm:bulletEnabled val="1"/>
+        </dgm:presLayoutVars>
+      </dgm:prSet>
+      <dgm:spPr/>
+    </dgm:pt>
+  </dgm:ptLst>
+  <dgm:cxnLst>
+    <dgm:cxn modelId="{E23B3E16-D7B0-41AA-AE83-8E3E9AB16313}" srcId="{1AC90C0C-0A34-44C4-A888-A760DDCDE8EF}" destId="{32EED0CE-423D-4A40-995F-C6776E473085}" srcOrd="2" destOrd="0" parTransId="{7D0ED1F0-3569-4178-BC82-D0062D434707}" sibTransId="{13FDB224-27CD-468A-95E5-10296E96456C}"/>
+    <dgm:cxn modelId="{CF574234-1FFE-4641-8B4E-38E8FFD6C2EC}" type="presOf" srcId="{7ED885B8-573F-4374-A607-E9CCD052A7AF}" destId="{C4C4BC72-2AE6-416D-8ADF-0220106CB8A8}" srcOrd="0" destOrd="0" presId="urn:microsoft.com/office/officeart/2005/8/layout/vList2"/>
+    <dgm:cxn modelId="{73BCEE3C-C889-418A-AC71-D87D15027EF4}" type="presOf" srcId="{1AC90C0C-0A34-44C4-A888-A760DDCDE8EF}" destId="{960DAD15-C566-4173-AC62-B4C0799E57C7}" srcOrd="0" destOrd="0" presId="urn:microsoft.com/office/officeart/2005/8/layout/vList2"/>
+    <dgm:cxn modelId="{C1070B3E-F155-43F0-A6A4-B4A8E12B160A}" srcId="{1AC90C0C-0A34-44C4-A888-A760DDCDE8EF}" destId="{36B64279-2124-4BE1-9540-2B1B8DEFFF36}" srcOrd="1" destOrd="0" parTransId="{409D49FC-D2D9-4735-9C2E-1A94D59DE6A5}" sibTransId="{51402C73-91BB-46DD-BCA4-A80C08969667}"/>
+    <dgm:cxn modelId="{1A552579-884E-4520-A31D-1FB6C23FB3B2}" type="presOf" srcId="{32EED0CE-423D-4A40-995F-C6776E473085}" destId="{559BC1A5-774E-4A3B-8B7A-679673BB04D4}" srcOrd="0" destOrd="0" presId="urn:microsoft.com/office/officeart/2005/8/layout/vList2"/>
+    <dgm:cxn modelId="{DA93137B-D703-4D6B-B366-F2DB85CE94BF}" srcId="{1AC90C0C-0A34-44C4-A888-A760DDCDE8EF}" destId="{A244C327-62DD-4127-BBB3-F162E69FA163}" srcOrd="0" destOrd="0" parTransId="{130D473A-988B-4668-AA62-3B1DF509DE00}" sibTransId="{D899C8B4-DFB8-448C-A917-14B16AA4B37D}"/>
+    <dgm:cxn modelId="{B3CA93C3-96A7-49D3-8BBD-BFE81C92D728}" type="presOf" srcId="{A244C327-62DD-4127-BBB3-F162E69FA163}" destId="{BA0BDB99-6C13-48A7-95E9-7B8CB19DFC6B}" srcOrd="0" destOrd="0" presId="urn:microsoft.com/office/officeart/2005/8/layout/vList2"/>
+    <dgm:cxn modelId="{535DF0C4-95CB-44B9-ACA7-00522D07191C}" type="presOf" srcId="{36B64279-2124-4BE1-9540-2B1B8DEFFF36}" destId="{92A9DC77-3381-48EE-AE93-2E1D48CAA540}" srcOrd="0" destOrd="0" presId="urn:microsoft.com/office/officeart/2005/8/layout/vList2"/>
+    <dgm:cxn modelId="{F5004BEE-5C6A-4279-8F11-BE59E984B574}" srcId="{1AC90C0C-0A34-44C4-A888-A760DDCDE8EF}" destId="{7ED885B8-573F-4374-A607-E9CCD052A7AF}" srcOrd="3" destOrd="0" parTransId="{527345AD-07DB-4796-A02D-A9ABF5D6A591}" sibTransId="{A346F3DD-89F0-4DCA-A6AF-BC1E37634A50}"/>
+    <dgm:cxn modelId="{A035AA38-6301-4C1D-AB82-AF911A60EC46}" type="presParOf" srcId="{960DAD15-C566-4173-AC62-B4C0799E57C7}" destId="{BA0BDB99-6C13-48A7-95E9-7B8CB19DFC6B}" srcOrd="0" destOrd="0" presId="urn:microsoft.com/office/officeart/2005/8/layout/vList2"/>
+    <dgm:cxn modelId="{096AC96F-A4A6-427B-B26C-DCBFCBD68D31}" type="presParOf" srcId="{960DAD15-C566-4173-AC62-B4C0799E57C7}" destId="{A37D3A07-AD55-4280-90DD-0750DE08C720}" srcOrd="1" destOrd="0" presId="urn:microsoft.com/office/officeart/2005/8/layout/vList2"/>
+    <dgm:cxn modelId="{F6582D08-652D-4B2C-8EFC-B474FBCD456F}" type="presParOf" srcId="{960DAD15-C566-4173-AC62-B4C0799E57C7}" destId="{92A9DC77-3381-48EE-AE93-2E1D48CAA540}" srcOrd="2" destOrd="0" presId="urn:microsoft.com/office/officeart/2005/8/layout/vList2"/>
+    <dgm:cxn modelId="{0F5D550D-3340-45B9-A05B-6F97322843BA}" type="presParOf" srcId="{960DAD15-C566-4173-AC62-B4C0799E57C7}" destId="{2668678B-4E83-4BA1-AC6E-0665681C8C0D}" srcOrd="3" destOrd="0" presId="urn:microsoft.com/office/officeart/2005/8/layout/vList2"/>
+    <dgm:cxn modelId="{C3B36DFD-98D1-4C42-9D40-948B35AC0E95}" type="presParOf" srcId="{960DAD15-C566-4173-AC62-B4C0799E57C7}" destId="{559BC1A5-774E-4A3B-8B7A-679673BB04D4}" srcOrd="4" destOrd="0" presId="urn:microsoft.com/office/officeart/2005/8/layout/vList2"/>
+    <dgm:cxn modelId="{15339008-B73B-41AD-A51E-1A4C34E66499}" type="presParOf" srcId="{960DAD15-C566-4173-AC62-B4C0799E57C7}" destId="{70F39DD4-57CC-4B0D-8D08-3978A7BB3CAE}" srcOrd="5" destOrd="0" presId="urn:microsoft.com/office/officeart/2005/8/layout/vList2"/>
+    <dgm:cxn modelId="{8F9F44D1-EE19-46AE-9618-2EFC92D5875C}" type="presParOf" srcId="{960DAD15-C566-4173-AC62-B4C0799E57C7}" destId="{C4C4BC72-2AE6-416D-8ADF-0220106CB8A8}" srcOrd="6" destOrd="0" presId="urn:microsoft.com/office/officeart/2005/8/layout/vList2"/>
+  </dgm:cxnLst>
+  <dgm:bg/>
+  <dgm:whole/>
+  <dgm:extLst>
+    <a:ext uri="http://schemas.microsoft.com/office/drawing/2008/diagram">
+      <dsp:dataModelExt xmlns:dsp="http://schemas.microsoft.com/office/drawing/2008/diagram" relId="rId6" minVer="http://schemas.openxmlformats.org/drawingml/2006/diagram"/>
+    </a:ext>
+  </dgm:extLst>
+</dgm:dataModel>
+</file>
+
+<file path=ppt/diagrams/data2.xml><?xml version="1.0" encoding="utf-8"?>
 <dgm:dataModel xmlns:dgm="http://schemas.openxmlformats.org/drawingml/2006/diagram" xmlns:a="http://schemas.openxmlformats.org/drawingml/2006/main">
   <dgm:ptLst>
     <dgm:pt modelId="{9A956502-3703-4132-AC03-69BF4A493969}" type="doc">
@@ -1282,6 +2326,430 @@
 </file>
 
 <file path=ppt/diagrams/drawing1.xml><?xml version="1.0" encoding="utf-8"?>
+<dsp:drawing xmlns:dgm="http://schemas.openxmlformats.org/drawingml/2006/diagram" xmlns:dsp="http://schemas.microsoft.com/office/drawing/2008/diagram" xmlns:a="http://schemas.openxmlformats.org/drawingml/2006/main">
+  <dsp:spTree>
+    <dsp:nvGrpSpPr>
+      <dsp:cNvPr id="0" name=""/>
+      <dsp:cNvGrpSpPr/>
+    </dsp:nvGrpSpPr>
+    <dsp:grpSpPr/>
+    <dsp:sp modelId="{BA0BDB99-6C13-48A7-95E9-7B8CB19DFC6B}">
+      <dsp:nvSpPr>
+        <dsp:cNvPr id="0" name=""/>
+        <dsp:cNvSpPr/>
+      </dsp:nvSpPr>
+      <dsp:spPr>
+        <a:xfrm>
+          <a:off x="0" y="797719"/>
+          <a:ext cx="6666833" cy="914940"/>
+        </a:xfrm>
+        <a:prstGeom prst="roundRect">
+          <a:avLst/>
+        </a:prstGeom>
+        <a:gradFill rotWithShape="0">
+          <a:gsLst>
+            <a:gs pos="0">
+              <a:schemeClr val="accent2">
+                <a:hueOff val="0"/>
+                <a:satOff val="0"/>
+                <a:lumOff val="0"/>
+                <a:alphaOff val="0"/>
+                <a:satMod val="103000"/>
+                <a:lumMod val="102000"/>
+                <a:tint val="94000"/>
+              </a:schemeClr>
+            </a:gs>
+            <a:gs pos="50000">
+              <a:schemeClr val="accent2">
+                <a:hueOff val="0"/>
+                <a:satOff val="0"/>
+                <a:lumOff val="0"/>
+                <a:alphaOff val="0"/>
+                <a:satMod val="110000"/>
+                <a:lumMod val="100000"/>
+                <a:shade val="100000"/>
+              </a:schemeClr>
+            </a:gs>
+            <a:gs pos="100000">
+              <a:schemeClr val="accent2">
+                <a:hueOff val="0"/>
+                <a:satOff val="0"/>
+                <a:lumOff val="0"/>
+                <a:alphaOff val="0"/>
+                <a:lumMod val="99000"/>
+                <a:satMod val="120000"/>
+                <a:shade val="78000"/>
+              </a:schemeClr>
+            </a:gs>
+          </a:gsLst>
+          <a:lin ang="5400000" scaled="0"/>
+        </a:gradFill>
+        <a:ln>
+          <a:noFill/>
+        </a:ln>
+        <a:effectLst/>
+      </dsp:spPr>
+      <dsp:style>
+        <a:lnRef idx="0">
+          <a:scrgbClr r="0" g="0" b="0"/>
+        </a:lnRef>
+        <a:fillRef idx="3">
+          <a:scrgbClr r="0" g="0" b="0"/>
+        </a:fillRef>
+        <a:effectRef idx="2">
+          <a:scrgbClr r="0" g="0" b="0"/>
+        </a:effectRef>
+        <a:fontRef idx="minor">
+          <a:schemeClr val="lt1"/>
+        </a:fontRef>
+      </dsp:style>
+      <dsp:txBody>
+        <a:bodyPr spcFirstLastPara="0" vert="horz" wrap="square" lIns="87630" tIns="87630" rIns="87630" bIns="87630" numCol="1" spcCol="1270" anchor="ctr" anchorCtr="0">
+          <a:noAutofit/>
+        </a:bodyPr>
+        <a:lstStyle/>
+        <a:p>
+          <a:pPr marL="0" lvl="0" indent="0" algn="l" defTabSz="1022350">
+            <a:lnSpc>
+              <a:spcPct val="90000"/>
+            </a:lnSpc>
+            <a:spcBef>
+              <a:spcPct val="0"/>
+            </a:spcBef>
+            <a:spcAft>
+              <a:spcPct val="35000"/>
+            </a:spcAft>
+            <a:buNone/>
+          </a:pPr>
+          <a:r>
+            <a:rPr lang="en-US" sz="2300" b="1" kern="1200"/>
+            <a:t>The Pool: </a:t>
+          </a:r>
+          <a:r>
+            <a:rPr lang="en-US" sz="2300" kern="1200"/>
+            <a:t>Strictly “Cinderella Candidates (seed 10 through 16).</a:t>
+          </a:r>
+        </a:p>
+      </dsp:txBody>
+      <dsp:txXfrm>
+        <a:off x="44664" y="842383"/>
+        <a:ext cx="6577505" cy="825612"/>
+      </dsp:txXfrm>
+    </dsp:sp>
+    <dsp:sp modelId="{92A9DC77-3381-48EE-AE93-2E1D48CAA540}">
+      <dsp:nvSpPr>
+        <dsp:cNvPr id="0" name=""/>
+        <dsp:cNvSpPr/>
+      </dsp:nvSpPr>
+      <dsp:spPr>
+        <a:xfrm>
+          <a:off x="0" y="1778899"/>
+          <a:ext cx="6666833" cy="914940"/>
+        </a:xfrm>
+        <a:prstGeom prst="roundRect">
+          <a:avLst/>
+        </a:prstGeom>
+        <a:gradFill rotWithShape="0">
+          <a:gsLst>
+            <a:gs pos="0">
+              <a:schemeClr val="accent2">
+                <a:hueOff val="2147871"/>
+                <a:satOff val="-6164"/>
+                <a:lumOff val="-9870"/>
+                <a:alphaOff val="0"/>
+                <a:satMod val="103000"/>
+                <a:lumMod val="102000"/>
+                <a:tint val="94000"/>
+              </a:schemeClr>
+            </a:gs>
+            <a:gs pos="50000">
+              <a:schemeClr val="accent2">
+                <a:hueOff val="2147871"/>
+                <a:satOff val="-6164"/>
+                <a:lumOff val="-9870"/>
+                <a:alphaOff val="0"/>
+                <a:satMod val="110000"/>
+                <a:lumMod val="100000"/>
+                <a:shade val="100000"/>
+              </a:schemeClr>
+            </a:gs>
+            <a:gs pos="100000">
+              <a:schemeClr val="accent2">
+                <a:hueOff val="2147871"/>
+                <a:satOff val="-6164"/>
+                <a:lumOff val="-9870"/>
+                <a:alphaOff val="0"/>
+                <a:lumMod val="99000"/>
+                <a:satMod val="120000"/>
+                <a:shade val="78000"/>
+              </a:schemeClr>
+            </a:gs>
+          </a:gsLst>
+          <a:lin ang="5400000" scaled="0"/>
+        </a:gradFill>
+        <a:ln>
+          <a:noFill/>
+        </a:ln>
+        <a:effectLst/>
+      </dsp:spPr>
+      <dsp:style>
+        <a:lnRef idx="0">
+          <a:scrgbClr r="0" g="0" b="0"/>
+        </a:lnRef>
+        <a:fillRef idx="3">
+          <a:scrgbClr r="0" g="0" b="0"/>
+        </a:fillRef>
+        <a:effectRef idx="2">
+          <a:scrgbClr r="0" g="0" b="0"/>
+        </a:effectRef>
+        <a:fontRef idx="minor">
+          <a:schemeClr val="lt1"/>
+        </a:fontRef>
+      </dsp:style>
+      <dsp:txBody>
+        <a:bodyPr spcFirstLastPara="0" vert="horz" wrap="square" lIns="87630" tIns="87630" rIns="87630" bIns="87630" numCol="1" spcCol="1270" anchor="ctr" anchorCtr="0">
+          <a:noAutofit/>
+        </a:bodyPr>
+        <a:lstStyle/>
+        <a:p>
+          <a:pPr marL="0" lvl="0" indent="0" algn="l" defTabSz="1022350">
+            <a:lnSpc>
+              <a:spcPct val="90000"/>
+            </a:lnSpc>
+            <a:spcBef>
+              <a:spcPct val="0"/>
+            </a:spcBef>
+            <a:spcAft>
+              <a:spcPct val="35000"/>
+            </a:spcAft>
+            <a:buNone/>
+          </a:pPr>
+          <a:r>
+            <a:rPr lang="en-US" sz="2300" b="1" kern="1200"/>
+            <a:t>The Target: </a:t>
+          </a:r>
+          <a:r>
+            <a:rPr lang="en-US" sz="2300" kern="1200"/>
+            <a:t>Reaching the Sweet 16</a:t>
+          </a:r>
+        </a:p>
+      </dsp:txBody>
+      <dsp:txXfrm>
+        <a:off x="44664" y="1823563"/>
+        <a:ext cx="6577505" cy="825612"/>
+      </dsp:txXfrm>
+    </dsp:sp>
+    <dsp:sp modelId="{559BC1A5-774E-4A3B-8B7A-679673BB04D4}">
+      <dsp:nvSpPr>
+        <dsp:cNvPr id="0" name=""/>
+        <dsp:cNvSpPr/>
+      </dsp:nvSpPr>
+      <dsp:spPr>
+        <a:xfrm>
+          <a:off x="0" y="2760080"/>
+          <a:ext cx="6666833" cy="914940"/>
+        </a:xfrm>
+        <a:prstGeom prst="roundRect">
+          <a:avLst/>
+        </a:prstGeom>
+        <a:gradFill rotWithShape="0">
+          <a:gsLst>
+            <a:gs pos="0">
+              <a:schemeClr val="accent2">
+                <a:hueOff val="4295743"/>
+                <a:satOff val="-12329"/>
+                <a:lumOff val="-19739"/>
+                <a:alphaOff val="0"/>
+                <a:satMod val="103000"/>
+                <a:lumMod val="102000"/>
+                <a:tint val="94000"/>
+              </a:schemeClr>
+            </a:gs>
+            <a:gs pos="50000">
+              <a:schemeClr val="accent2">
+                <a:hueOff val="4295743"/>
+                <a:satOff val="-12329"/>
+                <a:lumOff val="-19739"/>
+                <a:alphaOff val="0"/>
+                <a:satMod val="110000"/>
+                <a:lumMod val="100000"/>
+                <a:shade val="100000"/>
+              </a:schemeClr>
+            </a:gs>
+            <a:gs pos="100000">
+              <a:schemeClr val="accent2">
+                <a:hueOff val="4295743"/>
+                <a:satOff val="-12329"/>
+                <a:lumOff val="-19739"/>
+                <a:alphaOff val="0"/>
+                <a:lumMod val="99000"/>
+                <a:satMod val="120000"/>
+                <a:shade val="78000"/>
+              </a:schemeClr>
+            </a:gs>
+          </a:gsLst>
+          <a:lin ang="5400000" scaled="0"/>
+        </a:gradFill>
+        <a:ln>
+          <a:noFill/>
+        </a:ln>
+        <a:effectLst/>
+      </dsp:spPr>
+      <dsp:style>
+        <a:lnRef idx="0">
+          <a:scrgbClr r="0" g="0" b="0"/>
+        </a:lnRef>
+        <a:fillRef idx="3">
+          <a:scrgbClr r="0" g="0" b="0"/>
+        </a:fillRef>
+        <a:effectRef idx="2">
+          <a:scrgbClr r="0" g="0" b="0"/>
+        </a:effectRef>
+        <a:fontRef idx="minor">
+          <a:schemeClr val="lt1"/>
+        </a:fontRef>
+      </dsp:style>
+      <dsp:txBody>
+        <a:bodyPr spcFirstLastPara="0" vert="horz" wrap="square" lIns="87630" tIns="87630" rIns="87630" bIns="87630" numCol="1" spcCol="1270" anchor="ctr" anchorCtr="0">
+          <a:noAutofit/>
+        </a:bodyPr>
+        <a:lstStyle/>
+        <a:p>
+          <a:pPr marL="0" lvl="0" indent="0" algn="l" defTabSz="1022350">
+            <a:lnSpc>
+              <a:spcPct val="90000"/>
+            </a:lnSpc>
+            <a:spcBef>
+              <a:spcPct val="0"/>
+            </a:spcBef>
+            <a:spcAft>
+              <a:spcPct val="35000"/>
+            </a:spcAft>
+            <a:buNone/>
+          </a:pPr>
+          <a:r>
+            <a:rPr lang="en-US" sz="2300" b="1" kern="1200"/>
+            <a:t>The Challenge: </a:t>
+          </a:r>
+          <a:r>
+            <a:rPr lang="en-US" sz="2300" kern="1200"/>
+            <a:t>Extreme Class Imbalance (Only ~45 true Cinderellas out of 680 candidates = ~6.6%</a:t>
+          </a:r>
+        </a:p>
+      </dsp:txBody>
+      <dsp:txXfrm>
+        <a:off x="44664" y="2804744"/>
+        <a:ext cx="6577505" cy="825612"/>
+      </dsp:txXfrm>
+    </dsp:sp>
+    <dsp:sp modelId="{C4C4BC72-2AE6-416D-8ADF-0220106CB8A8}">
+      <dsp:nvSpPr>
+        <dsp:cNvPr id="0" name=""/>
+        <dsp:cNvSpPr/>
+      </dsp:nvSpPr>
+      <dsp:spPr>
+        <a:xfrm>
+          <a:off x="0" y="3741260"/>
+          <a:ext cx="6666833" cy="914940"/>
+        </a:xfrm>
+        <a:prstGeom prst="roundRect">
+          <a:avLst/>
+        </a:prstGeom>
+        <a:gradFill rotWithShape="0">
+          <a:gsLst>
+            <a:gs pos="0">
+              <a:schemeClr val="accent2">
+                <a:hueOff val="6443614"/>
+                <a:satOff val="-18493"/>
+                <a:lumOff val="-29609"/>
+                <a:alphaOff val="0"/>
+                <a:satMod val="103000"/>
+                <a:lumMod val="102000"/>
+                <a:tint val="94000"/>
+              </a:schemeClr>
+            </a:gs>
+            <a:gs pos="50000">
+              <a:schemeClr val="accent2">
+                <a:hueOff val="6443614"/>
+                <a:satOff val="-18493"/>
+                <a:lumOff val="-29609"/>
+                <a:alphaOff val="0"/>
+                <a:satMod val="110000"/>
+                <a:lumMod val="100000"/>
+                <a:shade val="100000"/>
+              </a:schemeClr>
+            </a:gs>
+            <a:gs pos="100000">
+              <a:schemeClr val="accent2">
+                <a:hueOff val="6443614"/>
+                <a:satOff val="-18493"/>
+                <a:lumOff val="-29609"/>
+                <a:alphaOff val="0"/>
+                <a:lumMod val="99000"/>
+                <a:satMod val="120000"/>
+                <a:shade val="78000"/>
+              </a:schemeClr>
+            </a:gs>
+          </a:gsLst>
+          <a:lin ang="5400000" scaled="0"/>
+        </a:gradFill>
+        <a:ln>
+          <a:noFill/>
+        </a:ln>
+        <a:effectLst/>
+      </dsp:spPr>
+      <dsp:style>
+        <a:lnRef idx="0">
+          <a:scrgbClr r="0" g="0" b="0"/>
+        </a:lnRef>
+        <a:fillRef idx="3">
+          <a:scrgbClr r="0" g="0" b="0"/>
+        </a:fillRef>
+        <a:effectRef idx="2">
+          <a:scrgbClr r="0" g="0" b="0"/>
+        </a:effectRef>
+        <a:fontRef idx="minor">
+          <a:schemeClr val="lt1"/>
+        </a:fontRef>
+      </dsp:style>
+      <dsp:txBody>
+        <a:bodyPr spcFirstLastPara="0" vert="horz" wrap="square" lIns="87630" tIns="87630" rIns="87630" bIns="87630" numCol="1" spcCol="1270" anchor="ctr" anchorCtr="0">
+          <a:noAutofit/>
+        </a:bodyPr>
+        <a:lstStyle/>
+        <a:p>
+          <a:pPr marL="0" lvl="0" indent="0" algn="l" defTabSz="1022350">
+            <a:lnSpc>
+              <a:spcPct val="90000"/>
+            </a:lnSpc>
+            <a:spcBef>
+              <a:spcPct val="0"/>
+            </a:spcBef>
+            <a:spcAft>
+              <a:spcPct val="35000"/>
+            </a:spcAft>
+            <a:buNone/>
+          </a:pPr>
+          <a:r>
+            <a:rPr lang="en-US" sz="2300" b="1" kern="1200"/>
+            <a:t>The Metrics: </a:t>
+          </a:r>
+          <a:r>
+            <a:rPr lang="en-US" sz="2300" kern="1200"/>
+            <a:t>Precision-Recall AUC (PR-AUC) and F1 Score</a:t>
+          </a:r>
+        </a:p>
+      </dsp:txBody>
+      <dsp:txXfrm>
+        <a:off x="44664" y="3785924"/>
+        <a:ext cx="6577505" cy="825612"/>
+      </dsp:txXfrm>
+    </dsp:sp>
+  </dsp:spTree>
+</dsp:drawing>
+</file>
+
+<file path=ppt/diagrams/drawing2.xml><?xml version="1.0" encoding="utf-8"?>
 <dsp:drawing xmlns:dgm="http://schemas.openxmlformats.org/drawingml/2006/diagram" xmlns:dsp="http://schemas.microsoft.com/office/drawing/2008/diagram" xmlns:a="http://schemas.openxmlformats.org/drawingml/2006/main">
   <dsp:spTree>
     <dsp:nvGrpSpPr>
@@ -1687,6 +3155,173 @@
 </file>
 
 <file path=ppt/diagrams/layout1.xml><?xml version="1.0" encoding="utf-8"?>
+<dgm:layoutDef xmlns:dgm="http://schemas.openxmlformats.org/drawingml/2006/diagram" xmlns:a="http://schemas.openxmlformats.org/drawingml/2006/main" uniqueId="urn:microsoft.com/office/officeart/2005/8/layout/vList2">
+  <dgm:title val=""/>
+  <dgm:desc val=""/>
+  <dgm:catLst>
+    <dgm:cat type="list" pri="3000"/>
+    <dgm:cat type="convert" pri="1000"/>
+  </dgm:catLst>
+  <dgm:sampData>
+    <dgm:dataModel>
+      <dgm:ptLst>
+        <dgm:pt modelId="0" type="doc"/>
+        <dgm:pt modelId="1">
+          <dgm:prSet phldr="1"/>
+        </dgm:pt>
+        <dgm:pt modelId="11">
+          <dgm:prSet phldr="1"/>
+        </dgm:pt>
+        <dgm:pt modelId="2">
+          <dgm:prSet phldr="1"/>
+        </dgm:pt>
+        <dgm:pt modelId="21">
+          <dgm:prSet phldr="1"/>
+        </dgm:pt>
+      </dgm:ptLst>
+      <dgm:cxnLst>
+        <dgm:cxn modelId="4" srcId="0" destId="1" srcOrd="0" destOrd="0"/>
+        <dgm:cxn modelId="5" srcId="0" destId="2" srcOrd="1" destOrd="0"/>
+        <dgm:cxn modelId="12" srcId="1" destId="11" srcOrd="0" destOrd="0"/>
+        <dgm:cxn modelId="23" srcId="2" destId="21" srcOrd="0" destOrd="0"/>
+      </dgm:cxnLst>
+      <dgm:bg/>
+      <dgm:whole/>
+    </dgm:dataModel>
+  </dgm:sampData>
+  <dgm:styleData>
+    <dgm:dataModel>
+      <dgm:ptLst>
+        <dgm:pt modelId="0" type="doc"/>
+        <dgm:pt modelId="1"/>
+        <dgm:pt modelId="2"/>
+      </dgm:ptLst>
+      <dgm:cxnLst>
+        <dgm:cxn modelId="3" srcId="0" destId="1" srcOrd="0" destOrd="0"/>
+        <dgm:cxn modelId="4" srcId="0" destId="2" srcOrd="1" destOrd="0"/>
+      </dgm:cxnLst>
+      <dgm:bg/>
+      <dgm:whole/>
+    </dgm:dataModel>
+  </dgm:styleData>
+  <dgm:clrData>
+    <dgm:dataModel>
+      <dgm:ptLst>
+        <dgm:pt modelId="0" type="doc"/>
+        <dgm:pt modelId="1"/>
+        <dgm:pt modelId="2"/>
+        <dgm:pt modelId="3"/>
+        <dgm:pt modelId="4"/>
+      </dgm:ptLst>
+      <dgm:cxnLst>
+        <dgm:cxn modelId="5" srcId="0" destId="1" srcOrd="0" destOrd="0"/>
+        <dgm:cxn modelId="6" srcId="0" destId="2" srcOrd="1" destOrd="0"/>
+        <dgm:cxn modelId="7" srcId="0" destId="3" srcOrd="2" destOrd="0"/>
+        <dgm:cxn modelId="8" srcId="0" destId="4" srcOrd="3" destOrd="0"/>
+      </dgm:cxnLst>
+      <dgm:bg/>
+      <dgm:whole/>
+    </dgm:dataModel>
+  </dgm:clrData>
+  <dgm:layoutNode name="linear">
+    <dgm:varLst>
+      <dgm:animLvl val="lvl"/>
+      <dgm:resizeHandles val="exact"/>
+    </dgm:varLst>
+    <dgm:alg type="lin">
+      <dgm:param type="linDir" val="fromT"/>
+      <dgm:param type="vertAlign" val="mid"/>
+    </dgm:alg>
+    <dgm:shape xmlns:r="http://schemas.openxmlformats.org/officeDocument/2006/relationships" r:blip="">
+      <dgm:adjLst/>
+    </dgm:shape>
+    <dgm:presOf/>
+    <dgm:constrLst>
+      <dgm:constr type="w" for="ch" forName="parentText" refType="w"/>
+      <dgm:constr type="h" for="ch" forName="parentText" refType="primFontSz" refFor="ch" refForName="parentText" fact="0.52"/>
+      <dgm:constr type="w" for="ch" forName="childText" refType="w"/>
+      <dgm:constr type="h" for="ch" forName="childText" refType="primFontSz" refFor="ch" refForName="parentText" fact="0.46"/>
+      <dgm:constr type="h" for="ch" forName="parentText" op="equ"/>
+      <dgm:constr type="primFontSz" for="ch" forName="parentText" op="equ" val="65"/>
+      <dgm:constr type="primFontSz" for="ch" forName="childText" refType="primFontSz" refFor="ch" refForName="parentText" op="equ"/>
+      <dgm:constr type="h" for="ch" forName="spacer" refType="primFontSz" refFor="ch" refForName="parentText" fact="0.08"/>
+    </dgm:constrLst>
+    <dgm:ruleLst>
+      <dgm:rule type="primFontSz" for="ch" forName="parentText" val="5" fact="NaN" max="NaN"/>
+    </dgm:ruleLst>
+    <dgm:forEach name="Name0" axis="ch" ptType="node">
+      <dgm:layoutNode name="parentText" styleLbl="node1">
+        <dgm:varLst>
+          <dgm:chMax val="0"/>
+          <dgm:bulletEnabled val="1"/>
+        </dgm:varLst>
+        <dgm:alg type="tx">
+          <dgm:param type="parTxLTRAlign" val="l"/>
+          <dgm:param type="parTxRTLAlign" val="r"/>
+        </dgm:alg>
+        <dgm:shape xmlns:r="http://schemas.openxmlformats.org/officeDocument/2006/relationships" type="roundRect" r:blip="">
+          <dgm:adjLst/>
+        </dgm:shape>
+        <dgm:presOf axis="self"/>
+        <dgm:constrLst>
+          <dgm:constr type="tMarg" refType="primFontSz" fact="0.3"/>
+          <dgm:constr type="bMarg" refType="primFontSz" fact="0.3"/>
+          <dgm:constr type="lMarg" refType="primFontSz" fact="0.3"/>
+          <dgm:constr type="rMarg" refType="primFontSz" fact="0.3"/>
+        </dgm:constrLst>
+        <dgm:ruleLst>
+          <dgm:rule type="h" val="INF" fact="NaN" max="NaN"/>
+        </dgm:ruleLst>
+      </dgm:layoutNode>
+      <dgm:choose name="Name1">
+        <dgm:if name="Name2" axis="ch" ptType="node" func="cnt" op="gte" val="1">
+          <dgm:layoutNode name="childText" styleLbl="revTx">
+            <dgm:varLst>
+              <dgm:bulletEnabled val="1"/>
+            </dgm:varLst>
+            <dgm:alg type="tx">
+              <dgm:param type="stBulletLvl" val="1"/>
+              <dgm:param type="lnSpAfChP" val="20"/>
+            </dgm:alg>
+            <dgm:shape xmlns:r="http://schemas.openxmlformats.org/officeDocument/2006/relationships" type="rect" r:blip="">
+              <dgm:adjLst/>
+            </dgm:shape>
+            <dgm:presOf axis="des" ptType="node"/>
+            <dgm:constrLst>
+              <dgm:constr type="tMarg" refType="primFontSz" fact="0.1"/>
+              <dgm:constr type="bMarg" refType="primFontSz" fact="0.1"/>
+              <dgm:constr type="lMarg" refType="w" fact="0.09"/>
+            </dgm:constrLst>
+            <dgm:ruleLst>
+              <dgm:rule type="h" val="INF" fact="NaN" max="NaN"/>
+            </dgm:ruleLst>
+          </dgm:layoutNode>
+        </dgm:if>
+        <dgm:else name="Name3">
+          <dgm:choose name="Name4">
+            <dgm:if name="Name5" axis="par ch" ptType="doc node" func="cnt" op="gte" val="2">
+              <dgm:forEach name="Name6" axis="followSib" ptType="sibTrans" cnt="1">
+                <dgm:layoutNode name="spacer">
+                  <dgm:alg type="sp"/>
+                  <dgm:shape xmlns:r="http://schemas.openxmlformats.org/officeDocument/2006/relationships" r:blip="">
+                    <dgm:adjLst/>
+                  </dgm:shape>
+                  <dgm:presOf/>
+                  <dgm:constrLst/>
+                  <dgm:ruleLst/>
+                </dgm:layoutNode>
+              </dgm:forEach>
+            </dgm:if>
+            <dgm:else name="Name7"/>
+          </dgm:choose>
+        </dgm:else>
+      </dgm:choose>
+    </dgm:forEach>
+  </dgm:layoutNode>
+</dgm:layoutDef>
+</file>
+
+<file path=ppt/diagrams/layout2.xml><?xml version="1.0" encoding="utf-8"?>
 <dgm:layoutDef xmlns:dgm="http://schemas.openxmlformats.org/drawingml/2006/diagram" xmlns:a="http://schemas.openxmlformats.org/drawingml/2006/main" uniqueId="urn:microsoft.com/office/officeart/2005/8/layout/hierarchy1">
   <dgm:title val=""/>
   <dgm:desc val=""/>
@@ -2250,6 +3885,1040 @@
 </file>
 
 <file path=ppt/diagrams/quickStyle1.xml><?xml version="1.0" encoding="utf-8"?>
+<dgm:styleDef xmlns:dgm="http://schemas.openxmlformats.org/drawingml/2006/diagram" xmlns:a="http://schemas.openxmlformats.org/drawingml/2006/main" uniqueId="urn:microsoft.com/office/officeart/2005/8/quickstyle/simple4">
+  <dgm:title val=""/>
+  <dgm:desc val=""/>
+  <dgm:catLst>
+    <dgm:cat type="simple" pri="10400"/>
+  </dgm:catLst>
+  <dgm:scene3d>
+    <a:camera prst="orthographicFront"/>
+    <a:lightRig rig="threePt" dir="t"/>
+  </dgm:scene3d>
+  <dgm:styleLbl name="node0">
+    <dgm:scene3d>
+      <a:camera prst="orthographicFront"/>
+      <a:lightRig rig="threePt" dir="t"/>
+    </dgm:scene3d>
+    <dgm:sp3d/>
+    <dgm:txPr/>
+    <dgm:style>
+      <a:lnRef idx="0">
+        <a:scrgbClr r="0" g="0" b="0"/>
+      </a:lnRef>
+      <a:fillRef idx="3">
+        <a:scrgbClr r="0" g="0" b="0"/>
+      </a:fillRef>
+      <a:effectRef idx="2">
+        <a:scrgbClr r="0" g="0" b="0"/>
+      </a:effectRef>
+      <a:fontRef idx="minor">
+        <a:schemeClr val="lt1"/>
+      </a:fontRef>
+    </dgm:style>
+  </dgm:styleLbl>
+  <dgm:styleLbl name="lnNode1">
+    <dgm:scene3d>
+      <a:camera prst="orthographicFront"/>
+      <a:lightRig rig="threePt" dir="t"/>
+    </dgm:scene3d>
+    <dgm:sp3d/>
+    <dgm:txPr/>
+    <dgm:style>
+      <a:lnRef idx="1">
+        <a:scrgbClr r="0" g="0" b="0"/>
+      </a:lnRef>
+      <a:fillRef idx="3">
+        <a:scrgbClr r="0" g="0" b="0"/>
+      </a:fillRef>
+      <a:effectRef idx="2">
+        <a:scrgbClr r="0" g="0" b="0"/>
+      </a:effectRef>
+      <a:fontRef idx="minor">
+        <a:schemeClr val="lt1"/>
+      </a:fontRef>
+    </dgm:style>
+  </dgm:styleLbl>
+  <dgm:styleLbl name="vennNode1">
+    <dgm:scene3d>
+      <a:camera prst="orthographicFront"/>
+      <a:lightRig rig="threePt" dir="t"/>
+    </dgm:scene3d>
+    <dgm:sp3d/>
+    <dgm:txPr/>
+    <dgm:style>
+      <a:lnRef idx="0">
+        <a:scrgbClr r="0" g="0" b="0"/>
+      </a:lnRef>
+      <a:fillRef idx="3">
+        <a:scrgbClr r="0" g="0" b="0"/>
+      </a:fillRef>
+      <a:effectRef idx="0">
+        <a:scrgbClr r="0" g="0" b="0"/>
+      </a:effectRef>
+      <a:fontRef idx="minor">
+        <a:schemeClr val="tx1"/>
+      </a:fontRef>
+    </dgm:style>
+  </dgm:styleLbl>
+  <dgm:styleLbl name="alignNode1">
+    <dgm:scene3d>
+      <a:camera prst="orthographicFront"/>
+      <a:lightRig rig="threePt" dir="t"/>
+    </dgm:scene3d>
+    <dgm:sp3d/>
+    <dgm:txPr/>
+    <dgm:style>
+      <a:lnRef idx="1">
+        <a:scrgbClr r="0" g="0" b="0"/>
+      </a:lnRef>
+      <a:fillRef idx="3">
+        <a:scrgbClr r="0" g="0" b="0"/>
+      </a:fillRef>
+      <a:effectRef idx="2">
+        <a:scrgbClr r="0" g="0" b="0"/>
+      </a:effectRef>
+      <a:fontRef idx="minor">
+        <a:schemeClr val="lt1"/>
+      </a:fontRef>
+    </dgm:style>
+  </dgm:styleLbl>
+  <dgm:styleLbl name="node1">
+    <dgm:scene3d>
+      <a:camera prst="orthographicFront"/>
+      <a:lightRig rig="threePt" dir="t"/>
+    </dgm:scene3d>
+    <dgm:sp3d/>
+    <dgm:txPr/>
+    <dgm:style>
+      <a:lnRef idx="0">
+        <a:scrgbClr r="0" g="0" b="0"/>
+      </a:lnRef>
+      <a:fillRef idx="3">
+        <a:scrgbClr r="0" g="0" b="0"/>
+      </a:fillRef>
+      <a:effectRef idx="2">
+        <a:scrgbClr r="0" g="0" b="0"/>
+      </a:effectRef>
+      <a:fontRef idx="minor">
+        <a:schemeClr val="lt1"/>
+      </a:fontRef>
+    </dgm:style>
+  </dgm:styleLbl>
+  <dgm:styleLbl name="node2">
+    <dgm:scene3d>
+      <a:camera prst="orthographicFront"/>
+      <a:lightRig rig="threePt" dir="t"/>
+    </dgm:scene3d>
+    <dgm:sp3d/>
+    <dgm:txPr/>
+    <dgm:style>
+      <a:lnRef idx="0">
+        <a:scrgbClr r="0" g="0" b="0"/>
+      </a:lnRef>
+      <a:fillRef idx="3">
+        <a:scrgbClr r="0" g="0" b="0"/>
+      </a:fillRef>
+      <a:effectRef idx="2">
+        <a:scrgbClr r="0" g="0" b="0"/>
+      </a:effectRef>
+      <a:fontRef idx="minor">
+        <a:schemeClr val="lt1"/>
+      </a:fontRef>
+    </dgm:style>
+  </dgm:styleLbl>
+  <dgm:styleLbl name="node3">
+    <dgm:scene3d>
+      <a:camera prst="orthographicFront"/>
+      <a:lightRig rig="threePt" dir="t"/>
+    </dgm:scene3d>
+    <dgm:sp3d/>
+    <dgm:txPr/>
+    <dgm:style>
+      <a:lnRef idx="0">
+        <a:scrgbClr r="0" g="0" b="0"/>
+      </a:lnRef>
+      <a:fillRef idx="3">
+        <a:scrgbClr r="0" g="0" b="0"/>
+      </a:fillRef>
+      <a:effectRef idx="2">
+        <a:scrgbClr r="0" g="0" b="0"/>
+      </a:effectRef>
+      <a:fontRef idx="minor">
+        <a:schemeClr val="lt1"/>
+      </a:fontRef>
+    </dgm:style>
+  </dgm:styleLbl>
+  <dgm:styleLbl name="node4">
+    <dgm:scene3d>
+      <a:camera prst="orthographicFront"/>
+      <a:lightRig rig="threePt" dir="t"/>
+    </dgm:scene3d>
+    <dgm:sp3d/>
+    <dgm:txPr/>
+    <dgm:style>
+      <a:lnRef idx="0">
+        <a:scrgbClr r="0" g="0" b="0"/>
+      </a:lnRef>
+      <a:fillRef idx="3">
+        <a:scrgbClr r="0" g="0" b="0"/>
+      </a:fillRef>
+      <a:effectRef idx="2">
+        <a:scrgbClr r="0" g="0" b="0"/>
+      </a:effectRef>
+      <a:fontRef idx="minor">
+        <a:schemeClr val="lt1"/>
+      </a:fontRef>
+    </dgm:style>
+  </dgm:styleLbl>
+  <dgm:styleLbl name="fgImgPlace1">
+    <dgm:scene3d>
+      <a:camera prst="orthographicFront"/>
+      <a:lightRig rig="threePt" dir="t"/>
+    </dgm:scene3d>
+    <dgm:sp3d/>
+    <dgm:txPr/>
+    <dgm:style>
+      <a:lnRef idx="0">
+        <a:scrgbClr r="0" g="0" b="0"/>
+      </a:lnRef>
+      <a:fillRef idx="1">
+        <a:scrgbClr r="0" g="0" b="0"/>
+      </a:fillRef>
+      <a:effectRef idx="2">
+        <a:scrgbClr r="0" g="0" b="0"/>
+      </a:effectRef>
+      <a:fontRef idx="minor"/>
+    </dgm:style>
+  </dgm:styleLbl>
+  <dgm:styleLbl name="alignImgPlace1">
+    <dgm:scene3d>
+      <a:camera prst="orthographicFront"/>
+      <a:lightRig rig="threePt" dir="t"/>
+    </dgm:scene3d>
+    <dgm:sp3d/>
+    <dgm:txPr/>
+    <dgm:style>
+      <a:lnRef idx="0">
+        <a:scrgbClr r="0" g="0" b="0"/>
+      </a:lnRef>
+      <a:fillRef idx="1">
+        <a:scrgbClr r="0" g="0" b="0"/>
+      </a:fillRef>
+      <a:effectRef idx="2">
+        <a:scrgbClr r="0" g="0" b="0"/>
+      </a:effectRef>
+      <a:fontRef idx="minor"/>
+    </dgm:style>
+  </dgm:styleLbl>
+  <dgm:styleLbl name="bgImgPlace1">
+    <dgm:scene3d>
+      <a:camera prst="orthographicFront"/>
+      <a:lightRig rig="threePt" dir="t"/>
+    </dgm:scene3d>
+    <dgm:sp3d/>
+    <dgm:txPr/>
+    <dgm:style>
+      <a:lnRef idx="0">
+        <a:scrgbClr r="0" g="0" b="0"/>
+      </a:lnRef>
+      <a:fillRef idx="1">
+        <a:scrgbClr r="0" g="0" b="0"/>
+      </a:fillRef>
+      <a:effectRef idx="2">
+        <a:scrgbClr r="0" g="0" b="0"/>
+      </a:effectRef>
+      <a:fontRef idx="minor"/>
+    </dgm:style>
+  </dgm:styleLbl>
+  <dgm:styleLbl name="sibTrans2D1">
+    <dgm:scene3d>
+      <a:camera prst="orthographicFront"/>
+      <a:lightRig rig="threePt" dir="t"/>
+    </dgm:scene3d>
+    <dgm:sp3d/>
+    <dgm:txPr/>
+    <dgm:style>
+      <a:lnRef idx="0">
+        <a:scrgbClr r="0" g="0" b="0"/>
+      </a:lnRef>
+      <a:fillRef idx="3">
+        <a:scrgbClr r="0" g="0" b="0"/>
+      </a:fillRef>
+      <a:effectRef idx="2">
+        <a:scrgbClr r="0" g="0" b="0"/>
+      </a:effectRef>
+      <a:fontRef idx="minor">
+        <a:schemeClr val="lt1"/>
+      </a:fontRef>
+    </dgm:style>
+  </dgm:styleLbl>
+  <dgm:styleLbl name="fgSibTrans2D1">
+    <dgm:scene3d>
+      <a:camera prst="orthographicFront"/>
+      <a:lightRig rig="threePt" dir="t"/>
+    </dgm:scene3d>
+    <dgm:sp3d/>
+    <dgm:txPr/>
+    <dgm:style>
+      <a:lnRef idx="0">
+        <a:scrgbClr r="0" g="0" b="0"/>
+      </a:lnRef>
+      <a:fillRef idx="3">
+        <a:scrgbClr r="0" g="0" b="0"/>
+      </a:fillRef>
+      <a:effectRef idx="2">
+        <a:scrgbClr r="0" g="0" b="0"/>
+      </a:effectRef>
+      <a:fontRef idx="minor">
+        <a:schemeClr val="lt1"/>
+      </a:fontRef>
+    </dgm:style>
+  </dgm:styleLbl>
+  <dgm:styleLbl name="bgSibTrans2D1">
+    <dgm:scene3d>
+      <a:camera prst="orthographicFront"/>
+      <a:lightRig rig="threePt" dir="t"/>
+    </dgm:scene3d>
+    <dgm:sp3d/>
+    <dgm:txPr/>
+    <dgm:style>
+      <a:lnRef idx="0">
+        <a:scrgbClr r="0" g="0" b="0"/>
+      </a:lnRef>
+      <a:fillRef idx="3">
+        <a:scrgbClr r="0" g="0" b="0"/>
+      </a:fillRef>
+      <a:effectRef idx="2">
+        <a:scrgbClr r="0" g="0" b="0"/>
+      </a:effectRef>
+      <a:fontRef idx="minor">
+        <a:schemeClr val="lt1"/>
+      </a:fontRef>
+    </dgm:style>
+  </dgm:styleLbl>
+  <dgm:styleLbl name="sibTrans1D1">
+    <dgm:scene3d>
+      <a:camera prst="orthographicFront"/>
+      <a:lightRig rig="threePt" dir="t"/>
+    </dgm:scene3d>
+    <dgm:sp3d/>
+    <dgm:txPr/>
+    <dgm:style>
+      <a:lnRef idx="1">
+        <a:scrgbClr r="0" g="0" b="0"/>
+      </a:lnRef>
+      <a:fillRef idx="0">
+        <a:scrgbClr r="0" g="0" b="0"/>
+      </a:fillRef>
+      <a:effectRef idx="0">
+        <a:scrgbClr r="0" g="0" b="0"/>
+      </a:effectRef>
+      <a:fontRef idx="minor"/>
+    </dgm:style>
+  </dgm:styleLbl>
+  <dgm:styleLbl name="callout">
+    <dgm:scene3d>
+      <a:camera prst="orthographicFront"/>
+      <a:lightRig rig="threePt" dir="t"/>
+    </dgm:scene3d>
+    <dgm:sp3d/>
+    <dgm:txPr/>
+    <dgm:style>
+      <a:lnRef idx="2">
+        <a:scrgbClr r="0" g="0" b="0"/>
+      </a:lnRef>
+      <a:fillRef idx="1">
+        <a:scrgbClr r="0" g="0" b="0"/>
+      </a:fillRef>
+      <a:effectRef idx="1">
+        <a:scrgbClr r="0" g="0" b="0"/>
+      </a:effectRef>
+      <a:fontRef idx="minor"/>
+    </dgm:style>
+  </dgm:styleLbl>
+  <dgm:styleLbl name="asst0">
+    <dgm:scene3d>
+      <a:camera prst="orthographicFront"/>
+      <a:lightRig rig="threePt" dir="t"/>
+    </dgm:scene3d>
+    <dgm:sp3d/>
+    <dgm:txPr/>
+    <dgm:style>
+      <a:lnRef idx="0">
+        <a:scrgbClr r="0" g="0" b="0"/>
+      </a:lnRef>
+      <a:fillRef idx="3">
+        <a:scrgbClr r="0" g="0" b="0"/>
+      </a:fillRef>
+      <a:effectRef idx="2">
+        <a:scrgbClr r="0" g="0" b="0"/>
+      </a:effectRef>
+      <a:fontRef idx="minor">
+        <a:schemeClr val="lt1"/>
+      </a:fontRef>
+    </dgm:style>
+  </dgm:styleLbl>
+  <dgm:styleLbl name="asst1">
+    <dgm:scene3d>
+      <a:camera prst="orthographicFront"/>
+      <a:lightRig rig="threePt" dir="t"/>
+    </dgm:scene3d>
+    <dgm:sp3d/>
+    <dgm:txPr/>
+    <dgm:style>
+      <a:lnRef idx="0">
+        <a:scrgbClr r="0" g="0" b="0"/>
+      </a:lnRef>
+      <a:fillRef idx="3">
+        <a:scrgbClr r="0" g="0" b="0"/>
+      </a:fillRef>
+      <a:effectRef idx="2">
+        <a:scrgbClr r="0" g="0" b="0"/>
+      </a:effectRef>
+      <a:fontRef idx="minor">
+        <a:schemeClr val="lt1"/>
+      </a:fontRef>
+    </dgm:style>
+  </dgm:styleLbl>
+  <dgm:styleLbl name="asst2">
+    <dgm:scene3d>
+      <a:camera prst="orthographicFront"/>
+      <a:lightRig rig="threePt" dir="t"/>
+    </dgm:scene3d>
+    <dgm:sp3d/>
+    <dgm:txPr/>
+    <dgm:style>
+      <a:lnRef idx="0">
+        <a:scrgbClr r="0" g="0" b="0"/>
+      </a:lnRef>
+      <a:fillRef idx="3">
+        <a:scrgbClr r="0" g="0" b="0"/>
+      </a:fillRef>
+      <a:effectRef idx="2">
+        <a:scrgbClr r="0" g="0" b="0"/>
+      </a:effectRef>
+      <a:fontRef idx="minor">
+        <a:schemeClr val="lt1"/>
+      </a:fontRef>
+    </dgm:style>
+  </dgm:styleLbl>
+  <dgm:styleLbl name="asst3">
+    <dgm:scene3d>
+      <a:camera prst="orthographicFront"/>
+      <a:lightRig rig="threePt" dir="t"/>
+    </dgm:scene3d>
+    <dgm:sp3d/>
+    <dgm:txPr/>
+    <dgm:style>
+      <a:lnRef idx="0">
+        <a:scrgbClr r="0" g="0" b="0"/>
+      </a:lnRef>
+      <a:fillRef idx="3">
+        <a:scrgbClr r="0" g="0" b="0"/>
+      </a:fillRef>
+      <a:effectRef idx="2">
+        <a:scrgbClr r="0" g="0" b="0"/>
+      </a:effectRef>
+      <a:fontRef idx="minor">
+        <a:schemeClr val="lt1"/>
+      </a:fontRef>
+    </dgm:style>
+  </dgm:styleLbl>
+  <dgm:styleLbl name="asst4">
+    <dgm:scene3d>
+      <a:camera prst="orthographicFront"/>
+      <a:lightRig rig="threePt" dir="t"/>
+    </dgm:scene3d>
+    <dgm:sp3d/>
+    <dgm:txPr/>
+    <dgm:style>
+      <a:lnRef idx="0">
+        <a:scrgbClr r="0" g="0" b="0"/>
+      </a:lnRef>
+      <a:fillRef idx="3">
+        <a:scrgbClr r="0" g="0" b="0"/>
+      </a:fillRef>
+      <a:effectRef idx="2">
+        <a:scrgbClr r="0" g="0" b="0"/>
+      </a:effectRef>
+      <a:fontRef idx="minor">
+        <a:schemeClr val="lt1"/>
+      </a:fontRef>
+    </dgm:style>
+  </dgm:styleLbl>
+  <dgm:styleLbl name="parChTrans2D1">
+    <dgm:scene3d>
+      <a:camera prst="orthographicFront"/>
+      <a:lightRig rig="threePt" dir="t"/>
+    </dgm:scene3d>
+    <dgm:sp3d/>
+    <dgm:txPr/>
+    <dgm:style>
+      <a:lnRef idx="0">
+        <a:scrgbClr r="0" g="0" b="0"/>
+      </a:lnRef>
+      <a:fillRef idx="3">
+        <a:scrgbClr r="0" g="0" b="0"/>
+      </a:fillRef>
+      <a:effectRef idx="2">
+        <a:scrgbClr r="0" g="0" b="0"/>
+      </a:effectRef>
+      <a:fontRef idx="minor">
+        <a:schemeClr val="lt1"/>
+      </a:fontRef>
+    </dgm:style>
+  </dgm:styleLbl>
+  <dgm:styleLbl name="parChTrans2D2">
+    <dgm:scene3d>
+      <a:camera prst="orthographicFront"/>
+      <a:lightRig rig="threePt" dir="t"/>
+    </dgm:scene3d>
+    <dgm:sp3d/>
+    <dgm:txPr/>
+    <dgm:style>
+      <a:lnRef idx="0">
+        <a:scrgbClr r="0" g="0" b="0"/>
+      </a:lnRef>
+      <a:fillRef idx="3">
+        <a:scrgbClr r="0" g="0" b="0"/>
+      </a:fillRef>
+      <a:effectRef idx="2">
+        <a:scrgbClr r="0" g="0" b="0"/>
+      </a:effectRef>
+      <a:fontRef idx="minor">
+        <a:schemeClr val="lt1"/>
+      </a:fontRef>
+    </dgm:style>
+  </dgm:styleLbl>
+  <dgm:styleLbl name="parChTrans2D3">
+    <dgm:scene3d>
+      <a:camera prst="orthographicFront"/>
+      <a:lightRig rig="threePt" dir="t"/>
+    </dgm:scene3d>
+    <dgm:sp3d/>
+    <dgm:txPr/>
+    <dgm:style>
+      <a:lnRef idx="1">
+        <a:scrgbClr r="0" g="0" b="0"/>
+      </a:lnRef>
+      <a:fillRef idx="3">
+        <a:scrgbClr r="0" g="0" b="0"/>
+      </a:fillRef>
+      <a:effectRef idx="2">
+        <a:scrgbClr r="0" g="0" b="0"/>
+      </a:effectRef>
+      <a:fontRef idx="minor">
+        <a:schemeClr val="lt1"/>
+      </a:fontRef>
+    </dgm:style>
+  </dgm:styleLbl>
+  <dgm:styleLbl name="parChTrans2D4">
+    <dgm:scene3d>
+      <a:camera prst="orthographicFront"/>
+      <a:lightRig rig="threePt" dir="t"/>
+    </dgm:scene3d>
+    <dgm:sp3d/>
+    <dgm:txPr/>
+    <dgm:style>
+      <a:lnRef idx="1">
+        <a:scrgbClr r="0" g="0" b="0"/>
+      </a:lnRef>
+      <a:fillRef idx="3">
+        <a:scrgbClr r="0" g="0" b="0"/>
+      </a:fillRef>
+      <a:effectRef idx="2">
+        <a:scrgbClr r="0" g="0" b="0"/>
+      </a:effectRef>
+      <a:fontRef idx="minor">
+        <a:schemeClr val="lt1"/>
+      </a:fontRef>
+    </dgm:style>
+  </dgm:styleLbl>
+  <dgm:styleLbl name="parChTrans1D1">
+    <dgm:scene3d>
+      <a:camera prst="orthographicFront"/>
+      <a:lightRig rig="threePt" dir="t"/>
+    </dgm:scene3d>
+    <dgm:sp3d/>
+    <dgm:txPr/>
+    <dgm:style>
+      <a:lnRef idx="1">
+        <a:scrgbClr r="0" g="0" b="0"/>
+      </a:lnRef>
+      <a:fillRef idx="0">
+        <a:scrgbClr r="0" g="0" b="0"/>
+      </a:fillRef>
+      <a:effectRef idx="0">
+        <a:scrgbClr r="0" g="0" b="0"/>
+      </a:effectRef>
+      <a:fontRef idx="minor"/>
+    </dgm:style>
+  </dgm:styleLbl>
+  <dgm:styleLbl name="parChTrans1D2">
+    <dgm:scene3d>
+      <a:camera prst="orthographicFront"/>
+      <a:lightRig rig="threePt" dir="t"/>
+    </dgm:scene3d>
+    <dgm:sp3d/>
+    <dgm:txPr/>
+    <dgm:style>
+      <a:lnRef idx="1">
+        <a:scrgbClr r="0" g="0" b="0"/>
+      </a:lnRef>
+      <a:fillRef idx="0">
+        <a:scrgbClr r="0" g="0" b="0"/>
+      </a:fillRef>
+      <a:effectRef idx="0">
+        <a:scrgbClr r="0" g="0" b="0"/>
+      </a:effectRef>
+      <a:fontRef idx="minor"/>
+    </dgm:style>
+  </dgm:styleLbl>
+  <dgm:styleLbl name="parChTrans1D3">
+    <dgm:scene3d>
+      <a:camera prst="orthographicFront"/>
+      <a:lightRig rig="threePt" dir="t"/>
+    </dgm:scene3d>
+    <dgm:sp3d/>
+    <dgm:txPr/>
+    <dgm:style>
+      <a:lnRef idx="1">
+        <a:scrgbClr r="0" g="0" b="0"/>
+      </a:lnRef>
+      <a:fillRef idx="0">
+        <a:scrgbClr r="0" g="0" b="0"/>
+      </a:fillRef>
+      <a:effectRef idx="0">
+        <a:scrgbClr r="0" g="0" b="0"/>
+      </a:effectRef>
+      <a:fontRef idx="minor"/>
+    </dgm:style>
+  </dgm:styleLbl>
+  <dgm:styleLbl name="parChTrans1D4">
+    <dgm:scene3d>
+      <a:camera prst="orthographicFront"/>
+      <a:lightRig rig="threePt" dir="t"/>
+    </dgm:scene3d>
+    <dgm:sp3d/>
+    <dgm:txPr/>
+    <dgm:style>
+      <a:lnRef idx="1">
+        <a:scrgbClr r="0" g="0" b="0"/>
+      </a:lnRef>
+      <a:fillRef idx="0">
+        <a:scrgbClr r="0" g="0" b="0"/>
+      </a:fillRef>
+      <a:effectRef idx="0">
+        <a:scrgbClr r="0" g="0" b="0"/>
+      </a:effectRef>
+      <a:fontRef idx="minor"/>
+    </dgm:style>
+  </dgm:styleLbl>
+  <dgm:styleLbl name="fgAcc1">
+    <dgm:scene3d>
+      <a:camera prst="orthographicFront"/>
+      <a:lightRig rig="threePt" dir="t"/>
+    </dgm:scene3d>
+    <dgm:sp3d/>
+    <dgm:txPr/>
+    <dgm:style>
+      <a:lnRef idx="1">
+        <a:scrgbClr r="0" g="0" b="0"/>
+      </a:lnRef>
+      <a:fillRef idx="1">
+        <a:scrgbClr r="0" g="0" b="0"/>
+      </a:fillRef>
+      <a:effectRef idx="0">
+        <a:scrgbClr r="0" g="0" b="0"/>
+      </a:effectRef>
+      <a:fontRef idx="minor"/>
+    </dgm:style>
+  </dgm:styleLbl>
+  <dgm:styleLbl name="conFgAcc1">
+    <dgm:scene3d>
+      <a:camera prst="orthographicFront"/>
+      <a:lightRig rig="threePt" dir="t"/>
+    </dgm:scene3d>
+    <dgm:sp3d/>
+    <dgm:txPr/>
+    <dgm:style>
+      <a:lnRef idx="1">
+        <a:scrgbClr r="0" g="0" b="0"/>
+      </a:lnRef>
+      <a:fillRef idx="1">
+        <a:scrgbClr r="0" g="0" b="0"/>
+      </a:fillRef>
+      <a:effectRef idx="0">
+        <a:scrgbClr r="0" g="0" b="0"/>
+      </a:effectRef>
+      <a:fontRef idx="minor"/>
+    </dgm:style>
+  </dgm:styleLbl>
+  <dgm:styleLbl name="alignAcc1">
+    <dgm:scene3d>
+      <a:camera prst="orthographicFront"/>
+      <a:lightRig rig="threePt" dir="t"/>
+    </dgm:scene3d>
+    <dgm:sp3d/>
+    <dgm:txPr/>
+    <dgm:style>
+      <a:lnRef idx="1">
+        <a:scrgbClr r="0" g="0" b="0"/>
+      </a:lnRef>
+      <a:fillRef idx="1">
+        <a:scrgbClr r="0" g="0" b="0"/>
+      </a:fillRef>
+      <a:effectRef idx="0">
+        <a:scrgbClr r="0" g="0" b="0"/>
+      </a:effectRef>
+      <a:fontRef idx="minor"/>
+    </dgm:style>
+  </dgm:styleLbl>
+  <dgm:styleLbl name="trAlignAcc1">
+    <dgm:scene3d>
+      <a:camera prst="orthographicFront"/>
+      <a:lightRig rig="threePt" dir="t"/>
+    </dgm:scene3d>
+    <dgm:sp3d/>
+    <dgm:txPr/>
+    <dgm:style>
+      <a:lnRef idx="1">
+        <a:scrgbClr r="0" g="0" b="0"/>
+      </a:lnRef>
+      <a:fillRef idx="1">
+        <a:scrgbClr r="0" g="0" b="0"/>
+      </a:fillRef>
+      <a:effectRef idx="0">
+        <a:scrgbClr r="0" g="0" b="0"/>
+      </a:effectRef>
+      <a:fontRef idx="minor"/>
+    </dgm:style>
+  </dgm:styleLbl>
+  <dgm:styleLbl name="bgAcc1">
+    <dgm:scene3d>
+      <a:camera prst="orthographicFront"/>
+      <a:lightRig rig="threePt" dir="t"/>
+    </dgm:scene3d>
+    <dgm:sp3d/>
+    <dgm:txPr/>
+    <dgm:style>
+      <a:lnRef idx="1">
+        <a:scrgbClr r="0" g="0" b="0"/>
+      </a:lnRef>
+      <a:fillRef idx="1">
+        <a:scrgbClr r="0" g="0" b="0"/>
+      </a:fillRef>
+      <a:effectRef idx="0">
+        <a:scrgbClr r="0" g="0" b="0"/>
+      </a:effectRef>
+      <a:fontRef idx="minor"/>
+    </dgm:style>
+  </dgm:styleLbl>
+  <dgm:styleLbl name="solidFgAcc1">
+    <dgm:scene3d>
+      <a:camera prst="orthographicFront"/>
+      <a:lightRig rig="threePt" dir="t"/>
+    </dgm:scene3d>
+    <dgm:sp3d/>
+    <dgm:txPr/>
+    <dgm:style>
+      <a:lnRef idx="1">
+        <a:scrgbClr r="0" g="0" b="0"/>
+      </a:lnRef>
+      <a:fillRef idx="1">
+        <a:scrgbClr r="0" g="0" b="0"/>
+      </a:fillRef>
+      <a:effectRef idx="0">
+        <a:scrgbClr r="0" g="0" b="0"/>
+      </a:effectRef>
+      <a:fontRef idx="minor"/>
+    </dgm:style>
+  </dgm:styleLbl>
+  <dgm:styleLbl name="solidAlignAcc1">
+    <dgm:scene3d>
+      <a:camera prst="orthographicFront"/>
+      <a:lightRig rig="threePt" dir="t"/>
+    </dgm:scene3d>
+    <dgm:sp3d/>
+    <dgm:txPr/>
+    <dgm:style>
+      <a:lnRef idx="1">
+        <a:scrgbClr r="0" g="0" b="0"/>
+      </a:lnRef>
+      <a:fillRef idx="1">
+        <a:scrgbClr r="0" g="0" b="0"/>
+      </a:fillRef>
+      <a:effectRef idx="0">
+        <a:scrgbClr r="0" g="0" b="0"/>
+      </a:effectRef>
+      <a:fontRef idx="minor"/>
+    </dgm:style>
+  </dgm:styleLbl>
+  <dgm:styleLbl name="solidBgAcc1">
+    <dgm:scene3d>
+      <a:camera prst="orthographicFront"/>
+      <a:lightRig rig="threePt" dir="t"/>
+    </dgm:scene3d>
+    <dgm:sp3d/>
+    <dgm:txPr/>
+    <dgm:style>
+      <a:lnRef idx="1">
+        <a:scrgbClr r="0" g="0" b="0"/>
+      </a:lnRef>
+      <a:fillRef idx="1">
+        <a:scrgbClr r="0" g="0" b="0"/>
+      </a:fillRef>
+      <a:effectRef idx="0">
+        <a:scrgbClr r="0" g="0" b="0"/>
+      </a:effectRef>
+      <a:fontRef idx="minor"/>
+    </dgm:style>
+  </dgm:styleLbl>
+  <dgm:styleLbl name="fgAccFollowNode1">
+    <dgm:scene3d>
+      <a:camera prst="orthographicFront"/>
+      <a:lightRig rig="threePt" dir="t"/>
+    </dgm:scene3d>
+    <dgm:sp3d/>
+    <dgm:txPr/>
+    <dgm:style>
+      <a:lnRef idx="1">
+        <a:scrgbClr r="0" g="0" b="0"/>
+      </a:lnRef>
+      <a:fillRef idx="1">
+        <a:scrgbClr r="0" g="0" b="0"/>
+      </a:fillRef>
+      <a:effectRef idx="0">
+        <a:scrgbClr r="0" g="0" b="0"/>
+      </a:effectRef>
+      <a:fontRef idx="minor"/>
+    </dgm:style>
+  </dgm:styleLbl>
+  <dgm:styleLbl name="alignAccFollowNode1">
+    <dgm:scene3d>
+      <a:camera prst="orthographicFront"/>
+      <a:lightRig rig="threePt" dir="t"/>
+    </dgm:scene3d>
+    <dgm:sp3d/>
+    <dgm:txPr/>
+    <dgm:style>
+      <a:lnRef idx="1">
+        <a:scrgbClr r="0" g="0" b="0"/>
+      </a:lnRef>
+      <a:fillRef idx="1">
+        <a:scrgbClr r="0" g="0" b="0"/>
+      </a:fillRef>
+      <a:effectRef idx="0">
+        <a:scrgbClr r="0" g="0" b="0"/>
+      </a:effectRef>
+      <a:fontRef idx="minor"/>
+    </dgm:style>
+  </dgm:styleLbl>
+  <dgm:styleLbl name="bgAccFollowNode1">
+    <dgm:scene3d>
+      <a:camera prst="orthographicFront"/>
+      <a:lightRig rig="threePt" dir="t"/>
+    </dgm:scene3d>
+    <dgm:sp3d/>
+    <dgm:txPr/>
+    <dgm:style>
+      <a:lnRef idx="1">
+        <a:scrgbClr r="0" g="0" b="0"/>
+      </a:lnRef>
+      <a:fillRef idx="1">
+        <a:scrgbClr r="0" g="0" b="0"/>
+      </a:fillRef>
+      <a:effectRef idx="0">
+        <a:scrgbClr r="0" g="0" b="0"/>
+      </a:effectRef>
+      <a:fontRef idx="minor"/>
+    </dgm:style>
+  </dgm:styleLbl>
+  <dgm:styleLbl name="fgAcc0">
+    <dgm:scene3d>
+      <a:camera prst="orthographicFront"/>
+      <a:lightRig rig="threePt" dir="t"/>
+    </dgm:scene3d>
+    <dgm:sp3d/>
+    <dgm:txPr/>
+    <dgm:style>
+      <a:lnRef idx="1">
+        <a:scrgbClr r="0" g="0" b="0"/>
+      </a:lnRef>
+      <a:fillRef idx="1">
+        <a:scrgbClr r="0" g="0" b="0"/>
+      </a:fillRef>
+      <a:effectRef idx="0">
+        <a:scrgbClr r="0" g="0" b="0"/>
+      </a:effectRef>
+      <a:fontRef idx="minor"/>
+    </dgm:style>
+  </dgm:styleLbl>
+  <dgm:styleLbl name="fgAcc2">
+    <dgm:scene3d>
+      <a:camera prst="orthographicFront"/>
+      <a:lightRig rig="threePt" dir="t"/>
+    </dgm:scene3d>
+    <dgm:sp3d/>
+    <dgm:txPr/>
+    <dgm:style>
+      <a:lnRef idx="1">
+        <a:scrgbClr r="0" g="0" b="0"/>
+      </a:lnRef>
+      <a:fillRef idx="1">
+        <a:scrgbClr r="0" g="0" b="0"/>
+      </a:fillRef>
+      <a:effectRef idx="0">
+        <a:scrgbClr r="0" g="0" b="0"/>
+      </a:effectRef>
+      <a:fontRef idx="minor"/>
+    </dgm:style>
+  </dgm:styleLbl>
+  <dgm:styleLbl name="fgAcc3">
+    <dgm:scene3d>
+      <a:camera prst="orthographicFront"/>
+      <a:lightRig rig="threePt" dir="t"/>
+    </dgm:scene3d>
+    <dgm:sp3d/>
+    <dgm:txPr/>
+    <dgm:style>
+      <a:lnRef idx="1">
+        <a:scrgbClr r="0" g="0" b="0"/>
+      </a:lnRef>
+      <a:fillRef idx="1">
+        <a:scrgbClr r="0" g="0" b="0"/>
+      </a:fillRef>
+      <a:effectRef idx="0">
+        <a:scrgbClr r="0" g="0" b="0"/>
+      </a:effectRef>
+      <a:fontRef idx="minor"/>
+    </dgm:style>
+  </dgm:styleLbl>
+  <dgm:styleLbl name="fgAcc4">
+    <dgm:scene3d>
+      <a:camera prst="orthographicFront"/>
+      <a:lightRig rig="threePt" dir="t"/>
+    </dgm:scene3d>
+    <dgm:sp3d/>
+    <dgm:txPr/>
+    <dgm:style>
+      <a:lnRef idx="1">
+        <a:scrgbClr r="0" g="0" b="0"/>
+      </a:lnRef>
+      <a:fillRef idx="1">
+        <a:scrgbClr r="0" g="0" b="0"/>
+      </a:fillRef>
+      <a:effectRef idx="0">
+        <a:scrgbClr r="0" g="0" b="0"/>
+      </a:effectRef>
+      <a:fontRef idx="minor"/>
+    </dgm:style>
+  </dgm:styleLbl>
+  <dgm:styleLbl name="bgShp">
+    <dgm:scene3d>
+      <a:camera prst="orthographicFront"/>
+      <a:lightRig rig="threePt" dir="t"/>
+    </dgm:scene3d>
+    <dgm:sp3d/>
+    <dgm:txPr/>
+    <dgm:style>
+      <a:lnRef idx="0">
+        <a:scrgbClr r="0" g="0" b="0"/>
+      </a:lnRef>
+      <a:fillRef idx="1">
+        <a:scrgbClr r="0" g="0" b="0"/>
+      </a:fillRef>
+      <a:effectRef idx="2">
+        <a:scrgbClr r="0" g="0" b="0"/>
+      </a:effectRef>
+      <a:fontRef idx="minor"/>
+    </dgm:style>
+  </dgm:styleLbl>
+  <dgm:styleLbl name="dkBgShp">
+    <dgm:scene3d>
+      <a:camera prst="orthographicFront"/>
+      <a:lightRig rig="threePt" dir="t"/>
+    </dgm:scene3d>
+    <dgm:sp3d/>
+    <dgm:txPr/>
+    <dgm:style>
+      <a:lnRef idx="0">
+        <a:scrgbClr r="0" g="0" b="0"/>
+      </a:lnRef>
+      <a:fillRef idx="1">
+        <a:scrgbClr r="0" g="0" b="0"/>
+      </a:fillRef>
+      <a:effectRef idx="2">
+        <a:scrgbClr r="0" g="0" b="0"/>
+      </a:effectRef>
+      <a:fontRef idx="minor"/>
+    </dgm:style>
+  </dgm:styleLbl>
+  <dgm:styleLbl name="trBgShp">
+    <dgm:scene3d>
+      <a:camera prst="orthographicFront"/>
+      <a:lightRig rig="threePt" dir="t"/>
+    </dgm:scene3d>
+    <dgm:sp3d/>
+    <dgm:txPr/>
+    <dgm:style>
+      <a:lnRef idx="0">
+        <a:scrgbClr r="0" g="0" b="0"/>
+      </a:lnRef>
+      <a:fillRef idx="1">
+        <a:scrgbClr r="0" g="0" b="0"/>
+      </a:fillRef>
+      <a:effectRef idx="0">
+        <a:scrgbClr r="0" g="0" b="0"/>
+      </a:effectRef>
+      <a:fontRef idx="minor"/>
+    </dgm:style>
+  </dgm:styleLbl>
+  <dgm:styleLbl name="fgShp">
+    <dgm:scene3d>
+      <a:camera prst="orthographicFront"/>
+      <a:lightRig rig="threePt" dir="t"/>
+    </dgm:scene3d>
+    <dgm:sp3d/>
+    <dgm:txPr/>
+    <dgm:style>
+      <a:lnRef idx="0">
+        <a:scrgbClr r="0" g="0" b="0"/>
+      </a:lnRef>
+      <a:fillRef idx="3">
+        <a:scrgbClr r="0" g="0" b="0"/>
+      </a:fillRef>
+      <a:effectRef idx="2">
+        <a:scrgbClr r="0" g="0" b="0"/>
+      </a:effectRef>
+      <a:fontRef idx="minor"/>
+    </dgm:style>
+  </dgm:styleLbl>
+  <dgm:styleLbl name="revTx">
+    <dgm:scene3d>
+      <a:camera prst="orthographicFront"/>
+      <a:lightRig rig="threePt" dir="t"/>
+    </dgm:scene3d>
+    <dgm:sp3d/>
+    <dgm:txPr/>
+    <dgm:style>
+      <a:lnRef idx="0">
+        <a:scrgbClr r="0" g="0" b="0"/>
+      </a:lnRef>
+      <a:fillRef idx="0">
+        <a:scrgbClr r="0" g="0" b="0"/>
+      </a:fillRef>
+      <a:effectRef idx="0">
+        <a:scrgbClr r="0" g="0" b="0"/>
+      </a:effectRef>
+      <a:fontRef idx="minor"/>
+    </dgm:style>
+  </dgm:styleLbl>
+</dgm:styleDef>
+</file>
+
+<file path=ppt/diagrams/quickStyle2.xml><?xml version="1.0" encoding="utf-8"?>
 <dgm:styleDef xmlns:dgm="http://schemas.openxmlformats.org/drawingml/2006/diagram" xmlns:a="http://schemas.openxmlformats.org/drawingml/2006/main" uniqueId="urn:microsoft.com/office/officeart/2005/8/quickstyle/simple1">
   <dgm:title val=""/>
   <dgm:desc val=""/>
@@ -3430,7 +6099,7 @@
           <a:p>
             <a:fld id="{AFEA96C4-76D9-4D10-A02D-18D5CECAB8B6}" type="datetimeFigureOut">
               <a:rPr lang="en-US" smtClean="0"/>
-              <a:t>4/8/2026</a:t>
+              <a:t>4/9/2026</a:t>
             </a:fld>
             <a:endParaRPr lang="en-US"/>
           </a:p>
@@ -3628,7 +6297,7 @@
           <a:p>
             <a:fld id="{AFEA96C4-76D9-4D10-A02D-18D5CECAB8B6}" type="datetimeFigureOut">
               <a:rPr lang="en-US" smtClean="0"/>
-              <a:t>4/8/2026</a:t>
+              <a:t>4/9/2026</a:t>
             </a:fld>
             <a:endParaRPr lang="en-US"/>
           </a:p>
@@ -3836,7 +6505,7 @@
           <a:p>
             <a:fld id="{AFEA96C4-76D9-4D10-A02D-18D5CECAB8B6}" type="datetimeFigureOut">
               <a:rPr lang="en-US" smtClean="0"/>
-              <a:t>4/8/2026</a:t>
+              <a:t>4/9/2026</a:t>
             </a:fld>
             <a:endParaRPr lang="en-US"/>
           </a:p>
@@ -4034,7 +6703,7 @@
           <a:p>
             <a:fld id="{AFEA96C4-76D9-4D10-A02D-18D5CECAB8B6}" type="datetimeFigureOut">
               <a:rPr lang="en-US" smtClean="0"/>
-              <a:t>4/8/2026</a:t>
+              <a:t>4/9/2026</a:t>
             </a:fld>
             <a:endParaRPr lang="en-US"/>
           </a:p>
@@ -4309,7 +6978,7 @@
           <a:p>
             <a:fld id="{AFEA96C4-76D9-4D10-A02D-18D5CECAB8B6}" type="datetimeFigureOut">
               <a:rPr lang="en-US" smtClean="0"/>
-              <a:t>4/8/2026</a:t>
+              <a:t>4/9/2026</a:t>
             </a:fld>
             <a:endParaRPr lang="en-US"/>
           </a:p>
@@ -4574,7 +7243,7 @@
           <a:p>
             <a:fld id="{AFEA96C4-76D9-4D10-A02D-18D5CECAB8B6}" type="datetimeFigureOut">
               <a:rPr lang="en-US" smtClean="0"/>
-              <a:t>4/8/2026</a:t>
+              <a:t>4/9/2026</a:t>
             </a:fld>
             <a:endParaRPr lang="en-US"/>
           </a:p>
@@ -4986,7 +7655,7 @@
           <a:p>
             <a:fld id="{AFEA96C4-76D9-4D10-A02D-18D5CECAB8B6}" type="datetimeFigureOut">
               <a:rPr lang="en-US" smtClean="0"/>
-              <a:t>4/8/2026</a:t>
+              <a:t>4/9/2026</a:t>
             </a:fld>
             <a:endParaRPr lang="en-US"/>
           </a:p>
@@ -5127,7 +7796,7 @@
           <a:p>
             <a:fld id="{AFEA96C4-76D9-4D10-A02D-18D5CECAB8B6}" type="datetimeFigureOut">
               <a:rPr lang="en-US" smtClean="0"/>
-              <a:t>4/8/2026</a:t>
+              <a:t>4/9/2026</a:t>
             </a:fld>
             <a:endParaRPr lang="en-US"/>
           </a:p>
@@ -5240,7 +7909,7 @@
           <a:p>
             <a:fld id="{AFEA96C4-76D9-4D10-A02D-18D5CECAB8B6}" type="datetimeFigureOut">
               <a:rPr lang="en-US" smtClean="0"/>
-              <a:t>4/8/2026</a:t>
+              <a:t>4/9/2026</a:t>
             </a:fld>
             <a:endParaRPr lang="en-US"/>
           </a:p>
@@ -5551,7 +8220,7 @@
           <a:p>
             <a:fld id="{AFEA96C4-76D9-4D10-A02D-18D5CECAB8B6}" type="datetimeFigureOut">
               <a:rPr lang="en-US" smtClean="0"/>
-              <a:t>4/8/2026</a:t>
+              <a:t>4/9/2026</a:t>
             </a:fld>
             <a:endParaRPr lang="en-US"/>
           </a:p>
@@ -5839,7 +8508,7 @@
           <a:p>
             <a:fld id="{AFEA96C4-76D9-4D10-A02D-18D5CECAB8B6}" type="datetimeFigureOut">
               <a:rPr lang="en-US" smtClean="0"/>
-              <a:t>4/8/2026</a:t>
+              <a:t>4/9/2026</a:t>
             </a:fld>
             <a:endParaRPr lang="en-US"/>
           </a:p>
@@ -6080,7 +8749,7 @@
           <a:p>
             <a:fld id="{AFEA96C4-76D9-4D10-A02D-18D5CECAB8B6}" type="datetimeFigureOut">
               <a:rPr lang="en-US" smtClean="0"/>
-              <a:t>4/8/2026</a:t>
+              <a:t>4/9/2026</a:t>
             </a:fld>
             <a:endParaRPr lang="en-US"/>
           </a:p>
@@ -7022,6 +9691,835 @@
 </file>
 
 <file path=ppt/slides/slide10.xml><?xml version="1.0" encoding="utf-8"?>
+<p:sld xmlns:a="http://schemas.openxmlformats.org/drawingml/2006/main" xmlns:r="http://schemas.openxmlformats.org/officeDocument/2006/relationships" xmlns:p="http://schemas.openxmlformats.org/presentationml/2006/main">
+  <p:cSld>
+    <p:spTree>
+      <p:nvGrpSpPr>
+        <p:cNvPr id="1" name=""/>
+        <p:cNvGrpSpPr/>
+        <p:nvPr/>
+      </p:nvGrpSpPr>
+      <p:grpSpPr>
+        <a:xfrm>
+          <a:off x="0" y="0"/>
+          <a:ext cx="0" cy="0"/>
+          <a:chOff x="0" y="0"/>
+          <a:chExt cx="0" cy="0"/>
+        </a:xfrm>
+      </p:grpSpPr>
+      <p:sp>
+        <p:nvSpPr>
+          <p:cNvPr id="2" name="Title 1">
+            <a:extLst>
+              <a:ext uri="{FF2B5EF4-FFF2-40B4-BE49-F238E27FC236}">
+                <a16:creationId xmlns:a16="http://schemas.microsoft.com/office/drawing/2014/main" id="{7F1C32AE-3699-A024-B553-BA2A5FC17B25}"/>
+              </a:ext>
+            </a:extLst>
+          </p:cNvPr>
+          <p:cNvSpPr>
+            <a:spLocks noGrp="1"/>
+          </p:cNvSpPr>
+          <p:nvPr>
+            <p:ph type="title"/>
+          </p:nvPr>
+        </p:nvSpPr>
+        <p:spPr/>
+        <p:txBody>
+          <a:bodyPr/>
+          <a:lstStyle/>
+          <a:p>
+            <a:r>
+              <a:rPr lang="en-US" dirty="0"/>
+              <a:t>Model Results &amp; Performance</a:t>
+            </a:r>
+          </a:p>
+        </p:txBody>
+      </p:sp>
+      <p:sp>
+        <p:nvSpPr>
+          <p:cNvPr id="3" name="Content Placeholder 2">
+            <a:extLst>
+              <a:ext uri="{FF2B5EF4-FFF2-40B4-BE49-F238E27FC236}">
+                <a16:creationId xmlns:a16="http://schemas.microsoft.com/office/drawing/2014/main" id="{32B64E96-F4EA-2976-C3B9-4DDF488B5192}"/>
+              </a:ext>
+            </a:extLst>
+          </p:cNvPr>
+          <p:cNvSpPr>
+            <a:spLocks noGrp="1"/>
+          </p:cNvSpPr>
+          <p:nvPr>
+            <p:ph idx="1"/>
+          </p:nvPr>
+        </p:nvSpPr>
+        <p:spPr/>
+        <p:txBody>
+          <a:bodyPr/>
+          <a:lstStyle/>
+          <a:p>
+            <a:r>
+              <a:rPr lang="en-US" dirty="0"/>
+              <a:t>Ultimately, despite our hypothesis, our XGBoost model still struggled to consistently identify Cinderella teams. </a:t>
+            </a:r>
+          </a:p>
+          <a:p>
+            <a:endParaRPr lang="en-US" dirty="0"/>
+          </a:p>
+          <a:p>
+            <a:r>
+              <a:rPr lang="en-US" dirty="0"/>
+              <a:t>While it performed better than a random guess, it wasn’t drastically better. </a:t>
+            </a:r>
+          </a:p>
+        </p:txBody>
+      </p:sp>
+    </p:spTree>
+    <p:extLst>
+      <p:ext uri="{BB962C8B-B14F-4D97-AF65-F5344CB8AC3E}">
+        <p14:creationId xmlns:p14="http://schemas.microsoft.com/office/powerpoint/2010/main" val="3745876303"/>
+      </p:ext>
+    </p:extLst>
+  </p:cSld>
+  <p:clrMapOvr>
+    <a:masterClrMapping/>
+  </p:clrMapOvr>
+</p:sld>
+</file>
+
+<file path=ppt/slides/slide11.xml><?xml version="1.0" encoding="utf-8"?>
+<p:sld xmlns:a="http://schemas.openxmlformats.org/drawingml/2006/main" xmlns:r="http://schemas.openxmlformats.org/officeDocument/2006/relationships" xmlns:p="http://schemas.openxmlformats.org/presentationml/2006/main">
+  <p:cSld>
+    <p:bg>
+      <p:bgPr>
+        <a:solidFill>
+          <a:schemeClr val="bg1"/>
+        </a:solidFill>
+        <a:effectLst/>
+      </p:bgPr>
+    </p:bg>
+    <p:spTree>
+      <p:nvGrpSpPr>
+        <p:cNvPr id="1" name=""/>
+        <p:cNvGrpSpPr/>
+        <p:nvPr/>
+      </p:nvGrpSpPr>
+      <p:grpSpPr>
+        <a:xfrm>
+          <a:off x="0" y="0"/>
+          <a:ext cx="0" cy="0"/>
+          <a:chOff x="0" y="0"/>
+          <a:chExt cx="0" cy="0"/>
+        </a:xfrm>
+      </p:grpSpPr>
+      <p:sp useBgFill="1">
+        <p:nvSpPr>
+          <p:cNvPr id="21" name="Rectangle 20">
+            <a:extLst>
+              <a:ext uri="{FF2B5EF4-FFF2-40B4-BE49-F238E27FC236}">
+                <a16:creationId xmlns:a16="http://schemas.microsoft.com/office/drawing/2014/main" id="{6F5A5072-7B47-4D32-B52A-4EBBF590B8A5}"/>
+              </a:ext>
+              <a:ext uri="{C183D7F6-B498-43B3-948B-1728B52AA6E4}">
+                <adec:decorative xmlns:adec="http://schemas.microsoft.com/office/drawing/2017/decorative" val="1"/>
+              </a:ext>
+            </a:extLst>
+          </p:cNvPr>
+          <p:cNvSpPr>
+            <a:spLocks noGrp="1" noRot="1" noChangeAspect="1" noMove="1" noResize="1" noEditPoints="1" noAdjustHandles="1" noChangeArrowheads="1" noChangeShapeType="1" noTextEdit="1"/>
+          </p:cNvSpPr>
+          <p:nvPr>
+            <p:extLst>
+              <p:ext uri="{386F3935-93C4-4BCD-93E2-E3B085C9AB24}">
+                <p16:designElem xmlns:p16="http://schemas.microsoft.com/office/powerpoint/2015/main" val="1"/>
+              </p:ext>
+            </p:extLst>
+          </p:nvPr>
+        </p:nvSpPr>
+        <p:spPr>
+          <a:xfrm>
+            <a:off x="0" y="0"/>
+            <a:ext cx="12192000" cy="6858000"/>
+          </a:xfrm>
+          <a:prstGeom prst="rect">
+            <a:avLst/>
+          </a:prstGeom>
+          <a:ln w="12700" cap="flat" cmpd="sng" algn="ctr">
+            <a:noFill/>
+            <a:prstDash val="solid"/>
+            <a:miter lim="800000"/>
+          </a:ln>
+          <a:effectLst/>
+          <a:extLst>
+            <a:ext uri="{91240B29-F687-4F45-9708-019B960494DF}">
+              <a14:hiddenLine xmlns:a14="http://schemas.microsoft.com/office/drawing/2010/main" w="12700" cap="flat" cmpd="sng" algn="ctr">
+                <a:solidFill>
+                  <a:schemeClr val="accent1">
+                    <a:shade val="50000"/>
+                  </a:schemeClr>
+                </a:solidFill>
+                <a:prstDash val="solid"/>
+                <a:miter lim="800000"/>
+              </a14:hiddenLine>
+            </a:ext>
+          </a:extLst>
+        </p:spPr>
+        <p:style>
+          <a:lnRef idx="2">
+            <a:schemeClr val="accent1">
+              <a:shade val="50000"/>
+            </a:schemeClr>
+          </a:lnRef>
+          <a:fillRef idx="1">
+            <a:schemeClr val="accent1"/>
+          </a:fillRef>
+          <a:effectRef idx="0">
+            <a:schemeClr val="accent1"/>
+          </a:effectRef>
+          <a:fontRef idx="minor">
+            <a:schemeClr val="lt1"/>
+          </a:fontRef>
+        </p:style>
+        <p:txBody>
+          <a:bodyPr rtlCol="0" anchor="ctr"/>
+          <a:lstStyle/>
+          <a:p>
+            <a:pPr algn="ctr"/>
+            <a:endParaRPr lang="en-US"/>
+          </a:p>
+        </p:txBody>
+      </p:sp>
+      <p:sp>
+        <p:nvSpPr>
+          <p:cNvPr id="23" name="Rectangle 22">
+            <a:extLst>
+              <a:ext uri="{FF2B5EF4-FFF2-40B4-BE49-F238E27FC236}">
+                <a16:creationId xmlns:a16="http://schemas.microsoft.com/office/drawing/2014/main" id="{9715DAF0-AE1B-46C9-8A6B-DB2AA05AB91D}"/>
+              </a:ext>
+              <a:ext uri="{C183D7F6-B498-43B3-948B-1728B52AA6E4}">
+                <adec:decorative xmlns:adec="http://schemas.microsoft.com/office/drawing/2017/decorative" val="1"/>
+              </a:ext>
+            </a:extLst>
+          </p:cNvPr>
+          <p:cNvSpPr>
+            <a:spLocks noGrp="1" noRot="1" noChangeAspect="1" noMove="1" noResize="1" noEditPoints="1" noAdjustHandles="1" noChangeArrowheads="1" noChangeShapeType="1" noTextEdit="1"/>
+          </p:cNvSpPr>
+          <p:nvPr>
+            <p:extLst>
+              <p:ext uri="{386F3935-93C4-4BCD-93E2-E3B085C9AB24}">
+                <p16:designElem xmlns:p16="http://schemas.microsoft.com/office/powerpoint/2015/main" val="1"/>
+              </p:ext>
+            </p:extLst>
+          </p:nvPr>
+        </p:nvSpPr>
+        <p:spPr>
+          <a:xfrm rot="10800000">
+            <a:off x="-2" y="-22693"/>
+            <a:ext cx="12191999" cy="4374129"/>
+          </a:xfrm>
+          <a:prstGeom prst="rect">
+            <a:avLst/>
+          </a:prstGeom>
+          <a:gradFill>
+            <a:gsLst>
+              <a:gs pos="0">
+                <a:schemeClr val="accent1">
+                  <a:lumMod val="75000"/>
+                </a:schemeClr>
+              </a:gs>
+              <a:gs pos="100000">
+                <a:srgbClr val="000000"/>
+              </a:gs>
+            </a:gsLst>
+            <a:lin ang="15000000" scaled="0"/>
+          </a:gradFill>
+          <a:ln>
+            <a:noFill/>
+          </a:ln>
+        </p:spPr>
+        <p:style>
+          <a:lnRef idx="2">
+            <a:schemeClr val="accent1">
+              <a:shade val="50000"/>
+            </a:schemeClr>
+          </a:lnRef>
+          <a:fillRef idx="1">
+            <a:schemeClr val="accent1"/>
+          </a:fillRef>
+          <a:effectRef idx="0">
+            <a:schemeClr val="accent1"/>
+          </a:effectRef>
+          <a:fontRef idx="minor">
+            <a:schemeClr val="lt1"/>
+          </a:fontRef>
+        </p:style>
+        <p:txBody>
+          <a:bodyPr rtlCol="0" anchor="ctr"/>
+          <a:lstStyle/>
+          <a:p>
+            <a:pPr algn="ctr"/>
+            <a:endParaRPr lang="en-US"/>
+          </a:p>
+        </p:txBody>
+      </p:sp>
+      <p:sp>
+        <p:nvSpPr>
+          <p:cNvPr id="25" name="Rectangle 24">
+            <a:extLst>
+              <a:ext uri="{FF2B5EF4-FFF2-40B4-BE49-F238E27FC236}">
+                <a16:creationId xmlns:a16="http://schemas.microsoft.com/office/drawing/2014/main" id="{6016219D-510E-4184-9090-6D5578A87BD1}"/>
+              </a:ext>
+              <a:ext uri="{C183D7F6-B498-43B3-948B-1728B52AA6E4}">
+                <adec:decorative xmlns:adec="http://schemas.microsoft.com/office/drawing/2017/decorative" val="1"/>
+              </a:ext>
+            </a:extLst>
+          </p:cNvPr>
+          <p:cNvSpPr>
+            <a:spLocks noGrp="1" noRot="1" noChangeAspect="1" noMove="1" noResize="1" noEditPoints="1" noAdjustHandles="1" noChangeArrowheads="1" noChangeShapeType="1" noTextEdit="1"/>
+          </p:cNvSpPr>
+          <p:nvPr>
+            <p:extLst>
+              <p:ext uri="{386F3935-93C4-4BCD-93E2-E3B085C9AB24}">
+                <p16:designElem xmlns:p16="http://schemas.microsoft.com/office/powerpoint/2015/main" val="1"/>
+              </p:ext>
+            </p:extLst>
+          </p:nvPr>
+        </p:nvSpPr>
+        <p:spPr>
+          <a:xfrm rot="5400000">
+            <a:off x="3908719" y="-3931841"/>
+            <a:ext cx="4374557" cy="12192000"/>
+          </a:xfrm>
+          <a:prstGeom prst="rect">
+            <a:avLst/>
+          </a:prstGeom>
+          <a:gradFill>
+            <a:gsLst>
+              <a:gs pos="40000">
+                <a:schemeClr val="accent1">
+                  <a:alpha val="0"/>
+                </a:schemeClr>
+              </a:gs>
+              <a:gs pos="100000">
+                <a:schemeClr val="accent1">
+                  <a:lumMod val="75000"/>
+                  <a:alpha val="52000"/>
+                </a:schemeClr>
+              </a:gs>
+            </a:gsLst>
+            <a:lin ang="2400000" scaled="0"/>
+          </a:gradFill>
+          <a:ln>
+            <a:noFill/>
+          </a:ln>
+        </p:spPr>
+        <p:style>
+          <a:lnRef idx="2">
+            <a:schemeClr val="accent1">
+              <a:shade val="50000"/>
+            </a:schemeClr>
+          </a:lnRef>
+          <a:fillRef idx="1">
+            <a:schemeClr val="accent1"/>
+          </a:fillRef>
+          <a:effectRef idx="0">
+            <a:schemeClr val="accent1"/>
+          </a:effectRef>
+          <a:fontRef idx="minor">
+            <a:schemeClr val="lt1"/>
+          </a:fontRef>
+        </p:style>
+        <p:txBody>
+          <a:bodyPr rtlCol="0" anchor="ctr"/>
+          <a:lstStyle/>
+          <a:p>
+            <a:pPr algn="ctr"/>
+            <a:endParaRPr lang="en-US"/>
+          </a:p>
+        </p:txBody>
+      </p:sp>
+      <p:sp>
+        <p:nvSpPr>
+          <p:cNvPr id="27" name="Rectangle 26">
+            <a:extLst>
+              <a:ext uri="{FF2B5EF4-FFF2-40B4-BE49-F238E27FC236}">
+                <a16:creationId xmlns:a16="http://schemas.microsoft.com/office/drawing/2014/main" id="{AFF4A713-7B75-4B21-90D7-5AB19547C728}"/>
+              </a:ext>
+              <a:ext uri="{C183D7F6-B498-43B3-948B-1728B52AA6E4}">
+                <adec:decorative xmlns:adec="http://schemas.microsoft.com/office/drawing/2017/decorative" val="1"/>
+              </a:ext>
+            </a:extLst>
+          </p:cNvPr>
+          <p:cNvSpPr>
+            <a:spLocks noGrp="1" noRot="1" noChangeAspect="1" noMove="1" noResize="1" noEditPoints="1" noAdjustHandles="1" noChangeArrowheads="1" noChangeShapeType="1" noTextEdit="1"/>
+          </p:cNvSpPr>
+          <p:nvPr>
+            <p:extLst>
+              <p:ext uri="{386F3935-93C4-4BCD-93E2-E3B085C9AB24}">
+                <p16:designElem xmlns:p16="http://schemas.microsoft.com/office/powerpoint/2015/main" val="1"/>
+              </p:ext>
+            </p:extLst>
+          </p:nvPr>
+        </p:nvSpPr>
+        <p:spPr>
+          <a:xfrm rot="5400000">
+            <a:off x="4136696" y="-3703868"/>
+            <a:ext cx="4374128" cy="11736479"/>
+          </a:xfrm>
+          <a:prstGeom prst="rect">
+            <a:avLst/>
+          </a:prstGeom>
+          <a:gradFill>
+            <a:gsLst>
+              <a:gs pos="17000">
+                <a:schemeClr val="accent1">
+                  <a:alpha val="0"/>
+                </a:schemeClr>
+              </a:gs>
+              <a:gs pos="100000">
+                <a:srgbClr val="000000">
+                  <a:alpha val="37000"/>
+                </a:srgbClr>
+              </a:gs>
+            </a:gsLst>
+            <a:lin ang="7800000" scaled="0"/>
+          </a:gradFill>
+          <a:ln>
+            <a:noFill/>
+          </a:ln>
+        </p:spPr>
+        <p:style>
+          <a:lnRef idx="2">
+            <a:schemeClr val="accent1">
+              <a:shade val="50000"/>
+            </a:schemeClr>
+          </a:lnRef>
+          <a:fillRef idx="1">
+            <a:schemeClr val="accent1"/>
+          </a:fillRef>
+          <a:effectRef idx="0">
+            <a:schemeClr val="accent1"/>
+          </a:effectRef>
+          <a:fontRef idx="minor">
+            <a:schemeClr val="lt1"/>
+          </a:fontRef>
+        </p:style>
+        <p:txBody>
+          <a:bodyPr rtlCol="0" anchor="ctr"/>
+          <a:lstStyle/>
+          <a:p>
+            <a:pPr algn="ctr"/>
+            <a:endParaRPr lang="en-US"/>
+          </a:p>
+        </p:txBody>
+      </p:sp>
+      <p:sp>
+        <p:nvSpPr>
+          <p:cNvPr id="29" name="Rectangle 28">
+            <a:extLst>
+              <a:ext uri="{FF2B5EF4-FFF2-40B4-BE49-F238E27FC236}">
+                <a16:creationId xmlns:a16="http://schemas.microsoft.com/office/drawing/2014/main" id="{DC631C0B-6DA6-4E57-8231-CE32B3434A7E}"/>
+              </a:ext>
+              <a:ext uri="{C183D7F6-B498-43B3-948B-1728B52AA6E4}">
+                <adec:decorative xmlns:adec="http://schemas.microsoft.com/office/drawing/2017/decorative" val="1"/>
+              </a:ext>
+            </a:extLst>
+          </p:cNvPr>
+          <p:cNvSpPr>
+            <a:spLocks noGrp="1" noRot="1" noChangeAspect="1" noMove="1" noResize="1" noEditPoints="1" noAdjustHandles="1" noChangeArrowheads="1" noChangeShapeType="1" noTextEdit="1"/>
+          </p:cNvSpPr>
+          <p:nvPr>
+            <p:extLst>
+              <p:ext uri="{386F3935-93C4-4BCD-93E2-E3B085C9AB24}">
+                <p16:designElem xmlns:p16="http://schemas.microsoft.com/office/powerpoint/2015/main" val="1"/>
+              </p:ext>
+            </p:extLst>
+          </p:nvPr>
+        </p:nvSpPr>
+        <p:spPr>
+          <a:xfrm>
+            <a:off x="-5" y="-22690"/>
+            <a:ext cx="8542485" cy="4374126"/>
+          </a:xfrm>
+          <a:prstGeom prst="rect">
+            <a:avLst/>
+          </a:prstGeom>
+          <a:gradFill>
+            <a:gsLst>
+              <a:gs pos="0">
+                <a:schemeClr val="accent1">
+                  <a:lumMod val="50000"/>
+                  <a:alpha val="0"/>
+                </a:schemeClr>
+              </a:gs>
+              <a:gs pos="100000">
+                <a:srgbClr val="000000">
+                  <a:alpha val="25000"/>
+                </a:srgbClr>
+              </a:gs>
+            </a:gsLst>
+            <a:lin ang="18600000" scaled="0"/>
+          </a:gradFill>
+          <a:ln>
+            <a:noFill/>
+          </a:ln>
+        </p:spPr>
+        <p:style>
+          <a:lnRef idx="2">
+            <a:schemeClr val="accent1">
+              <a:shade val="50000"/>
+            </a:schemeClr>
+          </a:lnRef>
+          <a:fillRef idx="1">
+            <a:schemeClr val="accent1"/>
+          </a:fillRef>
+          <a:effectRef idx="0">
+            <a:schemeClr val="accent1"/>
+          </a:effectRef>
+          <a:fontRef idx="minor">
+            <a:schemeClr val="lt1"/>
+          </a:fontRef>
+        </p:style>
+        <p:txBody>
+          <a:bodyPr rtlCol="0" anchor="ctr"/>
+          <a:lstStyle/>
+          <a:p>
+            <a:pPr algn="ctr"/>
+            <a:endParaRPr lang="en-US"/>
+          </a:p>
+        </p:txBody>
+      </p:sp>
+      <p:sp>
+        <p:nvSpPr>
+          <p:cNvPr id="31" name="Freeform: Shape 30">
+            <a:extLst>
+              <a:ext uri="{FF2B5EF4-FFF2-40B4-BE49-F238E27FC236}">
+                <a16:creationId xmlns:a16="http://schemas.microsoft.com/office/drawing/2014/main" id="{C29501E6-A978-4A61-9689-9085AF97A53A}"/>
+              </a:ext>
+              <a:ext uri="{C183D7F6-B498-43B3-948B-1728B52AA6E4}">
+                <adec:decorative xmlns:adec="http://schemas.microsoft.com/office/drawing/2017/decorative" val="1"/>
+              </a:ext>
+            </a:extLst>
+          </p:cNvPr>
+          <p:cNvSpPr>
+            <a:spLocks noGrp="1" noRot="1" noChangeAspect="1" noMove="1" noResize="1" noEditPoints="1" noAdjustHandles="1" noChangeArrowheads="1" noChangeShapeType="1" noTextEdit="1"/>
+          </p:cNvSpPr>
+          <p:nvPr>
+            <p:extLst>
+              <p:ext uri="{386F3935-93C4-4BCD-93E2-E3B085C9AB24}">
+                <p16:designElem xmlns:p16="http://schemas.microsoft.com/office/powerpoint/2015/main" val="1"/>
+              </p:ext>
+            </p:extLst>
+          </p:nvPr>
+        </p:nvSpPr>
+        <p:spPr>
+          <a:xfrm rot="12508972">
+            <a:off x="5945431" y="-1032053"/>
+            <a:ext cx="4990147" cy="4439131"/>
+          </a:xfrm>
+          <a:custGeom>
+            <a:avLst/>
+            <a:gdLst>
+              <a:gd name="connsiteX0" fmla="*/ 4990147 w 4990147"/>
+              <a:gd name="connsiteY0" fmla="*/ 2229378 h 4439131"/>
+              <a:gd name="connsiteX1" fmla="*/ 917384 w 4990147"/>
+              <a:gd name="connsiteY1" fmla="*/ 4439131 h 4439131"/>
+              <a:gd name="connsiteX2" fmla="*/ 910814 w 4990147"/>
+              <a:gd name="connsiteY2" fmla="*/ 4434219 h 4439131"/>
+              <a:gd name="connsiteX3" fmla="*/ 0 w 4990147"/>
+              <a:gd name="connsiteY3" fmla="*/ 2502877 h 4439131"/>
+              <a:gd name="connsiteX4" fmla="*/ 2502877 w 4990147"/>
+              <a:gd name="connsiteY4" fmla="*/ 0 h 4439131"/>
+              <a:gd name="connsiteX5" fmla="*/ 4954904 w 4990147"/>
+              <a:gd name="connsiteY5" fmla="*/ 1998460 h 4439131"/>
+            </a:gdLst>
+            <a:ahLst/>
+            <a:cxnLst>
+              <a:cxn ang="0">
+                <a:pos x="connsiteX0" y="connsiteY0"/>
+              </a:cxn>
+              <a:cxn ang="0">
+                <a:pos x="connsiteX1" y="connsiteY1"/>
+              </a:cxn>
+              <a:cxn ang="0">
+                <a:pos x="connsiteX2" y="connsiteY2"/>
+              </a:cxn>
+              <a:cxn ang="0">
+                <a:pos x="connsiteX3" y="connsiteY3"/>
+              </a:cxn>
+              <a:cxn ang="0">
+                <a:pos x="connsiteX4" y="connsiteY4"/>
+              </a:cxn>
+              <a:cxn ang="0">
+                <a:pos x="connsiteX5" y="connsiteY5"/>
+              </a:cxn>
+            </a:cxnLst>
+            <a:rect l="l" t="t" r="r" b="b"/>
+            <a:pathLst>
+              <a:path w="4990147" h="4439131">
+                <a:moveTo>
+                  <a:pt x="4990147" y="2229378"/>
+                </a:moveTo>
+                <a:lnTo>
+                  <a:pt x="917384" y="4439131"/>
+                </a:lnTo>
+                <a:lnTo>
+                  <a:pt x="910814" y="4434219"/>
+                </a:lnTo>
+                <a:cubicBezTo>
+                  <a:pt x="354557" y="3975154"/>
+                  <a:pt x="0" y="3280421"/>
+                  <a:pt x="0" y="2502877"/>
+                </a:cubicBezTo>
+                <a:cubicBezTo>
+                  <a:pt x="0" y="1120576"/>
+                  <a:pt x="1120576" y="0"/>
+                  <a:pt x="2502877" y="0"/>
+                </a:cubicBezTo>
+                <a:cubicBezTo>
+                  <a:pt x="3712390" y="0"/>
+                  <a:pt x="4721520" y="857941"/>
+                  <a:pt x="4954904" y="1998460"/>
+                </a:cubicBezTo>
+                <a:close/>
+              </a:path>
+            </a:pathLst>
+          </a:custGeom>
+          <a:gradFill>
+            <a:gsLst>
+              <a:gs pos="0">
+                <a:schemeClr val="accent1">
+                  <a:alpha val="22000"/>
+                </a:schemeClr>
+              </a:gs>
+              <a:gs pos="87000">
+                <a:schemeClr val="accent1">
+                  <a:lumMod val="60000"/>
+                  <a:lumOff val="40000"/>
+                  <a:alpha val="2000"/>
+                </a:schemeClr>
+              </a:gs>
+            </a:gsLst>
+            <a:lin ang="8400000" scaled="0"/>
+          </a:gradFill>
+          <a:ln>
+            <a:noFill/>
+          </a:ln>
+        </p:spPr>
+        <p:style>
+          <a:lnRef idx="2">
+            <a:schemeClr val="accent1">
+              <a:shade val="50000"/>
+            </a:schemeClr>
+          </a:lnRef>
+          <a:fillRef idx="1">
+            <a:schemeClr val="accent1"/>
+          </a:fillRef>
+          <a:effectRef idx="0">
+            <a:schemeClr val="accent1"/>
+          </a:effectRef>
+          <a:fontRef idx="minor">
+            <a:schemeClr val="lt1"/>
+          </a:fontRef>
+        </p:style>
+        <p:txBody>
+          <a:bodyPr wrap="square" rtlCol="0" anchor="ctr">
+            <a:noAutofit/>
+          </a:bodyPr>
+          <a:lstStyle/>
+          <a:p>
+            <a:pPr algn="ctr"/>
+            <a:endParaRPr lang="en-US" dirty="0"/>
+          </a:p>
+        </p:txBody>
+      </p:sp>
+      <p:sp>
+        <p:nvSpPr>
+          <p:cNvPr id="2" name="Title 1">
+            <a:extLst>
+              <a:ext uri="{FF2B5EF4-FFF2-40B4-BE49-F238E27FC236}">
+                <a16:creationId xmlns:a16="http://schemas.microsoft.com/office/drawing/2014/main" id="{19D214D3-9699-E0E2-8B10-348A820E5F0D}"/>
+              </a:ext>
+            </a:extLst>
+          </p:cNvPr>
+          <p:cNvSpPr>
+            <a:spLocks noGrp="1"/>
+          </p:cNvSpPr>
+          <p:nvPr>
+            <p:ph type="title"/>
+          </p:nvPr>
+        </p:nvSpPr>
+        <p:spPr>
+          <a:xfrm>
+            <a:off x="1314824" y="735106"/>
+            <a:ext cx="10053763" cy="2928470"/>
+          </a:xfrm>
+        </p:spPr>
+        <p:txBody>
+          <a:bodyPr vert="horz" lIns="91440" tIns="45720" rIns="91440" bIns="45720" rtlCol="0" anchor="b">
+            <a:normAutofit/>
+          </a:bodyPr>
+          <a:lstStyle/>
+          <a:p>
+            <a:r>
+              <a:rPr lang="en-US" sz="4800" kern="1200">
+                <a:solidFill>
+                  <a:srgbClr val="FFFFFF"/>
+                </a:solidFill>
+                <a:latin typeface="+mj-lt"/>
+                <a:ea typeface="+mj-ea"/>
+                <a:cs typeface="+mj-cs"/>
+              </a:rPr>
+              <a:t>Demonstration</a:t>
+            </a:r>
+          </a:p>
+        </p:txBody>
+      </p:sp>
+      <p:sp>
+        <p:nvSpPr>
+          <p:cNvPr id="3" name="Content Placeholder 2">
+            <a:extLst>
+              <a:ext uri="{FF2B5EF4-FFF2-40B4-BE49-F238E27FC236}">
+                <a16:creationId xmlns:a16="http://schemas.microsoft.com/office/drawing/2014/main" id="{8F6E0871-4D7A-8150-B00F-8D9A43CE6690}"/>
+              </a:ext>
+            </a:extLst>
+          </p:cNvPr>
+          <p:cNvSpPr>
+            <a:spLocks noGrp="1"/>
+          </p:cNvSpPr>
+          <p:nvPr>
+            <p:ph idx="1"/>
+          </p:nvPr>
+        </p:nvSpPr>
+        <p:spPr>
+          <a:xfrm>
+            <a:off x="1350682" y="4870824"/>
+            <a:ext cx="10005951" cy="1458258"/>
+          </a:xfrm>
+        </p:spPr>
+        <p:txBody>
+          <a:bodyPr vert="horz" lIns="91440" tIns="45720" rIns="91440" bIns="45720" rtlCol="0" anchor="ctr">
+            <a:normAutofit/>
+          </a:bodyPr>
+          <a:lstStyle/>
+          <a:p>
+            <a:r>
+              <a:rPr lang="en-US" u="sng" dirty="0">
+                <a:hlinkClick r:id="rId2"/>
+              </a:rPr>
+              <a:t>https://stat486final.streamlit.app/</a:t>
+            </a:r>
+            <a:r>
+              <a:rPr lang="en-US" u="sng" dirty="0"/>
+              <a:t> </a:t>
+            </a:r>
+            <a:endParaRPr lang="en-US" dirty="0"/>
+          </a:p>
+        </p:txBody>
+      </p:sp>
+    </p:spTree>
+    <p:extLst>
+      <p:ext uri="{BB962C8B-B14F-4D97-AF65-F5344CB8AC3E}">
+        <p14:creationId xmlns:p14="http://schemas.microsoft.com/office/powerpoint/2010/main" val="1673908730"/>
+      </p:ext>
+    </p:extLst>
+  </p:cSld>
+  <p:clrMapOvr>
+    <a:masterClrMapping/>
+  </p:clrMapOvr>
+  <p:timing>
+    <p:tnLst>
+      <p:par>
+        <p:cTn id="1" dur="indefinite" restart="never" nodeType="tmRoot">
+          <p:childTnLst>
+            <p:seq concurrent="1" nextAc="seek">
+              <p:cTn id="2" dur="indefinite" nodeType="mainSeq">
+                <p:childTnLst>
+                  <p:par>
+                    <p:cTn id="3" fill="hold">
+                      <p:stCondLst>
+                        <p:cond delay="indefinite"/>
+                        <p:cond evt="onBegin" delay="0">
+                          <p:tn val="2"/>
+                        </p:cond>
+                      </p:stCondLst>
+                      <p:childTnLst>
+                        <p:par>
+                          <p:cTn id="4" fill="hold">
+                            <p:stCondLst>
+                              <p:cond delay="0"/>
+                            </p:stCondLst>
+                            <p:childTnLst>
+                              <p:par>
+                                <p:cTn id="5" presetID="10" presetClass="entr" presetSubtype="0" fill="hold" grpId="0" nodeType="withEffect">
+                                  <p:stCondLst>
+                                    <p:cond delay="500"/>
+                                  </p:stCondLst>
+                                  <p:iterate>
+                                    <p:tmPct val="10000"/>
+                                  </p:iterate>
+                                  <p:childTnLst>
+                                    <p:set>
+                                      <p:cBhvr>
+                                        <p:cTn id="6" dur="1" fill="hold">
+                                          <p:stCondLst>
+                                            <p:cond delay="0"/>
+                                          </p:stCondLst>
+                                        </p:cTn>
+                                        <p:tgtEl>
+                                          <p:spTgt spid="2"/>
+                                        </p:tgtEl>
+                                        <p:attrNameLst>
+                                          <p:attrName>style.visibility</p:attrName>
+                                        </p:attrNameLst>
+                                      </p:cBhvr>
+                                      <p:to>
+                                        <p:strVal val="visible"/>
+                                      </p:to>
+                                    </p:set>
+                                    <p:animEffect transition="in" filter="fade">
+                                      <p:cBhvr>
+                                        <p:cTn id="7" dur="700"/>
+                                        <p:tgtEl>
+                                          <p:spTgt spid="2"/>
+                                        </p:tgtEl>
+                                      </p:cBhvr>
+                                    </p:animEffect>
+                                  </p:childTnLst>
+                                </p:cTn>
+                              </p:par>
+                            </p:childTnLst>
+                          </p:cTn>
+                        </p:par>
+                      </p:childTnLst>
+                    </p:cTn>
+                  </p:par>
+                </p:childTnLst>
+              </p:cTn>
+              <p:prevCondLst>
+                <p:cond evt="onPrev" delay="0">
+                  <p:tgtEl>
+                    <p:sldTgt/>
+                  </p:tgtEl>
+                </p:cond>
+              </p:prevCondLst>
+              <p:nextCondLst>
+                <p:cond evt="onNext" delay="0">
+                  <p:tgtEl>
+                    <p:sldTgt/>
+                  </p:tgtEl>
+                </p:cond>
+              </p:nextCondLst>
+            </p:seq>
+          </p:childTnLst>
+        </p:cTn>
+      </p:par>
+    </p:tnLst>
+    <p:bldLst>
+      <p:bldP spid="2" grpId="0"/>
+    </p:bldLst>
+  </p:timing>
+</p:sld>
+</file>
+
+<file path=ppt/slides/slide12.xml><?xml version="1.0" encoding="utf-8"?>
 <p:sld xmlns:a="http://schemas.openxmlformats.org/drawingml/2006/main" xmlns:r="http://schemas.openxmlformats.org/officeDocument/2006/relationships" xmlns:p="http://schemas.openxmlformats.org/presentationml/2006/main">
   <p:cSld>
     <p:bg>
@@ -8496,7 +11994,7 @@
           <a:lstStyle/>
           <a:p>
             <a:r>
-              <a:rPr lang="en-US" sz="2000">
+              <a:rPr lang="en-US" sz="2000" dirty="0">
                 <a:solidFill>
                   <a:schemeClr val="tx1">
                     <a:alpha val="80000"/>
@@ -8509,7 +12007,7 @@
           <a:p>
             <a:pPr lvl="1"/>
             <a:r>
-              <a:rPr lang="en-US" sz="2000">
+              <a:rPr lang="en-US" sz="2000" dirty="0">
                 <a:solidFill>
                   <a:schemeClr val="tx1">
                     <a:alpha val="80000"/>
@@ -8522,7 +12020,7 @@
           <a:p>
             <a:pPr lvl="1"/>
             <a:r>
-              <a:rPr lang="en-US" sz="2000">
+              <a:rPr lang="en-US" sz="2000" dirty="0">
                 <a:solidFill>
                   <a:schemeClr val="tx1">
                     <a:alpha val="80000"/>
@@ -8534,7 +12032,7 @@
           </a:p>
           <a:p>
             <a:pPr lvl="1"/>
-            <a:endParaRPr lang="en-US" sz="2000">
+            <a:endParaRPr lang="en-US" sz="2000" dirty="0">
               <a:solidFill>
                 <a:schemeClr val="tx1">
                   <a:alpha val="80000"/>
@@ -8547,15 +12045,32 @@
               <a:buNone/>
             </a:pPr>
             <a:r>
-              <a:rPr lang="en-US" sz="2000">
+              <a:rPr lang="en-US" sz="2000" dirty="0">
                 <a:solidFill>
                   <a:schemeClr val="tx1">
                     <a:alpha val="80000"/>
                   </a:schemeClr>
                 </a:solidFill>
               </a:rPr>
-              <a:t>Target Variable: CinderellaFlag</a:t>
+              <a:t>Target Variable: </a:t>
             </a:r>
+            <a:r>
+              <a:rPr lang="en-US" sz="2000" dirty="0" err="1">
+                <a:solidFill>
+                  <a:schemeClr val="tx1">
+                    <a:alpha val="80000"/>
+                  </a:schemeClr>
+                </a:solidFill>
+              </a:rPr>
+              <a:t>CinderellaFlag</a:t>
+            </a:r>
+            <a:endParaRPr lang="en-US" sz="2000" dirty="0">
+              <a:solidFill>
+                <a:schemeClr val="tx1">
+                  <a:alpha val="80000"/>
+                </a:schemeClr>
+              </a:solidFill>
+            </a:endParaRPr>
           </a:p>
           <a:p>
             <a:pPr lvl="1">
@@ -8563,7 +12078,7 @@
               <a:buChar char="-"/>
             </a:pPr>
             <a:r>
-              <a:rPr lang="en-US" sz="2000">
+              <a:rPr lang="en-US" sz="2000" dirty="0">
                 <a:solidFill>
                   <a:schemeClr val="tx1">
                     <a:alpha val="80000"/>
@@ -8578,7 +12093,7 @@
               <a:buFontTx/>
               <a:buChar char="-"/>
             </a:pPr>
-            <a:endParaRPr lang="en-US" sz="2000">
+            <a:endParaRPr lang="en-US" sz="2000" dirty="0">
               <a:solidFill>
                 <a:schemeClr val="tx1">
                   <a:alpha val="80000"/>
@@ -8592,7 +12107,7 @@
               <a:buChar char="-"/>
             </a:pPr>
             <a:r>
-              <a:rPr lang="en-US" sz="2000">
+              <a:rPr lang="en-US" sz="2000" dirty="0">
                 <a:solidFill>
                   <a:schemeClr val="tx1">
                     <a:alpha val="80000"/>
@@ -8608,47 +12123,161 @@
               <a:buChar char="-"/>
             </a:pPr>
             <a:r>
-              <a:rPr lang="en-US" sz="2000">
+              <a:rPr lang="en-US" sz="2000" dirty="0">
                 <a:solidFill>
                   <a:schemeClr val="tx1">
                     <a:alpha val="80000"/>
                   </a:schemeClr>
                 </a:solidFill>
               </a:rPr>
-              <a:t>- Ranking Metrics: SeedNum, MasseyRankMean</a:t>
+              <a:t>- Ranking Metrics: </a:t>
             </a:r>
-          </a:p>
-          <a:p>
-            <a:pPr lvl="1">
-              <a:buFontTx/>
-              <a:buChar char="-"/>
-            </a:pPr>
             <a:r>
-              <a:rPr lang="en-US" sz="2000">
+              <a:rPr lang="en-US" sz="2000" dirty="0" err="1">
                 <a:solidFill>
                   <a:schemeClr val="tx1">
                     <a:alpha val="80000"/>
                   </a:schemeClr>
                 </a:solidFill>
               </a:rPr>
-              <a:t>Performance: WinPct</a:t>
+              <a:t>SeedNum</a:t>
             </a:r>
-          </a:p>
-          <a:p>
-            <a:pPr lvl="1">
-              <a:buFontTx/>
-              <a:buChar char="-"/>
-            </a:pPr>
             <a:r>
-              <a:rPr lang="en-US" sz="2000">
+              <a:rPr lang="en-US" sz="2000" dirty="0">
                 <a:solidFill>
                   <a:schemeClr val="tx1">
                     <a:alpha val="80000"/>
                   </a:schemeClr>
                 </a:solidFill>
               </a:rPr>
-              <a:t>Efficiency: AvgScoreDiff, AvgPointsFor, AvgPointsAgainst</a:t>
+              <a:t>,</a:t>
             </a:r>
+          </a:p>
+          <a:p>
+            <a:pPr lvl="1">
+              <a:buFontTx/>
+              <a:buChar char="-"/>
+            </a:pPr>
+            <a:r>
+              <a:rPr lang="en-US" sz="2000" dirty="0">
+                <a:solidFill>
+                  <a:schemeClr val="tx1">
+                    <a:alpha val="80000"/>
+                  </a:schemeClr>
+                </a:solidFill>
+              </a:rPr>
+              <a:t>Performance: </a:t>
+            </a:r>
+            <a:r>
+              <a:rPr lang="en-US" sz="2000" dirty="0" err="1">
+                <a:solidFill>
+                  <a:schemeClr val="tx1">
+                    <a:alpha val="80000"/>
+                  </a:schemeClr>
+                </a:solidFill>
+              </a:rPr>
+              <a:t>WinPct</a:t>
+            </a:r>
+            <a:endParaRPr lang="en-US" sz="2000" dirty="0">
+              <a:solidFill>
+                <a:schemeClr val="tx1">
+                  <a:alpha val="80000"/>
+                </a:schemeClr>
+              </a:solidFill>
+            </a:endParaRPr>
+          </a:p>
+          <a:p>
+            <a:pPr lvl="1">
+              <a:buFontTx/>
+              <a:buChar char="-"/>
+            </a:pPr>
+            <a:r>
+              <a:rPr lang="en-US" sz="2000" dirty="0">
+                <a:solidFill>
+                  <a:schemeClr val="tx1">
+                    <a:alpha val="80000"/>
+                  </a:schemeClr>
+                </a:solidFill>
+              </a:rPr>
+              <a:t>Efficiency: </a:t>
+            </a:r>
+            <a:r>
+              <a:rPr lang="en-US" sz="2000" dirty="0" err="1">
+                <a:solidFill>
+                  <a:schemeClr val="tx1">
+                    <a:alpha val="80000"/>
+                  </a:schemeClr>
+                </a:solidFill>
+              </a:rPr>
+              <a:t>AvgScoreDiff</a:t>
+            </a:r>
+            <a:r>
+              <a:rPr lang="en-US" sz="2000" dirty="0">
+                <a:solidFill>
+                  <a:schemeClr val="tx1">
+                    <a:alpha val="80000"/>
+                  </a:schemeClr>
+                </a:solidFill>
+              </a:rPr>
+              <a:t>, </a:t>
+            </a:r>
+            <a:r>
+              <a:rPr lang="en-US" sz="2000" dirty="0" err="1">
+                <a:solidFill>
+                  <a:schemeClr val="tx1">
+                    <a:alpha val="80000"/>
+                  </a:schemeClr>
+                </a:solidFill>
+              </a:rPr>
+              <a:t>AvgPointsFor</a:t>
+            </a:r>
+            <a:r>
+              <a:rPr lang="en-US" sz="2000" dirty="0">
+                <a:solidFill>
+                  <a:schemeClr val="tx1">
+                    <a:alpha val="80000"/>
+                  </a:schemeClr>
+                </a:solidFill>
+              </a:rPr>
+              <a:t>, </a:t>
+            </a:r>
+            <a:r>
+              <a:rPr lang="en-US" sz="2000" dirty="0" err="1">
+                <a:solidFill>
+                  <a:schemeClr val="tx1">
+                    <a:alpha val="80000"/>
+                  </a:schemeClr>
+                </a:solidFill>
+              </a:rPr>
+              <a:t>AvgPointsAgainst</a:t>
+            </a:r>
+            <a:r>
+              <a:rPr lang="en-US" sz="2000" dirty="0">
+                <a:solidFill>
+                  <a:schemeClr val="tx1">
+                    <a:alpha val="80000"/>
+                  </a:schemeClr>
+                </a:solidFill>
+              </a:rPr>
+              <a:t>, </a:t>
+            </a:r>
+            <a:r>
+              <a:rPr lang="en-US" sz="2000" dirty="0" err="1">
+                <a:solidFill>
+                  <a:schemeClr val="tx1">
+                    <a:alpha val="80000"/>
+                  </a:schemeClr>
+                </a:solidFill>
+              </a:rPr>
+              <a:t>MasseyRankMean</a:t>
+            </a:r>
+            <a:endParaRPr lang="en-US" sz="2000" dirty="0">
+              <a:solidFill>
+                <a:schemeClr val="tx1">
+                  <a:alpha val="80000"/>
+                </a:schemeClr>
+              </a:solidFill>
+            </a:endParaRPr>
           </a:p>
         </p:txBody>
       </p:sp>
@@ -9128,6 +12757,1569 @@
 </file>
 
 <file path=ppt/slides/slide5.xml><?xml version="1.0" encoding="utf-8"?>
+<p:sld xmlns:a="http://schemas.openxmlformats.org/drawingml/2006/main" xmlns:r="http://schemas.openxmlformats.org/officeDocument/2006/relationships" xmlns:p="http://schemas.openxmlformats.org/presentationml/2006/main">
+  <p:cSld>
+    <p:bg>
+      <p:bgPr>
+        <a:solidFill>
+          <a:schemeClr val="bg1"/>
+        </a:solidFill>
+        <a:effectLst/>
+      </p:bgPr>
+    </p:bg>
+    <p:spTree>
+      <p:nvGrpSpPr>
+        <p:cNvPr id="1" name=""/>
+        <p:cNvGrpSpPr/>
+        <p:nvPr/>
+      </p:nvGrpSpPr>
+      <p:grpSpPr>
+        <a:xfrm>
+          <a:off x="0" y="0"/>
+          <a:ext cx="0" cy="0"/>
+          <a:chOff x="0" y="0"/>
+          <a:chExt cx="0" cy="0"/>
+        </a:xfrm>
+      </p:grpSpPr>
+      <p:sp useBgFill="1">
+        <p:nvSpPr>
+          <p:cNvPr id="9" name="Rectangle 8">
+            <a:extLst>
+              <a:ext uri="{FF2B5EF4-FFF2-40B4-BE49-F238E27FC236}">
+                <a16:creationId xmlns:a16="http://schemas.microsoft.com/office/drawing/2014/main" id="{BACC6370-2D7E-4714-9D71-7542949D7D5D}"/>
+              </a:ext>
+              <a:ext uri="{C183D7F6-B498-43B3-948B-1728B52AA6E4}">
+                <adec:decorative xmlns:adec="http://schemas.microsoft.com/office/drawing/2017/decorative" val="1"/>
+              </a:ext>
+            </a:extLst>
+          </p:cNvPr>
+          <p:cNvSpPr>
+            <a:spLocks noGrp="1" noRot="1" noChangeAspect="1" noMove="1" noResize="1" noEditPoints="1" noAdjustHandles="1" noChangeArrowheads="1" noChangeShapeType="1" noTextEdit="1"/>
+          </p:cNvSpPr>
+          <p:nvPr>
+            <p:extLst>
+              <p:ext uri="{386F3935-93C4-4BCD-93E2-E3B085C9AB24}">
+                <p16:designElem xmlns:p16="http://schemas.microsoft.com/office/powerpoint/2015/main" val="1"/>
+              </p:ext>
+            </p:extLst>
+          </p:nvPr>
+        </p:nvSpPr>
+        <p:spPr>
+          <a:xfrm>
+            <a:off x="0" y="0"/>
+            <a:ext cx="12192000" cy="6858000"/>
+          </a:xfrm>
+          <a:prstGeom prst="rect">
+            <a:avLst/>
+          </a:prstGeom>
+          <a:ln w="12700" cap="flat" cmpd="sng" algn="ctr">
+            <a:noFill/>
+            <a:prstDash val="solid"/>
+            <a:miter lim="800000"/>
+          </a:ln>
+          <a:effectLst/>
+          <a:extLst>
+            <a:ext uri="{91240B29-F687-4F45-9708-019B960494DF}">
+              <a14:hiddenLine xmlns:a14="http://schemas.microsoft.com/office/drawing/2010/main" w="12700" cap="flat" cmpd="sng" algn="ctr">
+                <a:solidFill>
+                  <a:schemeClr val="accent1">
+                    <a:shade val="50000"/>
+                  </a:schemeClr>
+                </a:solidFill>
+                <a:prstDash val="solid"/>
+                <a:miter lim="800000"/>
+              </a14:hiddenLine>
+            </a:ext>
+          </a:extLst>
+        </p:spPr>
+        <p:style>
+          <a:lnRef idx="2">
+            <a:schemeClr val="accent1">
+              <a:shade val="50000"/>
+            </a:schemeClr>
+          </a:lnRef>
+          <a:fillRef idx="1">
+            <a:schemeClr val="accent1"/>
+          </a:fillRef>
+          <a:effectRef idx="0">
+            <a:schemeClr val="accent1"/>
+          </a:effectRef>
+          <a:fontRef idx="minor">
+            <a:schemeClr val="lt1"/>
+          </a:fontRef>
+        </p:style>
+        <p:txBody>
+          <a:bodyPr rtlCol="0" anchor="ctr"/>
+          <a:lstStyle/>
+          <a:p>
+            <a:pPr algn="ctr"/>
+            <a:endParaRPr lang="en-US"/>
+          </a:p>
+        </p:txBody>
+      </p:sp>
+      <p:sp>
+        <p:nvSpPr>
+          <p:cNvPr id="11" name="Rectangle 10">
+            <a:extLst>
+              <a:ext uri="{FF2B5EF4-FFF2-40B4-BE49-F238E27FC236}">
+                <a16:creationId xmlns:a16="http://schemas.microsoft.com/office/drawing/2014/main" id="{256B2C21-A230-48C0-8DF1-C46611373C44}"/>
+              </a:ext>
+              <a:ext uri="{C183D7F6-B498-43B3-948B-1728B52AA6E4}">
+                <adec:decorative xmlns:adec="http://schemas.microsoft.com/office/drawing/2017/decorative" val="1"/>
+              </a:ext>
+            </a:extLst>
+          </p:cNvPr>
+          <p:cNvSpPr>
+            <a:spLocks noGrp="1" noRot="1" noChangeAspect="1" noMove="1" noResize="1" noEditPoints="1" noAdjustHandles="1" noChangeArrowheads="1" noChangeShapeType="1" noTextEdit="1"/>
+          </p:cNvSpPr>
+          <p:nvPr>
+            <p:extLst>
+              <p:ext uri="{386F3935-93C4-4BCD-93E2-E3B085C9AB24}">
+                <p16:designElem xmlns:p16="http://schemas.microsoft.com/office/powerpoint/2015/main" val="1"/>
+              </p:ext>
+            </p:extLst>
+          </p:nvPr>
+        </p:nvSpPr>
+        <p:spPr>
+          <a:xfrm rot="5400000" flipH="1">
+            <a:off x="-1410084" y="1410082"/>
+            <a:ext cx="6858000" cy="4037836"/>
+          </a:xfrm>
+          <a:prstGeom prst="rect">
+            <a:avLst/>
+          </a:prstGeom>
+          <a:gradFill>
+            <a:gsLst>
+              <a:gs pos="8000">
+                <a:srgbClr val="000000"/>
+              </a:gs>
+              <a:gs pos="100000">
+                <a:schemeClr val="accent1">
+                  <a:lumMod val="75000"/>
+                </a:schemeClr>
+              </a:gs>
+            </a:gsLst>
+            <a:lin ang="3000000" scaled="0"/>
+          </a:gradFill>
+          <a:ln>
+            <a:noFill/>
+          </a:ln>
+        </p:spPr>
+        <p:style>
+          <a:lnRef idx="2">
+            <a:schemeClr val="accent1">
+              <a:shade val="50000"/>
+            </a:schemeClr>
+          </a:lnRef>
+          <a:fillRef idx="1">
+            <a:schemeClr val="accent1"/>
+          </a:fillRef>
+          <a:effectRef idx="0">
+            <a:schemeClr val="accent1"/>
+          </a:effectRef>
+          <a:fontRef idx="minor">
+            <a:schemeClr val="lt1"/>
+          </a:fontRef>
+        </p:style>
+        <p:txBody>
+          <a:bodyPr rtlCol="0" anchor="ctr"/>
+          <a:lstStyle/>
+          <a:p>
+            <a:pPr algn="ctr"/>
+            <a:endParaRPr lang="en-US"/>
+          </a:p>
+        </p:txBody>
+      </p:sp>
+      <p:sp>
+        <p:nvSpPr>
+          <p:cNvPr id="13" name="Rectangle 12">
+            <a:extLst>
+              <a:ext uri="{FF2B5EF4-FFF2-40B4-BE49-F238E27FC236}">
+                <a16:creationId xmlns:a16="http://schemas.microsoft.com/office/drawing/2014/main" id="{3847E18C-932D-4C95-AABA-FEC7C9499AD7}"/>
+              </a:ext>
+              <a:ext uri="{C183D7F6-B498-43B3-948B-1728B52AA6E4}">
+                <adec:decorative xmlns:adec="http://schemas.microsoft.com/office/drawing/2017/decorative" val="1"/>
+              </a:ext>
+            </a:extLst>
+          </p:cNvPr>
+          <p:cNvSpPr>
+            <a:spLocks noGrp="1" noRot="1" noChangeAspect="1" noMove="1" noResize="1" noEditPoints="1" noAdjustHandles="1" noChangeArrowheads="1" noChangeShapeType="1" noTextEdit="1"/>
+          </p:cNvSpPr>
+          <p:nvPr>
+            <p:extLst>
+              <p:ext uri="{386F3935-93C4-4BCD-93E2-E3B085C9AB24}">
+                <p16:designElem xmlns:p16="http://schemas.microsoft.com/office/powerpoint/2015/main" val="1"/>
+              </p:ext>
+            </p:extLst>
+          </p:nvPr>
+        </p:nvSpPr>
+        <p:spPr>
+          <a:xfrm rot="5400000" flipH="1">
+            <a:off x="-1410085" y="1420219"/>
+            <a:ext cx="6857999" cy="4037839"/>
+          </a:xfrm>
+          <a:prstGeom prst="rect">
+            <a:avLst/>
+          </a:prstGeom>
+          <a:gradFill>
+            <a:gsLst>
+              <a:gs pos="0">
+                <a:srgbClr val="000000">
+                  <a:alpha val="0"/>
+                </a:srgbClr>
+              </a:gs>
+              <a:gs pos="99000">
+                <a:schemeClr val="accent1">
+                  <a:alpha val="46000"/>
+                </a:schemeClr>
+              </a:gs>
+            </a:gsLst>
+            <a:lin ang="1800000" scaled="0"/>
+          </a:gradFill>
+          <a:ln>
+            <a:noFill/>
+          </a:ln>
+        </p:spPr>
+        <p:style>
+          <a:lnRef idx="2">
+            <a:schemeClr val="accent1">
+              <a:shade val="50000"/>
+            </a:schemeClr>
+          </a:lnRef>
+          <a:fillRef idx="1">
+            <a:schemeClr val="accent1"/>
+          </a:fillRef>
+          <a:effectRef idx="0">
+            <a:schemeClr val="accent1"/>
+          </a:effectRef>
+          <a:fontRef idx="minor">
+            <a:schemeClr val="lt1"/>
+          </a:fontRef>
+        </p:style>
+        <p:txBody>
+          <a:bodyPr rtlCol="0" anchor="ctr"/>
+          <a:lstStyle/>
+          <a:p>
+            <a:pPr algn="ctr"/>
+            <a:endParaRPr lang="en-US"/>
+          </a:p>
+        </p:txBody>
+      </p:sp>
+      <p:sp>
+        <p:nvSpPr>
+          <p:cNvPr id="15" name="Rectangle 14">
+            <a:extLst>
+              <a:ext uri="{FF2B5EF4-FFF2-40B4-BE49-F238E27FC236}">
+                <a16:creationId xmlns:a16="http://schemas.microsoft.com/office/drawing/2014/main" id="{3150CB11-0C61-439E-910F-5787759E72A0}"/>
+              </a:ext>
+              <a:ext uri="{C183D7F6-B498-43B3-948B-1728B52AA6E4}">
+                <adec:decorative xmlns:adec="http://schemas.microsoft.com/office/drawing/2017/decorative" val="1"/>
+              </a:ext>
+            </a:extLst>
+          </p:cNvPr>
+          <p:cNvSpPr>
+            <a:spLocks noGrp="1" noRot="1" noChangeAspect="1" noMove="1" noResize="1" noEditPoints="1" noAdjustHandles="1" noChangeArrowheads="1" noChangeShapeType="1" noTextEdit="1"/>
+          </p:cNvSpPr>
+          <p:nvPr>
+            <p:extLst>
+              <p:ext uri="{386F3935-93C4-4BCD-93E2-E3B085C9AB24}">
+                <p16:designElem xmlns:p16="http://schemas.microsoft.com/office/powerpoint/2015/main" val="1"/>
+              </p:ext>
+            </p:extLst>
+          </p:nvPr>
+        </p:nvSpPr>
+        <p:spPr>
+          <a:xfrm rot="5400000" flipH="1">
+            <a:off x="767923" y="3588085"/>
+            <a:ext cx="2501979" cy="4037841"/>
+          </a:xfrm>
+          <a:prstGeom prst="rect">
+            <a:avLst/>
+          </a:prstGeom>
+          <a:gradFill>
+            <a:gsLst>
+              <a:gs pos="2000">
+                <a:schemeClr val="accent1">
+                  <a:alpha val="29000"/>
+                </a:schemeClr>
+              </a:gs>
+              <a:gs pos="100000">
+                <a:srgbClr val="000000">
+                  <a:alpha val="30000"/>
+                </a:srgbClr>
+              </a:gs>
+            </a:gsLst>
+            <a:lin ang="7800000" scaled="0"/>
+          </a:gradFill>
+          <a:ln>
+            <a:noFill/>
+          </a:ln>
+        </p:spPr>
+        <p:style>
+          <a:lnRef idx="2">
+            <a:schemeClr val="accent1">
+              <a:shade val="50000"/>
+            </a:schemeClr>
+          </a:lnRef>
+          <a:fillRef idx="1">
+            <a:schemeClr val="accent1"/>
+          </a:fillRef>
+          <a:effectRef idx="0">
+            <a:schemeClr val="accent1"/>
+          </a:effectRef>
+          <a:fontRef idx="minor">
+            <a:schemeClr val="lt1"/>
+          </a:fontRef>
+        </p:style>
+        <p:txBody>
+          <a:bodyPr rtlCol="0" anchor="ctr"/>
+          <a:lstStyle/>
+          <a:p>
+            <a:pPr algn="ctr"/>
+            <a:endParaRPr lang="en-US" dirty="0"/>
+          </a:p>
+        </p:txBody>
+      </p:sp>
+      <p:sp>
+        <p:nvSpPr>
+          <p:cNvPr id="17" name="Freeform: Shape 16">
+            <a:extLst>
+              <a:ext uri="{FF2B5EF4-FFF2-40B4-BE49-F238E27FC236}">
+                <a16:creationId xmlns:a16="http://schemas.microsoft.com/office/drawing/2014/main" id="{43F8A58B-5155-44CE-A5FF-7647B47D0A7A}"/>
+              </a:ext>
+              <a:ext uri="{C183D7F6-B498-43B3-948B-1728B52AA6E4}">
+                <adec:decorative xmlns:adec="http://schemas.microsoft.com/office/drawing/2017/decorative" val="1"/>
+              </a:ext>
+            </a:extLst>
+          </p:cNvPr>
+          <p:cNvSpPr>
+            <a:spLocks noGrp="1" noRot="1" noChangeAspect="1" noMove="1" noResize="1" noEditPoints="1" noAdjustHandles="1" noChangeArrowheads="1" noChangeShapeType="1" noTextEdit="1"/>
+          </p:cNvSpPr>
+          <p:nvPr>
+            <p:extLst>
+              <p:ext uri="{386F3935-93C4-4BCD-93E2-E3B085C9AB24}">
+                <p16:designElem xmlns:p16="http://schemas.microsoft.com/office/powerpoint/2015/main" val="1"/>
+              </p:ext>
+            </p:extLst>
+          </p:nvPr>
+        </p:nvSpPr>
+        <p:spPr>
+          <a:xfrm rot="20635413">
+            <a:off x="-501737" y="969718"/>
+            <a:ext cx="3900357" cy="4178958"/>
+          </a:xfrm>
+          <a:custGeom>
+            <a:avLst/>
+            <a:gdLst>
+              <a:gd name="connsiteX0" fmla="*/ 2432225 w 3900357"/>
+              <a:gd name="connsiteY0" fmla="*/ 93939 h 4178958"/>
+              <a:gd name="connsiteX1" fmla="*/ 3900357 w 3900357"/>
+              <a:gd name="connsiteY1" fmla="*/ 2089479 h 4178958"/>
+              <a:gd name="connsiteX2" fmla="*/ 1810878 w 3900357"/>
+              <a:gd name="connsiteY2" fmla="*/ 4178958 h 4178958"/>
+              <a:gd name="connsiteX3" fmla="*/ 78249 w 3900357"/>
+              <a:gd name="connsiteY3" fmla="*/ 3257727 h 4178958"/>
+              <a:gd name="connsiteX4" fmla="*/ 0 w 3900357"/>
+              <a:gd name="connsiteY4" fmla="*/ 3128923 h 4178958"/>
+              <a:gd name="connsiteX5" fmla="*/ 831324 w 3900357"/>
+              <a:gd name="connsiteY5" fmla="*/ 244281 h 4178958"/>
+              <a:gd name="connsiteX6" fmla="*/ 997559 w 3900357"/>
+              <a:gd name="connsiteY6" fmla="*/ 164202 h 4178958"/>
+              <a:gd name="connsiteX7" fmla="*/ 1810878 w 3900357"/>
+              <a:gd name="connsiteY7" fmla="*/ 0 h 4178958"/>
+              <a:gd name="connsiteX8" fmla="*/ 2432225 w 3900357"/>
+              <a:gd name="connsiteY8" fmla="*/ 93939 h 4178958"/>
+            </a:gdLst>
+            <a:ahLst/>
+            <a:cxnLst>
+              <a:cxn ang="0">
+                <a:pos x="connsiteX0" y="connsiteY0"/>
+              </a:cxn>
+              <a:cxn ang="0">
+                <a:pos x="connsiteX1" y="connsiteY1"/>
+              </a:cxn>
+              <a:cxn ang="0">
+                <a:pos x="connsiteX2" y="connsiteY2"/>
+              </a:cxn>
+              <a:cxn ang="0">
+                <a:pos x="connsiteX3" y="connsiteY3"/>
+              </a:cxn>
+              <a:cxn ang="0">
+                <a:pos x="connsiteX4" y="connsiteY4"/>
+              </a:cxn>
+              <a:cxn ang="0">
+                <a:pos x="connsiteX5" y="connsiteY5"/>
+              </a:cxn>
+              <a:cxn ang="0">
+                <a:pos x="connsiteX6" y="connsiteY6"/>
+              </a:cxn>
+              <a:cxn ang="0">
+                <a:pos x="connsiteX7" y="connsiteY7"/>
+              </a:cxn>
+              <a:cxn ang="0">
+                <a:pos x="connsiteX8" y="connsiteY8"/>
+              </a:cxn>
+            </a:cxnLst>
+            <a:rect l="l" t="t" r="r" b="b"/>
+            <a:pathLst>
+              <a:path w="3900357" h="4178958">
+                <a:moveTo>
+                  <a:pt x="2432225" y="93939"/>
+                </a:moveTo>
+                <a:cubicBezTo>
+                  <a:pt x="3282786" y="358491"/>
+                  <a:pt x="3900357" y="1151865"/>
+                  <a:pt x="3900357" y="2089479"/>
+                </a:cubicBezTo>
+                <a:cubicBezTo>
+                  <a:pt x="3900357" y="3243466"/>
+                  <a:pt x="2964865" y="4178958"/>
+                  <a:pt x="1810878" y="4178958"/>
+                </a:cubicBezTo>
+                <a:cubicBezTo>
+                  <a:pt x="1089636" y="4178958"/>
+                  <a:pt x="453744" y="3813531"/>
+                  <a:pt x="78249" y="3257727"/>
+                </a:cubicBezTo>
+                <a:lnTo>
+                  <a:pt x="0" y="3128923"/>
+                </a:lnTo>
+                <a:lnTo>
+                  <a:pt x="831324" y="244281"/>
+                </a:lnTo>
+                <a:lnTo>
+                  <a:pt x="997559" y="164202"/>
+                </a:lnTo>
+                <a:cubicBezTo>
+                  <a:pt x="1247540" y="58468"/>
+                  <a:pt x="1522381" y="0"/>
+                  <a:pt x="1810878" y="0"/>
+                </a:cubicBezTo>
+                <a:cubicBezTo>
+                  <a:pt x="2027251" y="0"/>
+                  <a:pt x="2235942" y="32888"/>
+                  <a:pt x="2432225" y="93939"/>
+                </a:cubicBezTo>
+                <a:close/>
+              </a:path>
+            </a:pathLst>
+          </a:custGeom>
+          <a:gradFill>
+            <a:gsLst>
+              <a:gs pos="29000">
+                <a:srgbClr val="000000">
+                  <a:alpha val="0"/>
+                </a:srgbClr>
+              </a:gs>
+              <a:gs pos="100000">
+                <a:schemeClr val="accent1">
+                  <a:alpha val="43000"/>
+                </a:schemeClr>
+              </a:gs>
+            </a:gsLst>
+            <a:lin ang="1800000" scaled="0"/>
+          </a:gradFill>
+          <a:ln>
+            <a:noFill/>
+          </a:ln>
+        </p:spPr>
+        <p:style>
+          <a:lnRef idx="2">
+            <a:schemeClr val="accent1">
+              <a:shade val="50000"/>
+            </a:schemeClr>
+          </a:lnRef>
+          <a:fillRef idx="1">
+            <a:schemeClr val="accent1"/>
+          </a:fillRef>
+          <a:effectRef idx="0">
+            <a:schemeClr val="accent1"/>
+          </a:effectRef>
+          <a:fontRef idx="minor">
+            <a:schemeClr val="lt1"/>
+          </a:fontRef>
+        </p:style>
+        <p:txBody>
+          <a:bodyPr wrap="square" rtlCol="0" anchor="ctr">
+            <a:noAutofit/>
+          </a:bodyPr>
+          <a:lstStyle/>
+          <a:p>
+            <a:pPr algn="ctr"/>
+            <a:endParaRPr lang="en-US" dirty="0"/>
+          </a:p>
+        </p:txBody>
+      </p:sp>
+      <p:sp>
+        <p:nvSpPr>
+          <p:cNvPr id="19" name="Rectangle 18">
+            <a:extLst>
+              <a:ext uri="{FF2B5EF4-FFF2-40B4-BE49-F238E27FC236}">
+                <a16:creationId xmlns:a16="http://schemas.microsoft.com/office/drawing/2014/main" id="{443F2ACA-E6D6-4028-82DD-F03C262D5DE6}"/>
+              </a:ext>
+              <a:ext uri="{C183D7F6-B498-43B3-948B-1728B52AA6E4}">
+                <adec:decorative xmlns:adec="http://schemas.microsoft.com/office/drawing/2017/decorative" val="1"/>
+              </a:ext>
+            </a:extLst>
+          </p:cNvPr>
+          <p:cNvSpPr>
+            <a:spLocks noGrp="1" noRot="1" noChangeAspect="1" noMove="1" noResize="1" noEditPoints="1" noAdjustHandles="1" noChangeArrowheads="1" noChangeShapeType="1" noTextEdit="1"/>
+          </p:cNvSpPr>
+          <p:nvPr>
+            <p:extLst>
+              <p:ext uri="{386F3935-93C4-4BCD-93E2-E3B085C9AB24}">
+                <p16:designElem xmlns:p16="http://schemas.microsoft.com/office/powerpoint/2015/main" val="1"/>
+              </p:ext>
+            </p:extLst>
+          </p:nvPr>
+        </p:nvSpPr>
+        <p:spPr>
+          <a:xfrm rot="5400000" flipH="1">
+            <a:off x="-1410095" y="1410079"/>
+            <a:ext cx="6858003" cy="4037835"/>
+          </a:xfrm>
+          <a:prstGeom prst="rect">
+            <a:avLst/>
+          </a:prstGeom>
+          <a:gradFill>
+            <a:gsLst>
+              <a:gs pos="0">
+                <a:srgbClr val="000000">
+                  <a:alpha val="0"/>
+                </a:srgbClr>
+              </a:gs>
+              <a:gs pos="99000">
+                <a:schemeClr val="accent1">
+                  <a:lumMod val="60000"/>
+                  <a:lumOff val="40000"/>
+                  <a:alpha val="11000"/>
+                </a:schemeClr>
+              </a:gs>
+            </a:gsLst>
+            <a:lin ang="7200000" scaled="0"/>
+          </a:gradFill>
+          <a:ln>
+            <a:noFill/>
+          </a:ln>
+        </p:spPr>
+        <p:style>
+          <a:lnRef idx="2">
+            <a:schemeClr val="accent1">
+              <a:shade val="50000"/>
+            </a:schemeClr>
+          </a:lnRef>
+          <a:fillRef idx="1">
+            <a:schemeClr val="accent1"/>
+          </a:fillRef>
+          <a:effectRef idx="0">
+            <a:schemeClr val="accent1"/>
+          </a:effectRef>
+          <a:fontRef idx="minor">
+            <a:schemeClr val="lt1"/>
+          </a:fontRef>
+        </p:style>
+        <p:txBody>
+          <a:bodyPr rtlCol="0" anchor="ctr"/>
+          <a:lstStyle/>
+          <a:p>
+            <a:pPr algn="ctr"/>
+            <a:endParaRPr lang="en-US"/>
+          </a:p>
+        </p:txBody>
+      </p:sp>
+      <p:sp>
+        <p:nvSpPr>
+          <p:cNvPr id="2" name="Title 1">
+            <a:extLst>
+              <a:ext uri="{FF2B5EF4-FFF2-40B4-BE49-F238E27FC236}">
+                <a16:creationId xmlns:a16="http://schemas.microsoft.com/office/drawing/2014/main" id="{48CC1186-C5B6-DD2B-186D-3627DA2F78AD}"/>
+              </a:ext>
+            </a:extLst>
+          </p:cNvPr>
+          <p:cNvSpPr>
+            <a:spLocks noGrp="1"/>
+          </p:cNvSpPr>
+          <p:nvPr>
+            <p:ph type="title"/>
+          </p:nvPr>
+        </p:nvSpPr>
+        <p:spPr>
+          <a:xfrm>
+            <a:off x="586478" y="1683756"/>
+            <a:ext cx="3115265" cy="2396359"/>
+          </a:xfrm>
+        </p:spPr>
+        <p:txBody>
+          <a:bodyPr anchor="b">
+            <a:normAutofit/>
+          </a:bodyPr>
+          <a:lstStyle/>
+          <a:p>
+            <a:pPr algn="r"/>
+            <a:r>
+              <a:rPr lang="en-US" sz="4000">
+                <a:solidFill>
+                  <a:srgbClr val="FFFFFF"/>
+                </a:solidFill>
+              </a:rPr>
+              <a:t>The Prediction Task &amp; The “Small Data” Trap</a:t>
+            </a:r>
+          </a:p>
+        </p:txBody>
+      </p:sp>
+      <p:graphicFrame>
+        <p:nvGraphicFramePr>
+          <p:cNvPr id="5" name="Content Placeholder 2">
+            <a:extLst>
+              <a:ext uri="{FF2B5EF4-FFF2-40B4-BE49-F238E27FC236}">
+                <a16:creationId xmlns:a16="http://schemas.microsoft.com/office/drawing/2014/main" id="{2AF4A082-F542-A5F5-8B58-9F2E7A17E6D3}"/>
+              </a:ext>
+            </a:extLst>
+          </p:cNvPr>
+          <p:cNvGraphicFramePr>
+            <a:graphicFrameLocks noGrp="1"/>
+          </p:cNvGraphicFramePr>
+          <p:nvPr>
+            <p:ph idx="1"/>
+            <p:extLst>
+              <p:ext uri="{D42A27DB-BD31-4B8C-83A1-F6EECF244321}">
+                <p14:modId xmlns:p14="http://schemas.microsoft.com/office/powerpoint/2010/main" val="3326639683"/>
+              </p:ext>
+            </p:extLst>
+          </p:nvPr>
+        </p:nvGraphicFramePr>
+        <p:xfrm>
+          <a:off x="4905052" y="750440"/>
+          <a:ext cx="6666833" cy="5453920"/>
+        </p:xfrm>
+        <a:graphic>
+          <a:graphicData uri="http://schemas.openxmlformats.org/drawingml/2006/diagram">
+            <dgm:relIds xmlns:dgm="http://schemas.openxmlformats.org/drawingml/2006/diagram" xmlns:r="http://schemas.openxmlformats.org/officeDocument/2006/relationships" r:dm="rId2" r:lo="rId3" r:qs="rId4" r:cs="rId5"/>
+          </a:graphicData>
+        </a:graphic>
+      </p:graphicFrame>
+    </p:spTree>
+    <p:extLst>
+      <p:ext uri="{BB962C8B-B14F-4D97-AF65-F5344CB8AC3E}">
+        <p14:creationId xmlns:p14="http://schemas.microsoft.com/office/powerpoint/2010/main" val="1910781164"/>
+      </p:ext>
+    </p:extLst>
+  </p:cSld>
+  <p:clrMapOvr>
+    <a:masterClrMapping/>
+  </p:clrMapOvr>
+</p:sld>
+</file>
+
+<file path=ppt/slides/slide6.xml><?xml version="1.0" encoding="utf-8"?>
+<p:sld xmlns:a="http://schemas.openxmlformats.org/drawingml/2006/main" xmlns:r="http://schemas.openxmlformats.org/officeDocument/2006/relationships" xmlns:p="http://schemas.openxmlformats.org/presentationml/2006/main">
+  <p:cSld>
+    <p:bg>
+      <p:bgPr>
+        <a:solidFill>
+          <a:schemeClr val="bg1"/>
+        </a:solidFill>
+        <a:effectLst/>
+      </p:bgPr>
+    </p:bg>
+    <p:spTree>
+      <p:nvGrpSpPr>
+        <p:cNvPr id="1" name=""/>
+        <p:cNvGrpSpPr/>
+        <p:nvPr/>
+      </p:nvGrpSpPr>
+      <p:grpSpPr>
+        <a:xfrm>
+          <a:off x="0" y="0"/>
+          <a:ext cx="0" cy="0"/>
+          <a:chOff x="0" y="0"/>
+          <a:chExt cx="0" cy="0"/>
+        </a:xfrm>
+      </p:grpSpPr>
+      <p:sp useBgFill="1">
+        <p:nvSpPr>
+          <p:cNvPr id="10" name="Slide Background">
+            <a:extLst>
+              <a:ext uri="{FF2B5EF4-FFF2-40B4-BE49-F238E27FC236}">
+                <a16:creationId xmlns:a16="http://schemas.microsoft.com/office/drawing/2014/main" id="{5105D448-4A6C-48A3-8C3C-71AF58F3E506}"/>
+              </a:ext>
+              <a:ext uri="{C183D7F6-B498-43B3-948B-1728B52AA6E4}">
+                <adec:decorative xmlns:adec="http://schemas.microsoft.com/office/drawing/2017/decorative" val="1"/>
+              </a:ext>
+            </a:extLst>
+          </p:cNvPr>
+          <p:cNvSpPr>
+            <a:spLocks noGrp="1" noRot="1" noChangeAspect="1" noMove="1" noResize="1" noEditPoints="1" noAdjustHandles="1" noChangeArrowheads="1" noChangeShapeType="1" noTextEdit="1"/>
+          </p:cNvSpPr>
+          <p:nvPr>
+            <p:extLst>
+              <p:ext uri="{386F3935-93C4-4BCD-93E2-E3B085C9AB24}">
+                <p16:designElem xmlns:p16="http://schemas.microsoft.com/office/powerpoint/2015/main" val="1"/>
+              </p:ext>
+            </p:extLst>
+          </p:nvPr>
+        </p:nvSpPr>
+        <p:spPr>
+          <a:xfrm>
+            <a:off x="0" y="0"/>
+            <a:ext cx="12192000" cy="6858000"/>
+          </a:xfrm>
+          <a:prstGeom prst="rect">
+            <a:avLst/>
+          </a:prstGeom>
+          <a:ln>
+            <a:noFill/>
+          </a:ln>
+        </p:spPr>
+        <p:style>
+          <a:lnRef idx="2">
+            <a:schemeClr val="accent1">
+              <a:shade val="50000"/>
+            </a:schemeClr>
+          </a:lnRef>
+          <a:fillRef idx="1">
+            <a:schemeClr val="accent1"/>
+          </a:fillRef>
+          <a:effectRef idx="0">
+            <a:schemeClr val="accent1"/>
+          </a:effectRef>
+          <a:fontRef idx="minor">
+            <a:schemeClr val="lt1"/>
+          </a:fontRef>
+        </p:style>
+        <p:txBody>
+          <a:bodyPr rtlCol="0" anchor="ctr"/>
+          <a:lstStyle/>
+          <a:p>
+            <a:pPr algn="ctr"/>
+            <a:endParaRPr lang="en-US"/>
+          </a:p>
+        </p:txBody>
+      </p:sp>
+      <p:sp useBgFill="1">
+        <p:nvSpPr>
+          <p:cNvPr id="12" name="Rectangle 11">
+            <a:extLst>
+              <a:ext uri="{FF2B5EF4-FFF2-40B4-BE49-F238E27FC236}">
+                <a16:creationId xmlns:a16="http://schemas.microsoft.com/office/drawing/2014/main" id="{4025579F-C5D8-43BE-AF84-3E66A482C567}"/>
+              </a:ext>
+              <a:ext uri="{C183D7F6-B498-43B3-948B-1728B52AA6E4}">
+                <adec:decorative xmlns:adec="http://schemas.microsoft.com/office/drawing/2017/decorative" val="1"/>
+              </a:ext>
+            </a:extLst>
+          </p:cNvPr>
+          <p:cNvSpPr>
+            <a:spLocks noGrp="1" noRot="1" noChangeAspect="1" noMove="1" noResize="1" noEditPoints="1" noAdjustHandles="1" noChangeArrowheads="1" noChangeShapeType="1" noTextEdit="1"/>
+          </p:cNvSpPr>
+          <p:nvPr>
+            <p:extLst>
+              <p:ext uri="{386F3935-93C4-4BCD-93E2-E3B085C9AB24}">
+                <p16:designElem xmlns:p16="http://schemas.microsoft.com/office/powerpoint/2015/main" val="1"/>
+              </p:ext>
+            </p:extLst>
+          </p:nvPr>
+        </p:nvSpPr>
+        <p:spPr>
+          <a:xfrm>
+            <a:off x="0" y="-2"/>
+            <a:ext cx="12192000" cy="2544415"/>
+          </a:xfrm>
+          <a:prstGeom prst="rect">
+            <a:avLst/>
+          </a:prstGeom>
+          <a:ln>
+            <a:noFill/>
+          </a:ln>
+          <a:effectLst>
+            <a:outerShdw blurRad="203200" dist="88900" dir="5460000" sx="95000" sy="95000" algn="t" rotWithShape="0">
+              <a:srgbClr val="000000">
+                <a:alpha val="26000"/>
+              </a:srgbClr>
+            </a:outerShdw>
+          </a:effectLst>
+        </p:spPr>
+        <p:style>
+          <a:lnRef idx="2">
+            <a:schemeClr val="accent1">
+              <a:shade val="50000"/>
+            </a:schemeClr>
+          </a:lnRef>
+          <a:fillRef idx="1">
+            <a:schemeClr val="accent1"/>
+          </a:fillRef>
+          <a:effectRef idx="0">
+            <a:schemeClr val="accent1"/>
+          </a:effectRef>
+          <a:fontRef idx="minor">
+            <a:schemeClr val="lt1"/>
+          </a:fontRef>
+        </p:style>
+        <p:txBody>
+          <a:bodyPr rtlCol="0" anchor="ctr"/>
+          <a:lstStyle/>
+          <a:p>
+            <a:pPr algn="ctr"/>
+            <a:endParaRPr lang="en-US" dirty="0"/>
+          </a:p>
+        </p:txBody>
+      </p:sp>
+      <p:sp>
+        <p:nvSpPr>
+          <p:cNvPr id="2" name="Title 1">
+            <a:extLst>
+              <a:ext uri="{FF2B5EF4-FFF2-40B4-BE49-F238E27FC236}">
+                <a16:creationId xmlns:a16="http://schemas.microsoft.com/office/drawing/2014/main" id="{751F15F0-1885-B715-08A0-F3B30DBB9E4B}"/>
+              </a:ext>
+            </a:extLst>
+          </p:cNvPr>
+          <p:cNvSpPr>
+            <a:spLocks noGrp="1"/>
+          </p:cNvSpPr>
+          <p:nvPr>
+            <p:ph type="title"/>
+          </p:nvPr>
+        </p:nvSpPr>
+        <p:spPr>
+          <a:xfrm>
+            <a:off x="761999" y="463941"/>
+            <a:ext cx="9963509" cy="1616529"/>
+          </a:xfrm>
+        </p:spPr>
+        <p:txBody>
+          <a:bodyPr>
+            <a:normAutofit/>
+          </a:bodyPr>
+          <a:lstStyle/>
+          <a:p>
+            <a:r>
+              <a:rPr lang="en-US" sz="4000"/>
+              <a:t>XGBoost Vastly Outperforms Baseline</a:t>
+            </a:r>
+          </a:p>
+        </p:txBody>
+      </p:sp>
+      <p:graphicFrame>
+        <p:nvGraphicFramePr>
+          <p:cNvPr id="5" name="Content Placeholder 4">
+            <a:extLst>
+              <a:ext uri="{FF2B5EF4-FFF2-40B4-BE49-F238E27FC236}">
+                <a16:creationId xmlns:a16="http://schemas.microsoft.com/office/drawing/2014/main" id="{6B6B5EEB-74CB-A1CF-852E-7FFB07D303CE}"/>
+              </a:ext>
+            </a:extLst>
+          </p:cNvPr>
+          <p:cNvGraphicFramePr>
+            <a:graphicFrameLocks noGrp="1"/>
+          </p:cNvGraphicFramePr>
+          <p:nvPr>
+            <p:ph idx="1"/>
+            <p:extLst>
+              <p:ext uri="{D42A27DB-BD31-4B8C-83A1-F6EECF244321}">
+                <p14:modId xmlns:p14="http://schemas.microsoft.com/office/powerpoint/2010/main" val="1537935123"/>
+              </p:ext>
+            </p:extLst>
+          </p:nvPr>
+        </p:nvGraphicFramePr>
+        <p:xfrm>
+          <a:off x="912185" y="3106763"/>
+          <a:ext cx="10370398" cy="2950464"/>
+        </p:xfrm>
+        <a:graphic>
+          <a:graphicData uri="http://schemas.openxmlformats.org/drawingml/2006/table">
+            <a:tbl>
+              <a:tblPr firstRow="1" bandRow="1">
+                <a:tableStyleId>{5C22544A-7EE6-4342-B048-85BDC9FD1C3A}</a:tableStyleId>
+              </a:tblPr>
+              <a:tblGrid>
+                <a:gridCol w="2300394">
+                  <a:extLst>
+                    <a:ext uri="{9D8B030D-6E8A-4147-A177-3AD203B41FA5}">
+                      <a16:colId xmlns:a16="http://schemas.microsoft.com/office/drawing/2014/main" val="636036401"/>
+                    </a:ext>
+                  </a:extLst>
+                </a:gridCol>
+                <a:gridCol w="3464560">
+                  <a:extLst>
+                    <a:ext uri="{9D8B030D-6E8A-4147-A177-3AD203B41FA5}">
+                      <a16:colId xmlns:a16="http://schemas.microsoft.com/office/drawing/2014/main" val="3241708511"/>
+                    </a:ext>
+                  </a:extLst>
+                </a:gridCol>
+                <a:gridCol w="4605444">
+                  <a:extLst>
+                    <a:ext uri="{9D8B030D-6E8A-4147-A177-3AD203B41FA5}">
+                      <a16:colId xmlns:a16="http://schemas.microsoft.com/office/drawing/2014/main" val="1152531452"/>
+                    </a:ext>
+                  </a:extLst>
+                </a:gridCol>
+              </a:tblGrid>
+              <a:tr h="737616">
+                <a:tc>
+                  <a:txBody>
+                    <a:bodyPr/>
+                    <a:lstStyle/>
+                    <a:p>
+                      <a:r>
+                        <a:rPr lang="en-US" sz="3300" b="1"/>
+                        <a:t>Metric</a:t>
+                      </a:r>
+                    </a:p>
+                  </a:txBody>
+                  <a:tcPr marL="167640" marR="167640" marT="83820" marB="83820"/>
+                </a:tc>
+                <a:tc>
+                  <a:txBody>
+                    <a:bodyPr/>
+                    <a:lstStyle/>
+                    <a:p>
+                      <a:r>
+                        <a:rPr lang="en-US" sz="3300"/>
+                        <a:t>Random Forest</a:t>
+                      </a:r>
+                    </a:p>
+                  </a:txBody>
+                  <a:tcPr marL="167640" marR="167640" marT="83820" marB="83820"/>
+                </a:tc>
+                <a:tc>
+                  <a:txBody>
+                    <a:bodyPr/>
+                    <a:lstStyle/>
+                    <a:p>
+                      <a:r>
+                        <a:rPr lang="en-US" sz="3300"/>
+                        <a:t>Regularized XGBoost</a:t>
+                      </a:r>
+                    </a:p>
+                  </a:txBody>
+                  <a:tcPr marL="167640" marR="167640" marT="83820" marB="83820"/>
+                </a:tc>
+                <a:extLst>
+                  <a:ext uri="{0D108BD9-81ED-4DB2-BD59-A6C34878D82A}">
+                    <a16:rowId xmlns:a16="http://schemas.microsoft.com/office/drawing/2014/main" val="3353612900"/>
+                  </a:ext>
+                </a:extLst>
+              </a:tr>
+              <a:tr h="737616">
+                <a:tc>
+                  <a:txBody>
+                    <a:bodyPr/>
+                    <a:lstStyle/>
+                    <a:p>
+                      <a:r>
+                        <a:rPr lang="en-US" sz="3300"/>
+                        <a:t>Recall</a:t>
+                      </a:r>
+                    </a:p>
+                  </a:txBody>
+                  <a:tcPr marL="167640" marR="167640" marT="83820" marB="83820"/>
+                </a:tc>
+                <a:tc>
+                  <a:txBody>
+                    <a:bodyPr/>
+                    <a:lstStyle/>
+                    <a:p>
+                      <a:r>
+                        <a:rPr lang="en-US" sz="3300"/>
+                        <a:t>24.3%</a:t>
+                      </a:r>
+                    </a:p>
+                  </a:txBody>
+                  <a:tcPr marL="167640" marR="167640" marT="83820" marB="83820"/>
+                </a:tc>
+                <a:tc>
+                  <a:txBody>
+                    <a:bodyPr/>
+                    <a:lstStyle/>
+                    <a:p>
+                      <a:r>
+                        <a:rPr lang="en-US" sz="3300"/>
+                        <a:t>66.8%</a:t>
+                      </a:r>
+                    </a:p>
+                  </a:txBody>
+                  <a:tcPr marL="167640" marR="167640" marT="83820" marB="83820"/>
+                </a:tc>
+                <a:extLst>
+                  <a:ext uri="{0D108BD9-81ED-4DB2-BD59-A6C34878D82A}">
+                    <a16:rowId xmlns:a16="http://schemas.microsoft.com/office/drawing/2014/main" val="1030753624"/>
+                  </a:ext>
+                </a:extLst>
+              </a:tr>
+              <a:tr h="737616">
+                <a:tc>
+                  <a:txBody>
+                    <a:bodyPr/>
+                    <a:lstStyle/>
+                    <a:p>
+                      <a:r>
+                        <a:rPr lang="en-US" sz="3300"/>
+                        <a:t>F1-Score</a:t>
+                      </a:r>
+                    </a:p>
+                  </a:txBody>
+                  <a:tcPr marL="167640" marR="167640" marT="83820" marB="83820"/>
+                </a:tc>
+                <a:tc>
+                  <a:txBody>
+                    <a:bodyPr/>
+                    <a:lstStyle/>
+                    <a:p>
+                      <a:r>
+                        <a:rPr lang="en-US" sz="3300"/>
+                        <a:t>0.206 </a:t>
+                      </a:r>
+                    </a:p>
+                  </a:txBody>
+                  <a:tcPr marL="167640" marR="167640" marT="83820" marB="83820"/>
+                </a:tc>
+                <a:tc>
+                  <a:txBody>
+                    <a:bodyPr/>
+                    <a:lstStyle/>
+                    <a:p>
+                      <a:r>
+                        <a:rPr lang="en-US" sz="3300"/>
+                        <a:t>0.296</a:t>
+                      </a:r>
+                    </a:p>
+                  </a:txBody>
+                  <a:tcPr marL="167640" marR="167640" marT="83820" marB="83820"/>
+                </a:tc>
+                <a:extLst>
+                  <a:ext uri="{0D108BD9-81ED-4DB2-BD59-A6C34878D82A}">
+                    <a16:rowId xmlns:a16="http://schemas.microsoft.com/office/drawing/2014/main" val="1530776560"/>
+                  </a:ext>
+                </a:extLst>
+              </a:tr>
+              <a:tr h="737616">
+                <a:tc>
+                  <a:txBody>
+                    <a:bodyPr/>
+                    <a:lstStyle/>
+                    <a:p>
+                      <a:r>
+                        <a:rPr lang="en-US" sz="3300"/>
+                        <a:t>PR-AUC</a:t>
+                      </a:r>
+                    </a:p>
+                  </a:txBody>
+                  <a:tcPr marL="167640" marR="167640" marT="83820" marB="83820"/>
+                </a:tc>
+                <a:tc>
+                  <a:txBody>
+                    <a:bodyPr/>
+                    <a:lstStyle/>
+                    <a:p>
+                      <a:r>
+                        <a:rPr lang="en-US" sz="3300"/>
+                        <a:t>0.117 </a:t>
+                      </a:r>
+                    </a:p>
+                  </a:txBody>
+                  <a:tcPr marL="167640" marR="167640" marT="83820" marB="83820"/>
+                </a:tc>
+                <a:tc>
+                  <a:txBody>
+                    <a:bodyPr/>
+                    <a:lstStyle/>
+                    <a:p>
+                      <a:r>
+                        <a:rPr lang="en-US" sz="3300"/>
+                        <a:t>0.157</a:t>
+                      </a:r>
+                    </a:p>
+                  </a:txBody>
+                  <a:tcPr marL="167640" marR="167640" marT="83820" marB="83820"/>
+                </a:tc>
+                <a:extLst>
+                  <a:ext uri="{0D108BD9-81ED-4DB2-BD59-A6C34878D82A}">
+                    <a16:rowId xmlns:a16="http://schemas.microsoft.com/office/drawing/2014/main" val="791251762"/>
+                  </a:ext>
+                </a:extLst>
+              </a:tr>
+            </a:tbl>
+          </a:graphicData>
+        </a:graphic>
+      </p:graphicFrame>
+    </p:spTree>
+    <p:extLst>
+      <p:ext uri="{BB962C8B-B14F-4D97-AF65-F5344CB8AC3E}">
+        <p14:creationId xmlns:p14="http://schemas.microsoft.com/office/powerpoint/2010/main" val="550332891"/>
+      </p:ext>
+    </p:extLst>
+  </p:cSld>
+  <p:clrMapOvr>
+    <a:masterClrMapping/>
+  </p:clrMapOvr>
+</p:sld>
+</file>
+
+<file path=ppt/slides/slide7.xml><?xml version="1.0" encoding="utf-8"?>
+<p:sld xmlns:a="http://schemas.openxmlformats.org/drawingml/2006/main" xmlns:r="http://schemas.openxmlformats.org/officeDocument/2006/relationships" xmlns:p="http://schemas.openxmlformats.org/presentationml/2006/main">
+  <p:cSld>
+    <p:bg>
+      <p:bgPr>
+        <a:solidFill>
+          <a:schemeClr val="bg1"/>
+        </a:solidFill>
+        <a:effectLst/>
+      </p:bgPr>
+    </p:bg>
+    <p:spTree>
+      <p:nvGrpSpPr>
+        <p:cNvPr id="1" name=""/>
+        <p:cNvGrpSpPr/>
+        <p:nvPr/>
+      </p:nvGrpSpPr>
+      <p:grpSpPr>
+        <a:xfrm>
+          <a:off x="0" y="0"/>
+          <a:ext cx="0" cy="0"/>
+          <a:chOff x="0" y="0"/>
+          <a:chExt cx="0" cy="0"/>
+        </a:xfrm>
+      </p:grpSpPr>
+      <p:sp useBgFill="1">
+        <p:nvSpPr>
+          <p:cNvPr id="8" name="Rectangle 7">
+            <a:extLst>
+              <a:ext uri="{FF2B5EF4-FFF2-40B4-BE49-F238E27FC236}">
+                <a16:creationId xmlns:a16="http://schemas.microsoft.com/office/drawing/2014/main" id="{C2554CA6-288E-4202-BC52-2E5A8F0C0AED}"/>
+              </a:ext>
+              <a:ext uri="{C183D7F6-B498-43B3-948B-1728B52AA6E4}">
+                <adec:decorative xmlns:adec="http://schemas.microsoft.com/office/drawing/2017/decorative" val="1"/>
+              </a:ext>
+            </a:extLst>
+          </p:cNvPr>
+          <p:cNvSpPr>
+            <a:spLocks noGrp="1" noRot="1" noChangeAspect="1" noMove="1" noResize="1" noEditPoints="1" noAdjustHandles="1" noChangeArrowheads="1" noChangeShapeType="1" noTextEdit="1"/>
+          </p:cNvSpPr>
+          <p:nvPr>
+            <p:extLst>
+              <p:ext uri="{386F3935-93C4-4BCD-93E2-E3B085C9AB24}">
+                <p16:designElem xmlns:p16="http://schemas.microsoft.com/office/powerpoint/2015/main" val="1"/>
+              </p:ext>
+            </p:extLst>
+          </p:nvPr>
+        </p:nvSpPr>
+        <p:spPr>
+          <a:xfrm>
+            <a:off x="3048" y="0"/>
+            <a:ext cx="12188952" cy="6858000"/>
+          </a:xfrm>
+          <a:prstGeom prst="rect">
+            <a:avLst/>
+          </a:prstGeom>
+          <a:ln>
+            <a:noFill/>
+          </a:ln>
+        </p:spPr>
+        <p:style>
+          <a:lnRef idx="2">
+            <a:schemeClr val="accent1">
+              <a:shade val="50000"/>
+            </a:schemeClr>
+          </a:lnRef>
+          <a:fillRef idx="1">
+            <a:schemeClr val="accent1"/>
+          </a:fillRef>
+          <a:effectRef idx="0">
+            <a:schemeClr val="accent1"/>
+          </a:effectRef>
+          <a:fontRef idx="minor">
+            <a:schemeClr val="lt1"/>
+          </a:fontRef>
+        </p:style>
+        <p:txBody>
+          <a:bodyPr rtlCol="0" anchor="ctr"/>
+          <a:lstStyle/>
+          <a:p>
+            <a:pPr algn="ctr"/>
+            <a:endParaRPr lang="en-US"/>
+          </a:p>
+        </p:txBody>
+      </p:sp>
+      <p:sp>
+        <p:nvSpPr>
+          <p:cNvPr id="10" name="Oval 9">
+            <a:extLst>
+              <a:ext uri="{FF2B5EF4-FFF2-40B4-BE49-F238E27FC236}">
+                <a16:creationId xmlns:a16="http://schemas.microsoft.com/office/drawing/2014/main" id="{B10BB131-AC8E-4A8E-A5D1-36260F720C3B}"/>
+              </a:ext>
+              <a:ext uri="{C183D7F6-B498-43B3-948B-1728B52AA6E4}">
+                <adec:decorative xmlns:adec="http://schemas.microsoft.com/office/drawing/2017/decorative" val="1"/>
+              </a:ext>
+            </a:extLst>
+          </p:cNvPr>
+          <p:cNvSpPr>
+            <a:spLocks noGrp="1" noRot="1" noChangeAspect="1" noMove="1" noResize="1" noEditPoints="1" noAdjustHandles="1" noChangeArrowheads="1" noChangeShapeType="1" noTextEdit="1"/>
+          </p:cNvSpPr>
+          <p:nvPr>
+            <p:extLst>
+              <p:ext uri="{386F3935-93C4-4BCD-93E2-E3B085C9AB24}">
+                <p16:designElem xmlns:p16="http://schemas.microsoft.com/office/powerpoint/2015/main" val="1"/>
+              </p:ext>
+            </p:extLst>
+          </p:nvPr>
+        </p:nvSpPr>
+        <p:spPr>
+          <a:xfrm>
+            <a:off x="489189" y="1119031"/>
+            <a:ext cx="4619938" cy="4619938"/>
+          </a:xfrm>
+          <a:prstGeom prst="ellipse">
+            <a:avLst/>
+          </a:prstGeom>
+          <a:solidFill>
+            <a:schemeClr val="accent2"/>
+          </a:solidFill>
+          <a:ln>
+            <a:noFill/>
+          </a:ln>
+        </p:spPr>
+        <p:style>
+          <a:lnRef idx="2">
+            <a:schemeClr val="accent1">
+              <a:shade val="50000"/>
+            </a:schemeClr>
+          </a:lnRef>
+          <a:fillRef idx="1">
+            <a:schemeClr val="accent1"/>
+          </a:fillRef>
+          <a:effectRef idx="0">
+            <a:schemeClr val="accent1"/>
+          </a:effectRef>
+          <a:fontRef idx="minor">
+            <a:schemeClr val="lt1"/>
+          </a:fontRef>
+        </p:style>
+        <p:txBody>
+          <a:bodyPr rtlCol="0" anchor="ctr"/>
+          <a:lstStyle/>
+          <a:p>
+            <a:pPr algn="ctr"/>
+            <a:endParaRPr lang="en-US"/>
+          </a:p>
+        </p:txBody>
+      </p:sp>
+      <p:sp>
+        <p:nvSpPr>
+          <p:cNvPr id="2" name="Title 1">
+            <a:extLst>
+              <a:ext uri="{FF2B5EF4-FFF2-40B4-BE49-F238E27FC236}">
+                <a16:creationId xmlns:a16="http://schemas.microsoft.com/office/drawing/2014/main" id="{8C080E9A-AE19-10B3-5887-57D084614EB6}"/>
+              </a:ext>
+            </a:extLst>
+          </p:cNvPr>
+          <p:cNvSpPr>
+            <a:spLocks noGrp="1"/>
+          </p:cNvSpPr>
+          <p:nvPr>
+            <p:ph type="title"/>
+          </p:nvPr>
+        </p:nvSpPr>
+        <p:spPr>
+          <a:xfrm>
+            <a:off x="1171074" y="1396686"/>
+            <a:ext cx="3240506" cy="4064628"/>
+          </a:xfrm>
+        </p:spPr>
+        <p:txBody>
+          <a:bodyPr>
+            <a:normAutofit/>
+          </a:bodyPr>
+          <a:lstStyle/>
+          <a:p>
+            <a:r>
+              <a:rPr lang="en-US" sz="3400">
+                <a:solidFill>
+                  <a:srgbClr val="FFFFFF"/>
+                </a:solidFill>
+              </a:rPr>
+              <a:t>Decoding the XGBoost Hyperparameters</a:t>
+            </a:r>
+          </a:p>
+        </p:txBody>
+      </p:sp>
+      <p:sp>
+        <p:nvSpPr>
+          <p:cNvPr id="12" name="Arc 11">
+            <a:extLst>
+              <a:ext uri="{FF2B5EF4-FFF2-40B4-BE49-F238E27FC236}">
+                <a16:creationId xmlns:a16="http://schemas.microsoft.com/office/drawing/2014/main" id="{5B7778FC-632E-4DCA-A7CB-0D7731CCF970}"/>
+              </a:ext>
+              <a:ext uri="{C183D7F6-B498-43B3-948B-1728B52AA6E4}">
+                <adec:decorative xmlns:adec="http://schemas.microsoft.com/office/drawing/2017/decorative" val="1"/>
+              </a:ext>
+            </a:extLst>
+          </p:cNvPr>
+          <p:cNvSpPr>
+            <a:spLocks noGrp="1" noRot="1" noChangeAspect="1" noMove="1" noResize="1" noEditPoints="1" noAdjustHandles="1" noChangeArrowheads="1" noChangeShapeType="1" noTextEdit="1"/>
+          </p:cNvSpPr>
+          <p:nvPr>
+            <p:extLst>
+              <p:ext uri="{386F3935-93C4-4BCD-93E2-E3B085C9AB24}">
+                <p16:designElem xmlns:p16="http://schemas.microsoft.com/office/powerpoint/2015/main" val="1"/>
+              </p:ext>
+            </p:extLst>
+          </p:nvPr>
+        </p:nvSpPr>
+        <p:spPr>
+          <a:xfrm rot="19809111">
+            <a:off x="8683720" y="941148"/>
+            <a:ext cx="2987899" cy="2987899"/>
+          </a:xfrm>
+          <a:prstGeom prst="arc">
+            <a:avLst>
+              <a:gd name="adj1" fmla="val 15817365"/>
+              <a:gd name="adj2" fmla="val 1781380"/>
+            </a:avLst>
+          </a:prstGeom>
+          <a:ln w="127000" cap="rnd">
+            <a:solidFill>
+              <a:schemeClr val="accent4"/>
+            </a:solidFill>
+            <a:prstDash val="dash"/>
+            <a:miter lim="800000"/>
+          </a:ln>
+        </p:spPr>
+        <p:style>
+          <a:lnRef idx="1">
+            <a:schemeClr val="accent1"/>
+          </a:lnRef>
+          <a:fillRef idx="0">
+            <a:schemeClr val="accent1"/>
+          </a:fillRef>
+          <a:effectRef idx="0">
+            <a:schemeClr val="accent1"/>
+          </a:effectRef>
+          <a:fontRef idx="minor">
+            <a:schemeClr val="tx1"/>
+          </a:fontRef>
+        </p:style>
+        <p:txBody>
+          <a:bodyPr rtlCol="0" anchor="ctr"/>
+          <a:lstStyle/>
+          <a:p>
+            <a:pPr marL="0" marR="0" lvl="0" indent="0" algn="ctr" defTabSz="914400" rtl="0" eaLnBrk="1" fontAlgn="auto" latinLnBrk="0" hangingPunct="1">
+              <a:lnSpc>
+                <a:spcPct val="100000"/>
+              </a:lnSpc>
+              <a:spcBef>
+                <a:spcPts val="0"/>
+              </a:spcBef>
+              <a:spcAft>
+                <a:spcPts val="0"/>
+              </a:spcAft>
+              <a:buClrTx/>
+              <a:buSzTx/>
+              <a:buFontTx/>
+              <a:buNone/>
+              <a:tabLst/>
+              <a:defRPr/>
+            </a:pPr>
+            <a:endParaRPr kumimoji="0" lang="en-US" sz="1800" b="0" i="0" u="none" strike="noStrike" kern="1200" cap="none" spc="0" normalizeH="0" baseline="0" noProof="0">
+              <a:ln>
+                <a:noFill/>
+              </a:ln>
+              <a:solidFill>
+                <a:srgbClr val="000000"/>
+              </a:solidFill>
+              <a:effectLst/>
+              <a:uLnTx/>
+              <a:uFillTx/>
+              <a:latin typeface="Calibri" panose="020F0502020204030204"/>
+              <a:ea typeface="+mn-ea"/>
+              <a:cs typeface="+mn-cs"/>
+            </a:endParaRPr>
+          </a:p>
+        </p:txBody>
+      </p:sp>
+      <p:sp>
+        <p:nvSpPr>
+          <p:cNvPr id="14" name="Oval 13">
+            <a:extLst>
+              <a:ext uri="{FF2B5EF4-FFF2-40B4-BE49-F238E27FC236}">
+                <a16:creationId xmlns:a16="http://schemas.microsoft.com/office/drawing/2014/main" id="{FA23A907-97FB-4A8F-880A-DD77401C4296}"/>
+              </a:ext>
+              <a:ext uri="{C183D7F6-B498-43B3-948B-1728B52AA6E4}">
+                <adec:decorative xmlns:adec="http://schemas.microsoft.com/office/drawing/2017/decorative" val="1"/>
+              </a:ext>
+            </a:extLst>
+          </p:cNvPr>
+          <p:cNvSpPr>
+            <a:spLocks noGrp="1" noRot="1" noChangeAspect="1" noMove="1" noResize="1" noEditPoints="1" noAdjustHandles="1" noChangeArrowheads="1" noChangeShapeType="1" noTextEdit="1"/>
+          </p:cNvSpPr>
+          <p:nvPr>
+            <p:extLst>
+              <p:ext uri="{386F3935-93C4-4BCD-93E2-E3B085C9AB24}">
+                <p16:designElem xmlns:p16="http://schemas.microsoft.com/office/powerpoint/2015/main" val="1"/>
+              </p:ext>
+            </p:extLst>
+          </p:nvPr>
+        </p:nvSpPr>
+        <p:spPr>
+          <a:xfrm>
+            <a:off x="910048" y="4780992"/>
+            <a:ext cx="546100" cy="546100"/>
+          </a:xfrm>
+          <a:prstGeom prst="ellipse">
+            <a:avLst/>
+          </a:prstGeom>
+          <a:solidFill>
+            <a:schemeClr val="accent5"/>
+          </a:solidFill>
+          <a:ln>
+            <a:noFill/>
+          </a:ln>
+        </p:spPr>
+        <p:style>
+          <a:lnRef idx="2">
+            <a:schemeClr val="accent1">
+              <a:shade val="50000"/>
+            </a:schemeClr>
+          </a:lnRef>
+          <a:fillRef idx="1">
+            <a:schemeClr val="accent1"/>
+          </a:fillRef>
+          <a:effectRef idx="0">
+            <a:schemeClr val="accent1"/>
+          </a:effectRef>
+          <a:fontRef idx="minor">
+            <a:schemeClr val="lt1"/>
+          </a:fontRef>
+        </p:style>
+        <p:txBody>
+          <a:bodyPr rtlCol="0" anchor="ctr"/>
+          <a:lstStyle/>
+          <a:p>
+            <a:pPr marL="0" marR="0" lvl="0" indent="0" algn="ctr" defTabSz="914400" rtl="0" eaLnBrk="1" fontAlgn="auto" latinLnBrk="0" hangingPunct="1">
+              <a:lnSpc>
+                <a:spcPct val="100000"/>
+              </a:lnSpc>
+              <a:spcBef>
+                <a:spcPts val="0"/>
+              </a:spcBef>
+              <a:spcAft>
+                <a:spcPts val="0"/>
+              </a:spcAft>
+              <a:buClrTx/>
+              <a:buSzTx/>
+              <a:buFontTx/>
+              <a:buNone/>
+              <a:tabLst/>
+              <a:defRPr/>
+            </a:pPr>
+            <a:endParaRPr kumimoji="0" lang="en-US" sz="1800" b="0" i="0" u="none" strike="noStrike" kern="1200" cap="none" spc="0" normalizeH="0" baseline="0" noProof="0">
+              <a:ln>
+                <a:noFill/>
+              </a:ln>
+              <a:solidFill>
+                <a:srgbClr val="FFFFFF"/>
+              </a:solidFill>
+              <a:effectLst/>
+              <a:uLnTx/>
+              <a:uFillTx/>
+              <a:latin typeface="Calibri" panose="020F0502020204030204"/>
+              <a:ea typeface="+mn-ea"/>
+              <a:cs typeface="+mn-cs"/>
+            </a:endParaRPr>
+          </a:p>
+        </p:txBody>
+      </p:sp>
+      <p:sp>
+        <p:nvSpPr>
+          <p:cNvPr id="3" name="Content Placeholder 2">
+            <a:extLst>
+              <a:ext uri="{FF2B5EF4-FFF2-40B4-BE49-F238E27FC236}">
+                <a16:creationId xmlns:a16="http://schemas.microsoft.com/office/drawing/2014/main" id="{F5BFED4F-8C6E-4413-691E-6D07DB4A79BE}"/>
+              </a:ext>
+            </a:extLst>
+          </p:cNvPr>
+          <p:cNvSpPr>
+            <a:spLocks noGrp="1"/>
+          </p:cNvSpPr>
+          <p:nvPr>
+            <p:ph idx="1"/>
+          </p:nvPr>
+        </p:nvSpPr>
+        <p:spPr>
+          <a:xfrm>
+            <a:off x="5370153" y="1526033"/>
+            <a:ext cx="5536397" cy="3935281"/>
+          </a:xfrm>
+        </p:spPr>
+        <p:txBody>
+          <a:bodyPr>
+            <a:normAutofit/>
+          </a:bodyPr>
+          <a:lstStyle/>
+          <a:p>
+            <a:r>
+              <a:rPr lang="en-US" sz="1700" dirty="0"/>
+              <a:t>Three Key Callouts: </a:t>
+            </a:r>
+          </a:p>
+          <a:p>
+            <a:pPr lvl="1"/>
+            <a:r>
+              <a:rPr lang="en-US" sz="1700" dirty="0"/>
+              <a:t>The Imbalance Fix: </a:t>
+            </a:r>
+            <a:r>
+              <a:rPr lang="en-US" sz="1700" dirty="0" err="1"/>
+              <a:t>scale_pos_weight</a:t>
+            </a:r>
+            <a:r>
+              <a:rPr lang="en-US" sz="1700" dirty="0"/>
+              <a:t>: ~11.3 (Penalizes missed Cinderellas 11x more). </a:t>
+            </a:r>
+          </a:p>
+          <a:p>
+            <a:pPr lvl="1"/>
+            <a:r>
+              <a:rPr lang="en-US" sz="1700" dirty="0"/>
+              <a:t>Breaking Reliance: </a:t>
+            </a:r>
+            <a:r>
+              <a:rPr lang="en-US" sz="1700" dirty="0" err="1"/>
+              <a:t>colsample_bytree</a:t>
+            </a:r>
+            <a:r>
+              <a:rPr lang="en-US" sz="1700" dirty="0"/>
+              <a:t>: 0.5 (Forces the model to look at advanced stats, not just the Seed Number). </a:t>
+            </a:r>
+          </a:p>
+          <a:p>
+            <a:pPr lvl="1"/>
+            <a:r>
+              <a:rPr lang="en-US" sz="1700" dirty="0"/>
+              <a:t>Preventing Memorization: </a:t>
+            </a:r>
+            <a:r>
+              <a:rPr lang="en-US" sz="1700" dirty="0" err="1"/>
+              <a:t>max_depth</a:t>
+            </a:r>
+            <a:r>
+              <a:rPr lang="en-US" sz="1700" dirty="0"/>
+              <a:t>: 2 (Uses shallow "stumps" instead of deep trees to prevent overfitting).</a:t>
+            </a:r>
+          </a:p>
+        </p:txBody>
+      </p:sp>
+    </p:spTree>
+    <p:extLst>
+      <p:ext uri="{BB962C8B-B14F-4D97-AF65-F5344CB8AC3E}">
+        <p14:creationId xmlns:p14="http://schemas.microsoft.com/office/powerpoint/2010/main" val="3332230246"/>
+      </p:ext>
+    </p:extLst>
+  </p:cSld>
+  <p:clrMapOvr>
+    <a:masterClrMapping/>
+  </p:clrMapOvr>
+</p:sld>
+</file>
+
+<file path=ppt/slides/slide8.xml><?xml version="1.0" encoding="utf-8"?>
 <p:sld xmlns:a="http://schemas.openxmlformats.org/drawingml/2006/main" xmlns:r="http://schemas.openxmlformats.org/officeDocument/2006/relationships" xmlns:p="http://schemas.openxmlformats.org/presentationml/2006/main">
   <p:cSld>
     <p:bg>
@@ -9553,29 +14745,29 @@
             </a:pPr>
             <a:r>
               <a:rPr lang="en-US" sz="2200" dirty="0" err="1"/>
+              <a:t>Rank_vs_TourneyAvg</a:t>
+            </a:r>
+            <a:r>
+              <a:rPr lang="en-US" sz="2200" dirty="0"/>
+              <a:t> was our top predictor with </a:t>
+            </a:r>
+            <a:r>
+              <a:rPr lang="en-US" sz="2200" dirty="0" err="1"/>
               <a:t>SeedNum</a:t>
             </a:r>
             <a:r>
               <a:rPr lang="en-US" sz="2200" dirty="0"/>
-              <a:t> was highly predictive but the model predictions were also driven by </a:t>
-            </a:r>
-            <a:r>
-              <a:rPr lang="en-US" sz="2200" dirty="0" err="1"/>
-              <a:t>Rank_vs_TourneyAvg</a:t>
-            </a:r>
-            <a:r>
-              <a:rPr lang="en-US" sz="2200" dirty="0"/>
-              <a:t>, and Massey Ratings. While other variables were slightly less impactful.</a:t>
+              <a:t> being a close second. Showing that although the teams seed number was low by the tournament committee their underlying Massey Ratings metric mathematically placed them above.</a:t>
             </a:r>
           </a:p>
         </p:txBody>
       </p:sp>
       <p:pic>
         <p:nvPicPr>
-          <p:cNvPr id="5" name="Picture 4">
+          <p:cNvPr id="6" name="Picture 5">
             <a:extLst>
               <a:ext uri="{FF2B5EF4-FFF2-40B4-BE49-F238E27FC236}">
-                <a16:creationId xmlns:a16="http://schemas.microsoft.com/office/drawing/2014/main" id="{5CBF5752-19B2-8271-73D0-3DDF01E9FA20}"/>
+                <a16:creationId xmlns:a16="http://schemas.microsoft.com/office/drawing/2014/main" id="{D02FCB11-0CC0-1720-5033-8A80D2267BD8}"/>
               </a:ext>
             </a:extLst>
           </p:cNvPr>
@@ -9598,8 +14790,8 @@
         </p:blipFill>
         <p:spPr>
           <a:xfrm>
-            <a:off x="6099048" y="1450123"/>
-            <a:ext cx="5458968" cy="3957754"/>
+            <a:off x="5449824" y="1165092"/>
+            <a:ext cx="6253816" cy="4527815"/>
           </a:xfrm>
           <a:prstGeom prst="rect">
             <a:avLst/>
@@ -9619,846 +14811,7 @@
 </p:sld>
 </file>
 
-<file path=ppt/slides/slide6.xml><?xml version="1.0" encoding="utf-8"?>
-<p:sld xmlns:a="http://schemas.openxmlformats.org/drawingml/2006/main" xmlns:r="http://schemas.openxmlformats.org/officeDocument/2006/relationships" xmlns:p="http://schemas.openxmlformats.org/presentationml/2006/main">
-  <p:cSld>
-    <p:bg>
-      <p:bgPr>
-        <a:solidFill>
-          <a:schemeClr val="bg1"/>
-        </a:solidFill>
-        <a:effectLst/>
-      </p:bgPr>
-    </p:bg>
-    <p:spTree>
-      <p:nvGrpSpPr>
-        <p:cNvPr id="1" name=""/>
-        <p:cNvGrpSpPr/>
-        <p:nvPr/>
-      </p:nvGrpSpPr>
-      <p:grpSpPr>
-        <a:xfrm>
-          <a:off x="0" y="0"/>
-          <a:ext cx="0" cy="0"/>
-          <a:chOff x="0" y="0"/>
-          <a:chExt cx="0" cy="0"/>
-        </a:xfrm>
-      </p:grpSpPr>
-      <p:sp useBgFill="1">
-        <p:nvSpPr>
-          <p:cNvPr id="8" name="Rectangle 7">
-            <a:extLst>
-              <a:ext uri="{FF2B5EF4-FFF2-40B4-BE49-F238E27FC236}">
-                <a16:creationId xmlns:a16="http://schemas.microsoft.com/office/drawing/2014/main" id="{100EDD19-6802-4EC3-95CE-CFFAB042CFD6}"/>
-              </a:ext>
-              <a:ext uri="{C183D7F6-B498-43B3-948B-1728B52AA6E4}">
-                <adec:decorative xmlns:adec="http://schemas.microsoft.com/office/drawing/2017/decorative" val="1"/>
-              </a:ext>
-            </a:extLst>
-          </p:cNvPr>
-          <p:cNvSpPr>
-            <a:spLocks noGrp="1" noRot="1" noChangeAspect="1" noMove="1" noResize="1" noEditPoints="1" noAdjustHandles="1" noChangeArrowheads="1" noChangeShapeType="1" noTextEdit="1"/>
-          </p:cNvSpPr>
-          <p:nvPr>
-            <p:extLst>
-              <p:ext uri="{386F3935-93C4-4BCD-93E2-E3B085C9AB24}">
-                <p16:designElem xmlns:p16="http://schemas.microsoft.com/office/powerpoint/2015/main" val="1"/>
-              </p:ext>
-            </p:extLst>
-          </p:nvPr>
-        </p:nvSpPr>
-        <p:spPr>
-          <a:xfrm>
-            <a:off x="0" y="0"/>
-            <a:ext cx="12188952" cy="6858000"/>
-          </a:xfrm>
-          <a:prstGeom prst="rect">
-            <a:avLst/>
-          </a:prstGeom>
-          <a:ln>
-            <a:noFill/>
-          </a:ln>
-        </p:spPr>
-        <p:style>
-          <a:lnRef idx="2">
-            <a:schemeClr val="accent1">
-              <a:shade val="50000"/>
-            </a:schemeClr>
-          </a:lnRef>
-          <a:fillRef idx="1">
-            <a:schemeClr val="accent1"/>
-          </a:fillRef>
-          <a:effectRef idx="0">
-            <a:schemeClr val="accent1"/>
-          </a:effectRef>
-          <a:fontRef idx="minor">
-            <a:schemeClr val="lt1"/>
-          </a:fontRef>
-        </p:style>
-        <p:txBody>
-          <a:bodyPr rtlCol="0" anchor="ctr"/>
-          <a:lstStyle/>
-          <a:p>
-            <a:pPr algn="ctr"/>
-            <a:endParaRPr lang="en-US"/>
-          </a:p>
-        </p:txBody>
-      </p:sp>
-      <p:sp>
-        <p:nvSpPr>
-          <p:cNvPr id="2" name="Title 1">
-            <a:extLst>
-              <a:ext uri="{FF2B5EF4-FFF2-40B4-BE49-F238E27FC236}">
-                <a16:creationId xmlns:a16="http://schemas.microsoft.com/office/drawing/2014/main" id="{13CA9FF4-D956-CC7F-78D8-8F25F0E5F4B9}"/>
-              </a:ext>
-            </a:extLst>
-          </p:cNvPr>
-          <p:cNvSpPr>
-            <a:spLocks noGrp="1"/>
-          </p:cNvSpPr>
-          <p:nvPr>
-            <p:ph type="title"/>
-          </p:nvPr>
-        </p:nvSpPr>
-        <p:spPr>
-          <a:xfrm>
-            <a:off x="838200" y="365125"/>
-            <a:ext cx="10515600" cy="1325563"/>
-          </a:xfrm>
-        </p:spPr>
-        <p:txBody>
-          <a:bodyPr>
-            <a:normAutofit/>
-          </a:bodyPr>
-          <a:lstStyle/>
-          <a:p>
-            <a:r>
-              <a:rPr lang="en-US" sz="5400"/>
-              <a:t>Supervised Classification</a:t>
-            </a:r>
-          </a:p>
-        </p:txBody>
-      </p:sp>
-      <p:sp>
-        <p:nvSpPr>
-          <p:cNvPr id="5" name="sketch line">
-            <a:extLst>
-              <a:ext uri="{FF2B5EF4-FFF2-40B4-BE49-F238E27FC236}">
-                <a16:creationId xmlns:a16="http://schemas.microsoft.com/office/drawing/2014/main" id="{DB17E863-922E-4C26-BD64-E8FD41D28661}"/>
-              </a:ext>
-              <a:ext uri="{C183D7F6-B498-43B3-948B-1728B52AA6E4}">
-                <adec:decorative xmlns:adec="http://schemas.microsoft.com/office/drawing/2017/decorative" val="1"/>
-              </a:ext>
-            </a:extLst>
-          </p:cNvPr>
-          <p:cNvSpPr>
-            <a:spLocks noGrp="1" noRot="1" noChangeAspect="1" noMove="1" noResize="1" noEditPoints="1" noAdjustHandles="1" noChangeArrowheads="1" noChangeShapeType="1" noTextEdit="1"/>
-          </p:cNvSpPr>
-          <p:nvPr>
-            <p:extLst>
-              <p:ext uri="{386F3935-93C4-4BCD-93E2-E3B085C9AB24}">
-                <p16:designElem xmlns:p16="http://schemas.microsoft.com/office/powerpoint/2015/main" val="1"/>
-              </p:ext>
-            </p:extLst>
-          </p:nvPr>
-        </p:nvSpPr>
-        <p:spPr>
-          <a:xfrm>
-            <a:off x="669036" y="1677373"/>
-            <a:ext cx="10853928" cy="18288"/>
-          </a:xfrm>
-          <a:custGeom>
-            <a:avLst/>
-            <a:gdLst>
-              <a:gd name="csX0" fmla="*/ 0 w 10853928"/>
-              <a:gd name="csY0" fmla="*/ 0 h 18288"/>
-              <a:gd name="csX1" fmla="*/ 461292 w 10853928"/>
-              <a:gd name="csY1" fmla="*/ 0 h 18288"/>
-              <a:gd name="csX2" fmla="*/ 1139662 w 10853928"/>
-              <a:gd name="csY2" fmla="*/ 0 h 18288"/>
-              <a:gd name="csX3" fmla="*/ 1926572 w 10853928"/>
-              <a:gd name="csY3" fmla="*/ 0 h 18288"/>
-              <a:gd name="csX4" fmla="*/ 2279325 w 10853928"/>
-              <a:gd name="csY4" fmla="*/ 0 h 18288"/>
-              <a:gd name="csX5" fmla="*/ 2632078 w 10853928"/>
-              <a:gd name="csY5" fmla="*/ 0 h 18288"/>
-              <a:gd name="csX6" fmla="*/ 3527527 w 10853928"/>
-              <a:gd name="csY6" fmla="*/ 0 h 18288"/>
-              <a:gd name="csX7" fmla="*/ 4205897 w 10853928"/>
-              <a:gd name="csY7" fmla="*/ 0 h 18288"/>
-              <a:gd name="csX8" fmla="*/ 4558650 w 10853928"/>
-              <a:gd name="csY8" fmla="*/ 0 h 18288"/>
-              <a:gd name="csX9" fmla="*/ 5237020 w 10853928"/>
-              <a:gd name="csY9" fmla="*/ 0 h 18288"/>
-              <a:gd name="csX10" fmla="*/ 6132469 w 10853928"/>
-              <a:gd name="csY10" fmla="*/ 0 h 18288"/>
-              <a:gd name="csX11" fmla="*/ 6702301 w 10853928"/>
-              <a:gd name="csY11" fmla="*/ 0 h 18288"/>
-              <a:gd name="csX12" fmla="*/ 7272132 w 10853928"/>
-              <a:gd name="csY12" fmla="*/ 0 h 18288"/>
-              <a:gd name="csX13" fmla="*/ 7950502 w 10853928"/>
-              <a:gd name="csY13" fmla="*/ 0 h 18288"/>
-              <a:gd name="csX14" fmla="*/ 8737412 w 10853928"/>
-              <a:gd name="csY14" fmla="*/ 0 h 18288"/>
-              <a:gd name="csX15" fmla="*/ 9524322 w 10853928"/>
-              <a:gd name="csY15" fmla="*/ 0 h 18288"/>
-              <a:gd name="csX16" fmla="*/ 10853928 w 10853928"/>
-              <a:gd name="csY16" fmla="*/ 0 h 18288"/>
-              <a:gd name="csX17" fmla="*/ 10853928 w 10853928"/>
-              <a:gd name="csY17" fmla="*/ 18288 h 18288"/>
-              <a:gd name="csX18" fmla="*/ 10392636 w 10853928"/>
-              <a:gd name="csY18" fmla="*/ 18288 h 18288"/>
-              <a:gd name="csX19" fmla="*/ 9497187 w 10853928"/>
-              <a:gd name="csY19" fmla="*/ 18288 h 18288"/>
-              <a:gd name="csX20" fmla="*/ 8818817 w 10853928"/>
-              <a:gd name="csY20" fmla="*/ 18288 h 18288"/>
-              <a:gd name="csX21" fmla="*/ 8466064 w 10853928"/>
-              <a:gd name="csY21" fmla="*/ 18288 h 18288"/>
-              <a:gd name="csX22" fmla="*/ 7787693 w 10853928"/>
-              <a:gd name="csY22" fmla="*/ 18288 h 18288"/>
-              <a:gd name="csX23" fmla="*/ 7217862 w 10853928"/>
-              <a:gd name="csY23" fmla="*/ 18288 h 18288"/>
-              <a:gd name="csX24" fmla="*/ 6648031 w 10853928"/>
-              <a:gd name="csY24" fmla="*/ 18288 h 18288"/>
-              <a:gd name="csX25" fmla="*/ 6078200 w 10853928"/>
-              <a:gd name="csY25" fmla="*/ 18288 h 18288"/>
-              <a:gd name="csX26" fmla="*/ 5508368 w 10853928"/>
-              <a:gd name="csY26" fmla="*/ 18288 h 18288"/>
-              <a:gd name="csX27" fmla="*/ 4721459 w 10853928"/>
-              <a:gd name="csY27" fmla="*/ 18288 h 18288"/>
-              <a:gd name="csX28" fmla="*/ 4043088 w 10853928"/>
-              <a:gd name="csY28" fmla="*/ 18288 h 18288"/>
-              <a:gd name="csX29" fmla="*/ 3690336 w 10853928"/>
-              <a:gd name="csY29" fmla="*/ 18288 h 18288"/>
-              <a:gd name="csX30" fmla="*/ 3120504 w 10853928"/>
-              <a:gd name="csY30" fmla="*/ 18288 h 18288"/>
-              <a:gd name="csX31" fmla="*/ 2333595 w 10853928"/>
-              <a:gd name="csY31" fmla="*/ 18288 h 18288"/>
-              <a:gd name="csX32" fmla="*/ 1872303 w 10853928"/>
-              <a:gd name="csY32" fmla="*/ 18288 h 18288"/>
-              <a:gd name="csX33" fmla="*/ 976854 w 10853928"/>
-              <a:gd name="csY33" fmla="*/ 18288 h 18288"/>
-              <a:gd name="csX34" fmla="*/ 0 w 10853928"/>
-              <a:gd name="csY34" fmla="*/ 18288 h 18288"/>
-              <a:gd name="csX35" fmla="*/ 0 w 10853928"/>
-              <a:gd name="csY35" fmla="*/ 0 h 18288"/>
-            </a:gdLst>
-            <a:ahLst/>
-            <a:cxnLst>
-              <a:cxn ang="0">
-                <a:pos x="csX0" y="csY0"/>
-              </a:cxn>
-              <a:cxn ang="0">
-                <a:pos x="csX1" y="csY1"/>
-              </a:cxn>
-              <a:cxn ang="0">
-                <a:pos x="csX2" y="csY2"/>
-              </a:cxn>
-              <a:cxn ang="0">
-                <a:pos x="csX3" y="csY3"/>
-              </a:cxn>
-              <a:cxn ang="0">
-                <a:pos x="csX4" y="csY4"/>
-              </a:cxn>
-              <a:cxn ang="0">
-                <a:pos x="csX5" y="csY5"/>
-              </a:cxn>
-              <a:cxn ang="0">
-                <a:pos x="csX6" y="csY6"/>
-              </a:cxn>
-              <a:cxn ang="0">
-                <a:pos x="csX7" y="csY7"/>
-              </a:cxn>
-              <a:cxn ang="0">
-                <a:pos x="csX8" y="csY8"/>
-              </a:cxn>
-              <a:cxn ang="0">
-                <a:pos x="csX9" y="csY9"/>
-              </a:cxn>
-              <a:cxn ang="0">
-                <a:pos x="csX10" y="csY10"/>
-              </a:cxn>
-              <a:cxn ang="0">
-                <a:pos x="csX11" y="csY11"/>
-              </a:cxn>
-              <a:cxn ang="0">
-                <a:pos x="csX12" y="csY12"/>
-              </a:cxn>
-              <a:cxn ang="0">
-                <a:pos x="csX13" y="csY13"/>
-              </a:cxn>
-              <a:cxn ang="0">
-                <a:pos x="csX14" y="csY14"/>
-              </a:cxn>
-              <a:cxn ang="0">
-                <a:pos x="csX15" y="csY15"/>
-              </a:cxn>
-              <a:cxn ang="0">
-                <a:pos x="csX16" y="csY16"/>
-              </a:cxn>
-              <a:cxn ang="0">
-                <a:pos x="csX17" y="csY17"/>
-              </a:cxn>
-              <a:cxn ang="0">
-                <a:pos x="csX18" y="csY18"/>
-              </a:cxn>
-              <a:cxn ang="0">
-                <a:pos x="csX19" y="csY19"/>
-              </a:cxn>
-              <a:cxn ang="0">
-                <a:pos x="csX20" y="csY20"/>
-              </a:cxn>
-              <a:cxn ang="0">
-                <a:pos x="csX21" y="csY21"/>
-              </a:cxn>
-              <a:cxn ang="0">
-                <a:pos x="csX22" y="csY22"/>
-              </a:cxn>
-              <a:cxn ang="0">
-                <a:pos x="csX23" y="csY23"/>
-              </a:cxn>
-              <a:cxn ang="0">
-                <a:pos x="csX24" y="csY24"/>
-              </a:cxn>
-              <a:cxn ang="0">
-                <a:pos x="csX25" y="csY25"/>
-              </a:cxn>
-              <a:cxn ang="0">
-                <a:pos x="csX26" y="csY26"/>
-              </a:cxn>
-              <a:cxn ang="0">
-                <a:pos x="csX27" y="csY27"/>
-              </a:cxn>
-              <a:cxn ang="0">
-                <a:pos x="csX28" y="csY28"/>
-              </a:cxn>
-              <a:cxn ang="0">
-                <a:pos x="csX29" y="csY29"/>
-              </a:cxn>
-              <a:cxn ang="0">
-                <a:pos x="csX30" y="csY30"/>
-              </a:cxn>
-              <a:cxn ang="0">
-                <a:pos x="csX31" y="csY31"/>
-              </a:cxn>
-              <a:cxn ang="0">
-                <a:pos x="csX32" y="csY32"/>
-              </a:cxn>
-              <a:cxn ang="0">
-                <a:pos x="csX33" y="csY33"/>
-              </a:cxn>
-              <a:cxn ang="0">
-                <a:pos x="csX34" y="csY34"/>
-              </a:cxn>
-              <a:cxn ang="0">
-                <a:pos x="csX35" y="csY35"/>
-              </a:cxn>
-            </a:cxnLst>
-            <a:rect l="l" t="t" r="r" b="b"/>
-            <a:pathLst>
-              <a:path w="10853928" h="18288" fill="none" extrusionOk="0">
-                <a:moveTo>
-                  <a:pt x="0" y="0"/>
-                </a:moveTo>
-                <a:cubicBezTo>
-                  <a:pt x="146993" y="-19076"/>
-                  <a:pt x="347684" y="-4790"/>
-                  <a:pt x="461292" y="0"/>
-                </a:cubicBezTo>
-                <a:cubicBezTo>
-                  <a:pt x="574900" y="4790"/>
-                  <a:pt x="808367" y="19821"/>
-                  <a:pt x="1139662" y="0"/>
-                </a:cubicBezTo>
-                <a:cubicBezTo>
-                  <a:pt x="1470957" y="-19821"/>
-                  <a:pt x="1627405" y="5721"/>
-                  <a:pt x="1926572" y="0"/>
-                </a:cubicBezTo>
-                <a:cubicBezTo>
-                  <a:pt x="2225739" y="-5721"/>
-                  <a:pt x="2137730" y="-3235"/>
-                  <a:pt x="2279325" y="0"/>
-                </a:cubicBezTo>
-                <a:cubicBezTo>
-                  <a:pt x="2420920" y="3235"/>
-                  <a:pt x="2456518" y="9685"/>
-                  <a:pt x="2632078" y="0"/>
-                </a:cubicBezTo>
-                <a:cubicBezTo>
-                  <a:pt x="2807638" y="-9685"/>
-                  <a:pt x="3211516" y="-43007"/>
-                  <a:pt x="3527527" y="0"/>
-                </a:cubicBezTo>
-                <a:cubicBezTo>
-                  <a:pt x="3843538" y="43007"/>
-                  <a:pt x="4058833" y="22042"/>
-                  <a:pt x="4205897" y="0"/>
-                </a:cubicBezTo>
-                <a:cubicBezTo>
-                  <a:pt x="4352961" y="-22042"/>
-                  <a:pt x="4474805" y="-11846"/>
-                  <a:pt x="4558650" y="0"/>
-                </a:cubicBezTo>
-                <a:cubicBezTo>
-                  <a:pt x="4642495" y="11846"/>
-                  <a:pt x="5041928" y="-6069"/>
-                  <a:pt x="5237020" y="0"/>
-                </a:cubicBezTo>
-                <a:cubicBezTo>
-                  <a:pt x="5432112" y="6069"/>
-                  <a:pt x="5943266" y="-17479"/>
-                  <a:pt x="6132469" y="0"/>
-                </a:cubicBezTo>
-                <a:cubicBezTo>
-                  <a:pt x="6321672" y="17479"/>
-                  <a:pt x="6483872" y="26234"/>
-                  <a:pt x="6702301" y="0"/>
-                </a:cubicBezTo>
-                <a:cubicBezTo>
-                  <a:pt x="6920730" y="-26234"/>
-                  <a:pt x="6991194" y="-15156"/>
-                  <a:pt x="7272132" y="0"/>
-                </a:cubicBezTo>
-                <a:cubicBezTo>
-                  <a:pt x="7553070" y="15156"/>
-                  <a:pt x="7684444" y="-32961"/>
-                  <a:pt x="7950502" y="0"/>
-                </a:cubicBezTo>
-                <a:cubicBezTo>
-                  <a:pt x="8216560" y="32961"/>
-                  <a:pt x="8493290" y="-10491"/>
-                  <a:pt x="8737412" y="0"/>
-                </a:cubicBezTo>
-                <a:cubicBezTo>
-                  <a:pt x="8981534" y="10491"/>
-                  <a:pt x="9191586" y="-13899"/>
-                  <a:pt x="9524322" y="0"/>
-                </a:cubicBezTo>
-                <a:cubicBezTo>
-                  <a:pt x="9857058" y="13899"/>
-                  <a:pt x="10297509" y="7485"/>
-                  <a:pt x="10853928" y="0"/>
-                </a:cubicBezTo>
-                <a:cubicBezTo>
-                  <a:pt x="10854574" y="4451"/>
-                  <a:pt x="10854418" y="9226"/>
-                  <a:pt x="10853928" y="18288"/>
-                </a:cubicBezTo>
-                <a:cubicBezTo>
-                  <a:pt x="10691638" y="28522"/>
-                  <a:pt x="10574319" y="29578"/>
-                  <a:pt x="10392636" y="18288"/>
-                </a:cubicBezTo>
-                <a:cubicBezTo>
-                  <a:pt x="10210953" y="6998"/>
-                  <a:pt x="9836277" y="-16742"/>
-                  <a:pt x="9497187" y="18288"/>
-                </a:cubicBezTo>
-                <a:cubicBezTo>
-                  <a:pt x="9158097" y="53318"/>
-                  <a:pt x="9119479" y="30714"/>
-                  <a:pt x="8818817" y="18288"/>
-                </a:cubicBezTo>
-                <a:cubicBezTo>
-                  <a:pt x="8518155" y="5863"/>
-                  <a:pt x="8640037" y="6483"/>
-                  <a:pt x="8466064" y="18288"/>
-                </a:cubicBezTo>
-                <a:cubicBezTo>
-                  <a:pt x="8292091" y="30093"/>
-                  <a:pt x="7997656" y="18914"/>
-                  <a:pt x="7787693" y="18288"/>
-                </a:cubicBezTo>
-                <a:cubicBezTo>
-                  <a:pt x="7577730" y="17662"/>
-                  <a:pt x="7412468" y="21416"/>
-                  <a:pt x="7217862" y="18288"/>
-                </a:cubicBezTo>
-                <a:cubicBezTo>
-                  <a:pt x="7023256" y="15160"/>
-                  <a:pt x="6898018" y="14824"/>
-                  <a:pt x="6648031" y="18288"/>
-                </a:cubicBezTo>
-                <a:cubicBezTo>
-                  <a:pt x="6398044" y="21752"/>
-                  <a:pt x="6254402" y="38625"/>
-                  <a:pt x="6078200" y="18288"/>
-                </a:cubicBezTo>
-                <a:cubicBezTo>
-                  <a:pt x="5901998" y="-2049"/>
-                  <a:pt x="5622886" y="3213"/>
-                  <a:pt x="5508368" y="18288"/>
-                </a:cubicBezTo>
-                <a:cubicBezTo>
-                  <a:pt x="5393850" y="33363"/>
-                  <a:pt x="5036260" y="26830"/>
-                  <a:pt x="4721459" y="18288"/>
-                </a:cubicBezTo>
-                <a:cubicBezTo>
-                  <a:pt x="4406658" y="9746"/>
-                  <a:pt x="4239221" y="41551"/>
-                  <a:pt x="4043088" y="18288"/>
-                </a:cubicBezTo>
-                <a:cubicBezTo>
-                  <a:pt x="3846955" y="-4975"/>
-                  <a:pt x="3818802" y="34658"/>
-                  <a:pt x="3690336" y="18288"/>
-                </a:cubicBezTo>
-                <a:cubicBezTo>
-                  <a:pt x="3561870" y="1918"/>
-                  <a:pt x="3265491" y="42194"/>
-                  <a:pt x="3120504" y="18288"/>
-                </a:cubicBezTo>
-                <a:cubicBezTo>
-                  <a:pt x="2975517" y="-5618"/>
-                  <a:pt x="2720254" y="36673"/>
-                  <a:pt x="2333595" y="18288"/>
-                </a:cubicBezTo>
-                <a:cubicBezTo>
-                  <a:pt x="1946936" y="-97"/>
-                  <a:pt x="2097241" y="5776"/>
-                  <a:pt x="1872303" y="18288"/>
-                </a:cubicBezTo>
-                <a:cubicBezTo>
-                  <a:pt x="1647365" y="30800"/>
-                  <a:pt x="1282708" y="45380"/>
-                  <a:pt x="976854" y="18288"/>
-                </a:cubicBezTo>
-                <a:cubicBezTo>
-                  <a:pt x="671000" y="-8804"/>
-                  <a:pt x="408401" y="-12775"/>
-                  <a:pt x="0" y="18288"/>
-                </a:cubicBezTo>
-                <a:cubicBezTo>
-                  <a:pt x="-213" y="9468"/>
-                  <a:pt x="187" y="4459"/>
-                  <a:pt x="0" y="0"/>
-                </a:cubicBezTo>
-                <a:close/>
-              </a:path>
-              <a:path w="10853928" h="18288" stroke="0" extrusionOk="0">
-                <a:moveTo>
-                  <a:pt x="0" y="0"/>
-                </a:moveTo>
-                <a:cubicBezTo>
-                  <a:pt x="267322" y="15284"/>
-                  <a:pt x="415388" y="-21048"/>
-                  <a:pt x="569831" y="0"/>
-                </a:cubicBezTo>
-                <a:cubicBezTo>
-                  <a:pt x="724274" y="21048"/>
-                  <a:pt x="769333" y="-2353"/>
-                  <a:pt x="922584" y="0"/>
-                </a:cubicBezTo>
-                <a:cubicBezTo>
-                  <a:pt x="1075835" y="2353"/>
-                  <a:pt x="1399490" y="-145"/>
-                  <a:pt x="1818033" y="0"/>
-                </a:cubicBezTo>
-                <a:cubicBezTo>
-                  <a:pt x="2236576" y="145"/>
-                  <a:pt x="2145330" y="5482"/>
-                  <a:pt x="2387864" y="0"/>
-                </a:cubicBezTo>
-                <a:cubicBezTo>
-                  <a:pt x="2630398" y="-5482"/>
-                  <a:pt x="2793207" y="18487"/>
-                  <a:pt x="2957695" y="0"/>
-                </a:cubicBezTo>
-                <a:cubicBezTo>
-                  <a:pt x="3122183" y="-18487"/>
-                  <a:pt x="3579141" y="19003"/>
-                  <a:pt x="3853144" y="0"/>
-                </a:cubicBezTo>
-                <a:cubicBezTo>
-                  <a:pt x="4127147" y="-19003"/>
-                  <a:pt x="4209857" y="12211"/>
-                  <a:pt x="4314436" y="0"/>
-                </a:cubicBezTo>
-                <a:cubicBezTo>
-                  <a:pt x="4419015" y="-12211"/>
-                  <a:pt x="4762459" y="-17220"/>
-                  <a:pt x="5209885" y="0"/>
-                </a:cubicBezTo>
-                <a:cubicBezTo>
-                  <a:pt x="5657311" y="17220"/>
-                  <a:pt x="5692663" y="-3290"/>
-                  <a:pt x="6105335" y="0"/>
-                </a:cubicBezTo>
-                <a:cubicBezTo>
-                  <a:pt x="6518007" y="3290"/>
-                  <a:pt x="6455516" y="-5124"/>
-                  <a:pt x="6783705" y="0"/>
-                </a:cubicBezTo>
-                <a:cubicBezTo>
-                  <a:pt x="7111894" y="5124"/>
-                  <a:pt x="7441941" y="-17829"/>
-                  <a:pt x="7679154" y="0"/>
-                </a:cubicBezTo>
-                <a:cubicBezTo>
-                  <a:pt x="7916367" y="17829"/>
-                  <a:pt x="8102967" y="-24363"/>
-                  <a:pt x="8248985" y="0"/>
-                </a:cubicBezTo>
-                <a:cubicBezTo>
-                  <a:pt x="8395003" y="24363"/>
-                  <a:pt x="8552393" y="25505"/>
-                  <a:pt x="8818817" y="0"/>
-                </a:cubicBezTo>
-                <a:cubicBezTo>
-                  <a:pt x="9085241" y="-25505"/>
-                  <a:pt x="9411308" y="38000"/>
-                  <a:pt x="9605726" y="0"/>
-                </a:cubicBezTo>
-                <a:cubicBezTo>
-                  <a:pt x="9800144" y="-38000"/>
-                  <a:pt x="10006468" y="-25741"/>
-                  <a:pt x="10175558" y="0"/>
-                </a:cubicBezTo>
-                <a:cubicBezTo>
-                  <a:pt x="10344648" y="25741"/>
-                  <a:pt x="10696282" y="695"/>
-                  <a:pt x="10853928" y="0"/>
-                </a:cubicBezTo>
-                <a:cubicBezTo>
-                  <a:pt x="10853521" y="8690"/>
-                  <a:pt x="10853774" y="14141"/>
-                  <a:pt x="10853928" y="18288"/>
-                </a:cubicBezTo>
-                <a:cubicBezTo>
-                  <a:pt x="10608124" y="24255"/>
-                  <a:pt x="10343415" y="22307"/>
-                  <a:pt x="10067018" y="18288"/>
-                </a:cubicBezTo>
-                <a:cubicBezTo>
-                  <a:pt x="9790621" y="14270"/>
-                  <a:pt x="9843266" y="3564"/>
-                  <a:pt x="9714266" y="18288"/>
-                </a:cubicBezTo>
-                <a:cubicBezTo>
-                  <a:pt x="9585266" y="33012"/>
-                  <a:pt x="9379484" y="1875"/>
-                  <a:pt x="9252974" y="18288"/>
-                </a:cubicBezTo>
-                <a:cubicBezTo>
-                  <a:pt x="9126464" y="34701"/>
-                  <a:pt x="8580678" y="-4904"/>
-                  <a:pt x="8357525" y="18288"/>
-                </a:cubicBezTo>
-                <a:cubicBezTo>
-                  <a:pt x="8134372" y="41480"/>
-                  <a:pt x="7903199" y="26458"/>
-                  <a:pt x="7679154" y="18288"/>
-                </a:cubicBezTo>
-                <a:cubicBezTo>
-                  <a:pt x="7455109" y="10118"/>
-                  <a:pt x="7435944" y="27109"/>
-                  <a:pt x="7217862" y="18288"/>
-                </a:cubicBezTo>
-                <a:cubicBezTo>
-                  <a:pt x="6999780" y="9467"/>
-                  <a:pt x="6680409" y="18985"/>
-                  <a:pt x="6539492" y="18288"/>
-                </a:cubicBezTo>
-                <a:cubicBezTo>
-                  <a:pt x="6398575" y="17592"/>
-                  <a:pt x="6312077" y="33018"/>
-                  <a:pt x="6186739" y="18288"/>
-                </a:cubicBezTo>
-                <a:cubicBezTo>
-                  <a:pt x="6061401" y="3558"/>
-                  <a:pt x="5947033" y="12075"/>
-                  <a:pt x="5833986" y="18288"/>
-                </a:cubicBezTo>
-                <a:cubicBezTo>
-                  <a:pt x="5720939" y="24501"/>
-                  <a:pt x="5482226" y="8586"/>
-                  <a:pt x="5155616" y="18288"/>
-                </a:cubicBezTo>
-                <a:cubicBezTo>
-                  <a:pt x="4829006" y="27991"/>
-                  <a:pt x="4841274" y="29316"/>
-                  <a:pt x="4694324" y="18288"/>
-                </a:cubicBezTo>
-                <a:cubicBezTo>
-                  <a:pt x="4547374" y="7260"/>
-                  <a:pt x="4077675" y="7013"/>
-                  <a:pt x="3907414" y="18288"/>
-                </a:cubicBezTo>
-                <a:cubicBezTo>
-                  <a:pt x="3737153" y="29564"/>
-                  <a:pt x="3538393" y="21630"/>
-                  <a:pt x="3446122" y="18288"/>
-                </a:cubicBezTo>
-                <a:cubicBezTo>
-                  <a:pt x="3353851" y="14946"/>
-                  <a:pt x="2990320" y="-8091"/>
-                  <a:pt x="2659212" y="18288"/>
-                </a:cubicBezTo>
-                <a:cubicBezTo>
-                  <a:pt x="2328104" y="44667"/>
-                  <a:pt x="2427653" y="9607"/>
-                  <a:pt x="2306460" y="18288"/>
-                </a:cubicBezTo>
-                <a:cubicBezTo>
-                  <a:pt x="2185267" y="26969"/>
-                  <a:pt x="1719763" y="3717"/>
-                  <a:pt x="1519550" y="18288"/>
-                </a:cubicBezTo>
-                <a:cubicBezTo>
-                  <a:pt x="1319337" y="32860"/>
-                  <a:pt x="1167371" y="17040"/>
-                  <a:pt x="1058258" y="18288"/>
-                </a:cubicBezTo>
-                <a:cubicBezTo>
-                  <a:pt x="949145" y="19536"/>
-                  <a:pt x="780234" y="31447"/>
-                  <a:pt x="705505" y="18288"/>
-                </a:cubicBezTo>
-                <a:cubicBezTo>
-                  <a:pt x="630776" y="5129"/>
-                  <a:pt x="215796" y="30056"/>
-                  <a:pt x="0" y="18288"/>
-                </a:cubicBezTo>
-                <a:cubicBezTo>
-                  <a:pt x="-53" y="11301"/>
-                  <a:pt x="-649" y="7756"/>
-                  <a:pt x="0" y="0"/>
-                </a:cubicBezTo>
-                <a:close/>
-              </a:path>
-            </a:pathLst>
-          </a:custGeom>
-          <a:solidFill>
-            <a:schemeClr val="accent2"/>
-          </a:solidFill>
-          <a:ln w="41275" cap="rnd">
-            <a:solidFill>
-              <a:schemeClr val="accent2"/>
-            </a:solidFill>
-            <a:round/>
-            <a:extLst>
-              <a:ext uri="{C807C97D-BFC1-408E-A445-0C87EB9F89A2}">
-                <ask:lineSketchStyleProps xmlns:ask="http://schemas.microsoft.com/office/drawing/2018/sketchyshapes" sd="1219033472">
-                  <a:prstGeom prst="rect">
-                    <a:avLst/>
-                  </a:prstGeom>
-                  <ask:type>
-                    <ask:lineSketchFreehand/>
-                  </ask:type>
-                </ask:lineSketchStyleProps>
-              </a:ext>
-            </a:extLst>
-          </a:ln>
-        </p:spPr>
-        <p:style>
-          <a:lnRef idx="2">
-            <a:schemeClr val="accent1">
-              <a:shade val="50000"/>
-            </a:schemeClr>
-          </a:lnRef>
-          <a:fillRef idx="1">
-            <a:schemeClr val="accent1"/>
-          </a:fillRef>
-          <a:effectRef idx="0">
-            <a:schemeClr val="accent1"/>
-          </a:effectRef>
-          <a:fontRef idx="minor">
-            <a:schemeClr val="lt1"/>
-          </a:fontRef>
-        </p:style>
-        <p:txBody>
-          <a:bodyPr rtlCol="0" anchor="ctr"/>
-          <a:lstStyle/>
-          <a:p>
-            <a:pPr algn="ctr"/>
-            <a:endParaRPr lang="en-US"/>
-          </a:p>
-        </p:txBody>
-      </p:sp>
-      <p:sp>
-        <p:nvSpPr>
-          <p:cNvPr id="3" name="Content Placeholder 2">
-            <a:extLst>
-              <a:ext uri="{FF2B5EF4-FFF2-40B4-BE49-F238E27FC236}">
-                <a16:creationId xmlns:a16="http://schemas.microsoft.com/office/drawing/2014/main" id="{BF989EC5-8729-B685-C48C-4E20853FB9B4}"/>
-              </a:ext>
-            </a:extLst>
-          </p:cNvPr>
-          <p:cNvSpPr>
-            <a:spLocks noGrp="1"/>
-          </p:cNvSpPr>
-          <p:nvPr>
-            <p:ph idx="1"/>
-          </p:nvPr>
-        </p:nvSpPr>
-        <p:spPr>
-          <a:xfrm>
-            <a:off x="838200" y="1929384"/>
-            <a:ext cx="10515600" cy="4251960"/>
-          </a:xfrm>
-        </p:spPr>
-        <p:txBody>
-          <a:bodyPr>
-            <a:normAutofit/>
-          </a:bodyPr>
-          <a:lstStyle/>
-          <a:p>
-            <a:r>
-              <a:rPr lang="en-US" sz="2200"/>
-              <a:t>The Data</a:t>
-            </a:r>
-          </a:p>
-          <a:p>
-            <a:r>
-              <a:rPr lang="en-US" sz="2200"/>
-              <a:t>Filtering for Cinderella candidates left us with an imbalanced dataset, since Cinderella seeds are unlikely.</a:t>
-            </a:r>
-          </a:p>
-          <a:p>
-            <a:endParaRPr lang="en-US" sz="2200"/>
-          </a:p>
-          <a:p>
-            <a:r>
-              <a:rPr lang="en-US" sz="2200"/>
-              <a:t>Model Selection and Tuning: </a:t>
-            </a:r>
-          </a:p>
-          <a:p>
-            <a:r>
-              <a:rPr lang="en-US" sz="2200"/>
-              <a:t>Evaluation Metric: Rather than Accuracy we used PC-AUC and F1-Score to account for this.</a:t>
-            </a:r>
-          </a:p>
-          <a:p>
-            <a:r>
-              <a:rPr lang="en-US" sz="2200"/>
-              <a:t>Baseline Random Forest struggled with recall (0.306).</a:t>
-            </a:r>
-          </a:p>
-          <a:p>
-            <a:r>
-              <a:rPr lang="en-US" sz="2200"/>
-              <a:t>XGBoost largely improved recall (0.6861)</a:t>
-            </a:r>
-          </a:p>
-        </p:txBody>
-      </p:sp>
-    </p:spTree>
-    <p:extLst>
-      <p:ext uri="{BB962C8B-B14F-4D97-AF65-F5344CB8AC3E}">
-        <p14:creationId xmlns:p14="http://schemas.microsoft.com/office/powerpoint/2010/main" val="16212315"/>
-      </p:ext>
-    </p:extLst>
-  </p:cSld>
-  <p:clrMapOvr>
-    <a:masterClrMapping/>
-  </p:clrMapOvr>
-</p:sld>
-</file>
-
-<file path=ppt/slides/slide7.xml><?xml version="1.0" encoding="utf-8"?>
+<file path=ppt/slides/slide9.xml><?xml version="1.0" encoding="utf-8"?>
 <p:sld xmlns:a="http://schemas.openxmlformats.org/drawingml/2006/main" xmlns:r="http://schemas.openxmlformats.org/officeDocument/2006/relationships" xmlns:p="http://schemas.openxmlformats.org/presentationml/2006/main">
   <p:cSld>
     <p:bg>
@@ -11056,835 +15409,6 @@
   <p:clrMapOvr>
     <a:masterClrMapping/>
   </p:clrMapOvr>
-</p:sld>
-</file>
-
-<file path=ppt/slides/slide8.xml><?xml version="1.0" encoding="utf-8"?>
-<p:sld xmlns:a="http://schemas.openxmlformats.org/drawingml/2006/main" xmlns:r="http://schemas.openxmlformats.org/officeDocument/2006/relationships" xmlns:p="http://schemas.openxmlformats.org/presentationml/2006/main">
-  <p:cSld>
-    <p:spTree>
-      <p:nvGrpSpPr>
-        <p:cNvPr id="1" name=""/>
-        <p:cNvGrpSpPr/>
-        <p:nvPr/>
-      </p:nvGrpSpPr>
-      <p:grpSpPr>
-        <a:xfrm>
-          <a:off x="0" y="0"/>
-          <a:ext cx="0" cy="0"/>
-          <a:chOff x="0" y="0"/>
-          <a:chExt cx="0" cy="0"/>
-        </a:xfrm>
-      </p:grpSpPr>
-      <p:sp>
-        <p:nvSpPr>
-          <p:cNvPr id="2" name="Title 1">
-            <a:extLst>
-              <a:ext uri="{FF2B5EF4-FFF2-40B4-BE49-F238E27FC236}">
-                <a16:creationId xmlns:a16="http://schemas.microsoft.com/office/drawing/2014/main" id="{7F1C32AE-3699-A024-B553-BA2A5FC17B25}"/>
-              </a:ext>
-            </a:extLst>
-          </p:cNvPr>
-          <p:cNvSpPr>
-            <a:spLocks noGrp="1"/>
-          </p:cNvSpPr>
-          <p:nvPr>
-            <p:ph type="title"/>
-          </p:nvPr>
-        </p:nvSpPr>
-        <p:spPr/>
-        <p:txBody>
-          <a:bodyPr/>
-          <a:lstStyle/>
-          <a:p>
-            <a:r>
-              <a:rPr lang="en-US" dirty="0"/>
-              <a:t>Model Results &amp; Performance</a:t>
-            </a:r>
-          </a:p>
-        </p:txBody>
-      </p:sp>
-      <p:sp>
-        <p:nvSpPr>
-          <p:cNvPr id="3" name="Content Placeholder 2">
-            <a:extLst>
-              <a:ext uri="{FF2B5EF4-FFF2-40B4-BE49-F238E27FC236}">
-                <a16:creationId xmlns:a16="http://schemas.microsoft.com/office/drawing/2014/main" id="{32B64E96-F4EA-2976-C3B9-4DDF488B5192}"/>
-              </a:ext>
-            </a:extLst>
-          </p:cNvPr>
-          <p:cNvSpPr>
-            <a:spLocks noGrp="1"/>
-          </p:cNvSpPr>
-          <p:nvPr>
-            <p:ph idx="1"/>
-          </p:nvPr>
-        </p:nvSpPr>
-        <p:spPr/>
-        <p:txBody>
-          <a:bodyPr/>
-          <a:lstStyle/>
-          <a:p>
-            <a:r>
-              <a:rPr lang="en-US" dirty="0"/>
-              <a:t>Ultimately, despite our hypothesis, our XGBoost model still struggled to consistently identify Cinderella teams. </a:t>
-            </a:r>
-          </a:p>
-          <a:p>
-            <a:endParaRPr lang="en-US" dirty="0"/>
-          </a:p>
-          <a:p>
-            <a:r>
-              <a:rPr lang="en-US" dirty="0"/>
-              <a:t>While it performed better than a random guess, it wasn’t drastically better. </a:t>
-            </a:r>
-          </a:p>
-        </p:txBody>
-      </p:sp>
-    </p:spTree>
-    <p:extLst>
-      <p:ext uri="{BB962C8B-B14F-4D97-AF65-F5344CB8AC3E}">
-        <p14:creationId xmlns:p14="http://schemas.microsoft.com/office/powerpoint/2010/main" val="3745876303"/>
-      </p:ext>
-    </p:extLst>
-  </p:cSld>
-  <p:clrMapOvr>
-    <a:masterClrMapping/>
-  </p:clrMapOvr>
-</p:sld>
-</file>
-
-<file path=ppt/slides/slide9.xml><?xml version="1.0" encoding="utf-8"?>
-<p:sld xmlns:a="http://schemas.openxmlformats.org/drawingml/2006/main" xmlns:r="http://schemas.openxmlformats.org/officeDocument/2006/relationships" xmlns:p="http://schemas.openxmlformats.org/presentationml/2006/main">
-  <p:cSld>
-    <p:bg>
-      <p:bgPr>
-        <a:solidFill>
-          <a:schemeClr val="bg1"/>
-        </a:solidFill>
-        <a:effectLst/>
-      </p:bgPr>
-    </p:bg>
-    <p:spTree>
-      <p:nvGrpSpPr>
-        <p:cNvPr id="1" name=""/>
-        <p:cNvGrpSpPr/>
-        <p:nvPr/>
-      </p:nvGrpSpPr>
-      <p:grpSpPr>
-        <a:xfrm>
-          <a:off x="0" y="0"/>
-          <a:ext cx="0" cy="0"/>
-          <a:chOff x="0" y="0"/>
-          <a:chExt cx="0" cy="0"/>
-        </a:xfrm>
-      </p:grpSpPr>
-      <p:sp useBgFill="1">
-        <p:nvSpPr>
-          <p:cNvPr id="21" name="Rectangle 20">
-            <a:extLst>
-              <a:ext uri="{FF2B5EF4-FFF2-40B4-BE49-F238E27FC236}">
-                <a16:creationId xmlns:a16="http://schemas.microsoft.com/office/drawing/2014/main" id="{6F5A5072-7B47-4D32-B52A-4EBBF590B8A5}"/>
-              </a:ext>
-              <a:ext uri="{C183D7F6-B498-43B3-948B-1728B52AA6E4}">
-                <adec:decorative xmlns:adec="http://schemas.microsoft.com/office/drawing/2017/decorative" val="1"/>
-              </a:ext>
-            </a:extLst>
-          </p:cNvPr>
-          <p:cNvSpPr>
-            <a:spLocks noGrp="1" noRot="1" noChangeAspect="1" noMove="1" noResize="1" noEditPoints="1" noAdjustHandles="1" noChangeArrowheads="1" noChangeShapeType="1" noTextEdit="1"/>
-          </p:cNvSpPr>
-          <p:nvPr>
-            <p:extLst>
-              <p:ext uri="{386F3935-93C4-4BCD-93E2-E3B085C9AB24}">
-                <p16:designElem xmlns:p16="http://schemas.microsoft.com/office/powerpoint/2015/main" val="1"/>
-              </p:ext>
-            </p:extLst>
-          </p:nvPr>
-        </p:nvSpPr>
-        <p:spPr>
-          <a:xfrm>
-            <a:off x="0" y="0"/>
-            <a:ext cx="12192000" cy="6858000"/>
-          </a:xfrm>
-          <a:prstGeom prst="rect">
-            <a:avLst/>
-          </a:prstGeom>
-          <a:ln w="12700" cap="flat" cmpd="sng" algn="ctr">
-            <a:noFill/>
-            <a:prstDash val="solid"/>
-            <a:miter lim="800000"/>
-          </a:ln>
-          <a:effectLst/>
-          <a:extLst>
-            <a:ext uri="{91240B29-F687-4F45-9708-019B960494DF}">
-              <a14:hiddenLine xmlns:a14="http://schemas.microsoft.com/office/drawing/2010/main" w="12700" cap="flat" cmpd="sng" algn="ctr">
-                <a:solidFill>
-                  <a:schemeClr val="accent1">
-                    <a:shade val="50000"/>
-                  </a:schemeClr>
-                </a:solidFill>
-                <a:prstDash val="solid"/>
-                <a:miter lim="800000"/>
-              </a14:hiddenLine>
-            </a:ext>
-          </a:extLst>
-        </p:spPr>
-        <p:style>
-          <a:lnRef idx="2">
-            <a:schemeClr val="accent1">
-              <a:shade val="50000"/>
-            </a:schemeClr>
-          </a:lnRef>
-          <a:fillRef idx="1">
-            <a:schemeClr val="accent1"/>
-          </a:fillRef>
-          <a:effectRef idx="0">
-            <a:schemeClr val="accent1"/>
-          </a:effectRef>
-          <a:fontRef idx="minor">
-            <a:schemeClr val="lt1"/>
-          </a:fontRef>
-        </p:style>
-        <p:txBody>
-          <a:bodyPr rtlCol="0" anchor="ctr"/>
-          <a:lstStyle/>
-          <a:p>
-            <a:pPr algn="ctr"/>
-            <a:endParaRPr lang="en-US"/>
-          </a:p>
-        </p:txBody>
-      </p:sp>
-      <p:sp>
-        <p:nvSpPr>
-          <p:cNvPr id="23" name="Rectangle 22">
-            <a:extLst>
-              <a:ext uri="{FF2B5EF4-FFF2-40B4-BE49-F238E27FC236}">
-                <a16:creationId xmlns:a16="http://schemas.microsoft.com/office/drawing/2014/main" id="{9715DAF0-AE1B-46C9-8A6B-DB2AA05AB91D}"/>
-              </a:ext>
-              <a:ext uri="{C183D7F6-B498-43B3-948B-1728B52AA6E4}">
-                <adec:decorative xmlns:adec="http://schemas.microsoft.com/office/drawing/2017/decorative" val="1"/>
-              </a:ext>
-            </a:extLst>
-          </p:cNvPr>
-          <p:cNvSpPr>
-            <a:spLocks noGrp="1" noRot="1" noChangeAspect="1" noMove="1" noResize="1" noEditPoints="1" noAdjustHandles="1" noChangeArrowheads="1" noChangeShapeType="1" noTextEdit="1"/>
-          </p:cNvSpPr>
-          <p:nvPr>
-            <p:extLst>
-              <p:ext uri="{386F3935-93C4-4BCD-93E2-E3B085C9AB24}">
-                <p16:designElem xmlns:p16="http://schemas.microsoft.com/office/powerpoint/2015/main" val="1"/>
-              </p:ext>
-            </p:extLst>
-          </p:nvPr>
-        </p:nvSpPr>
-        <p:spPr>
-          <a:xfrm rot="10800000">
-            <a:off x="-2" y="-22693"/>
-            <a:ext cx="12191999" cy="4374129"/>
-          </a:xfrm>
-          <a:prstGeom prst="rect">
-            <a:avLst/>
-          </a:prstGeom>
-          <a:gradFill>
-            <a:gsLst>
-              <a:gs pos="0">
-                <a:schemeClr val="accent1">
-                  <a:lumMod val="75000"/>
-                </a:schemeClr>
-              </a:gs>
-              <a:gs pos="100000">
-                <a:srgbClr val="000000"/>
-              </a:gs>
-            </a:gsLst>
-            <a:lin ang="15000000" scaled="0"/>
-          </a:gradFill>
-          <a:ln>
-            <a:noFill/>
-          </a:ln>
-        </p:spPr>
-        <p:style>
-          <a:lnRef idx="2">
-            <a:schemeClr val="accent1">
-              <a:shade val="50000"/>
-            </a:schemeClr>
-          </a:lnRef>
-          <a:fillRef idx="1">
-            <a:schemeClr val="accent1"/>
-          </a:fillRef>
-          <a:effectRef idx="0">
-            <a:schemeClr val="accent1"/>
-          </a:effectRef>
-          <a:fontRef idx="minor">
-            <a:schemeClr val="lt1"/>
-          </a:fontRef>
-        </p:style>
-        <p:txBody>
-          <a:bodyPr rtlCol="0" anchor="ctr"/>
-          <a:lstStyle/>
-          <a:p>
-            <a:pPr algn="ctr"/>
-            <a:endParaRPr lang="en-US"/>
-          </a:p>
-        </p:txBody>
-      </p:sp>
-      <p:sp>
-        <p:nvSpPr>
-          <p:cNvPr id="25" name="Rectangle 24">
-            <a:extLst>
-              <a:ext uri="{FF2B5EF4-FFF2-40B4-BE49-F238E27FC236}">
-                <a16:creationId xmlns:a16="http://schemas.microsoft.com/office/drawing/2014/main" id="{6016219D-510E-4184-9090-6D5578A87BD1}"/>
-              </a:ext>
-              <a:ext uri="{C183D7F6-B498-43B3-948B-1728B52AA6E4}">
-                <adec:decorative xmlns:adec="http://schemas.microsoft.com/office/drawing/2017/decorative" val="1"/>
-              </a:ext>
-            </a:extLst>
-          </p:cNvPr>
-          <p:cNvSpPr>
-            <a:spLocks noGrp="1" noRot="1" noChangeAspect="1" noMove="1" noResize="1" noEditPoints="1" noAdjustHandles="1" noChangeArrowheads="1" noChangeShapeType="1" noTextEdit="1"/>
-          </p:cNvSpPr>
-          <p:nvPr>
-            <p:extLst>
-              <p:ext uri="{386F3935-93C4-4BCD-93E2-E3B085C9AB24}">
-                <p16:designElem xmlns:p16="http://schemas.microsoft.com/office/powerpoint/2015/main" val="1"/>
-              </p:ext>
-            </p:extLst>
-          </p:nvPr>
-        </p:nvSpPr>
-        <p:spPr>
-          <a:xfrm rot="5400000">
-            <a:off x="3908719" y="-3931841"/>
-            <a:ext cx="4374557" cy="12192000"/>
-          </a:xfrm>
-          <a:prstGeom prst="rect">
-            <a:avLst/>
-          </a:prstGeom>
-          <a:gradFill>
-            <a:gsLst>
-              <a:gs pos="40000">
-                <a:schemeClr val="accent1">
-                  <a:alpha val="0"/>
-                </a:schemeClr>
-              </a:gs>
-              <a:gs pos="100000">
-                <a:schemeClr val="accent1">
-                  <a:lumMod val="75000"/>
-                  <a:alpha val="52000"/>
-                </a:schemeClr>
-              </a:gs>
-            </a:gsLst>
-            <a:lin ang="2400000" scaled="0"/>
-          </a:gradFill>
-          <a:ln>
-            <a:noFill/>
-          </a:ln>
-        </p:spPr>
-        <p:style>
-          <a:lnRef idx="2">
-            <a:schemeClr val="accent1">
-              <a:shade val="50000"/>
-            </a:schemeClr>
-          </a:lnRef>
-          <a:fillRef idx="1">
-            <a:schemeClr val="accent1"/>
-          </a:fillRef>
-          <a:effectRef idx="0">
-            <a:schemeClr val="accent1"/>
-          </a:effectRef>
-          <a:fontRef idx="minor">
-            <a:schemeClr val="lt1"/>
-          </a:fontRef>
-        </p:style>
-        <p:txBody>
-          <a:bodyPr rtlCol="0" anchor="ctr"/>
-          <a:lstStyle/>
-          <a:p>
-            <a:pPr algn="ctr"/>
-            <a:endParaRPr lang="en-US"/>
-          </a:p>
-        </p:txBody>
-      </p:sp>
-      <p:sp>
-        <p:nvSpPr>
-          <p:cNvPr id="27" name="Rectangle 26">
-            <a:extLst>
-              <a:ext uri="{FF2B5EF4-FFF2-40B4-BE49-F238E27FC236}">
-                <a16:creationId xmlns:a16="http://schemas.microsoft.com/office/drawing/2014/main" id="{AFF4A713-7B75-4B21-90D7-5AB19547C728}"/>
-              </a:ext>
-              <a:ext uri="{C183D7F6-B498-43B3-948B-1728B52AA6E4}">
-                <adec:decorative xmlns:adec="http://schemas.microsoft.com/office/drawing/2017/decorative" val="1"/>
-              </a:ext>
-            </a:extLst>
-          </p:cNvPr>
-          <p:cNvSpPr>
-            <a:spLocks noGrp="1" noRot="1" noChangeAspect="1" noMove="1" noResize="1" noEditPoints="1" noAdjustHandles="1" noChangeArrowheads="1" noChangeShapeType="1" noTextEdit="1"/>
-          </p:cNvSpPr>
-          <p:nvPr>
-            <p:extLst>
-              <p:ext uri="{386F3935-93C4-4BCD-93E2-E3B085C9AB24}">
-                <p16:designElem xmlns:p16="http://schemas.microsoft.com/office/powerpoint/2015/main" val="1"/>
-              </p:ext>
-            </p:extLst>
-          </p:nvPr>
-        </p:nvSpPr>
-        <p:spPr>
-          <a:xfrm rot="5400000">
-            <a:off x="4136696" y="-3703868"/>
-            <a:ext cx="4374128" cy="11736479"/>
-          </a:xfrm>
-          <a:prstGeom prst="rect">
-            <a:avLst/>
-          </a:prstGeom>
-          <a:gradFill>
-            <a:gsLst>
-              <a:gs pos="17000">
-                <a:schemeClr val="accent1">
-                  <a:alpha val="0"/>
-                </a:schemeClr>
-              </a:gs>
-              <a:gs pos="100000">
-                <a:srgbClr val="000000">
-                  <a:alpha val="37000"/>
-                </a:srgbClr>
-              </a:gs>
-            </a:gsLst>
-            <a:lin ang="7800000" scaled="0"/>
-          </a:gradFill>
-          <a:ln>
-            <a:noFill/>
-          </a:ln>
-        </p:spPr>
-        <p:style>
-          <a:lnRef idx="2">
-            <a:schemeClr val="accent1">
-              <a:shade val="50000"/>
-            </a:schemeClr>
-          </a:lnRef>
-          <a:fillRef idx="1">
-            <a:schemeClr val="accent1"/>
-          </a:fillRef>
-          <a:effectRef idx="0">
-            <a:schemeClr val="accent1"/>
-          </a:effectRef>
-          <a:fontRef idx="minor">
-            <a:schemeClr val="lt1"/>
-          </a:fontRef>
-        </p:style>
-        <p:txBody>
-          <a:bodyPr rtlCol="0" anchor="ctr"/>
-          <a:lstStyle/>
-          <a:p>
-            <a:pPr algn="ctr"/>
-            <a:endParaRPr lang="en-US"/>
-          </a:p>
-        </p:txBody>
-      </p:sp>
-      <p:sp>
-        <p:nvSpPr>
-          <p:cNvPr id="29" name="Rectangle 28">
-            <a:extLst>
-              <a:ext uri="{FF2B5EF4-FFF2-40B4-BE49-F238E27FC236}">
-                <a16:creationId xmlns:a16="http://schemas.microsoft.com/office/drawing/2014/main" id="{DC631C0B-6DA6-4E57-8231-CE32B3434A7E}"/>
-              </a:ext>
-              <a:ext uri="{C183D7F6-B498-43B3-948B-1728B52AA6E4}">
-                <adec:decorative xmlns:adec="http://schemas.microsoft.com/office/drawing/2017/decorative" val="1"/>
-              </a:ext>
-            </a:extLst>
-          </p:cNvPr>
-          <p:cNvSpPr>
-            <a:spLocks noGrp="1" noRot="1" noChangeAspect="1" noMove="1" noResize="1" noEditPoints="1" noAdjustHandles="1" noChangeArrowheads="1" noChangeShapeType="1" noTextEdit="1"/>
-          </p:cNvSpPr>
-          <p:nvPr>
-            <p:extLst>
-              <p:ext uri="{386F3935-93C4-4BCD-93E2-E3B085C9AB24}">
-                <p16:designElem xmlns:p16="http://schemas.microsoft.com/office/powerpoint/2015/main" val="1"/>
-              </p:ext>
-            </p:extLst>
-          </p:nvPr>
-        </p:nvSpPr>
-        <p:spPr>
-          <a:xfrm>
-            <a:off x="-5" y="-22690"/>
-            <a:ext cx="8542485" cy="4374126"/>
-          </a:xfrm>
-          <a:prstGeom prst="rect">
-            <a:avLst/>
-          </a:prstGeom>
-          <a:gradFill>
-            <a:gsLst>
-              <a:gs pos="0">
-                <a:schemeClr val="accent1">
-                  <a:lumMod val="50000"/>
-                  <a:alpha val="0"/>
-                </a:schemeClr>
-              </a:gs>
-              <a:gs pos="100000">
-                <a:srgbClr val="000000">
-                  <a:alpha val="25000"/>
-                </a:srgbClr>
-              </a:gs>
-            </a:gsLst>
-            <a:lin ang="18600000" scaled="0"/>
-          </a:gradFill>
-          <a:ln>
-            <a:noFill/>
-          </a:ln>
-        </p:spPr>
-        <p:style>
-          <a:lnRef idx="2">
-            <a:schemeClr val="accent1">
-              <a:shade val="50000"/>
-            </a:schemeClr>
-          </a:lnRef>
-          <a:fillRef idx="1">
-            <a:schemeClr val="accent1"/>
-          </a:fillRef>
-          <a:effectRef idx="0">
-            <a:schemeClr val="accent1"/>
-          </a:effectRef>
-          <a:fontRef idx="minor">
-            <a:schemeClr val="lt1"/>
-          </a:fontRef>
-        </p:style>
-        <p:txBody>
-          <a:bodyPr rtlCol="0" anchor="ctr"/>
-          <a:lstStyle/>
-          <a:p>
-            <a:pPr algn="ctr"/>
-            <a:endParaRPr lang="en-US"/>
-          </a:p>
-        </p:txBody>
-      </p:sp>
-      <p:sp>
-        <p:nvSpPr>
-          <p:cNvPr id="31" name="Freeform: Shape 30">
-            <a:extLst>
-              <a:ext uri="{FF2B5EF4-FFF2-40B4-BE49-F238E27FC236}">
-                <a16:creationId xmlns:a16="http://schemas.microsoft.com/office/drawing/2014/main" id="{C29501E6-A978-4A61-9689-9085AF97A53A}"/>
-              </a:ext>
-              <a:ext uri="{C183D7F6-B498-43B3-948B-1728B52AA6E4}">
-                <adec:decorative xmlns:adec="http://schemas.microsoft.com/office/drawing/2017/decorative" val="1"/>
-              </a:ext>
-            </a:extLst>
-          </p:cNvPr>
-          <p:cNvSpPr>
-            <a:spLocks noGrp="1" noRot="1" noChangeAspect="1" noMove="1" noResize="1" noEditPoints="1" noAdjustHandles="1" noChangeArrowheads="1" noChangeShapeType="1" noTextEdit="1"/>
-          </p:cNvSpPr>
-          <p:nvPr>
-            <p:extLst>
-              <p:ext uri="{386F3935-93C4-4BCD-93E2-E3B085C9AB24}">
-                <p16:designElem xmlns:p16="http://schemas.microsoft.com/office/powerpoint/2015/main" val="1"/>
-              </p:ext>
-            </p:extLst>
-          </p:nvPr>
-        </p:nvSpPr>
-        <p:spPr>
-          <a:xfrm rot="12508972">
-            <a:off x="5945431" y="-1032053"/>
-            <a:ext cx="4990147" cy="4439131"/>
-          </a:xfrm>
-          <a:custGeom>
-            <a:avLst/>
-            <a:gdLst>
-              <a:gd name="connsiteX0" fmla="*/ 4990147 w 4990147"/>
-              <a:gd name="connsiteY0" fmla="*/ 2229378 h 4439131"/>
-              <a:gd name="connsiteX1" fmla="*/ 917384 w 4990147"/>
-              <a:gd name="connsiteY1" fmla="*/ 4439131 h 4439131"/>
-              <a:gd name="connsiteX2" fmla="*/ 910814 w 4990147"/>
-              <a:gd name="connsiteY2" fmla="*/ 4434219 h 4439131"/>
-              <a:gd name="connsiteX3" fmla="*/ 0 w 4990147"/>
-              <a:gd name="connsiteY3" fmla="*/ 2502877 h 4439131"/>
-              <a:gd name="connsiteX4" fmla="*/ 2502877 w 4990147"/>
-              <a:gd name="connsiteY4" fmla="*/ 0 h 4439131"/>
-              <a:gd name="connsiteX5" fmla="*/ 4954904 w 4990147"/>
-              <a:gd name="connsiteY5" fmla="*/ 1998460 h 4439131"/>
-            </a:gdLst>
-            <a:ahLst/>
-            <a:cxnLst>
-              <a:cxn ang="0">
-                <a:pos x="connsiteX0" y="connsiteY0"/>
-              </a:cxn>
-              <a:cxn ang="0">
-                <a:pos x="connsiteX1" y="connsiteY1"/>
-              </a:cxn>
-              <a:cxn ang="0">
-                <a:pos x="connsiteX2" y="connsiteY2"/>
-              </a:cxn>
-              <a:cxn ang="0">
-                <a:pos x="connsiteX3" y="connsiteY3"/>
-              </a:cxn>
-              <a:cxn ang="0">
-                <a:pos x="connsiteX4" y="connsiteY4"/>
-              </a:cxn>
-              <a:cxn ang="0">
-                <a:pos x="connsiteX5" y="connsiteY5"/>
-              </a:cxn>
-            </a:cxnLst>
-            <a:rect l="l" t="t" r="r" b="b"/>
-            <a:pathLst>
-              <a:path w="4990147" h="4439131">
-                <a:moveTo>
-                  <a:pt x="4990147" y="2229378"/>
-                </a:moveTo>
-                <a:lnTo>
-                  <a:pt x="917384" y="4439131"/>
-                </a:lnTo>
-                <a:lnTo>
-                  <a:pt x="910814" y="4434219"/>
-                </a:lnTo>
-                <a:cubicBezTo>
-                  <a:pt x="354557" y="3975154"/>
-                  <a:pt x="0" y="3280421"/>
-                  <a:pt x="0" y="2502877"/>
-                </a:cubicBezTo>
-                <a:cubicBezTo>
-                  <a:pt x="0" y="1120576"/>
-                  <a:pt x="1120576" y="0"/>
-                  <a:pt x="2502877" y="0"/>
-                </a:cubicBezTo>
-                <a:cubicBezTo>
-                  <a:pt x="3712390" y="0"/>
-                  <a:pt x="4721520" y="857941"/>
-                  <a:pt x="4954904" y="1998460"/>
-                </a:cubicBezTo>
-                <a:close/>
-              </a:path>
-            </a:pathLst>
-          </a:custGeom>
-          <a:gradFill>
-            <a:gsLst>
-              <a:gs pos="0">
-                <a:schemeClr val="accent1">
-                  <a:alpha val="22000"/>
-                </a:schemeClr>
-              </a:gs>
-              <a:gs pos="87000">
-                <a:schemeClr val="accent1">
-                  <a:lumMod val="60000"/>
-                  <a:lumOff val="40000"/>
-                  <a:alpha val="2000"/>
-                </a:schemeClr>
-              </a:gs>
-            </a:gsLst>
-            <a:lin ang="8400000" scaled="0"/>
-          </a:gradFill>
-          <a:ln>
-            <a:noFill/>
-          </a:ln>
-        </p:spPr>
-        <p:style>
-          <a:lnRef idx="2">
-            <a:schemeClr val="accent1">
-              <a:shade val="50000"/>
-            </a:schemeClr>
-          </a:lnRef>
-          <a:fillRef idx="1">
-            <a:schemeClr val="accent1"/>
-          </a:fillRef>
-          <a:effectRef idx="0">
-            <a:schemeClr val="accent1"/>
-          </a:effectRef>
-          <a:fontRef idx="minor">
-            <a:schemeClr val="lt1"/>
-          </a:fontRef>
-        </p:style>
-        <p:txBody>
-          <a:bodyPr wrap="square" rtlCol="0" anchor="ctr">
-            <a:noAutofit/>
-          </a:bodyPr>
-          <a:lstStyle/>
-          <a:p>
-            <a:pPr algn="ctr"/>
-            <a:endParaRPr lang="en-US" dirty="0"/>
-          </a:p>
-        </p:txBody>
-      </p:sp>
-      <p:sp>
-        <p:nvSpPr>
-          <p:cNvPr id="2" name="Title 1">
-            <a:extLst>
-              <a:ext uri="{FF2B5EF4-FFF2-40B4-BE49-F238E27FC236}">
-                <a16:creationId xmlns:a16="http://schemas.microsoft.com/office/drawing/2014/main" id="{19D214D3-9699-E0E2-8B10-348A820E5F0D}"/>
-              </a:ext>
-            </a:extLst>
-          </p:cNvPr>
-          <p:cNvSpPr>
-            <a:spLocks noGrp="1"/>
-          </p:cNvSpPr>
-          <p:nvPr>
-            <p:ph type="title"/>
-          </p:nvPr>
-        </p:nvSpPr>
-        <p:spPr>
-          <a:xfrm>
-            <a:off x="1314824" y="735106"/>
-            <a:ext cx="10053763" cy="2928470"/>
-          </a:xfrm>
-        </p:spPr>
-        <p:txBody>
-          <a:bodyPr vert="horz" lIns="91440" tIns="45720" rIns="91440" bIns="45720" rtlCol="0" anchor="b">
-            <a:normAutofit/>
-          </a:bodyPr>
-          <a:lstStyle/>
-          <a:p>
-            <a:r>
-              <a:rPr lang="en-US" sz="4800" kern="1200">
-                <a:solidFill>
-                  <a:srgbClr val="FFFFFF"/>
-                </a:solidFill>
-                <a:latin typeface="+mj-lt"/>
-                <a:ea typeface="+mj-ea"/>
-                <a:cs typeface="+mj-cs"/>
-              </a:rPr>
-              <a:t>Demonstration</a:t>
-            </a:r>
-          </a:p>
-        </p:txBody>
-      </p:sp>
-      <p:sp>
-        <p:nvSpPr>
-          <p:cNvPr id="3" name="Content Placeholder 2">
-            <a:extLst>
-              <a:ext uri="{FF2B5EF4-FFF2-40B4-BE49-F238E27FC236}">
-                <a16:creationId xmlns:a16="http://schemas.microsoft.com/office/drawing/2014/main" id="{8F6E0871-4D7A-8150-B00F-8D9A43CE6690}"/>
-              </a:ext>
-            </a:extLst>
-          </p:cNvPr>
-          <p:cNvSpPr>
-            <a:spLocks noGrp="1"/>
-          </p:cNvSpPr>
-          <p:nvPr>
-            <p:ph idx="1"/>
-          </p:nvPr>
-        </p:nvSpPr>
-        <p:spPr>
-          <a:xfrm>
-            <a:off x="1350682" y="4870824"/>
-            <a:ext cx="10005951" cy="1458258"/>
-          </a:xfrm>
-        </p:spPr>
-        <p:txBody>
-          <a:bodyPr vert="horz" lIns="91440" tIns="45720" rIns="91440" bIns="45720" rtlCol="0" anchor="ctr">
-            <a:normAutofit/>
-          </a:bodyPr>
-          <a:lstStyle/>
-          <a:p>
-            <a:r>
-              <a:rPr lang="en-US" u="sng" dirty="0">
-                <a:hlinkClick r:id="rId2"/>
-              </a:rPr>
-              <a:t>https://stat486final.streamlit.app/</a:t>
-            </a:r>
-            <a:r>
-              <a:rPr lang="en-US" u="sng" dirty="0"/>
-              <a:t> </a:t>
-            </a:r>
-            <a:endParaRPr lang="en-US" dirty="0"/>
-          </a:p>
-        </p:txBody>
-      </p:sp>
-    </p:spTree>
-    <p:extLst>
-      <p:ext uri="{BB962C8B-B14F-4D97-AF65-F5344CB8AC3E}">
-        <p14:creationId xmlns:p14="http://schemas.microsoft.com/office/powerpoint/2010/main" val="1673908730"/>
-      </p:ext>
-    </p:extLst>
-  </p:cSld>
-  <p:clrMapOvr>
-    <a:masterClrMapping/>
-  </p:clrMapOvr>
-  <p:timing>
-    <p:tnLst>
-      <p:par>
-        <p:cTn id="1" dur="indefinite" restart="never" nodeType="tmRoot">
-          <p:childTnLst>
-            <p:seq concurrent="1" nextAc="seek">
-              <p:cTn id="2" dur="indefinite" nodeType="mainSeq">
-                <p:childTnLst>
-                  <p:par>
-                    <p:cTn id="3" fill="hold">
-                      <p:stCondLst>
-                        <p:cond delay="indefinite"/>
-                        <p:cond evt="onBegin" delay="0">
-                          <p:tn val="2"/>
-                        </p:cond>
-                      </p:stCondLst>
-                      <p:childTnLst>
-                        <p:par>
-                          <p:cTn id="4" fill="hold">
-                            <p:stCondLst>
-                              <p:cond delay="0"/>
-                            </p:stCondLst>
-                            <p:childTnLst>
-                              <p:par>
-                                <p:cTn id="5" presetID="10" presetClass="entr" presetSubtype="0" fill="hold" grpId="0" nodeType="withEffect">
-                                  <p:stCondLst>
-                                    <p:cond delay="500"/>
-                                  </p:stCondLst>
-                                  <p:iterate>
-                                    <p:tmPct val="10000"/>
-                                  </p:iterate>
-                                  <p:childTnLst>
-                                    <p:set>
-                                      <p:cBhvr>
-                                        <p:cTn id="6" dur="1" fill="hold">
-                                          <p:stCondLst>
-                                            <p:cond delay="0"/>
-                                          </p:stCondLst>
-                                        </p:cTn>
-                                        <p:tgtEl>
-                                          <p:spTgt spid="2"/>
-                                        </p:tgtEl>
-                                        <p:attrNameLst>
-                                          <p:attrName>style.visibility</p:attrName>
-                                        </p:attrNameLst>
-                                      </p:cBhvr>
-                                      <p:to>
-                                        <p:strVal val="visible"/>
-                                      </p:to>
-                                    </p:set>
-                                    <p:animEffect transition="in" filter="fade">
-                                      <p:cBhvr>
-                                        <p:cTn id="7" dur="700"/>
-                                        <p:tgtEl>
-                                          <p:spTgt spid="2"/>
-                                        </p:tgtEl>
-                                      </p:cBhvr>
-                                    </p:animEffect>
-                                  </p:childTnLst>
-                                </p:cTn>
-                              </p:par>
-                            </p:childTnLst>
-                          </p:cTn>
-                        </p:par>
-                      </p:childTnLst>
-                    </p:cTn>
-                  </p:par>
-                </p:childTnLst>
-              </p:cTn>
-              <p:prevCondLst>
-                <p:cond evt="onPrev" delay="0">
-                  <p:tgtEl>
-                    <p:sldTgt/>
-                  </p:tgtEl>
-                </p:cond>
-              </p:prevCondLst>
-              <p:nextCondLst>
-                <p:cond evt="onNext" delay="0">
-                  <p:tgtEl>
-                    <p:sldTgt/>
-                  </p:tgtEl>
-                </p:cond>
-              </p:nextCondLst>
-            </p:seq>
-          </p:childTnLst>
-        </p:cTn>
-      </p:par>
-    </p:tnLst>
-    <p:bldLst>
-      <p:bldP spid="2" grpId="0"/>
-    </p:bldLst>
-  </p:timing>
 </p:sld>
 </file>
 

--- a/progress/ClassPresentation.pptx
+++ b/progress/ClassPresentation.pptx
@@ -8,15 +8,16 @@
     <p:sldId id="256" r:id="rId2"/>
     <p:sldId id="257" r:id="rId3"/>
     <p:sldId id="258" r:id="rId4"/>
-    <p:sldId id="259" r:id="rId5"/>
-    <p:sldId id="266" r:id="rId6"/>
-    <p:sldId id="268" r:id="rId7"/>
-    <p:sldId id="267" r:id="rId8"/>
-    <p:sldId id="263" r:id="rId9"/>
-    <p:sldId id="261" r:id="rId10"/>
-    <p:sldId id="262" r:id="rId11"/>
-    <p:sldId id="264" r:id="rId12"/>
-    <p:sldId id="265" r:id="rId13"/>
+    <p:sldId id="269" r:id="rId5"/>
+    <p:sldId id="259" r:id="rId6"/>
+    <p:sldId id="266" r:id="rId7"/>
+    <p:sldId id="268" r:id="rId8"/>
+    <p:sldId id="267" r:id="rId9"/>
+    <p:sldId id="263" r:id="rId10"/>
+    <p:sldId id="261" r:id="rId11"/>
+    <p:sldId id="262" r:id="rId12"/>
+    <p:sldId id="264" r:id="rId13"/>
+    <p:sldId id="265" r:id="rId14"/>
   </p:sldIdLst>
   <p:sldSz cx="12192000" cy="6858000"/>
   <p:notesSz cx="6858000" cy="9144000"/>
@@ -124,6 +125,753 @@
 </file>
 
 <file path=ppt/diagrams/colors1.xml><?xml version="1.0" encoding="utf-8"?>
+<dgm:colorsDef xmlns:dgm="http://schemas.openxmlformats.org/drawingml/2006/diagram" xmlns:a="http://schemas.openxmlformats.org/drawingml/2006/main" uniqueId="urn:microsoft.com/office/officeart/2005/8/colors/accent1_2">
+  <dgm:title val=""/>
+  <dgm:desc val=""/>
+  <dgm:catLst>
+    <dgm:cat type="accent1" pri="11200"/>
+  </dgm:catLst>
+  <dgm:styleLbl name="node0">
+    <dgm:fillClrLst meth="repeat">
+      <a:schemeClr val="accent1"/>
+    </dgm:fillClrLst>
+    <dgm:linClrLst meth="repeat">
+      <a:schemeClr val="lt1"/>
+    </dgm:linClrLst>
+    <dgm:effectClrLst/>
+    <dgm:txLinClrLst/>
+    <dgm:txFillClrLst/>
+    <dgm:txEffectClrLst/>
+  </dgm:styleLbl>
+  <dgm:styleLbl name="alignNode1">
+    <dgm:fillClrLst meth="repeat">
+      <a:schemeClr val="accent1"/>
+    </dgm:fillClrLst>
+    <dgm:linClrLst meth="repeat">
+      <a:schemeClr val="accent1"/>
+    </dgm:linClrLst>
+    <dgm:effectClrLst/>
+    <dgm:txLinClrLst/>
+    <dgm:txFillClrLst/>
+    <dgm:txEffectClrLst/>
+  </dgm:styleLbl>
+  <dgm:styleLbl name="node1">
+    <dgm:fillClrLst meth="repeat">
+      <a:schemeClr val="accent1"/>
+    </dgm:fillClrLst>
+    <dgm:linClrLst meth="repeat">
+      <a:schemeClr val="lt1"/>
+    </dgm:linClrLst>
+    <dgm:effectClrLst/>
+    <dgm:txLinClrLst/>
+    <dgm:txFillClrLst/>
+    <dgm:txEffectClrLst/>
+  </dgm:styleLbl>
+  <dgm:styleLbl name="lnNode1">
+    <dgm:fillClrLst meth="repeat">
+      <a:schemeClr val="accent1"/>
+    </dgm:fillClrLst>
+    <dgm:linClrLst meth="repeat">
+      <a:schemeClr val="lt1"/>
+    </dgm:linClrLst>
+    <dgm:effectClrLst/>
+    <dgm:txLinClrLst/>
+    <dgm:txFillClrLst/>
+    <dgm:txEffectClrLst/>
+  </dgm:styleLbl>
+  <dgm:styleLbl name="vennNode1">
+    <dgm:fillClrLst meth="repeat">
+      <a:schemeClr val="accent1">
+        <a:alpha val="50000"/>
+      </a:schemeClr>
+    </dgm:fillClrLst>
+    <dgm:linClrLst meth="repeat">
+      <a:schemeClr val="lt1"/>
+    </dgm:linClrLst>
+    <dgm:effectClrLst/>
+    <dgm:txLinClrLst/>
+    <dgm:txFillClrLst/>
+    <dgm:txEffectClrLst/>
+  </dgm:styleLbl>
+  <dgm:styleLbl name="node2">
+    <dgm:fillClrLst meth="repeat">
+      <a:schemeClr val="accent1"/>
+    </dgm:fillClrLst>
+    <dgm:linClrLst meth="repeat">
+      <a:schemeClr val="lt1"/>
+    </dgm:linClrLst>
+    <dgm:effectClrLst/>
+    <dgm:txLinClrLst/>
+    <dgm:txFillClrLst/>
+    <dgm:txEffectClrLst/>
+  </dgm:styleLbl>
+  <dgm:styleLbl name="node3">
+    <dgm:fillClrLst meth="repeat">
+      <a:schemeClr val="accent1"/>
+    </dgm:fillClrLst>
+    <dgm:linClrLst meth="repeat">
+      <a:schemeClr val="lt1"/>
+    </dgm:linClrLst>
+    <dgm:effectClrLst/>
+    <dgm:txLinClrLst/>
+    <dgm:txFillClrLst/>
+    <dgm:txEffectClrLst/>
+  </dgm:styleLbl>
+  <dgm:styleLbl name="node4">
+    <dgm:fillClrLst meth="repeat">
+      <a:schemeClr val="accent1"/>
+    </dgm:fillClrLst>
+    <dgm:linClrLst meth="repeat">
+      <a:schemeClr val="lt1"/>
+    </dgm:linClrLst>
+    <dgm:effectClrLst/>
+    <dgm:txLinClrLst/>
+    <dgm:txFillClrLst/>
+    <dgm:txEffectClrLst/>
+  </dgm:styleLbl>
+  <dgm:styleLbl name="fgImgPlace1">
+    <dgm:fillClrLst meth="repeat">
+      <a:schemeClr val="accent1">
+        <a:tint val="50000"/>
+      </a:schemeClr>
+    </dgm:fillClrLst>
+    <dgm:linClrLst meth="repeat">
+      <a:schemeClr val="lt1"/>
+    </dgm:linClrLst>
+    <dgm:effectClrLst/>
+    <dgm:txLinClrLst/>
+    <dgm:txFillClrLst meth="repeat">
+      <a:schemeClr val="lt1"/>
+    </dgm:txFillClrLst>
+    <dgm:txEffectClrLst/>
+  </dgm:styleLbl>
+  <dgm:styleLbl name="alignImgPlace1">
+    <dgm:fillClrLst meth="repeat">
+      <a:schemeClr val="accent1">
+        <a:tint val="50000"/>
+      </a:schemeClr>
+    </dgm:fillClrLst>
+    <dgm:linClrLst meth="repeat">
+      <a:schemeClr val="lt1"/>
+    </dgm:linClrLst>
+    <dgm:effectClrLst/>
+    <dgm:txLinClrLst/>
+    <dgm:txFillClrLst meth="repeat">
+      <a:schemeClr val="lt1"/>
+    </dgm:txFillClrLst>
+    <dgm:txEffectClrLst/>
+  </dgm:styleLbl>
+  <dgm:styleLbl name="bgImgPlace1">
+    <dgm:fillClrLst meth="repeat">
+      <a:schemeClr val="accent1">
+        <a:tint val="50000"/>
+      </a:schemeClr>
+    </dgm:fillClrLst>
+    <dgm:linClrLst meth="repeat">
+      <a:schemeClr val="lt1"/>
+    </dgm:linClrLst>
+    <dgm:effectClrLst/>
+    <dgm:txLinClrLst/>
+    <dgm:txFillClrLst meth="repeat">
+      <a:schemeClr val="lt1"/>
+    </dgm:txFillClrLst>
+    <dgm:txEffectClrLst/>
+  </dgm:styleLbl>
+  <dgm:styleLbl name="sibTrans2D1">
+    <dgm:fillClrLst meth="repeat">
+      <a:schemeClr val="accent1">
+        <a:tint val="60000"/>
+      </a:schemeClr>
+    </dgm:fillClrLst>
+    <dgm:linClrLst meth="repeat">
+      <a:schemeClr val="accent1">
+        <a:tint val="60000"/>
+      </a:schemeClr>
+    </dgm:linClrLst>
+    <dgm:effectClrLst/>
+    <dgm:txLinClrLst/>
+    <dgm:txFillClrLst/>
+    <dgm:txEffectClrLst/>
+  </dgm:styleLbl>
+  <dgm:styleLbl name="fgSibTrans2D1">
+    <dgm:fillClrLst meth="repeat">
+      <a:schemeClr val="accent1">
+        <a:tint val="60000"/>
+      </a:schemeClr>
+    </dgm:fillClrLst>
+    <dgm:linClrLst meth="repeat">
+      <a:schemeClr val="accent1">
+        <a:tint val="60000"/>
+      </a:schemeClr>
+    </dgm:linClrLst>
+    <dgm:effectClrLst/>
+    <dgm:txLinClrLst/>
+    <dgm:txFillClrLst/>
+    <dgm:txEffectClrLst/>
+  </dgm:styleLbl>
+  <dgm:styleLbl name="bgSibTrans2D1">
+    <dgm:fillClrLst meth="repeat">
+      <a:schemeClr val="accent1">
+        <a:tint val="60000"/>
+      </a:schemeClr>
+    </dgm:fillClrLst>
+    <dgm:linClrLst meth="repeat">
+      <a:schemeClr val="accent1">
+        <a:tint val="60000"/>
+      </a:schemeClr>
+    </dgm:linClrLst>
+    <dgm:effectClrLst/>
+    <dgm:txLinClrLst/>
+    <dgm:txFillClrLst/>
+    <dgm:txEffectClrLst/>
+  </dgm:styleLbl>
+  <dgm:styleLbl name="sibTrans1D1">
+    <dgm:fillClrLst meth="repeat">
+      <a:schemeClr val="accent1"/>
+    </dgm:fillClrLst>
+    <dgm:linClrLst meth="repeat">
+      <a:schemeClr val="accent1"/>
+    </dgm:linClrLst>
+    <dgm:effectClrLst/>
+    <dgm:txLinClrLst/>
+    <dgm:txFillClrLst meth="repeat">
+      <a:schemeClr val="tx1"/>
+    </dgm:txFillClrLst>
+    <dgm:txEffectClrLst/>
+  </dgm:styleLbl>
+  <dgm:styleLbl name="callout">
+    <dgm:fillClrLst meth="repeat">
+      <a:schemeClr val="accent1"/>
+    </dgm:fillClrLst>
+    <dgm:linClrLst meth="repeat">
+      <a:schemeClr val="accent1">
+        <a:tint val="50000"/>
+      </a:schemeClr>
+    </dgm:linClrLst>
+    <dgm:effectClrLst/>
+    <dgm:txLinClrLst/>
+    <dgm:txFillClrLst meth="repeat">
+      <a:schemeClr val="tx1"/>
+    </dgm:txFillClrLst>
+    <dgm:txEffectClrLst/>
+  </dgm:styleLbl>
+  <dgm:styleLbl name="asst0">
+    <dgm:fillClrLst meth="repeat">
+      <a:schemeClr val="accent1"/>
+    </dgm:fillClrLst>
+    <dgm:linClrLst meth="repeat">
+      <a:schemeClr val="lt1"/>
+    </dgm:linClrLst>
+    <dgm:effectClrLst/>
+    <dgm:txLinClrLst/>
+    <dgm:txFillClrLst/>
+    <dgm:txEffectClrLst/>
+  </dgm:styleLbl>
+  <dgm:styleLbl name="asst1">
+    <dgm:fillClrLst meth="repeat">
+      <a:schemeClr val="accent1"/>
+    </dgm:fillClrLst>
+    <dgm:linClrLst meth="repeat">
+      <a:schemeClr val="lt1"/>
+    </dgm:linClrLst>
+    <dgm:effectClrLst/>
+    <dgm:txLinClrLst/>
+    <dgm:txFillClrLst/>
+    <dgm:txEffectClrLst/>
+  </dgm:styleLbl>
+  <dgm:styleLbl name="asst2">
+    <dgm:fillClrLst meth="repeat">
+      <a:schemeClr val="accent1"/>
+    </dgm:fillClrLst>
+    <dgm:linClrLst meth="repeat">
+      <a:schemeClr val="lt1"/>
+    </dgm:linClrLst>
+    <dgm:effectClrLst/>
+    <dgm:txLinClrLst/>
+    <dgm:txFillClrLst/>
+    <dgm:txEffectClrLst/>
+  </dgm:styleLbl>
+  <dgm:styleLbl name="asst3">
+    <dgm:fillClrLst meth="repeat">
+      <a:schemeClr val="accent1"/>
+    </dgm:fillClrLst>
+    <dgm:linClrLst meth="repeat">
+      <a:schemeClr val="lt1"/>
+    </dgm:linClrLst>
+    <dgm:effectClrLst/>
+    <dgm:txLinClrLst/>
+    <dgm:txFillClrLst/>
+    <dgm:txEffectClrLst/>
+  </dgm:styleLbl>
+  <dgm:styleLbl name="asst4">
+    <dgm:fillClrLst meth="repeat">
+      <a:schemeClr val="accent1"/>
+    </dgm:fillClrLst>
+    <dgm:linClrLst meth="repeat">
+      <a:schemeClr val="lt1"/>
+    </dgm:linClrLst>
+    <dgm:effectClrLst/>
+    <dgm:txLinClrLst/>
+    <dgm:txFillClrLst/>
+    <dgm:txEffectClrLst/>
+  </dgm:styleLbl>
+  <dgm:styleLbl name="parChTrans2D1">
+    <dgm:fillClrLst meth="repeat">
+      <a:schemeClr val="accent1">
+        <a:tint val="60000"/>
+      </a:schemeClr>
+    </dgm:fillClrLst>
+    <dgm:linClrLst meth="repeat">
+      <a:schemeClr val="accent1">
+        <a:tint val="60000"/>
+      </a:schemeClr>
+    </dgm:linClrLst>
+    <dgm:effectClrLst/>
+    <dgm:txLinClrLst/>
+    <dgm:txFillClrLst meth="repeat">
+      <a:schemeClr val="lt1"/>
+    </dgm:txFillClrLst>
+    <dgm:txEffectClrLst/>
+  </dgm:styleLbl>
+  <dgm:styleLbl name="parChTrans2D2">
+    <dgm:fillClrLst meth="repeat">
+      <a:schemeClr val="accent1"/>
+    </dgm:fillClrLst>
+    <dgm:linClrLst meth="repeat">
+      <a:schemeClr val="accent1"/>
+    </dgm:linClrLst>
+    <dgm:effectClrLst/>
+    <dgm:txLinClrLst/>
+    <dgm:txFillClrLst meth="repeat">
+      <a:schemeClr val="lt1"/>
+    </dgm:txFillClrLst>
+    <dgm:txEffectClrLst/>
+  </dgm:styleLbl>
+  <dgm:styleLbl name="parChTrans2D3">
+    <dgm:fillClrLst meth="repeat">
+      <a:schemeClr val="accent1"/>
+    </dgm:fillClrLst>
+    <dgm:linClrLst meth="repeat">
+      <a:schemeClr val="accent1"/>
+    </dgm:linClrLst>
+    <dgm:effectClrLst/>
+    <dgm:txLinClrLst/>
+    <dgm:txFillClrLst meth="repeat">
+      <a:schemeClr val="lt1"/>
+    </dgm:txFillClrLst>
+    <dgm:txEffectClrLst/>
+  </dgm:styleLbl>
+  <dgm:styleLbl name="parChTrans2D4">
+    <dgm:fillClrLst meth="repeat">
+      <a:schemeClr val="accent1"/>
+    </dgm:fillClrLst>
+    <dgm:linClrLst meth="repeat">
+      <a:schemeClr val="accent1"/>
+    </dgm:linClrLst>
+    <dgm:effectClrLst/>
+    <dgm:txLinClrLst/>
+    <dgm:txFillClrLst meth="repeat">
+      <a:schemeClr val="lt1"/>
+    </dgm:txFillClrLst>
+    <dgm:txEffectClrLst/>
+  </dgm:styleLbl>
+  <dgm:styleLbl name="parChTrans1D1">
+    <dgm:fillClrLst meth="repeat">
+      <a:schemeClr val="accent1"/>
+    </dgm:fillClrLst>
+    <dgm:linClrLst meth="repeat">
+      <a:schemeClr val="accent1">
+        <a:shade val="60000"/>
+      </a:schemeClr>
+    </dgm:linClrLst>
+    <dgm:effectClrLst/>
+    <dgm:txLinClrLst/>
+    <dgm:txFillClrLst meth="repeat">
+      <a:schemeClr val="tx1"/>
+    </dgm:txFillClrLst>
+    <dgm:txEffectClrLst/>
+  </dgm:styleLbl>
+  <dgm:styleLbl name="parChTrans1D2">
+    <dgm:fillClrLst meth="repeat">
+      <a:schemeClr val="accent1"/>
+    </dgm:fillClrLst>
+    <dgm:linClrLst meth="repeat">
+      <a:schemeClr val="accent1">
+        <a:shade val="60000"/>
+      </a:schemeClr>
+    </dgm:linClrLst>
+    <dgm:effectClrLst/>
+    <dgm:txLinClrLst/>
+    <dgm:txFillClrLst meth="repeat">
+      <a:schemeClr val="tx1"/>
+    </dgm:txFillClrLst>
+    <dgm:txEffectClrLst/>
+  </dgm:styleLbl>
+  <dgm:styleLbl name="parChTrans1D3">
+    <dgm:fillClrLst meth="repeat">
+      <a:schemeClr val="accent1"/>
+    </dgm:fillClrLst>
+    <dgm:linClrLst meth="repeat">
+      <a:schemeClr val="accent1">
+        <a:shade val="80000"/>
+      </a:schemeClr>
+    </dgm:linClrLst>
+    <dgm:effectClrLst/>
+    <dgm:txLinClrLst/>
+    <dgm:txFillClrLst meth="repeat">
+      <a:schemeClr val="tx1"/>
+    </dgm:txFillClrLst>
+    <dgm:txEffectClrLst/>
+  </dgm:styleLbl>
+  <dgm:styleLbl name="parChTrans1D4">
+    <dgm:fillClrLst meth="repeat">
+      <a:schemeClr val="accent1"/>
+    </dgm:fillClrLst>
+    <dgm:linClrLst meth="repeat">
+      <a:schemeClr val="accent1">
+        <a:shade val="80000"/>
+      </a:schemeClr>
+    </dgm:linClrLst>
+    <dgm:effectClrLst/>
+    <dgm:txLinClrLst/>
+    <dgm:txFillClrLst meth="repeat">
+      <a:schemeClr val="tx1"/>
+    </dgm:txFillClrLst>
+    <dgm:txEffectClrLst/>
+  </dgm:styleLbl>
+  <dgm:styleLbl name="fgAcc1">
+    <dgm:fillClrLst meth="repeat">
+      <a:schemeClr val="lt1">
+        <a:alpha val="90000"/>
+      </a:schemeClr>
+    </dgm:fillClrLst>
+    <dgm:linClrLst meth="repeat">
+      <a:schemeClr val="accent1"/>
+    </dgm:linClrLst>
+    <dgm:effectClrLst/>
+    <dgm:txLinClrLst/>
+    <dgm:txFillClrLst meth="repeat">
+      <a:schemeClr val="dk1"/>
+    </dgm:txFillClrLst>
+    <dgm:txEffectClrLst/>
+  </dgm:styleLbl>
+  <dgm:styleLbl name="conFgAcc1">
+    <dgm:fillClrLst meth="repeat">
+      <a:schemeClr val="lt1">
+        <a:alpha val="90000"/>
+      </a:schemeClr>
+    </dgm:fillClrLst>
+    <dgm:linClrLst meth="repeat">
+      <a:schemeClr val="accent1"/>
+    </dgm:linClrLst>
+    <dgm:effectClrLst/>
+    <dgm:txLinClrLst/>
+    <dgm:txFillClrLst meth="repeat">
+      <a:schemeClr val="dk1"/>
+    </dgm:txFillClrLst>
+    <dgm:txEffectClrLst/>
+  </dgm:styleLbl>
+  <dgm:styleLbl name="alignAcc1">
+    <dgm:fillClrLst meth="repeat">
+      <a:schemeClr val="lt1">
+        <a:alpha val="90000"/>
+      </a:schemeClr>
+    </dgm:fillClrLst>
+    <dgm:linClrLst meth="repeat">
+      <a:schemeClr val="accent1"/>
+    </dgm:linClrLst>
+    <dgm:effectClrLst/>
+    <dgm:txLinClrLst/>
+    <dgm:txFillClrLst meth="repeat">
+      <a:schemeClr val="dk1"/>
+    </dgm:txFillClrLst>
+    <dgm:txEffectClrLst/>
+  </dgm:styleLbl>
+  <dgm:styleLbl name="trAlignAcc1">
+    <dgm:fillClrLst meth="repeat">
+      <a:schemeClr val="lt1">
+        <a:alpha val="40000"/>
+      </a:schemeClr>
+    </dgm:fillClrLst>
+    <dgm:linClrLst meth="repeat">
+      <a:schemeClr val="accent1"/>
+    </dgm:linClrLst>
+    <dgm:effectClrLst/>
+    <dgm:txLinClrLst/>
+    <dgm:txFillClrLst meth="repeat">
+      <a:schemeClr val="dk1"/>
+    </dgm:txFillClrLst>
+    <dgm:txEffectClrLst/>
+  </dgm:styleLbl>
+  <dgm:styleLbl name="bgAcc1">
+    <dgm:fillClrLst meth="repeat">
+      <a:schemeClr val="lt1">
+        <a:alpha val="90000"/>
+      </a:schemeClr>
+    </dgm:fillClrLst>
+    <dgm:linClrLst meth="repeat">
+      <a:schemeClr val="accent1"/>
+    </dgm:linClrLst>
+    <dgm:effectClrLst/>
+    <dgm:txLinClrLst/>
+    <dgm:txFillClrLst meth="repeat">
+      <a:schemeClr val="dk1"/>
+    </dgm:txFillClrLst>
+    <dgm:txEffectClrLst/>
+  </dgm:styleLbl>
+  <dgm:styleLbl name="solidFgAcc1">
+    <dgm:fillClrLst meth="repeat">
+      <a:schemeClr val="lt1"/>
+    </dgm:fillClrLst>
+    <dgm:linClrLst meth="repeat">
+      <a:schemeClr val="accent1"/>
+    </dgm:linClrLst>
+    <dgm:effectClrLst/>
+    <dgm:txLinClrLst/>
+    <dgm:txFillClrLst meth="repeat">
+      <a:schemeClr val="dk1"/>
+    </dgm:txFillClrLst>
+    <dgm:txEffectClrLst/>
+  </dgm:styleLbl>
+  <dgm:styleLbl name="solidAlignAcc1">
+    <dgm:fillClrLst meth="repeat">
+      <a:schemeClr val="lt1"/>
+    </dgm:fillClrLst>
+    <dgm:linClrLst meth="repeat">
+      <a:schemeClr val="accent1"/>
+    </dgm:linClrLst>
+    <dgm:effectClrLst/>
+    <dgm:txLinClrLst/>
+    <dgm:txFillClrLst meth="repeat">
+      <a:schemeClr val="dk1"/>
+    </dgm:txFillClrLst>
+    <dgm:txEffectClrLst/>
+  </dgm:styleLbl>
+  <dgm:styleLbl name="solidBgAcc1">
+    <dgm:fillClrLst meth="repeat">
+      <a:schemeClr val="lt1"/>
+    </dgm:fillClrLst>
+    <dgm:linClrLst meth="repeat">
+      <a:schemeClr val="accent1"/>
+    </dgm:linClrLst>
+    <dgm:effectClrLst/>
+    <dgm:txLinClrLst/>
+    <dgm:txFillClrLst meth="repeat">
+      <a:schemeClr val="dk1"/>
+    </dgm:txFillClrLst>
+    <dgm:txEffectClrLst/>
+  </dgm:styleLbl>
+  <dgm:styleLbl name="fgAccFollowNode1">
+    <dgm:fillClrLst meth="repeat">
+      <a:schemeClr val="accent1">
+        <a:alpha val="90000"/>
+        <a:tint val="40000"/>
+      </a:schemeClr>
+    </dgm:fillClrLst>
+    <dgm:linClrLst meth="repeat">
+      <a:schemeClr val="accent1">
+        <a:alpha val="90000"/>
+        <a:tint val="40000"/>
+      </a:schemeClr>
+    </dgm:linClrLst>
+    <dgm:effectClrLst/>
+    <dgm:txLinClrLst/>
+    <dgm:txFillClrLst meth="repeat">
+      <a:schemeClr val="dk1"/>
+    </dgm:txFillClrLst>
+    <dgm:txEffectClrLst/>
+  </dgm:styleLbl>
+  <dgm:styleLbl name="alignAccFollowNode1">
+    <dgm:fillClrLst meth="repeat">
+      <a:schemeClr val="accent1">
+        <a:alpha val="90000"/>
+        <a:tint val="40000"/>
+      </a:schemeClr>
+    </dgm:fillClrLst>
+    <dgm:linClrLst meth="repeat">
+      <a:schemeClr val="accent1">
+        <a:alpha val="90000"/>
+        <a:tint val="40000"/>
+      </a:schemeClr>
+    </dgm:linClrLst>
+    <dgm:effectClrLst/>
+    <dgm:txLinClrLst/>
+    <dgm:txFillClrLst meth="repeat">
+      <a:schemeClr val="dk1"/>
+    </dgm:txFillClrLst>
+    <dgm:txEffectClrLst/>
+  </dgm:styleLbl>
+  <dgm:styleLbl name="bgAccFollowNode1">
+    <dgm:fillClrLst meth="repeat">
+      <a:schemeClr val="accent1">
+        <a:alpha val="90000"/>
+        <a:tint val="40000"/>
+      </a:schemeClr>
+    </dgm:fillClrLst>
+    <dgm:linClrLst meth="repeat">
+      <a:schemeClr val="accent1">
+        <a:alpha val="90000"/>
+        <a:tint val="40000"/>
+      </a:schemeClr>
+    </dgm:linClrLst>
+    <dgm:effectClrLst/>
+    <dgm:txLinClrLst/>
+    <dgm:txFillClrLst meth="repeat">
+      <a:schemeClr val="dk1"/>
+    </dgm:txFillClrLst>
+    <dgm:txEffectClrLst/>
+  </dgm:styleLbl>
+  <dgm:styleLbl name="fgAcc0">
+    <dgm:fillClrLst meth="repeat">
+      <a:schemeClr val="lt1">
+        <a:alpha val="90000"/>
+      </a:schemeClr>
+    </dgm:fillClrLst>
+    <dgm:linClrLst meth="repeat">
+      <a:schemeClr val="accent1"/>
+    </dgm:linClrLst>
+    <dgm:effectClrLst/>
+    <dgm:txLinClrLst/>
+    <dgm:txFillClrLst meth="repeat">
+      <a:schemeClr val="dk1"/>
+    </dgm:txFillClrLst>
+    <dgm:txEffectClrLst/>
+  </dgm:styleLbl>
+  <dgm:styleLbl name="fgAcc2">
+    <dgm:fillClrLst meth="repeat">
+      <a:schemeClr val="lt1">
+        <a:alpha val="90000"/>
+      </a:schemeClr>
+    </dgm:fillClrLst>
+    <dgm:linClrLst meth="repeat">
+      <a:schemeClr val="accent1"/>
+    </dgm:linClrLst>
+    <dgm:effectClrLst/>
+    <dgm:txLinClrLst/>
+    <dgm:txFillClrLst meth="repeat">
+      <a:schemeClr val="dk1"/>
+    </dgm:txFillClrLst>
+    <dgm:txEffectClrLst/>
+  </dgm:styleLbl>
+  <dgm:styleLbl name="fgAcc3">
+    <dgm:fillClrLst meth="repeat">
+      <a:schemeClr val="lt1">
+        <a:alpha val="90000"/>
+      </a:schemeClr>
+    </dgm:fillClrLst>
+    <dgm:linClrLst meth="repeat">
+      <a:schemeClr val="accent1"/>
+    </dgm:linClrLst>
+    <dgm:effectClrLst/>
+    <dgm:txLinClrLst/>
+    <dgm:txFillClrLst meth="repeat">
+      <a:schemeClr val="dk1"/>
+    </dgm:txFillClrLst>
+    <dgm:txEffectClrLst/>
+  </dgm:styleLbl>
+  <dgm:styleLbl name="fgAcc4">
+    <dgm:fillClrLst meth="repeat">
+      <a:schemeClr val="lt1">
+        <a:alpha val="90000"/>
+      </a:schemeClr>
+    </dgm:fillClrLst>
+    <dgm:linClrLst meth="repeat">
+      <a:schemeClr val="accent1"/>
+    </dgm:linClrLst>
+    <dgm:effectClrLst/>
+    <dgm:txLinClrLst/>
+    <dgm:txFillClrLst meth="repeat">
+      <a:schemeClr val="dk1"/>
+    </dgm:txFillClrLst>
+    <dgm:txEffectClrLst/>
+  </dgm:styleLbl>
+  <dgm:styleLbl name="bgShp">
+    <dgm:fillClrLst meth="repeat">
+      <a:schemeClr val="accent1">
+        <a:tint val="40000"/>
+      </a:schemeClr>
+    </dgm:fillClrLst>
+    <dgm:linClrLst meth="repeat">
+      <a:schemeClr val="accent1"/>
+    </dgm:linClrLst>
+    <dgm:effectClrLst/>
+    <dgm:txLinClrLst/>
+    <dgm:txFillClrLst meth="repeat">
+      <a:schemeClr val="dk1"/>
+    </dgm:txFillClrLst>
+    <dgm:txEffectClrLst/>
+  </dgm:styleLbl>
+  <dgm:styleLbl name="dkBgShp">
+    <dgm:fillClrLst meth="repeat">
+      <a:schemeClr val="accent1">
+        <a:shade val="80000"/>
+      </a:schemeClr>
+    </dgm:fillClrLst>
+    <dgm:linClrLst meth="repeat">
+      <a:schemeClr val="accent1"/>
+    </dgm:linClrLst>
+    <dgm:effectClrLst/>
+    <dgm:txLinClrLst/>
+    <dgm:txFillClrLst meth="repeat">
+      <a:schemeClr val="lt1"/>
+    </dgm:txFillClrLst>
+    <dgm:txEffectClrLst/>
+  </dgm:styleLbl>
+  <dgm:styleLbl name="trBgShp">
+    <dgm:fillClrLst meth="repeat">
+      <a:schemeClr val="accent1">
+        <a:tint val="50000"/>
+        <a:alpha val="40000"/>
+      </a:schemeClr>
+    </dgm:fillClrLst>
+    <dgm:linClrLst meth="repeat">
+      <a:schemeClr val="accent1"/>
+    </dgm:linClrLst>
+    <dgm:effectClrLst/>
+    <dgm:txLinClrLst/>
+    <dgm:txFillClrLst meth="repeat">
+      <a:schemeClr val="lt1"/>
+    </dgm:txFillClrLst>
+    <dgm:txEffectClrLst/>
+  </dgm:styleLbl>
+  <dgm:styleLbl name="fgShp">
+    <dgm:fillClrLst meth="repeat">
+      <a:schemeClr val="accent1">
+        <a:tint val="60000"/>
+      </a:schemeClr>
+    </dgm:fillClrLst>
+    <dgm:linClrLst meth="repeat">
+      <a:schemeClr val="lt1"/>
+    </dgm:linClrLst>
+    <dgm:effectClrLst/>
+    <dgm:txLinClrLst/>
+    <dgm:txFillClrLst meth="repeat">
+      <a:schemeClr val="dk1"/>
+    </dgm:txFillClrLst>
+    <dgm:txEffectClrLst/>
+  </dgm:styleLbl>
+  <dgm:styleLbl name="revTx">
+    <dgm:fillClrLst meth="repeat">
+      <a:schemeClr val="lt1">
+        <a:alpha val="0"/>
+      </a:schemeClr>
+    </dgm:fillClrLst>
+    <dgm:linClrLst meth="repeat">
+      <a:schemeClr val="dk1">
+        <a:alpha val="0"/>
+      </a:schemeClr>
+    </dgm:linClrLst>
+    <dgm:effectClrLst/>
+    <dgm:txLinClrLst/>
+    <dgm:txFillClrLst meth="repeat">
+      <a:schemeClr val="tx1"/>
+    </dgm:txFillClrLst>
+    <dgm:txEffectClrLst/>
+  </dgm:styleLbl>
+</dgm:colorsDef>
+</file>
+
+<file path=ppt/diagrams/colors2.xml><?xml version="1.0" encoding="utf-8"?>
 <dgm:colorsDef xmlns:dgm="http://schemas.openxmlformats.org/drawingml/2006/diagram" xmlns:a="http://schemas.openxmlformats.org/drawingml/2006/main" uniqueId="urn:microsoft.com/office/officeart/2005/8/colors/colorful2">
   <dgm:title val=""/>
   <dgm:desc val=""/>
@@ -905,7 +1653,7 @@
 </dgm:colorsDef>
 </file>
 
-<file path=ppt/diagrams/colors2.xml><?xml version="1.0" encoding="utf-8"?>
+<file path=ppt/diagrams/colors3.xml><?xml version="1.0" encoding="utf-8"?>
 <dgm:colorsDef xmlns:dgm="http://schemas.openxmlformats.org/drawingml/2006/diagram" xmlns:a="http://schemas.openxmlformats.org/drawingml/2006/main" uniqueId="urn:microsoft.com/office/officeart/2005/8/colors/colorful1">
   <dgm:title val=""/>
   <dgm:desc val=""/>
@@ -1825,6 +2573,434 @@
 </file>
 
 <file path=ppt/diagrams/data1.xml><?xml version="1.0" encoding="utf-8"?>
+<dgm:dataModel xmlns:dgm="http://schemas.openxmlformats.org/drawingml/2006/diagram" xmlns:a="http://schemas.openxmlformats.org/drawingml/2006/main">
+  <dgm:ptLst>
+    <dgm:pt modelId="{07985E3B-18EC-4819-A3CE-94663A4AE07A}" type="doc">
+      <dgm:prSet loTypeId="urn:microsoft.com/office/officeart/2018/2/layout/IconVerticalSolidList" loCatId="icon" qsTypeId="urn:microsoft.com/office/officeart/2005/8/quickstyle/simple1" qsCatId="simple" csTypeId="urn:microsoft.com/office/officeart/2005/8/colors/accent1_2" csCatId="accent1" phldr="1"/>
+      <dgm:spPr/>
+      <dgm:t>
+        <a:bodyPr/>
+        <a:lstStyle/>
+        <a:p>
+          <a:endParaRPr lang="en-US"/>
+        </a:p>
+      </dgm:t>
+    </dgm:pt>
+    <dgm:pt modelId="{58FEE20F-513D-4E45-8F72-82C2E6FB035E}">
+      <dgm:prSet/>
+      <dgm:spPr/>
+      <dgm:t>
+        <a:bodyPr/>
+        <a:lstStyle/>
+        <a:p>
+          <a:pPr>
+            <a:lnSpc>
+              <a:spcPct val="100000"/>
+            </a:lnSpc>
+          </a:pPr>
+          <a:r>
+            <a:rPr lang="en-US"/>
+            <a:t>The Problem (Raw Stats): A +5.0 scoring margin is terrible for a 1-seed, but incredible for a 13-seed. Raw stats lack context. The </a:t>
+          </a:r>
+        </a:p>
+      </dgm:t>
+    </dgm:pt>
+    <dgm:pt modelId="{B7031ADE-18DD-4AD8-A5BD-B27DA39738B3}" type="parTrans" cxnId="{77B27867-8857-449E-84C6-05B1F23F9BEC}">
+      <dgm:prSet/>
+      <dgm:spPr/>
+      <dgm:t>
+        <a:bodyPr/>
+        <a:lstStyle/>
+        <a:p>
+          <a:endParaRPr lang="en-US"/>
+        </a:p>
+      </dgm:t>
+    </dgm:pt>
+    <dgm:pt modelId="{87B34B02-B9B5-4E74-B61D-E2486C3304B2}" type="sibTrans" cxnId="{77B27867-8857-449E-84C6-05B1F23F9BEC}">
+      <dgm:prSet/>
+      <dgm:spPr/>
+      <dgm:t>
+        <a:bodyPr/>
+        <a:lstStyle/>
+        <a:p>
+          <a:endParaRPr lang="en-US"/>
+        </a:p>
+      </dgm:t>
+    </dgm:pt>
+    <dgm:pt modelId="{9075FDAA-3588-4131-A5D8-CEE335E456DF}">
+      <dgm:prSet/>
+      <dgm:spPr/>
+      <dgm:t>
+        <a:bodyPr/>
+        <a:lstStyle/>
+        <a:p>
+          <a:pPr>
+            <a:lnSpc>
+              <a:spcPct val="100000"/>
+            </a:lnSpc>
+          </a:pPr>
+          <a:r>
+            <a:rPr lang="en-US"/>
+            <a:t>Solution (Tournament Averages): Calculate the mean metrics for only the teams that made the tournament that specific year. </a:t>
+          </a:r>
+        </a:p>
+      </dgm:t>
+    </dgm:pt>
+    <dgm:pt modelId="{113F6F72-0C03-484D-A1FD-6107579F0265}" type="parTrans" cxnId="{59F2C8F9-7505-409D-B540-AF32B4D2E1CB}">
+      <dgm:prSet/>
+      <dgm:spPr/>
+      <dgm:t>
+        <a:bodyPr/>
+        <a:lstStyle/>
+        <a:p>
+          <a:endParaRPr lang="en-US"/>
+        </a:p>
+      </dgm:t>
+    </dgm:pt>
+    <dgm:pt modelId="{AE88F968-EF11-4BE6-B074-07EA0E88B477}" type="sibTrans" cxnId="{59F2C8F9-7505-409D-B540-AF32B4D2E1CB}">
+      <dgm:prSet/>
+      <dgm:spPr/>
+      <dgm:t>
+        <a:bodyPr/>
+        <a:lstStyle/>
+        <a:p>
+          <a:endParaRPr lang="en-US"/>
+        </a:p>
+      </dgm:t>
+    </dgm:pt>
+    <dgm:pt modelId="{3DD4DC91-14A3-404D-8965-F4B749FA413B}">
+      <dgm:prSet/>
+      <dgm:spPr/>
+      <dgm:t>
+        <a:bodyPr/>
+        <a:lstStyle/>
+        <a:p>
+          <a:pPr>
+            <a:lnSpc>
+              <a:spcPct val="100000"/>
+            </a:lnSpc>
+          </a:pPr>
+          <a:r>
+            <a:rPr lang="en-US"/>
+            <a:t>The Formula: Candidate Stat - Tournament Average = Expectation Gap </a:t>
+          </a:r>
+        </a:p>
+      </dgm:t>
+    </dgm:pt>
+    <dgm:pt modelId="{CE4630D2-6B22-4475-9232-0F70E61A8AA0}" type="parTrans" cxnId="{7EB32AF4-E5D1-4881-A898-C26E2C4E235D}">
+      <dgm:prSet/>
+      <dgm:spPr/>
+      <dgm:t>
+        <a:bodyPr/>
+        <a:lstStyle/>
+        <a:p>
+          <a:endParaRPr lang="en-US"/>
+        </a:p>
+      </dgm:t>
+    </dgm:pt>
+    <dgm:pt modelId="{D7C5D62E-02B7-4219-8F7C-76AE8EF73D11}" type="sibTrans" cxnId="{7EB32AF4-E5D1-4881-A898-C26E2C4E235D}">
+      <dgm:prSet/>
+      <dgm:spPr/>
+      <dgm:t>
+        <a:bodyPr/>
+        <a:lstStyle/>
+        <a:p>
+          <a:endParaRPr lang="en-US"/>
+        </a:p>
+      </dgm:t>
+    </dgm:pt>
+    <dgm:pt modelId="{1F94A90F-B8CD-4AFA-9907-A240B6C4DEE1}">
+      <dgm:prSet/>
+      <dgm:spPr/>
+      <dgm:t>
+        <a:bodyPr/>
+        <a:lstStyle/>
+        <a:p>
+          <a:pPr>
+            <a:lnSpc>
+              <a:spcPct val="100000"/>
+            </a:lnSpc>
+          </a:pPr>
+          <a:r>
+            <a:rPr lang="en-US"/>
+            <a:t>The Impact: Allows the model to identify 13-seeds that possess the statistical DNA of a top-tier powerhouse.</a:t>
+          </a:r>
+        </a:p>
+      </dgm:t>
+    </dgm:pt>
+    <dgm:pt modelId="{BB041ED1-A60C-48A8-AE03-B0C8D3371DCB}" type="parTrans" cxnId="{98547060-D7E5-4115-B70B-EFC723F6577A}">
+      <dgm:prSet/>
+      <dgm:spPr/>
+      <dgm:t>
+        <a:bodyPr/>
+        <a:lstStyle/>
+        <a:p>
+          <a:endParaRPr lang="en-US"/>
+        </a:p>
+      </dgm:t>
+    </dgm:pt>
+    <dgm:pt modelId="{4B623ECE-16A1-47E8-8F9E-A1ED76693221}" type="sibTrans" cxnId="{98547060-D7E5-4115-B70B-EFC723F6577A}">
+      <dgm:prSet/>
+      <dgm:spPr/>
+      <dgm:t>
+        <a:bodyPr/>
+        <a:lstStyle/>
+        <a:p>
+          <a:endParaRPr lang="en-US"/>
+        </a:p>
+      </dgm:t>
+    </dgm:pt>
+    <dgm:pt modelId="{75597CDD-31D8-47CC-92B9-F6E56AFD8233}" type="pres">
+      <dgm:prSet presAssocID="{07985E3B-18EC-4819-A3CE-94663A4AE07A}" presName="root" presStyleCnt="0">
+        <dgm:presLayoutVars>
+          <dgm:dir/>
+          <dgm:resizeHandles val="exact"/>
+        </dgm:presLayoutVars>
+      </dgm:prSet>
+      <dgm:spPr/>
+    </dgm:pt>
+    <dgm:pt modelId="{7E10FE87-D86B-4394-9B3D-FAB1A34F36BD}" type="pres">
+      <dgm:prSet presAssocID="{58FEE20F-513D-4E45-8F72-82C2E6FB035E}" presName="compNode" presStyleCnt="0"/>
+      <dgm:spPr/>
+    </dgm:pt>
+    <dgm:pt modelId="{8FD62890-AE24-410F-A25C-C935AAB78640}" type="pres">
+      <dgm:prSet presAssocID="{58FEE20F-513D-4E45-8F72-82C2E6FB035E}" presName="bgRect" presStyleLbl="bgShp" presStyleIdx="0" presStyleCnt="4"/>
+      <dgm:spPr/>
+    </dgm:pt>
+    <dgm:pt modelId="{B589D583-2A69-459C-9637-1929ED43ED31}" type="pres">
+      <dgm:prSet presAssocID="{58FEE20F-513D-4E45-8F72-82C2E6FB035E}" presName="iconRect" presStyleLbl="node1" presStyleIdx="0" presStyleCnt="4"/>
+      <dgm:spPr>
+        <a:blipFill>
+          <a:blip xmlns:r="http://schemas.openxmlformats.org/officeDocument/2006/relationships">
+            <a:extLst>
+              <a:ext uri="{28A0092B-C50C-407E-A947-70E740481C1C}">
+                <a14:useLocalDpi xmlns:a14="http://schemas.microsoft.com/office/drawing/2010/main" val="0"/>
+              </a:ext>
+              <a:ext uri="{96DAC541-7B7A-43D3-8B79-37D633B846F1}">
+                <asvg:svgBlip xmlns:asvg="http://schemas.microsoft.com/office/drawing/2016/SVG/main" r:embed="rId1"/>
+              </a:ext>
+            </a:extLst>
+          </a:blip>
+          <a:stretch>
+            <a:fillRect/>
+          </a:stretch>
+        </a:blipFill>
+      </dgm:spPr>
+      <dgm:extLst>
+        <a:ext uri="{E40237B7-FDA0-4F09-8148-C483321AD2D9}">
+          <dgm14:cNvPr xmlns:dgm14="http://schemas.microsoft.com/office/drawing/2010/diagram" id="0" name="" descr="Open Hand with Plant"/>
+        </a:ext>
+      </dgm:extLst>
+    </dgm:pt>
+    <dgm:pt modelId="{C96EBB39-321D-40A9-B987-DAE61EC26D2A}" type="pres">
+      <dgm:prSet presAssocID="{58FEE20F-513D-4E45-8F72-82C2E6FB035E}" presName="spaceRect" presStyleCnt="0"/>
+      <dgm:spPr/>
+    </dgm:pt>
+    <dgm:pt modelId="{00EB0889-DE8C-4513-A8A6-74CFC69E5371}" type="pres">
+      <dgm:prSet presAssocID="{58FEE20F-513D-4E45-8F72-82C2E6FB035E}" presName="parTx" presStyleLbl="revTx" presStyleIdx="0" presStyleCnt="4">
+        <dgm:presLayoutVars>
+          <dgm:chMax val="0"/>
+          <dgm:chPref val="0"/>
+        </dgm:presLayoutVars>
+      </dgm:prSet>
+      <dgm:spPr/>
+    </dgm:pt>
+    <dgm:pt modelId="{43006743-CF4A-4FFB-BF0B-AF7EDD7C0711}" type="pres">
+      <dgm:prSet presAssocID="{87B34B02-B9B5-4E74-B61D-E2486C3304B2}" presName="sibTrans" presStyleCnt="0"/>
+      <dgm:spPr/>
+    </dgm:pt>
+    <dgm:pt modelId="{742E105C-739A-4F7C-9FE5-28387E48BACD}" type="pres">
+      <dgm:prSet presAssocID="{9075FDAA-3588-4131-A5D8-CEE335E456DF}" presName="compNode" presStyleCnt="0"/>
+      <dgm:spPr/>
+    </dgm:pt>
+    <dgm:pt modelId="{F189B44B-C525-4CA3-9293-E849B197E953}" type="pres">
+      <dgm:prSet presAssocID="{9075FDAA-3588-4131-A5D8-CEE335E456DF}" presName="bgRect" presStyleLbl="bgShp" presStyleIdx="1" presStyleCnt="4"/>
+      <dgm:spPr/>
+    </dgm:pt>
+    <dgm:pt modelId="{409B4AD1-DEAC-448B-8192-21267B86BF35}" type="pres">
+      <dgm:prSet presAssocID="{9075FDAA-3588-4131-A5D8-CEE335E456DF}" presName="iconRect" presStyleLbl="node1" presStyleIdx="1" presStyleCnt="4"/>
+      <dgm:spPr>
+        <a:blipFill>
+          <a:blip xmlns:r="http://schemas.openxmlformats.org/officeDocument/2006/relationships">
+            <a:extLst>
+              <a:ext uri="{28A0092B-C50C-407E-A947-70E740481C1C}">
+                <a14:useLocalDpi xmlns:a14="http://schemas.microsoft.com/office/drawing/2010/main" val="0"/>
+              </a:ext>
+              <a:ext uri="{96DAC541-7B7A-43D3-8B79-37D633B846F1}">
+                <asvg:svgBlip xmlns:asvg="http://schemas.microsoft.com/office/drawing/2016/SVG/main" r:embed="rId2"/>
+              </a:ext>
+            </a:extLst>
+          </a:blip>
+          <a:stretch>
+            <a:fillRect/>
+          </a:stretch>
+        </a:blipFill>
+      </dgm:spPr>
+      <dgm:extLst>
+        <a:ext uri="{E40237B7-FDA0-4F09-8148-C483321AD2D9}">
+          <dgm14:cNvPr xmlns:dgm14="http://schemas.microsoft.com/office/drawing/2010/diagram" id="0" name="" descr="Dice"/>
+        </a:ext>
+      </dgm:extLst>
+    </dgm:pt>
+    <dgm:pt modelId="{33D670B9-7E1B-4DD0-A350-9DB287942F98}" type="pres">
+      <dgm:prSet presAssocID="{9075FDAA-3588-4131-A5D8-CEE335E456DF}" presName="spaceRect" presStyleCnt="0"/>
+      <dgm:spPr/>
+    </dgm:pt>
+    <dgm:pt modelId="{1F9E80A8-432E-4401-8076-92E359975776}" type="pres">
+      <dgm:prSet presAssocID="{9075FDAA-3588-4131-A5D8-CEE335E456DF}" presName="parTx" presStyleLbl="revTx" presStyleIdx="1" presStyleCnt="4">
+        <dgm:presLayoutVars>
+          <dgm:chMax val="0"/>
+          <dgm:chPref val="0"/>
+        </dgm:presLayoutVars>
+      </dgm:prSet>
+      <dgm:spPr/>
+    </dgm:pt>
+    <dgm:pt modelId="{68069065-42A0-425E-A969-DBF7F1DA5F61}" type="pres">
+      <dgm:prSet presAssocID="{AE88F968-EF11-4BE6-B074-07EA0E88B477}" presName="sibTrans" presStyleCnt="0"/>
+      <dgm:spPr/>
+    </dgm:pt>
+    <dgm:pt modelId="{0213F555-BC14-47D8-A174-4BB9E6B9D13C}" type="pres">
+      <dgm:prSet presAssocID="{3DD4DC91-14A3-404D-8965-F4B749FA413B}" presName="compNode" presStyleCnt="0"/>
+      <dgm:spPr/>
+    </dgm:pt>
+    <dgm:pt modelId="{F3A6C3D4-5A7D-403D-95E9-E5EE03B2296A}" type="pres">
+      <dgm:prSet presAssocID="{3DD4DC91-14A3-404D-8965-F4B749FA413B}" presName="bgRect" presStyleLbl="bgShp" presStyleIdx="2" presStyleCnt="4"/>
+      <dgm:spPr/>
+    </dgm:pt>
+    <dgm:pt modelId="{604D2F39-4803-4D5B-9C61-6464EAD35A26}" type="pres">
+      <dgm:prSet presAssocID="{3DD4DC91-14A3-404D-8965-F4B749FA413B}" presName="iconRect" presStyleLbl="node1" presStyleIdx="2" presStyleCnt="4"/>
+      <dgm:spPr>
+        <a:blipFill>
+          <a:blip xmlns:r="http://schemas.openxmlformats.org/officeDocument/2006/relationships">
+            <a:extLst>
+              <a:ext uri="{28A0092B-C50C-407E-A947-70E740481C1C}">
+                <a14:useLocalDpi xmlns:a14="http://schemas.microsoft.com/office/drawing/2010/main" val="0"/>
+              </a:ext>
+              <a:ext uri="{96DAC541-7B7A-43D3-8B79-37D633B846F1}">
+                <asvg:svgBlip xmlns:asvg="http://schemas.microsoft.com/office/drawing/2016/SVG/main" r:embed="rId3"/>
+              </a:ext>
+            </a:extLst>
+          </a:blip>
+          <a:stretch>
+            <a:fillRect/>
+          </a:stretch>
+        </a:blipFill>
+      </dgm:spPr>
+      <dgm:extLst>
+        <a:ext uri="{E40237B7-FDA0-4F09-8148-C483321AD2D9}">
+          <dgm14:cNvPr xmlns:dgm14="http://schemas.microsoft.com/office/drawing/2010/diagram" id="0" name="" descr="Calculator"/>
+        </a:ext>
+      </dgm:extLst>
+    </dgm:pt>
+    <dgm:pt modelId="{C22C38A8-D8A0-4E52-A6CB-5A1233BA8F6C}" type="pres">
+      <dgm:prSet presAssocID="{3DD4DC91-14A3-404D-8965-F4B749FA413B}" presName="spaceRect" presStyleCnt="0"/>
+      <dgm:spPr/>
+    </dgm:pt>
+    <dgm:pt modelId="{F3047127-4C9F-4BEC-BFB7-4F7345ACAD4B}" type="pres">
+      <dgm:prSet presAssocID="{3DD4DC91-14A3-404D-8965-F4B749FA413B}" presName="parTx" presStyleLbl="revTx" presStyleIdx="2" presStyleCnt="4">
+        <dgm:presLayoutVars>
+          <dgm:chMax val="0"/>
+          <dgm:chPref val="0"/>
+        </dgm:presLayoutVars>
+      </dgm:prSet>
+      <dgm:spPr/>
+    </dgm:pt>
+    <dgm:pt modelId="{6F0171E4-5631-4057-AFB2-D0B5E1C96A13}" type="pres">
+      <dgm:prSet presAssocID="{D7C5D62E-02B7-4219-8F7C-76AE8EF73D11}" presName="sibTrans" presStyleCnt="0"/>
+      <dgm:spPr/>
+    </dgm:pt>
+    <dgm:pt modelId="{613B1C29-C49E-438F-BE03-8B48653D15BA}" type="pres">
+      <dgm:prSet presAssocID="{1F94A90F-B8CD-4AFA-9907-A240B6C4DEE1}" presName="compNode" presStyleCnt="0"/>
+      <dgm:spPr/>
+    </dgm:pt>
+    <dgm:pt modelId="{1D986AE3-C9CD-4081-80C5-DB2E38EF62E2}" type="pres">
+      <dgm:prSet presAssocID="{1F94A90F-B8CD-4AFA-9907-A240B6C4DEE1}" presName="bgRect" presStyleLbl="bgShp" presStyleIdx="3" presStyleCnt="4"/>
+      <dgm:spPr/>
+    </dgm:pt>
+    <dgm:pt modelId="{ABD8ECEC-2B13-4F88-94CB-79B02C4756E9}" type="pres">
+      <dgm:prSet presAssocID="{1F94A90F-B8CD-4AFA-9907-A240B6C4DEE1}" presName="iconRect" presStyleLbl="node1" presStyleIdx="3" presStyleCnt="4"/>
+      <dgm:spPr>
+        <a:blipFill>
+          <a:blip xmlns:r="http://schemas.openxmlformats.org/officeDocument/2006/relationships">
+            <a:extLst>
+              <a:ext uri="{28A0092B-C50C-407E-A947-70E740481C1C}">
+                <a14:useLocalDpi xmlns:a14="http://schemas.microsoft.com/office/drawing/2010/main" val="0"/>
+              </a:ext>
+              <a:ext uri="{96DAC541-7B7A-43D3-8B79-37D633B846F1}">
+                <asvg:svgBlip xmlns:asvg="http://schemas.microsoft.com/office/drawing/2016/SVG/main" r:embed="rId4"/>
+              </a:ext>
+            </a:extLst>
+          </a:blip>
+          <a:stretch>
+            <a:fillRect/>
+          </a:stretch>
+        </a:blipFill>
+      </dgm:spPr>
+      <dgm:extLst>
+        <a:ext uri="{E40237B7-FDA0-4F09-8148-C483321AD2D9}">
+          <dgm14:cNvPr xmlns:dgm14="http://schemas.microsoft.com/office/drawing/2010/diagram" id="0" name="" descr="DNA"/>
+        </a:ext>
+      </dgm:extLst>
+    </dgm:pt>
+    <dgm:pt modelId="{B01D0083-C855-46CF-897F-B99441BCE224}" type="pres">
+      <dgm:prSet presAssocID="{1F94A90F-B8CD-4AFA-9907-A240B6C4DEE1}" presName="spaceRect" presStyleCnt="0"/>
+      <dgm:spPr/>
+    </dgm:pt>
+    <dgm:pt modelId="{F689134D-D77E-4E4D-846B-CC78830EBE1C}" type="pres">
+      <dgm:prSet presAssocID="{1F94A90F-B8CD-4AFA-9907-A240B6C4DEE1}" presName="parTx" presStyleLbl="revTx" presStyleIdx="3" presStyleCnt="4">
+        <dgm:presLayoutVars>
+          <dgm:chMax val="0"/>
+          <dgm:chPref val="0"/>
+        </dgm:presLayoutVars>
+      </dgm:prSet>
+      <dgm:spPr/>
+    </dgm:pt>
+  </dgm:ptLst>
+  <dgm:cxnLst>
+    <dgm:cxn modelId="{B8C44C1B-1A17-4643-85E0-A165799CEE8B}" type="presOf" srcId="{3DD4DC91-14A3-404D-8965-F4B749FA413B}" destId="{F3047127-4C9F-4BEC-BFB7-4F7345ACAD4B}" srcOrd="0" destOrd="0" presId="urn:microsoft.com/office/officeart/2018/2/layout/IconVerticalSolidList"/>
+    <dgm:cxn modelId="{1F052C30-806D-4442-B410-806B1A4B6A92}" type="presOf" srcId="{1F94A90F-B8CD-4AFA-9907-A240B6C4DEE1}" destId="{F689134D-D77E-4E4D-846B-CC78830EBE1C}" srcOrd="0" destOrd="0" presId="urn:microsoft.com/office/officeart/2018/2/layout/IconVerticalSolidList"/>
+    <dgm:cxn modelId="{98547060-D7E5-4115-B70B-EFC723F6577A}" srcId="{07985E3B-18EC-4819-A3CE-94663A4AE07A}" destId="{1F94A90F-B8CD-4AFA-9907-A240B6C4DEE1}" srcOrd="3" destOrd="0" parTransId="{BB041ED1-A60C-48A8-AE03-B0C8D3371DCB}" sibTransId="{4B623ECE-16A1-47E8-8F9E-A1ED76693221}"/>
+    <dgm:cxn modelId="{77B27867-8857-449E-84C6-05B1F23F9BEC}" srcId="{07985E3B-18EC-4819-A3CE-94663A4AE07A}" destId="{58FEE20F-513D-4E45-8F72-82C2E6FB035E}" srcOrd="0" destOrd="0" parTransId="{B7031ADE-18DD-4AD8-A5BD-B27DA39738B3}" sibTransId="{87B34B02-B9B5-4E74-B61D-E2486C3304B2}"/>
+    <dgm:cxn modelId="{76418873-4F43-4923-8D91-AFF19D0DFB70}" type="presOf" srcId="{9075FDAA-3588-4131-A5D8-CEE335E456DF}" destId="{1F9E80A8-432E-4401-8076-92E359975776}" srcOrd="0" destOrd="0" presId="urn:microsoft.com/office/officeart/2018/2/layout/IconVerticalSolidList"/>
+    <dgm:cxn modelId="{301D2CC0-D53E-4790-93E5-6DAF861D518D}" type="presOf" srcId="{07985E3B-18EC-4819-A3CE-94663A4AE07A}" destId="{75597CDD-31D8-47CC-92B9-F6E56AFD8233}" srcOrd="0" destOrd="0" presId="urn:microsoft.com/office/officeart/2018/2/layout/IconVerticalSolidList"/>
+    <dgm:cxn modelId="{0121CFDA-DD2E-4A6F-82BA-143AD6219642}" type="presOf" srcId="{58FEE20F-513D-4E45-8F72-82C2E6FB035E}" destId="{00EB0889-DE8C-4513-A8A6-74CFC69E5371}" srcOrd="0" destOrd="0" presId="urn:microsoft.com/office/officeart/2018/2/layout/IconVerticalSolidList"/>
+    <dgm:cxn modelId="{7EB32AF4-E5D1-4881-A898-C26E2C4E235D}" srcId="{07985E3B-18EC-4819-A3CE-94663A4AE07A}" destId="{3DD4DC91-14A3-404D-8965-F4B749FA413B}" srcOrd="2" destOrd="0" parTransId="{CE4630D2-6B22-4475-9232-0F70E61A8AA0}" sibTransId="{D7C5D62E-02B7-4219-8F7C-76AE8EF73D11}"/>
+    <dgm:cxn modelId="{59F2C8F9-7505-409D-B540-AF32B4D2E1CB}" srcId="{07985E3B-18EC-4819-A3CE-94663A4AE07A}" destId="{9075FDAA-3588-4131-A5D8-CEE335E456DF}" srcOrd="1" destOrd="0" parTransId="{113F6F72-0C03-484D-A1FD-6107579F0265}" sibTransId="{AE88F968-EF11-4BE6-B074-07EA0E88B477}"/>
+    <dgm:cxn modelId="{AA6B4443-01E9-4DC5-9642-F7E96057ACB7}" type="presParOf" srcId="{75597CDD-31D8-47CC-92B9-F6E56AFD8233}" destId="{7E10FE87-D86B-4394-9B3D-FAB1A34F36BD}" srcOrd="0" destOrd="0" presId="urn:microsoft.com/office/officeart/2018/2/layout/IconVerticalSolidList"/>
+    <dgm:cxn modelId="{48841981-8EE9-4C9E-A0BF-75954B4A219B}" type="presParOf" srcId="{7E10FE87-D86B-4394-9B3D-FAB1A34F36BD}" destId="{8FD62890-AE24-410F-A25C-C935AAB78640}" srcOrd="0" destOrd="0" presId="urn:microsoft.com/office/officeart/2018/2/layout/IconVerticalSolidList"/>
+    <dgm:cxn modelId="{592E8204-596C-49DB-9707-B8EAF242A007}" type="presParOf" srcId="{7E10FE87-D86B-4394-9B3D-FAB1A34F36BD}" destId="{B589D583-2A69-459C-9637-1929ED43ED31}" srcOrd="1" destOrd="0" presId="urn:microsoft.com/office/officeart/2018/2/layout/IconVerticalSolidList"/>
+    <dgm:cxn modelId="{DD36E6C6-AF88-4707-838C-5846DD21816C}" type="presParOf" srcId="{7E10FE87-D86B-4394-9B3D-FAB1A34F36BD}" destId="{C96EBB39-321D-40A9-B987-DAE61EC26D2A}" srcOrd="2" destOrd="0" presId="urn:microsoft.com/office/officeart/2018/2/layout/IconVerticalSolidList"/>
+    <dgm:cxn modelId="{BB5684D2-4CDA-45DA-BAF0-899901B0EC51}" type="presParOf" srcId="{7E10FE87-D86B-4394-9B3D-FAB1A34F36BD}" destId="{00EB0889-DE8C-4513-A8A6-74CFC69E5371}" srcOrd="3" destOrd="0" presId="urn:microsoft.com/office/officeart/2018/2/layout/IconVerticalSolidList"/>
+    <dgm:cxn modelId="{F1CC326D-206A-400F-A38E-778F5E9B9061}" type="presParOf" srcId="{75597CDD-31D8-47CC-92B9-F6E56AFD8233}" destId="{43006743-CF4A-4FFB-BF0B-AF7EDD7C0711}" srcOrd="1" destOrd="0" presId="urn:microsoft.com/office/officeart/2018/2/layout/IconVerticalSolidList"/>
+    <dgm:cxn modelId="{AC1E7CB2-01CE-4512-8166-FE53E1050A05}" type="presParOf" srcId="{75597CDD-31D8-47CC-92B9-F6E56AFD8233}" destId="{742E105C-739A-4F7C-9FE5-28387E48BACD}" srcOrd="2" destOrd="0" presId="urn:microsoft.com/office/officeart/2018/2/layout/IconVerticalSolidList"/>
+    <dgm:cxn modelId="{4F249DBE-C292-452F-95DF-E7D46F1DC448}" type="presParOf" srcId="{742E105C-739A-4F7C-9FE5-28387E48BACD}" destId="{F189B44B-C525-4CA3-9293-E849B197E953}" srcOrd="0" destOrd="0" presId="urn:microsoft.com/office/officeart/2018/2/layout/IconVerticalSolidList"/>
+    <dgm:cxn modelId="{6EDC187F-94D9-4E25-9483-0D3E7B04CEB7}" type="presParOf" srcId="{742E105C-739A-4F7C-9FE5-28387E48BACD}" destId="{409B4AD1-DEAC-448B-8192-21267B86BF35}" srcOrd="1" destOrd="0" presId="urn:microsoft.com/office/officeart/2018/2/layout/IconVerticalSolidList"/>
+    <dgm:cxn modelId="{4D033901-D954-42D7-9F5A-BDE40CC7FB19}" type="presParOf" srcId="{742E105C-739A-4F7C-9FE5-28387E48BACD}" destId="{33D670B9-7E1B-4DD0-A350-9DB287942F98}" srcOrd="2" destOrd="0" presId="urn:microsoft.com/office/officeart/2018/2/layout/IconVerticalSolidList"/>
+    <dgm:cxn modelId="{BA52A21F-DD83-4B11-A71E-2877A6A72731}" type="presParOf" srcId="{742E105C-739A-4F7C-9FE5-28387E48BACD}" destId="{1F9E80A8-432E-4401-8076-92E359975776}" srcOrd="3" destOrd="0" presId="urn:microsoft.com/office/officeart/2018/2/layout/IconVerticalSolidList"/>
+    <dgm:cxn modelId="{81DBF283-A8C1-44CF-AB71-B94D078582DE}" type="presParOf" srcId="{75597CDD-31D8-47CC-92B9-F6E56AFD8233}" destId="{68069065-42A0-425E-A969-DBF7F1DA5F61}" srcOrd="3" destOrd="0" presId="urn:microsoft.com/office/officeart/2018/2/layout/IconVerticalSolidList"/>
+    <dgm:cxn modelId="{B60A5E74-7A5A-4B73-9C2A-CDCA679D0D15}" type="presParOf" srcId="{75597CDD-31D8-47CC-92B9-F6E56AFD8233}" destId="{0213F555-BC14-47D8-A174-4BB9E6B9D13C}" srcOrd="4" destOrd="0" presId="urn:microsoft.com/office/officeart/2018/2/layout/IconVerticalSolidList"/>
+    <dgm:cxn modelId="{7AD64DA7-582E-4F33-BA7C-837C40324694}" type="presParOf" srcId="{0213F555-BC14-47D8-A174-4BB9E6B9D13C}" destId="{F3A6C3D4-5A7D-403D-95E9-E5EE03B2296A}" srcOrd="0" destOrd="0" presId="urn:microsoft.com/office/officeart/2018/2/layout/IconVerticalSolidList"/>
+    <dgm:cxn modelId="{41F44B15-2F35-4C39-A5B0-85C44A8B55FC}" type="presParOf" srcId="{0213F555-BC14-47D8-A174-4BB9E6B9D13C}" destId="{604D2F39-4803-4D5B-9C61-6464EAD35A26}" srcOrd="1" destOrd="0" presId="urn:microsoft.com/office/officeart/2018/2/layout/IconVerticalSolidList"/>
+    <dgm:cxn modelId="{4CADBFCA-B677-4738-B50C-950DDE38BF0B}" type="presParOf" srcId="{0213F555-BC14-47D8-A174-4BB9E6B9D13C}" destId="{C22C38A8-D8A0-4E52-A6CB-5A1233BA8F6C}" srcOrd="2" destOrd="0" presId="urn:microsoft.com/office/officeart/2018/2/layout/IconVerticalSolidList"/>
+    <dgm:cxn modelId="{C478BC98-5EEC-4A2A-B332-6B97D7F2706A}" type="presParOf" srcId="{0213F555-BC14-47D8-A174-4BB9E6B9D13C}" destId="{F3047127-4C9F-4BEC-BFB7-4F7345ACAD4B}" srcOrd="3" destOrd="0" presId="urn:microsoft.com/office/officeart/2018/2/layout/IconVerticalSolidList"/>
+    <dgm:cxn modelId="{15D366AE-F9E7-4A5C-A67F-216AC7C1FDE4}" type="presParOf" srcId="{75597CDD-31D8-47CC-92B9-F6E56AFD8233}" destId="{6F0171E4-5631-4057-AFB2-D0B5E1C96A13}" srcOrd="5" destOrd="0" presId="urn:microsoft.com/office/officeart/2018/2/layout/IconVerticalSolidList"/>
+    <dgm:cxn modelId="{BFCBC96C-77CF-4855-9D35-38F2482E39BB}" type="presParOf" srcId="{75597CDD-31D8-47CC-92B9-F6E56AFD8233}" destId="{613B1C29-C49E-438F-BE03-8B48653D15BA}" srcOrd="6" destOrd="0" presId="urn:microsoft.com/office/officeart/2018/2/layout/IconVerticalSolidList"/>
+    <dgm:cxn modelId="{6D065D3A-A301-4B5B-B228-7AD3715AFC82}" type="presParOf" srcId="{613B1C29-C49E-438F-BE03-8B48653D15BA}" destId="{1D986AE3-C9CD-4081-80C5-DB2E38EF62E2}" srcOrd="0" destOrd="0" presId="urn:microsoft.com/office/officeart/2018/2/layout/IconVerticalSolidList"/>
+    <dgm:cxn modelId="{BFD385AF-9D10-485C-9764-DD0B4FA3B10E}" type="presParOf" srcId="{613B1C29-C49E-438F-BE03-8B48653D15BA}" destId="{ABD8ECEC-2B13-4F88-94CB-79B02C4756E9}" srcOrd="1" destOrd="0" presId="urn:microsoft.com/office/officeart/2018/2/layout/IconVerticalSolidList"/>
+    <dgm:cxn modelId="{2DBEF704-E283-43FD-9641-703BB4783A7E}" type="presParOf" srcId="{613B1C29-C49E-438F-BE03-8B48653D15BA}" destId="{B01D0083-C855-46CF-897F-B99441BCE224}" srcOrd="2" destOrd="0" presId="urn:microsoft.com/office/officeart/2018/2/layout/IconVerticalSolidList"/>
+    <dgm:cxn modelId="{D7B2F7E7-9A91-4054-B112-5CB2F6329CA6}" type="presParOf" srcId="{613B1C29-C49E-438F-BE03-8B48653D15BA}" destId="{F689134D-D77E-4E4D-846B-CC78830EBE1C}" srcOrd="3" destOrd="0" presId="urn:microsoft.com/office/officeart/2018/2/layout/IconVerticalSolidList"/>
+  </dgm:cxnLst>
+  <dgm:bg/>
+  <dgm:whole/>
+  <dgm:extLst>
+    <a:ext uri="http://schemas.microsoft.com/office/drawing/2008/diagram">
+      <dsp:dataModelExt xmlns:dsp="http://schemas.microsoft.com/office/drawing/2008/diagram" relId="rId6" minVer="http://schemas.openxmlformats.org/drawingml/2006/diagram"/>
+    </a:ext>
+  </dgm:extLst>
+</dgm:dataModel>
+</file>
+
+<file path=ppt/diagrams/data2.xml><?xml version="1.0" encoding="utf-8"?>
 <dgm:dataModel xmlns:dgm="http://schemas.openxmlformats.org/drawingml/2006/diagram" xmlns:a="http://schemas.openxmlformats.org/drawingml/2006/main">
   <dgm:ptLst>
     <dgm:pt modelId="{1AC90C0C-0A34-44C4-A888-A760DDCDE8EF}" type="doc">
@@ -2084,7 +3260,7 @@
 </dgm:dataModel>
 </file>
 
-<file path=ppt/diagrams/data2.xml><?xml version="1.0" encoding="utf-8"?>
+<file path=ppt/diagrams/data3.xml><?xml version="1.0" encoding="utf-8"?>
 <dgm:dataModel xmlns:dgm="http://schemas.openxmlformats.org/drawingml/2006/diagram" xmlns:a="http://schemas.openxmlformats.org/drawingml/2006/main">
   <dgm:ptLst>
     <dgm:pt modelId="{9A956502-3703-4132-AC03-69BF4A493969}" type="doc">
@@ -2326,6 +3502,654 @@
 </file>
 
 <file path=ppt/diagrams/drawing1.xml><?xml version="1.0" encoding="utf-8"?>
+<dsp:drawing xmlns:dgm="http://schemas.openxmlformats.org/drawingml/2006/diagram" xmlns:dsp="http://schemas.microsoft.com/office/drawing/2008/diagram" xmlns:a="http://schemas.openxmlformats.org/drawingml/2006/main">
+  <dsp:spTree>
+    <dsp:nvGrpSpPr>
+      <dsp:cNvPr id="0" name=""/>
+      <dsp:cNvGrpSpPr/>
+    </dsp:nvGrpSpPr>
+    <dsp:grpSpPr/>
+    <dsp:sp modelId="{8FD62890-AE24-410F-A25C-C935AAB78640}">
+      <dsp:nvSpPr>
+        <dsp:cNvPr id="0" name=""/>
+        <dsp:cNvSpPr/>
+      </dsp:nvSpPr>
+      <dsp:spPr>
+        <a:xfrm>
+          <a:off x="0" y="1805"/>
+          <a:ext cx="10515600" cy="915310"/>
+        </a:xfrm>
+        <a:prstGeom prst="roundRect">
+          <a:avLst>
+            <a:gd name="adj" fmla="val 10000"/>
+          </a:avLst>
+        </a:prstGeom>
+        <a:solidFill>
+          <a:schemeClr val="accent1">
+            <a:tint val="40000"/>
+            <a:hueOff val="0"/>
+            <a:satOff val="0"/>
+            <a:lumOff val="0"/>
+            <a:alphaOff val="0"/>
+          </a:schemeClr>
+        </a:solidFill>
+        <a:ln>
+          <a:noFill/>
+        </a:ln>
+        <a:effectLst/>
+      </dsp:spPr>
+      <dsp:style>
+        <a:lnRef idx="0">
+          <a:scrgbClr r="0" g="0" b="0"/>
+        </a:lnRef>
+        <a:fillRef idx="1">
+          <a:scrgbClr r="0" g="0" b="0"/>
+        </a:fillRef>
+        <a:effectRef idx="0">
+          <a:scrgbClr r="0" g="0" b="0"/>
+        </a:effectRef>
+        <a:fontRef idx="minor"/>
+      </dsp:style>
+    </dsp:sp>
+    <dsp:sp modelId="{B589D583-2A69-459C-9637-1929ED43ED31}">
+      <dsp:nvSpPr>
+        <dsp:cNvPr id="0" name=""/>
+        <dsp:cNvSpPr/>
+      </dsp:nvSpPr>
+      <dsp:spPr>
+        <a:xfrm>
+          <a:off x="276881" y="207750"/>
+          <a:ext cx="503420" cy="503420"/>
+        </a:xfrm>
+        <a:prstGeom prst="rect">
+          <a:avLst/>
+        </a:prstGeom>
+        <a:blipFill>
+          <a:blip xmlns:r="http://schemas.openxmlformats.org/officeDocument/2006/relationships">
+            <a:extLst>
+              <a:ext uri="{28A0092B-C50C-407E-A947-70E740481C1C}">
+                <a14:useLocalDpi xmlns:a14="http://schemas.microsoft.com/office/drawing/2010/main" val="0"/>
+              </a:ext>
+              <a:ext uri="{96DAC541-7B7A-43D3-8B79-37D633B846F1}">
+                <asvg:svgBlip xmlns:asvg="http://schemas.microsoft.com/office/drawing/2016/SVG/main" r:embed="rId1"/>
+              </a:ext>
+            </a:extLst>
+          </a:blip>
+          <a:stretch>
+            <a:fillRect/>
+          </a:stretch>
+        </a:blipFill>
+        <a:ln w="19050" cap="flat" cmpd="sng" algn="ctr">
+          <a:solidFill>
+            <a:schemeClr val="lt1">
+              <a:hueOff val="0"/>
+              <a:satOff val="0"/>
+              <a:lumOff val="0"/>
+              <a:alphaOff val="0"/>
+            </a:schemeClr>
+          </a:solidFill>
+          <a:prstDash val="solid"/>
+          <a:miter lim="800000"/>
+        </a:ln>
+        <a:effectLst/>
+      </dsp:spPr>
+      <dsp:style>
+        <a:lnRef idx="2">
+          <a:scrgbClr r="0" g="0" b="0"/>
+        </a:lnRef>
+        <a:fillRef idx="1">
+          <a:scrgbClr r="0" g="0" b="0"/>
+        </a:fillRef>
+        <a:effectRef idx="0">
+          <a:scrgbClr r="0" g="0" b="0"/>
+        </a:effectRef>
+        <a:fontRef idx="minor">
+          <a:schemeClr val="lt1"/>
+        </a:fontRef>
+      </dsp:style>
+    </dsp:sp>
+    <dsp:sp modelId="{00EB0889-DE8C-4513-A8A6-74CFC69E5371}">
+      <dsp:nvSpPr>
+        <dsp:cNvPr id="0" name=""/>
+        <dsp:cNvSpPr/>
+      </dsp:nvSpPr>
+      <dsp:spPr>
+        <a:xfrm>
+          <a:off x="1057183" y="1805"/>
+          <a:ext cx="9458416" cy="915310"/>
+        </a:xfrm>
+        <a:prstGeom prst="rect">
+          <a:avLst/>
+        </a:prstGeom>
+        <a:noFill/>
+        <a:ln>
+          <a:noFill/>
+        </a:ln>
+        <a:effectLst/>
+      </dsp:spPr>
+      <dsp:style>
+        <a:lnRef idx="0">
+          <a:scrgbClr r="0" g="0" b="0"/>
+        </a:lnRef>
+        <a:fillRef idx="0">
+          <a:scrgbClr r="0" g="0" b="0"/>
+        </a:fillRef>
+        <a:effectRef idx="0">
+          <a:scrgbClr r="0" g="0" b="0"/>
+        </a:effectRef>
+        <a:fontRef idx="minor"/>
+      </dsp:style>
+      <dsp:txBody>
+        <a:bodyPr spcFirstLastPara="0" vert="horz" wrap="square" lIns="96870" tIns="96870" rIns="96870" bIns="96870" numCol="1" spcCol="1270" anchor="ctr" anchorCtr="0">
+          <a:noAutofit/>
+        </a:bodyPr>
+        <a:lstStyle/>
+        <a:p>
+          <a:pPr marL="0" lvl="0" indent="0" algn="l" defTabSz="977900">
+            <a:lnSpc>
+              <a:spcPct val="100000"/>
+            </a:lnSpc>
+            <a:spcBef>
+              <a:spcPct val="0"/>
+            </a:spcBef>
+            <a:spcAft>
+              <a:spcPct val="35000"/>
+            </a:spcAft>
+            <a:buNone/>
+          </a:pPr>
+          <a:r>
+            <a:rPr lang="en-US" sz="2200" kern="1200"/>
+            <a:t>The Problem (Raw Stats): A +5.0 scoring margin is terrible for a 1-seed, but incredible for a 13-seed. Raw stats lack context. The </a:t>
+          </a:r>
+        </a:p>
+      </dsp:txBody>
+      <dsp:txXfrm>
+        <a:off x="1057183" y="1805"/>
+        <a:ext cx="9458416" cy="915310"/>
+      </dsp:txXfrm>
+    </dsp:sp>
+    <dsp:sp modelId="{F189B44B-C525-4CA3-9293-E849B197E953}">
+      <dsp:nvSpPr>
+        <dsp:cNvPr id="0" name=""/>
+        <dsp:cNvSpPr/>
+      </dsp:nvSpPr>
+      <dsp:spPr>
+        <a:xfrm>
+          <a:off x="0" y="1145944"/>
+          <a:ext cx="10515600" cy="915310"/>
+        </a:xfrm>
+        <a:prstGeom prst="roundRect">
+          <a:avLst>
+            <a:gd name="adj" fmla="val 10000"/>
+          </a:avLst>
+        </a:prstGeom>
+        <a:solidFill>
+          <a:schemeClr val="accent1">
+            <a:tint val="40000"/>
+            <a:hueOff val="0"/>
+            <a:satOff val="0"/>
+            <a:lumOff val="0"/>
+            <a:alphaOff val="0"/>
+          </a:schemeClr>
+        </a:solidFill>
+        <a:ln>
+          <a:noFill/>
+        </a:ln>
+        <a:effectLst/>
+      </dsp:spPr>
+      <dsp:style>
+        <a:lnRef idx="0">
+          <a:scrgbClr r="0" g="0" b="0"/>
+        </a:lnRef>
+        <a:fillRef idx="1">
+          <a:scrgbClr r="0" g="0" b="0"/>
+        </a:fillRef>
+        <a:effectRef idx="0">
+          <a:scrgbClr r="0" g="0" b="0"/>
+        </a:effectRef>
+        <a:fontRef idx="minor"/>
+      </dsp:style>
+    </dsp:sp>
+    <dsp:sp modelId="{409B4AD1-DEAC-448B-8192-21267B86BF35}">
+      <dsp:nvSpPr>
+        <dsp:cNvPr id="0" name=""/>
+        <dsp:cNvSpPr/>
+      </dsp:nvSpPr>
+      <dsp:spPr>
+        <a:xfrm>
+          <a:off x="276881" y="1351889"/>
+          <a:ext cx="503420" cy="503420"/>
+        </a:xfrm>
+        <a:prstGeom prst="rect">
+          <a:avLst/>
+        </a:prstGeom>
+        <a:blipFill>
+          <a:blip xmlns:r="http://schemas.openxmlformats.org/officeDocument/2006/relationships">
+            <a:extLst>
+              <a:ext uri="{28A0092B-C50C-407E-A947-70E740481C1C}">
+                <a14:useLocalDpi xmlns:a14="http://schemas.microsoft.com/office/drawing/2010/main" val="0"/>
+              </a:ext>
+              <a:ext uri="{96DAC541-7B7A-43D3-8B79-37D633B846F1}">
+                <asvg:svgBlip xmlns:asvg="http://schemas.microsoft.com/office/drawing/2016/SVG/main" r:embed="rId2"/>
+              </a:ext>
+            </a:extLst>
+          </a:blip>
+          <a:stretch>
+            <a:fillRect/>
+          </a:stretch>
+        </a:blipFill>
+        <a:ln w="19050" cap="flat" cmpd="sng" algn="ctr">
+          <a:solidFill>
+            <a:schemeClr val="lt1">
+              <a:hueOff val="0"/>
+              <a:satOff val="0"/>
+              <a:lumOff val="0"/>
+              <a:alphaOff val="0"/>
+            </a:schemeClr>
+          </a:solidFill>
+          <a:prstDash val="solid"/>
+          <a:miter lim="800000"/>
+        </a:ln>
+        <a:effectLst/>
+      </dsp:spPr>
+      <dsp:style>
+        <a:lnRef idx="2">
+          <a:scrgbClr r="0" g="0" b="0"/>
+        </a:lnRef>
+        <a:fillRef idx="1">
+          <a:scrgbClr r="0" g="0" b="0"/>
+        </a:fillRef>
+        <a:effectRef idx="0">
+          <a:scrgbClr r="0" g="0" b="0"/>
+        </a:effectRef>
+        <a:fontRef idx="minor">
+          <a:schemeClr val="lt1"/>
+        </a:fontRef>
+      </dsp:style>
+    </dsp:sp>
+    <dsp:sp modelId="{1F9E80A8-432E-4401-8076-92E359975776}">
+      <dsp:nvSpPr>
+        <dsp:cNvPr id="0" name=""/>
+        <dsp:cNvSpPr/>
+      </dsp:nvSpPr>
+      <dsp:spPr>
+        <a:xfrm>
+          <a:off x="1057183" y="1145944"/>
+          <a:ext cx="9458416" cy="915310"/>
+        </a:xfrm>
+        <a:prstGeom prst="rect">
+          <a:avLst/>
+        </a:prstGeom>
+        <a:noFill/>
+        <a:ln>
+          <a:noFill/>
+        </a:ln>
+        <a:effectLst/>
+      </dsp:spPr>
+      <dsp:style>
+        <a:lnRef idx="0">
+          <a:scrgbClr r="0" g="0" b="0"/>
+        </a:lnRef>
+        <a:fillRef idx="0">
+          <a:scrgbClr r="0" g="0" b="0"/>
+        </a:fillRef>
+        <a:effectRef idx="0">
+          <a:scrgbClr r="0" g="0" b="0"/>
+        </a:effectRef>
+        <a:fontRef idx="minor"/>
+      </dsp:style>
+      <dsp:txBody>
+        <a:bodyPr spcFirstLastPara="0" vert="horz" wrap="square" lIns="96870" tIns="96870" rIns="96870" bIns="96870" numCol="1" spcCol="1270" anchor="ctr" anchorCtr="0">
+          <a:noAutofit/>
+        </a:bodyPr>
+        <a:lstStyle/>
+        <a:p>
+          <a:pPr marL="0" lvl="0" indent="0" algn="l" defTabSz="977900">
+            <a:lnSpc>
+              <a:spcPct val="100000"/>
+            </a:lnSpc>
+            <a:spcBef>
+              <a:spcPct val="0"/>
+            </a:spcBef>
+            <a:spcAft>
+              <a:spcPct val="35000"/>
+            </a:spcAft>
+            <a:buNone/>
+          </a:pPr>
+          <a:r>
+            <a:rPr lang="en-US" sz="2200" kern="1200"/>
+            <a:t>Solution (Tournament Averages): Calculate the mean metrics for only the teams that made the tournament that specific year. </a:t>
+          </a:r>
+        </a:p>
+      </dsp:txBody>
+      <dsp:txXfrm>
+        <a:off x="1057183" y="1145944"/>
+        <a:ext cx="9458416" cy="915310"/>
+      </dsp:txXfrm>
+    </dsp:sp>
+    <dsp:sp modelId="{F3A6C3D4-5A7D-403D-95E9-E5EE03B2296A}">
+      <dsp:nvSpPr>
+        <dsp:cNvPr id="0" name=""/>
+        <dsp:cNvSpPr/>
+      </dsp:nvSpPr>
+      <dsp:spPr>
+        <a:xfrm>
+          <a:off x="0" y="2290082"/>
+          <a:ext cx="10515600" cy="915310"/>
+        </a:xfrm>
+        <a:prstGeom prst="roundRect">
+          <a:avLst>
+            <a:gd name="adj" fmla="val 10000"/>
+          </a:avLst>
+        </a:prstGeom>
+        <a:solidFill>
+          <a:schemeClr val="accent1">
+            <a:tint val="40000"/>
+            <a:hueOff val="0"/>
+            <a:satOff val="0"/>
+            <a:lumOff val="0"/>
+            <a:alphaOff val="0"/>
+          </a:schemeClr>
+        </a:solidFill>
+        <a:ln>
+          <a:noFill/>
+        </a:ln>
+        <a:effectLst/>
+      </dsp:spPr>
+      <dsp:style>
+        <a:lnRef idx="0">
+          <a:scrgbClr r="0" g="0" b="0"/>
+        </a:lnRef>
+        <a:fillRef idx="1">
+          <a:scrgbClr r="0" g="0" b="0"/>
+        </a:fillRef>
+        <a:effectRef idx="0">
+          <a:scrgbClr r="0" g="0" b="0"/>
+        </a:effectRef>
+        <a:fontRef idx="minor"/>
+      </dsp:style>
+    </dsp:sp>
+    <dsp:sp modelId="{604D2F39-4803-4D5B-9C61-6464EAD35A26}">
+      <dsp:nvSpPr>
+        <dsp:cNvPr id="0" name=""/>
+        <dsp:cNvSpPr/>
+      </dsp:nvSpPr>
+      <dsp:spPr>
+        <a:xfrm>
+          <a:off x="276881" y="2496027"/>
+          <a:ext cx="503420" cy="503420"/>
+        </a:xfrm>
+        <a:prstGeom prst="rect">
+          <a:avLst/>
+        </a:prstGeom>
+        <a:blipFill>
+          <a:blip xmlns:r="http://schemas.openxmlformats.org/officeDocument/2006/relationships">
+            <a:extLst>
+              <a:ext uri="{28A0092B-C50C-407E-A947-70E740481C1C}">
+                <a14:useLocalDpi xmlns:a14="http://schemas.microsoft.com/office/drawing/2010/main" val="0"/>
+              </a:ext>
+              <a:ext uri="{96DAC541-7B7A-43D3-8B79-37D633B846F1}">
+                <asvg:svgBlip xmlns:asvg="http://schemas.microsoft.com/office/drawing/2016/SVG/main" r:embed="rId3"/>
+              </a:ext>
+            </a:extLst>
+          </a:blip>
+          <a:stretch>
+            <a:fillRect/>
+          </a:stretch>
+        </a:blipFill>
+        <a:ln w="19050" cap="flat" cmpd="sng" algn="ctr">
+          <a:solidFill>
+            <a:schemeClr val="lt1">
+              <a:hueOff val="0"/>
+              <a:satOff val="0"/>
+              <a:lumOff val="0"/>
+              <a:alphaOff val="0"/>
+            </a:schemeClr>
+          </a:solidFill>
+          <a:prstDash val="solid"/>
+          <a:miter lim="800000"/>
+        </a:ln>
+        <a:effectLst/>
+      </dsp:spPr>
+      <dsp:style>
+        <a:lnRef idx="2">
+          <a:scrgbClr r="0" g="0" b="0"/>
+        </a:lnRef>
+        <a:fillRef idx="1">
+          <a:scrgbClr r="0" g="0" b="0"/>
+        </a:fillRef>
+        <a:effectRef idx="0">
+          <a:scrgbClr r="0" g="0" b="0"/>
+        </a:effectRef>
+        <a:fontRef idx="minor">
+          <a:schemeClr val="lt1"/>
+        </a:fontRef>
+      </dsp:style>
+    </dsp:sp>
+    <dsp:sp modelId="{F3047127-4C9F-4BEC-BFB7-4F7345ACAD4B}">
+      <dsp:nvSpPr>
+        <dsp:cNvPr id="0" name=""/>
+        <dsp:cNvSpPr/>
+      </dsp:nvSpPr>
+      <dsp:spPr>
+        <a:xfrm>
+          <a:off x="1057183" y="2290082"/>
+          <a:ext cx="9458416" cy="915310"/>
+        </a:xfrm>
+        <a:prstGeom prst="rect">
+          <a:avLst/>
+        </a:prstGeom>
+        <a:noFill/>
+        <a:ln>
+          <a:noFill/>
+        </a:ln>
+        <a:effectLst/>
+      </dsp:spPr>
+      <dsp:style>
+        <a:lnRef idx="0">
+          <a:scrgbClr r="0" g="0" b="0"/>
+        </a:lnRef>
+        <a:fillRef idx="0">
+          <a:scrgbClr r="0" g="0" b="0"/>
+        </a:fillRef>
+        <a:effectRef idx="0">
+          <a:scrgbClr r="0" g="0" b="0"/>
+        </a:effectRef>
+        <a:fontRef idx="minor"/>
+      </dsp:style>
+      <dsp:txBody>
+        <a:bodyPr spcFirstLastPara="0" vert="horz" wrap="square" lIns="96870" tIns="96870" rIns="96870" bIns="96870" numCol="1" spcCol="1270" anchor="ctr" anchorCtr="0">
+          <a:noAutofit/>
+        </a:bodyPr>
+        <a:lstStyle/>
+        <a:p>
+          <a:pPr marL="0" lvl="0" indent="0" algn="l" defTabSz="977900">
+            <a:lnSpc>
+              <a:spcPct val="100000"/>
+            </a:lnSpc>
+            <a:spcBef>
+              <a:spcPct val="0"/>
+            </a:spcBef>
+            <a:spcAft>
+              <a:spcPct val="35000"/>
+            </a:spcAft>
+            <a:buNone/>
+          </a:pPr>
+          <a:r>
+            <a:rPr lang="en-US" sz="2200" kern="1200"/>
+            <a:t>The Formula: Candidate Stat - Tournament Average = Expectation Gap </a:t>
+          </a:r>
+        </a:p>
+      </dsp:txBody>
+      <dsp:txXfrm>
+        <a:off x="1057183" y="2290082"/>
+        <a:ext cx="9458416" cy="915310"/>
+      </dsp:txXfrm>
+    </dsp:sp>
+    <dsp:sp modelId="{1D986AE3-C9CD-4081-80C5-DB2E38EF62E2}">
+      <dsp:nvSpPr>
+        <dsp:cNvPr id="0" name=""/>
+        <dsp:cNvSpPr/>
+      </dsp:nvSpPr>
+      <dsp:spPr>
+        <a:xfrm>
+          <a:off x="0" y="3434221"/>
+          <a:ext cx="10515600" cy="915310"/>
+        </a:xfrm>
+        <a:prstGeom prst="roundRect">
+          <a:avLst>
+            <a:gd name="adj" fmla="val 10000"/>
+          </a:avLst>
+        </a:prstGeom>
+        <a:solidFill>
+          <a:schemeClr val="accent1">
+            <a:tint val="40000"/>
+            <a:hueOff val="0"/>
+            <a:satOff val="0"/>
+            <a:lumOff val="0"/>
+            <a:alphaOff val="0"/>
+          </a:schemeClr>
+        </a:solidFill>
+        <a:ln>
+          <a:noFill/>
+        </a:ln>
+        <a:effectLst/>
+      </dsp:spPr>
+      <dsp:style>
+        <a:lnRef idx="0">
+          <a:scrgbClr r="0" g="0" b="0"/>
+        </a:lnRef>
+        <a:fillRef idx="1">
+          <a:scrgbClr r="0" g="0" b="0"/>
+        </a:fillRef>
+        <a:effectRef idx="0">
+          <a:scrgbClr r="0" g="0" b="0"/>
+        </a:effectRef>
+        <a:fontRef idx="minor"/>
+      </dsp:style>
+    </dsp:sp>
+    <dsp:sp modelId="{ABD8ECEC-2B13-4F88-94CB-79B02C4756E9}">
+      <dsp:nvSpPr>
+        <dsp:cNvPr id="0" name=""/>
+        <dsp:cNvSpPr/>
+      </dsp:nvSpPr>
+      <dsp:spPr>
+        <a:xfrm>
+          <a:off x="276881" y="3640166"/>
+          <a:ext cx="503420" cy="503420"/>
+        </a:xfrm>
+        <a:prstGeom prst="rect">
+          <a:avLst/>
+        </a:prstGeom>
+        <a:blipFill>
+          <a:blip xmlns:r="http://schemas.openxmlformats.org/officeDocument/2006/relationships">
+            <a:extLst>
+              <a:ext uri="{28A0092B-C50C-407E-A947-70E740481C1C}">
+                <a14:useLocalDpi xmlns:a14="http://schemas.microsoft.com/office/drawing/2010/main" val="0"/>
+              </a:ext>
+              <a:ext uri="{96DAC541-7B7A-43D3-8B79-37D633B846F1}">
+                <asvg:svgBlip xmlns:asvg="http://schemas.microsoft.com/office/drawing/2016/SVG/main" r:embed="rId4"/>
+              </a:ext>
+            </a:extLst>
+          </a:blip>
+          <a:stretch>
+            <a:fillRect/>
+          </a:stretch>
+        </a:blipFill>
+        <a:ln w="19050" cap="flat" cmpd="sng" algn="ctr">
+          <a:solidFill>
+            <a:schemeClr val="lt1">
+              <a:hueOff val="0"/>
+              <a:satOff val="0"/>
+              <a:lumOff val="0"/>
+              <a:alphaOff val="0"/>
+            </a:schemeClr>
+          </a:solidFill>
+          <a:prstDash val="solid"/>
+          <a:miter lim="800000"/>
+        </a:ln>
+        <a:effectLst/>
+      </dsp:spPr>
+      <dsp:style>
+        <a:lnRef idx="2">
+          <a:scrgbClr r="0" g="0" b="0"/>
+        </a:lnRef>
+        <a:fillRef idx="1">
+          <a:scrgbClr r="0" g="0" b="0"/>
+        </a:fillRef>
+        <a:effectRef idx="0">
+          <a:scrgbClr r="0" g="0" b="0"/>
+        </a:effectRef>
+        <a:fontRef idx="minor">
+          <a:schemeClr val="lt1"/>
+        </a:fontRef>
+      </dsp:style>
+    </dsp:sp>
+    <dsp:sp modelId="{F689134D-D77E-4E4D-846B-CC78830EBE1C}">
+      <dsp:nvSpPr>
+        <dsp:cNvPr id="0" name=""/>
+        <dsp:cNvSpPr/>
+      </dsp:nvSpPr>
+      <dsp:spPr>
+        <a:xfrm>
+          <a:off x="1057183" y="3434221"/>
+          <a:ext cx="9458416" cy="915310"/>
+        </a:xfrm>
+        <a:prstGeom prst="rect">
+          <a:avLst/>
+        </a:prstGeom>
+        <a:noFill/>
+        <a:ln>
+          <a:noFill/>
+        </a:ln>
+        <a:effectLst/>
+      </dsp:spPr>
+      <dsp:style>
+        <a:lnRef idx="0">
+          <a:scrgbClr r="0" g="0" b="0"/>
+        </a:lnRef>
+        <a:fillRef idx="0">
+          <a:scrgbClr r="0" g="0" b="0"/>
+        </a:fillRef>
+        <a:effectRef idx="0">
+          <a:scrgbClr r="0" g="0" b="0"/>
+        </a:effectRef>
+        <a:fontRef idx="minor"/>
+      </dsp:style>
+      <dsp:txBody>
+        <a:bodyPr spcFirstLastPara="0" vert="horz" wrap="square" lIns="96870" tIns="96870" rIns="96870" bIns="96870" numCol="1" spcCol="1270" anchor="ctr" anchorCtr="0">
+          <a:noAutofit/>
+        </a:bodyPr>
+        <a:lstStyle/>
+        <a:p>
+          <a:pPr marL="0" lvl="0" indent="0" algn="l" defTabSz="977900">
+            <a:lnSpc>
+              <a:spcPct val="100000"/>
+            </a:lnSpc>
+            <a:spcBef>
+              <a:spcPct val="0"/>
+            </a:spcBef>
+            <a:spcAft>
+              <a:spcPct val="35000"/>
+            </a:spcAft>
+            <a:buNone/>
+          </a:pPr>
+          <a:r>
+            <a:rPr lang="en-US" sz="2200" kern="1200"/>
+            <a:t>The Impact: Allows the model to identify 13-seeds that possess the statistical DNA of a top-tier powerhouse.</a:t>
+          </a:r>
+        </a:p>
+      </dsp:txBody>
+      <dsp:txXfrm>
+        <a:off x="1057183" y="3434221"/>
+        <a:ext cx="9458416" cy="915310"/>
+      </dsp:txXfrm>
+    </dsp:sp>
+  </dsp:spTree>
+</dsp:drawing>
+</file>
+
+<file path=ppt/diagrams/drawing2.xml><?xml version="1.0" encoding="utf-8"?>
 <dsp:drawing xmlns:dgm="http://schemas.openxmlformats.org/drawingml/2006/diagram" xmlns:dsp="http://schemas.microsoft.com/office/drawing/2008/diagram" xmlns:a="http://schemas.openxmlformats.org/drawingml/2006/main">
   <dsp:spTree>
     <dsp:nvGrpSpPr>
@@ -2749,7 +4573,7 @@
 </dsp:drawing>
 </file>
 
-<file path=ppt/diagrams/drawing2.xml><?xml version="1.0" encoding="utf-8"?>
+<file path=ppt/diagrams/drawing3.xml><?xml version="1.0" encoding="utf-8"?>
 <dsp:drawing xmlns:dgm="http://schemas.openxmlformats.org/drawingml/2006/diagram" xmlns:dsp="http://schemas.microsoft.com/office/drawing/2008/diagram" xmlns:a="http://schemas.openxmlformats.org/drawingml/2006/main">
   <dsp:spTree>
     <dsp:nvGrpSpPr>
@@ -3155,6 +4979,300 @@
 </file>
 
 <file path=ppt/diagrams/layout1.xml><?xml version="1.0" encoding="utf-8"?>
+<dgm:layoutDef xmlns:dgm="http://schemas.openxmlformats.org/drawingml/2006/diagram" xmlns:a="http://schemas.openxmlformats.org/drawingml/2006/main" uniqueId="urn:microsoft.com/office/officeart/2018/2/layout/IconVerticalSolidList">
+  <dgm:title val="Icon Vertical Solid List"/>
+  <dgm:desc val="Use to show a series of visuals from top to bottom with Level 1 or Level 1 and Level 2 text grouped in a shape. Works best with icons or small pictures with lengthier descriptions."/>
+  <dgm:catLst>
+    <dgm:cat type="icon" pri="500"/>
+  </dgm:catLst>
+  <dgm:sampData useDef="1">
+    <dgm:dataModel>
+      <dgm:ptLst/>
+      <dgm:bg/>
+      <dgm:whole/>
+    </dgm:dataModel>
+  </dgm:sampData>
+  <dgm:styleData useDef="1">
+    <dgm:dataModel>
+      <dgm:ptLst/>
+      <dgm:bg/>
+      <dgm:whole/>
+    </dgm:dataModel>
+  </dgm:styleData>
+  <dgm:clrData useDef="1">
+    <dgm:dataModel>
+      <dgm:ptLst/>
+      <dgm:bg/>
+      <dgm:whole/>
+    </dgm:dataModel>
+  </dgm:clrData>
+  <dgm:layoutNode name="root">
+    <dgm:varLst>
+      <dgm:dir/>
+      <dgm:resizeHandles val="exact"/>
+    </dgm:varLst>
+    <dgm:choose name="Name0">
+      <dgm:if name="Name1" axis="self" func="var" arg="dir" op="equ" val="norm">
+        <dgm:alg type="lin">
+          <dgm:param type="linDir" val="fromT"/>
+          <dgm:param type="nodeHorzAlign" val="l"/>
+        </dgm:alg>
+      </dgm:if>
+      <dgm:else name="Name2">
+        <dgm:alg type="lin">
+          <dgm:param type="linDir" val="fromT"/>
+          <dgm:param type="nodeHorzAlign" val="r"/>
+        </dgm:alg>
+      </dgm:else>
+    </dgm:choose>
+    <dgm:shape xmlns:r="http://schemas.openxmlformats.org/officeDocument/2006/relationships" r:blip="">
+      <dgm:adjLst/>
+    </dgm:shape>
+    <dgm:presOf/>
+    <dgm:choose name="Name3">
+      <dgm:if name="Name4" axis="ch" ptType="node" func="cnt" op="lte" val="3">
+        <dgm:constrLst>
+          <dgm:constr type="h" for="ch" forName="compNode" refType="h" fact="0.3"/>
+          <dgm:constr type="w" for="ch" forName="compNode" refType="w"/>
+          <dgm:constr type="h" for="ch" forName="sibTrans" refType="h" refFor="ch" refForName="compNode" fact="0.25"/>
+          <dgm:constr type="primFontSz" for="des" forName="parTx" val="25"/>
+          <dgm:constr type="primFontSz" for="des" forName="desTx" refType="primFontSz" refFor="des" refForName="parTx" op="lte" fact="0.75"/>
+          <dgm:constr type="h" for="des" forName="compNode" op="equ"/>
+          <dgm:constr type="h" for="des" forName="bgRect" op="equ"/>
+          <dgm:constr type="h" for="des" forName="iconRect" op="equ"/>
+          <dgm:constr type="w" for="des" forName="iconRect" op="equ"/>
+          <dgm:constr type="h" for="des" forName="spaceRect" op="equ"/>
+          <dgm:constr type="h" for="des" forName="parTx" op="equ"/>
+          <dgm:constr type="h" for="des" forName="desTx" op="equ"/>
+        </dgm:constrLst>
+      </dgm:if>
+      <dgm:if name="Name5" axis="ch" ptType="node" func="cnt" op="lte" val="4">
+        <dgm:constrLst>
+          <dgm:constr type="h" for="ch" forName="compNode" refType="h" fact="0.3"/>
+          <dgm:constr type="w" for="ch" forName="compNode" refType="w"/>
+          <dgm:constr type="h" for="ch" forName="sibTrans" refType="h" refFor="ch" refForName="compNode" fact="0.25"/>
+          <dgm:constr type="primFontSz" for="des" forName="parTx" val="22"/>
+          <dgm:constr type="primFontSz" for="des" forName="desTx" refType="primFontSz" refFor="des" refForName="parTx" op="lte" fact="0.75"/>
+          <dgm:constr type="h" for="des" forName="compNode" op="equ"/>
+          <dgm:constr type="h" for="des" forName="bgRect" op="equ"/>
+          <dgm:constr type="h" for="des" forName="iconRect" op="equ"/>
+          <dgm:constr type="w" for="des" forName="iconRect" op="equ"/>
+          <dgm:constr type="h" for="des" forName="spaceRect" op="equ"/>
+          <dgm:constr type="h" for="des" forName="parTx" op="equ"/>
+          <dgm:constr type="h" for="des" forName="desTx" op="equ"/>
+        </dgm:constrLst>
+      </dgm:if>
+      <dgm:if name="Name6" axis="ch" ptType="node" func="cnt" op="lte" val="6">
+        <dgm:constrLst>
+          <dgm:constr type="h" for="ch" forName="compNode" refType="h" fact="0.3"/>
+          <dgm:constr type="w" for="ch" forName="compNode" refType="w"/>
+          <dgm:constr type="h" for="ch" forName="sibTrans" refType="h" refFor="ch" refForName="compNode" fact="0.25"/>
+          <dgm:constr type="primFontSz" for="des" forName="parTx" val="19"/>
+          <dgm:constr type="primFontSz" for="des" forName="desTx" refType="primFontSz" refFor="des" refForName="parTx" op="lte" fact="0.75"/>
+          <dgm:constr type="h" for="des" forName="compNode" op="equ"/>
+          <dgm:constr type="h" for="des" forName="bgRect" op="equ"/>
+          <dgm:constr type="h" for="des" forName="iconRect" op="equ"/>
+          <dgm:constr type="w" for="des" forName="iconRect" op="equ"/>
+          <dgm:constr type="h" for="des" forName="spaceRect" op="equ"/>
+          <dgm:constr type="h" for="des" forName="parTx" op="equ"/>
+          <dgm:constr type="h" for="des" forName="desTx" op="equ"/>
+        </dgm:constrLst>
+      </dgm:if>
+      <dgm:else name="Name7">
+        <dgm:constrLst>
+          <dgm:constr type="h" for="ch" forName="compNode" refType="h" fact="0.3"/>
+          <dgm:constr type="w" for="ch" forName="compNode" refType="w"/>
+          <dgm:constr type="h" for="ch" forName="sibTrans" refType="h" refFor="ch" refForName="compNode" fact="0.25"/>
+          <dgm:constr type="primFontSz" for="des" forName="parTx" val="16"/>
+          <dgm:constr type="primFontSz" for="des" forName="desTx" refType="primFontSz" refFor="des" refForName="parTx" op="lte" fact="0.75"/>
+          <dgm:constr type="h" for="des" forName="compNode" op="equ"/>
+          <dgm:constr type="h" for="des" forName="bgRect" op="equ"/>
+          <dgm:constr type="h" for="des" forName="iconRect" op="equ"/>
+          <dgm:constr type="w" for="des" forName="iconRect" op="equ"/>
+          <dgm:constr type="h" for="des" forName="spaceRect" op="equ"/>
+          <dgm:constr type="h" for="des" forName="parTx" op="equ"/>
+          <dgm:constr type="h" for="des" forName="desTx" op="equ"/>
+        </dgm:constrLst>
+      </dgm:else>
+    </dgm:choose>
+    <dgm:ruleLst>
+      <dgm:rule type="h" for="ch" forName="compNode" val="0" fact="NaN" max="NaN"/>
+    </dgm:ruleLst>
+    <dgm:forEach name="Name8" axis="ch" ptType="node">
+      <dgm:layoutNode name="compNode">
+        <dgm:alg type="composite"/>
+        <dgm:shape xmlns:r="http://schemas.openxmlformats.org/officeDocument/2006/relationships" r:blip="">
+          <dgm:adjLst/>
+        </dgm:shape>
+        <dgm:presOf axis="self"/>
+        <dgm:choose name="Name9">
+          <dgm:if name="Name10" axis="ch" ptType="node" func="cnt" op="gte" val="1">
+            <dgm:constrLst>
+              <dgm:constr type="w" for="ch" forName="bgRect" refType="w"/>
+              <dgm:constr type="h" for="ch" forName="bgRect" refType="h"/>
+              <dgm:constr type="l" for="ch" forName="bgRect"/>
+              <dgm:constr type="t" for="ch" forName="bgRect"/>
+              <dgm:constr type="h" for="ch" forName="iconRect" refType="h" fact="0.55"/>
+              <dgm:constr type="w" for="ch" forName="iconRect" refType="h" refFor="ch" refForName="iconRect"/>
+              <dgm:constr type="l" for="ch" forName="iconRect" refType="h" refFor="ch" refForName="iconRect" fact="0.55"/>
+              <dgm:constr type="ctrY" for="ch" forName="iconRect" refType="ctrY" refFor="ch" refForName="bgRect"/>
+              <dgm:constr type="w" for="ch" forName="spaceRect" refType="l" refFor="ch" refForName="iconRect"/>
+              <dgm:constr type="h" for="ch" forName="spaceRect" refType="h"/>
+              <dgm:constr type="l" for="ch" forName="spaceRect" refType="r" refFor="ch" refForName="iconRect"/>
+              <dgm:constr type="t" for="ch" forName="spaceRect"/>
+              <dgm:constr type="w" for="ch" forName="parTx" refType="w" fact="0.45"/>
+              <dgm:constr type="h" for="ch" forName="parTx" refType="h"/>
+              <dgm:constr type="l" for="ch" forName="parTx" refType="r" refFor="ch" refForName="spaceRect"/>
+              <dgm:constr type="t" for="ch" forName="parTx"/>
+              <dgm:constr type="h" for="ch" forName="desTx" refType="h"/>
+              <dgm:constr type="l" for="ch" forName="desTx" refType="r" refFor="ch" refForName="parTx"/>
+              <dgm:constr type="t" for="ch" forName="desTx"/>
+            </dgm:constrLst>
+          </dgm:if>
+          <dgm:else name="Name11">
+            <dgm:constrLst>
+              <dgm:constr type="w" for="ch" forName="bgRect" refType="w"/>
+              <dgm:constr type="h" for="ch" forName="bgRect" refType="h"/>
+              <dgm:constr type="l" for="ch" forName="bgRect"/>
+              <dgm:constr type="t" for="ch" forName="bgRect"/>
+              <dgm:constr type="h" for="ch" forName="iconRect" refType="h" fact="0.55"/>
+              <dgm:constr type="w" for="ch" forName="iconRect" refType="h" refFor="ch" refForName="iconRect"/>
+              <dgm:constr type="l" for="ch" forName="iconRect" refType="h" refFor="ch" refForName="iconRect" fact="0.55"/>
+              <dgm:constr type="ctrY" for="ch" forName="iconRect" refType="ctrY" refFor="ch" refForName="bgRect"/>
+              <dgm:constr type="w" for="ch" forName="spaceRect" refType="l" refFor="ch" refForName="iconRect"/>
+              <dgm:constr type="h" for="ch" forName="spaceRect" refType="h"/>
+              <dgm:constr type="l" for="ch" forName="spaceRect" refType="r" refFor="ch" refForName="iconRect"/>
+              <dgm:constr type="t" for="ch" forName="spaceRect"/>
+              <dgm:constr type="h" for="ch" forName="parTx" refType="h"/>
+              <dgm:constr type="l" for="ch" forName="parTx" refType="r" refFor="ch" refForName="spaceRect"/>
+              <dgm:constr type="t" for="ch" forName="parTx"/>
+            </dgm:constrLst>
+          </dgm:else>
+        </dgm:choose>
+        <dgm:ruleLst>
+          <dgm:rule type="h" val="INF" fact="NaN" max="NaN"/>
+        </dgm:ruleLst>
+        <dgm:layoutNode name="bgRect" styleLbl="bgShp">
+          <dgm:alg type="sp"/>
+          <dgm:shape xmlns:r="http://schemas.openxmlformats.org/officeDocument/2006/relationships" type="roundRect" r:blip="">
+            <dgm:adjLst>
+              <dgm:adj idx="1" val="0.1"/>
+            </dgm:adjLst>
+          </dgm:shape>
+          <dgm:presOf/>
+          <dgm:constrLst/>
+          <dgm:ruleLst/>
+        </dgm:layoutNode>
+        <dgm:layoutNode name="iconRect" styleLbl="node1">
+          <dgm:alg type="sp"/>
+          <dgm:shape xmlns:r="http://schemas.openxmlformats.org/officeDocument/2006/relationships" type="rect" r:blip="" blipPhldr="1">
+            <dgm:adjLst/>
+          </dgm:shape>
+          <dgm:presOf/>
+          <dgm:constrLst/>
+          <dgm:ruleLst/>
+        </dgm:layoutNode>
+        <dgm:layoutNode name="spaceRect">
+          <dgm:alg type="sp"/>
+          <dgm:shape xmlns:r="http://schemas.openxmlformats.org/officeDocument/2006/relationships" r:blip="">
+            <dgm:adjLst/>
+          </dgm:shape>
+          <dgm:presOf/>
+          <dgm:constrLst/>
+          <dgm:ruleLst/>
+        </dgm:layoutNode>
+        <dgm:layoutNode name="parTx" styleLbl="revTx">
+          <dgm:varLst>
+            <dgm:chMax val="0"/>
+            <dgm:chPref val="0"/>
+          </dgm:varLst>
+          <dgm:alg type="tx">
+            <dgm:param type="txAnchorVert" val="mid"/>
+            <dgm:param type="parTxLTRAlign" val="l"/>
+            <dgm:param type="shpTxLTRAlignCh" val="l"/>
+            <dgm:param type="parTxRTLAlign" val="r"/>
+            <dgm:param type="shpTxRTLAlignCh" val="r"/>
+          </dgm:alg>
+          <dgm:shape xmlns:r="http://schemas.openxmlformats.org/officeDocument/2006/relationships" type="rect" r:blip="">
+            <dgm:adjLst/>
+          </dgm:shape>
+          <dgm:presOf axis="self" ptType="node"/>
+          <dgm:constrLst>
+            <dgm:constr type="lMarg" refType="h" fact="0.3"/>
+            <dgm:constr type="rMarg" refType="h" fact="0.3"/>
+            <dgm:constr type="tMarg" refType="h" fact="0.3"/>
+            <dgm:constr type="bMarg" refType="h" fact="0.3"/>
+          </dgm:constrLst>
+          <dgm:ruleLst>
+            <dgm:rule type="primFontSz" val="14" fact="NaN" max="NaN"/>
+            <dgm:rule type="h" val="INF" fact="NaN" max="NaN"/>
+          </dgm:ruleLst>
+        </dgm:layoutNode>
+        <dgm:choose name="Name12">
+          <dgm:if name="Name13" axis="ch" ptType="node" func="cnt" op="gte" val="1">
+            <dgm:layoutNode name="desTx" styleLbl="revTx">
+              <dgm:varLst/>
+              <dgm:alg type="tx">
+                <dgm:param type="txAnchorVertCh" val="mid"/>
+                <dgm:param type="parTxLTRAlign" val="l"/>
+                <dgm:param type="shpTxLTRAlignCh" val="l"/>
+                <dgm:param type="parTxRTLAlign" val="r"/>
+                <dgm:param type="shpTxRTLAlignCh" val="r"/>
+                <dgm:param type="stBulletLvl" val="0"/>
+              </dgm:alg>
+              <dgm:shape xmlns:r="http://schemas.openxmlformats.org/officeDocument/2006/relationships" type="rect" r:blip="">
+                <dgm:adjLst/>
+              </dgm:shape>
+              <dgm:presOf axis="des" ptType="node"/>
+              <dgm:constrLst>
+                <dgm:constr type="primFontSz" val="18"/>
+                <dgm:constr type="secFontSz" refType="primFontSz"/>
+                <dgm:constr type="lMarg" refType="h" fact="0.3"/>
+                <dgm:constr type="rMarg" refType="h" fact="0.3"/>
+                <dgm:constr type="tMarg" refType="h" fact="0.3"/>
+                <dgm:constr type="bMarg" refType="h" fact="0.3"/>
+              </dgm:constrLst>
+              <dgm:ruleLst>
+                <dgm:rule type="primFontSz" val="11" fact="NaN" max="NaN"/>
+              </dgm:ruleLst>
+            </dgm:layoutNode>
+          </dgm:if>
+          <dgm:else name="Name14"/>
+        </dgm:choose>
+      </dgm:layoutNode>
+      <dgm:forEach name="Name15" axis="followSib" ptType="sibTrans" cnt="1">
+        <dgm:layoutNode name="sibTrans">
+          <dgm:alg type="sp"/>
+          <dgm:shape xmlns:r="http://schemas.openxmlformats.org/officeDocument/2006/relationships" r:blip="">
+            <dgm:adjLst/>
+          </dgm:shape>
+          <dgm:presOf axis="self"/>
+          <dgm:constrLst/>
+          <dgm:ruleLst/>
+        </dgm:layoutNode>
+      </dgm:forEach>
+    </dgm:forEach>
+  </dgm:layoutNode>
+  <dgm:extLst>
+    <a:ext uri="{68A01E43-0DF5-4B5B-8FA6-DAF915123BFB}">
+      <dgm1612:lstStyle xmlns:dgm1612="http://schemas.microsoft.com/office/drawing/2016/12/diagram">
+        <a:lvl1pPr>
+          <a:lnSpc>
+            <a:spcPct val="100000"/>
+          </a:lnSpc>
+        </a:lvl1pPr>
+        <a:lvl2pPr>
+          <a:lnSpc>
+            <a:spcPct val="100000"/>
+          </a:lnSpc>
+        </a:lvl2pPr>
+      </dgm1612:lstStyle>
+    </a:ext>
+  </dgm:extLst>
+</dgm:layoutDef>
+</file>
+
+<file path=ppt/diagrams/layout2.xml><?xml version="1.0" encoding="utf-8"?>
 <dgm:layoutDef xmlns:dgm="http://schemas.openxmlformats.org/drawingml/2006/diagram" xmlns:a="http://schemas.openxmlformats.org/drawingml/2006/main" uniqueId="urn:microsoft.com/office/officeart/2005/8/layout/vList2">
   <dgm:title val=""/>
   <dgm:desc val=""/>
@@ -3321,7 +5439,7 @@
 </dgm:layoutDef>
 </file>
 
-<file path=ppt/diagrams/layout2.xml><?xml version="1.0" encoding="utf-8"?>
+<file path=ppt/diagrams/layout3.xml><?xml version="1.0" encoding="utf-8"?>
 <dgm:layoutDef xmlns:dgm="http://schemas.openxmlformats.org/drawingml/2006/diagram" xmlns:a="http://schemas.openxmlformats.org/drawingml/2006/main" uniqueId="urn:microsoft.com/office/officeart/2005/8/layout/hierarchy1">
   <dgm:title val=""/>
   <dgm:desc val=""/>
@@ -3885,6 +6003,1040 @@
 </file>
 
 <file path=ppt/diagrams/quickStyle1.xml><?xml version="1.0" encoding="utf-8"?>
+<dgm:styleDef xmlns:dgm="http://schemas.openxmlformats.org/drawingml/2006/diagram" xmlns:a="http://schemas.openxmlformats.org/drawingml/2006/main" uniqueId="urn:microsoft.com/office/officeart/2005/8/quickstyle/simple1">
+  <dgm:title val=""/>
+  <dgm:desc val=""/>
+  <dgm:catLst>
+    <dgm:cat type="simple" pri="10100"/>
+  </dgm:catLst>
+  <dgm:scene3d>
+    <a:camera prst="orthographicFront"/>
+    <a:lightRig rig="threePt" dir="t"/>
+  </dgm:scene3d>
+  <dgm:styleLbl name="node0">
+    <dgm:scene3d>
+      <a:camera prst="orthographicFront"/>
+      <a:lightRig rig="threePt" dir="t"/>
+    </dgm:scene3d>
+    <dgm:sp3d/>
+    <dgm:txPr/>
+    <dgm:style>
+      <a:lnRef idx="2">
+        <a:scrgbClr r="0" g="0" b="0"/>
+      </a:lnRef>
+      <a:fillRef idx="1">
+        <a:scrgbClr r="0" g="0" b="0"/>
+      </a:fillRef>
+      <a:effectRef idx="0">
+        <a:scrgbClr r="0" g="0" b="0"/>
+      </a:effectRef>
+      <a:fontRef idx="minor">
+        <a:schemeClr val="lt1"/>
+      </a:fontRef>
+    </dgm:style>
+  </dgm:styleLbl>
+  <dgm:styleLbl name="lnNode1">
+    <dgm:scene3d>
+      <a:camera prst="orthographicFront"/>
+      <a:lightRig rig="threePt" dir="t"/>
+    </dgm:scene3d>
+    <dgm:sp3d/>
+    <dgm:txPr/>
+    <dgm:style>
+      <a:lnRef idx="2">
+        <a:scrgbClr r="0" g="0" b="0"/>
+      </a:lnRef>
+      <a:fillRef idx="1">
+        <a:scrgbClr r="0" g="0" b="0"/>
+      </a:fillRef>
+      <a:effectRef idx="0">
+        <a:scrgbClr r="0" g="0" b="0"/>
+      </a:effectRef>
+      <a:fontRef idx="minor">
+        <a:schemeClr val="lt1"/>
+      </a:fontRef>
+    </dgm:style>
+  </dgm:styleLbl>
+  <dgm:styleLbl name="vennNode1">
+    <dgm:scene3d>
+      <a:camera prst="orthographicFront"/>
+      <a:lightRig rig="threePt" dir="t"/>
+    </dgm:scene3d>
+    <dgm:sp3d/>
+    <dgm:txPr/>
+    <dgm:style>
+      <a:lnRef idx="2">
+        <a:scrgbClr r="0" g="0" b="0"/>
+      </a:lnRef>
+      <a:fillRef idx="1">
+        <a:scrgbClr r="0" g="0" b="0"/>
+      </a:fillRef>
+      <a:effectRef idx="0">
+        <a:scrgbClr r="0" g="0" b="0"/>
+      </a:effectRef>
+      <a:fontRef idx="minor">
+        <a:schemeClr val="tx1"/>
+      </a:fontRef>
+    </dgm:style>
+  </dgm:styleLbl>
+  <dgm:styleLbl name="alignNode1">
+    <dgm:scene3d>
+      <a:camera prst="orthographicFront"/>
+      <a:lightRig rig="threePt" dir="t"/>
+    </dgm:scene3d>
+    <dgm:sp3d/>
+    <dgm:txPr/>
+    <dgm:style>
+      <a:lnRef idx="2">
+        <a:scrgbClr r="0" g="0" b="0"/>
+      </a:lnRef>
+      <a:fillRef idx="1">
+        <a:scrgbClr r="0" g="0" b="0"/>
+      </a:fillRef>
+      <a:effectRef idx="0">
+        <a:scrgbClr r="0" g="0" b="0"/>
+      </a:effectRef>
+      <a:fontRef idx="minor">
+        <a:schemeClr val="lt1"/>
+      </a:fontRef>
+    </dgm:style>
+  </dgm:styleLbl>
+  <dgm:styleLbl name="node1">
+    <dgm:scene3d>
+      <a:camera prst="orthographicFront"/>
+      <a:lightRig rig="threePt" dir="t"/>
+    </dgm:scene3d>
+    <dgm:sp3d/>
+    <dgm:txPr/>
+    <dgm:style>
+      <a:lnRef idx="2">
+        <a:scrgbClr r="0" g="0" b="0"/>
+      </a:lnRef>
+      <a:fillRef idx="1">
+        <a:scrgbClr r="0" g="0" b="0"/>
+      </a:fillRef>
+      <a:effectRef idx="0">
+        <a:scrgbClr r="0" g="0" b="0"/>
+      </a:effectRef>
+      <a:fontRef idx="minor">
+        <a:schemeClr val="lt1"/>
+      </a:fontRef>
+    </dgm:style>
+  </dgm:styleLbl>
+  <dgm:styleLbl name="node2">
+    <dgm:scene3d>
+      <a:camera prst="orthographicFront"/>
+      <a:lightRig rig="threePt" dir="t"/>
+    </dgm:scene3d>
+    <dgm:sp3d/>
+    <dgm:txPr/>
+    <dgm:style>
+      <a:lnRef idx="2">
+        <a:scrgbClr r="0" g="0" b="0"/>
+      </a:lnRef>
+      <a:fillRef idx="1">
+        <a:scrgbClr r="0" g="0" b="0"/>
+      </a:fillRef>
+      <a:effectRef idx="0">
+        <a:scrgbClr r="0" g="0" b="0"/>
+      </a:effectRef>
+      <a:fontRef idx="minor">
+        <a:schemeClr val="lt1"/>
+      </a:fontRef>
+    </dgm:style>
+  </dgm:styleLbl>
+  <dgm:styleLbl name="node3">
+    <dgm:scene3d>
+      <a:camera prst="orthographicFront"/>
+      <a:lightRig rig="threePt" dir="t"/>
+    </dgm:scene3d>
+    <dgm:sp3d/>
+    <dgm:txPr/>
+    <dgm:style>
+      <a:lnRef idx="2">
+        <a:scrgbClr r="0" g="0" b="0"/>
+      </a:lnRef>
+      <a:fillRef idx="1">
+        <a:scrgbClr r="0" g="0" b="0"/>
+      </a:fillRef>
+      <a:effectRef idx="0">
+        <a:scrgbClr r="0" g="0" b="0"/>
+      </a:effectRef>
+      <a:fontRef idx="minor">
+        <a:schemeClr val="lt1"/>
+      </a:fontRef>
+    </dgm:style>
+  </dgm:styleLbl>
+  <dgm:styleLbl name="node4">
+    <dgm:scene3d>
+      <a:camera prst="orthographicFront"/>
+      <a:lightRig rig="threePt" dir="t"/>
+    </dgm:scene3d>
+    <dgm:sp3d/>
+    <dgm:txPr/>
+    <dgm:style>
+      <a:lnRef idx="2">
+        <a:scrgbClr r="0" g="0" b="0"/>
+      </a:lnRef>
+      <a:fillRef idx="1">
+        <a:scrgbClr r="0" g="0" b="0"/>
+      </a:fillRef>
+      <a:effectRef idx="0">
+        <a:scrgbClr r="0" g="0" b="0"/>
+      </a:effectRef>
+      <a:fontRef idx="minor">
+        <a:schemeClr val="lt1"/>
+      </a:fontRef>
+    </dgm:style>
+  </dgm:styleLbl>
+  <dgm:styleLbl name="fgImgPlace1">
+    <dgm:scene3d>
+      <a:camera prst="orthographicFront"/>
+      <a:lightRig rig="threePt" dir="t"/>
+    </dgm:scene3d>
+    <dgm:sp3d/>
+    <dgm:txPr/>
+    <dgm:style>
+      <a:lnRef idx="2">
+        <a:scrgbClr r="0" g="0" b="0"/>
+      </a:lnRef>
+      <a:fillRef idx="1">
+        <a:scrgbClr r="0" g="0" b="0"/>
+      </a:fillRef>
+      <a:effectRef idx="0">
+        <a:scrgbClr r="0" g="0" b="0"/>
+      </a:effectRef>
+      <a:fontRef idx="minor"/>
+    </dgm:style>
+  </dgm:styleLbl>
+  <dgm:styleLbl name="alignImgPlace1">
+    <dgm:scene3d>
+      <a:camera prst="orthographicFront"/>
+      <a:lightRig rig="threePt" dir="t"/>
+    </dgm:scene3d>
+    <dgm:sp3d/>
+    <dgm:txPr/>
+    <dgm:style>
+      <a:lnRef idx="2">
+        <a:scrgbClr r="0" g="0" b="0"/>
+      </a:lnRef>
+      <a:fillRef idx="1">
+        <a:scrgbClr r="0" g="0" b="0"/>
+      </a:fillRef>
+      <a:effectRef idx="0">
+        <a:scrgbClr r="0" g="0" b="0"/>
+      </a:effectRef>
+      <a:fontRef idx="minor"/>
+    </dgm:style>
+  </dgm:styleLbl>
+  <dgm:styleLbl name="bgImgPlace1">
+    <dgm:scene3d>
+      <a:camera prst="orthographicFront"/>
+      <a:lightRig rig="threePt" dir="t"/>
+    </dgm:scene3d>
+    <dgm:sp3d/>
+    <dgm:txPr/>
+    <dgm:style>
+      <a:lnRef idx="2">
+        <a:scrgbClr r="0" g="0" b="0"/>
+      </a:lnRef>
+      <a:fillRef idx="1">
+        <a:scrgbClr r="0" g="0" b="0"/>
+      </a:fillRef>
+      <a:effectRef idx="0">
+        <a:scrgbClr r="0" g="0" b="0"/>
+      </a:effectRef>
+      <a:fontRef idx="minor"/>
+    </dgm:style>
+  </dgm:styleLbl>
+  <dgm:styleLbl name="sibTrans2D1">
+    <dgm:scene3d>
+      <a:camera prst="orthographicFront"/>
+      <a:lightRig rig="threePt" dir="t"/>
+    </dgm:scene3d>
+    <dgm:sp3d/>
+    <dgm:txPr/>
+    <dgm:style>
+      <a:lnRef idx="0">
+        <a:scrgbClr r="0" g="0" b="0"/>
+      </a:lnRef>
+      <a:fillRef idx="1">
+        <a:scrgbClr r="0" g="0" b="0"/>
+      </a:fillRef>
+      <a:effectRef idx="0">
+        <a:scrgbClr r="0" g="0" b="0"/>
+      </a:effectRef>
+      <a:fontRef idx="minor">
+        <a:schemeClr val="lt1"/>
+      </a:fontRef>
+    </dgm:style>
+  </dgm:styleLbl>
+  <dgm:styleLbl name="fgSibTrans2D1">
+    <dgm:scene3d>
+      <a:camera prst="orthographicFront"/>
+      <a:lightRig rig="threePt" dir="t"/>
+    </dgm:scene3d>
+    <dgm:sp3d/>
+    <dgm:txPr/>
+    <dgm:style>
+      <a:lnRef idx="0">
+        <a:scrgbClr r="0" g="0" b="0"/>
+      </a:lnRef>
+      <a:fillRef idx="1">
+        <a:scrgbClr r="0" g="0" b="0"/>
+      </a:fillRef>
+      <a:effectRef idx="0">
+        <a:scrgbClr r="0" g="0" b="0"/>
+      </a:effectRef>
+      <a:fontRef idx="minor">
+        <a:schemeClr val="lt1"/>
+      </a:fontRef>
+    </dgm:style>
+  </dgm:styleLbl>
+  <dgm:styleLbl name="bgSibTrans2D1">
+    <dgm:scene3d>
+      <a:camera prst="orthographicFront"/>
+      <a:lightRig rig="threePt" dir="t"/>
+    </dgm:scene3d>
+    <dgm:sp3d/>
+    <dgm:txPr/>
+    <dgm:style>
+      <a:lnRef idx="0">
+        <a:scrgbClr r="0" g="0" b="0"/>
+      </a:lnRef>
+      <a:fillRef idx="1">
+        <a:scrgbClr r="0" g="0" b="0"/>
+      </a:fillRef>
+      <a:effectRef idx="0">
+        <a:scrgbClr r="0" g="0" b="0"/>
+      </a:effectRef>
+      <a:fontRef idx="minor">
+        <a:schemeClr val="lt1"/>
+      </a:fontRef>
+    </dgm:style>
+  </dgm:styleLbl>
+  <dgm:styleLbl name="sibTrans1D1">
+    <dgm:scene3d>
+      <a:camera prst="orthographicFront"/>
+      <a:lightRig rig="threePt" dir="t"/>
+    </dgm:scene3d>
+    <dgm:sp3d/>
+    <dgm:txPr/>
+    <dgm:style>
+      <a:lnRef idx="1">
+        <a:scrgbClr r="0" g="0" b="0"/>
+      </a:lnRef>
+      <a:fillRef idx="0">
+        <a:scrgbClr r="0" g="0" b="0"/>
+      </a:fillRef>
+      <a:effectRef idx="0">
+        <a:scrgbClr r="0" g="0" b="0"/>
+      </a:effectRef>
+      <a:fontRef idx="minor"/>
+    </dgm:style>
+  </dgm:styleLbl>
+  <dgm:styleLbl name="callout">
+    <dgm:scene3d>
+      <a:camera prst="orthographicFront"/>
+      <a:lightRig rig="threePt" dir="t"/>
+    </dgm:scene3d>
+    <dgm:sp3d/>
+    <dgm:txPr/>
+    <dgm:style>
+      <a:lnRef idx="2">
+        <a:scrgbClr r="0" g="0" b="0"/>
+      </a:lnRef>
+      <a:fillRef idx="1">
+        <a:scrgbClr r="0" g="0" b="0"/>
+      </a:fillRef>
+      <a:effectRef idx="0">
+        <a:scrgbClr r="0" g="0" b="0"/>
+      </a:effectRef>
+      <a:fontRef idx="minor"/>
+    </dgm:style>
+  </dgm:styleLbl>
+  <dgm:styleLbl name="asst0">
+    <dgm:scene3d>
+      <a:camera prst="orthographicFront"/>
+      <a:lightRig rig="threePt" dir="t"/>
+    </dgm:scene3d>
+    <dgm:sp3d/>
+    <dgm:txPr/>
+    <dgm:style>
+      <a:lnRef idx="2">
+        <a:scrgbClr r="0" g="0" b="0"/>
+      </a:lnRef>
+      <a:fillRef idx="1">
+        <a:scrgbClr r="0" g="0" b="0"/>
+      </a:fillRef>
+      <a:effectRef idx="0">
+        <a:scrgbClr r="0" g="0" b="0"/>
+      </a:effectRef>
+      <a:fontRef idx="minor">
+        <a:schemeClr val="lt1"/>
+      </a:fontRef>
+    </dgm:style>
+  </dgm:styleLbl>
+  <dgm:styleLbl name="asst1">
+    <dgm:scene3d>
+      <a:camera prst="orthographicFront"/>
+      <a:lightRig rig="threePt" dir="t"/>
+    </dgm:scene3d>
+    <dgm:sp3d/>
+    <dgm:txPr/>
+    <dgm:style>
+      <a:lnRef idx="2">
+        <a:scrgbClr r="0" g="0" b="0"/>
+      </a:lnRef>
+      <a:fillRef idx="1">
+        <a:scrgbClr r="0" g="0" b="0"/>
+      </a:fillRef>
+      <a:effectRef idx="0">
+        <a:scrgbClr r="0" g="0" b="0"/>
+      </a:effectRef>
+      <a:fontRef idx="minor">
+        <a:schemeClr val="lt1"/>
+      </a:fontRef>
+    </dgm:style>
+  </dgm:styleLbl>
+  <dgm:styleLbl name="asst2">
+    <dgm:scene3d>
+      <a:camera prst="orthographicFront"/>
+      <a:lightRig rig="threePt" dir="t"/>
+    </dgm:scene3d>
+    <dgm:sp3d/>
+    <dgm:txPr/>
+    <dgm:style>
+      <a:lnRef idx="2">
+        <a:scrgbClr r="0" g="0" b="0"/>
+      </a:lnRef>
+      <a:fillRef idx="1">
+        <a:scrgbClr r="0" g="0" b="0"/>
+      </a:fillRef>
+      <a:effectRef idx="0">
+        <a:scrgbClr r="0" g="0" b="0"/>
+      </a:effectRef>
+      <a:fontRef idx="minor">
+        <a:schemeClr val="lt1"/>
+      </a:fontRef>
+    </dgm:style>
+  </dgm:styleLbl>
+  <dgm:styleLbl name="asst3">
+    <dgm:scene3d>
+      <a:camera prst="orthographicFront"/>
+      <a:lightRig rig="threePt" dir="t"/>
+    </dgm:scene3d>
+    <dgm:sp3d/>
+    <dgm:txPr/>
+    <dgm:style>
+      <a:lnRef idx="2">
+        <a:scrgbClr r="0" g="0" b="0"/>
+      </a:lnRef>
+      <a:fillRef idx="1">
+        <a:scrgbClr r="0" g="0" b="0"/>
+      </a:fillRef>
+      <a:effectRef idx="0">
+        <a:scrgbClr r="0" g="0" b="0"/>
+      </a:effectRef>
+      <a:fontRef idx="minor">
+        <a:schemeClr val="lt1"/>
+      </a:fontRef>
+    </dgm:style>
+  </dgm:styleLbl>
+  <dgm:styleLbl name="asst4">
+    <dgm:scene3d>
+      <a:camera prst="orthographicFront"/>
+      <a:lightRig rig="threePt" dir="t"/>
+    </dgm:scene3d>
+    <dgm:sp3d/>
+    <dgm:txPr/>
+    <dgm:style>
+      <a:lnRef idx="2">
+        <a:scrgbClr r="0" g="0" b="0"/>
+      </a:lnRef>
+      <a:fillRef idx="1">
+        <a:scrgbClr r="0" g="0" b="0"/>
+      </a:fillRef>
+      <a:effectRef idx="0">
+        <a:scrgbClr r="0" g="0" b="0"/>
+      </a:effectRef>
+      <a:fontRef idx="minor">
+        <a:schemeClr val="lt1"/>
+      </a:fontRef>
+    </dgm:style>
+  </dgm:styleLbl>
+  <dgm:styleLbl name="parChTrans2D1">
+    <dgm:scene3d>
+      <a:camera prst="orthographicFront"/>
+      <a:lightRig rig="threePt" dir="t"/>
+    </dgm:scene3d>
+    <dgm:sp3d/>
+    <dgm:txPr/>
+    <dgm:style>
+      <a:lnRef idx="2">
+        <a:scrgbClr r="0" g="0" b="0"/>
+      </a:lnRef>
+      <a:fillRef idx="1">
+        <a:scrgbClr r="0" g="0" b="0"/>
+      </a:fillRef>
+      <a:effectRef idx="0">
+        <a:scrgbClr r="0" g="0" b="0"/>
+      </a:effectRef>
+      <a:fontRef idx="minor">
+        <a:schemeClr val="lt1"/>
+      </a:fontRef>
+    </dgm:style>
+  </dgm:styleLbl>
+  <dgm:styleLbl name="parChTrans2D2">
+    <dgm:scene3d>
+      <a:camera prst="orthographicFront"/>
+      <a:lightRig rig="threePt" dir="t"/>
+    </dgm:scene3d>
+    <dgm:sp3d/>
+    <dgm:txPr/>
+    <dgm:style>
+      <a:lnRef idx="2">
+        <a:scrgbClr r="0" g="0" b="0"/>
+      </a:lnRef>
+      <a:fillRef idx="1">
+        <a:scrgbClr r="0" g="0" b="0"/>
+      </a:fillRef>
+      <a:effectRef idx="0">
+        <a:scrgbClr r="0" g="0" b="0"/>
+      </a:effectRef>
+      <a:fontRef idx="minor">
+        <a:schemeClr val="lt1"/>
+      </a:fontRef>
+    </dgm:style>
+  </dgm:styleLbl>
+  <dgm:styleLbl name="parChTrans2D3">
+    <dgm:scene3d>
+      <a:camera prst="orthographicFront"/>
+      <a:lightRig rig="threePt" dir="t"/>
+    </dgm:scene3d>
+    <dgm:sp3d/>
+    <dgm:txPr/>
+    <dgm:style>
+      <a:lnRef idx="2">
+        <a:scrgbClr r="0" g="0" b="0"/>
+      </a:lnRef>
+      <a:fillRef idx="1">
+        <a:scrgbClr r="0" g="0" b="0"/>
+      </a:fillRef>
+      <a:effectRef idx="0">
+        <a:scrgbClr r="0" g="0" b="0"/>
+      </a:effectRef>
+      <a:fontRef idx="minor">
+        <a:schemeClr val="lt1"/>
+      </a:fontRef>
+    </dgm:style>
+  </dgm:styleLbl>
+  <dgm:styleLbl name="parChTrans2D4">
+    <dgm:scene3d>
+      <a:camera prst="orthographicFront"/>
+      <a:lightRig rig="threePt" dir="t"/>
+    </dgm:scene3d>
+    <dgm:sp3d/>
+    <dgm:txPr/>
+    <dgm:style>
+      <a:lnRef idx="2">
+        <a:scrgbClr r="0" g="0" b="0"/>
+      </a:lnRef>
+      <a:fillRef idx="1">
+        <a:scrgbClr r="0" g="0" b="0"/>
+      </a:fillRef>
+      <a:effectRef idx="0">
+        <a:scrgbClr r="0" g="0" b="0"/>
+      </a:effectRef>
+      <a:fontRef idx="minor">
+        <a:schemeClr val="lt1"/>
+      </a:fontRef>
+    </dgm:style>
+  </dgm:styleLbl>
+  <dgm:styleLbl name="parChTrans1D1">
+    <dgm:scene3d>
+      <a:camera prst="orthographicFront"/>
+      <a:lightRig rig="threePt" dir="t"/>
+    </dgm:scene3d>
+    <dgm:sp3d/>
+    <dgm:txPr/>
+    <dgm:style>
+      <a:lnRef idx="2">
+        <a:scrgbClr r="0" g="0" b="0"/>
+      </a:lnRef>
+      <a:fillRef idx="0">
+        <a:scrgbClr r="0" g="0" b="0"/>
+      </a:fillRef>
+      <a:effectRef idx="0">
+        <a:scrgbClr r="0" g="0" b="0"/>
+      </a:effectRef>
+      <a:fontRef idx="minor"/>
+    </dgm:style>
+  </dgm:styleLbl>
+  <dgm:styleLbl name="parChTrans1D2">
+    <dgm:scene3d>
+      <a:camera prst="orthographicFront"/>
+      <a:lightRig rig="threePt" dir="t"/>
+    </dgm:scene3d>
+    <dgm:sp3d/>
+    <dgm:txPr/>
+    <dgm:style>
+      <a:lnRef idx="2">
+        <a:scrgbClr r="0" g="0" b="0"/>
+      </a:lnRef>
+      <a:fillRef idx="0">
+        <a:scrgbClr r="0" g="0" b="0"/>
+      </a:fillRef>
+      <a:effectRef idx="0">
+        <a:scrgbClr r="0" g="0" b="0"/>
+      </a:effectRef>
+      <a:fontRef idx="minor"/>
+    </dgm:style>
+  </dgm:styleLbl>
+  <dgm:styleLbl name="parChTrans1D3">
+    <dgm:scene3d>
+      <a:camera prst="orthographicFront"/>
+      <a:lightRig rig="threePt" dir="t"/>
+    </dgm:scene3d>
+    <dgm:sp3d/>
+    <dgm:txPr/>
+    <dgm:style>
+      <a:lnRef idx="2">
+        <a:scrgbClr r="0" g="0" b="0"/>
+      </a:lnRef>
+      <a:fillRef idx="0">
+        <a:scrgbClr r="0" g="0" b="0"/>
+      </a:fillRef>
+      <a:effectRef idx="0">
+        <a:scrgbClr r="0" g="0" b="0"/>
+      </a:effectRef>
+      <a:fontRef idx="minor"/>
+    </dgm:style>
+  </dgm:styleLbl>
+  <dgm:styleLbl name="parChTrans1D4">
+    <dgm:scene3d>
+      <a:camera prst="orthographicFront"/>
+      <a:lightRig rig="threePt" dir="t"/>
+    </dgm:scene3d>
+    <dgm:sp3d/>
+    <dgm:txPr/>
+    <dgm:style>
+      <a:lnRef idx="2">
+        <a:scrgbClr r="0" g="0" b="0"/>
+      </a:lnRef>
+      <a:fillRef idx="0">
+        <a:scrgbClr r="0" g="0" b="0"/>
+      </a:fillRef>
+      <a:effectRef idx="0">
+        <a:scrgbClr r="0" g="0" b="0"/>
+      </a:effectRef>
+      <a:fontRef idx="minor"/>
+    </dgm:style>
+  </dgm:styleLbl>
+  <dgm:styleLbl name="fgAcc1">
+    <dgm:scene3d>
+      <a:camera prst="orthographicFront"/>
+      <a:lightRig rig="threePt" dir="t"/>
+    </dgm:scene3d>
+    <dgm:sp3d/>
+    <dgm:txPr/>
+    <dgm:style>
+      <a:lnRef idx="2">
+        <a:scrgbClr r="0" g="0" b="0"/>
+      </a:lnRef>
+      <a:fillRef idx="1">
+        <a:scrgbClr r="0" g="0" b="0"/>
+      </a:fillRef>
+      <a:effectRef idx="0">
+        <a:scrgbClr r="0" g="0" b="0"/>
+      </a:effectRef>
+      <a:fontRef idx="minor"/>
+    </dgm:style>
+  </dgm:styleLbl>
+  <dgm:styleLbl name="conFgAcc1">
+    <dgm:scene3d>
+      <a:camera prst="orthographicFront"/>
+      <a:lightRig rig="threePt" dir="t"/>
+    </dgm:scene3d>
+    <dgm:sp3d/>
+    <dgm:txPr/>
+    <dgm:style>
+      <a:lnRef idx="2">
+        <a:scrgbClr r="0" g="0" b="0"/>
+      </a:lnRef>
+      <a:fillRef idx="1">
+        <a:scrgbClr r="0" g="0" b="0"/>
+      </a:fillRef>
+      <a:effectRef idx="0">
+        <a:scrgbClr r="0" g="0" b="0"/>
+      </a:effectRef>
+      <a:fontRef idx="minor"/>
+    </dgm:style>
+  </dgm:styleLbl>
+  <dgm:styleLbl name="alignAcc1">
+    <dgm:scene3d>
+      <a:camera prst="orthographicFront"/>
+      <a:lightRig rig="threePt" dir="t"/>
+    </dgm:scene3d>
+    <dgm:sp3d/>
+    <dgm:txPr/>
+    <dgm:style>
+      <a:lnRef idx="2">
+        <a:scrgbClr r="0" g="0" b="0"/>
+      </a:lnRef>
+      <a:fillRef idx="1">
+        <a:scrgbClr r="0" g="0" b="0"/>
+      </a:fillRef>
+      <a:effectRef idx="0">
+        <a:scrgbClr r="0" g="0" b="0"/>
+      </a:effectRef>
+      <a:fontRef idx="minor"/>
+    </dgm:style>
+  </dgm:styleLbl>
+  <dgm:styleLbl name="trAlignAcc1">
+    <dgm:scene3d>
+      <a:camera prst="orthographicFront"/>
+      <a:lightRig rig="threePt" dir="t"/>
+    </dgm:scene3d>
+    <dgm:sp3d/>
+    <dgm:txPr/>
+    <dgm:style>
+      <a:lnRef idx="1">
+        <a:scrgbClr r="0" g="0" b="0"/>
+      </a:lnRef>
+      <a:fillRef idx="1">
+        <a:scrgbClr r="0" g="0" b="0"/>
+      </a:fillRef>
+      <a:effectRef idx="0">
+        <a:scrgbClr r="0" g="0" b="0"/>
+      </a:effectRef>
+      <a:fontRef idx="minor"/>
+    </dgm:style>
+  </dgm:styleLbl>
+  <dgm:styleLbl name="bgAcc1">
+    <dgm:scene3d>
+      <a:camera prst="orthographicFront"/>
+      <a:lightRig rig="threePt" dir="t"/>
+    </dgm:scene3d>
+    <dgm:sp3d/>
+    <dgm:txPr/>
+    <dgm:style>
+      <a:lnRef idx="2">
+        <a:scrgbClr r="0" g="0" b="0"/>
+      </a:lnRef>
+      <a:fillRef idx="1">
+        <a:scrgbClr r="0" g="0" b="0"/>
+      </a:fillRef>
+      <a:effectRef idx="0">
+        <a:scrgbClr r="0" g="0" b="0"/>
+      </a:effectRef>
+      <a:fontRef idx="minor"/>
+    </dgm:style>
+  </dgm:styleLbl>
+  <dgm:styleLbl name="solidFgAcc1">
+    <dgm:scene3d>
+      <a:camera prst="orthographicFront"/>
+      <a:lightRig rig="threePt" dir="t"/>
+    </dgm:scene3d>
+    <dgm:sp3d/>
+    <dgm:txPr/>
+    <dgm:style>
+      <a:lnRef idx="2">
+        <a:scrgbClr r="0" g="0" b="0"/>
+      </a:lnRef>
+      <a:fillRef idx="1">
+        <a:scrgbClr r="0" g="0" b="0"/>
+      </a:fillRef>
+      <a:effectRef idx="0">
+        <a:scrgbClr r="0" g="0" b="0"/>
+      </a:effectRef>
+      <a:fontRef idx="minor"/>
+    </dgm:style>
+  </dgm:styleLbl>
+  <dgm:styleLbl name="solidAlignAcc1">
+    <dgm:scene3d>
+      <a:camera prst="orthographicFront"/>
+      <a:lightRig rig="threePt" dir="t"/>
+    </dgm:scene3d>
+    <dgm:sp3d/>
+    <dgm:txPr/>
+    <dgm:style>
+      <a:lnRef idx="2">
+        <a:scrgbClr r="0" g="0" b="0"/>
+      </a:lnRef>
+      <a:fillRef idx="1">
+        <a:scrgbClr r="0" g="0" b="0"/>
+      </a:fillRef>
+      <a:effectRef idx="0">
+        <a:scrgbClr r="0" g="0" b="0"/>
+      </a:effectRef>
+      <a:fontRef idx="minor"/>
+    </dgm:style>
+  </dgm:styleLbl>
+  <dgm:styleLbl name="solidBgAcc1">
+    <dgm:scene3d>
+      <a:camera prst="orthographicFront"/>
+      <a:lightRig rig="threePt" dir="t"/>
+    </dgm:scene3d>
+    <dgm:sp3d/>
+    <dgm:txPr/>
+    <dgm:style>
+      <a:lnRef idx="2">
+        <a:scrgbClr r="0" g="0" b="0"/>
+      </a:lnRef>
+      <a:fillRef idx="1">
+        <a:scrgbClr r="0" g="0" b="0"/>
+      </a:fillRef>
+      <a:effectRef idx="0">
+        <a:scrgbClr r="0" g="0" b="0"/>
+      </a:effectRef>
+      <a:fontRef idx="minor"/>
+    </dgm:style>
+  </dgm:styleLbl>
+  <dgm:styleLbl name="fgAccFollowNode1">
+    <dgm:scene3d>
+      <a:camera prst="orthographicFront"/>
+      <a:lightRig rig="threePt" dir="t"/>
+    </dgm:scene3d>
+    <dgm:sp3d/>
+    <dgm:txPr/>
+    <dgm:style>
+      <a:lnRef idx="2">
+        <a:scrgbClr r="0" g="0" b="0"/>
+      </a:lnRef>
+      <a:fillRef idx="1">
+        <a:scrgbClr r="0" g="0" b="0"/>
+      </a:fillRef>
+      <a:effectRef idx="0">
+        <a:scrgbClr r="0" g="0" b="0"/>
+      </a:effectRef>
+      <a:fontRef idx="minor"/>
+    </dgm:style>
+  </dgm:styleLbl>
+  <dgm:styleLbl name="alignAccFollowNode1">
+    <dgm:scene3d>
+      <a:camera prst="orthographicFront"/>
+      <a:lightRig rig="threePt" dir="t"/>
+    </dgm:scene3d>
+    <dgm:sp3d/>
+    <dgm:txPr/>
+    <dgm:style>
+      <a:lnRef idx="2">
+        <a:scrgbClr r="0" g="0" b="0"/>
+      </a:lnRef>
+      <a:fillRef idx="1">
+        <a:scrgbClr r="0" g="0" b="0"/>
+      </a:fillRef>
+      <a:effectRef idx="0">
+        <a:scrgbClr r="0" g="0" b="0"/>
+      </a:effectRef>
+      <a:fontRef idx="minor"/>
+    </dgm:style>
+  </dgm:styleLbl>
+  <dgm:styleLbl name="bgAccFollowNode1">
+    <dgm:scene3d>
+      <a:camera prst="orthographicFront"/>
+      <a:lightRig rig="threePt" dir="t"/>
+    </dgm:scene3d>
+    <dgm:sp3d/>
+    <dgm:txPr/>
+    <dgm:style>
+      <a:lnRef idx="2">
+        <a:scrgbClr r="0" g="0" b="0"/>
+      </a:lnRef>
+      <a:fillRef idx="1">
+        <a:scrgbClr r="0" g="0" b="0"/>
+      </a:fillRef>
+      <a:effectRef idx="0">
+        <a:scrgbClr r="0" g="0" b="0"/>
+      </a:effectRef>
+      <a:fontRef idx="minor"/>
+    </dgm:style>
+  </dgm:styleLbl>
+  <dgm:styleLbl name="fgAcc0">
+    <dgm:scene3d>
+      <a:camera prst="orthographicFront"/>
+      <a:lightRig rig="threePt" dir="t"/>
+    </dgm:scene3d>
+    <dgm:sp3d/>
+    <dgm:txPr/>
+    <dgm:style>
+      <a:lnRef idx="2">
+        <a:scrgbClr r="0" g="0" b="0"/>
+      </a:lnRef>
+      <a:fillRef idx="1">
+        <a:scrgbClr r="0" g="0" b="0"/>
+      </a:fillRef>
+      <a:effectRef idx="0">
+        <a:scrgbClr r="0" g="0" b="0"/>
+      </a:effectRef>
+      <a:fontRef idx="minor"/>
+    </dgm:style>
+  </dgm:styleLbl>
+  <dgm:styleLbl name="fgAcc2">
+    <dgm:scene3d>
+      <a:camera prst="orthographicFront"/>
+      <a:lightRig rig="threePt" dir="t"/>
+    </dgm:scene3d>
+    <dgm:sp3d/>
+    <dgm:txPr/>
+    <dgm:style>
+      <a:lnRef idx="2">
+        <a:scrgbClr r="0" g="0" b="0"/>
+      </a:lnRef>
+      <a:fillRef idx="1">
+        <a:scrgbClr r="0" g="0" b="0"/>
+      </a:fillRef>
+      <a:effectRef idx="0">
+        <a:scrgbClr r="0" g="0" b="0"/>
+      </a:effectRef>
+      <a:fontRef idx="minor"/>
+    </dgm:style>
+  </dgm:styleLbl>
+  <dgm:styleLbl name="fgAcc3">
+    <dgm:scene3d>
+      <a:camera prst="orthographicFront"/>
+      <a:lightRig rig="threePt" dir="t"/>
+    </dgm:scene3d>
+    <dgm:sp3d/>
+    <dgm:txPr/>
+    <dgm:style>
+      <a:lnRef idx="2">
+        <a:scrgbClr r="0" g="0" b="0"/>
+      </a:lnRef>
+      <a:fillRef idx="1">
+        <a:scrgbClr r="0" g="0" b="0"/>
+      </a:fillRef>
+      <a:effectRef idx="0">
+        <a:scrgbClr r="0" g="0" b="0"/>
+      </a:effectRef>
+      <a:fontRef idx="minor"/>
+    </dgm:style>
+  </dgm:styleLbl>
+  <dgm:styleLbl name="fgAcc4">
+    <dgm:scene3d>
+      <a:camera prst="orthographicFront"/>
+      <a:lightRig rig="threePt" dir="t"/>
+    </dgm:scene3d>
+    <dgm:sp3d/>
+    <dgm:txPr/>
+    <dgm:style>
+      <a:lnRef idx="2">
+        <a:scrgbClr r="0" g="0" b="0"/>
+      </a:lnRef>
+      <a:fillRef idx="1">
+        <a:scrgbClr r="0" g="0" b="0"/>
+      </a:fillRef>
+      <a:effectRef idx="0">
+        <a:scrgbClr r="0" g="0" b="0"/>
+      </a:effectRef>
+      <a:fontRef idx="minor"/>
+    </dgm:style>
+  </dgm:styleLbl>
+  <dgm:styleLbl name="bgShp">
+    <dgm:scene3d>
+      <a:camera prst="orthographicFront"/>
+      <a:lightRig rig="threePt" dir="t"/>
+    </dgm:scene3d>
+    <dgm:sp3d/>
+    <dgm:txPr/>
+    <dgm:style>
+      <a:lnRef idx="0">
+        <a:scrgbClr r="0" g="0" b="0"/>
+      </a:lnRef>
+      <a:fillRef idx="1">
+        <a:scrgbClr r="0" g="0" b="0"/>
+      </a:fillRef>
+      <a:effectRef idx="0">
+        <a:scrgbClr r="0" g="0" b="0"/>
+      </a:effectRef>
+      <a:fontRef idx="minor"/>
+    </dgm:style>
+  </dgm:styleLbl>
+  <dgm:styleLbl name="dkBgShp">
+    <dgm:scene3d>
+      <a:camera prst="orthographicFront"/>
+      <a:lightRig rig="threePt" dir="t"/>
+    </dgm:scene3d>
+    <dgm:sp3d/>
+    <dgm:txPr/>
+    <dgm:style>
+      <a:lnRef idx="0">
+        <a:scrgbClr r="0" g="0" b="0"/>
+      </a:lnRef>
+      <a:fillRef idx="1">
+        <a:scrgbClr r="0" g="0" b="0"/>
+      </a:fillRef>
+      <a:effectRef idx="0">
+        <a:scrgbClr r="0" g="0" b="0"/>
+      </a:effectRef>
+      <a:fontRef idx="minor"/>
+    </dgm:style>
+  </dgm:styleLbl>
+  <dgm:styleLbl name="trBgShp">
+    <dgm:scene3d>
+      <a:camera prst="orthographicFront"/>
+      <a:lightRig rig="threePt" dir="t"/>
+    </dgm:scene3d>
+    <dgm:sp3d/>
+    <dgm:txPr/>
+    <dgm:style>
+      <a:lnRef idx="0">
+        <a:scrgbClr r="0" g="0" b="0"/>
+      </a:lnRef>
+      <a:fillRef idx="1">
+        <a:scrgbClr r="0" g="0" b="0"/>
+      </a:fillRef>
+      <a:effectRef idx="0">
+        <a:scrgbClr r="0" g="0" b="0"/>
+      </a:effectRef>
+      <a:fontRef idx="minor"/>
+    </dgm:style>
+  </dgm:styleLbl>
+  <dgm:styleLbl name="fgShp">
+    <dgm:scene3d>
+      <a:camera prst="orthographicFront"/>
+      <a:lightRig rig="threePt" dir="t"/>
+    </dgm:scene3d>
+    <dgm:sp3d/>
+    <dgm:txPr/>
+    <dgm:style>
+      <a:lnRef idx="2">
+        <a:scrgbClr r="0" g="0" b="0"/>
+      </a:lnRef>
+      <a:fillRef idx="1">
+        <a:scrgbClr r="0" g="0" b="0"/>
+      </a:fillRef>
+      <a:effectRef idx="0">
+        <a:scrgbClr r="0" g="0" b="0"/>
+      </a:effectRef>
+      <a:fontRef idx="minor"/>
+    </dgm:style>
+  </dgm:styleLbl>
+  <dgm:styleLbl name="revTx">
+    <dgm:scene3d>
+      <a:camera prst="orthographicFront"/>
+      <a:lightRig rig="threePt" dir="t"/>
+    </dgm:scene3d>
+    <dgm:sp3d/>
+    <dgm:txPr/>
+    <dgm:style>
+      <a:lnRef idx="0">
+        <a:scrgbClr r="0" g="0" b="0"/>
+      </a:lnRef>
+      <a:fillRef idx="0">
+        <a:scrgbClr r="0" g="0" b="0"/>
+      </a:fillRef>
+      <a:effectRef idx="0">
+        <a:scrgbClr r="0" g="0" b="0"/>
+      </a:effectRef>
+      <a:fontRef idx="minor"/>
+    </dgm:style>
+  </dgm:styleLbl>
+</dgm:styleDef>
+</file>
+
+<file path=ppt/diagrams/quickStyle2.xml><?xml version="1.0" encoding="utf-8"?>
 <dgm:styleDef xmlns:dgm="http://schemas.openxmlformats.org/drawingml/2006/diagram" xmlns:a="http://schemas.openxmlformats.org/drawingml/2006/main" uniqueId="urn:microsoft.com/office/officeart/2005/8/quickstyle/simple4">
   <dgm:title val=""/>
   <dgm:desc val=""/>
@@ -4918,7 +8070,7 @@
 </dgm:styleDef>
 </file>
 
-<file path=ppt/diagrams/quickStyle2.xml><?xml version="1.0" encoding="utf-8"?>
+<file path=ppt/diagrams/quickStyle3.xml><?xml version="1.0" encoding="utf-8"?>
 <dgm:styleDef xmlns:dgm="http://schemas.openxmlformats.org/drawingml/2006/diagram" xmlns:a="http://schemas.openxmlformats.org/drawingml/2006/main" uniqueId="urn:microsoft.com/office/officeart/2005/8/quickstyle/simple1">
   <dgm:title val=""/>
   <dgm:desc val=""/>
@@ -9693,6 +12845,607 @@
 <file path=ppt/slides/slide10.xml><?xml version="1.0" encoding="utf-8"?>
 <p:sld xmlns:a="http://schemas.openxmlformats.org/drawingml/2006/main" xmlns:r="http://schemas.openxmlformats.org/officeDocument/2006/relationships" xmlns:p="http://schemas.openxmlformats.org/presentationml/2006/main">
   <p:cSld>
+    <p:bg>
+      <p:bgPr>
+        <a:solidFill>
+          <a:schemeClr val="bg1"/>
+        </a:solidFill>
+        <a:effectLst/>
+      </p:bgPr>
+    </p:bg>
+    <p:spTree>
+      <p:nvGrpSpPr>
+        <p:cNvPr id="1" name=""/>
+        <p:cNvGrpSpPr/>
+        <p:nvPr/>
+      </p:nvGrpSpPr>
+      <p:grpSpPr>
+        <a:xfrm>
+          <a:off x="0" y="0"/>
+          <a:ext cx="0" cy="0"/>
+          <a:chOff x="0" y="0"/>
+          <a:chExt cx="0" cy="0"/>
+        </a:xfrm>
+      </p:grpSpPr>
+      <p:sp useBgFill="1">
+        <p:nvSpPr>
+          <p:cNvPr id="16" name="Rectangle 15">
+            <a:extLst>
+              <a:ext uri="{FF2B5EF4-FFF2-40B4-BE49-F238E27FC236}">
+                <a16:creationId xmlns:a16="http://schemas.microsoft.com/office/drawing/2014/main" id="{5AC1364A-3E3D-4F0D-8776-78AF3A270DD6}"/>
+              </a:ext>
+              <a:ext uri="{C183D7F6-B498-43B3-948B-1728B52AA6E4}">
+                <adec:decorative xmlns:adec="http://schemas.microsoft.com/office/drawing/2017/decorative" val="1"/>
+              </a:ext>
+            </a:extLst>
+          </p:cNvPr>
+          <p:cNvSpPr>
+            <a:spLocks noGrp="1" noRot="1" noChangeAspect="1" noMove="1" noResize="1" noEditPoints="1" noAdjustHandles="1" noChangeArrowheads="1" noChangeShapeType="1" noTextEdit="1"/>
+          </p:cNvSpPr>
+          <p:nvPr>
+            <p:extLst>
+              <p:ext uri="{386F3935-93C4-4BCD-93E2-E3B085C9AB24}">
+                <p16:designElem xmlns:p16="http://schemas.microsoft.com/office/powerpoint/2015/main" val="1"/>
+              </p:ext>
+            </p:extLst>
+          </p:nvPr>
+        </p:nvSpPr>
+        <p:spPr>
+          <a:xfrm>
+            <a:off x="0" y="0"/>
+            <a:ext cx="12188952" cy="6858000"/>
+          </a:xfrm>
+          <a:prstGeom prst="rect">
+            <a:avLst/>
+          </a:prstGeom>
+          <a:ln>
+            <a:noFill/>
+          </a:ln>
+        </p:spPr>
+        <p:style>
+          <a:lnRef idx="2">
+            <a:schemeClr val="accent1">
+              <a:shade val="50000"/>
+            </a:schemeClr>
+          </a:lnRef>
+          <a:fillRef idx="1">
+            <a:schemeClr val="accent1"/>
+          </a:fillRef>
+          <a:effectRef idx="0">
+            <a:schemeClr val="accent1"/>
+          </a:effectRef>
+          <a:fontRef idx="minor">
+            <a:schemeClr val="lt1"/>
+          </a:fontRef>
+        </p:style>
+        <p:txBody>
+          <a:bodyPr rtlCol="0" anchor="ctr"/>
+          <a:lstStyle/>
+          <a:p>
+            <a:pPr algn="ctr"/>
+            <a:endParaRPr lang="en-US"/>
+          </a:p>
+        </p:txBody>
+      </p:sp>
+      <p:sp>
+        <p:nvSpPr>
+          <p:cNvPr id="2" name="Title 1">
+            <a:extLst>
+              <a:ext uri="{FF2B5EF4-FFF2-40B4-BE49-F238E27FC236}">
+                <a16:creationId xmlns:a16="http://schemas.microsoft.com/office/drawing/2014/main" id="{E0F5C119-2DAB-CFB8-E012-BE2734912C32}"/>
+              </a:ext>
+            </a:extLst>
+          </p:cNvPr>
+          <p:cNvSpPr>
+            <a:spLocks noGrp="1"/>
+          </p:cNvSpPr>
+          <p:nvPr>
+            <p:ph type="title"/>
+          </p:nvPr>
+        </p:nvSpPr>
+        <p:spPr>
+          <a:xfrm>
+            <a:off x="4797501" y="329184"/>
+            <a:ext cx="6755626" cy="1783080"/>
+          </a:xfrm>
+        </p:spPr>
+        <p:txBody>
+          <a:bodyPr anchor="b">
+            <a:normAutofit/>
+          </a:bodyPr>
+          <a:lstStyle/>
+          <a:p>
+            <a:r>
+              <a:rPr lang="en-US" sz="5400"/>
+              <a:t>Unsupervised Anomaly Detection </a:t>
+            </a:r>
+          </a:p>
+        </p:txBody>
+      </p:sp>
+      <p:pic>
+        <p:nvPicPr>
+          <p:cNvPr id="5" name="Picture 4">
+            <a:extLst>
+              <a:ext uri="{FF2B5EF4-FFF2-40B4-BE49-F238E27FC236}">
+                <a16:creationId xmlns:a16="http://schemas.microsoft.com/office/drawing/2014/main" id="{EDCA9E1D-D4EC-F3E5-1F5E-5B0D5B8ADE01}"/>
+              </a:ext>
+            </a:extLst>
+          </p:cNvPr>
+          <p:cNvPicPr>
+            <a:picLocks noChangeAspect="1"/>
+          </p:cNvPicPr>
+          <p:nvPr/>
+        </p:nvPicPr>
+        <p:blipFill>
+          <a:blip r:embed="rId2">
+            <a:extLst>
+              <a:ext uri="{28A0092B-C50C-407E-A947-70E740481C1C}">
+                <a14:useLocalDpi xmlns:a14="http://schemas.microsoft.com/office/drawing/2010/main" val="0"/>
+              </a:ext>
+            </a:extLst>
+          </a:blip>
+          <a:stretch>
+            <a:fillRect/>
+          </a:stretch>
+        </p:blipFill>
+        <p:spPr>
+          <a:xfrm>
+            <a:off x="320040" y="789645"/>
+            <a:ext cx="4014216" cy="2328245"/>
+          </a:xfrm>
+          <a:prstGeom prst="rect">
+            <a:avLst/>
+          </a:prstGeom>
+        </p:spPr>
+      </p:pic>
+      <p:sp>
+        <p:nvSpPr>
+          <p:cNvPr id="17" name="sketchy line">
+            <a:extLst>
+              <a:ext uri="{FF2B5EF4-FFF2-40B4-BE49-F238E27FC236}">
+                <a16:creationId xmlns:a16="http://schemas.microsoft.com/office/drawing/2014/main" id="{3FCFB1DE-0B7E-48CC-BA90-B2AB0889F9D6}"/>
+              </a:ext>
+              <a:ext uri="{C183D7F6-B498-43B3-948B-1728B52AA6E4}">
+                <adec:decorative xmlns:adec="http://schemas.microsoft.com/office/drawing/2017/decorative" val="1"/>
+              </a:ext>
+            </a:extLst>
+          </p:cNvPr>
+          <p:cNvSpPr>
+            <a:spLocks noGrp="1" noRot="1" noChangeAspect="1" noMove="1" noResize="1" noEditPoints="1" noAdjustHandles="1" noChangeArrowheads="1" noChangeShapeType="1" noTextEdit="1"/>
+          </p:cNvSpPr>
+          <p:nvPr>
+            <p:extLst>
+              <p:ext uri="{386F3935-93C4-4BCD-93E2-E3B085C9AB24}">
+                <p16:designElem xmlns:p16="http://schemas.microsoft.com/office/powerpoint/2015/main" val="1"/>
+              </p:ext>
+            </p:extLst>
+          </p:nvPr>
+        </p:nvSpPr>
+        <p:spPr>
+          <a:xfrm>
+            <a:off x="4797494" y="2395728"/>
+            <a:ext cx="4243589" cy="18288"/>
+          </a:xfrm>
+          <a:custGeom>
+            <a:avLst/>
+            <a:gdLst>
+              <a:gd name="csX0" fmla="*/ 0 w 4243589"/>
+              <a:gd name="csY0" fmla="*/ 0 h 18288"/>
+              <a:gd name="csX1" fmla="*/ 478919 w 4243589"/>
+              <a:gd name="csY1" fmla="*/ 0 h 18288"/>
+              <a:gd name="csX2" fmla="*/ 957839 w 4243589"/>
+              <a:gd name="csY2" fmla="*/ 0 h 18288"/>
+              <a:gd name="csX3" fmla="*/ 1521630 w 4243589"/>
+              <a:gd name="csY3" fmla="*/ 0 h 18288"/>
+              <a:gd name="csX4" fmla="*/ 2212729 w 4243589"/>
+              <a:gd name="csY4" fmla="*/ 0 h 18288"/>
+              <a:gd name="csX5" fmla="*/ 2734084 w 4243589"/>
+              <a:gd name="csY5" fmla="*/ 0 h 18288"/>
+              <a:gd name="csX6" fmla="*/ 3255439 w 4243589"/>
+              <a:gd name="csY6" fmla="*/ 0 h 18288"/>
+              <a:gd name="csX7" fmla="*/ 4243589 w 4243589"/>
+              <a:gd name="csY7" fmla="*/ 0 h 18288"/>
+              <a:gd name="csX8" fmla="*/ 4243589 w 4243589"/>
+              <a:gd name="csY8" fmla="*/ 18288 h 18288"/>
+              <a:gd name="csX9" fmla="*/ 3594926 w 4243589"/>
+              <a:gd name="csY9" fmla="*/ 18288 h 18288"/>
+              <a:gd name="csX10" fmla="*/ 3073571 w 4243589"/>
+              <a:gd name="csY10" fmla="*/ 18288 h 18288"/>
+              <a:gd name="csX11" fmla="*/ 2552216 w 4243589"/>
+              <a:gd name="csY11" fmla="*/ 18288 h 18288"/>
+              <a:gd name="csX12" fmla="*/ 1903553 w 4243589"/>
+              <a:gd name="csY12" fmla="*/ 18288 h 18288"/>
+              <a:gd name="csX13" fmla="*/ 1212454 w 4243589"/>
+              <a:gd name="csY13" fmla="*/ 18288 h 18288"/>
+              <a:gd name="csX14" fmla="*/ 733535 w 4243589"/>
+              <a:gd name="csY14" fmla="*/ 18288 h 18288"/>
+              <a:gd name="csX15" fmla="*/ 0 w 4243589"/>
+              <a:gd name="csY15" fmla="*/ 18288 h 18288"/>
+              <a:gd name="csX16" fmla="*/ 0 w 4243589"/>
+              <a:gd name="csY16" fmla="*/ 0 h 18288"/>
+            </a:gdLst>
+            <a:ahLst/>
+            <a:cxnLst>
+              <a:cxn ang="0">
+                <a:pos x="csX0" y="csY0"/>
+              </a:cxn>
+              <a:cxn ang="0">
+                <a:pos x="csX1" y="csY1"/>
+              </a:cxn>
+              <a:cxn ang="0">
+                <a:pos x="csX2" y="csY2"/>
+              </a:cxn>
+              <a:cxn ang="0">
+                <a:pos x="csX3" y="csY3"/>
+              </a:cxn>
+              <a:cxn ang="0">
+                <a:pos x="csX4" y="csY4"/>
+              </a:cxn>
+              <a:cxn ang="0">
+                <a:pos x="csX5" y="csY5"/>
+              </a:cxn>
+              <a:cxn ang="0">
+                <a:pos x="csX6" y="csY6"/>
+              </a:cxn>
+              <a:cxn ang="0">
+                <a:pos x="csX7" y="csY7"/>
+              </a:cxn>
+              <a:cxn ang="0">
+                <a:pos x="csX8" y="csY8"/>
+              </a:cxn>
+              <a:cxn ang="0">
+                <a:pos x="csX9" y="csY9"/>
+              </a:cxn>
+              <a:cxn ang="0">
+                <a:pos x="csX10" y="csY10"/>
+              </a:cxn>
+              <a:cxn ang="0">
+                <a:pos x="csX11" y="csY11"/>
+              </a:cxn>
+              <a:cxn ang="0">
+                <a:pos x="csX12" y="csY12"/>
+              </a:cxn>
+              <a:cxn ang="0">
+                <a:pos x="csX13" y="csY13"/>
+              </a:cxn>
+              <a:cxn ang="0">
+                <a:pos x="csX14" y="csY14"/>
+              </a:cxn>
+              <a:cxn ang="0">
+                <a:pos x="csX15" y="csY15"/>
+              </a:cxn>
+              <a:cxn ang="0">
+                <a:pos x="csX16" y="csY16"/>
+              </a:cxn>
+            </a:cxnLst>
+            <a:rect l="l" t="t" r="r" b="b"/>
+            <a:pathLst>
+              <a:path w="4243589" h="18288" fill="none" extrusionOk="0">
+                <a:moveTo>
+                  <a:pt x="0" y="0"/>
+                </a:moveTo>
+                <a:cubicBezTo>
+                  <a:pt x="213395" y="-21006"/>
+                  <a:pt x="307421" y="-18116"/>
+                  <a:pt x="478919" y="0"/>
+                </a:cubicBezTo>
+                <a:cubicBezTo>
+                  <a:pt x="650417" y="18116"/>
+                  <a:pt x="831092" y="-21237"/>
+                  <a:pt x="957839" y="0"/>
+                </a:cubicBezTo>
+                <a:cubicBezTo>
+                  <a:pt x="1084586" y="21237"/>
+                  <a:pt x="1301682" y="25124"/>
+                  <a:pt x="1521630" y="0"/>
+                </a:cubicBezTo>
+                <a:cubicBezTo>
+                  <a:pt x="1741578" y="-25124"/>
+                  <a:pt x="1970269" y="-29139"/>
+                  <a:pt x="2212729" y="0"/>
+                </a:cubicBezTo>
+                <a:cubicBezTo>
+                  <a:pt x="2455189" y="29139"/>
+                  <a:pt x="2558847" y="-4796"/>
+                  <a:pt x="2734084" y="0"/>
+                </a:cubicBezTo>
+                <a:cubicBezTo>
+                  <a:pt x="2909321" y="4796"/>
+                  <a:pt x="3097217" y="-13409"/>
+                  <a:pt x="3255439" y="0"/>
+                </a:cubicBezTo>
+                <a:cubicBezTo>
+                  <a:pt x="3413662" y="13409"/>
+                  <a:pt x="3979999" y="-10121"/>
+                  <a:pt x="4243589" y="0"/>
+                </a:cubicBezTo>
+                <a:cubicBezTo>
+                  <a:pt x="4244484" y="8974"/>
+                  <a:pt x="4243043" y="9359"/>
+                  <a:pt x="4243589" y="18288"/>
+                </a:cubicBezTo>
+                <a:cubicBezTo>
+                  <a:pt x="4058777" y="31246"/>
+                  <a:pt x="3910348" y="3158"/>
+                  <a:pt x="3594926" y="18288"/>
+                </a:cubicBezTo>
+                <a:cubicBezTo>
+                  <a:pt x="3279504" y="33418"/>
+                  <a:pt x="3319955" y="-3977"/>
+                  <a:pt x="3073571" y="18288"/>
+                </a:cubicBezTo>
+                <a:cubicBezTo>
+                  <a:pt x="2827187" y="40553"/>
+                  <a:pt x="2767387" y="1863"/>
+                  <a:pt x="2552216" y="18288"/>
+                </a:cubicBezTo>
+                <a:cubicBezTo>
+                  <a:pt x="2337046" y="34713"/>
+                  <a:pt x="2181871" y="19527"/>
+                  <a:pt x="1903553" y="18288"/>
+                </a:cubicBezTo>
+                <a:cubicBezTo>
+                  <a:pt x="1625235" y="17049"/>
+                  <a:pt x="1557672" y="24174"/>
+                  <a:pt x="1212454" y="18288"/>
+                </a:cubicBezTo>
+                <a:cubicBezTo>
+                  <a:pt x="867236" y="12402"/>
+                  <a:pt x="874382" y="15627"/>
+                  <a:pt x="733535" y="18288"/>
+                </a:cubicBezTo>
+                <a:cubicBezTo>
+                  <a:pt x="592688" y="20949"/>
+                  <a:pt x="183477" y="14753"/>
+                  <a:pt x="0" y="18288"/>
+                </a:cubicBezTo>
+                <a:cubicBezTo>
+                  <a:pt x="-229" y="14222"/>
+                  <a:pt x="509" y="5816"/>
+                  <a:pt x="0" y="0"/>
+                </a:cubicBezTo>
+                <a:close/>
+              </a:path>
+              <a:path w="4243589" h="18288" stroke="0" extrusionOk="0">
+                <a:moveTo>
+                  <a:pt x="0" y="0"/>
+                </a:moveTo>
+                <a:cubicBezTo>
+                  <a:pt x="143690" y="16630"/>
+                  <a:pt x="266667" y="14847"/>
+                  <a:pt x="521355" y="0"/>
+                </a:cubicBezTo>
+                <a:cubicBezTo>
+                  <a:pt x="776043" y="-14847"/>
+                  <a:pt x="814491" y="-17363"/>
+                  <a:pt x="1000275" y="0"/>
+                </a:cubicBezTo>
+                <a:cubicBezTo>
+                  <a:pt x="1186059" y="17363"/>
+                  <a:pt x="1352504" y="-23507"/>
+                  <a:pt x="1521630" y="0"/>
+                </a:cubicBezTo>
+                <a:cubicBezTo>
+                  <a:pt x="1690756" y="23507"/>
+                  <a:pt x="1889525" y="5871"/>
+                  <a:pt x="2127857" y="0"/>
+                </a:cubicBezTo>
+                <a:cubicBezTo>
+                  <a:pt x="2366189" y="-5871"/>
+                  <a:pt x="2620628" y="-27997"/>
+                  <a:pt x="2776520" y="0"/>
+                </a:cubicBezTo>
+                <a:cubicBezTo>
+                  <a:pt x="2932412" y="27997"/>
+                  <a:pt x="3131683" y="-25073"/>
+                  <a:pt x="3467618" y="0"/>
+                </a:cubicBezTo>
+                <a:cubicBezTo>
+                  <a:pt x="3803553" y="25073"/>
+                  <a:pt x="4017371" y="3071"/>
+                  <a:pt x="4243589" y="0"/>
+                </a:cubicBezTo>
+                <a:cubicBezTo>
+                  <a:pt x="4243134" y="6162"/>
+                  <a:pt x="4243492" y="11775"/>
+                  <a:pt x="4243589" y="18288"/>
+                </a:cubicBezTo>
+                <a:cubicBezTo>
+                  <a:pt x="4017834" y="-5779"/>
+                  <a:pt x="3834586" y="13376"/>
+                  <a:pt x="3594926" y="18288"/>
+                </a:cubicBezTo>
+                <a:cubicBezTo>
+                  <a:pt x="3355266" y="23200"/>
+                  <a:pt x="3204179" y="2869"/>
+                  <a:pt x="2903827" y="18288"/>
+                </a:cubicBezTo>
+                <a:cubicBezTo>
+                  <a:pt x="2603475" y="33707"/>
+                  <a:pt x="2526187" y="46187"/>
+                  <a:pt x="2212729" y="18288"/>
+                </a:cubicBezTo>
+                <a:cubicBezTo>
+                  <a:pt x="1899271" y="-9611"/>
+                  <a:pt x="1966289" y="29692"/>
+                  <a:pt x="1733809" y="18288"/>
+                </a:cubicBezTo>
+                <a:cubicBezTo>
+                  <a:pt x="1501329" y="6884"/>
+                  <a:pt x="1343612" y="12492"/>
+                  <a:pt x="1085146" y="18288"/>
+                </a:cubicBezTo>
+                <a:cubicBezTo>
+                  <a:pt x="826680" y="24084"/>
+                  <a:pt x="778184" y="35607"/>
+                  <a:pt x="521355" y="18288"/>
+                </a:cubicBezTo>
+                <a:cubicBezTo>
+                  <a:pt x="264526" y="969"/>
+                  <a:pt x="120277" y="4268"/>
+                  <a:pt x="0" y="18288"/>
+                </a:cubicBezTo>
+                <a:cubicBezTo>
+                  <a:pt x="766" y="10800"/>
+                  <a:pt x="-457" y="8180"/>
+                  <a:pt x="0" y="0"/>
+                </a:cubicBezTo>
+                <a:close/>
+              </a:path>
+            </a:pathLst>
+          </a:custGeom>
+          <a:solidFill>
+            <a:schemeClr val="accent2"/>
+          </a:solidFill>
+          <a:ln w="41275" cap="rnd">
+            <a:solidFill>
+              <a:schemeClr val="accent2"/>
+            </a:solidFill>
+            <a:round/>
+            <a:extLst>
+              <a:ext uri="{C807C97D-BFC1-408E-A445-0C87EB9F89A2}">
+                <ask:lineSketchStyleProps xmlns:ask="http://schemas.microsoft.com/office/drawing/2018/sketchyshapes" sd="2727557108">
+                  <a:prstGeom prst="rect">
+                    <a:avLst/>
+                  </a:prstGeom>
+                  <ask:type>
+                    <ask:lineSketchFreehand/>
+                  </ask:type>
+                </ask:lineSketchStyleProps>
+              </a:ext>
+            </a:extLst>
+          </a:ln>
+        </p:spPr>
+        <p:style>
+          <a:lnRef idx="2">
+            <a:schemeClr val="accent1">
+              <a:shade val="50000"/>
+            </a:schemeClr>
+          </a:lnRef>
+          <a:fillRef idx="1">
+            <a:schemeClr val="accent1"/>
+          </a:fillRef>
+          <a:effectRef idx="0">
+            <a:schemeClr val="accent1"/>
+          </a:effectRef>
+          <a:fontRef idx="minor">
+            <a:schemeClr val="lt1"/>
+          </a:fontRef>
+        </p:style>
+        <p:txBody>
+          <a:bodyPr rtlCol="0" anchor="ctr"/>
+          <a:lstStyle/>
+          <a:p>
+            <a:pPr algn="ctr"/>
+            <a:endParaRPr lang="en-US"/>
+          </a:p>
+        </p:txBody>
+      </p:sp>
+      <p:pic>
+        <p:nvPicPr>
+          <p:cNvPr id="7" name="Picture 6">
+            <a:extLst>
+              <a:ext uri="{FF2B5EF4-FFF2-40B4-BE49-F238E27FC236}">
+                <a16:creationId xmlns:a16="http://schemas.microsoft.com/office/drawing/2014/main" id="{8872E0E6-1585-7902-E2A7-A0E9BD09C847}"/>
+              </a:ext>
+            </a:extLst>
+          </p:cNvPr>
+          <p:cNvPicPr>
+            <a:picLocks noChangeAspect="1"/>
+          </p:cNvPicPr>
+          <p:nvPr/>
+        </p:nvPicPr>
+        <p:blipFill>
+          <a:blip r:embed="rId3">
+            <a:extLst>
+              <a:ext uri="{28A0092B-C50C-407E-A947-70E740481C1C}">
+                <a14:useLocalDpi xmlns:a14="http://schemas.microsoft.com/office/drawing/2010/main" val="0"/>
+              </a:ext>
+            </a:extLst>
+          </a:blip>
+          <a:stretch>
+            <a:fillRect/>
+          </a:stretch>
+        </p:blipFill>
+        <p:spPr>
+          <a:xfrm>
+            <a:off x="392498" y="4149598"/>
+            <a:ext cx="3851012" cy="2098802"/>
+          </a:xfrm>
+          <a:prstGeom prst="rect">
+            <a:avLst/>
+          </a:prstGeom>
+        </p:spPr>
+      </p:pic>
+      <p:sp>
+        <p:nvSpPr>
+          <p:cNvPr id="3" name="Content Placeholder 2">
+            <a:extLst>
+              <a:ext uri="{FF2B5EF4-FFF2-40B4-BE49-F238E27FC236}">
+                <a16:creationId xmlns:a16="http://schemas.microsoft.com/office/drawing/2014/main" id="{0BE73496-2146-1B47-AE02-B844407BC333}"/>
+              </a:ext>
+            </a:extLst>
+          </p:cNvPr>
+          <p:cNvSpPr>
+            <a:spLocks noGrp="1"/>
+          </p:cNvSpPr>
+          <p:nvPr>
+            <p:ph idx="1"/>
+          </p:nvPr>
+        </p:nvSpPr>
+        <p:spPr>
+          <a:xfrm>
+            <a:off x="4797494" y="2706624"/>
+            <a:ext cx="6755626" cy="3483864"/>
+          </a:xfrm>
+        </p:spPr>
+        <p:txBody>
+          <a:bodyPr>
+            <a:normAutofit/>
+          </a:bodyPr>
+          <a:lstStyle/>
+          <a:p>
+            <a:r>
+              <a:rPr lang="en-US" sz="1700"/>
+              <a:t>Hypothesis: Cinderellas would be identified as distinct outliers among other low seeded teams.</a:t>
+            </a:r>
+          </a:p>
+          <a:p>
+            <a:endParaRPr lang="en-US" sz="1700"/>
+          </a:p>
+          <a:p>
+            <a:r>
+              <a:rPr lang="en-US" sz="1700"/>
+              <a:t>Reality: Isolation Forest showed that Cinderellas were mostly statistically normal to other lower ranked seeds and lacked significant variance.</a:t>
+            </a:r>
+          </a:p>
+          <a:p>
+            <a:endParaRPr lang="en-US" sz="1700"/>
+          </a:p>
+          <a:p>
+            <a:r>
+              <a:rPr lang="en-US" sz="1700"/>
+              <a:t>However, the Gaussian Mixed Model (GMM) was able to group teams into 4 distinct archetypes. It successfully grouped 82% of historical Cinderella teams into a high performing archetype (Cluster 2) where many higher ranked teams are. This suggests that they distinct enough to be identified as different from the average lower seed.</a:t>
+            </a:r>
+          </a:p>
+        </p:txBody>
+      </p:sp>
+    </p:spTree>
+    <p:extLst>
+      <p:ext uri="{BB962C8B-B14F-4D97-AF65-F5344CB8AC3E}">
+        <p14:creationId xmlns:p14="http://schemas.microsoft.com/office/powerpoint/2010/main" val="2149695988"/>
+      </p:ext>
+    </p:extLst>
+  </p:cSld>
+  <p:clrMapOvr>
+    <a:masterClrMapping/>
+  </p:clrMapOvr>
+</p:sld>
+</file>
+
+<file path=ppt/slides/slide11.xml><?xml version="1.0" encoding="utf-8"?>
+<p:sld xmlns:a="http://schemas.openxmlformats.org/drawingml/2006/main" xmlns:r="http://schemas.openxmlformats.org/officeDocument/2006/relationships" xmlns:p="http://schemas.openxmlformats.org/presentationml/2006/main">
+  <p:cSld>
     <p:spTree>
       <p:nvGrpSpPr>
         <p:cNvPr id="1" name=""/>
@@ -9785,7 +13538,7 @@
 </p:sld>
 </file>
 
-<file path=ppt/slides/slide11.xml><?xml version="1.0" encoding="utf-8"?>
+<file path=ppt/slides/slide12.xml><?xml version="1.0" encoding="utf-8"?>
 <p:sld xmlns:a="http://schemas.openxmlformats.org/drawingml/2006/main" xmlns:r="http://schemas.openxmlformats.org/officeDocument/2006/relationships" xmlns:p="http://schemas.openxmlformats.org/presentationml/2006/main">
   <p:cSld>
     <p:bg>
@@ -10519,7 +14272,7 @@
 </p:sld>
 </file>
 
-<file path=ppt/slides/slide12.xml><?xml version="1.0" encoding="utf-8"?>
+<file path=ppt/slides/slide13.xml><?xml version="1.0" encoding="utf-8"?>
 <p:sld xmlns:a="http://schemas.openxmlformats.org/drawingml/2006/main" xmlns:r="http://schemas.openxmlformats.org/officeDocument/2006/relationships" xmlns:p="http://schemas.openxmlformats.org/presentationml/2006/main">
   <p:cSld>
     <p:bg>
@@ -12359,6 +16112,90 @@
 <file path=ppt/slides/slide4.xml><?xml version="1.0" encoding="utf-8"?>
 <p:sld xmlns:a="http://schemas.openxmlformats.org/drawingml/2006/main" xmlns:r="http://schemas.openxmlformats.org/officeDocument/2006/relationships" xmlns:p="http://schemas.openxmlformats.org/presentationml/2006/main">
   <p:cSld>
+    <p:spTree>
+      <p:nvGrpSpPr>
+        <p:cNvPr id="1" name=""/>
+        <p:cNvGrpSpPr/>
+        <p:nvPr/>
+      </p:nvGrpSpPr>
+      <p:grpSpPr>
+        <a:xfrm>
+          <a:off x="0" y="0"/>
+          <a:ext cx="0" cy="0"/>
+          <a:chOff x="0" y="0"/>
+          <a:chExt cx="0" cy="0"/>
+        </a:xfrm>
+      </p:grpSpPr>
+      <p:sp>
+        <p:nvSpPr>
+          <p:cNvPr id="2" name="Title 1">
+            <a:extLst>
+              <a:ext uri="{FF2B5EF4-FFF2-40B4-BE49-F238E27FC236}">
+                <a16:creationId xmlns:a16="http://schemas.microsoft.com/office/drawing/2014/main" id="{13B3B541-8A14-05DB-3069-A2BBEC4010FC}"/>
+              </a:ext>
+            </a:extLst>
+          </p:cNvPr>
+          <p:cNvSpPr>
+            <a:spLocks noGrp="1"/>
+          </p:cNvSpPr>
+          <p:nvPr>
+            <p:ph type="title"/>
+          </p:nvPr>
+        </p:nvSpPr>
+        <p:spPr/>
+        <p:txBody>
+          <a:bodyPr/>
+          <a:lstStyle/>
+          <a:p>
+            <a:r>
+              <a:rPr lang="en-US" dirty="0"/>
+              <a:t>Reframing the Data (The "Expectation Gap")</a:t>
+            </a:r>
+          </a:p>
+        </p:txBody>
+      </p:sp>
+      <p:graphicFrame>
+        <p:nvGraphicFramePr>
+          <p:cNvPr id="5" name="Content Placeholder 2">
+            <a:extLst>
+              <a:ext uri="{FF2B5EF4-FFF2-40B4-BE49-F238E27FC236}">
+                <a16:creationId xmlns:a16="http://schemas.microsoft.com/office/drawing/2014/main" id="{F81C2950-1D29-A91A-9C26-C1AA25F37189}"/>
+              </a:ext>
+            </a:extLst>
+          </p:cNvPr>
+          <p:cNvGraphicFramePr>
+            <a:graphicFrameLocks noGrp="1"/>
+          </p:cNvGraphicFramePr>
+          <p:nvPr>
+            <p:ph idx="1"/>
+          </p:nvPr>
+        </p:nvGraphicFramePr>
+        <p:xfrm>
+          <a:off x="838200" y="1825625"/>
+          <a:ext cx="10515600" cy="4351338"/>
+        </p:xfrm>
+        <a:graphic>
+          <a:graphicData uri="http://schemas.openxmlformats.org/drawingml/2006/diagram">
+            <dgm:relIds xmlns:dgm="http://schemas.openxmlformats.org/drawingml/2006/diagram" xmlns:r="http://schemas.openxmlformats.org/officeDocument/2006/relationships" r:dm="rId2" r:lo="rId3" r:qs="rId4" r:cs="rId5"/>
+          </a:graphicData>
+        </a:graphic>
+      </p:graphicFrame>
+    </p:spTree>
+    <p:extLst>
+      <p:ext uri="{BB962C8B-B14F-4D97-AF65-F5344CB8AC3E}">
+        <p14:creationId xmlns:p14="http://schemas.microsoft.com/office/powerpoint/2010/main" val="4050838743"/>
+      </p:ext>
+    </p:extLst>
+  </p:cSld>
+  <p:clrMapOvr>
+    <a:masterClrMapping/>
+  </p:clrMapOvr>
+</p:sld>
+</file>
+
+<file path=ppt/slides/slide5.xml><?xml version="1.0" encoding="utf-8"?>
+<p:sld xmlns:a="http://schemas.openxmlformats.org/drawingml/2006/main" xmlns:r="http://schemas.openxmlformats.org/officeDocument/2006/relationships" xmlns:p="http://schemas.openxmlformats.org/presentationml/2006/main">
+  <p:cSld>
     <p:bg>
       <p:bgPr>
         <a:solidFill>
@@ -12756,7 +16593,7 @@
 </p:sld>
 </file>
 
-<file path=ppt/slides/slide5.xml><?xml version="1.0" encoding="utf-8"?>
+<file path=ppt/slides/slide6.xml><?xml version="1.0" encoding="utf-8"?>
 <p:sld xmlns:a="http://schemas.openxmlformats.org/drawingml/2006/main" xmlns:r="http://schemas.openxmlformats.org/officeDocument/2006/relationships" xmlns:p="http://schemas.openxmlformats.org/presentationml/2006/main">
   <p:cSld>
     <p:bg>
@@ -13411,7 +17248,7 @@
 </p:sld>
 </file>
 
-<file path=ppt/slides/slide6.xml><?xml version="1.0" encoding="utf-8"?>
+<file path=ppt/slides/slide7.xml><?xml version="1.0" encoding="utf-8"?>
 <p:sld xmlns:a="http://schemas.openxmlformats.org/drawingml/2006/main" xmlns:r="http://schemas.openxmlformats.org/officeDocument/2006/relationships" xmlns:p="http://schemas.openxmlformats.org/presentationml/2006/main">
   <p:cSld>
     <p:bg>
@@ -13592,8 +17429,12 @@
           <a:lstStyle/>
           <a:p>
             <a:r>
-              <a:rPr lang="en-US" sz="4000"/>
-              <a:t>XGBoost Vastly Outperforms Baseline</a:t>
+              <a:rPr lang="en-US" sz="4000" dirty="0" err="1"/>
+              <a:t>XGBoost</a:t>
+            </a:r>
+            <a:r>
+              <a:rPr lang="en-US" sz="4000" dirty="0"/>
+              <a:t> Vastly Outperforms Random Forest</a:t>
             </a:r>
           </a:p>
         </p:txBody>
@@ -13853,7 +17694,7 @@
 </p:sld>
 </file>
 
-<file path=ppt/slides/slide7.xml><?xml version="1.0" encoding="utf-8"?>
+<file path=ppt/slides/slide8.xml><?xml version="1.0" encoding="utf-8"?>
 <p:sld xmlns:a="http://schemas.openxmlformats.org/drawingml/2006/main" xmlns:r="http://schemas.openxmlformats.org/officeDocument/2006/relationships" xmlns:p="http://schemas.openxmlformats.org/presentationml/2006/main">
   <p:cSld>
     <p:bg>
@@ -14255,52 +18096,52 @@
           <a:lstStyle/>
           <a:p>
             <a:r>
-              <a:rPr lang="en-US" sz="1700" dirty="0"/>
+              <a:rPr lang="en-US" sz="2000" dirty="0"/>
               <a:t>Three Key Callouts: </a:t>
             </a:r>
           </a:p>
           <a:p>
             <a:pPr lvl="1"/>
             <a:r>
-              <a:rPr lang="en-US" sz="1700" dirty="0"/>
+              <a:rPr lang="en-US" sz="2000" dirty="0"/>
               <a:t>The Imbalance Fix: </a:t>
             </a:r>
             <a:r>
-              <a:rPr lang="en-US" sz="1700" dirty="0" err="1"/>
+              <a:rPr lang="en-US" sz="2000" dirty="0" err="1"/>
               <a:t>scale_pos_weight</a:t>
             </a:r>
             <a:r>
-              <a:rPr lang="en-US" sz="1700" dirty="0"/>
+              <a:rPr lang="en-US" sz="2000" dirty="0"/>
               <a:t>: ~11.3 (Penalizes missed Cinderellas 11x more). </a:t>
             </a:r>
           </a:p>
           <a:p>
             <a:pPr lvl="1"/>
             <a:r>
-              <a:rPr lang="en-US" sz="1700" dirty="0"/>
+              <a:rPr lang="en-US" sz="2000" dirty="0"/>
               <a:t>Breaking Reliance: </a:t>
             </a:r>
             <a:r>
-              <a:rPr lang="en-US" sz="1700" dirty="0" err="1"/>
+              <a:rPr lang="en-US" sz="2000" dirty="0" err="1"/>
               <a:t>colsample_bytree</a:t>
             </a:r>
             <a:r>
-              <a:rPr lang="en-US" sz="1700" dirty="0"/>
+              <a:rPr lang="en-US" sz="2000" dirty="0"/>
               <a:t>: 0.5 (Forces the model to look at advanced stats, not just the Seed Number). </a:t>
             </a:r>
           </a:p>
           <a:p>
             <a:pPr lvl="1"/>
             <a:r>
-              <a:rPr lang="en-US" sz="1700" dirty="0"/>
+              <a:rPr lang="en-US" sz="2000" dirty="0"/>
               <a:t>Preventing Memorization: </a:t>
             </a:r>
             <a:r>
-              <a:rPr lang="en-US" sz="1700" dirty="0" err="1"/>
+              <a:rPr lang="en-US" sz="2000" dirty="0" err="1"/>
               <a:t>max_depth</a:t>
             </a:r>
             <a:r>
-              <a:rPr lang="en-US" sz="1700" dirty="0"/>
+              <a:rPr lang="en-US" sz="2000" dirty="0"/>
               <a:t>: 2 (Uses shallow "stumps" instead of deep trees to prevent overfitting).</a:t>
             </a:r>
           </a:p>
@@ -14319,7 +18160,7 @@
 </p:sld>
 </file>
 
-<file path=ppt/slides/slide8.xml><?xml version="1.0" encoding="utf-8"?>
+<file path=ppt/slides/slide9.xml><?xml version="1.0" encoding="utf-8"?>
 <p:sld xmlns:a="http://schemas.openxmlformats.org/drawingml/2006/main" xmlns:r="http://schemas.openxmlformats.org/officeDocument/2006/relationships" xmlns:p="http://schemas.openxmlformats.org/presentationml/2006/main">
   <p:cSld>
     <p:bg>
@@ -14802,607 +18643,6 @@
     <p:extLst>
       <p:ext uri="{BB962C8B-B14F-4D97-AF65-F5344CB8AC3E}">
         <p14:creationId xmlns:p14="http://schemas.microsoft.com/office/powerpoint/2010/main" val="954167436"/>
-      </p:ext>
-    </p:extLst>
-  </p:cSld>
-  <p:clrMapOvr>
-    <a:masterClrMapping/>
-  </p:clrMapOvr>
-</p:sld>
-</file>
-
-<file path=ppt/slides/slide9.xml><?xml version="1.0" encoding="utf-8"?>
-<p:sld xmlns:a="http://schemas.openxmlformats.org/drawingml/2006/main" xmlns:r="http://schemas.openxmlformats.org/officeDocument/2006/relationships" xmlns:p="http://schemas.openxmlformats.org/presentationml/2006/main">
-  <p:cSld>
-    <p:bg>
-      <p:bgPr>
-        <a:solidFill>
-          <a:schemeClr val="bg1"/>
-        </a:solidFill>
-        <a:effectLst/>
-      </p:bgPr>
-    </p:bg>
-    <p:spTree>
-      <p:nvGrpSpPr>
-        <p:cNvPr id="1" name=""/>
-        <p:cNvGrpSpPr/>
-        <p:nvPr/>
-      </p:nvGrpSpPr>
-      <p:grpSpPr>
-        <a:xfrm>
-          <a:off x="0" y="0"/>
-          <a:ext cx="0" cy="0"/>
-          <a:chOff x="0" y="0"/>
-          <a:chExt cx="0" cy="0"/>
-        </a:xfrm>
-      </p:grpSpPr>
-      <p:sp useBgFill="1">
-        <p:nvSpPr>
-          <p:cNvPr id="16" name="Rectangle 15">
-            <a:extLst>
-              <a:ext uri="{FF2B5EF4-FFF2-40B4-BE49-F238E27FC236}">
-                <a16:creationId xmlns:a16="http://schemas.microsoft.com/office/drawing/2014/main" id="{5AC1364A-3E3D-4F0D-8776-78AF3A270DD6}"/>
-              </a:ext>
-              <a:ext uri="{C183D7F6-B498-43B3-948B-1728B52AA6E4}">
-                <adec:decorative xmlns:adec="http://schemas.microsoft.com/office/drawing/2017/decorative" val="1"/>
-              </a:ext>
-            </a:extLst>
-          </p:cNvPr>
-          <p:cNvSpPr>
-            <a:spLocks noGrp="1" noRot="1" noChangeAspect="1" noMove="1" noResize="1" noEditPoints="1" noAdjustHandles="1" noChangeArrowheads="1" noChangeShapeType="1" noTextEdit="1"/>
-          </p:cNvSpPr>
-          <p:nvPr>
-            <p:extLst>
-              <p:ext uri="{386F3935-93C4-4BCD-93E2-E3B085C9AB24}">
-                <p16:designElem xmlns:p16="http://schemas.microsoft.com/office/powerpoint/2015/main" val="1"/>
-              </p:ext>
-            </p:extLst>
-          </p:nvPr>
-        </p:nvSpPr>
-        <p:spPr>
-          <a:xfrm>
-            <a:off x="0" y="0"/>
-            <a:ext cx="12188952" cy="6858000"/>
-          </a:xfrm>
-          <a:prstGeom prst="rect">
-            <a:avLst/>
-          </a:prstGeom>
-          <a:ln>
-            <a:noFill/>
-          </a:ln>
-        </p:spPr>
-        <p:style>
-          <a:lnRef idx="2">
-            <a:schemeClr val="accent1">
-              <a:shade val="50000"/>
-            </a:schemeClr>
-          </a:lnRef>
-          <a:fillRef idx="1">
-            <a:schemeClr val="accent1"/>
-          </a:fillRef>
-          <a:effectRef idx="0">
-            <a:schemeClr val="accent1"/>
-          </a:effectRef>
-          <a:fontRef idx="minor">
-            <a:schemeClr val="lt1"/>
-          </a:fontRef>
-        </p:style>
-        <p:txBody>
-          <a:bodyPr rtlCol="0" anchor="ctr"/>
-          <a:lstStyle/>
-          <a:p>
-            <a:pPr algn="ctr"/>
-            <a:endParaRPr lang="en-US"/>
-          </a:p>
-        </p:txBody>
-      </p:sp>
-      <p:sp>
-        <p:nvSpPr>
-          <p:cNvPr id="2" name="Title 1">
-            <a:extLst>
-              <a:ext uri="{FF2B5EF4-FFF2-40B4-BE49-F238E27FC236}">
-                <a16:creationId xmlns:a16="http://schemas.microsoft.com/office/drawing/2014/main" id="{E0F5C119-2DAB-CFB8-E012-BE2734912C32}"/>
-              </a:ext>
-            </a:extLst>
-          </p:cNvPr>
-          <p:cNvSpPr>
-            <a:spLocks noGrp="1"/>
-          </p:cNvSpPr>
-          <p:nvPr>
-            <p:ph type="title"/>
-          </p:nvPr>
-        </p:nvSpPr>
-        <p:spPr>
-          <a:xfrm>
-            <a:off x="4797501" y="329184"/>
-            <a:ext cx="6755626" cy="1783080"/>
-          </a:xfrm>
-        </p:spPr>
-        <p:txBody>
-          <a:bodyPr anchor="b">
-            <a:normAutofit/>
-          </a:bodyPr>
-          <a:lstStyle/>
-          <a:p>
-            <a:r>
-              <a:rPr lang="en-US" sz="5400"/>
-              <a:t>Unsupervised Anomaly Detection </a:t>
-            </a:r>
-          </a:p>
-        </p:txBody>
-      </p:sp>
-      <p:pic>
-        <p:nvPicPr>
-          <p:cNvPr id="5" name="Picture 4">
-            <a:extLst>
-              <a:ext uri="{FF2B5EF4-FFF2-40B4-BE49-F238E27FC236}">
-                <a16:creationId xmlns:a16="http://schemas.microsoft.com/office/drawing/2014/main" id="{EDCA9E1D-D4EC-F3E5-1F5E-5B0D5B8ADE01}"/>
-              </a:ext>
-            </a:extLst>
-          </p:cNvPr>
-          <p:cNvPicPr>
-            <a:picLocks noChangeAspect="1"/>
-          </p:cNvPicPr>
-          <p:nvPr/>
-        </p:nvPicPr>
-        <p:blipFill>
-          <a:blip r:embed="rId2">
-            <a:extLst>
-              <a:ext uri="{28A0092B-C50C-407E-A947-70E740481C1C}">
-                <a14:useLocalDpi xmlns:a14="http://schemas.microsoft.com/office/drawing/2010/main" val="0"/>
-              </a:ext>
-            </a:extLst>
-          </a:blip>
-          <a:stretch>
-            <a:fillRect/>
-          </a:stretch>
-        </p:blipFill>
-        <p:spPr>
-          <a:xfrm>
-            <a:off x="320040" y="789645"/>
-            <a:ext cx="4014216" cy="2328245"/>
-          </a:xfrm>
-          <a:prstGeom prst="rect">
-            <a:avLst/>
-          </a:prstGeom>
-        </p:spPr>
-      </p:pic>
-      <p:sp>
-        <p:nvSpPr>
-          <p:cNvPr id="17" name="sketchy line">
-            <a:extLst>
-              <a:ext uri="{FF2B5EF4-FFF2-40B4-BE49-F238E27FC236}">
-                <a16:creationId xmlns:a16="http://schemas.microsoft.com/office/drawing/2014/main" id="{3FCFB1DE-0B7E-48CC-BA90-B2AB0889F9D6}"/>
-              </a:ext>
-              <a:ext uri="{C183D7F6-B498-43B3-948B-1728B52AA6E4}">
-                <adec:decorative xmlns:adec="http://schemas.microsoft.com/office/drawing/2017/decorative" val="1"/>
-              </a:ext>
-            </a:extLst>
-          </p:cNvPr>
-          <p:cNvSpPr>
-            <a:spLocks noGrp="1" noRot="1" noChangeAspect="1" noMove="1" noResize="1" noEditPoints="1" noAdjustHandles="1" noChangeArrowheads="1" noChangeShapeType="1" noTextEdit="1"/>
-          </p:cNvSpPr>
-          <p:nvPr>
-            <p:extLst>
-              <p:ext uri="{386F3935-93C4-4BCD-93E2-E3B085C9AB24}">
-                <p16:designElem xmlns:p16="http://schemas.microsoft.com/office/powerpoint/2015/main" val="1"/>
-              </p:ext>
-            </p:extLst>
-          </p:nvPr>
-        </p:nvSpPr>
-        <p:spPr>
-          <a:xfrm>
-            <a:off x="4797494" y="2395728"/>
-            <a:ext cx="4243589" cy="18288"/>
-          </a:xfrm>
-          <a:custGeom>
-            <a:avLst/>
-            <a:gdLst>
-              <a:gd name="csX0" fmla="*/ 0 w 4243589"/>
-              <a:gd name="csY0" fmla="*/ 0 h 18288"/>
-              <a:gd name="csX1" fmla="*/ 478919 w 4243589"/>
-              <a:gd name="csY1" fmla="*/ 0 h 18288"/>
-              <a:gd name="csX2" fmla="*/ 957839 w 4243589"/>
-              <a:gd name="csY2" fmla="*/ 0 h 18288"/>
-              <a:gd name="csX3" fmla="*/ 1521630 w 4243589"/>
-              <a:gd name="csY3" fmla="*/ 0 h 18288"/>
-              <a:gd name="csX4" fmla="*/ 2212729 w 4243589"/>
-              <a:gd name="csY4" fmla="*/ 0 h 18288"/>
-              <a:gd name="csX5" fmla="*/ 2734084 w 4243589"/>
-              <a:gd name="csY5" fmla="*/ 0 h 18288"/>
-              <a:gd name="csX6" fmla="*/ 3255439 w 4243589"/>
-              <a:gd name="csY6" fmla="*/ 0 h 18288"/>
-              <a:gd name="csX7" fmla="*/ 4243589 w 4243589"/>
-              <a:gd name="csY7" fmla="*/ 0 h 18288"/>
-              <a:gd name="csX8" fmla="*/ 4243589 w 4243589"/>
-              <a:gd name="csY8" fmla="*/ 18288 h 18288"/>
-              <a:gd name="csX9" fmla="*/ 3594926 w 4243589"/>
-              <a:gd name="csY9" fmla="*/ 18288 h 18288"/>
-              <a:gd name="csX10" fmla="*/ 3073571 w 4243589"/>
-              <a:gd name="csY10" fmla="*/ 18288 h 18288"/>
-              <a:gd name="csX11" fmla="*/ 2552216 w 4243589"/>
-              <a:gd name="csY11" fmla="*/ 18288 h 18288"/>
-              <a:gd name="csX12" fmla="*/ 1903553 w 4243589"/>
-              <a:gd name="csY12" fmla="*/ 18288 h 18288"/>
-              <a:gd name="csX13" fmla="*/ 1212454 w 4243589"/>
-              <a:gd name="csY13" fmla="*/ 18288 h 18288"/>
-              <a:gd name="csX14" fmla="*/ 733535 w 4243589"/>
-              <a:gd name="csY14" fmla="*/ 18288 h 18288"/>
-              <a:gd name="csX15" fmla="*/ 0 w 4243589"/>
-              <a:gd name="csY15" fmla="*/ 18288 h 18288"/>
-              <a:gd name="csX16" fmla="*/ 0 w 4243589"/>
-              <a:gd name="csY16" fmla="*/ 0 h 18288"/>
-            </a:gdLst>
-            <a:ahLst/>
-            <a:cxnLst>
-              <a:cxn ang="0">
-                <a:pos x="csX0" y="csY0"/>
-              </a:cxn>
-              <a:cxn ang="0">
-                <a:pos x="csX1" y="csY1"/>
-              </a:cxn>
-              <a:cxn ang="0">
-                <a:pos x="csX2" y="csY2"/>
-              </a:cxn>
-              <a:cxn ang="0">
-                <a:pos x="csX3" y="csY3"/>
-              </a:cxn>
-              <a:cxn ang="0">
-                <a:pos x="csX4" y="csY4"/>
-              </a:cxn>
-              <a:cxn ang="0">
-                <a:pos x="csX5" y="csY5"/>
-              </a:cxn>
-              <a:cxn ang="0">
-                <a:pos x="csX6" y="csY6"/>
-              </a:cxn>
-              <a:cxn ang="0">
-                <a:pos x="csX7" y="csY7"/>
-              </a:cxn>
-              <a:cxn ang="0">
-                <a:pos x="csX8" y="csY8"/>
-              </a:cxn>
-              <a:cxn ang="0">
-                <a:pos x="csX9" y="csY9"/>
-              </a:cxn>
-              <a:cxn ang="0">
-                <a:pos x="csX10" y="csY10"/>
-              </a:cxn>
-              <a:cxn ang="0">
-                <a:pos x="csX11" y="csY11"/>
-              </a:cxn>
-              <a:cxn ang="0">
-                <a:pos x="csX12" y="csY12"/>
-              </a:cxn>
-              <a:cxn ang="0">
-                <a:pos x="csX13" y="csY13"/>
-              </a:cxn>
-              <a:cxn ang="0">
-                <a:pos x="csX14" y="csY14"/>
-              </a:cxn>
-              <a:cxn ang="0">
-                <a:pos x="csX15" y="csY15"/>
-              </a:cxn>
-              <a:cxn ang="0">
-                <a:pos x="csX16" y="csY16"/>
-              </a:cxn>
-            </a:cxnLst>
-            <a:rect l="l" t="t" r="r" b="b"/>
-            <a:pathLst>
-              <a:path w="4243589" h="18288" fill="none" extrusionOk="0">
-                <a:moveTo>
-                  <a:pt x="0" y="0"/>
-                </a:moveTo>
-                <a:cubicBezTo>
-                  <a:pt x="213395" y="-21006"/>
-                  <a:pt x="307421" y="-18116"/>
-                  <a:pt x="478919" y="0"/>
-                </a:cubicBezTo>
-                <a:cubicBezTo>
-                  <a:pt x="650417" y="18116"/>
-                  <a:pt x="831092" y="-21237"/>
-                  <a:pt x="957839" y="0"/>
-                </a:cubicBezTo>
-                <a:cubicBezTo>
-                  <a:pt x="1084586" y="21237"/>
-                  <a:pt x="1301682" y="25124"/>
-                  <a:pt x="1521630" y="0"/>
-                </a:cubicBezTo>
-                <a:cubicBezTo>
-                  <a:pt x="1741578" y="-25124"/>
-                  <a:pt x="1970269" y="-29139"/>
-                  <a:pt x="2212729" y="0"/>
-                </a:cubicBezTo>
-                <a:cubicBezTo>
-                  <a:pt x="2455189" y="29139"/>
-                  <a:pt x="2558847" y="-4796"/>
-                  <a:pt x="2734084" y="0"/>
-                </a:cubicBezTo>
-                <a:cubicBezTo>
-                  <a:pt x="2909321" y="4796"/>
-                  <a:pt x="3097217" y="-13409"/>
-                  <a:pt x="3255439" y="0"/>
-                </a:cubicBezTo>
-                <a:cubicBezTo>
-                  <a:pt x="3413662" y="13409"/>
-                  <a:pt x="3979999" y="-10121"/>
-                  <a:pt x="4243589" y="0"/>
-                </a:cubicBezTo>
-                <a:cubicBezTo>
-                  <a:pt x="4244484" y="8974"/>
-                  <a:pt x="4243043" y="9359"/>
-                  <a:pt x="4243589" y="18288"/>
-                </a:cubicBezTo>
-                <a:cubicBezTo>
-                  <a:pt x="4058777" y="31246"/>
-                  <a:pt x="3910348" y="3158"/>
-                  <a:pt x="3594926" y="18288"/>
-                </a:cubicBezTo>
-                <a:cubicBezTo>
-                  <a:pt x="3279504" y="33418"/>
-                  <a:pt x="3319955" y="-3977"/>
-                  <a:pt x="3073571" y="18288"/>
-                </a:cubicBezTo>
-                <a:cubicBezTo>
-                  <a:pt x="2827187" y="40553"/>
-                  <a:pt x="2767387" y="1863"/>
-                  <a:pt x="2552216" y="18288"/>
-                </a:cubicBezTo>
-                <a:cubicBezTo>
-                  <a:pt x="2337046" y="34713"/>
-                  <a:pt x="2181871" y="19527"/>
-                  <a:pt x="1903553" y="18288"/>
-                </a:cubicBezTo>
-                <a:cubicBezTo>
-                  <a:pt x="1625235" y="17049"/>
-                  <a:pt x="1557672" y="24174"/>
-                  <a:pt x="1212454" y="18288"/>
-                </a:cubicBezTo>
-                <a:cubicBezTo>
-                  <a:pt x="867236" y="12402"/>
-                  <a:pt x="874382" y="15627"/>
-                  <a:pt x="733535" y="18288"/>
-                </a:cubicBezTo>
-                <a:cubicBezTo>
-                  <a:pt x="592688" y="20949"/>
-                  <a:pt x="183477" y="14753"/>
-                  <a:pt x="0" y="18288"/>
-                </a:cubicBezTo>
-                <a:cubicBezTo>
-                  <a:pt x="-229" y="14222"/>
-                  <a:pt x="509" y="5816"/>
-                  <a:pt x="0" y="0"/>
-                </a:cubicBezTo>
-                <a:close/>
-              </a:path>
-              <a:path w="4243589" h="18288" stroke="0" extrusionOk="0">
-                <a:moveTo>
-                  <a:pt x="0" y="0"/>
-                </a:moveTo>
-                <a:cubicBezTo>
-                  <a:pt x="143690" y="16630"/>
-                  <a:pt x="266667" y="14847"/>
-                  <a:pt x="521355" y="0"/>
-                </a:cubicBezTo>
-                <a:cubicBezTo>
-                  <a:pt x="776043" y="-14847"/>
-                  <a:pt x="814491" y="-17363"/>
-                  <a:pt x="1000275" y="0"/>
-                </a:cubicBezTo>
-                <a:cubicBezTo>
-                  <a:pt x="1186059" y="17363"/>
-                  <a:pt x="1352504" y="-23507"/>
-                  <a:pt x="1521630" y="0"/>
-                </a:cubicBezTo>
-                <a:cubicBezTo>
-                  <a:pt x="1690756" y="23507"/>
-                  <a:pt x="1889525" y="5871"/>
-                  <a:pt x="2127857" y="0"/>
-                </a:cubicBezTo>
-                <a:cubicBezTo>
-                  <a:pt x="2366189" y="-5871"/>
-                  <a:pt x="2620628" y="-27997"/>
-                  <a:pt x="2776520" y="0"/>
-                </a:cubicBezTo>
-                <a:cubicBezTo>
-                  <a:pt x="2932412" y="27997"/>
-                  <a:pt x="3131683" y="-25073"/>
-                  <a:pt x="3467618" y="0"/>
-                </a:cubicBezTo>
-                <a:cubicBezTo>
-                  <a:pt x="3803553" y="25073"/>
-                  <a:pt x="4017371" y="3071"/>
-                  <a:pt x="4243589" y="0"/>
-                </a:cubicBezTo>
-                <a:cubicBezTo>
-                  <a:pt x="4243134" y="6162"/>
-                  <a:pt x="4243492" y="11775"/>
-                  <a:pt x="4243589" y="18288"/>
-                </a:cubicBezTo>
-                <a:cubicBezTo>
-                  <a:pt x="4017834" y="-5779"/>
-                  <a:pt x="3834586" y="13376"/>
-                  <a:pt x="3594926" y="18288"/>
-                </a:cubicBezTo>
-                <a:cubicBezTo>
-                  <a:pt x="3355266" y="23200"/>
-                  <a:pt x="3204179" y="2869"/>
-                  <a:pt x="2903827" y="18288"/>
-                </a:cubicBezTo>
-                <a:cubicBezTo>
-                  <a:pt x="2603475" y="33707"/>
-                  <a:pt x="2526187" y="46187"/>
-                  <a:pt x="2212729" y="18288"/>
-                </a:cubicBezTo>
-                <a:cubicBezTo>
-                  <a:pt x="1899271" y="-9611"/>
-                  <a:pt x="1966289" y="29692"/>
-                  <a:pt x="1733809" y="18288"/>
-                </a:cubicBezTo>
-                <a:cubicBezTo>
-                  <a:pt x="1501329" y="6884"/>
-                  <a:pt x="1343612" y="12492"/>
-                  <a:pt x="1085146" y="18288"/>
-                </a:cubicBezTo>
-                <a:cubicBezTo>
-                  <a:pt x="826680" y="24084"/>
-                  <a:pt x="778184" y="35607"/>
-                  <a:pt x="521355" y="18288"/>
-                </a:cubicBezTo>
-                <a:cubicBezTo>
-                  <a:pt x="264526" y="969"/>
-                  <a:pt x="120277" y="4268"/>
-                  <a:pt x="0" y="18288"/>
-                </a:cubicBezTo>
-                <a:cubicBezTo>
-                  <a:pt x="766" y="10800"/>
-                  <a:pt x="-457" y="8180"/>
-                  <a:pt x="0" y="0"/>
-                </a:cubicBezTo>
-                <a:close/>
-              </a:path>
-            </a:pathLst>
-          </a:custGeom>
-          <a:solidFill>
-            <a:schemeClr val="accent2"/>
-          </a:solidFill>
-          <a:ln w="41275" cap="rnd">
-            <a:solidFill>
-              <a:schemeClr val="accent2"/>
-            </a:solidFill>
-            <a:round/>
-            <a:extLst>
-              <a:ext uri="{C807C97D-BFC1-408E-A445-0C87EB9F89A2}">
-                <ask:lineSketchStyleProps xmlns:ask="http://schemas.microsoft.com/office/drawing/2018/sketchyshapes" sd="2727557108">
-                  <a:prstGeom prst="rect">
-                    <a:avLst/>
-                  </a:prstGeom>
-                  <ask:type>
-                    <ask:lineSketchFreehand/>
-                  </ask:type>
-                </ask:lineSketchStyleProps>
-              </a:ext>
-            </a:extLst>
-          </a:ln>
-        </p:spPr>
-        <p:style>
-          <a:lnRef idx="2">
-            <a:schemeClr val="accent1">
-              <a:shade val="50000"/>
-            </a:schemeClr>
-          </a:lnRef>
-          <a:fillRef idx="1">
-            <a:schemeClr val="accent1"/>
-          </a:fillRef>
-          <a:effectRef idx="0">
-            <a:schemeClr val="accent1"/>
-          </a:effectRef>
-          <a:fontRef idx="minor">
-            <a:schemeClr val="lt1"/>
-          </a:fontRef>
-        </p:style>
-        <p:txBody>
-          <a:bodyPr rtlCol="0" anchor="ctr"/>
-          <a:lstStyle/>
-          <a:p>
-            <a:pPr algn="ctr"/>
-            <a:endParaRPr lang="en-US"/>
-          </a:p>
-        </p:txBody>
-      </p:sp>
-      <p:pic>
-        <p:nvPicPr>
-          <p:cNvPr id="7" name="Picture 6">
-            <a:extLst>
-              <a:ext uri="{FF2B5EF4-FFF2-40B4-BE49-F238E27FC236}">
-                <a16:creationId xmlns:a16="http://schemas.microsoft.com/office/drawing/2014/main" id="{8872E0E6-1585-7902-E2A7-A0E9BD09C847}"/>
-              </a:ext>
-            </a:extLst>
-          </p:cNvPr>
-          <p:cNvPicPr>
-            <a:picLocks noChangeAspect="1"/>
-          </p:cNvPicPr>
-          <p:nvPr/>
-        </p:nvPicPr>
-        <p:blipFill>
-          <a:blip r:embed="rId3">
-            <a:extLst>
-              <a:ext uri="{28A0092B-C50C-407E-A947-70E740481C1C}">
-                <a14:useLocalDpi xmlns:a14="http://schemas.microsoft.com/office/drawing/2010/main" val="0"/>
-              </a:ext>
-            </a:extLst>
-          </a:blip>
-          <a:stretch>
-            <a:fillRect/>
-          </a:stretch>
-        </p:blipFill>
-        <p:spPr>
-          <a:xfrm>
-            <a:off x="392498" y="4149598"/>
-            <a:ext cx="3851012" cy="2098802"/>
-          </a:xfrm>
-          <a:prstGeom prst="rect">
-            <a:avLst/>
-          </a:prstGeom>
-        </p:spPr>
-      </p:pic>
-      <p:sp>
-        <p:nvSpPr>
-          <p:cNvPr id="3" name="Content Placeholder 2">
-            <a:extLst>
-              <a:ext uri="{FF2B5EF4-FFF2-40B4-BE49-F238E27FC236}">
-                <a16:creationId xmlns:a16="http://schemas.microsoft.com/office/drawing/2014/main" id="{0BE73496-2146-1B47-AE02-B844407BC333}"/>
-              </a:ext>
-            </a:extLst>
-          </p:cNvPr>
-          <p:cNvSpPr>
-            <a:spLocks noGrp="1"/>
-          </p:cNvSpPr>
-          <p:nvPr>
-            <p:ph idx="1"/>
-          </p:nvPr>
-        </p:nvSpPr>
-        <p:spPr>
-          <a:xfrm>
-            <a:off x="4797494" y="2706624"/>
-            <a:ext cx="6755626" cy="3483864"/>
-          </a:xfrm>
-        </p:spPr>
-        <p:txBody>
-          <a:bodyPr>
-            <a:normAutofit/>
-          </a:bodyPr>
-          <a:lstStyle/>
-          <a:p>
-            <a:r>
-              <a:rPr lang="en-US" sz="1700"/>
-              <a:t>Hypothesis: Cinderellas would be identified as distinct outliers among other low seeded teams.</a:t>
-            </a:r>
-          </a:p>
-          <a:p>
-            <a:endParaRPr lang="en-US" sz="1700"/>
-          </a:p>
-          <a:p>
-            <a:r>
-              <a:rPr lang="en-US" sz="1700"/>
-              <a:t>Reality: Isolation Forest showed that Cinderellas were mostly statistically normal to other lower ranked seeds and lacked significant variance.</a:t>
-            </a:r>
-          </a:p>
-          <a:p>
-            <a:endParaRPr lang="en-US" sz="1700"/>
-          </a:p>
-          <a:p>
-            <a:r>
-              <a:rPr lang="en-US" sz="1700"/>
-              <a:t>However, the Gaussian Mixed Model (GMM) was able to group teams into 4 distinct archetypes. It successfully grouped 82% of historical Cinderella teams into a high performing archetype (Cluster 2) where many higher ranked teams are. This suggests that they distinct enough to be identified as different from the average lower seed.</a:t>
-            </a:r>
-          </a:p>
-        </p:txBody>
-      </p:sp>
-    </p:spTree>
-    <p:extLst>
-      <p:ext uri="{BB962C8B-B14F-4D97-AF65-F5344CB8AC3E}">
-        <p14:creationId xmlns:p14="http://schemas.microsoft.com/office/powerpoint/2010/main" val="2149695988"/>
       </p:ext>
     </p:extLst>
   </p:cSld>

--- a/progress/ClassPresentation.pptx
+++ b/progress/ClassPresentation.pptx
@@ -2599,8 +2599,8 @@
             </a:lnSpc>
           </a:pPr>
           <a:r>
-            <a:rPr lang="en-US"/>
-            <a:t>The Problem (Raw Stats): A +5.0 scoring margin is terrible for a 1-seed, but incredible for a 13-seed. Raw stats lack context. The </a:t>
+            <a:rPr lang="en-US" dirty="0"/>
+            <a:t>The Problem (Raw Stats): A +5.0 scoring margin is terrible for a 1-seed, but incredible for a 13-seed. Raw stats lack context. </a:t>
           </a:r>
         </a:p>
       </dgm:t>
@@ -2641,7 +2641,11 @@
           </a:pPr>
           <a:r>
             <a:rPr lang="en-US"/>
-            <a:t>Solution (Tournament Averages): Calculate the mean metrics for only the teams that made the tournament that specific year. </a:t>
+            <a:t>The Solution </a:t>
+          </a:r>
+          <a:r>
+            <a:rPr lang="en-US" dirty="0"/>
+            <a:t>(Tournament Averages): Calculate the mean metrics for only the teams that made the tournament that specific year. </a:t>
           </a:r>
         </a:p>
       </dgm:t>
@@ -3658,8 +3662,8 @@
             <a:buNone/>
           </a:pPr>
           <a:r>
-            <a:rPr lang="en-US" sz="2200" kern="1200"/>
-            <a:t>The Problem (Raw Stats): A +5.0 scoring margin is terrible for a 1-seed, but incredible for a 13-seed. Raw stats lack context. The </a:t>
+            <a:rPr lang="en-US" sz="2200" kern="1200" dirty="0"/>
+            <a:t>The Problem (Raw Stats): A +5.0 scoring margin is terrible for a 1-seed, but incredible for a 13-seed. Raw stats lack context. </a:t>
           </a:r>
         </a:p>
       </dsp:txBody>
@@ -3818,7 +3822,11 @@
           </a:pPr>
           <a:r>
             <a:rPr lang="en-US" sz="2200" kern="1200"/>
-            <a:t>Solution (Tournament Averages): Calculate the mean metrics for only the teams that made the tournament that specific year. </a:t>
+            <a:t>The Solution </a:t>
+          </a:r>
+          <a:r>
+            <a:rPr lang="en-US" sz="2200" kern="1200" dirty="0"/>
+            <a:t>(Tournament Averages): Calculate the mean metrics for only the teams that made the tournament that specific year. </a:t>
           </a:r>
         </a:p>
       </dsp:txBody>
@@ -16168,6 +16176,11 @@
           </p:cNvGraphicFramePr>
           <p:nvPr>
             <p:ph idx="1"/>
+            <p:extLst>
+              <p:ext uri="{D42A27DB-BD31-4B8C-83A1-F6EECF244321}">
+                <p14:modId xmlns:p14="http://schemas.microsoft.com/office/powerpoint/2010/main" val="4159948609"/>
+              </p:ext>
+            </p:extLst>
           </p:nvPr>
         </p:nvGraphicFramePr>
         <p:xfrm>

--- a/progress/ClassPresentation.pptx
+++ b/progress/ClassPresentation.pptx
@@ -12,12 +12,13 @@
     <p:sldId id="259" r:id="rId6"/>
     <p:sldId id="266" r:id="rId7"/>
     <p:sldId id="268" r:id="rId8"/>
-    <p:sldId id="267" r:id="rId9"/>
-    <p:sldId id="263" r:id="rId10"/>
-    <p:sldId id="261" r:id="rId11"/>
-    <p:sldId id="262" r:id="rId12"/>
-    <p:sldId id="264" r:id="rId13"/>
-    <p:sldId id="265" r:id="rId14"/>
+    <p:sldId id="270" r:id="rId9"/>
+    <p:sldId id="267" r:id="rId10"/>
+    <p:sldId id="263" r:id="rId11"/>
+    <p:sldId id="261" r:id="rId12"/>
+    <p:sldId id="262" r:id="rId13"/>
+    <p:sldId id="264" r:id="rId14"/>
+    <p:sldId id="265" r:id="rId15"/>
   </p:sldIdLst>
   <p:sldSz cx="12192000" cy="6858000"/>
   <p:notesSz cx="6858000" cy="9144000"/>
@@ -1654,6 +1655,788 @@
 </file>
 
 <file path=ppt/diagrams/colors3.xml><?xml version="1.0" encoding="utf-8"?>
+<dgm:colorsDef xmlns:dgm="http://schemas.openxmlformats.org/drawingml/2006/diagram" xmlns:a="http://schemas.openxmlformats.org/drawingml/2006/main" uniqueId="urn:microsoft.com/office/officeart/2005/8/colors/colorful2">
+  <dgm:title val=""/>
+  <dgm:desc val=""/>
+  <dgm:catLst>
+    <dgm:cat type="colorful" pri="10200"/>
+  </dgm:catLst>
+  <dgm:styleLbl name="node0">
+    <dgm:fillClrLst meth="repeat">
+      <a:schemeClr val="accent1"/>
+    </dgm:fillClrLst>
+    <dgm:linClrLst meth="repeat">
+      <a:schemeClr val="lt1"/>
+    </dgm:linClrLst>
+    <dgm:effectClrLst/>
+    <dgm:txLinClrLst/>
+    <dgm:txFillClrLst/>
+    <dgm:txEffectClrLst/>
+  </dgm:styleLbl>
+  <dgm:styleLbl name="node1">
+    <dgm:fillClrLst>
+      <a:schemeClr val="accent2"/>
+      <a:schemeClr val="accent3"/>
+    </dgm:fillClrLst>
+    <dgm:linClrLst meth="repeat">
+      <a:schemeClr val="lt1"/>
+    </dgm:linClrLst>
+    <dgm:effectClrLst/>
+    <dgm:txLinClrLst/>
+    <dgm:txFillClrLst/>
+    <dgm:txEffectClrLst/>
+  </dgm:styleLbl>
+  <dgm:styleLbl name="alignNode1">
+    <dgm:fillClrLst>
+      <a:schemeClr val="accent2"/>
+      <a:schemeClr val="accent3"/>
+    </dgm:fillClrLst>
+    <dgm:linClrLst>
+      <a:schemeClr val="accent2"/>
+      <a:schemeClr val="accent3"/>
+    </dgm:linClrLst>
+    <dgm:effectClrLst/>
+    <dgm:txLinClrLst/>
+    <dgm:txFillClrLst/>
+    <dgm:txEffectClrLst/>
+  </dgm:styleLbl>
+  <dgm:styleLbl name="lnNode1">
+    <dgm:fillClrLst>
+      <a:schemeClr val="accent2"/>
+      <a:schemeClr val="accent3"/>
+    </dgm:fillClrLst>
+    <dgm:linClrLst meth="repeat">
+      <a:schemeClr val="lt1"/>
+    </dgm:linClrLst>
+    <dgm:effectClrLst/>
+    <dgm:txLinClrLst/>
+    <dgm:txFillClrLst/>
+    <dgm:txEffectClrLst/>
+  </dgm:styleLbl>
+  <dgm:styleLbl name="vennNode1">
+    <dgm:fillClrLst>
+      <a:schemeClr val="accent2">
+        <a:alpha val="50000"/>
+      </a:schemeClr>
+      <a:schemeClr val="accent3">
+        <a:alpha val="50000"/>
+      </a:schemeClr>
+    </dgm:fillClrLst>
+    <dgm:linClrLst meth="repeat">
+      <a:schemeClr val="lt1"/>
+    </dgm:linClrLst>
+    <dgm:effectClrLst/>
+    <dgm:txLinClrLst/>
+    <dgm:txFillClrLst/>
+    <dgm:txEffectClrLst/>
+  </dgm:styleLbl>
+  <dgm:styleLbl name="node2">
+    <dgm:fillClrLst>
+      <a:schemeClr val="accent3"/>
+    </dgm:fillClrLst>
+    <dgm:linClrLst meth="repeat">
+      <a:schemeClr val="lt1"/>
+    </dgm:linClrLst>
+    <dgm:effectClrLst/>
+    <dgm:txLinClrLst/>
+    <dgm:txFillClrLst/>
+    <dgm:txEffectClrLst/>
+  </dgm:styleLbl>
+  <dgm:styleLbl name="node3">
+    <dgm:fillClrLst>
+      <a:schemeClr val="accent4"/>
+    </dgm:fillClrLst>
+    <dgm:linClrLst meth="repeat">
+      <a:schemeClr val="lt1"/>
+    </dgm:linClrLst>
+    <dgm:effectClrLst/>
+    <dgm:txLinClrLst/>
+    <dgm:txFillClrLst/>
+    <dgm:txEffectClrLst/>
+  </dgm:styleLbl>
+  <dgm:styleLbl name="node4">
+    <dgm:fillClrLst>
+      <a:schemeClr val="accent5"/>
+    </dgm:fillClrLst>
+    <dgm:linClrLst meth="repeat">
+      <a:schemeClr val="lt1"/>
+    </dgm:linClrLst>
+    <dgm:effectClrLst/>
+    <dgm:txLinClrLst/>
+    <dgm:txFillClrLst/>
+    <dgm:txEffectClrLst/>
+  </dgm:styleLbl>
+  <dgm:styleLbl name="fgImgPlace1">
+    <dgm:fillClrLst>
+      <a:schemeClr val="accent2">
+        <a:tint val="50000"/>
+      </a:schemeClr>
+      <a:schemeClr val="accent3">
+        <a:tint val="50000"/>
+      </a:schemeClr>
+    </dgm:fillClrLst>
+    <dgm:linClrLst meth="repeat">
+      <a:schemeClr val="lt1"/>
+    </dgm:linClrLst>
+    <dgm:effectClrLst/>
+    <dgm:txLinClrLst/>
+    <dgm:txFillClrLst meth="repeat">
+      <a:schemeClr val="lt1"/>
+    </dgm:txFillClrLst>
+    <dgm:txEffectClrLst/>
+  </dgm:styleLbl>
+  <dgm:styleLbl name="alignImgPlace1">
+    <dgm:fillClrLst>
+      <a:schemeClr val="accent2">
+        <a:tint val="50000"/>
+      </a:schemeClr>
+      <a:schemeClr val="accent3">
+        <a:tint val="20000"/>
+      </a:schemeClr>
+    </dgm:fillClrLst>
+    <dgm:linClrLst meth="repeat">
+      <a:schemeClr val="lt1"/>
+    </dgm:linClrLst>
+    <dgm:effectClrLst/>
+    <dgm:txLinClrLst/>
+    <dgm:txFillClrLst meth="repeat">
+      <a:schemeClr val="lt1"/>
+    </dgm:txFillClrLst>
+    <dgm:txEffectClrLst/>
+  </dgm:styleLbl>
+  <dgm:styleLbl name="bgImgPlace1">
+    <dgm:fillClrLst>
+      <a:schemeClr val="accent2">
+        <a:tint val="50000"/>
+      </a:schemeClr>
+      <a:schemeClr val="accent3">
+        <a:tint val="20000"/>
+      </a:schemeClr>
+    </dgm:fillClrLst>
+    <dgm:linClrLst meth="repeat">
+      <a:schemeClr val="lt1"/>
+    </dgm:linClrLst>
+    <dgm:effectClrLst/>
+    <dgm:txLinClrLst/>
+    <dgm:txFillClrLst meth="repeat">
+      <a:schemeClr val="lt1"/>
+    </dgm:txFillClrLst>
+    <dgm:txEffectClrLst/>
+  </dgm:styleLbl>
+  <dgm:styleLbl name="sibTrans2D1">
+    <dgm:fillClrLst>
+      <a:schemeClr val="accent2"/>
+      <a:schemeClr val="accent3"/>
+    </dgm:fillClrLst>
+    <dgm:linClrLst meth="repeat">
+      <a:schemeClr val="lt1"/>
+    </dgm:linClrLst>
+    <dgm:effectClrLst/>
+    <dgm:txLinClrLst/>
+    <dgm:txFillClrLst/>
+    <dgm:txEffectClrLst/>
+  </dgm:styleLbl>
+  <dgm:styleLbl name="fgSibTrans2D1">
+    <dgm:fillClrLst>
+      <a:schemeClr val="accent2"/>
+      <a:schemeClr val="accent3"/>
+    </dgm:fillClrLst>
+    <dgm:linClrLst meth="repeat">
+      <a:schemeClr val="lt1"/>
+    </dgm:linClrLst>
+    <dgm:effectClrLst/>
+    <dgm:txLinClrLst/>
+    <dgm:txFillClrLst meth="repeat">
+      <a:schemeClr val="lt1"/>
+    </dgm:txFillClrLst>
+    <dgm:txEffectClrLst/>
+  </dgm:styleLbl>
+  <dgm:styleLbl name="bgSibTrans2D1">
+    <dgm:fillClrLst>
+      <a:schemeClr val="accent2"/>
+      <a:schemeClr val="accent3"/>
+    </dgm:fillClrLst>
+    <dgm:linClrLst meth="repeat">
+      <a:schemeClr val="lt1"/>
+    </dgm:linClrLst>
+    <dgm:effectClrLst/>
+    <dgm:txLinClrLst/>
+    <dgm:txFillClrLst meth="repeat">
+      <a:schemeClr val="lt1"/>
+    </dgm:txFillClrLst>
+    <dgm:txEffectClrLst/>
+  </dgm:styleLbl>
+  <dgm:styleLbl name="sibTrans1D1">
+    <dgm:fillClrLst/>
+    <dgm:linClrLst>
+      <a:schemeClr val="accent2"/>
+      <a:schemeClr val="accent3"/>
+    </dgm:linClrLst>
+    <dgm:effectClrLst/>
+    <dgm:txLinClrLst/>
+    <dgm:txFillClrLst meth="repeat">
+      <a:schemeClr val="tx1"/>
+    </dgm:txFillClrLst>
+    <dgm:txEffectClrLst/>
+  </dgm:styleLbl>
+  <dgm:styleLbl name="callout">
+    <dgm:fillClrLst meth="repeat">
+      <a:schemeClr val="accent2"/>
+    </dgm:fillClrLst>
+    <dgm:linClrLst meth="repeat">
+      <a:schemeClr val="accent2">
+        <a:tint val="50000"/>
+      </a:schemeClr>
+    </dgm:linClrLst>
+    <dgm:effectClrLst/>
+    <dgm:txLinClrLst/>
+    <dgm:txFillClrLst meth="repeat">
+      <a:schemeClr val="tx1"/>
+    </dgm:txFillClrLst>
+    <dgm:txEffectClrLst/>
+  </dgm:styleLbl>
+  <dgm:styleLbl name="asst0">
+    <dgm:fillClrLst meth="repeat">
+      <a:schemeClr val="accent2"/>
+    </dgm:fillClrLst>
+    <dgm:linClrLst meth="repeat">
+      <a:schemeClr val="lt1">
+        <a:shade val="80000"/>
+      </a:schemeClr>
+    </dgm:linClrLst>
+    <dgm:effectClrLst/>
+    <dgm:txLinClrLst/>
+    <dgm:txFillClrLst/>
+    <dgm:txEffectClrLst/>
+  </dgm:styleLbl>
+  <dgm:styleLbl name="asst1">
+    <dgm:fillClrLst meth="repeat">
+      <a:schemeClr val="accent3"/>
+    </dgm:fillClrLst>
+    <dgm:linClrLst meth="repeat">
+      <a:schemeClr val="lt1">
+        <a:shade val="80000"/>
+      </a:schemeClr>
+    </dgm:linClrLst>
+    <dgm:effectClrLst/>
+    <dgm:txLinClrLst/>
+    <dgm:txFillClrLst/>
+    <dgm:txEffectClrLst/>
+  </dgm:styleLbl>
+  <dgm:styleLbl name="asst2">
+    <dgm:fillClrLst>
+      <a:schemeClr val="accent4"/>
+    </dgm:fillClrLst>
+    <dgm:linClrLst meth="repeat">
+      <a:schemeClr val="lt1"/>
+    </dgm:linClrLst>
+    <dgm:effectClrLst/>
+    <dgm:txLinClrLst/>
+    <dgm:txFillClrLst/>
+    <dgm:txEffectClrLst/>
+  </dgm:styleLbl>
+  <dgm:styleLbl name="asst3">
+    <dgm:fillClrLst>
+      <a:schemeClr val="accent5"/>
+    </dgm:fillClrLst>
+    <dgm:linClrLst meth="repeat">
+      <a:schemeClr val="lt1"/>
+    </dgm:linClrLst>
+    <dgm:effectClrLst/>
+    <dgm:txLinClrLst/>
+    <dgm:txFillClrLst/>
+    <dgm:txEffectClrLst/>
+  </dgm:styleLbl>
+  <dgm:styleLbl name="asst4">
+    <dgm:fillClrLst>
+      <a:schemeClr val="accent6"/>
+    </dgm:fillClrLst>
+    <dgm:linClrLst meth="repeat">
+      <a:schemeClr val="lt1"/>
+    </dgm:linClrLst>
+    <dgm:effectClrLst/>
+    <dgm:txLinClrLst/>
+    <dgm:txFillClrLst/>
+    <dgm:txEffectClrLst/>
+  </dgm:styleLbl>
+  <dgm:styleLbl name="parChTrans2D1">
+    <dgm:fillClrLst meth="repeat">
+      <a:schemeClr val="accent2"/>
+    </dgm:fillClrLst>
+    <dgm:linClrLst meth="repeat">
+      <a:schemeClr val="lt1"/>
+    </dgm:linClrLst>
+    <dgm:effectClrLst/>
+    <dgm:txLinClrLst/>
+    <dgm:txFillClrLst meth="repeat">
+      <a:schemeClr val="lt1"/>
+    </dgm:txFillClrLst>
+    <dgm:txEffectClrLst/>
+  </dgm:styleLbl>
+  <dgm:styleLbl name="parChTrans2D2">
+    <dgm:fillClrLst meth="repeat">
+      <a:schemeClr val="accent3"/>
+    </dgm:fillClrLst>
+    <dgm:linClrLst meth="repeat">
+      <a:schemeClr val="lt1"/>
+    </dgm:linClrLst>
+    <dgm:effectClrLst/>
+    <dgm:txLinClrLst/>
+    <dgm:txFillClrLst/>
+    <dgm:txEffectClrLst/>
+  </dgm:styleLbl>
+  <dgm:styleLbl name="parChTrans2D3">
+    <dgm:fillClrLst meth="repeat">
+      <a:schemeClr val="accent4"/>
+    </dgm:fillClrLst>
+    <dgm:linClrLst meth="repeat">
+      <a:schemeClr val="lt1"/>
+    </dgm:linClrLst>
+    <dgm:effectClrLst/>
+    <dgm:txLinClrLst/>
+    <dgm:txFillClrLst/>
+    <dgm:txEffectClrLst/>
+  </dgm:styleLbl>
+  <dgm:styleLbl name="parChTrans2D4">
+    <dgm:fillClrLst meth="repeat">
+      <a:schemeClr val="accent5"/>
+    </dgm:fillClrLst>
+    <dgm:linClrLst meth="repeat">
+      <a:schemeClr val="lt1"/>
+    </dgm:linClrLst>
+    <dgm:effectClrLst/>
+    <dgm:txLinClrLst/>
+    <dgm:txFillClrLst meth="repeat">
+      <a:schemeClr val="lt1"/>
+    </dgm:txFillClrLst>
+    <dgm:txEffectClrLst/>
+  </dgm:styleLbl>
+  <dgm:styleLbl name="parChTrans1D1">
+    <dgm:fillClrLst meth="repeat">
+      <a:schemeClr val="accent2"/>
+    </dgm:fillClrLst>
+    <dgm:linClrLst meth="repeat">
+      <a:schemeClr val="accent2"/>
+    </dgm:linClrLst>
+    <dgm:effectClrLst/>
+    <dgm:txLinClrLst/>
+    <dgm:txFillClrLst meth="repeat">
+      <a:schemeClr val="tx1"/>
+    </dgm:txFillClrLst>
+    <dgm:txEffectClrLst/>
+  </dgm:styleLbl>
+  <dgm:styleLbl name="parChTrans1D2">
+    <dgm:fillClrLst meth="repeat">
+      <a:schemeClr val="accent2">
+        <a:tint val="90000"/>
+      </a:schemeClr>
+    </dgm:fillClrLst>
+    <dgm:linClrLst meth="repeat">
+      <a:schemeClr val="accent3"/>
+    </dgm:linClrLst>
+    <dgm:effectClrLst/>
+    <dgm:txLinClrLst/>
+    <dgm:txFillClrLst meth="repeat">
+      <a:schemeClr val="tx1"/>
+    </dgm:txFillClrLst>
+    <dgm:txEffectClrLst/>
+  </dgm:styleLbl>
+  <dgm:styleLbl name="parChTrans1D3">
+    <dgm:fillClrLst meth="repeat">
+      <a:schemeClr val="accent2">
+        <a:tint val="70000"/>
+      </a:schemeClr>
+    </dgm:fillClrLst>
+    <dgm:linClrLst meth="repeat">
+      <a:schemeClr val="accent4"/>
+    </dgm:linClrLst>
+    <dgm:effectClrLst/>
+    <dgm:txLinClrLst/>
+    <dgm:txFillClrLst meth="repeat">
+      <a:schemeClr val="tx1"/>
+    </dgm:txFillClrLst>
+    <dgm:txEffectClrLst/>
+  </dgm:styleLbl>
+  <dgm:styleLbl name="parChTrans1D4">
+    <dgm:fillClrLst meth="repeat">
+      <a:schemeClr val="accent2">
+        <a:tint val="50000"/>
+      </a:schemeClr>
+    </dgm:fillClrLst>
+    <dgm:linClrLst meth="repeat">
+      <a:schemeClr val="accent5"/>
+    </dgm:linClrLst>
+    <dgm:effectClrLst/>
+    <dgm:txLinClrLst/>
+    <dgm:txFillClrLst meth="repeat">
+      <a:schemeClr val="tx1"/>
+    </dgm:txFillClrLst>
+    <dgm:txEffectClrLst/>
+  </dgm:styleLbl>
+  <dgm:styleLbl name="fgAcc1">
+    <dgm:fillClrLst meth="repeat">
+      <a:schemeClr val="lt1">
+        <a:alpha val="90000"/>
+      </a:schemeClr>
+    </dgm:fillClrLst>
+    <dgm:linClrLst>
+      <a:schemeClr val="accent2"/>
+      <a:schemeClr val="accent3"/>
+    </dgm:linClrLst>
+    <dgm:effectClrLst/>
+    <dgm:txLinClrLst/>
+    <dgm:txFillClrLst meth="repeat">
+      <a:schemeClr val="dk1"/>
+    </dgm:txFillClrLst>
+    <dgm:txEffectClrLst/>
+  </dgm:styleLbl>
+  <dgm:styleLbl name="conFgAcc1">
+    <dgm:fillClrLst meth="repeat">
+      <a:schemeClr val="lt1">
+        <a:alpha val="90000"/>
+      </a:schemeClr>
+    </dgm:fillClrLst>
+    <dgm:linClrLst>
+      <a:schemeClr val="accent2"/>
+      <a:schemeClr val="accent3"/>
+    </dgm:linClrLst>
+    <dgm:effectClrLst/>
+    <dgm:txLinClrLst/>
+    <dgm:txFillClrLst meth="repeat">
+      <a:schemeClr val="dk1"/>
+    </dgm:txFillClrLst>
+    <dgm:txEffectClrLst/>
+  </dgm:styleLbl>
+  <dgm:styleLbl name="alignAcc1">
+    <dgm:fillClrLst meth="repeat">
+      <a:schemeClr val="lt1">
+        <a:alpha val="90000"/>
+      </a:schemeClr>
+    </dgm:fillClrLst>
+    <dgm:linClrLst>
+      <a:schemeClr val="accent2"/>
+      <a:schemeClr val="accent3"/>
+    </dgm:linClrLst>
+    <dgm:effectClrLst/>
+    <dgm:txLinClrLst/>
+    <dgm:txFillClrLst meth="repeat">
+      <a:schemeClr val="dk1"/>
+    </dgm:txFillClrLst>
+    <dgm:txEffectClrLst/>
+  </dgm:styleLbl>
+  <dgm:styleLbl name="trAlignAcc1">
+    <dgm:fillClrLst meth="repeat">
+      <a:schemeClr val="lt1">
+        <a:alpha val="40000"/>
+      </a:schemeClr>
+    </dgm:fillClrLst>
+    <dgm:linClrLst meth="repeat">
+      <a:schemeClr val="accent2"/>
+    </dgm:linClrLst>
+    <dgm:effectClrLst/>
+    <dgm:txLinClrLst/>
+    <dgm:txFillClrLst meth="repeat">
+      <a:schemeClr val="dk1"/>
+    </dgm:txFillClrLst>
+    <dgm:txEffectClrLst/>
+  </dgm:styleLbl>
+  <dgm:styleLbl name="bgAcc1">
+    <dgm:fillClrLst meth="repeat">
+      <a:schemeClr val="lt1">
+        <a:alpha val="90000"/>
+      </a:schemeClr>
+    </dgm:fillClrLst>
+    <dgm:linClrLst>
+      <a:schemeClr val="accent2"/>
+      <a:schemeClr val="accent3"/>
+    </dgm:linClrLst>
+    <dgm:effectClrLst/>
+    <dgm:txLinClrLst/>
+    <dgm:txFillClrLst meth="repeat">
+      <a:schemeClr val="dk1"/>
+    </dgm:txFillClrLst>
+    <dgm:txEffectClrLst/>
+  </dgm:styleLbl>
+  <dgm:styleLbl name="solidFgAcc1">
+    <dgm:fillClrLst meth="repeat">
+      <a:schemeClr val="lt1"/>
+    </dgm:fillClrLst>
+    <dgm:linClrLst>
+      <a:schemeClr val="accent2"/>
+      <a:schemeClr val="accent3"/>
+    </dgm:linClrLst>
+    <dgm:effectClrLst/>
+    <dgm:txLinClrLst/>
+    <dgm:txFillClrLst meth="repeat">
+      <a:schemeClr val="dk1"/>
+    </dgm:txFillClrLst>
+    <dgm:txEffectClrLst/>
+  </dgm:styleLbl>
+  <dgm:styleLbl name="solidAlignAcc1">
+    <dgm:fillClrLst meth="repeat">
+      <a:schemeClr val="lt1"/>
+    </dgm:fillClrLst>
+    <dgm:linClrLst>
+      <a:schemeClr val="accent2"/>
+      <a:schemeClr val="accent3"/>
+    </dgm:linClrLst>
+    <dgm:effectClrLst/>
+    <dgm:txLinClrLst/>
+    <dgm:txFillClrLst meth="repeat">
+      <a:schemeClr val="dk1"/>
+    </dgm:txFillClrLst>
+    <dgm:txEffectClrLst/>
+  </dgm:styleLbl>
+  <dgm:styleLbl name="solidBgAcc1">
+    <dgm:fillClrLst meth="repeat">
+      <a:schemeClr val="lt1"/>
+    </dgm:fillClrLst>
+    <dgm:linClrLst>
+      <a:schemeClr val="accent2"/>
+      <a:schemeClr val="accent3"/>
+    </dgm:linClrLst>
+    <dgm:effectClrLst/>
+    <dgm:txLinClrLst/>
+    <dgm:txFillClrLst meth="repeat">
+      <a:schemeClr val="dk1"/>
+    </dgm:txFillClrLst>
+    <dgm:txEffectClrLst/>
+  </dgm:styleLbl>
+  <dgm:styleLbl name="fgAccFollowNode1">
+    <dgm:fillClrLst>
+      <a:schemeClr val="accent2">
+        <a:tint val="40000"/>
+        <a:alpha val="90000"/>
+      </a:schemeClr>
+      <a:schemeClr val="accent3">
+        <a:tint val="40000"/>
+        <a:alpha val="90000"/>
+      </a:schemeClr>
+    </dgm:fillClrLst>
+    <dgm:linClrLst>
+      <a:schemeClr val="accent2">
+        <a:tint val="40000"/>
+        <a:alpha val="90000"/>
+      </a:schemeClr>
+      <a:schemeClr val="accent3">
+        <a:tint val="40000"/>
+        <a:alpha val="90000"/>
+      </a:schemeClr>
+    </dgm:linClrLst>
+    <dgm:effectClrLst/>
+    <dgm:txLinClrLst/>
+    <dgm:txFillClrLst meth="repeat">
+      <a:schemeClr val="dk1"/>
+    </dgm:txFillClrLst>
+    <dgm:txEffectClrLst/>
+  </dgm:styleLbl>
+  <dgm:styleLbl name="alignAccFollowNode1">
+    <dgm:fillClrLst>
+      <a:schemeClr val="accent2">
+        <a:tint val="40000"/>
+        <a:alpha val="90000"/>
+      </a:schemeClr>
+      <a:schemeClr val="accent3">
+        <a:tint val="40000"/>
+        <a:alpha val="90000"/>
+      </a:schemeClr>
+    </dgm:fillClrLst>
+    <dgm:linClrLst>
+      <a:schemeClr val="accent2">
+        <a:tint val="40000"/>
+        <a:alpha val="90000"/>
+      </a:schemeClr>
+      <a:schemeClr val="accent3">
+        <a:tint val="40000"/>
+        <a:alpha val="90000"/>
+      </a:schemeClr>
+    </dgm:linClrLst>
+    <dgm:effectClrLst/>
+    <dgm:txLinClrLst/>
+    <dgm:txFillClrLst meth="repeat">
+      <a:schemeClr val="dk1"/>
+    </dgm:txFillClrLst>
+    <dgm:txEffectClrLst/>
+  </dgm:styleLbl>
+  <dgm:styleLbl name="bgAccFollowNode1">
+    <dgm:fillClrLst>
+      <a:schemeClr val="accent2">
+        <a:tint val="40000"/>
+        <a:alpha val="90000"/>
+      </a:schemeClr>
+      <a:schemeClr val="accent3">
+        <a:tint val="40000"/>
+        <a:alpha val="90000"/>
+      </a:schemeClr>
+    </dgm:fillClrLst>
+    <dgm:linClrLst>
+      <a:schemeClr val="accent2">
+        <a:tint val="40000"/>
+        <a:alpha val="90000"/>
+      </a:schemeClr>
+      <a:schemeClr val="accent3">
+        <a:tint val="40000"/>
+        <a:alpha val="90000"/>
+      </a:schemeClr>
+    </dgm:linClrLst>
+    <dgm:effectClrLst/>
+    <dgm:txLinClrLst/>
+    <dgm:txFillClrLst meth="repeat">
+      <a:schemeClr val="dk1"/>
+    </dgm:txFillClrLst>
+    <dgm:txEffectClrLst/>
+  </dgm:styleLbl>
+  <dgm:styleLbl name="fgAcc0">
+    <dgm:fillClrLst meth="repeat">
+      <a:schemeClr val="lt1">
+        <a:alpha val="90000"/>
+      </a:schemeClr>
+    </dgm:fillClrLst>
+    <dgm:linClrLst>
+      <a:schemeClr val="accent1"/>
+    </dgm:linClrLst>
+    <dgm:effectClrLst/>
+    <dgm:txLinClrLst/>
+    <dgm:txFillClrLst meth="repeat">
+      <a:schemeClr val="dk1"/>
+    </dgm:txFillClrLst>
+    <dgm:txEffectClrLst/>
+  </dgm:styleLbl>
+  <dgm:styleLbl name="fgAcc2">
+    <dgm:fillClrLst meth="repeat">
+      <a:schemeClr val="lt1">
+        <a:alpha val="90000"/>
+      </a:schemeClr>
+    </dgm:fillClrLst>
+    <dgm:linClrLst>
+      <a:schemeClr val="accent3"/>
+    </dgm:linClrLst>
+    <dgm:effectClrLst/>
+    <dgm:txLinClrLst/>
+    <dgm:txFillClrLst meth="repeat">
+      <a:schemeClr val="dk1"/>
+    </dgm:txFillClrLst>
+    <dgm:txEffectClrLst/>
+  </dgm:styleLbl>
+  <dgm:styleLbl name="fgAcc3">
+    <dgm:fillClrLst meth="repeat">
+      <a:schemeClr val="lt1">
+        <a:alpha val="90000"/>
+      </a:schemeClr>
+    </dgm:fillClrLst>
+    <dgm:linClrLst>
+      <a:schemeClr val="accent4"/>
+    </dgm:linClrLst>
+    <dgm:effectClrLst/>
+    <dgm:txLinClrLst/>
+    <dgm:txFillClrLst meth="repeat">
+      <a:schemeClr val="dk1"/>
+    </dgm:txFillClrLst>
+    <dgm:txEffectClrLst/>
+  </dgm:styleLbl>
+  <dgm:styleLbl name="fgAcc4">
+    <dgm:fillClrLst meth="repeat">
+      <a:schemeClr val="lt1">
+        <a:alpha val="90000"/>
+      </a:schemeClr>
+    </dgm:fillClrLst>
+    <dgm:linClrLst>
+      <a:schemeClr val="accent5"/>
+    </dgm:linClrLst>
+    <dgm:effectClrLst/>
+    <dgm:txLinClrLst/>
+    <dgm:txFillClrLst meth="repeat">
+      <a:schemeClr val="dk1"/>
+    </dgm:txFillClrLst>
+    <dgm:txEffectClrLst/>
+  </dgm:styleLbl>
+  <dgm:styleLbl name="bgShp">
+    <dgm:fillClrLst meth="repeat">
+      <a:schemeClr val="accent2">
+        <a:tint val="40000"/>
+      </a:schemeClr>
+    </dgm:fillClrLst>
+    <dgm:linClrLst meth="repeat">
+      <a:schemeClr val="dk1"/>
+    </dgm:linClrLst>
+    <dgm:effectClrLst/>
+    <dgm:txLinClrLst/>
+    <dgm:txFillClrLst meth="repeat">
+      <a:schemeClr val="dk1"/>
+    </dgm:txFillClrLst>
+    <dgm:txEffectClrLst/>
+  </dgm:styleLbl>
+  <dgm:styleLbl name="dkBgShp">
+    <dgm:fillClrLst meth="repeat">
+      <a:schemeClr val="accent2">
+        <a:shade val="90000"/>
+      </a:schemeClr>
+    </dgm:fillClrLst>
+    <dgm:linClrLst meth="repeat">
+      <a:schemeClr val="dk1"/>
+    </dgm:linClrLst>
+    <dgm:effectClrLst/>
+    <dgm:txLinClrLst/>
+    <dgm:txFillClrLst meth="repeat">
+      <a:schemeClr val="lt1"/>
+    </dgm:txFillClrLst>
+    <dgm:txEffectClrLst/>
+  </dgm:styleLbl>
+  <dgm:styleLbl name="trBgShp">
+    <dgm:fillClrLst meth="repeat">
+      <a:schemeClr val="accent2">
+        <a:tint val="50000"/>
+        <a:alpha val="40000"/>
+      </a:schemeClr>
+    </dgm:fillClrLst>
+    <dgm:linClrLst meth="repeat">
+      <a:schemeClr val="accent2"/>
+    </dgm:linClrLst>
+    <dgm:effectClrLst/>
+    <dgm:txLinClrLst/>
+    <dgm:txFillClrLst meth="repeat">
+      <a:schemeClr val="lt1"/>
+    </dgm:txFillClrLst>
+    <dgm:txEffectClrLst/>
+  </dgm:styleLbl>
+  <dgm:styleLbl name="fgShp">
+    <dgm:fillClrLst meth="repeat">
+      <a:schemeClr val="accent2">
+        <a:tint val="40000"/>
+      </a:schemeClr>
+    </dgm:fillClrLst>
+    <dgm:linClrLst meth="repeat">
+      <a:schemeClr val="lt1"/>
+    </dgm:linClrLst>
+    <dgm:effectClrLst/>
+    <dgm:txLinClrLst/>
+    <dgm:txFillClrLst meth="repeat">
+      <a:schemeClr val="dk1"/>
+    </dgm:txFillClrLst>
+    <dgm:txEffectClrLst/>
+  </dgm:styleLbl>
+  <dgm:styleLbl name="revTx">
+    <dgm:fillClrLst meth="repeat">
+      <a:schemeClr val="lt1">
+        <a:alpha val="0"/>
+      </a:schemeClr>
+    </dgm:fillClrLst>
+    <dgm:linClrLst meth="repeat">
+      <a:schemeClr val="dk1">
+        <a:alpha val="0"/>
+      </a:schemeClr>
+    </dgm:linClrLst>
+    <dgm:effectClrLst/>
+    <dgm:txLinClrLst/>
+    <dgm:txFillClrLst meth="repeat">
+      <a:schemeClr val="tx1"/>
+    </dgm:txFillClrLst>
+    <dgm:txEffectClrLst/>
+  </dgm:styleLbl>
+</dgm:colorsDef>
+</file>
+
+<file path=ppt/diagrams/colors4.xml><?xml version="1.0" encoding="utf-8"?>
 <dgm:colorsDef xmlns:dgm="http://schemas.openxmlformats.org/drawingml/2006/diagram" xmlns:a="http://schemas.openxmlformats.org/drawingml/2006/main" uniqueId="urn:microsoft.com/office/officeart/2005/8/colors/colorful1">
   <dgm:title val=""/>
   <dgm:desc val=""/>
@@ -3265,6 +4048,180 @@
 </file>
 
 <file path=ppt/diagrams/data3.xml><?xml version="1.0" encoding="utf-8"?>
+<dgm:dataModel xmlns:dgm="http://schemas.openxmlformats.org/drawingml/2006/diagram" xmlns:a="http://schemas.openxmlformats.org/drawingml/2006/main">
+  <dgm:ptLst>
+    <dgm:pt modelId="{F4ACA3A3-C523-4399-B9A3-810A20A8C0D8}" type="doc">
+      <dgm:prSet loTypeId="urn:microsoft.com/office/officeart/2005/8/layout/hierarchy1" loCatId="hierarchy" qsTypeId="urn:microsoft.com/office/officeart/2005/8/quickstyle/simple1" qsCatId="simple" csTypeId="urn:microsoft.com/office/officeart/2005/8/colors/colorful2" csCatId="colorful"/>
+      <dgm:spPr/>
+      <dgm:t>
+        <a:bodyPr/>
+        <a:lstStyle/>
+        <a:p>
+          <a:endParaRPr lang="en-US"/>
+        </a:p>
+      </dgm:t>
+    </dgm:pt>
+    <dgm:pt modelId="{FC396CF3-2130-472D-8BB5-F44AB3645B75}">
+      <dgm:prSet/>
+      <dgm:spPr/>
+      <dgm:t>
+        <a:bodyPr/>
+        <a:lstStyle/>
+        <a:p>
+          <a:r>
+            <a:rPr lang="en-US"/>
+            <a:t>Ultimately, despite our hypothesis, our XGBoost model still struggled to consistently identify Cinderella teams. </a:t>
+          </a:r>
+        </a:p>
+      </dgm:t>
+    </dgm:pt>
+    <dgm:pt modelId="{60E2C6C7-2217-425F-8405-EDBEC5208323}" type="parTrans" cxnId="{7B44718F-334E-4484-9740-96668BF1CF86}">
+      <dgm:prSet/>
+      <dgm:spPr/>
+      <dgm:t>
+        <a:bodyPr/>
+        <a:lstStyle/>
+        <a:p>
+          <a:endParaRPr lang="en-US"/>
+        </a:p>
+      </dgm:t>
+    </dgm:pt>
+    <dgm:pt modelId="{5E84E926-6E1C-49B6-B5E5-BD0762710070}" type="sibTrans" cxnId="{7B44718F-334E-4484-9740-96668BF1CF86}">
+      <dgm:prSet/>
+      <dgm:spPr/>
+      <dgm:t>
+        <a:bodyPr/>
+        <a:lstStyle/>
+        <a:p>
+          <a:endParaRPr lang="en-US"/>
+        </a:p>
+      </dgm:t>
+    </dgm:pt>
+    <dgm:pt modelId="{4BABE728-AE20-457E-862F-ED595B676281}">
+      <dgm:prSet/>
+      <dgm:spPr/>
+      <dgm:t>
+        <a:bodyPr/>
+        <a:lstStyle/>
+        <a:p>
+          <a:r>
+            <a:rPr lang="en-US"/>
+            <a:t>While it performed better than a random guess, it wasn’t drastically better. </a:t>
+          </a:r>
+        </a:p>
+      </dgm:t>
+    </dgm:pt>
+    <dgm:pt modelId="{08FD178D-B3D4-4DE0-A97B-38DA3FB60881}" type="parTrans" cxnId="{C4C6BFD8-DBC8-401B-BAEB-5A70460B0A9E}">
+      <dgm:prSet/>
+      <dgm:spPr/>
+      <dgm:t>
+        <a:bodyPr/>
+        <a:lstStyle/>
+        <a:p>
+          <a:endParaRPr lang="en-US"/>
+        </a:p>
+      </dgm:t>
+    </dgm:pt>
+    <dgm:pt modelId="{1AAFCA55-E135-42D4-A026-A9CA1FBF6D5A}" type="sibTrans" cxnId="{C4C6BFD8-DBC8-401B-BAEB-5A70460B0A9E}">
+      <dgm:prSet/>
+      <dgm:spPr/>
+      <dgm:t>
+        <a:bodyPr/>
+        <a:lstStyle/>
+        <a:p>
+          <a:endParaRPr lang="en-US"/>
+        </a:p>
+      </dgm:t>
+    </dgm:pt>
+    <dgm:pt modelId="{B870DEF7-B568-48C6-8FC5-87A9C7144686}" type="pres">
+      <dgm:prSet presAssocID="{F4ACA3A3-C523-4399-B9A3-810A20A8C0D8}" presName="hierChild1" presStyleCnt="0">
+        <dgm:presLayoutVars>
+          <dgm:chPref val="1"/>
+          <dgm:dir/>
+          <dgm:animOne val="branch"/>
+          <dgm:animLvl val="lvl"/>
+          <dgm:resizeHandles/>
+        </dgm:presLayoutVars>
+      </dgm:prSet>
+      <dgm:spPr/>
+    </dgm:pt>
+    <dgm:pt modelId="{84600E0C-73F6-4DE1-A621-5F69ACDE1865}" type="pres">
+      <dgm:prSet presAssocID="{FC396CF3-2130-472D-8BB5-F44AB3645B75}" presName="hierRoot1" presStyleCnt="0"/>
+      <dgm:spPr/>
+    </dgm:pt>
+    <dgm:pt modelId="{2574BF3F-33C5-46BF-A66E-F42558F38699}" type="pres">
+      <dgm:prSet presAssocID="{FC396CF3-2130-472D-8BB5-F44AB3645B75}" presName="composite" presStyleCnt="0"/>
+      <dgm:spPr/>
+    </dgm:pt>
+    <dgm:pt modelId="{7F92F17A-6998-4BC2-A362-04352AE8FAC2}" type="pres">
+      <dgm:prSet presAssocID="{FC396CF3-2130-472D-8BB5-F44AB3645B75}" presName="background" presStyleLbl="node0" presStyleIdx="0" presStyleCnt="2"/>
+      <dgm:spPr/>
+    </dgm:pt>
+    <dgm:pt modelId="{C1612A79-1CF3-485A-BB2D-65B0D03A50AF}" type="pres">
+      <dgm:prSet presAssocID="{FC396CF3-2130-472D-8BB5-F44AB3645B75}" presName="text" presStyleLbl="fgAcc0" presStyleIdx="0" presStyleCnt="2">
+        <dgm:presLayoutVars>
+          <dgm:chPref val="3"/>
+        </dgm:presLayoutVars>
+      </dgm:prSet>
+      <dgm:spPr/>
+    </dgm:pt>
+    <dgm:pt modelId="{810CC1D7-061B-46D3-9E42-F6BB561BBB79}" type="pres">
+      <dgm:prSet presAssocID="{FC396CF3-2130-472D-8BB5-F44AB3645B75}" presName="hierChild2" presStyleCnt="0"/>
+      <dgm:spPr/>
+    </dgm:pt>
+    <dgm:pt modelId="{339F8818-24CA-4F16-AAE1-BD0FAFA333B0}" type="pres">
+      <dgm:prSet presAssocID="{4BABE728-AE20-457E-862F-ED595B676281}" presName="hierRoot1" presStyleCnt="0"/>
+      <dgm:spPr/>
+    </dgm:pt>
+    <dgm:pt modelId="{AD7AFACD-457C-4847-BC6C-8D2A4B95327C}" type="pres">
+      <dgm:prSet presAssocID="{4BABE728-AE20-457E-862F-ED595B676281}" presName="composite" presStyleCnt="0"/>
+      <dgm:spPr/>
+    </dgm:pt>
+    <dgm:pt modelId="{EB53B146-46D1-4C30-B1BF-DC61C66E6D97}" type="pres">
+      <dgm:prSet presAssocID="{4BABE728-AE20-457E-862F-ED595B676281}" presName="background" presStyleLbl="node0" presStyleIdx="1" presStyleCnt="2"/>
+      <dgm:spPr/>
+    </dgm:pt>
+    <dgm:pt modelId="{020CA961-0403-48B2-B4A4-13A36FCBDD7E}" type="pres">
+      <dgm:prSet presAssocID="{4BABE728-AE20-457E-862F-ED595B676281}" presName="text" presStyleLbl="fgAcc0" presStyleIdx="1" presStyleCnt="2">
+        <dgm:presLayoutVars>
+          <dgm:chPref val="3"/>
+        </dgm:presLayoutVars>
+      </dgm:prSet>
+      <dgm:spPr/>
+    </dgm:pt>
+    <dgm:pt modelId="{00B8055C-205B-464C-B7C1-9EF97DB09311}" type="pres">
+      <dgm:prSet presAssocID="{4BABE728-AE20-457E-862F-ED595B676281}" presName="hierChild2" presStyleCnt="0"/>
+      <dgm:spPr/>
+    </dgm:pt>
+  </dgm:ptLst>
+  <dgm:cxnLst>
+    <dgm:cxn modelId="{D9AFF00E-60E3-455E-9CA2-2010011A35B4}" type="presOf" srcId="{F4ACA3A3-C523-4399-B9A3-810A20A8C0D8}" destId="{B870DEF7-B568-48C6-8FC5-87A9C7144686}" srcOrd="0" destOrd="0" presId="urn:microsoft.com/office/officeart/2005/8/layout/hierarchy1"/>
+    <dgm:cxn modelId="{7B44718F-334E-4484-9740-96668BF1CF86}" srcId="{F4ACA3A3-C523-4399-B9A3-810A20A8C0D8}" destId="{FC396CF3-2130-472D-8BB5-F44AB3645B75}" srcOrd="0" destOrd="0" parTransId="{60E2C6C7-2217-425F-8405-EDBEC5208323}" sibTransId="{5E84E926-6E1C-49B6-B5E5-BD0762710070}"/>
+    <dgm:cxn modelId="{5FB0F891-B91F-4FC8-8C37-A5EAEDBCC7AA}" type="presOf" srcId="{FC396CF3-2130-472D-8BB5-F44AB3645B75}" destId="{C1612A79-1CF3-485A-BB2D-65B0D03A50AF}" srcOrd="0" destOrd="0" presId="urn:microsoft.com/office/officeart/2005/8/layout/hierarchy1"/>
+    <dgm:cxn modelId="{C4C6BFD8-DBC8-401B-BAEB-5A70460B0A9E}" srcId="{F4ACA3A3-C523-4399-B9A3-810A20A8C0D8}" destId="{4BABE728-AE20-457E-862F-ED595B676281}" srcOrd="1" destOrd="0" parTransId="{08FD178D-B3D4-4DE0-A97B-38DA3FB60881}" sibTransId="{1AAFCA55-E135-42D4-A026-A9CA1FBF6D5A}"/>
+    <dgm:cxn modelId="{812B15E3-3709-4102-BB0A-C978B1385319}" type="presOf" srcId="{4BABE728-AE20-457E-862F-ED595B676281}" destId="{020CA961-0403-48B2-B4A4-13A36FCBDD7E}" srcOrd="0" destOrd="0" presId="urn:microsoft.com/office/officeart/2005/8/layout/hierarchy1"/>
+    <dgm:cxn modelId="{178B04D2-878D-4BF8-8648-C9CCA8886A4D}" type="presParOf" srcId="{B870DEF7-B568-48C6-8FC5-87A9C7144686}" destId="{84600E0C-73F6-4DE1-A621-5F69ACDE1865}" srcOrd="0" destOrd="0" presId="urn:microsoft.com/office/officeart/2005/8/layout/hierarchy1"/>
+    <dgm:cxn modelId="{CF0E9070-4E5D-41BA-9F65-2F94E5ACE39B}" type="presParOf" srcId="{84600E0C-73F6-4DE1-A621-5F69ACDE1865}" destId="{2574BF3F-33C5-46BF-A66E-F42558F38699}" srcOrd="0" destOrd="0" presId="urn:microsoft.com/office/officeart/2005/8/layout/hierarchy1"/>
+    <dgm:cxn modelId="{C4E87152-A135-49D6-8377-28227FC637F0}" type="presParOf" srcId="{2574BF3F-33C5-46BF-A66E-F42558F38699}" destId="{7F92F17A-6998-4BC2-A362-04352AE8FAC2}" srcOrd="0" destOrd="0" presId="urn:microsoft.com/office/officeart/2005/8/layout/hierarchy1"/>
+    <dgm:cxn modelId="{6BE1598E-555C-4FE2-AC1C-C4F6EB9E251C}" type="presParOf" srcId="{2574BF3F-33C5-46BF-A66E-F42558F38699}" destId="{C1612A79-1CF3-485A-BB2D-65B0D03A50AF}" srcOrd="1" destOrd="0" presId="urn:microsoft.com/office/officeart/2005/8/layout/hierarchy1"/>
+    <dgm:cxn modelId="{FA33CF50-3DD3-4D4F-9364-21D28F5321B7}" type="presParOf" srcId="{84600E0C-73F6-4DE1-A621-5F69ACDE1865}" destId="{810CC1D7-061B-46D3-9E42-F6BB561BBB79}" srcOrd="1" destOrd="0" presId="urn:microsoft.com/office/officeart/2005/8/layout/hierarchy1"/>
+    <dgm:cxn modelId="{BD97C2DF-F4A9-4D90-902C-974AD863456A}" type="presParOf" srcId="{B870DEF7-B568-48C6-8FC5-87A9C7144686}" destId="{339F8818-24CA-4F16-AAE1-BD0FAFA333B0}" srcOrd="1" destOrd="0" presId="urn:microsoft.com/office/officeart/2005/8/layout/hierarchy1"/>
+    <dgm:cxn modelId="{09AB2E30-0E3D-478D-88B2-AF48093E7350}" type="presParOf" srcId="{339F8818-24CA-4F16-AAE1-BD0FAFA333B0}" destId="{AD7AFACD-457C-4847-BC6C-8D2A4B95327C}" srcOrd="0" destOrd="0" presId="urn:microsoft.com/office/officeart/2005/8/layout/hierarchy1"/>
+    <dgm:cxn modelId="{AB222D1D-F99D-4D5F-995D-890AD09AA927}" type="presParOf" srcId="{AD7AFACD-457C-4847-BC6C-8D2A4B95327C}" destId="{EB53B146-46D1-4C30-B1BF-DC61C66E6D97}" srcOrd="0" destOrd="0" presId="urn:microsoft.com/office/officeart/2005/8/layout/hierarchy1"/>
+    <dgm:cxn modelId="{BB6191F3-04B6-4D8A-A032-A1955BE69368}" type="presParOf" srcId="{AD7AFACD-457C-4847-BC6C-8D2A4B95327C}" destId="{020CA961-0403-48B2-B4A4-13A36FCBDD7E}" srcOrd="1" destOrd="0" presId="urn:microsoft.com/office/officeart/2005/8/layout/hierarchy1"/>
+    <dgm:cxn modelId="{44F890BA-E120-4F93-B3C5-5806E4DAF85E}" type="presParOf" srcId="{339F8818-24CA-4F16-AAE1-BD0FAFA333B0}" destId="{00B8055C-205B-464C-B7C1-9EF97DB09311}" srcOrd="1" destOrd="0" presId="urn:microsoft.com/office/officeart/2005/8/layout/hierarchy1"/>
+  </dgm:cxnLst>
+  <dgm:bg/>
+  <dgm:whole/>
+  <dgm:extLst>
+    <a:ext uri="http://schemas.microsoft.com/office/drawing/2008/diagram">
+      <dsp:dataModelExt xmlns:dsp="http://schemas.microsoft.com/office/drawing/2008/diagram" relId="rId6" minVer="http://schemas.openxmlformats.org/drawingml/2006/diagram"/>
+    </a:ext>
+  </dgm:extLst>
+</dgm:dataModel>
+</file>
+
+<file path=ppt/diagrams/data4.xml><?xml version="1.0" encoding="utf-8"?>
 <dgm:dataModel xmlns:dgm="http://schemas.openxmlformats.org/drawingml/2006/diagram" xmlns:a="http://schemas.openxmlformats.org/drawingml/2006/main">
   <dgm:ptLst>
     <dgm:pt modelId="{9A956502-3703-4132-AC03-69BF4A493969}" type="doc">
@@ -4582,6 +5539,280 @@
 </file>
 
 <file path=ppt/diagrams/drawing3.xml><?xml version="1.0" encoding="utf-8"?>
+<dsp:drawing xmlns:dgm="http://schemas.openxmlformats.org/drawingml/2006/diagram" xmlns:dsp="http://schemas.microsoft.com/office/drawing/2008/diagram" xmlns:a="http://schemas.openxmlformats.org/drawingml/2006/main">
+  <dsp:spTree>
+    <dsp:nvGrpSpPr>
+      <dsp:cNvPr id="0" name=""/>
+      <dsp:cNvGrpSpPr/>
+    </dsp:nvGrpSpPr>
+    <dsp:grpSpPr/>
+    <dsp:sp modelId="{7F92F17A-6998-4BC2-A362-04352AE8FAC2}">
+      <dsp:nvSpPr>
+        <dsp:cNvPr id="0" name=""/>
+        <dsp:cNvSpPr/>
+      </dsp:nvSpPr>
+      <dsp:spPr>
+        <a:xfrm>
+          <a:off x="134291" y="612"/>
+          <a:ext cx="4332795" cy="2751325"/>
+        </a:xfrm>
+        <a:prstGeom prst="roundRect">
+          <a:avLst>
+            <a:gd name="adj" fmla="val 10000"/>
+          </a:avLst>
+        </a:prstGeom>
+        <a:solidFill>
+          <a:schemeClr val="accent1">
+            <a:hueOff val="0"/>
+            <a:satOff val="0"/>
+            <a:lumOff val="0"/>
+            <a:alphaOff val="0"/>
+          </a:schemeClr>
+        </a:solidFill>
+        <a:ln w="19050" cap="flat" cmpd="sng" algn="ctr">
+          <a:solidFill>
+            <a:schemeClr val="lt1">
+              <a:hueOff val="0"/>
+              <a:satOff val="0"/>
+              <a:lumOff val="0"/>
+              <a:alphaOff val="0"/>
+            </a:schemeClr>
+          </a:solidFill>
+          <a:prstDash val="solid"/>
+          <a:miter lim="800000"/>
+        </a:ln>
+        <a:effectLst/>
+      </dsp:spPr>
+      <dsp:style>
+        <a:lnRef idx="2">
+          <a:scrgbClr r="0" g="0" b="0"/>
+        </a:lnRef>
+        <a:fillRef idx="1">
+          <a:scrgbClr r="0" g="0" b="0"/>
+        </a:fillRef>
+        <a:effectRef idx="0">
+          <a:scrgbClr r="0" g="0" b="0"/>
+        </a:effectRef>
+        <a:fontRef idx="minor">
+          <a:schemeClr val="lt1"/>
+        </a:fontRef>
+      </dsp:style>
+    </dsp:sp>
+    <dsp:sp modelId="{C1612A79-1CF3-485A-BB2D-65B0D03A50AF}">
+      <dsp:nvSpPr>
+        <dsp:cNvPr id="0" name=""/>
+        <dsp:cNvSpPr/>
+      </dsp:nvSpPr>
+      <dsp:spPr>
+        <a:xfrm>
+          <a:off x="615713" y="457963"/>
+          <a:ext cx="4332795" cy="2751325"/>
+        </a:xfrm>
+        <a:prstGeom prst="roundRect">
+          <a:avLst>
+            <a:gd name="adj" fmla="val 10000"/>
+          </a:avLst>
+        </a:prstGeom>
+        <a:solidFill>
+          <a:schemeClr val="lt1">
+            <a:alpha val="90000"/>
+            <a:hueOff val="0"/>
+            <a:satOff val="0"/>
+            <a:lumOff val="0"/>
+            <a:alphaOff val="0"/>
+          </a:schemeClr>
+        </a:solidFill>
+        <a:ln w="19050" cap="flat" cmpd="sng" algn="ctr">
+          <a:solidFill>
+            <a:schemeClr val="accent1">
+              <a:hueOff val="0"/>
+              <a:satOff val="0"/>
+              <a:lumOff val="0"/>
+              <a:alphaOff val="0"/>
+            </a:schemeClr>
+          </a:solidFill>
+          <a:prstDash val="solid"/>
+          <a:miter lim="800000"/>
+        </a:ln>
+        <a:effectLst/>
+      </dsp:spPr>
+      <dsp:style>
+        <a:lnRef idx="2">
+          <a:scrgbClr r="0" g="0" b="0"/>
+        </a:lnRef>
+        <a:fillRef idx="1">
+          <a:scrgbClr r="0" g="0" b="0"/>
+        </a:fillRef>
+        <a:effectRef idx="0">
+          <a:scrgbClr r="0" g="0" b="0"/>
+        </a:effectRef>
+        <a:fontRef idx="minor"/>
+      </dsp:style>
+      <dsp:txBody>
+        <a:bodyPr spcFirstLastPara="0" vert="horz" wrap="square" lIns="110490" tIns="110490" rIns="110490" bIns="110490" numCol="1" spcCol="1270" anchor="ctr" anchorCtr="0">
+          <a:noAutofit/>
+        </a:bodyPr>
+        <a:lstStyle/>
+        <a:p>
+          <a:pPr marL="0" lvl="0" indent="0" algn="ctr" defTabSz="1289050">
+            <a:lnSpc>
+              <a:spcPct val="90000"/>
+            </a:lnSpc>
+            <a:spcBef>
+              <a:spcPct val="0"/>
+            </a:spcBef>
+            <a:spcAft>
+              <a:spcPct val="35000"/>
+            </a:spcAft>
+            <a:buNone/>
+          </a:pPr>
+          <a:r>
+            <a:rPr lang="en-US" sz="2900" kern="1200"/>
+            <a:t>Ultimately, despite our hypothesis, our XGBoost model still struggled to consistently identify Cinderella teams. </a:t>
+          </a:r>
+        </a:p>
+      </dsp:txBody>
+      <dsp:txXfrm>
+        <a:off x="696297" y="538547"/>
+        <a:ext cx="4171627" cy="2590157"/>
+      </dsp:txXfrm>
+    </dsp:sp>
+    <dsp:sp modelId="{EB53B146-46D1-4C30-B1BF-DC61C66E6D97}">
+      <dsp:nvSpPr>
+        <dsp:cNvPr id="0" name=""/>
+        <dsp:cNvSpPr/>
+      </dsp:nvSpPr>
+      <dsp:spPr>
+        <a:xfrm>
+          <a:off x="5429930" y="612"/>
+          <a:ext cx="4332795" cy="2751325"/>
+        </a:xfrm>
+        <a:prstGeom prst="roundRect">
+          <a:avLst>
+            <a:gd name="adj" fmla="val 10000"/>
+          </a:avLst>
+        </a:prstGeom>
+        <a:solidFill>
+          <a:schemeClr val="accent1">
+            <a:hueOff val="0"/>
+            <a:satOff val="0"/>
+            <a:lumOff val="0"/>
+            <a:alphaOff val="0"/>
+          </a:schemeClr>
+        </a:solidFill>
+        <a:ln w="19050" cap="flat" cmpd="sng" algn="ctr">
+          <a:solidFill>
+            <a:schemeClr val="lt1">
+              <a:hueOff val="0"/>
+              <a:satOff val="0"/>
+              <a:lumOff val="0"/>
+              <a:alphaOff val="0"/>
+            </a:schemeClr>
+          </a:solidFill>
+          <a:prstDash val="solid"/>
+          <a:miter lim="800000"/>
+        </a:ln>
+        <a:effectLst/>
+      </dsp:spPr>
+      <dsp:style>
+        <a:lnRef idx="2">
+          <a:scrgbClr r="0" g="0" b="0"/>
+        </a:lnRef>
+        <a:fillRef idx="1">
+          <a:scrgbClr r="0" g="0" b="0"/>
+        </a:fillRef>
+        <a:effectRef idx="0">
+          <a:scrgbClr r="0" g="0" b="0"/>
+        </a:effectRef>
+        <a:fontRef idx="minor">
+          <a:schemeClr val="lt1"/>
+        </a:fontRef>
+      </dsp:style>
+    </dsp:sp>
+    <dsp:sp modelId="{020CA961-0403-48B2-B4A4-13A36FCBDD7E}">
+      <dsp:nvSpPr>
+        <dsp:cNvPr id="0" name=""/>
+        <dsp:cNvSpPr/>
+      </dsp:nvSpPr>
+      <dsp:spPr>
+        <a:xfrm>
+          <a:off x="5911352" y="457963"/>
+          <a:ext cx="4332795" cy="2751325"/>
+        </a:xfrm>
+        <a:prstGeom prst="roundRect">
+          <a:avLst>
+            <a:gd name="adj" fmla="val 10000"/>
+          </a:avLst>
+        </a:prstGeom>
+        <a:solidFill>
+          <a:schemeClr val="lt1">
+            <a:alpha val="90000"/>
+            <a:hueOff val="0"/>
+            <a:satOff val="0"/>
+            <a:lumOff val="0"/>
+            <a:alphaOff val="0"/>
+          </a:schemeClr>
+        </a:solidFill>
+        <a:ln w="19050" cap="flat" cmpd="sng" algn="ctr">
+          <a:solidFill>
+            <a:schemeClr val="accent1">
+              <a:hueOff val="0"/>
+              <a:satOff val="0"/>
+              <a:lumOff val="0"/>
+              <a:alphaOff val="0"/>
+            </a:schemeClr>
+          </a:solidFill>
+          <a:prstDash val="solid"/>
+          <a:miter lim="800000"/>
+        </a:ln>
+        <a:effectLst/>
+      </dsp:spPr>
+      <dsp:style>
+        <a:lnRef idx="2">
+          <a:scrgbClr r="0" g="0" b="0"/>
+        </a:lnRef>
+        <a:fillRef idx="1">
+          <a:scrgbClr r="0" g="0" b="0"/>
+        </a:fillRef>
+        <a:effectRef idx="0">
+          <a:scrgbClr r="0" g="0" b="0"/>
+        </a:effectRef>
+        <a:fontRef idx="minor"/>
+      </dsp:style>
+      <dsp:txBody>
+        <a:bodyPr spcFirstLastPara="0" vert="horz" wrap="square" lIns="110490" tIns="110490" rIns="110490" bIns="110490" numCol="1" spcCol="1270" anchor="ctr" anchorCtr="0">
+          <a:noAutofit/>
+        </a:bodyPr>
+        <a:lstStyle/>
+        <a:p>
+          <a:pPr marL="0" lvl="0" indent="0" algn="ctr" defTabSz="1289050">
+            <a:lnSpc>
+              <a:spcPct val="90000"/>
+            </a:lnSpc>
+            <a:spcBef>
+              <a:spcPct val="0"/>
+            </a:spcBef>
+            <a:spcAft>
+              <a:spcPct val="35000"/>
+            </a:spcAft>
+            <a:buNone/>
+          </a:pPr>
+          <a:r>
+            <a:rPr lang="en-US" sz="2900" kern="1200"/>
+            <a:t>While it performed better than a random guess, it wasn’t drastically better. </a:t>
+          </a:r>
+        </a:p>
+      </dsp:txBody>
+      <dsp:txXfrm>
+        <a:off x="5991936" y="538547"/>
+        <a:ext cx="4171627" cy="2590157"/>
+      </dsp:txXfrm>
+    </dsp:sp>
+  </dsp:spTree>
+</dsp:drawing>
+</file>
+
+<file path=ppt/diagrams/drawing4.xml><?xml version="1.0" encoding="utf-8"?>
 <dsp:drawing xmlns:dgm="http://schemas.openxmlformats.org/drawingml/2006/diagram" xmlns:dsp="http://schemas.microsoft.com/office/drawing/2008/diagram" xmlns:a="http://schemas.openxmlformats.org/drawingml/2006/main">
   <dsp:spTree>
     <dsp:nvGrpSpPr>
@@ -6010,6 +7241,569 @@
 </dgm:layoutDef>
 </file>
 
+<file path=ppt/diagrams/layout4.xml><?xml version="1.0" encoding="utf-8"?>
+<dgm:layoutDef xmlns:dgm="http://schemas.openxmlformats.org/drawingml/2006/diagram" xmlns:a="http://schemas.openxmlformats.org/drawingml/2006/main" uniqueId="urn:microsoft.com/office/officeart/2005/8/layout/hierarchy1">
+  <dgm:title val=""/>
+  <dgm:desc val=""/>
+  <dgm:catLst>
+    <dgm:cat type="hierarchy" pri="2000"/>
+  </dgm:catLst>
+  <dgm:sampData>
+    <dgm:dataModel>
+      <dgm:ptLst>
+        <dgm:pt modelId="0" type="doc"/>
+        <dgm:pt modelId="1">
+          <dgm:prSet phldr="1"/>
+        </dgm:pt>
+        <dgm:pt modelId="2">
+          <dgm:prSet phldr="1"/>
+        </dgm:pt>
+        <dgm:pt modelId="21">
+          <dgm:prSet phldr="1"/>
+        </dgm:pt>
+        <dgm:pt modelId="22">
+          <dgm:prSet phldr="1"/>
+        </dgm:pt>
+        <dgm:pt modelId="3">
+          <dgm:prSet phldr="1"/>
+        </dgm:pt>
+        <dgm:pt modelId="31">
+          <dgm:prSet phldr="1"/>
+        </dgm:pt>
+      </dgm:ptLst>
+      <dgm:cxnLst>
+        <dgm:cxn modelId="4" srcId="0" destId="1" srcOrd="0" destOrd="0"/>
+        <dgm:cxn modelId="5" srcId="1" destId="2" srcOrd="0" destOrd="0"/>
+        <dgm:cxn modelId="6" srcId="1" destId="3" srcOrd="1" destOrd="0"/>
+        <dgm:cxn modelId="23" srcId="2" destId="21" srcOrd="0" destOrd="0"/>
+        <dgm:cxn modelId="24" srcId="2" destId="22" srcOrd="1" destOrd="0"/>
+        <dgm:cxn modelId="33" srcId="3" destId="31" srcOrd="0" destOrd="0"/>
+      </dgm:cxnLst>
+      <dgm:bg/>
+      <dgm:whole/>
+    </dgm:dataModel>
+  </dgm:sampData>
+  <dgm:styleData>
+    <dgm:dataModel>
+      <dgm:ptLst>
+        <dgm:pt modelId="0" type="doc"/>
+        <dgm:pt modelId="1"/>
+        <dgm:pt modelId="11"/>
+        <dgm:pt modelId="12"/>
+      </dgm:ptLst>
+      <dgm:cxnLst>
+        <dgm:cxn modelId="2" srcId="0" destId="1" srcOrd="0" destOrd="0"/>
+        <dgm:cxn modelId="13" srcId="1" destId="11" srcOrd="0" destOrd="0"/>
+        <dgm:cxn modelId="14" srcId="1" destId="12" srcOrd="1" destOrd="0"/>
+      </dgm:cxnLst>
+      <dgm:bg/>
+      <dgm:whole/>
+    </dgm:dataModel>
+  </dgm:styleData>
+  <dgm:clrData>
+    <dgm:dataModel>
+      <dgm:ptLst>
+        <dgm:pt modelId="0" type="doc"/>
+        <dgm:pt modelId="1"/>
+        <dgm:pt modelId="2"/>
+        <dgm:pt modelId="21"/>
+        <dgm:pt modelId="211"/>
+        <dgm:pt modelId="3"/>
+        <dgm:pt modelId="31"/>
+        <dgm:pt modelId="311"/>
+      </dgm:ptLst>
+      <dgm:cxnLst>
+        <dgm:cxn modelId="4" srcId="0" destId="1" srcOrd="0" destOrd="0"/>
+        <dgm:cxn modelId="5" srcId="1" destId="2" srcOrd="0" destOrd="0"/>
+        <dgm:cxn modelId="6" srcId="1" destId="3" srcOrd="1" destOrd="0"/>
+        <dgm:cxn modelId="23" srcId="2" destId="21" srcOrd="0" destOrd="0"/>
+        <dgm:cxn modelId="24" srcId="21" destId="211" srcOrd="0" destOrd="0"/>
+        <dgm:cxn modelId="33" srcId="3" destId="31" srcOrd="0" destOrd="0"/>
+        <dgm:cxn modelId="34" srcId="31" destId="311" srcOrd="0" destOrd="0"/>
+      </dgm:cxnLst>
+      <dgm:bg/>
+      <dgm:whole/>
+    </dgm:dataModel>
+  </dgm:clrData>
+  <dgm:layoutNode name="hierChild1">
+    <dgm:varLst>
+      <dgm:chPref val="1"/>
+      <dgm:dir/>
+      <dgm:animOne val="branch"/>
+      <dgm:animLvl val="lvl"/>
+      <dgm:resizeHandles/>
+    </dgm:varLst>
+    <dgm:choose name="Name0">
+      <dgm:if name="Name1" func="var" arg="dir" op="equ" val="norm">
+        <dgm:alg type="hierChild">
+          <dgm:param type="linDir" val="fromL"/>
+        </dgm:alg>
+      </dgm:if>
+      <dgm:else name="Name2">
+        <dgm:alg type="hierChild">
+          <dgm:param type="linDir" val="fromR"/>
+        </dgm:alg>
+      </dgm:else>
+    </dgm:choose>
+    <dgm:shape xmlns:r="http://schemas.openxmlformats.org/officeDocument/2006/relationships" r:blip="">
+      <dgm:adjLst/>
+    </dgm:shape>
+    <dgm:presOf/>
+    <dgm:constrLst>
+      <dgm:constr type="primFontSz" for="des" ptType="node" op="equ" val="65"/>
+      <dgm:constr type="w" for="des" forName="composite" refType="w"/>
+      <dgm:constr type="h" for="des" forName="composite" refType="w" refFor="des" refForName="composite" fact="0.667"/>
+      <dgm:constr type="w" for="des" forName="composite2" refType="w" refFor="des" refForName="composite"/>
+      <dgm:constr type="h" for="des" forName="composite2" refType="h" refFor="des" refForName="composite"/>
+      <dgm:constr type="w" for="des" forName="composite3" refType="w" refFor="des" refForName="composite"/>
+      <dgm:constr type="h" for="des" forName="composite3" refType="h" refFor="des" refForName="composite"/>
+      <dgm:constr type="w" for="des" forName="composite4" refType="w" refFor="des" refForName="composite"/>
+      <dgm:constr type="h" for="des" forName="composite4" refType="h" refFor="des" refForName="composite"/>
+      <dgm:constr type="w" for="des" forName="composite5" refType="w" refFor="des" refForName="composite"/>
+      <dgm:constr type="h" for="des" forName="composite5" refType="h" refFor="des" refForName="composite"/>
+      <dgm:constr type="sibSp" refType="w" refFor="des" refForName="composite" fact="0.1"/>
+      <dgm:constr type="sibSp" for="des" forName="hierChild2" refType="sibSp"/>
+      <dgm:constr type="sibSp" for="des" forName="hierChild3" refType="sibSp"/>
+      <dgm:constr type="sibSp" for="des" forName="hierChild4" refType="sibSp"/>
+      <dgm:constr type="sibSp" for="des" forName="hierChild5" refType="sibSp"/>
+      <dgm:constr type="sibSp" for="des" forName="hierChild6" refType="sibSp"/>
+      <dgm:constr type="sp" for="des" forName="hierRoot1" refType="h" refFor="des" refForName="composite" fact="0.25"/>
+      <dgm:constr type="sp" for="des" forName="hierRoot2" refType="sp" refFor="des" refForName="hierRoot1"/>
+      <dgm:constr type="sp" for="des" forName="hierRoot3" refType="sp" refFor="des" refForName="hierRoot1"/>
+      <dgm:constr type="sp" for="des" forName="hierRoot4" refType="sp" refFor="des" refForName="hierRoot1"/>
+      <dgm:constr type="sp" for="des" forName="hierRoot5" refType="sp" refFor="des" refForName="hierRoot1"/>
+    </dgm:constrLst>
+    <dgm:ruleLst/>
+    <dgm:forEach name="Name3" axis="ch">
+      <dgm:forEach name="Name4" axis="self" ptType="node">
+        <dgm:layoutNode name="hierRoot1">
+          <dgm:alg type="hierRoot"/>
+          <dgm:shape xmlns:r="http://schemas.openxmlformats.org/officeDocument/2006/relationships" r:blip="">
+            <dgm:adjLst/>
+          </dgm:shape>
+          <dgm:presOf/>
+          <dgm:constrLst>
+            <dgm:constr type="bendDist" for="des" ptType="parTrans" refType="sp" fact="0.5"/>
+          </dgm:constrLst>
+          <dgm:ruleLst/>
+          <dgm:layoutNode name="composite">
+            <dgm:alg type="composite"/>
+            <dgm:shape xmlns:r="http://schemas.openxmlformats.org/officeDocument/2006/relationships" r:blip="">
+              <dgm:adjLst/>
+            </dgm:shape>
+            <dgm:presOf/>
+            <dgm:constrLst>
+              <dgm:constr type="w" for="ch" forName="background" refType="w" fact="0.9"/>
+              <dgm:constr type="h" for="ch" forName="background" refType="w" refFor="ch" refForName="background" fact="0.635"/>
+              <dgm:constr type="t" for="ch" forName="background"/>
+              <dgm:constr type="l" for="ch" forName="background"/>
+              <dgm:constr type="w" for="ch" forName="text" refType="w" fact="0.9"/>
+              <dgm:constr type="h" for="ch" forName="text" refType="w" refFor="ch" refForName="text" fact="0.635"/>
+              <dgm:constr type="t" for="ch" forName="text" refType="w" fact="0.095"/>
+              <dgm:constr type="l" for="ch" forName="text" refType="w" fact="0.1"/>
+            </dgm:constrLst>
+            <dgm:ruleLst/>
+            <dgm:layoutNode name="background" styleLbl="node0" moveWith="text">
+              <dgm:alg type="sp"/>
+              <dgm:shape xmlns:r="http://schemas.openxmlformats.org/officeDocument/2006/relationships" type="roundRect" r:blip="">
+                <dgm:adjLst>
+                  <dgm:adj idx="1" val="0.1"/>
+                </dgm:adjLst>
+              </dgm:shape>
+              <dgm:presOf/>
+              <dgm:constrLst/>
+              <dgm:ruleLst/>
+            </dgm:layoutNode>
+            <dgm:layoutNode name="text" styleLbl="fgAcc0">
+              <dgm:varLst>
+                <dgm:chPref val="3"/>
+              </dgm:varLst>
+              <dgm:alg type="tx"/>
+              <dgm:shape xmlns:r="http://schemas.openxmlformats.org/officeDocument/2006/relationships" type="roundRect" r:blip="">
+                <dgm:adjLst>
+                  <dgm:adj idx="1" val="0.1"/>
+                </dgm:adjLst>
+              </dgm:shape>
+              <dgm:presOf axis="self"/>
+              <dgm:constrLst>
+                <dgm:constr type="tMarg" refType="primFontSz" fact="0.3"/>
+                <dgm:constr type="bMarg" refType="primFontSz" fact="0.3"/>
+                <dgm:constr type="lMarg" refType="primFontSz" fact="0.3"/>
+                <dgm:constr type="rMarg" refType="primFontSz" fact="0.3"/>
+              </dgm:constrLst>
+              <dgm:ruleLst>
+                <dgm:rule type="primFontSz" val="5" fact="NaN" max="NaN"/>
+              </dgm:ruleLst>
+            </dgm:layoutNode>
+          </dgm:layoutNode>
+          <dgm:layoutNode name="hierChild2">
+            <dgm:choose name="Name5">
+              <dgm:if name="Name6" func="var" arg="dir" op="equ" val="norm">
+                <dgm:alg type="hierChild">
+                  <dgm:param type="linDir" val="fromL"/>
+                </dgm:alg>
+              </dgm:if>
+              <dgm:else name="Name7">
+                <dgm:alg type="hierChild">
+                  <dgm:param type="linDir" val="fromR"/>
+                </dgm:alg>
+              </dgm:else>
+            </dgm:choose>
+            <dgm:shape xmlns:r="http://schemas.openxmlformats.org/officeDocument/2006/relationships" r:blip="">
+              <dgm:adjLst/>
+            </dgm:shape>
+            <dgm:presOf/>
+            <dgm:constrLst/>
+            <dgm:ruleLst/>
+            <dgm:forEach name="Name8" axis="ch">
+              <dgm:forEach name="Name9" axis="self" ptType="parTrans" cnt="1">
+                <dgm:layoutNode name="Name10">
+                  <dgm:alg type="conn">
+                    <dgm:param type="dim" val="1D"/>
+                    <dgm:param type="endSty" val="noArr"/>
+                    <dgm:param type="connRout" val="bend"/>
+                    <dgm:param type="bendPt" val="end"/>
+                    <dgm:param type="begPts" val="bCtr"/>
+                    <dgm:param type="endPts" val="tCtr"/>
+                    <dgm:param type="srcNode" val="background"/>
+                    <dgm:param type="dstNode" val="background2"/>
+                  </dgm:alg>
+                  <dgm:shape xmlns:r="http://schemas.openxmlformats.org/officeDocument/2006/relationships" type="conn" r:blip="" zOrderOff="-999">
+                    <dgm:adjLst/>
+                  </dgm:shape>
+                  <dgm:presOf axis="self"/>
+                  <dgm:constrLst>
+                    <dgm:constr type="begPad"/>
+                    <dgm:constr type="endPad"/>
+                  </dgm:constrLst>
+                  <dgm:ruleLst/>
+                </dgm:layoutNode>
+              </dgm:forEach>
+              <dgm:forEach name="Name11" axis="self" ptType="node">
+                <dgm:layoutNode name="hierRoot2">
+                  <dgm:alg type="hierRoot"/>
+                  <dgm:shape xmlns:r="http://schemas.openxmlformats.org/officeDocument/2006/relationships" r:blip="">
+                    <dgm:adjLst/>
+                  </dgm:shape>
+                  <dgm:presOf/>
+                  <dgm:constrLst>
+                    <dgm:constr type="bendDist" for="des" ptType="parTrans" refType="sp" fact="0.5"/>
+                  </dgm:constrLst>
+                  <dgm:ruleLst/>
+                  <dgm:layoutNode name="composite2">
+                    <dgm:alg type="composite"/>
+                    <dgm:shape xmlns:r="http://schemas.openxmlformats.org/officeDocument/2006/relationships" r:blip="">
+                      <dgm:adjLst/>
+                    </dgm:shape>
+                    <dgm:presOf/>
+                    <dgm:constrLst>
+                      <dgm:constr type="w" for="ch" forName="background2" refType="w" fact="0.9"/>
+                      <dgm:constr type="h" for="ch" forName="background2" refType="w" refFor="ch" refForName="background2" fact="0.635"/>
+                      <dgm:constr type="t" for="ch" forName="background2"/>
+                      <dgm:constr type="l" for="ch" forName="background2"/>
+                      <dgm:constr type="w" for="ch" forName="text2" refType="w" fact="0.9"/>
+                      <dgm:constr type="h" for="ch" forName="text2" refType="w" refFor="ch" refForName="text2" fact="0.635"/>
+                      <dgm:constr type="t" for="ch" forName="text2" refType="w" fact="0.095"/>
+                      <dgm:constr type="l" for="ch" forName="text2" refType="w" fact="0.1"/>
+                    </dgm:constrLst>
+                    <dgm:ruleLst/>
+                    <dgm:layoutNode name="background2" moveWith="text2">
+                      <dgm:alg type="sp"/>
+                      <dgm:shape xmlns:r="http://schemas.openxmlformats.org/officeDocument/2006/relationships" type="roundRect" r:blip="">
+                        <dgm:adjLst>
+                          <dgm:adj idx="1" val="0.1"/>
+                        </dgm:adjLst>
+                      </dgm:shape>
+                      <dgm:presOf/>
+                      <dgm:constrLst/>
+                      <dgm:ruleLst/>
+                    </dgm:layoutNode>
+                    <dgm:layoutNode name="text2" styleLbl="fgAcc2">
+                      <dgm:varLst>
+                        <dgm:chPref val="3"/>
+                      </dgm:varLst>
+                      <dgm:alg type="tx"/>
+                      <dgm:shape xmlns:r="http://schemas.openxmlformats.org/officeDocument/2006/relationships" type="roundRect" r:blip="">
+                        <dgm:adjLst>
+                          <dgm:adj idx="1" val="0.1"/>
+                        </dgm:adjLst>
+                      </dgm:shape>
+                      <dgm:presOf axis="self"/>
+                      <dgm:constrLst>
+                        <dgm:constr type="tMarg" refType="primFontSz" fact="0.3"/>
+                        <dgm:constr type="bMarg" refType="primFontSz" fact="0.3"/>
+                        <dgm:constr type="lMarg" refType="primFontSz" fact="0.3"/>
+                        <dgm:constr type="rMarg" refType="primFontSz" fact="0.3"/>
+                      </dgm:constrLst>
+                      <dgm:ruleLst>
+                        <dgm:rule type="primFontSz" val="5" fact="NaN" max="NaN"/>
+                      </dgm:ruleLst>
+                    </dgm:layoutNode>
+                  </dgm:layoutNode>
+                  <dgm:layoutNode name="hierChild3">
+                    <dgm:choose name="Name12">
+                      <dgm:if name="Name13" func="var" arg="dir" op="equ" val="norm">
+                        <dgm:alg type="hierChild">
+                          <dgm:param type="linDir" val="fromL"/>
+                        </dgm:alg>
+                      </dgm:if>
+                      <dgm:else name="Name14">
+                        <dgm:alg type="hierChild">
+                          <dgm:param type="linDir" val="fromR"/>
+                        </dgm:alg>
+                      </dgm:else>
+                    </dgm:choose>
+                    <dgm:shape xmlns:r="http://schemas.openxmlformats.org/officeDocument/2006/relationships" r:blip="">
+                      <dgm:adjLst/>
+                    </dgm:shape>
+                    <dgm:presOf/>
+                    <dgm:constrLst/>
+                    <dgm:ruleLst/>
+                    <dgm:forEach name="Name15" axis="ch">
+                      <dgm:forEach name="Name16" axis="self" ptType="parTrans" cnt="1">
+                        <dgm:layoutNode name="Name17">
+                          <dgm:alg type="conn">
+                            <dgm:param type="dim" val="1D"/>
+                            <dgm:param type="endSty" val="noArr"/>
+                            <dgm:param type="connRout" val="bend"/>
+                            <dgm:param type="bendPt" val="end"/>
+                            <dgm:param type="begPts" val="bCtr"/>
+                            <dgm:param type="endPts" val="tCtr"/>
+                            <dgm:param type="srcNode" val="background2"/>
+                            <dgm:param type="dstNode" val="background3"/>
+                          </dgm:alg>
+                          <dgm:shape xmlns:r="http://schemas.openxmlformats.org/officeDocument/2006/relationships" type="conn" r:blip="" zOrderOff="-999">
+                            <dgm:adjLst/>
+                          </dgm:shape>
+                          <dgm:presOf axis="self"/>
+                          <dgm:constrLst>
+                            <dgm:constr type="begPad"/>
+                            <dgm:constr type="endPad"/>
+                          </dgm:constrLst>
+                          <dgm:ruleLst/>
+                        </dgm:layoutNode>
+                      </dgm:forEach>
+                      <dgm:forEach name="Name18" axis="self" ptType="node">
+                        <dgm:layoutNode name="hierRoot3">
+                          <dgm:alg type="hierRoot"/>
+                          <dgm:shape xmlns:r="http://schemas.openxmlformats.org/officeDocument/2006/relationships" r:blip="">
+                            <dgm:adjLst/>
+                          </dgm:shape>
+                          <dgm:presOf/>
+                          <dgm:constrLst>
+                            <dgm:constr type="bendDist" for="des" ptType="parTrans" refType="sp" fact="0.5"/>
+                          </dgm:constrLst>
+                          <dgm:ruleLst/>
+                          <dgm:layoutNode name="composite3">
+                            <dgm:alg type="composite"/>
+                            <dgm:shape xmlns:r="http://schemas.openxmlformats.org/officeDocument/2006/relationships" r:blip="">
+                              <dgm:adjLst/>
+                            </dgm:shape>
+                            <dgm:presOf/>
+                            <dgm:constrLst>
+                              <dgm:constr type="w" for="ch" forName="background3" refType="w" fact="0.9"/>
+                              <dgm:constr type="h" for="ch" forName="background3" refType="w" refFor="ch" refForName="background3" fact="0.635"/>
+                              <dgm:constr type="t" for="ch" forName="background3"/>
+                              <dgm:constr type="l" for="ch" forName="background3"/>
+                              <dgm:constr type="w" for="ch" forName="text3" refType="w" fact="0.9"/>
+                              <dgm:constr type="h" for="ch" forName="text3" refType="w" refFor="ch" refForName="text3" fact="0.635"/>
+                              <dgm:constr type="t" for="ch" forName="text3" refType="w" fact="0.095"/>
+                              <dgm:constr type="l" for="ch" forName="text3" refType="w" fact="0.1"/>
+                            </dgm:constrLst>
+                            <dgm:ruleLst/>
+                            <dgm:layoutNode name="background3" moveWith="text3">
+                              <dgm:alg type="sp"/>
+                              <dgm:shape xmlns:r="http://schemas.openxmlformats.org/officeDocument/2006/relationships" type="roundRect" r:blip="">
+                                <dgm:adjLst>
+                                  <dgm:adj idx="1" val="0.1"/>
+                                </dgm:adjLst>
+                              </dgm:shape>
+                              <dgm:presOf/>
+                              <dgm:constrLst/>
+                              <dgm:ruleLst/>
+                            </dgm:layoutNode>
+                            <dgm:layoutNode name="text3" styleLbl="fgAcc3">
+                              <dgm:varLst>
+                                <dgm:chPref val="3"/>
+                              </dgm:varLst>
+                              <dgm:alg type="tx"/>
+                              <dgm:shape xmlns:r="http://schemas.openxmlformats.org/officeDocument/2006/relationships" type="roundRect" r:blip="">
+                                <dgm:adjLst>
+                                  <dgm:adj idx="1" val="0.1"/>
+                                </dgm:adjLst>
+                              </dgm:shape>
+                              <dgm:presOf axis="self"/>
+                              <dgm:constrLst>
+                                <dgm:constr type="tMarg" refType="primFontSz" fact="0.3"/>
+                                <dgm:constr type="bMarg" refType="primFontSz" fact="0.3"/>
+                                <dgm:constr type="lMarg" refType="primFontSz" fact="0.3"/>
+                                <dgm:constr type="rMarg" refType="primFontSz" fact="0.3"/>
+                              </dgm:constrLst>
+                              <dgm:ruleLst>
+                                <dgm:rule type="primFontSz" val="5" fact="NaN" max="NaN"/>
+                              </dgm:ruleLst>
+                            </dgm:layoutNode>
+                          </dgm:layoutNode>
+                          <dgm:layoutNode name="hierChild4">
+                            <dgm:choose name="Name19">
+                              <dgm:if name="Name20" func="var" arg="dir" op="equ" val="norm">
+                                <dgm:alg type="hierChild">
+                                  <dgm:param type="linDir" val="fromL"/>
+                                </dgm:alg>
+                              </dgm:if>
+                              <dgm:else name="Name21">
+                                <dgm:alg type="hierChild">
+                                  <dgm:param type="linDir" val="fromR"/>
+                                </dgm:alg>
+                              </dgm:else>
+                            </dgm:choose>
+                            <dgm:shape xmlns:r="http://schemas.openxmlformats.org/officeDocument/2006/relationships" r:blip="">
+                              <dgm:adjLst/>
+                            </dgm:shape>
+                            <dgm:presOf/>
+                            <dgm:constrLst/>
+                            <dgm:ruleLst/>
+                            <dgm:forEach name="repeat" axis="ch">
+                              <dgm:forEach name="Name22" axis="self" ptType="parTrans" cnt="1">
+                                <dgm:layoutNode name="Name23">
+                                  <dgm:choose name="Name24">
+                                    <dgm:if name="Name25" axis="self" func="depth" op="lte" val="4">
+                                      <dgm:alg type="conn">
+                                        <dgm:param type="dim" val="1D"/>
+                                        <dgm:param type="endSty" val="noArr"/>
+                                        <dgm:param type="connRout" val="bend"/>
+                                        <dgm:param type="bendPt" val="end"/>
+                                        <dgm:param type="begPts" val="bCtr"/>
+                                        <dgm:param type="endPts" val="tCtr"/>
+                                        <dgm:param type="srcNode" val="background3"/>
+                                        <dgm:param type="dstNode" val="background4"/>
+                                      </dgm:alg>
+                                    </dgm:if>
+                                    <dgm:else name="Name26">
+                                      <dgm:alg type="conn">
+                                        <dgm:param type="dim" val="1D"/>
+                                        <dgm:param type="endSty" val="noArr"/>
+                                        <dgm:param type="connRout" val="bend"/>
+                                        <dgm:param type="bendPt" val="end"/>
+                                        <dgm:param type="begPts" val="bCtr"/>
+                                        <dgm:param type="endPts" val="tCtr"/>
+                                        <dgm:param type="srcNode" val="background4"/>
+                                        <dgm:param type="dstNode" val="background4"/>
+                                      </dgm:alg>
+                                    </dgm:else>
+                                  </dgm:choose>
+                                  <dgm:shape xmlns:r="http://schemas.openxmlformats.org/officeDocument/2006/relationships" type="conn" r:blip="" zOrderOff="-999">
+                                    <dgm:adjLst/>
+                                  </dgm:shape>
+                                  <dgm:presOf axis="self"/>
+                                  <dgm:constrLst>
+                                    <dgm:constr type="begPad"/>
+                                    <dgm:constr type="endPad"/>
+                                  </dgm:constrLst>
+                                  <dgm:ruleLst/>
+                                </dgm:layoutNode>
+                              </dgm:forEach>
+                              <dgm:forEach name="Name27" axis="self" ptType="node">
+                                <dgm:layoutNode name="hierRoot4">
+                                  <dgm:alg type="hierRoot"/>
+                                  <dgm:shape xmlns:r="http://schemas.openxmlformats.org/officeDocument/2006/relationships" r:blip="">
+                                    <dgm:adjLst/>
+                                  </dgm:shape>
+                                  <dgm:presOf/>
+                                  <dgm:constrLst>
+                                    <dgm:constr type="bendDist" for="des" ptType="parTrans" refType="sp" fact="0.5"/>
+                                  </dgm:constrLst>
+                                  <dgm:ruleLst/>
+                                  <dgm:layoutNode name="composite4">
+                                    <dgm:alg type="composite"/>
+                                    <dgm:shape xmlns:r="http://schemas.openxmlformats.org/officeDocument/2006/relationships" r:blip="">
+                                      <dgm:adjLst/>
+                                    </dgm:shape>
+                                    <dgm:presOf/>
+                                    <dgm:constrLst>
+                                      <dgm:constr type="w" for="ch" forName="background4" refType="w" fact="0.9"/>
+                                      <dgm:constr type="h" for="ch" forName="background4" refType="w" refFor="ch" refForName="background4" fact="0.635"/>
+                                      <dgm:constr type="t" for="ch" forName="background4"/>
+                                      <dgm:constr type="l" for="ch" forName="background4"/>
+                                      <dgm:constr type="w" for="ch" forName="text4" refType="w" fact="0.9"/>
+                                      <dgm:constr type="h" for="ch" forName="text4" refType="w" refFor="ch" refForName="text4" fact="0.635"/>
+                                      <dgm:constr type="t" for="ch" forName="text4" refType="w" fact="0.095"/>
+                                      <dgm:constr type="l" for="ch" forName="text4" refType="w" fact="0.1"/>
+                                    </dgm:constrLst>
+                                    <dgm:ruleLst/>
+                                    <dgm:layoutNode name="background4" moveWith="text4">
+                                      <dgm:alg type="sp"/>
+                                      <dgm:shape xmlns:r="http://schemas.openxmlformats.org/officeDocument/2006/relationships" type="roundRect" r:blip="">
+                                        <dgm:adjLst>
+                                          <dgm:adj idx="1" val="0.1"/>
+                                        </dgm:adjLst>
+                                      </dgm:shape>
+                                      <dgm:presOf/>
+                                      <dgm:constrLst/>
+                                      <dgm:ruleLst/>
+                                    </dgm:layoutNode>
+                                    <dgm:layoutNode name="text4" styleLbl="fgAcc4">
+                                      <dgm:varLst>
+                                        <dgm:chPref val="3"/>
+                                      </dgm:varLst>
+                                      <dgm:alg type="tx"/>
+                                      <dgm:shape xmlns:r="http://schemas.openxmlformats.org/officeDocument/2006/relationships" type="roundRect" r:blip="">
+                                        <dgm:adjLst>
+                                          <dgm:adj idx="1" val="0.1"/>
+                                        </dgm:adjLst>
+                                      </dgm:shape>
+                                      <dgm:presOf axis="self"/>
+                                      <dgm:constrLst>
+                                        <dgm:constr type="tMarg" refType="primFontSz" fact="0.3"/>
+                                        <dgm:constr type="bMarg" refType="primFontSz" fact="0.3"/>
+                                        <dgm:constr type="lMarg" refType="primFontSz" fact="0.3"/>
+                                        <dgm:constr type="rMarg" refType="primFontSz" fact="0.3"/>
+                                      </dgm:constrLst>
+                                      <dgm:ruleLst>
+                                        <dgm:rule type="primFontSz" val="5" fact="NaN" max="NaN"/>
+                                      </dgm:ruleLst>
+                                    </dgm:layoutNode>
+                                  </dgm:layoutNode>
+                                  <dgm:layoutNode name="hierChild5">
+                                    <dgm:choose name="Name28">
+                                      <dgm:if name="Name29" func="var" arg="dir" op="equ" val="norm">
+                                        <dgm:alg type="hierChild">
+                                          <dgm:param type="linDir" val="fromL"/>
+                                        </dgm:alg>
+                                      </dgm:if>
+                                      <dgm:else name="Name30">
+                                        <dgm:alg type="hierChild">
+                                          <dgm:param type="linDir" val="fromR"/>
+                                        </dgm:alg>
+                                      </dgm:else>
+                                    </dgm:choose>
+                                    <dgm:shape xmlns:r="http://schemas.openxmlformats.org/officeDocument/2006/relationships" r:blip="">
+                                      <dgm:adjLst/>
+                                    </dgm:shape>
+                                    <dgm:presOf/>
+                                    <dgm:constrLst/>
+                                    <dgm:ruleLst/>
+                                    <dgm:forEach name="Name31" ref="repeat"/>
+                                  </dgm:layoutNode>
+                                </dgm:layoutNode>
+                              </dgm:forEach>
+                            </dgm:forEach>
+                          </dgm:layoutNode>
+                        </dgm:layoutNode>
+                      </dgm:forEach>
+                    </dgm:forEach>
+                  </dgm:layoutNode>
+                </dgm:layoutNode>
+              </dgm:forEach>
+            </dgm:forEach>
+          </dgm:layoutNode>
+        </dgm:layoutNode>
+      </dgm:forEach>
+    </dgm:forEach>
+  </dgm:layoutNode>
+</dgm:layoutDef>
+</file>
+
 <file path=ppt/diagrams/quickStyle1.xml><?xml version="1.0" encoding="utf-8"?>
 <dgm:styleDef xmlns:dgm="http://schemas.openxmlformats.org/drawingml/2006/diagram" xmlns:a="http://schemas.openxmlformats.org/drawingml/2006/main" uniqueId="urn:microsoft.com/office/officeart/2005/8/quickstyle/simple1">
   <dgm:title val=""/>
@@ -8079,6 +9873,1040 @@
 </file>
 
 <file path=ppt/diagrams/quickStyle3.xml><?xml version="1.0" encoding="utf-8"?>
+<dgm:styleDef xmlns:dgm="http://schemas.openxmlformats.org/drawingml/2006/diagram" xmlns:a="http://schemas.openxmlformats.org/drawingml/2006/main" uniqueId="urn:microsoft.com/office/officeart/2005/8/quickstyle/simple1">
+  <dgm:title val=""/>
+  <dgm:desc val=""/>
+  <dgm:catLst>
+    <dgm:cat type="simple" pri="10100"/>
+  </dgm:catLst>
+  <dgm:scene3d>
+    <a:camera prst="orthographicFront"/>
+    <a:lightRig rig="threePt" dir="t"/>
+  </dgm:scene3d>
+  <dgm:styleLbl name="node0">
+    <dgm:scene3d>
+      <a:camera prst="orthographicFront"/>
+      <a:lightRig rig="threePt" dir="t"/>
+    </dgm:scene3d>
+    <dgm:sp3d/>
+    <dgm:txPr/>
+    <dgm:style>
+      <a:lnRef idx="2">
+        <a:scrgbClr r="0" g="0" b="0"/>
+      </a:lnRef>
+      <a:fillRef idx="1">
+        <a:scrgbClr r="0" g="0" b="0"/>
+      </a:fillRef>
+      <a:effectRef idx="0">
+        <a:scrgbClr r="0" g="0" b="0"/>
+      </a:effectRef>
+      <a:fontRef idx="minor">
+        <a:schemeClr val="lt1"/>
+      </a:fontRef>
+    </dgm:style>
+  </dgm:styleLbl>
+  <dgm:styleLbl name="lnNode1">
+    <dgm:scene3d>
+      <a:camera prst="orthographicFront"/>
+      <a:lightRig rig="threePt" dir="t"/>
+    </dgm:scene3d>
+    <dgm:sp3d/>
+    <dgm:txPr/>
+    <dgm:style>
+      <a:lnRef idx="2">
+        <a:scrgbClr r="0" g="0" b="0"/>
+      </a:lnRef>
+      <a:fillRef idx="1">
+        <a:scrgbClr r="0" g="0" b="0"/>
+      </a:fillRef>
+      <a:effectRef idx="0">
+        <a:scrgbClr r="0" g="0" b="0"/>
+      </a:effectRef>
+      <a:fontRef idx="minor">
+        <a:schemeClr val="lt1"/>
+      </a:fontRef>
+    </dgm:style>
+  </dgm:styleLbl>
+  <dgm:styleLbl name="vennNode1">
+    <dgm:scene3d>
+      <a:camera prst="orthographicFront"/>
+      <a:lightRig rig="threePt" dir="t"/>
+    </dgm:scene3d>
+    <dgm:sp3d/>
+    <dgm:txPr/>
+    <dgm:style>
+      <a:lnRef idx="2">
+        <a:scrgbClr r="0" g="0" b="0"/>
+      </a:lnRef>
+      <a:fillRef idx="1">
+        <a:scrgbClr r="0" g="0" b="0"/>
+      </a:fillRef>
+      <a:effectRef idx="0">
+        <a:scrgbClr r="0" g="0" b="0"/>
+      </a:effectRef>
+      <a:fontRef idx="minor">
+        <a:schemeClr val="tx1"/>
+      </a:fontRef>
+    </dgm:style>
+  </dgm:styleLbl>
+  <dgm:styleLbl name="alignNode1">
+    <dgm:scene3d>
+      <a:camera prst="orthographicFront"/>
+      <a:lightRig rig="threePt" dir="t"/>
+    </dgm:scene3d>
+    <dgm:sp3d/>
+    <dgm:txPr/>
+    <dgm:style>
+      <a:lnRef idx="2">
+        <a:scrgbClr r="0" g="0" b="0"/>
+      </a:lnRef>
+      <a:fillRef idx="1">
+        <a:scrgbClr r="0" g="0" b="0"/>
+      </a:fillRef>
+      <a:effectRef idx="0">
+        <a:scrgbClr r="0" g="0" b="0"/>
+      </a:effectRef>
+      <a:fontRef idx="minor">
+        <a:schemeClr val="lt1"/>
+      </a:fontRef>
+    </dgm:style>
+  </dgm:styleLbl>
+  <dgm:styleLbl name="node1">
+    <dgm:scene3d>
+      <a:camera prst="orthographicFront"/>
+      <a:lightRig rig="threePt" dir="t"/>
+    </dgm:scene3d>
+    <dgm:sp3d/>
+    <dgm:txPr/>
+    <dgm:style>
+      <a:lnRef idx="2">
+        <a:scrgbClr r="0" g="0" b="0"/>
+      </a:lnRef>
+      <a:fillRef idx="1">
+        <a:scrgbClr r="0" g="0" b="0"/>
+      </a:fillRef>
+      <a:effectRef idx="0">
+        <a:scrgbClr r="0" g="0" b="0"/>
+      </a:effectRef>
+      <a:fontRef idx="minor">
+        <a:schemeClr val="lt1"/>
+      </a:fontRef>
+    </dgm:style>
+  </dgm:styleLbl>
+  <dgm:styleLbl name="node2">
+    <dgm:scene3d>
+      <a:camera prst="orthographicFront"/>
+      <a:lightRig rig="threePt" dir="t"/>
+    </dgm:scene3d>
+    <dgm:sp3d/>
+    <dgm:txPr/>
+    <dgm:style>
+      <a:lnRef idx="2">
+        <a:scrgbClr r="0" g="0" b="0"/>
+      </a:lnRef>
+      <a:fillRef idx="1">
+        <a:scrgbClr r="0" g="0" b="0"/>
+      </a:fillRef>
+      <a:effectRef idx="0">
+        <a:scrgbClr r="0" g="0" b="0"/>
+      </a:effectRef>
+      <a:fontRef idx="minor">
+        <a:schemeClr val="lt1"/>
+      </a:fontRef>
+    </dgm:style>
+  </dgm:styleLbl>
+  <dgm:styleLbl name="node3">
+    <dgm:scene3d>
+      <a:camera prst="orthographicFront"/>
+      <a:lightRig rig="threePt" dir="t"/>
+    </dgm:scene3d>
+    <dgm:sp3d/>
+    <dgm:txPr/>
+    <dgm:style>
+      <a:lnRef idx="2">
+        <a:scrgbClr r="0" g="0" b="0"/>
+      </a:lnRef>
+      <a:fillRef idx="1">
+        <a:scrgbClr r="0" g="0" b="0"/>
+      </a:fillRef>
+      <a:effectRef idx="0">
+        <a:scrgbClr r="0" g="0" b="0"/>
+      </a:effectRef>
+      <a:fontRef idx="minor">
+        <a:schemeClr val="lt1"/>
+      </a:fontRef>
+    </dgm:style>
+  </dgm:styleLbl>
+  <dgm:styleLbl name="node4">
+    <dgm:scene3d>
+      <a:camera prst="orthographicFront"/>
+      <a:lightRig rig="threePt" dir="t"/>
+    </dgm:scene3d>
+    <dgm:sp3d/>
+    <dgm:txPr/>
+    <dgm:style>
+      <a:lnRef idx="2">
+        <a:scrgbClr r="0" g="0" b="0"/>
+      </a:lnRef>
+      <a:fillRef idx="1">
+        <a:scrgbClr r="0" g="0" b="0"/>
+      </a:fillRef>
+      <a:effectRef idx="0">
+        <a:scrgbClr r="0" g="0" b="0"/>
+      </a:effectRef>
+      <a:fontRef idx="minor">
+        <a:schemeClr val="lt1"/>
+      </a:fontRef>
+    </dgm:style>
+  </dgm:styleLbl>
+  <dgm:styleLbl name="fgImgPlace1">
+    <dgm:scene3d>
+      <a:camera prst="orthographicFront"/>
+      <a:lightRig rig="threePt" dir="t"/>
+    </dgm:scene3d>
+    <dgm:sp3d/>
+    <dgm:txPr/>
+    <dgm:style>
+      <a:lnRef idx="2">
+        <a:scrgbClr r="0" g="0" b="0"/>
+      </a:lnRef>
+      <a:fillRef idx="1">
+        <a:scrgbClr r="0" g="0" b="0"/>
+      </a:fillRef>
+      <a:effectRef idx="0">
+        <a:scrgbClr r="0" g="0" b="0"/>
+      </a:effectRef>
+      <a:fontRef idx="minor"/>
+    </dgm:style>
+  </dgm:styleLbl>
+  <dgm:styleLbl name="alignImgPlace1">
+    <dgm:scene3d>
+      <a:camera prst="orthographicFront"/>
+      <a:lightRig rig="threePt" dir="t"/>
+    </dgm:scene3d>
+    <dgm:sp3d/>
+    <dgm:txPr/>
+    <dgm:style>
+      <a:lnRef idx="2">
+        <a:scrgbClr r="0" g="0" b="0"/>
+      </a:lnRef>
+      <a:fillRef idx="1">
+        <a:scrgbClr r="0" g="0" b="0"/>
+      </a:fillRef>
+      <a:effectRef idx="0">
+        <a:scrgbClr r="0" g="0" b="0"/>
+      </a:effectRef>
+      <a:fontRef idx="minor"/>
+    </dgm:style>
+  </dgm:styleLbl>
+  <dgm:styleLbl name="bgImgPlace1">
+    <dgm:scene3d>
+      <a:camera prst="orthographicFront"/>
+      <a:lightRig rig="threePt" dir="t"/>
+    </dgm:scene3d>
+    <dgm:sp3d/>
+    <dgm:txPr/>
+    <dgm:style>
+      <a:lnRef idx="2">
+        <a:scrgbClr r="0" g="0" b="0"/>
+      </a:lnRef>
+      <a:fillRef idx="1">
+        <a:scrgbClr r="0" g="0" b="0"/>
+      </a:fillRef>
+      <a:effectRef idx="0">
+        <a:scrgbClr r="0" g="0" b="0"/>
+      </a:effectRef>
+      <a:fontRef idx="minor"/>
+    </dgm:style>
+  </dgm:styleLbl>
+  <dgm:styleLbl name="sibTrans2D1">
+    <dgm:scene3d>
+      <a:camera prst="orthographicFront"/>
+      <a:lightRig rig="threePt" dir="t"/>
+    </dgm:scene3d>
+    <dgm:sp3d/>
+    <dgm:txPr/>
+    <dgm:style>
+      <a:lnRef idx="0">
+        <a:scrgbClr r="0" g="0" b="0"/>
+      </a:lnRef>
+      <a:fillRef idx="1">
+        <a:scrgbClr r="0" g="0" b="0"/>
+      </a:fillRef>
+      <a:effectRef idx="0">
+        <a:scrgbClr r="0" g="0" b="0"/>
+      </a:effectRef>
+      <a:fontRef idx="minor">
+        <a:schemeClr val="lt1"/>
+      </a:fontRef>
+    </dgm:style>
+  </dgm:styleLbl>
+  <dgm:styleLbl name="fgSibTrans2D1">
+    <dgm:scene3d>
+      <a:camera prst="orthographicFront"/>
+      <a:lightRig rig="threePt" dir="t"/>
+    </dgm:scene3d>
+    <dgm:sp3d/>
+    <dgm:txPr/>
+    <dgm:style>
+      <a:lnRef idx="0">
+        <a:scrgbClr r="0" g="0" b="0"/>
+      </a:lnRef>
+      <a:fillRef idx="1">
+        <a:scrgbClr r="0" g="0" b="0"/>
+      </a:fillRef>
+      <a:effectRef idx="0">
+        <a:scrgbClr r="0" g="0" b="0"/>
+      </a:effectRef>
+      <a:fontRef idx="minor">
+        <a:schemeClr val="lt1"/>
+      </a:fontRef>
+    </dgm:style>
+  </dgm:styleLbl>
+  <dgm:styleLbl name="bgSibTrans2D1">
+    <dgm:scene3d>
+      <a:camera prst="orthographicFront"/>
+      <a:lightRig rig="threePt" dir="t"/>
+    </dgm:scene3d>
+    <dgm:sp3d/>
+    <dgm:txPr/>
+    <dgm:style>
+      <a:lnRef idx="0">
+        <a:scrgbClr r="0" g="0" b="0"/>
+      </a:lnRef>
+      <a:fillRef idx="1">
+        <a:scrgbClr r="0" g="0" b="0"/>
+      </a:fillRef>
+      <a:effectRef idx="0">
+        <a:scrgbClr r="0" g="0" b="0"/>
+      </a:effectRef>
+      <a:fontRef idx="minor">
+        <a:schemeClr val="lt1"/>
+      </a:fontRef>
+    </dgm:style>
+  </dgm:styleLbl>
+  <dgm:styleLbl name="sibTrans1D1">
+    <dgm:scene3d>
+      <a:camera prst="orthographicFront"/>
+      <a:lightRig rig="threePt" dir="t"/>
+    </dgm:scene3d>
+    <dgm:sp3d/>
+    <dgm:txPr/>
+    <dgm:style>
+      <a:lnRef idx="1">
+        <a:scrgbClr r="0" g="0" b="0"/>
+      </a:lnRef>
+      <a:fillRef idx="0">
+        <a:scrgbClr r="0" g="0" b="0"/>
+      </a:fillRef>
+      <a:effectRef idx="0">
+        <a:scrgbClr r="0" g="0" b="0"/>
+      </a:effectRef>
+      <a:fontRef idx="minor"/>
+    </dgm:style>
+  </dgm:styleLbl>
+  <dgm:styleLbl name="callout">
+    <dgm:scene3d>
+      <a:camera prst="orthographicFront"/>
+      <a:lightRig rig="threePt" dir="t"/>
+    </dgm:scene3d>
+    <dgm:sp3d/>
+    <dgm:txPr/>
+    <dgm:style>
+      <a:lnRef idx="2">
+        <a:scrgbClr r="0" g="0" b="0"/>
+      </a:lnRef>
+      <a:fillRef idx="1">
+        <a:scrgbClr r="0" g="0" b="0"/>
+      </a:fillRef>
+      <a:effectRef idx="0">
+        <a:scrgbClr r="0" g="0" b="0"/>
+      </a:effectRef>
+      <a:fontRef idx="minor"/>
+    </dgm:style>
+  </dgm:styleLbl>
+  <dgm:styleLbl name="asst0">
+    <dgm:scene3d>
+      <a:camera prst="orthographicFront"/>
+      <a:lightRig rig="threePt" dir="t"/>
+    </dgm:scene3d>
+    <dgm:sp3d/>
+    <dgm:txPr/>
+    <dgm:style>
+      <a:lnRef idx="2">
+        <a:scrgbClr r="0" g="0" b="0"/>
+      </a:lnRef>
+      <a:fillRef idx="1">
+        <a:scrgbClr r="0" g="0" b="0"/>
+      </a:fillRef>
+      <a:effectRef idx="0">
+        <a:scrgbClr r="0" g="0" b="0"/>
+      </a:effectRef>
+      <a:fontRef idx="minor">
+        <a:schemeClr val="lt1"/>
+      </a:fontRef>
+    </dgm:style>
+  </dgm:styleLbl>
+  <dgm:styleLbl name="asst1">
+    <dgm:scene3d>
+      <a:camera prst="orthographicFront"/>
+      <a:lightRig rig="threePt" dir="t"/>
+    </dgm:scene3d>
+    <dgm:sp3d/>
+    <dgm:txPr/>
+    <dgm:style>
+      <a:lnRef idx="2">
+        <a:scrgbClr r="0" g="0" b="0"/>
+      </a:lnRef>
+      <a:fillRef idx="1">
+        <a:scrgbClr r="0" g="0" b="0"/>
+      </a:fillRef>
+      <a:effectRef idx="0">
+        <a:scrgbClr r="0" g="0" b="0"/>
+      </a:effectRef>
+      <a:fontRef idx="minor">
+        <a:schemeClr val="lt1"/>
+      </a:fontRef>
+    </dgm:style>
+  </dgm:styleLbl>
+  <dgm:styleLbl name="asst2">
+    <dgm:scene3d>
+      <a:camera prst="orthographicFront"/>
+      <a:lightRig rig="threePt" dir="t"/>
+    </dgm:scene3d>
+    <dgm:sp3d/>
+    <dgm:txPr/>
+    <dgm:style>
+      <a:lnRef idx="2">
+        <a:scrgbClr r="0" g="0" b="0"/>
+      </a:lnRef>
+      <a:fillRef idx="1">
+        <a:scrgbClr r="0" g="0" b="0"/>
+      </a:fillRef>
+      <a:effectRef idx="0">
+        <a:scrgbClr r="0" g="0" b="0"/>
+      </a:effectRef>
+      <a:fontRef idx="minor">
+        <a:schemeClr val="lt1"/>
+      </a:fontRef>
+    </dgm:style>
+  </dgm:styleLbl>
+  <dgm:styleLbl name="asst3">
+    <dgm:scene3d>
+      <a:camera prst="orthographicFront"/>
+      <a:lightRig rig="threePt" dir="t"/>
+    </dgm:scene3d>
+    <dgm:sp3d/>
+    <dgm:txPr/>
+    <dgm:style>
+      <a:lnRef idx="2">
+        <a:scrgbClr r="0" g="0" b="0"/>
+      </a:lnRef>
+      <a:fillRef idx="1">
+        <a:scrgbClr r="0" g="0" b="0"/>
+      </a:fillRef>
+      <a:effectRef idx="0">
+        <a:scrgbClr r="0" g="0" b="0"/>
+      </a:effectRef>
+      <a:fontRef idx="minor">
+        <a:schemeClr val="lt1"/>
+      </a:fontRef>
+    </dgm:style>
+  </dgm:styleLbl>
+  <dgm:styleLbl name="asst4">
+    <dgm:scene3d>
+      <a:camera prst="orthographicFront"/>
+      <a:lightRig rig="threePt" dir="t"/>
+    </dgm:scene3d>
+    <dgm:sp3d/>
+    <dgm:txPr/>
+    <dgm:style>
+      <a:lnRef idx="2">
+        <a:scrgbClr r="0" g="0" b="0"/>
+      </a:lnRef>
+      <a:fillRef idx="1">
+        <a:scrgbClr r="0" g="0" b="0"/>
+      </a:fillRef>
+      <a:effectRef idx="0">
+        <a:scrgbClr r="0" g="0" b="0"/>
+      </a:effectRef>
+      <a:fontRef idx="minor">
+        <a:schemeClr val="lt1"/>
+      </a:fontRef>
+    </dgm:style>
+  </dgm:styleLbl>
+  <dgm:styleLbl name="parChTrans2D1">
+    <dgm:scene3d>
+      <a:camera prst="orthographicFront"/>
+      <a:lightRig rig="threePt" dir="t"/>
+    </dgm:scene3d>
+    <dgm:sp3d/>
+    <dgm:txPr/>
+    <dgm:style>
+      <a:lnRef idx="2">
+        <a:scrgbClr r="0" g="0" b="0"/>
+      </a:lnRef>
+      <a:fillRef idx="1">
+        <a:scrgbClr r="0" g="0" b="0"/>
+      </a:fillRef>
+      <a:effectRef idx="0">
+        <a:scrgbClr r="0" g="0" b="0"/>
+      </a:effectRef>
+      <a:fontRef idx="minor">
+        <a:schemeClr val="lt1"/>
+      </a:fontRef>
+    </dgm:style>
+  </dgm:styleLbl>
+  <dgm:styleLbl name="parChTrans2D2">
+    <dgm:scene3d>
+      <a:camera prst="orthographicFront"/>
+      <a:lightRig rig="threePt" dir="t"/>
+    </dgm:scene3d>
+    <dgm:sp3d/>
+    <dgm:txPr/>
+    <dgm:style>
+      <a:lnRef idx="2">
+        <a:scrgbClr r="0" g="0" b="0"/>
+      </a:lnRef>
+      <a:fillRef idx="1">
+        <a:scrgbClr r="0" g="0" b="0"/>
+      </a:fillRef>
+      <a:effectRef idx="0">
+        <a:scrgbClr r="0" g="0" b="0"/>
+      </a:effectRef>
+      <a:fontRef idx="minor">
+        <a:schemeClr val="lt1"/>
+      </a:fontRef>
+    </dgm:style>
+  </dgm:styleLbl>
+  <dgm:styleLbl name="parChTrans2D3">
+    <dgm:scene3d>
+      <a:camera prst="orthographicFront"/>
+      <a:lightRig rig="threePt" dir="t"/>
+    </dgm:scene3d>
+    <dgm:sp3d/>
+    <dgm:txPr/>
+    <dgm:style>
+      <a:lnRef idx="2">
+        <a:scrgbClr r="0" g="0" b="0"/>
+      </a:lnRef>
+      <a:fillRef idx="1">
+        <a:scrgbClr r="0" g="0" b="0"/>
+      </a:fillRef>
+      <a:effectRef idx="0">
+        <a:scrgbClr r="0" g="0" b="0"/>
+      </a:effectRef>
+      <a:fontRef idx="minor">
+        <a:schemeClr val="lt1"/>
+      </a:fontRef>
+    </dgm:style>
+  </dgm:styleLbl>
+  <dgm:styleLbl name="parChTrans2D4">
+    <dgm:scene3d>
+      <a:camera prst="orthographicFront"/>
+      <a:lightRig rig="threePt" dir="t"/>
+    </dgm:scene3d>
+    <dgm:sp3d/>
+    <dgm:txPr/>
+    <dgm:style>
+      <a:lnRef idx="2">
+        <a:scrgbClr r="0" g="0" b="0"/>
+      </a:lnRef>
+      <a:fillRef idx="1">
+        <a:scrgbClr r="0" g="0" b="0"/>
+      </a:fillRef>
+      <a:effectRef idx="0">
+        <a:scrgbClr r="0" g="0" b="0"/>
+      </a:effectRef>
+      <a:fontRef idx="minor">
+        <a:schemeClr val="lt1"/>
+      </a:fontRef>
+    </dgm:style>
+  </dgm:styleLbl>
+  <dgm:styleLbl name="parChTrans1D1">
+    <dgm:scene3d>
+      <a:camera prst="orthographicFront"/>
+      <a:lightRig rig="threePt" dir="t"/>
+    </dgm:scene3d>
+    <dgm:sp3d/>
+    <dgm:txPr/>
+    <dgm:style>
+      <a:lnRef idx="2">
+        <a:scrgbClr r="0" g="0" b="0"/>
+      </a:lnRef>
+      <a:fillRef idx="0">
+        <a:scrgbClr r="0" g="0" b="0"/>
+      </a:fillRef>
+      <a:effectRef idx="0">
+        <a:scrgbClr r="0" g="0" b="0"/>
+      </a:effectRef>
+      <a:fontRef idx="minor"/>
+    </dgm:style>
+  </dgm:styleLbl>
+  <dgm:styleLbl name="parChTrans1D2">
+    <dgm:scene3d>
+      <a:camera prst="orthographicFront"/>
+      <a:lightRig rig="threePt" dir="t"/>
+    </dgm:scene3d>
+    <dgm:sp3d/>
+    <dgm:txPr/>
+    <dgm:style>
+      <a:lnRef idx="2">
+        <a:scrgbClr r="0" g="0" b="0"/>
+      </a:lnRef>
+      <a:fillRef idx="0">
+        <a:scrgbClr r="0" g="0" b="0"/>
+      </a:fillRef>
+      <a:effectRef idx="0">
+        <a:scrgbClr r="0" g="0" b="0"/>
+      </a:effectRef>
+      <a:fontRef idx="minor"/>
+    </dgm:style>
+  </dgm:styleLbl>
+  <dgm:styleLbl name="parChTrans1D3">
+    <dgm:scene3d>
+      <a:camera prst="orthographicFront"/>
+      <a:lightRig rig="threePt" dir="t"/>
+    </dgm:scene3d>
+    <dgm:sp3d/>
+    <dgm:txPr/>
+    <dgm:style>
+      <a:lnRef idx="2">
+        <a:scrgbClr r="0" g="0" b="0"/>
+      </a:lnRef>
+      <a:fillRef idx="0">
+        <a:scrgbClr r="0" g="0" b="0"/>
+      </a:fillRef>
+      <a:effectRef idx="0">
+        <a:scrgbClr r="0" g="0" b="0"/>
+      </a:effectRef>
+      <a:fontRef idx="minor"/>
+    </dgm:style>
+  </dgm:styleLbl>
+  <dgm:styleLbl name="parChTrans1D4">
+    <dgm:scene3d>
+      <a:camera prst="orthographicFront"/>
+      <a:lightRig rig="threePt" dir="t"/>
+    </dgm:scene3d>
+    <dgm:sp3d/>
+    <dgm:txPr/>
+    <dgm:style>
+      <a:lnRef idx="2">
+        <a:scrgbClr r="0" g="0" b="0"/>
+      </a:lnRef>
+      <a:fillRef idx="0">
+        <a:scrgbClr r="0" g="0" b="0"/>
+      </a:fillRef>
+      <a:effectRef idx="0">
+        <a:scrgbClr r="0" g="0" b="0"/>
+      </a:effectRef>
+      <a:fontRef idx="minor"/>
+    </dgm:style>
+  </dgm:styleLbl>
+  <dgm:styleLbl name="fgAcc1">
+    <dgm:scene3d>
+      <a:camera prst="orthographicFront"/>
+      <a:lightRig rig="threePt" dir="t"/>
+    </dgm:scene3d>
+    <dgm:sp3d/>
+    <dgm:txPr/>
+    <dgm:style>
+      <a:lnRef idx="2">
+        <a:scrgbClr r="0" g="0" b="0"/>
+      </a:lnRef>
+      <a:fillRef idx="1">
+        <a:scrgbClr r="0" g="0" b="0"/>
+      </a:fillRef>
+      <a:effectRef idx="0">
+        <a:scrgbClr r="0" g="0" b="0"/>
+      </a:effectRef>
+      <a:fontRef idx="minor"/>
+    </dgm:style>
+  </dgm:styleLbl>
+  <dgm:styleLbl name="conFgAcc1">
+    <dgm:scene3d>
+      <a:camera prst="orthographicFront"/>
+      <a:lightRig rig="threePt" dir="t"/>
+    </dgm:scene3d>
+    <dgm:sp3d/>
+    <dgm:txPr/>
+    <dgm:style>
+      <a:lnRef idx="2">
+        <a:scrgbClr r="0" g="0" b="0"/>
+      </a:lnRef>
+      <a:fillRef idx="1">
+        <a:scrgbClr r="0" g="0" b="0"/>
+      </a:fillRef>
+      <a:effectRef idx="0">
+        <a:scrgbClr r="0" g="0" b="0"/>
+      </a:effectRef>
+      <a:fontRef idx="minor"/>
+    </dgm:style>
+  </dgm:styleLbl>
+  <dgm:styleLbl name="alignAcc1">
+    <dgm:scene3d>
+      <a:camera prst="orthographicFront"/>
+      <a:lightRig rig="threePt" dir="t"/>
+    </dgm:scene3d>
+    <dgm:sp3d/>
+    <dgm:txPr/>
+    <dgm:style>
+      <a:lnRef idx="2">
+        <a:scrgbClr r="0" g="0" b="0"/>
+      </a:lnRef>
+      <a:fillRef idx="1">
+        <a:scrgbClr r="0" g="0" b="0"/>
+      </a:fillRef>
+      <a:effectRef idx="0">
+        <a:scrgbClr r="0" g="0" b="0"/>
+      </a:effectRef>
+      <a:fontRef idx="minor"/>
+    </dgm:style>
+  </dgm:styleLbl>
+  <dgm:styleLbl name="trAlignAcc1">
+    <dgm:scene3d>
+      <a:camera prst="orthographicFront"/>
+      <a:lightRig rig="threePt" dir="t"/>
+    </dgm:scene3d>
+    <dgm:sp3d/>
+    <dgm:txPr/>
+    <dgm:style>
+      <a:lnRef idx="1">
+        <a:scrgbClr r="0" g="0" b="0"/>
+      </a:lnRef>
+      <a:fillRef idx="1">
+        <a:scrgbClr r="0" g="0" b="0"/>
+      </a:fillRef>
+      <a:effectRef idx="0">
+        <a:scrgbClr r="0" g="0" b="0"/>
+      </a:effectRef>
+      <a:fontRef idx="minor"/>
+    </dgm:style>
+  </dgm:styleLbl>
+  <dgm:styleLbl name="bgAcc1">
+    <dgm:scene3d>
+      <a:camera prst="orthographicFront"/>
+      <a:lightRig rig="threePt" dir="t"/>
+    </dgm:scene3d>
+    <dgm:sp3d/>
+    <dgm:txPr/>
+    <dgm:style>
+      <a:lnRef idx="2">
+        <a:scrgbClr r="0" g="0" b="0"/>
+      </a:lnRef>
+      <a:fillRef idx="1">
+        <a:scrgbClr r="0" g="0" b="0"/>
+      </a:fillRef>
+      <a:effectRef idx="0">
+        <a:scrgbClr r="0" g="0" b="0"/>
+      </a:effectRef>
+      <a:fontRef idx="minor"/>
+    </dgm:style>
+  </dgm:styleLbl>
+  <dgm:styleLbl name="solidFgAcc1">
+    <dgm:scene3d>
+      <a:camera prst="orthographicFront"/>
+      <a:lightRig rig="threePt" dir="t"/>
+    </dgm:scene3d>
+    <dgm:sp3d/>
+    <dgm:txPr/>
+    <dgm:style>
+      <a:lnRef idx="2">
+        <a:scrgbClr r="0" g="0" b="0"/>
+      </a:lnRef>
+      <a:fillRef idx="1">
+        <a:scrgbClr r="0" g="0" b="0"/>
+      </a:fillRef>
+      <a:effectRef idx="0">
+        <a:scrgbClr r="0" g="0" b="0"/>
+      </a:effectRef>
+      <a:fontRef idx="minor"/>
+    </dgm:style>
+  </dgm:styleLbl>
+  <dgm:styleLbl name="solidAlignAcc1">
+    <dgm:scene3d>
+      <a:camera prst="orthographicFront"/>
+      <a:lightRig rig="threePt" dir="t"/>
+    </dgm:scene3d>
+    <dgm:sp3d/>
+    <dgm:txPr/>
+    <dgm:style>
+      <a:lnRef idx="2">
+        <a:scrgbClr r="0" g="0" b="0"/>
+      </a:lnRef>
+      <a:fillRef idx="1">
+        <a:scrgbClr r="0" g="0" b="0"/>
+      </a:fillRef>
+      <a:effectRef idx="0">
+        <a:scrgbClr r="0" g="0" b="0"/>
+      </a:effectRef>
+      <a:fontRef idx="minor"/>
+    </dgm:style>
+  </dgm:styleLbl>
+  <dgm:styleLbl name="solidBgAcc1">
+    <dgm:scene3d>
+      <a:camera prst="orthographicFront"/>
+      <a:lightRig rig="threePt" dir="t"/>
+    </dgm:scene3d>
+    <dgm:sp3d/>
+    <dgm:txPr/>
+    <dgm:style>
+      <a:lnRef idx="2">
+        <a:scrgbClr r="0" g="0" b="0"/>
+      </a:lnRef>
+      <a:fillRef idx="1">
+        <a:scrgbClr r="0" g="0" b="0"/>
+      </a:fillRef>
+      <a:effectRef idx="0">
+        <a:scrgbClr r="0" g="0" b="0"/>
+      </a:effectRef>
+      <a:fontRef idx="minor"/>
+    </dgm:style>
+  </dgm:styleLbl>
+  <dgm:styleLbl name="fgAccFollowNode1">
+    <dgm:scene3d>
+      <a:camera prst="orthographicFront"/>
+      <a:lightRig rig="threePt" dir="t"/>
+    </dgm:scene3d>
+    <dgm:sp3d/>
+    <dgm:txPr/>
+    <dgm:style>
+      <a:lnRef idx="2">
+        <a:scrgbClr r="0" g="0" b="0"/>
+      </a:lnRef>
+      <a:fillRef idx="1">
+        <a:scrgbClr r="0" g="0" b="0"/>
+      </a:fillRef>
+      <a:effectRef idx="0">
+        <a:scrgbClr r="0" g="0" b="0"/>
+      </a:effectRef>
+      <a:fontRef idx="minor"/>
+    </dgm:style>
+  </dgm:styleLbl>
+  <dgm:styleLbl name="alignAccFollowNode1">
+    <dgm:scene3d>
+      <a:camera prst="orthographicFront"/>
+      <a:lightRig rig="threePt" dir="t"/>
+    </dgm:scene3d>
+    <dgm:sp3d/>
+    <dgm:txPr/>
+    <dgm:style>
+      <a:lnRef idx="2">
+        <a:scrgbClr r="0" g="0" b="0"/>
+      </a:lnRef>
+      <a:fillRef idx="1">
+        <a:scrgbClr r="0" g="0" b="0"/>
+      </a:fillRef>
+      <a:effectRef idx="0">
+        <a:scrgbClr r="0" g="0" b="0"/>
+      </a:effectRef>
+      <a:fontRef idx="minor"/>
+    </dgm:style>
+  </dgm:styleLbl>
+  <dgm:styleLbl name="bgAccFollowNode1">
+    <dgm:scene3d>
+      <a:camera prst="orthographicFront"/>
+      <a:lightRig rig="threePt" dir="t"/>
+    </dgm:scene3d>
+    <dgm:sp3d/>
+    <dgm:txPr/>
+    <dgm:style>
+      <a:lnRef idx="2">
+        <a:scrgbClr r="0" g="0" b="0"/>
+      </a:lnRef>
+      <a:fillRef idx="1">
+        <a:scrgbClr r="0" g="0" b="0"/>
+      </a:fillRef>
+      <a:effectRef idx="0">
+        <a:scrgbClr r="0" g="0" b="0"/>
+      </a:effectRef>
+      <a:fontRef idx="minor"/>
+    </dgm:style>
+  </dgm:styleLbl>
+  <dgm:styleLbl name="fgAcc0">
+    <dgm:scene3d>
+      <a:camera prst="orthographicFront"/>
+      <a:lightRig rig="threePt" dir="t"/>
+    </dgm:scene3d>
+    <dgm:sp3d/>
+    <dgm:txPr/>
+    <dgm:style>
+      <a:lnRef idx="2">
+        <a:scrgbClr r="0" g="0" b="0"/>
+      </a:lnRef>
+      <a:fillRef idx="1">
+        <a:scrgbClr r="0" g="0" b="0"/>
+      </a:fillRef>
+      <a:effectRef idx="0">
+        <a:scrgbClr r="0" g="0" b="0"/>
+      </a:effectRef>
+      <a:fontRef idx="minor"/>
+    </dgm:style>
+  </dgm:styleLbl>
+  <dgm:styleLbl name="fgAcc2">
+    <dgm:scene3d>
+      <a:camera prst="orthographicFront"/>
+      <a:lightRig rig="threePt" dir="t"/>
+    </dgm:scene3d>
+    <dgm:sp3d/>
+    <dgm:txPr/>
+    <dgm:style>
+      <a:lnRef idx="2">
+        <a:scrgbClr r="0" g="0" b="0"/>
+      </a:lnRef>
+      <a:fillRef idx="1">
+        <a:scrgbClr r="0" g="0" b="0"/>
+      </a:fillRef>
+      <a:effectRef idx="0">
+        <a:scrgbClr r="0" g="0" b="0"/>
+      </a:effectRef>
+      <a:fontRef idx="minor"/>
+    </dgm:style>
+  </dgm:styleLbl>
+  <dgm:styleLbl name="fgAcc3">
+    <dgm:scene3d>
+      <a:camera prst="orthographicFront"/>
+      <a:lightRig rig="threePt" dir="t"/>
+    </dgm:scene3d>
+    <dgm:sp3d/>
+    <dgm:txPr/>
+    <dgm:style>
+      <a:lnRef idx="2">
+        <a:scrgbClr r="0" g="0" b="0"/>
+      </a:lnRef>
+      <a:fillRef idx="1">
+        <a:scrgbClr r="0" g="0" b="0"/>
+      </a:fillRef>
+      <a:effectRef idx="0">
+        <a:scrgbClr r="0" g="0" b="0"/>
+      </a:effectRef>
+      <a:fontRef idx="minor"/>
+    </dgm:style>
+  </dgm:styleLbl>
+  <dgm:styleLbl name="fgAcc4">
+    <dgm:scene3d>
+      <a:camera prst="orthographicFront"/>
+      <a:lightRig rig="threePt" dir="t"/>
+    </dgm:scene3d>
+    <dgm:sp3d/>
+    <dgm:txPr/>
+    <dgm:style>
+      <a:lnRef idx="2">
+        <a:scrgbClr r="0" g="0" b="0"/>
+      </a:lnRef>
+      <a:fillRef idx="1">
+        <a:scrgbClr r="0" g="0" b="0"/>
+      </a:fillRef>
+      <a:effectRef idx="0">
+        <a:scrgbClr r="0" g="0" b="0"/>
+      </a:effectRef>
+      <a:fontRef idx="minor"/>
+    </dgm:style>
+  </dgm:styleLbl>
+  <dgm:styleLbl name="bgShp">
+    <dgm:scene3d>
+      <a:camera prst="orthographicFront"/>
+      <a:lightRig rig="threePt" dir="t"/>
+    </dgm:scene3d>
+    <dgm:sp3d/>
+    <dgm:txPr/>
+    <dgm:style>
+      <a:lnRef idx="0">
+        <a:scrgbClr r="0" g="0" b="0"/>
+      </a:lnRef>
+      <a:fillRef idx="1">
+        <a:scrgbClr r="0" g="0" b="0"/>
+      </a:fillRef>
+      <a:effectRef idx="0">
+        <a:scrgbClr r="0" g="0" b="0"/>
+      </a:effectRef>
+      <a:fontRef idx="minor"/>
+    </dgm:style>
+  </dgm:styleLbl>
+  <dgm:styleLbl name="dkBgShp">
+    <dgm:scene3d>
+      <a:camera prst="orthographicFront"/>
+      <a:lightRig rig="threePt" dir="t"/>
+    </dgm:scene3d>
+    <dgm:sp3d/>
+    <dgm:txPr/>
+    <dgm:style>
+      <a:lnRef idx="0">
+        <a:scrgbClr r="0" g="0" b="0"/>
+      </a:lnRef>
+      <a:fillRef idx="1">
+        <a:scrgbClr r="0" g="0" b="0"/>
+      </a:fillRef>
+      <a:effectRef idx="0">
+        <a:scrgbClr r="0" g="0" b="0"/>
+      </a:effectRef>
+      <a:fontRef idx="minor"/>
+    </dgm:style>
+  </dgm:styleLbl>
+  <dgm:styleLbl name="trBgShp">
+    <dgm:scene3d>
+      <a:camera prst="orthographicFront"/>
+      <a:lightRig rig="threePt" dir="t"/>
+    </dgm:scene3d>
+    <dgm:sp3d/>
+    <dgm:txPr/>
+    <dgm:style>
+      <a:lnRef idx="0">
+        <a:scrgbClr r="0" g="0" b="0"/>
+      </a:lnRef>
+      <a:fillRef idx="1">
+        <a:scrgbClr r="0" g="0" b="0"/>
+      </a:fillRef>
+      <a:effectRef idx="0">
+        <a:scrgbClr r="0" g="0" b="0"/>
+      </a:effectRef>
+      <a:fontRef idx="minor"/>
+    </dgm:style>
+  </dgm:styleLbl>
+  <dgm:styleLbl name="fgShp">
+    <dgm:scene3d>
+      <a:camera prst="orthographicFront"/>
+      <a:lightRig rig="threePt" dir="t"/>
+    </dgm:scene3d>
+    <dgm:sp3d/>
+    <dgm:txPr/>
+    <dgm:style>
+      <a:lnRef idx="2">
+        <a:scrgbClr r="0" g="0" b="0"/>
+      </a:lnRef>
+      <a:fillRef idx="1">
+        <a:scrgbClr r="0" g="0" b="0"/>
+      </a:fillRef>
+      <a:effectRef idx="0">
+        <a:scrgbClr r="0" g="0" b="0"/>
+      </a:effectRef>
+      <a:fontRef idx="minor"/>
+    </dgm:style>
+  </dgm:styleLbl>
+  <dgm:styleLbl name="revTx">
+    <dgm:scene3d>
+      <a:camera prst="orthographicFront"/>
+      <a:lightRig rig="threePt" dir="t"/>
+    </dgm:scene3d>
+    <dgm:sp3d/>
+    <dgm:txPr/>
+    <dgm:style>
+      <a:lnRef idx="0">
+        <a:scrgbClr r="0" g="0" b="0"/>
+      </a:lnRef>
+      <a:fillRef idx="0">
+        <a:scrgbClr r="0" g="0" b="0"/>
+      </a:fillRef>
+      <a:effectRef idx="0">
+        <a:scrgbClr r="0" g="0" b="0"/>
+      </a:effectRef>
+      <a:fontRef idx="minor"/>
+    </dgm:style>
+  </dgm:styleLbl>
+</dgm:styleDef>
+</file>
+
+<file path=ppt/diagrams/quickStyle4.xml><?xml version="1.0" encoding="utf-8"?>
 <dgm:styleDef xmlns:dgm="http://schemas.openxmlformats.org/drawingml/2006/diagram" xmlns:a="http://schemas.openxmlformats.org/drawingml/2006/main" uniqueId="urn:microsoft.com/office/officeart/2005/8/quickstyle/simple1">
   <dgm:title val=""/>
   <dgm:desc val=""/>
@@ -9259,7 +12087,7 @@
           <a:p>
             <a:fld id="{AFEA96C4-76D9-4D10-A02D-18D5CECAB8B6}" type="datetimeFigureOut">
               <a:rPr lang="en-US" smtClean="0"/>
-              <a:t>4/9/2026</a:t>
+              <a:t>4/13/2026</a:t>
             </a:fld>
             <a:endParaRPr lang="en-US"/>
           </a:p>
@@ -9457,7 +12285,7 @@
           <a:p>
             <a:fld id="{AFEA96C4-76D9-4D10-A02D-18D5CECAB8B6}" type="datetimeFigureOut">
               <a:rPr lang="en-US" smtClean="0"/>
-              <a:t>4/9/2026</a:t>
+              <a:t>4/13/2026</a:t>
             </a:fld>
             <a:endParaRPr lang="en-US"/>
           </a:p>
@@ -9665,7 +12493,7 @@
           <a:p>
             <a:fld id="{AFEA96C4-76D9-4D10-A02D-18D5CECAB8B6}" type="datetimeFigureOut">
               <a:rPr lang="en-US" smtClean="0"/>
-              <a:t>4/9/2026</a:t>
+              <a:t>4/13/2026</a:t>
             </a:fld>
             <a:endParaRPr lang="en-US"/>
           </a:p>
@@ -9863,7 +12691,7 @@
           <a:p>
             <a:fld id="{AFEA96C4-76D9-4D10-A02D-18D5CECAB8B6}" type="datetimeFigureOut">
               <a:rPr lang="en-US" smtClean="0"/>
-              <a:t>4/9/2026</a:t>
+              <a:t>4/13/2026</a:t>
             </a:fld>
             <a:endParaRPr lang="en-US"/>
           </a:p>
@@ -10138,7 +12966,7 @@
           <a:p>
             <a:fld id="{AFEA96C4-76D9-4D10-A02D-18D5CECAB8B6}" type="datetimeFigureOut">
               <a:rPr lang="en-US" smtClean="0"/>
-              <a:t>4/9/2026</a:t>
+              <a:t>4/13/2026</a:t>
             </a:fld>
             <a:endParaRPr lang="en-US"/>
           </a:p>
@@ -10403,7 +13231,7 @@
           <a:p>
             <a:fld id="{AFEA96C4-76D9-4D10-A02D-18D5CECAB8B6}" type="datetimeFigureOut">
               <a:rPr lang="en-US" smtClean="0"/>
-              <a:t>4/9/2026</a:t>
+              <a:t>4/13/2026</a:t>
             </a:fld>
             <a:endParaRPr lang="en-US"/>
           </a:p>
@@ -10815,7 +13643,7 @@
           <a:p>
             <a:fld id="{AFEA96C4-76D9-4D10-A02D-18D5CECAB8B6}" type="datetimeFigureOut">
               <a:rPr lang="en-US" smtClean="0"/>
-              <a:t>4/9/2026</a:t>
+              <a:t>4/13/2026</a:t>
             </a:fld>
             <a:endParaRPr lang="en-US"/>
           </a:p>
@@ -10956,7 +13784,7 @@
           <a:p>
             <a:fld id="{AFEA96C4-76D9-4D10-A02D-18D5CECAB8B6}" type="datetimeFigureOut">
               <a:rPr lang="en-US" smtClean="0"/>
-              <a:t>4/9/2026</a:t>
+              <a:t>4/13/2026</a:t>
             </a:fld>
             <a:endParaRPr lang="en-US"/>
           </a:p>
@@ -11069,7 +13897,7 @@
           <a:p>
             <a:fld id="{AFEA96C4-76D9-4D10-A02D-18D5CECAB8B6}" type="datetimeFigureOut">
               <a:rPr lang="en-US" smtClean="0"/>
-              <a:t>4/9/2026</a:t>
+              <a:t>4/13/2026</a:t>
             </a:fld>
             <a:endParaRPr lang="en-US"/>
           </a:p>
@@ -11380,7 +14208,7 @@
           <a:p>
             <a:fld id="{AFEA96C4-76D9-4D10-A02D-18D5CECAB8B6}" type="datetimeFigureOut">
               <a:rPr lang="en-US" smtClean="0"/>
-              <a:t>4/9/2026</a:t>
+              <a:t>4/13/2026</a:t>
             </a:fld>
             <a:endParaRPr lang="en-US"/>
           </a:p>
@@ -11668,7 +14496,7 @@
           <a:p>
             <a:fld id="{AFEA96C4-76D9-4D10-A02D-18D5CECAB8B6}" type="datetimeFigureOut">
               <a:rPr lang="en-US" smtClean="0"/>
-              <a:t>4/9/2026</a:t>
+              <a:t>4/13/2026</a:t>
             </a:fld>
             <a:endParaRPr lang="en-US"/>
           </a:p>
@@ -11909,7 +14737,7 @@
           <a:p>
             <a:fld id="{AFEA96C4-76D9-4D10-A02D-18D5CECAB8B6}" type="datetimeFigureOut">
               <a:rPr lang="en-US" smtClean="0"/>
-              <a:t>4/9/2026</a:t>
+              <a:t>4/13/2026</a:t>
             </a:fld>
             <a:endParaRPr lang="en-US"/>
           </a:p>
@@ -12877,6 +15705,498 @@
       </p:grpSpPr>
       <p:sp useBgFill="1">
         <p:nvSpPr>
+          <p:cNvPr id="10" name="Rectangle 9">
+            <a:extLst>
+              <a:ext uri="{FF2B5EF4-FFF2-40B4-BE49-F238E27FC236}">
+                <a16:creationId xmlns:a16="http://schemas.microsoft.com/office/drawing/2014/main" id="{743AA782-23D1-4521-8CAD-47662984AA08}"/>
+              </a:ext>
+              <a:ext uri="{C183D7F6-B498-43B3-948B-1728B52AA6E4}">
+                <adec:decorative xmlns:adec="http://schemas.microsoft.com/office/drawing/2017/decorative" val="1"/>
+              </a:ext>
+            </a:extLst>
+          </p:cNvPr>
+          <p:cNvSpPr>
+            <a:spLocks noGrp="1" noRot="1" noChangeAspect="1" noMove="1" noResize="1" noEditPoints="1" noAdjustHandles="1" noChangeArrowheads="1" noChangeShapeType="1" noTextEdit="1"/>
+          </p:cNvSpPr>
+          <p:nvPr>
+            <p:extLst>
+              <p:ext uri="{386F3935-93C4-4BCD-93E2-E3B085C9AB24}">
+                <p16:designElem xmlns:p16="http://schemas.microsoft.com/office/powerpoint/2015/main" val="1"/>
+              </p:ext>
+            </p:extLst>
+          </p:nvPr>
+        </p:nvSpPr>
+        <p:spPr>
+          <a:xfrm>
+            <a:off x="0" y="0"/>
+            <a:ext cx="12192000" cy="6858000"/>
+          </a:xfrm>
+          <a:prstGeom prst="rect">
+            <a:avLst/>
+          </a:prstGeom>
+          <a:ln>
+            <a:noFill/>
+          </a:ln>
+        </p:spPr>
+        <p:style>
+          <a:lnRef idx="2">
+            <a:schemeClr val="accent1">
+              <a:shade val="50000"/>
+            </a:schemeClr>
+          </a:lnRef>
+          <a:fillRef idx="1">
+            <a:schemeClr val="accent1"/>
+          </a:fillRef>
+          <a:effectRef idx="0">
+            <a:schemeClr val="accent1"/>
+          </a:effectRef>
+          <a:fontRef idx="minor">
+            <a:schemeClr val="lt1"/>
+          </a:fontRef>
+        </p:style>
+        <p:txBody>
+          <a:bodyPr rtlCol="0" anchor="ctr"/>
+          <a:lstStyle/>
+          <a:p>
+            <a:pPr algn="ctr"/>
+            <a:endParaRPr lang="en-US"/>
+          </a:p>
+        </p:txBody>
+      </p:sp>
+      <p:sp>
+        <p:nvSpPr>
+          <p:cNvPr id="2" name="Title 1">
+            <a:extLst>
+              <a:ext uri="{FF2B5EF4-FFF2-40B4-BE49-F238E27FC236}">
+                <a16:creationId xmlns:a16="http://schemas.microsoft.com/office/drawing/2014/main" id="{0E1231AA-D68E-5E3E-38D9-A11CFECCFD27}"/>
+              </a:ext>
+            </a:extLst>
+          </p:cNvPr>
+          <p:cNvSpPr>
+            <a:spLocks noGrp="1"/>
+          </p:cNvSpPr>
+          <p:nvPr>
+            <p:ph type="title"/>
+          </p:nvPr>
+        </p:nvSpPr>
+        <p:spPr>
+          <a:xfrm>
+            <a:off x="630936" y="640080"/>
+            <a:ext cx="4818888" cy="1481328"/>
+          </a:xfrm>
+        </p:spPr>
+        <p:txBody>
+          <a:bodyPr anchor="b">
+            <a:normAutofit/>
+          </a:bodyPr>
+          <a:lstStyle/>
+          <a:p>
+            <a:r>
+              <a:rPr lang="en-US" sz="5000"/>
+              <a:t>Feature Importance</a:t>
+            </a:r>
+          </a:p>
+        </p:txBody>
+      </p:sp>
+      <p:sp>
+        <p:nvSpPr>
+          <p:cNvPr id="12" name="sketch line">
+            <a:extLst>
+              <a:ext uri="{FF2B5EF4-FFF2-40B4-BE49-F238E27FC236}">
+                <a16:creationId xmlns:a16="http://schemas.microsoft.com/office/drawing/2014/main" id="{71877DBC-BB60-40F0-AC93-2ACDBAAE60CE}"/>
+              </a:ext>
+              <a:ext uri="{C183D7F6-B498-43B3-948B-1728B52AA6E4}">
+                <adec:decorative xmlns:adec="http://schemas.microsoft.com/office/drawing/2017/decorative" val="1"/>
+              </a:ext>
+            </a:extLst>
+          </p:cNvPr>
+          <p:cNvSpPr>
+            <a:spLocks noGrp="1" noRot="1" noChangeAspect="1" noMove="1" noResize="1" noEditPoints="1" noAdjustHandles="1" noChangeArrowheads="1" noChangeShapeType="1" noTextEdit="1"/>
+          </p:cNvSpPr>
+          <p:nvPr>
+            <p:extLst>
+              <p:ext uri="{386F3935-93C4-4BCD-93E2-E3B085C9AB24}">
+                <p16:designElem xmlns:p16="http://schemas.microsoft.com/office/powerpoint/2015/main" val="1"/>
+              </p:ext>
+            </p:extLst>
+          </p:nvPr>
+        </p:nvSpPr>
+        <p:spPr>
+          <a:xfrm>
+            <a:off x="643278" y="2372868"/>
+            <a:ext cx="3255095" cy="18288"/>
+          </a:xfrm>
+          <a:custGeom>
+            <a:avLst/>
+            <a:gdLst>
+              <a:gd name="csX0" fmla="*/ 0 w 3255095"/>
+              <a:gd name="csY0" fmla="*/ 0 h 18288"/>
+              <a:gd name="csX1" fmla="*/ 618468 w 3255095"/>
+              <a:gd name="csY1" fmla="*/ 0 h 18288"/>
+              <a:gd name="csX2" fmla="*/ 1269487 w 3255095"/>
+              <a:gd name="csY2" fmla="*/ 0 h 18288"/>
+              <a:gd name="csX3" fmla="*/ 1953057 w 3255095"/>
+              <a:gd name="csY3" fmla="*/ 0 h 18288"/>
+              <a:gd name="csX4" fmla="*/ 2636627 w 3255095"/>
+              <a:gd name="csY4" fmla="*/ 0 h 18288"/>
+              <a:gd name="csX5" fmla="*/ 3255095 w 3255095"/>
+              <a:gd name="csY5" fmla="*/ 0 h 18288"/>
+              <a:gd name="csX6" fmla="*/ 3255095 w 3255095"/>
+              <a:gd name="csY6" fmla="*/ 18288 h 18288"/>
+              <a:gd name="csX7" fmla="*/ 2538974 w 3255095"/>
+              <a:gd name="csY7" fmla="*/ 18288 h 18288"/>
+              <a:gd name="csX8" fmla="*/ 1822853 w 3255095"/>
+              <a:gd name="csY8" fmla="*/ 18288 h 18288"/>
+              <a:gd name="csX9" fmla="*/ 1171834 w 3255095"/>
+              <a:gd name="csY9" fmla="*/ 18288 h 18288"/>
+              <a:gd name="csX10" fmla="*/ 0 w 3255095"/>
+              <a:gd name="csY10" fmla="*/ 18288 h 18288"/>
+              <a:gd name="csX11" fmla="*/ 0 w 3255095"/>
+              <a:gd name="csY11" fmla="*/ 0 h 18288"/>
+            </a:gdLst>
+            <a:ahLst/>
+            <a:cxnLst>
+              <a:cxn ang="0">
+                <a:pos x="csX0" y="csY0"/>
+              </a:cxn>
+              <a:cxn ang="0">
+                <a:pos x="csX1" y="csY1"/>
+              </a:cxn>
+              <a:cxn ang="0">
+                <a:pos x="csX2" y="csY2"/>
+              </a:cxn>
+              <a:cxn ang="0">
+                <a:pos x="csX3" y="csY3"/>
+              </a:cxn>
+              <a:cxn ang="0">
+                <a:pos x="csX4" y="csY4"/>
+              </a:cxn>
+              <a:cxn ang="0">
+                <a:pos x="csX5" y="csY5"/>
+              </a:cxn>
+              <a:cxn ang="0">
+                <a:pos x="csX6" y="csY6"/>
+              </a:cxn>
+              <a:cxn ang="0">
+                <a:pos x="csX7" y="csY7"/>
+              </a:cxn>
+              <a:cxn ang="0">
+                <a:pos x="csX8" y="csY8"/>
+              </a:cxn>
+              <a:cxn ang="0">
+                <a:pos x="csX9" y="csY9"/>
+              </a:cxn>
+              <a:cxn ang="0">
+                <a:pos x="csX10" y="csY10"/>
+              </a:cxn>
+              <a:cxn ang="0">
+                <a:pos x="csX11" y="csY11"/>
+              </a:cxn>
+            </a:cxnLst>
+            <a:rect l="l" t="t" r="r" b="b"/>
+            <a:pathLst>
+              <a:path w="3255095" h="18288" fill="none" extrusionOk="0">
+                <a:moveTo>
+                  <a:pt x="0" y="0"/>
+                </a:moveTo>
+                <a:cubicBezTo>
+                  <a:pt x="240201" y="-22123"/>
+                  <a:pt x="462021" y="-19623"/>
+                  <a:pt x="618468" y="0"/>
+                </a:cubicBezTo>
+                <a:cubicBezTo>
+                  <a:pt x="774915" y="19623"/>
+                  <a:pt x="974734" y="2035"/>
+                  <a:pt x="1269487" y="0"/>
+                </a:cubicBezTo>
+                <a:cubicBezTo>
+                  <a:pt x="1564240" y="-2035"/>
+                  <a:pt x="1733579" y="10639"/>
+                  <a:pt x="1953057" y="0"/>
+                </a:cubicBezTo>
+                <a:cubicBezTo>
+                  <a:pt x="2172535" y="-10639"/>
+                  <a:pt x="2453962" y="14018"/>
+                  <a:pt x="2636627" y="0"/>
+                </a:cubicBezTo>
+                <a:cubicBezTo>
+                  <a:pt x="2819292" y="-14018"/>
+                  <a:pt x="3121375" y="5399"/>
+                  <a:pt x="3255095" y="0"/>
+                </a:cubicBezTo>
+                <a:cubicBezTo>
+                  <a:pt x="3254386" y="8157"/>
+                  <a:pt x="3254682" y="12125"/>
+                  <a:pt x="3255095" y="18288"/>
+                </a:cubicBezTo>
+                <a:cubicBezTo>
+                  <a:pt x="3088545" y="23203"/>
+                  <a:pt x="2687475" y="7419"/>
+                  <a:pt x="2538974" y="18288"/>
+                </a:cubicBezTo>
+                <a:cubicBezTo>
+                  <a:pt x="2390473" y="29157"/>
+                  <a:pt x="2137381" y="-8959"/>
+                  <a:pt x="1822853" y="18288"/>
+                </a:cubicBezTo>
+                <a:cubicBezTo>
+                  <a:pt x="1508325" y="45535"/>
+                  <a:pt x="1466437" y="20385"/>
+                  <a:pt x="1171834" y="18288"/>
+                </a:cubicBezTo>
+                <a:cubicBezTo>
+                  <a:pt x="877231" y="16191"/>
+                  <a:pt x="561097" y="37643"/>
+                  <a:pt x="0" y="18288"/>
+                </a:cubicBezTo>
+                <a:cubicBezTo>
+                  <a:pt x="-46" y="12483"/>
+                  <a:pt x="-203" y="6491"/>
+                  <a:pt x="0" y="0"/>
+                </a:cubicBezTo>
+                <a:close/>
+              </a:path>
+              <a:path w="3255095" h="18288" stroke="0" extrusionOk="0">
+                <a:moveTo>
+                  <a:pt x="0" y="0"/>
+                </a:moveTo>
+                <a:cubicBezTo>
+                  <a:pt x="291965" y="19429"/>
+                  <a:pt x="363155" y="8568"/>
+                  <a:pt x="618468" y="0"/>
+                </a:cubicBezTo>
+                <a:cubicBezTo>
+                  <a:pt x="873781" y="-8568"/>
+                  <a:pt x="904459" y="-19505"/>
+                  <a:pt x="1171834" y="0"/>
+                </a:cubicBezTo>
+                <a:cubicBezTo>
+                  <a:pt x="1439209" y="19505"/>
+                  <a:pt x="1744369" y="9790"/>
+                  <a:pt x="1887955" y="0"/>
+                </a:cubicBezTo>
+                <a:cubicBezTo>
+                  <a:pt x="2031541" y="-9790"/>
+                  <a:pt x="2346378" y="21240"/>
+                  <a:pt x="2506423" y="0"/>
+                </a:cubicBezTo>
+                <a:cubicBezTo>
+                  <a:pt x="2666468" y="-21240"/>
+                  <a:pt x="2990257" y="30414"/>
+                  <a:pt x="3255095" y="0"/>
+                </a:cubicBezTo>
+                <a:cubicBezTo>
+                  <a:pt x="3254831" y="4493"/>
+                  <a:pt x="3255479" y="9472"/>
+                  <a:pt x="3255095" y="18288"/>
+                </a:cubicBezTo>
+                <a:cubicBezTo>
+                  <a:pt x="3120743" y="16690"/>
+                  <a:pt x="2759628" y="42462"/>
+                  <a:pt x="2604076" y="18288"/>
+                </a:cubicBezTo>
+                <a:cubicBezTo>
+                  <a:pt x="2448524" y="-5886"/>
+                  <a:pt x="2184336" y="19599"/>
+                  <a:pt x="1887955" y="18288"/>
+                </a:cubicBezTo>
+                <a:cubicBezTo>
+                  <a:pt x="1591574" y="16977"/>
+                  <a:pt x="1548845" y="6870"/>
+                  <a:pt x="1334589" y="18288"/>
+                </a:cubicBezTo>
+                <a:cubicBezTo>
+                  <a:pt x="1120333" y="29706"/>
+                  <a:pt x="996014" y="9662"/>
+                  <a:pt x="683570" y="18288"/>
+                </a:cubicBezTo>
+                <a:cubicBezTo>
+                  <a:pt x="371126" y="26914"/>
+                  <a:pt x="198687" y="16167"/>
+                  <a:pt x="0" y="18288"/>
+                </a:cubicBezTo>
+                <a:cubicBezTo>
+                  <a:pt x="843" y="9577"/>
+                  <a:pt x="371" y="6900"/>
+                  <a:pt x="0" y="0"/>
+                </a:cubicBezTo>
+                <a:close/>
+              </a:path>
+            </a:pathLst>
+          </a:custGeom>
+          <a:solidFill>
+            <a:schemeClr val="accent2"/>
+          </a:solidFill>
+          <a:ln w="38100" cap="rnd">
+            <a:solidFill>
+              <a:schemeClr val="accent2"/>
+            </a:solidFill>
+            <a:round/>
+            <a:extLst>
+              <a:ext uri="{C807C97D-BFC1-408E-A445-0C87EB9F89A2}">
+                <ask:lineSketchStyleProps xmlns:ask="http://schemas.microsoft.com/office/drawing/2018/sketchyshapes" sd="1219033472">
+                  <a:prstGeom prst="rect">
+                    <a:avLst/>
+                  </a:prstGeom>
+                  <ask:type>
+                    <ask:lineSketchFreehand/>
+                  </ask:type>
+                </ask:lineSketchStyleProps>
+              </a:ext>
+            </a:extLst>
+          </a:ln>
+        </p:spPr>
+        <p:style>
+          <a:lnRef idx="2">
+            <a:schemeClr val="accent1">
+              <a:shade val="50000"/>
+            </a:schemeClr>
+          </a:lnRef>
+          <a:fillRef idx="1">
+            <a:schemeClr val="accent1"/>
+          </a:fillRef>
+          <a:effectRef idx="0">
+            <a:schemeClr val="accent1"/>
+          </a:effectRef>
+          <a:fontRef idx="minor">
+            <a:schemeClr val="lt1"/>
+          </a:fontRef>
+        </p:style>
+        <p:txBody>
+          <a:bodyPr rtlCol="0" anchor="ctr"/>
+          <a:lstStyle/>
+          <a:p>
+            <a:pPr algn="ctr"/>
+            <a:endParaRPr lang="en-US"/>
+          </a:p>
+        </p:txBody>
+      </p:sp>
+      <p:sp>
+        <p:nvSpPr>
+          <p:cNvPr id="3" name="Content Placeholder 2">
+            <a:extLst>
+              <a:ext uri="{FF2B5EF4-FFF2-40B4-BE49-F238E27FC236}">
+                <a16:creationId xmlns:a16="http://schemas.microsoft.com/office/drawing/2014/main" id="{5F2610FC-C8BD-1B28-5CF1-C94A6C57EF7E}"/>
+              </a:ext>
+            </a:extLst>
+          </p:cNvPr>
+          <p:cNvSpPr>
+            <a:spLocks noGrp="1"/>
+          </p:cNvSpPr>
+          <p:nvPr>
+            <p:ph idx="1"/>
+          </p:nvPr>
+        </p:nvSpPr>
+        <p:spPr>
+          <a:xfrm>
+            <a:off x="630936" y="2660904"/>
+            <a:ext cx="4818888" cy="3547872"/>
+          </a:xfrm>
+        </p:spPr>
+        <p:txBody>
+          <a:bodyPr anchor="t">
+            <a:normAutofit/>
+          </a:bodyPr>
+          <a:lstStyle/>
+          <a:p>
+            <a:pPr marL="0" indent="0">
+              <a:buNone/>
+            </a:pPr>
+            <a:r>
+              <a:rPr lang="en-US" sz="2200" dirty="0" err="1"/>
+              <a:t>Rank_vs_TourneyAvg</a:t>
+            </a:r>
+            <a:r>
+              <a:rPr lang="en-US" sz="2200" dirty="0"/>
+              <a:t> was our top predictor with </a:t>
+            </a:r>
+            <a:r>
+              <a:rPr lang="en-US" sz="2200" dirty="0" err="1"/>
+              <a:t>SeedNum</a:t>
+            </a:r>
+            <a:r>
+              <a:rPr lang="en-US" sz="2200" dirty="0"/>
+              <a:t> being a close second. Showing that although the teams seed number was low by the tournament committee their underlying Massey Ratings metric mathematically placed them above.</a:t>
+            </a:r>
+          </a:p>
+        </p:txBody>
+      </p:sp>
+      <p:pic>
+        <p:nvPicPr>
+          <p:cNvPr id="6" name="Picture 5">
+            <a:extLst>
+              <a:ext uri="{FF2B5EF4-FFF2-40B4-BE49-F238E27FC236}">
+                <a16:creationId xmlns:a16="http://schemas.microsoft.com/office/drawing/2014/main" id="{D02FCB11-0CC0-1720-5033-8A80D2267BD8}"/>
+              </a:ext>
+            </a:extLst>
+          </p:cNvPr>
+          <p:cNvPicPr>
+            <a:picLocks noChangeAspect="1"/>
+          </p:cNvPicPr>
+          <p:nvPr/>
+        </p:nvPicPr>
+        <p:blipFill>
+          <a:blip r:embed="rId2">
+            <a:extLst>
+              <a:ext uri="{28A0092B-C50C-407E-A947-70E740481C1C}">
+                <a14:useLocalDpi xmlns:a14="http://schemas.microsoft.com/office/drawing/2010/main" val="0"/>
+              </a:ext>
+            </a:extLst>
+          </a:blip>
+          <a:stretch>
+            <a:fillRect/>
+          </a:stretch>
+        </p:blipFill>
+        <p:spPr>
+          <a:xfrm>
+            <a:off x="5449824" y="1165092"/>
+            <a:ext cx="6253816" cy="4527815"/>
+          </a:xfrm>
+          <a:prstGeom prst="rect">
+            <a:avLst/>
+          </a:prstGeom>
+        </p:spPr>
+      </p:pic>
+    </p:spTree>
+    <p:extLst>
+      <p:ext uri="{BB962C8B-B14F-4D97-AF65-F5344CB8AC3E}">
+        <p14:creationId xmlns:p14="http://schemas.microsoft.com/office/powerpoint/2010/main" val="954167436"/>
+      </p:ext>
+    </p:extLst>
+  </p:cSld>
+  <p:clrMapOvr>
+    <a:masterClrMapping/>
+  </p:clrMapOvr>
+</p:sld>
+</file>
+
+<file path=ppt/slides/slide11.xml><?xml version="1.0" encoding="utf-8"?>
+<p:sld xmlns:a="http://schemas.openxmlformats.org/drawingml/2006/main" xmlns:r="http://schemas.openxmlformats.org/officeDocument/2006/relationships" xmlns:p="http://schemas.openxmlformats.org/presentationml/2006/main">
+  <p:cSld>
+    <p:bg>
+      <p:bgPr>
+        <a:solidFill>
+          <a:schemeClr val="bg1"/>
+        </a:solidFill>
+        <a:effectLst/>
+      </p:bgPr>
+    </p:bg>
+    <p:spTree>
+      <p:nvGrpSpPr>
+        <p:cNvPr id="1" name=""/>
+        <p:cNvGrpSpPr/>
+        <p:nvPr/>
+      </p:nvGrpSpPr>
+      <p:grpSpPr>
+        <a:xfrm>
+          <a:off x="0" y="0"/>
+          <a:ext cx="0" cy="0"/>
+          <a:chOff x="0" y="0"/>
+          <a:chExt cx="0" cy="0"/>
+        </a:xfrm>
+      </p:grpSpPr>
+      <p:sp useBgFill="1">
+        <p:nvSpPr>
           <p:cNvPr id="16" name="Rectangle 15">
             <a:extLst>
               <a:ext uri="{FF2B5EF4-FFF2-40B4-BE49-F238E27FC236}">
@@ -13414,25 +16734,25 @@
           <a:lstStyle/>
           <a:p>
             <a:r>
-              <a:rPr lang="en-US" sz="1700"/>
+              <a:rPr lang="en-US" sz="1700" dirty="0"/>
               <a:t>Hypothesis: Cinderellas would be identified as distinct outliers among other low seeded teams.</a:t>
             </a:r>
           </a:p>
           <a:p>
-            <a:endParaRPr lang="en-US" sz="1700"/>
+            <a:endParaRPr lang="en-US" sz="1700" dirty="0"/>
           </a:p>
           <a:p>
             <a:r>
-              <a:rPr lang="en-US" sz="1700"/>
+              <a:rPr lang="en-US" sz="1700" dirty="0"/>
               <a:t>Reality: Isolation Forest showed that Cinderellas were mostly statistically normal to other lower ranked seeds and lacked significant variance.</a:t>
             </a:r>
           </a:p>
           <a:p>
-            <a:endParaRPr lang="en-US" sz="1700"/>
+            <a:endParaRPr lang="en-US" sz="1700" dirty="0"/>
           </a:p>
           <a:p>
             <a:r>
-              <a:rPr lang="en-US" sz="1700"/>
+              <a:rPr lang="en-US" sz="1700" dirty="0"/>
               <a:t>However, the Gaussian Mixed Model (GMM) was able to group teams into 4 distinct archetypes. It successfully grouped 82% of historical Cinderella teams into a high performing archetype (Cluster 2) where many higher ranked teams are. This suggests that they distinct enough to be identified as different from the average lower seed.</a:t>
             </a:r>
           </a:p>
@@ -13451,9 +16771,17 @@
 </p:sld>
 </file>
 
-<file path=ppt/slides/slide11.xml><?xml version="1.0" encoding="utf-8"?>
+<file path=ppt/slides/slide12.xml><?xml version="1.0" encoding="utf-8"?>
 <p:sld xmlns:a="http://schemas.openxmlformats.org/drawingml/2006/main" xmlns:r="http://schemas.openxmlformats.org/officeDocument/2006/relationships" xmlns:p="http://schemas.openxmlformats.org/presentationml/2006/main">
   <p:cSld>
+    <p:bg>
+      <p:bgPr>
+        <a:solidFill>
+          <a:schemeClr val="bg1"/>
+        </a:solidFill>
+        <a:effectLst/>
+      </p:bgPr>
+    </p:bg>
     <p:spTree>
       <p:nvGrpSpPr>
         <p:cNvPr id="1" name=""/>
@@ -13468,6 +16796,348 @@
           <a:chExt cx="0" cy="0"/>
         </a:xfrm>
       </p:grpSpPr>
+      <p:sp useBgFill="1">
+        <p:nvSpPr>
+          <p:cNvPr id="9" name="Rectangle 8">
+            <a:extLst>
+              <a:ext uri="{FF2B5EF4-FFF2-40B4-BE49-F238E27FC236}">
+                <a16:creationId xmlns:a16="http://schemas.microsoft.com/office/drawing/2014/main" id="{56E9B3E6-E277-4D68-BA48-9CB43FFBD6E2}"/>
+              </a:ext>
+              <a:ext uri="{C183D7F6-B498-43B3-948B-1728B52AA6E4}">
+                <adec:decorative xmlns:adec="http://schemas.microsoft.com/office/drawing/2017/decorative" val="1"/>
+              </a:ext>
+            </a:extLst>
+          </p:cNvPr>
+          <p:cNvSpPr>
+            <a:spLocks noGrp="1" noRot="1" noChangeAspect="1" noMove="1" noResize="1" noEditPoints="1" noAdjustHandles="1" noChangeArrowheads="1" noChangeShapeType="1" noTextEdit="1"/>
+          </p:cNvSpPr>
+          <p:nvPr>
+            <p:extLst>
+              <p:ext uri="{386F3935-93C4-4BCD-93E2-E3B085C9AB24}">
+                <p16:designElem xmlns:p16="http://schemas.microsoft.com/office/powerpoint/2015/main" val="1"/>
+              </p:ext>
+            </p:extLst>
+          </p:nvPr>
+        </p:nvSpPr>
+        <p:spPr>
+          <a:xfrm>
+            <a:off x="0" y="0"/>
+            <a:ext cx="12191999" cy="6857365"/>
+          </a:xfrm>
+          <a:prstGeom prst="rect">
+            <a:avLst/>
+          </a:prstGeom>
+          <a:ln>
+            <a:noFill/>
+          </a:ln>
+        </p:spPr>
+        <p:style>
+          <a:lnRef idx="2">
+            <a:schemeClr val="accent1">
+              <a:shade val="50000"/>
+            </a:schemeClr>
+          </a:lnRef>
+          <a:fillRef idx="1">
+            <a:schemeClr val="accent1"/>
+          </a:fillRef>
+          <a:effectRef idx="0">
+            <a:schemeClr val="accent1"/>
+          </a:effectRef>
+          <a:fontRef idx="minor">
+            <a:schemeClr val="lt1"/>
+          </a:fontRef>
+        </p:style>
+        <p:txBody>
+          <a:bodyPr rtlCol="0" anchor="ctr"/>
+          <a:lstStyle/>
+          <a:p>
+            <a:pPr algn="ctr"/>
+            <a:endParaRPr lang="en-US"/>
+          </a:p>
+        </p:txBody>
+      </p:sp>
+      <p:grpSp>
+        <p:nvGrpSpPr>
+          <p:cNvPr id="11" name="Group 10">
+            <a:extLst>
+              <a:ext uri="{FF2B5EF4-FFF2-40B4-BE49-F238E27FC236}">
+                <a16:creationId xmlns:a16="http://schemas.microsoft.com/office/drawing/2014/main" id="{AE1C45F0-260A-458C-96ED-C1F6D2151219}"/>
+              </a:ext>
+              <a:ext uri="{C183D7F6-B498-43B3-948B-1728B52AA6E4}">
+                <adec:decorative xmlns:adec="http://schemas.microsoft.com/office/drawing/2017/decorative" val="1"/>
+              </a:ext>
+            </a:extLst>
+          </p:cNvPr>
+          <p:cNvGrpSpPr>
+            <a:grpSpLocks noGrp="1" noUngrp="1" noRot="1" noChangeAspect="1" noMove="1" noResize="1"/>
+          </p:cNvGrpSpPr>
+          <p:nvPr>
+            <p:extLst>
+              <p:ext uri="{386F3935-93C4-4BCD-93E2-E3B085C9AB24}">
+                <p16:designElem xmlns:p16="http://schemas.microsoft.com/office/powerpoint/2015/main" val="1"/>
+              </p:ext>
+            </p:extLst>
+          </p:nvPr>
+        </p:nvGrpSpPr>
+        <p:grpSpPr>
+          <a:xfrm>
+            <a:off x="4" y="1216597"/>
+            <a:ext cx="731521" cy="673460"/>
+            <a:chOff x="3940602" y="308034"/>
+            <a:chExt cx="2116791" cy="3428999"/>
+          </a:xfrm>
+          <a:solidFill>
+            <a:schemeClr val="accent4"/>
+          </a:solidFill>
+        </p:grpSpPr>
+        <p:sp>
+          <p:nvSpPr>
+            <p:cNvPr id="12" name="Rectangle 11">
+              <a:extLst>
+                <a:ext uri="{FF2B5EF4-FFF2-40B4-BE49-F238E27FC236}">
+                  <a16:creationId xmlns:a16="http://schemas.microsoft.com/office/drawing/2014/main" id="{A6604B49-AD5C-4590-B051-06C8222ECD99}"/>
+                </a:ext>
+                <a:ext uri="{C183D7F6-B498-43B3-948B-1728B52AA6E4}">
+                  <adec:decorative xmlns:adec="http://schemas.microsoft.com/office/drawing/2017/decorative" val="1"/>
+                </a:ext>
+              </a:extLst>
+            </p:cNvPr>
+            <p:cNvSpPr/>
+            <p:nvPr>
+              <p:extLst>
+                <p:ext uri="{386F3935-93C4-4BCD-93E2-E3B085C9AB24}">
+                  <p16:designElem xmlns:p16="http://schemas.microsoft.com/office/powerpoint/2015/main" val="1"/>
+                </p:ext>
+              </p:extLst>
+            </p:nvPr>
+          </p:nvSpPr>
+          <p:spPr>
+            <a:xfrm>
+              <a:off x="3940602" y="308034"/>
+              <a:ext cx="566743" cy="3428999"/>
+            </a:xfrm>
+            <a:prstGeom prst="rect">
+              <a:avLst/>
+            </a:prstGeom>
+            <a:grpFill/>
+            <a:ln>
+              <a:noFill/>
+            </a:ln>
+          </p:spPr>
+          <p:style>
+            <a:lnRef idx="2">
+              <a:schemeClr val="accent1">
+                <a:shade val="50000"/>
+              </a:schemeClr>
+            </a:lnRef>
+            <a:fillRef idx="1">
+              <a:schemeClr val="accent1"/>
+            </a:fillRef>
+            <a:effectRef idx="0">
+              <a:schemeClr val="accent1"/>
+            </a:effectRef>
+            <a:fontRef idx="minor">
+              <a:schemeClr val="lt1"/>
+            </a:fontRef>
+          </p:style>
+          <p:txBody>
+            <a:bodyPr rtlCol="0" anchor="ctr"/>
+            <a:lstStyle/>
+            <a:p>
+              <a:pPr algn="ctr"/>
+              <a:endParaRPr lang="en-US"/>
+            </a:p>
+          </p:txBody>
+        </p:sp>
+        <p:sp>
+          <p:nvSpPr>
+            <p:cNvPr id="13" name="Rectangle 12">
+              <a:extLst>
+                <a:ext uri="{FF2B5EF4-FFF2-40B4-BE49-F238E27FC236}">
+                  <a16:creationId xmlns:a16="http://schemas.microsoft.com/office/drawing/2014/main" id="{743ECCAF-29C5-4537-947C-7EA1292463DB}"/>
+                </a:ext>
+                <a:ext uri="{C183D7F6-B498-43B3-948B-1728B52AA6E4}">
+                  <adec:decorative xmlns:adec="http://schemas.microsoft.com/office/drawing/2017/decorative" val="1"/>
+                </a:ext>
+              </a:extLst>
+            </p:cNvPr>
+            <p:cNvSpPr/>
+            <p:nvPr>
+              <p:extLst>
+                <p:ext uri="{386F3935-93C4-4BCD-93E2-E3B085C9AB24}">
+                  <p16:designElem xmlns:p16="http://schemas.microsoft.com/office/powerpoint/2015/main" val="1"/>
+                </p:ext>
+              </p:extLst>
+            </p:nvPr>
+          </p:nvSpPr>
+          <p:spPr>
+            <a:xfrm>
+              <a:off x="4715626" y="308034"/>
+              <a:ext cx="566743" cy="3428999"/>
+            </a:xfrm>
+            <a:prstGeom prst="rect">
+              <a:avLst/>
+            </a:prstGeom>
+            <a:grpFill/>
+            <a:ln>
+              <a:noFill/>
+            </a:ln>
+          </p:spPr>
+          <p:style>
+            <a:lnRef idx="2">
+              <a:schemeClr val="accent1">
+                <a:shade val="50000"/>
+              </a:schemeClr>
+            </a:lnRef>
+            <a:fillRef idx="1">
+              <a:schemeClr val="accent1"/>
+            </a:fillRef>
+            <a:effectRef idx="0">
+              <a:schemeClr val="accent1"/>
+            </a:effectRef>
+            <a:fontRef idx="minor">
+              <a:schemeClr val="lt1"/>
+            </a:fontRef>
+          </p:style>
+          <p:txBody>
+            <a:bodyPr rtlCol="0" anchor="ctr"/>
+            <a:lstStyle/>
+            <a:p>
+              <a:pPr algn="ctr"/>
+              <a:endParaRPr lang="en-US"/>
+            </a:p>
+          </p:txBody>
+        </p:sp>
+        <p:sp>
+          <p:nvSpPr>
+            <p:cNvPr id="14" name="Rectangle 13">
+              <a:extLst>
+                <a:ext uri="{FF2B5EF4-FFF2-40B4-BE49-F238E27FC236}">
+                  <a16:creationId xmlns:a16="http://schemas.microsoft.com/office/drawing/2014/main" id="{ED49787B-8DE6-4467-AD0A-8DECC6E0C2D6}"/>
+                </a:ext>
+                <a:ext uri="{C183D7F6-B498-43B3-948B-1728B52AA6E4}">
+                  <adec:decorative xmlns:adec="http://schemas.microsoft.com/office/drawing/2017/decorative" val="1"/>
+                </a:ext>
+              </a:extLst>
+            </p:cNvPr>
+            <p:cNvSpPr/>
+            <p:nvPr>
+              <p:extLst>
+                <p:ext uri="{386F3935-93C4-4BCD-93E2-E3B085C9AB24}">
+                  <p16:designElem xmlns:p16="http://schemas.microsoft.com/office/powerpoint/2015/main" val="1"/>
+                </p:ext>
+              </p:extLst>
+            </p:nvPr>
+          </p:nvSpPr>
+          <p:spPr>
+            <a:xfrm>
+              <a:off x="5490650" y="308034"/>
+              <a:ext cx="566743" cy="3428999"/>
+            </a:xfrm>
+            <a:prstGeom prst="rect">
+              <a:avLst/>
+            </a:prstGeom>
+            <a:grpFill/>
+            <a:ln>
+              <a:noFill/>
+            </a:ln>
+          </p:spPr>
+          <p:style>
+            <a:lnRef idx="2">
+              <a:schemeClr val="accent1">
+                <a:shade val="50000"/>
+              </a:schemeClr>
+            </a:lnRef>
+            <a:fillRef idx="1">
+              <a:schemeClr val="accent1"/>
+            </a:fillRef>
+            <a:effectRef idx="0">
+              <a:schemeClr val="accent1"/>
+            </a:effectRef>
+            <a:fontRef idx="minor">
+              <a:schemeClr val="lt1"/>
+            </a:fontRef>
+          </p:style>
+          <p:txBody>
+            <a:bodyPr rtlCol="0" anchor="ctr"/>
+            <a:lstStyle/>
+            <a:p>
+              <a:pPr algn="ctr"/>
+              <a:endParaRPr lang="en-US"/>
+            </a:p>
+          </p:txBody>
+        </p:sp>
+      </p:grpSp>
+      <p:sp>
+        <p:nvSpPr>
+          <p:cNvPr id="16" name="Rectangle 15">
+            <a:extLst>
+              <a:ext uri="{FF2B5EF4-FFF2-40B4-BE49-F238E27FC236}">
+                <a16:creationId xmlns:a16="http://schemas.microsoft.com/office/drawing/2014/main" id="{D5B0017B-2ECA-49AF-B397-DC140825DF8D}"/>
+              </a:ext>
+              <a:ext uri="{C183D7F6-B498-43B3-948B-1728B52AA6E4}">
+                <adec:decorative xmlns:adec="http://schemas.microsoft.com/office/drawing/2017/decorative" val="1"/>
+              </a:ext>
+            </a:extLst>
+          </p:cNvPr>
+          <p:cNvSpPr>
+            <a:spLocks noGrp="1" noRot="1" noChangeAspect="1" noMove="1" noResize="1" noEditPoints="1" noAdjustHandles="1" noChangeArrowheads="1" noChangeShapeType="1" noTextEdit="1"/>
+          </p:cNvSpPr>
+          <p:nvPr>
+            <p:extLst>
+              <p:ext uri="{386F3935-93C4-4BCD-93E2-E3B085C9AB24}">
+                <p16:designElem xmlns:p16="http://schemas.microsoft.com/office/powerpoint/2015/main" val="1"/>
+              </p:ext>
+            </p:extLst>
+          </p:nvPr>
+        </p:nvSpPr>
+        <p:spPr>
+          <a:xfrm>
+            <a:off x="640079" y="613954"/>
+            <a:ext cx="10907487" cy="1894116"/>
+          </a:xfrm>
+          <a:prstGeom prst="rect">
+            <a:avLst/>
+          </a:prstGeom>
+          <a:solidFill>
+            <a:schemeClr val="bg1"/>
+          </a:solidFill>
+          <a:ln>
+            <a:noFill/>
+          </a:ln>
+          <a:effectLst>
+            <a:outerShdw blurRad="139700" dist="127000" dir="5400000" algn="t" rotWithShape="0">
+              <a:prstClr val="black">
+                <a:alpha val="15000"/>
+              </a:prstClr>
+            </a:outerShdw>
+          </a:effectLst>
+        </p:spPr>
+        <p:style>
+          <a:lnRef idx="2">
+            <a:schemeClr val="accent1">
+              <a:shade val="50000"/>
+            </a:schemeClr>
+          </a:lnRef>
+          <a:fillRef idx="1">
+            <a:schemeClr val="accent1"/>
+          </a:fillRef>
+          <a:effectRef idx="0">
+            <a:schemeClr val="accent1"/>
+          </a:effectRef>
+          <a:fontRef idx="minor">
+            <a:schemeClr val="lt1"/>
+          </a:fontRef>
+        </p:style>
+        <p:txBody>
+          <a:bodyPr rtlCol="0" anchor="ctr"/>
+          <a:lstStyle/>
+          <a:p>
+            <a:pPr algn="ctr"/>
+            <a:endParaRPr lang="en-US"/>
+          </a:p>
+        </p:txBody>
+      </p:sp>
       <p:sp>
         <p:nvSpPr>
           <p:cNvPr id="2" name="Title 1">
@@ -13484,55 +17154,108 @@
             <p:ph type="title"/>
           </p:nvPr>
         </p:nvSpPr>
-        <p:spPr/>
+        <p:spPr>
+          <a:xfrm>
+            <a:off x="1043631" y="809898"/>
+            <a:ext cx="10173010" cy="1554480"/>
+          </a:xfrm>
+        </p:spPr>
         <p:txBody>
-          <a:bodyPr/>
+          <a:bodyPr anchor="ctr">
+            <a:normAutofit/>
+          </a:bodyPr>
           <a:lstStyle/>
           <a:p>
             <a:r>
-              <a:rPr lang="en-US" dirty="0"/>
+              <a:rPr lang="en-US" sz="4800"/>
               <a:t>Model Results &amp; Performance</a:t>
             </a:r>
           </a:p>
         </p:txBody>
       </p:sp>
-      <p:sp>
-        <p:nvSpPr>
-          <p:cNvPr id="3" name="Content Placeholder 2">
+      <p:cxnSp>
+        <p:nvCxnSpPr>
+          <p:cNvPr id="18" name="Straight Connector 17">
             <a:extLst>
               <a:ext uri="{FF2B5EF4-FFF2-40B4-BE49-F238E27FC236}">
-                <a16:creationId xmlns:a16="http://schemas.microsoft.com/office/drawing/2014/main" id="{32B64E96-F4EA-2976-C3B9-4DDF488B5192}"/>
+                <a16:creationId xmlns:a16="http://schemas.microsoft.com/office/drawing/2014/main" id="{6CF1BAF6-AD41-4082-B212-8A1F9A2E8779}"/>
+              </a:ext>
+              <a:ext uri="{C183D7F6-B498-43B3-948B-1728B52AA6E4}">
+                <adec:decorative xmlns:adec="http://schemas.microsoft.com/office/drawing/2017/decorative" val="1"/>
               </a:ext>
             </a:extLst>
           </p:cNvPr>
-          <p:cNvSpPr>
-            <a:spLocks noGrp="1"/>
-          </p:cNvSpPr>
+          <p:cNvCxnSpPr>
+            <a:cxnSpLocks noGrp="1" noRot="1" noChangeAspect="1" noMove="1" noResize="1" noEditPoints="1" noAdjustHandles="1" noChangeArrowheads="1" noChangeShapeType="1"/>
+          </p:cNvCxnSpPr>
+          <p:nvPr>
+            <p:extLst>
+              <p:ext uri="{386F3935-93C4-4BCD-93E2-E3B085C9AB24}">
+                <p16:designElem xmlns:p16="http://schemas.microsoft.com/office/powerpoint/2015/main" val="1"/>
+              </p:ext>
+            </p:extLst>
+          </p:nvPr>
+        </p:nvCxnSpPr>
+        <p:spPr>
+          <a:xfrm flipH="1">
+            <a:off x="838200" y="6485313"/>
+            <a:ext cx="10515600" cy="0"/>
+          </a:xfrm>
+          <a:prstGeom prst="line">
+            <a:avLst/>
+          </a:prstGeom>
+          <a:ln w="57150">
+            <a:solidFill>
+              <a:schemeClr val="accent4"/>
+            </a:solidFill>
+          </a:ln>
+        </p:spPr>
+        <p:style>
+          <a:lnRef idx="1">
+            <a:schemeClr val="accent1"/>
+          </a:lnRef>
+          <a:fillRef idx="0">
+            <a:schemeClr val="accent1"/>
+          </a:fillRef>
+          <a:effectRef idx="0">
+            <a:schemeClr val="accent1"/>
+          </a:effectRef>
+          <a:fontRef idx="minor">
+            <a:schemeClr val="tx1"/>
+          </a:fontRef>
+        </p:style>
+      </p:cxnSp>
+      <p:graphicFrame>
+        <p:nvGraphicFramePr>
+          <p:cNvPr id="5" name="Content Placeholder 2">
+            <a:extLst>
+              <a:ext uri="{FF2B5EF4-FFF2-40B4-BE49-F238E27FC236}">
+                <a16:creationId xmlns:a16="http://schemas.microsoft.com/office/drawing/2014/main" id="{E57CAA31-7FF2-A387-B574-52F1FE4C40C3}"/>
+              </a:ext>
+            </a:extLst>
+          </p:cNvPr>
+          <p:cNvGraphicFramePr>
+            <a:graphicFrameLocks noGrp="1"/>
+          </p:cNvGraphicFramePr>
           <p:nvPr>
             <p:ph idx="1"/>
+            <p:extLst>
+              <p:ext uri="{D42A27DB-BD31-4B8C-83A1-F6EECF244321}">
+                <p14:modId xmlns:p14="http://schemas.microsoft.com/office/powerpoint/2010/main" val="359548985"/>
+              </p:ext>
+            </p:extLst>
           </p:nvPr>
-        </p:nvSpPr>
-        <p:spPr/>
-        <p:txBody>
-          <a:bodyPr/>
-          <a:lstStyle/>
-          <a:p>
-            <a:r>
-              <a:rPr lang="en-US" dirty="0"/>
-              <a:t>Ultimately, despite our hypothesis, our XGBoost model still struggled to consistently identify Cinderella teams. </a:t>
-            </a:r>
-          </a:p>
-          <a:p>
-            <a:endParaRPr lang="en-US" dirty="0"/>
-          </a:p>
-          <a:p>
-            <a:r>
-              <a:rPr lang="en-US" dirty="0"/>
-              <a:t>While it performed better than a random guess, it wasn’t drastically better. </a:t>
-            </a:r>
-          </a:p>
-        </p:txBody>
-      </p:sp>
+        </p:nvGraphicFramePr>
+        <p:xfrm>
+          <a:off x="904602" y="3017519"/>
+          <a:ext cx="10378440" cy="3209902"/>
+        </p:xfrm>
+        <a:graphic>
+          <a:graphicData uri="http://schemas.openxmlformats.org/drawingml/2006/diagram">
+            <dgm:relIds xmlns:dgm="http://schemas.openxmlformats.org/drawingml/2006/diagram" xmlns:r="http://schemas.openxmlformats.org/officeDocument/2006/relationships" r:dm="rId2" r:lo="rId3" r:qs="rId4" r:cs="rId5"/>
+          </a:graphicData>
+        </a:graphic>
+      </p:graphicFrame>
     </p:spTree>
     <p:extLst>
       <p:ext uri="{BB962C8B-B14F-4D97-AF65-F5344CB8AC3E}">
@@ -13546,7 +17269,7 @@
 </p:sld>
 </file>
 
-<file path=ppt/slides/slide12.xml><?xml version="1.0" encoding="utf-8"?>
+<file path=ppt/slides/slide13.xml><?xml version="1.0" encoding="utf-8"?>
 <p:sld xmlns:a="http://schemas.openxmlformats.org/drawingml/2006/main" xmlns:r="http://schemas.openxmlformats.org/officeDocument/2006/relationships" xmlns:p="http://schemas.openxmlformats.org/presentationml/2006/main">
   <p:cSld>
     <p:bg>
@@ -14280,7 +18003,7 @@
 </p:sld>
 </file>
 
-<file path=ppt/slides/slide13.xml><?xml version="1.0" encoding="utf-8"?>
+<file path=ppt/slides/slide14.xml><?xml version="1.0" encoding="utf-8"?>
 <p:sld xmlns:a="http://schemas.openxmlformats.org/drawingml/2006/main" xmlns:r="http://schemas.openxmlformats.org/officeDocument/2006/relationships" xmlns:p="http://schemas.openxmlformats.org/presentationml/2006/main">
   <p:cSld>
     <p:bg>
@@ -17732,6 +21455,262 @@
           <a:chExt cx="0" cy="0"/>
         </a:xfrm>
       </p:grpSpPr>
+      <p:sp>
+        <p:nvSpPr>
+          <p:cNvPr id="10" name="Rectangle 9">
+            <a:extLst>
+              <a:ext uri="{FF2B5EF4-FFF2-40B4-BE49-F238E27FC236}">
+                <a16:creationId xmlns:a16="http://schemas.microsoft.com/office/drawing/2014/main" id="{6753252F-4873-4F63-801D-CC719279A7D5}"/>
+              </a:ext>
+              <a:ext uri="{C183D7F6-B498-43B3-948B-1728B52AA6E4}">
+                <adec:decorative xmlns:adec="http://schemas.microsoft.com/office/drawing/2017/decorative" val="1"/>
+              </a:ext>
+            </a:extLst>
+          </p:cNvPr>
+          <p:cNvSpPr>
+            <a:spLocks noGrp="1" noRot="1" noChangeAspect="1" noMove="1" noResize="1" noEditPoints="1" noAdjustHandles="1" noChangeArrowheads="1" noChangeShapeType="1" noTextEdit="1"/>
+          </p:cNvSpPr>
+          <p:nvPr>
+            <p:extLst>
+              <p:ext uri="{386F3935-93C4-4BCD-93E2-E3B085C9AB24}">
+                <p16:designElem xmlns:p16="http://schemas.microsoft.com/office/powerpoint/2015/main" val="1"/>
+              </p:ext>
+            </p:extLst>
+          </p:nvPr>
+        </p:nvSpPr>
+        <p:spPr>
+          <a:xfrm>
+            <a:off x="0" y="0"/>
+            <a:ext cx="12192000" cy="6858000"/>
+          </a:xfrm>
+          <a:prstGeom prst="rect">
+            <a:avLst/>
+          </a:prstGeom>
+          <a:solidFill>
+            <a:srgbClr val="FFFFFF"/>
+          </a:solidFill>
+          <a:ln>
+            <a:noFill/>
+          </a:ln>
+        </p:spPr>
+        <p:style>
+          <a:lnRef idx="2">
+            <a:schemeClr val="accent1">
+              <a:shade val="50000"/>
+            </a:schemeClr>
+          </a:lnRef>
+          <a:fillRef idx="1">
+            <a:schemeClr val="accent1"/>
+          </a:fillRef>
+          <a:effectRef idx="0">
+            <a:schemeClr val="accent1"/>
+          </a:effectRef>
+          <a:fontRef idx="minor">
+            <a:schemeClr val="lt1"/>
+          </a:fontRef>
+        </p:style>
+        <p:txBody>
+          <a:bodyPr rtlCol="0" anchor="ctr"/>
+          <a:lstStyle/>
+          <a:p>
+            <a:pPr algn="ctr"/>
+            <a:endParaRPr lang="en-US"/>
+          </a:p>
+        </p:txBody>
+      </p:sp>
+      <p:sp>
+        <p:nvSpPr>
+          <p:cNvPr id="12" name="Rectangle 11">
+            <a:extLst>
+              <a:ext uri="{FF2B5EF4-FFF2-40B4-BE49-F238E27FC236}">
+                <a16:creationId xmlns:a16="http://schemas.microsoft.com/office/drawing/2014/main" id="{047C8CCB-F95D-4249-92DD-651249D3535A}"/>
+              </a:ext>
+              <a:ext uri="{C183D7F6-B498-43B3-948B-1728B52AA6E4}">
+                <adec:decorative xmlns:adec="http://schemas.microsoft.com/office/drawing/2017/decorative" val="1"/>
+              </a:ext>
+            </a:extLst>
+          </p:cNvPr>
+          <p:cNvSpPr>
+            <a:spLocks noGrp="1" noRot="1" noChangeAspect="1" noMove="1" noResize="1" noEditPoints="1" noAdjustHandles="1" noChangeArrowheads="1" noChangeShapeType="1" noTextEdit="1"/>
+          </p:cNvSpPr>
+          <p:nvPr>
+            <p:extLst>
+              <p:ext uri="{386F3935-93C4-4BCD-93E2-E3B085C9AB24}">
+                <p16:designElem xmlns:p16="http://schemas.microsoft.com/office/powerpoint/2015/main" val="1"/>
+              </p:ext>
+            </p:extLst>
+          </p:nvPr>
+        </p:nvSpPr>
+        <p:spPr>
+          <a:xfrm>
+            <a:off x="0" y="0"/>
+            <a:ext cx="2013557" cy="6858000"/>
+          </a:xfrm>
+          <a:prstGeom prst="rect">
+            <a:avLst/>
+          </a:prstGeom>
+          <a:solidFill>
+            <a:srgbClr val="AD675B"/>
+          </a:solidFill>
+          <a:ln>
+            <a:noFill/>
+          </a:ln>
+        </p:spPr>
+        <p:style>
+          <a:lnRef idx="2">
+            <a:schemeClr val="accent1">
+              <a:shade val="50000"/>
+            </a:schemeClr>
+          </a:lnRef>
+          <a:fillRef idx="1">
+            <a:schemeClr val="accent1"/>
+          </a:fillRef>
+          <a:effectRef idx="0">
+            <a:schemeClr val="accent1"/>
+          </a:effectRef>
+          <a:fontRef idx="minor">
+            <a:schemeClr val="lt1"/>
+          </a:fontRef>
+        </p:style>
+        <p:txBody>
+          <a:bodyPr rtlCol="0" anchor="ctr"/>
+          <a:lstStyle/>
+          <a:p>
+            <a:pPr algn="ctr"/>
+            <a:endParaRPr lang="en-US"/>
+          </a:p>
+        </p:txBody>
+      </p:sp>
+      <p:sp>
+        <p:nvSpPr>
+          <p:cNvPr id="2" name="Title 1">
+            <a:extLst>
+              <a:ext uri="{FF2B5EF4-FFF2-40B4-BE49-F238E27FC236}">
+                <a16:creationId xmlns:a16="http://schemas.microsoft.com/office/drawing/2014/main" id="{896FC1C8-1C43-FB92-E60C-885A31315466}"/>
+              </a:ext>
+            </a:extLst>
+          </p:cNvPr>
+          <p:cNvSpPr>
+            <a:spLocks noGrp="1"/>
+          </p:cNvSpPr>
+          <p:nvPr>
+            <p:ph type="title"/>
+          </p:nvPr>
+        </p:nvSpPr>
+        <p:spPr>
+          <a:xfrm>
+            <a:off x="640080" y="2074363"/>
+            <a:ext cx="2752354" cy="2709275"/>
+          </a:xfrm>
+          <a:prstGeom prst="ellipse">
+            <a:avLst/>
+          </a:prstGeom>
+          <a:solidFill>
+            <a:srgbClr val="262626"/>
+          </a:solidFill>
+          <a:ln w="174625" cmpd="thinThick">
+            <a:solidFill>
+              <a:srgbClr val="262626"/>
+            </a:solidFill>
+          </a:ln>
+        </p:spPr>
+        <p:txBody>
+          <a:bodyPr vert="horz" lIns="91440" tIns="45720" rIns="91440" bIns="45720" rtlCol="0" anchor="ctr">
+            <a:normAutofit/>
+          </a:bodyPr>
+          <a:lstStyle/>
+          <a:p>
+            <a:pPr algn="ctr"/>
+            <a:r>
+              <a:rPr lang="en-US" sz="2200" kern="1200" dirty="0">
+                <a:solidFill>
+                  <a:srgbClr val="FFFFFF"/>
+                </a:solidFill>
+                <a:latin typeface="+mj-lt"/>
+                <a:ea typeface="+mj-ea"/>
+                <a:cs typeface="+mj-cs"/>
+              </a:rPr>
+              <a:t>Despite Performing Better, the Model Still Performed Poorly</a:t>
+            </a:r>
+          </a:p>
+        </p:txBody>
+      </p:sp>
+      <p:pic>
+        <p:nvPicPr>
+          <p:cNvPr id="5" name="Content Placeholder 4">
+            <a:extLst>
+              <a:ext uri="{FF2B5EF4-FFF2-40B4-BE49-F238E27FC236}">
+                <a16:creationId xmlns:a16="http://schemas.microsoft.com/office/drawing/2014/main" id="{026DB3CB-699D-9D5E-8272-BF83E89665E9}"/>
+              </a:ext>
+            </a:extLst>
+          </p:cNvPr>
+          <p:cNvPicPr>
+            <a:picLocks noGrp="1" noChangeAspect="1"/>
+          </p:cNvPicPr>
+          <p:nvPr>
+            <p:ph idx="1"/>
+          </p:nvPr>
+        </p:nvPicPr>
+        <p:blipFill>
+          <a:blip r:embed="rId2">
+            <a:extLst>
+              <a:ext uri="{28A0092B-C50C-407E-A947-70E740481C1C}">
+                <a14:useLocalDpi xmlns:a14="http://schemas.microsoft.com/office/drawing/2010/main" val="0"/>
+              </a:ext>
+            </a:extLst>
+          </a:blip>
+          <a:stretch>
+            <a:fillRect/>
+          </a:stretch>
+        </p:blipFill>
+        <p:spPr>
+          <a:xfrm>
+            <a:off x="4399266" y="961812"/>
+            <a:ext cx="6466866" cy="4930987"/>
+          </a:xfrm>
+          <a:prstGeom prst="rect">
+            <a:avLst/>
+          </a:prstGeom>
+        </p:spPr>
+      </p:pic>
+    </p:spTree>
+    <p:extLst>
+      <p:ext uri="{BB962C8B-B14F-4D97-AF65-F5344CB8AC3E}">
+        <p14:creationId xmlns:p14="http://schemas.microsoft.com/office/powerpoint/2010/main" val="3755968374"/>
+      </p:ext>
+    </p:extLst>
+  </p:cSld>
+  <p:clrMapOvr>
+    <a:masterClrMapping/>
+  </p:clrMapOvr>
+</p:sld>
+</file>
+
+<file path=ppt/slides/slide9.xml><?xml version="1.0" encoding="utf-8"?>
+<p:sld xmlns:a="http://schemas.openxmlformats.org/drawingml/2006/main" xmlns:r="http://schemas.openxmlformats.org/officeDocument/2006/relationships" xmlns:p="http://schemas.openxmlformats.org/presentationml/2006/main">
+  <p:cSld>
+    <p:bg>
+      <p:bgPr>
+        <a:solidFill>
+          <a:schemeClr val="bg1"/>
+        </a:solidFill>
+        <a:effectLst/>
+      </p:bgPr>
+    </p:bg>
+    <p:spTree>
+      <p:nvGrpSpPr>
+        <p:cNvPr id="1" name=""/>
+        <p:cNvGrpSpPr/>
+        <p:nvPr/>
+      </p:nvGrpSpPr>
+      <p:grpSpPr>
+        <a:xfrm>
+          <a:off x="0" y="0"/>
+          <a:ext cx="0" cy="0"/>
+          <a:chOff x="0" y="0"/>
+          <a:chExt cx="0" cy="0"/>
+        </a:xfrm>
+      </p:grpSpPr>
       <p:sp useBgFill="1">
         <p:nvSpPr>
           <p:cNvPr id="8" name="Rectangle 7">
@@ -18173,498 +22152,6 @@
 </p:sld>
 </file>
 
-<file path=ppt/slides/slide9.xml><?xml version="1.0" encoding="utf-8"?>
-<p:sld xmlns:a="http://schemas.openxmlformats.org/drawingml/2006/main" xmlns:r="http://schemas.openxmlformats.org/officeDocument/2006/relationships" xmlns:p="http://schemas.openxmlformats.org/presentationml/2006/main">
-  <p:cSld>
-    <p:bg>
-      <p:bgPr>
-        <a:solidFill>
-          <a:schemeClr val="bg1"/>
-        </a:solidFill>
-        <a:effectLst/>
-      </p:bgPr>
-    </p:bg>
-    <p:spTree>
-      <p:nvGrpSpPr>
-        <p:cNvPr id="1" name=""/>
-        <p:cNvGrpSpPr/>
-        <p:nvPr/>
-      </p:nvGrpSpPr>
-      <p:grpSpPr>
-        <a:xfrm>
-          <a:off x="0" y="0"/>
-          <a:ext cx="0" cy="0"/>
-          <a:chOff x="0" y="0"/>
-          <a:chExt cx="0" cy="0"/>
-        </a:xfrm>
-      </p:grpSpPr>
-      <p:sp useBgFill="1">
-        <p:nvSpPr>
-          <p:cNvPr id="10" name="Rectangle 9">
-            <a:extLst>
-              <a:ext uri="{FF2B5EF4-FFF2-40B4-BE49-F238E27FC236}">
-                <a16:creationId xmlns:a16="http://schemas.microsoft.com/office/drawing/2014/main" id="{743AA782-23D1-4521-8CAD-47662984AA08}"/>
-              </a:ext>
-              <a:ext uri="{C183D7F6-B498-43B3-948B-1728B52AA6E4}">
-                <adec:decorative xmlns:adec="http://schemas.microsoft.com/office/drawing/2017/decorative" val="1"/>
-              </a:ext>
-            </a:extLst>
-          </p:cNvPr>
-          <p:cNvSpPr>
-            <a:spLocks noGrp="1" noRot="1" noChangeAspect="1" noMove="1" noResize="1" noEditPoints="1" noAdjustHandles="1" noChangeArrowheads="1" noChangeShapeType="1" noTextEdit="1"/>
-          </p:cNvSpPr>
-          <p:nvPr>
-            <p:extLst>
-              <p:ext uri="{386F3935-93C4-4BCD-93E2-E3B085C9AB24}">
-                <p16:designElem xmlns:p16="http://schemas.microsoft.com/office/powerpoint/2015/main" val="1"/>
-              </p:ext>
-            </p:extLst>
-          </p:nvPr>
-        </p:nvSpPr>
-        <p:spPr>
-          <a:xfrm>
-            <a:off x="0" y="0"/>
-            <a:ext cx="12192000" cy="6858000"/>
-          </a:xfrm>
-          <a:prstGeom prst="rect">
-            <a:avLst/>
-          </a:prstGeom>
-          <a:ln>
-            <a:noFill/>
-          </a:ln>
-        </p:spPr>
-        <p:style>
-          <a:lnRef idx="2">
-            <a:schemeClr val="accent1">
-              <a:shade val="50000"/>
-            </a:schemeClr>
-          </a:lnRef>
-          <a:fillRef idx="1">
-            <a:schemeClr val="accent1"/>
-          </a:fillRef>
-          <a:effectRef idx="0">
-            <a:schemeClr val="accent1"/>
-          </a:effectRef>
-          <a:fontRef idx="minor">
-            <a:schemeClr val="lt1"/>
-          </a:fontRef>
-        </p:style>
-        <p:txBody>
-          <a:bodyPr rtlCol="0" anchor="ctr"/>
-          <a:lstStyle/>
-          <a:p>
-            <a:pPr algn="ctr"/>
-            <a:endParaRPr lang="en-US"/>
-          </a:p>
-        </p:txBody>
-      </p:sp>
-      <p:sp>
-        <p:nvSpPr>
-          <p:cNvPr id="2" name="Title 1">
-            <a:extLst>
-              <a:ext uri="{FF2B5EF4-FFF2-40B4-BE49-F238E27FC236}">
-                <a16:creationId xmlns:a16="http://schemas.microsoft.com/office/drawing/2014/main" id="{0E1231AA-D68E-5E3E-38D9-A11CFECCFD27}"/>
-              </a:ext>
-            </a:extLst>
-          </p:cNvPr>
-          <p:cNvSpPr>
-            <a:spLocks noGrp="1"/>
-          </p:cNvSpPr>
-          <p:nvPr>
-            <p:ph type="title"/>
-          </p:nvPr>
-        </p:nvSpPr>
-        <p:spPr>
-          <a:xfrm>
-            <a:off x="630936" y="640080"/>
-            <a:ext cx="4818888" cy="1481328"/>
-          </a:xfrm>
-        </p:spPr>
-        <p:txBody>
-          <a:bodyPr anchor="b">
-            <a:normAutofit/>
-          </a:bodyPr>
-          <a:lstStyle/>
-          <a:p>
-            <a:r>
-              <a:rPr lang="en-US" sz="5000"/>
-              <a:t>Feature Importance</a:t>
-            </a:r>
-          </a:p>
-        </p:txBody>
-      </p:sp>
-      <p:sp>
-        <p:nvSpPr>
-          <p:cNvPr id="12" name="sketch line">
-            <a:extLst>
-              <a:ext uri="{FF2B5EF4-FFF2-40B4-BE49-F238E27FC236}">
-                <a16:creationId xmlns:a16="http://schemas.microsoft.com/office/drawing/2014/main" id="{71877DBC-BB60-40F0-AC93-2ACDBAAE60CE}"/>
-              </a:ext>
-              <a:ext uri="{C183D7F6-B498-43B3-948B-1728B52AA6E4}">
-                <adec:decorative xmlns:adec="http://schemas.microsoft.com/office/drawing/2017/decorative" val="1"/>
-              </a:ext>
-            </a:extLst>
-          </p:cNvPr>
-          <p:cNvSpPr>
-            <a:spLocks noGrp="1" noRot="1" noChangeAspect="1" noMove="1" noResize="1" noEditPoints="1" noAdjustHandles="1" noChangeArrowheads="1" noChangeShapeType="1" noTextEdit="1"/>
-          </p:cNvSpPr>
-          <p:nvPr>
-            <p:extLst>
-              <p:ext uri="{386F3935-93C4-4BCD-93E2-E3B085C9AB24}">
-                <p16:designElem xmlns:p16="http://schemas.microsoft.com/office/powerpoint/2015/main" val="1"/>
-              </p:ext>
-            </p:extLst>
-          </p:nvPr>
-        </p:nvSpPr>
-        <p:spPr>
-          <a:xfrm>
-            <a:off x="643278" y="2372868"/>
-            <a:ext cx="3255095" cy="18288"/>
-          </a:xfrm>
-          <a:custGeom>
-            <a:avLst/>
-            <a:gdLst>
-              <a:gd name="csX0" fmla="*/ 0 w 3255095"/>
-              <a:gd name="csY0" fmla="*/ 0 h 18288"/>
-              <a:gd name="csX1" fmla="*/ 618468 w 3255095"/>
-              <a:gd name="csY1" fmla="*/ 0 h 18288"/>
-              <a:gd name="csX2" fmla="*/ 1269487 w 3255095"/>
-              <a:gd name="csY2" fmla="*/ 0 h 18288"/>
-              <a:gd name="csX3" fmla="*/ 1953057 w 3255095"/>
-              <a:gd name="csY3" fmla="*/ 0 h 18288"/>
-              <a:gd name="csX4" fmla="*/ 2636627 w 3255095"/>
-              <a:gd name="csY4" fmla="*/ 0 h 18288"/>
-              <a:gd name="csX5" fmla="*/ 3255095 w 3255095"/>
-              <a:gd name="csY5" fmla="*/ 0 h 18288"/>
-              <a:gd name="csX6" fmla="*/ 3255095 w 3255095"/>
-              <a:gd name="csY6" fmla="*/ 18288 h 18288"/>
-              <a:gd name="csX7" fmla="*/ 2538974 w 3255095"/>
-              <a:gd name="csY7" fmla="*/ 18288 h 18288"/>
-              <a:gd name="csX8" fmla="*/ 1822853 w 3255095"/>
-              <a:gd name="csY8" fmla="*/ 18288 h 18288"/>
-              <a:gd name="csX9" fmla="*/ 1171834 w 3255095"/>
-              <a:gd name="csY9" fmla="*/ 18288 h 18288"/>
-              <a:gd name="csX10" fmla="*/ 0 w 3255095"/>
-              <a:gd name="csY10" fmla="*/ 18288 h 18288"/>
-              <a:gd name="csX11" fmla="*/ 0 w 3255095"/>
-              <a:gd name="csY11" fmla="*/ 0 h 18288"/>
-            </a:gdLst>
-            <a:ahLst/>
-            <a:cxnLst>
-              <a:cxn ang="0">
-                <a:pos x="csX0" y="csY0"/>
-              </a:cxn>
-              <a:cxn ang="0">
-                <a:pos x="csX1" y="csY1"/>
-              </a:cxn>
-              <a:cxn ang="0">
-                <a:pos x="csX2" y="csY2"/>
-              </a:cxn>
-              <a:cxn ang="0">
-                <a:pos x="csX3" y="csY3"/>
-              </a:cxn>
-              <a:cxn ang="0">
-                <a:pos x="csX4" y="csY4"/>
-              </a:cxn>
-              <a:cxn ang="0">
-                <a:pos x="csX5" y="csY5"/>
-              </a:cxn>
-              <a:cxn ang="0">
-                <a:pos x="csX6" y="csY6"/>
-              </a:cxn>
-              <a:cxn ang="0">
-                <a:pos x="csX7" y="csY7"/>
-              </a:cxn>
-              <a:cxn ang="0">
-                <a:pos x="csX8" y="csY8"/>
-              </a:cxn>
-              <a:cxn ang="0">
-                <a:pos x="csX9" y="csY9"/>
-              </a:cxn>
-              <a:cxn ang="0">
-                <a:pos x="csX10" y="csY10"/>
-              </a:cxn>
-              <a:cxn ang="0">
-                <a:pos x="csX11" y="csY11"/>
-              </a:cxn>
-            </a:cxnLst>
-            <a:rect l="l" t="t" r="r" b="b"/>
-            <a:pathLst>
-              <a:path w="3255095" h="18288" fill="none" extrusionOk="0">
-                <a:moveTo>
-                  <a:pt x="0" y="0"/>
-                </a:moveTo>
-                <a:cubicBezTo>
-                  <a:pt x="240201" y="-22123"/>
-                  <a:pt x="462021" y="-19623"/>
-                  <a:pt x="618468" y="0"/>
-                </a:cubicBezTo>
-                <a:cubicBezTo>
-                  <a:pt x="774915" y="19623"/>
-                  <a:pt x="974734" y="2035"/>
-                  <a:pt x="1269487" y="0"/>
-                </a:cubicBezTo>
-                <a:cubicBezTo>
-                  <a:pt x="1564240" y="-2035"/>
-                  <a:pt x="1733579" y="10639"/>
-                  <a:pt x="1953057" y="0"/>
-                </a:cubicBezTo>
-                <a:cubicBezTo>
-                  <a:pt x="2172535" y="-10639"/>
-                  <a:pt x="2453962" y="14018"/>
-                  <a:pt x="2636627" y="0"/>
-                </a:cubicBezTo>
-                <a:cubicBezTo>
-                  <a:pt x="2819292" y="-14018"/>
-                  <a:pt x="3121375" y="5399"/>
-                  <a:pt x="3255095" y="0"/>
-                </a:cubicBezTo>
-                <a:cubicBezTo>
-                  <a:pt x="3254386" y="8157"/>
-                  <a:pt x="3254682" y="12125"/>
-                  <a:pt x="3255095" y="18288"/>
-                </a:cubicBezTo>
-                <a:cubicBezTo>
-                  <a:pt x="3088545" y="23203"/>
-                  <a:pt x="2687475" y="7419"/>
-                  <a:pt x="2538974" y="18288"/>
-                </a:cubicBezTo>
-                <a:cubicBezTo>
-                  <a:pt x="2390473" y="29157"/>
-                  <a:pt x="2137381" y="-8959"/>
-                  <a:pt x="1822853" y="18288"/>
-                </a:cubicBezTo>
-                <a:cubicBezTo>
-                  <a:pt x="1508325" y="45535"/>
-                  <a:pt x="1466437" y="20385"/>
-                  <a:pt x="1171834" y="18288"/>
-                </a:cubicBezTo>
-                <a:cubicBezTo>
-                  <a:pt x="877231" y="16191"/>
-                  <a:pt x="561097" y="37643"/>
-                  <a:pt x="0" y="18288"/>
-                </a:cubicBezTo>
-                <a:cubicBezTo>
-                  <a:pt x="-46" y="12483"/>
-                  <a:pt x="-203" y="6491"/>
-                  <a:pt x="0" y="0"/>
-                </a:cubicBezTo>
-                <a:close/>
-              </a:path>
-              <a:path w="3255095" h="18288" stroke="0" extrusionOk="0">
-                <a:moveTo>
-                  <a:pt x="0" y="0"/>
-                </a:moveTo>
-                <a:cubicBezTo>
-                  <a:pt x="291965" y="19429"/>
-                  <a:pt x="363155" y="8568"/>
-                  <a:pt x="618468" y="0"/>
-                </a:cubicBezTo>
-                <a:cubicBezTo>
-                  <a:pt x="873781" y="-8568"/>
-                  <a:pt x="904459" y="-19505"/>
-                  <a:pt x="1171834" y="0"/>
-                </a:cubicBezTo>
-                <a:cubicBezTo>
-                  <a:pt x="1439209" y="19505"/>
-                  <a:pt x="1744369" y="9790"/>
-                  <a:pt x="1887955" y="0"/>
-                </a:cubicBezTo>
-                <a:cubicBezTo>
-                  <a:pt x="2031541" y="-9790"/>
-                  <a:pt x="2346378" y="21240"/>
-                  <a:pt x="2506423" y="0"/>
-                </a:cubicBezTo>
-                <a:cubicBezTo>
-                  <a:pt x="2666468" y="-21240"/>
-                  <a:pt x="2990257" y="30414"/>
-                  <a:pt x="3255095" y="0"/>
-                </a:cubicBezTo>
-                <a:cubicBezTo>
-                  <a:pt x="3254831" y="4493"/>
-                  <a:pt x="3255479" y="9472"/>
-                  <a:pt x="3255095" y="18288"/>
-                </a:cubicBezTo>
-                <a:cubicBezTo>
-                  <a:pt x="3120743" y="16690"/>
-                  <a:pt x="2759628" y="42462"/>
-                  <a:pt x="2604076" y="18288"/>
-                </a:cubicBezTo>
-                <a:cubicBezTo>
-                  <a:pt x="2448524" y="-5886"/>
-                  <a:pt x="2184336" y="19599"/>
-                  <a:pt x="1887955" y="18288"/>
-                </a:cubicBezTo>
-                <a:cubicBezTo>
-                  <a:pt x="1591574" y="16977"/>
-                  <a:pt x="1548845" y="6870"/>
-                  <a:pt x="1334589" y="18288"/>
-                </a:cubicBezTo>
-                <a:cubicBezTo>
-                  <a:pt x="1120333" y="29706"/>
-                  <a:pt x="996014" y="9662"/>
-                  <a:pt x="683570" y="18288"/>
-                </a:cubicBezTo>
-                <a:cubicBezTo>
-                  <a:pt x="371126" y="26914"/>
-                  <a:pt x="198687" y="16167"/>
-                  <a:pt x="0" y="18288"/>
-                </a:cubicBezTo>
-                <a:cubicBezTo>
-                  <a:pt x="843" y="9577"/>
-                  <a:pt x="371" y="6900"/>
-                  <a:pt x="0" y="0"/>
-                </a:cubicBezTo>
-                <a:close/>
-              </a:path>
-            </a:pathLst>
-          </a:custGeom>
-          <a:solidFill>
-            <a:schemeClr val="accent2"/>
-          </a:solidFill>
-          <a:ln w="38100" cap="rnd">
-            <a:solidFill>
-              <a:schemeClr val="accent2"/>
-            </a:solidFill>
-            <a:round/>
-            <a:extLst>
-              <a:ext uri="{C807C97D-BFC1-408E-A445-0C87EB9F89A2}">
-                <ask:lineSketchStyleProps xmlns:ask="http://schemas.microsoft.com/office/drawing/2018/sketchyshapes" sd="1219033472">
-                  <a:prstGeom prst="rect">
-                    <a:avLst/>
-                  </a:prstGeom>
-                  <ask:type>
-                    <ask:lineSketchFreehand/>
-                  </ask:type>
-                </ask:lineSketchStyleProps>
-              </a:ext>
-            </a:extLst>
-          </a:ln>
-        </p:spPr>
-        <p:style>
-          <a:lnRef idx="2">
-            <a:schemeClr val="accent1">
-              <a:shade val="50000"/>
-            </a:schemeClr>
-          </a:lnRef>
-          <a:fillRef idx="1">
-            <a:schemeClr val="accent1"/>
-          </a:fillRef>
-          <a:effectRef idx="0">
-            <a:schemeClr val="accent1"/>
-          </a:effectRef>
-          <a:fontRef idx="minor">
-            <a:schemeClr val="lt1"/>
-          </a:fontRef>
-        </p:style>
-        <p:txBody>
-          <a:bodyPr rtlCol="0" anchor="ctr"/>
-          <a:lstStyle/>
-          <a:p>
-            <a:pPr algn="ctr"/>
-            <a:endParaRPr lang="en-US"/>
-          </a:p>
-        </p:txBody>
-      </p:sp>
-      <p:sp>
-        <p:nvSpPr>
-          <p:cNvPr id="3" name="Content Placeholder 2">
-            <a:extLst>
-              <a:ext uri="{FF2B5EF4-FFF2-40B4-BE49-F238E27FC236}">
-                <a16:creationId xmlns:a16="http://schemas.microsoft.com/office/drawing/2014/main" id="{5F2610FC-C8BD-1B28-5CF1-C94A6C57EF7E}"/>
-              </a:ext>
-            </a:extLst>
-          </p:cNvPr>
-          <p:cNvSpPr>
-            <a:spLocks noGrp="1"/>
-          </p:cNvSpPr>
-          <p:nvPr>
-            <p:ph idx="1"/>
-          </p:nvPr>
-        </p:nvSpPr>
-        <p:spPr>
-          <a:xfrm>
-            <a:off x="630936" y="2660904"/>
-            <a:ext cx="4818888" cy="3547872"/>
-          </a:xfrm>
-        </p:spPr>
-        <p:txBody>
-          <a:bodyPr anchor="t">
-            <a:normAutofit/>
-          </a:bodyPr>
-          <a:lstStyle/>
-          <a:p>
-            <a:pPr marL="0" indent="0">
-              <a:buNone/>
-            </a:pPr>
-            <a:r>
-              <a:rPr lang="en-US" sz="2200" dirty="0" err="1"/>
-              <a:t>Rank_vs_TourneyAvg</a:t>
-            </a:r>
-            <a:r>
-              <a:rPr lang="en-US" sz="2200" dirty="0"/>
-              <a:t> was our top predictor with </a:t>
-            </a:r>
-            <a:r>
-              <a:rPr lang="en-US" sz="2200" dirty="0" err="1"/>
-              <a:t>SeedNum</a:t>
-            </a:r>
-            <a:r>
-              <a:rPr lang="en-US" sz="2200" dirty="0"/>
-              <a:t> being a close second. Showing that although the teams seed number was low by the tournament committee their underlying Massey Ratings metric mathematically placed them above.</a:t>
-            </a:r>
-          </a:p>
-        </p:txBody>
-      </p:sp>
-      <p:pic>
-        <p:nvPicPr>
-          <p:cNvPr id="6" name="Picture 5">
-            <a:extLst>
-              <a:ext uri="{FF2B5EF4-FFF2-40B4-BE49-F238E27FC236}">
-                <a16:creationId xmlns:a16="http://schemas.microsoft.com/office/drawing/2014/main" id="{D02FCB11-0CC0-1720-5033-8A80D2267BD8}"/>
-              </a:ext>
-            </a:extLst>
-          </p:cNvPr>
-          <p:cNvPicPr>
-            <a:picLocks noChangeAspect="1"/>
-          </p:cNvPicPr>
-          <p:nvPr/>
-        </p:nvPicPr>
-        <p:blipFill>
-          <a:blip r:embed="rId2">
-            <a:extLst>
-              <a:ext uri="{28A0092B-C50C-407E-A947-70E740481C1C}">
-                <a14:useLocalDpi xmlns:a14="http://schemas.microsoft.com/office/drawing/2010/main" val="0"/>
-              </a:ext>
-            </a:extLst>
-          </a:blip>
-          <a:stretch>
-            <a:fillRect/>
-          </a:stretch>
-        </p:blipFill>
-        <p:spPr>
-          <a:xfrm>
-            <a:off x="5449824" y="1165092"/>
-            <a:ext cx="6253816" cy="4527815"/>
-          </a:xfrm>
-          <a:prstGeom prst="rect">
-            <a:avLst/>
-          </a:prstGeom>
-        </p:spPr>
-      </p:pic>
-    </p:spTree>
-    <p:extLst>
-      <p:ext uri="{BB962C8B-B14F-4D97-AF65-F5344CB8AC3E}">
-        <p14:creationId xmlns:p14="http://schemas.microsoft.com/office/powerpoint/2010/main" val="954167436"/>
-      </p:ext>
-    </p:extLst>
-  </p:cSld>
-  <p:clrMapOvr>
-    <a:masterClrMapping/>
-  </p:clrMapOvr>
-</p:sld>
-</file>
-
 <file path=ppt/theme/theme1.xml><?xml version="1.0" encoding="utf-8"?>
 <a:theme xmlns:a="http://schemas.openxmlformats.org/drawingml/2006/main" name="Office Theme">
   <a:themeElements>
